--- a/documents/HyunahKwon/design/designing/for_teammates/프로토타입_기획.pptx
+++ b/documents/HyunahKwon/design/designing/for_teammates/프로토타입_기획.pptx
@@ -6,7 +6,7 @@
     <p:sldMasterId id="2147483666" r:id="rId2"/>
   </p:sldMasterIdLst>
   <p:notesMasterIdLst>
-    <p:notesMasterId r:id="rId29"/>
+    <p:notesMasterId r:id="rId30"/>
   </p:notesMasterIdLst>
   <p:sldIdLst>
     <p:sldId id="256" r:id="rId3"/>
@@ -34,7 +34,8 @@
     <p:sldId id="290" r:id="rId25"/>
     <p:sldId id="297" r:id="rId26"/>
     <p:sldId id="263" r:id="rId27"/>
-    <p:sldId id="270" r:id="rId28"/>
+    <p:sldId id="305" r:id="rId28"/>
+    <p:sldId id="270" r:id="rId29"/>
   </p:sldIdLst>
   <p:sldSz cx="12192000" cy="6858000"/>
   <p:notesSz cx="6858000" cy="9144000"/>
@@ -857,7 +858,7 @@
           <a:p>
             <a:fld id="{63FD5073-3D75-4506-8C91-5119827B979E}" type="datetimeFigureOut">
               <a:rPr lang="ko-KR" altLang="en-US" smtClean="0"/>
-              <a:t>2026-09-25</a:t>
+              <a:t>2026-09-26</a:t>
             </a:fld>
             <a:endParaRPr lang="ko-KR" altLang="en-US"/>
           </a:p>
@@ -1132,7 +1133,7 @@
           <a:p>
             <a:fld id="{63FD5073-3D75-4506-8C91-5119827B979E}" type="datetimeFigureOut">
               <a:rPr lang="ko-KR" altLang="en-US" smtClean="0"/>
-              <a:t>2026-09-25</a:t>
+              <a:t>2026-09-26</a:t>
             </a:fld>
             <a:endParaRPr lang="ko-KR" altLang="en-US"/>
           </a:p>
@@ -1544,7 +1545,7 @@
           <a:p>
             <a:fld id="{63FD5073-3D75-4506-8C91-5119827B979E}" type="datetimeFigureOut">
               <a:rPr lang="ko-KR" altLang="en-US" smtClean="0"/>
-              <a:t>2026-09-25</a:t>
+              <a:t>2026-09-26</a:t>
             </a:fld>
             <a:endParaRPr lang="ko-KR" altLang="en-US"/>
           </a:p>
@@ -1855,7 +1856,7 @@
           <a:p>
             <a:fld id="{63FD5073-3D75-4506-8C91-5119827B979E}" type="datetimeFigureOut">
               <a:rPr lang="ko-KR" altLang="en-US" smtClean="0"/>
-              <a:t>2026-09-25</a:t>
+              <a:t>2026-09-26</a:t>
             </a:fld>
             <a:endParaRPr lang="ko-KR" altLang="en-US"/>
           </a:p>
@@ -2146,7 +2147,7 @@
           <a:p>
             <a:fld id="{63FD5073-3D75-4506-8C91-5119827B979E}" type="datetimeFigureOut">
               <a:rPr lang="ko-KR" altLang="en-US" smtClean="0"/>
-              <a:t>2026-09-25</a:t>
+              <a:t>2026-09-26</a:t>
             </a:fld>
             <a:endParaRPr lang="ko-KR" altLang="en-US"/>
           </a:p>
@@ -2344,7 +2345,7 @@
           <a:p>
             <a:fld id="{16C850D4-9086-4998-AA40-EC3A5E96598E}" type="datetime1">
               <a:rPr lang="en-US" altLang="ko-KR" smtClean="0"/>
-              <a:t>9/25/2026</a:t>
+              <a:t>9/26/2026</a:t>
             </a:fld>
             <a:endParaRPr lang="ko-KR" altLang="en-US"/>
           </a:p>
@@ -2651,7 +2652,7 @@
           <a:p>
             <a:fld id="{492E84DF-9BBC-4DFC-AB92-EB3DF1902948}" type="datetime1">
               <a:rPr lang="en-US" altLang="ko-KR" smtClean="0"/>
-              <a:t>9/25/2026</a:t>
+              <a:t>9/26/2026</a:t>
             </a:fld>
             <a:endParaRPr lang="ko-KR" altLang="en-US"/>
           </a:p>
@@ -2834,7 +2835,7 @@
           <a:p>
             <a:fld id="{4F7680CB-DB40-47CE-A8D2-A12CB1478785}" type="datetime1">
               <a:rPr lang="en-US" altLang="ko-KR" smtClean="0"/>
-              <a:t>9/25/2026</a:t>
+              <a:t>9/26/2026</a:t>
             </a:fld>
             <a:endParaRPr lang="ko-KR" altLang="en-US"/>
           </a:p>
@@ -3151,7 +3152,7 @@
           <a:p>
             <a:fld id="{63FD5073-3D75-4506-8C91-5119827B979E}" type="datetimeFigureOut">
               <a:rPr lang="ko-KR" altLang="en-US" smtClean="0"/>
-              <a:t>2026-09-25</a:t>
+              <a:t>2026-09-26</a:t>
             </a:fld>
             <a:endParaRPr lang="ko-KR" altLang="en-US"/>
           </a:p>
@@ -3392,7 +3393,7 @@
           <a:p>
             <a:fld id="{63FD5073-3D75-4506-8C91-5119827B979E}" type="datetimeFigureOut">
               <a:rPr lang="ko-KR" altLang="en-US" smtClean="0"/>
-              <a:t>2026-09-25</a:t>
+              <a:t>2026-09-26</a:t>
             </a:fld>
             <a:endParaRPr lang="ko-KR" altLang="en-US"/>
           </a:p>
@@ -3954,7 +3955,7 @@
           <a:p>
             <a:fld id="{46CA07D7-17C4-4932-A5CB-22BA65F5FC8D}" type="datetime1">
               <a:rPr lang="en-US" altLang="ko-KR" smtClean="0"/>
-              <a:t>9/25/2026</a:t>
+              <a:t>9/26/2026</a:t>
             </a:fld>
             <a:endParaRPr lang="ko-KR" altLang="en-US"/>
           </a:p>
@@ -4669,7 +4670,7 @@
           <a:p>
             <a:fld id="{492E84DF-9BBC-4DFC-AB92-EB3DF1902948}" type="datetime1">
               <a:rPr lang="en-US" altLang="ko-KR" smtClean="0"/>
-              <a:t>9/25/2026</a:t>
+              <a:t>9/26/2026</a:t>
             </a:fld>
             <a:endParaRPr lang="ko-KR" altLang="en-US"/>
           </a:p>
@@ -4825,6 +4826,14 @@
             </a:r>
             <a:r>
               <a:rPr lang="ko-KR" altLang="en-US" dirty="0"/>
+              <a:t>생물</a:t>
+            </a:r>
+            <a:r>
+              <a:rPr lang="en-US" altLang="ko-KR" dirty="0"/>
+              <a:t>_</a:t>
+            </a:r>
+            <a:r>
+              <a:rPr lang="ko-KR" altLang="en-US" dirty="0"/>
               <a:t>벌</a:t>
             </a:r>
           </a:p>
@@ -5056,7 +5065,7 @@
           <a:p>
             <a:fld id="{492E84DF-9BBC-4DFC-AB92-EB3DF1902948}" type="datetime1">
               <a:rPr lang="en-US" altLang="ko-KR" smtClean="0"/>
-              <a:t>9/25/2026</a:t>
+              <a:t>9/26/2026</a:t>
             </a:fld>
             <a:endParaRPr lang="ko-KR" altLang="en-US"/>
           </a:p>
@@ -5254,6 +5263,14 @@
               <a:rPr lang="ko-KR" altLang="en-US" dirty="0"/>
               <a:t>생물</a:t>
             </a:r>
+            <a:r>
+              <a:rPr lang="en-US" altLang="ko-KR" dirty="0"/>
+              <a:t>_</a:t>
+            </a:r>
+            <a:r>
+              <a:rPr lang="ko-KR" altLang="en-US" dirty="0"/>
+              <a:t>벌</a:t>
+            </a:r>
           </a:p>
         </p:txBody>
       </p:sp>
@@ -5357,7 +5374,7 @@
         </p:nvSpPr>
         <p:spPr>
           <a:xfrm>
-            <a:off x="7058821" y="2029088"/>
+            <a:off x="8036482" y="1774053"/>
             <a:ext cx="721259" cy="454245"/>
           </a:xfrm>
           <a:prstGeom prst="rect">
@@ -5756,7 +5773,7 @@
         <p:spPr>
           <a:xfrm>
             <a:off x="6451950" y="1911112"/>
-            <a:ext cx="606871" cy="345099"/>
+            <a:ext cx="1584532" cy="90064"/>
           </a:xfrm>
           <a:prstGeom prst="bentConnector3">
             <a:avLst>
@@ -6362,14 +6379,14 @@
         </p:nvCxnSpPr>
         <p:spPr>
           <a:xfrm flipH="1" flipV="1">
-            <a:off x="7058821" y="2256211"/>
-            <a:ext cx="3622373" cy="1186301"/>
+            <a:off x="8036482" y="2001176"/>
+            <a:ext cx="2644712" cy="1441336"/>
           </a:xfrm>
           <a:prstGeom prst="bentConnector5">
             <a:avLst>
-              <a:gd name="adj1" fmla="val -6311"/>
-              <a:gd name="adj2" fmla="val 54395"/>
-              <a:gd name="adj3" fmla="val 106311"/>
+              <a:gd name="adj1" fmla="val -8644"/>
+              <a:gd name="adj2" fmla="val 53617"/>
+              <a:gd name="adj3" fmla="val 108644"/>
             </a:avLst>
           </a:prstGeom>
           <a:ln>
@@ -12310,7 +12327,7 @@
           <a:p>
             <a:fld id="{492E84DF-9BBC-4DFC-AB92-EB3DF1902948}" type="datetime1">
               <a:rPr lang="en-US" altLang="ko-KR" smtClean="0"/>
-              <a:t>9/25/2026</a:t>
+              <a:t>9/26/2026</a:t>
             </a:fld>
             <a:endParaRPr lang="ko-KR" altLang="en-US"/>
           </a:p>
@@ -14832,7 +14849,7 @@
           <a:p>
             <a:fld id="{492E84DF-9BBC-4DFC-AB92-EB3DF1902948}" type="datetime1">
               <a:rPr lang="en-US" altLang="ko-KR" smtClean="0"/>
-              <a:t>9/25/2026</a:t>
+              <a:t>9/26/2026</a:t>
             </a:fld>
             <a:endParaRPr lang="ko-KR" altLang="en-US"/>
           </a:p>
@@ -15390,7 +15407,7 @@
           <a:p>
             <a:fld id="{492E84DF-9BBC-4DFC-AB92-EB3DF1902948}" type="datetime1">
               <a:rPr lang="en-US" altLang="ko-KR" smtClean="0"/>
-              <a:t>9/25/2026</a:t>
+              <a:t>9/26/2026</a:t>
             </a:fld>
             <a:endParaRPr lang="ko-KR" altLang="en-US"/>
           </a:p>
@@ -17389,7 +17406,7 @@
           <a:p>
             <a:fld id="{492E84DF-9BBC-4DFC-AB92-EB3DF1902948}" type="datetime1">
               <a:rPr lang="en-US" altLang="ko-KR" smtClean="0"/>
-              <a:t>9/25/2026</a:t>
+              <a:t>9/26/2026</a:t>
             </a:fld>
             <a:endParaRPr lang="ko-KR" altLang="en-US"/>
           </a:p>
@@ -18958,7 +18975,7 @@
           <a:p>
             <a:fld id="{492E84DF-9BBC-4DFC-AB92-EB3DF1902948}" type="datetime1">
               <a:rPr lang="en-US" altLang="ko-KR" smtClean="0"/>
-              <a:t>9/25/2026</a:t>
+              <a:t>9/26/2026</a:t>
             </a:fld>
             <a:endParaRPr lang="ko-KR" altLang="en-US"/>
           </a:p>
@@ -22338,7 +22355,7 @@
           <a:p>
             <a:fld id="{492E84DF-9BBC-4DFC-AB92-EB3DF1902948}" type="datetime1">
               <a:rPr lang="en-US" altLang="ko-KR" smtClean="0"/>
-              <a:t>9/25/2026</a:t>
+              <a:t>9/26/2026</a:t>
             </a:fld>
             <a:endParaRPr lang="ko-KR" altLang="en-US"/>
           </a:p>
@@ -25528,6 +25545,3590 @@
       </p:grpSpPr>
       <p:sp>
         <p:nvSpPr>
+          <p:cNvPr id="4" name="제목 3">
+            <a:extLst>
+              <a:ext uri="{FF2B5EF4-FFF2-40B4-BE49-F238E27FC236}">
+                <a16:creationId xmlns:a16="http://schemas.microsoft.com/office/drawing/2014/main" id="{AB06394E-FBD1-88EC-C748-61486B9B012A}"/>
+              </a:ext>
+            </a:extLst>
+          </p:cNvPr>
+          <p:cNvSpPr>
+            <a:spLocks noGrp="1"/>
+          </p:cNvSpPr>
+          <p:nvPr>
+            <p:ph type="title"/>
+          </p:nvPr>
+        </p:nvSpPr>
+        <p:spPr/>
+        <p:txBody>
+          <a:bodyPr/>
+          <a:lstStyle/>
+          <a:p>
+            <a:endParaRPr lang="ko-KR" altLang="en-US"/>
+          </a:p>
+        </p:txBody>
+      </p:sp>
+      <p:sp>
+        <p:nvSpPr>
+          <p:cNvPr id="5" name="내용 개체 틀 4">
+            <a:extLst>
+              <a:ext uri="{FF2B5EF4-FFF2-40B4-BE49-F238E27FC236}">
+                <a16:creationId xmlns:a16="http://schemas.microsoft.com/office/drawing/2014/main" id="{BC48EEFC-D0E8-6F3B-E73E-D7EB99B584FF}"/>
+              </a:ext>
+            </a:extLst>
+          </p:cNvPr>
+          <p:cNvSpPr>
+            <a:spLocks noGrp="1"/>
+          </p:cNvSpPr>
+          <p:nvPr>
+            <p:ph idx="1"/>
+          </p:nvPr>
+        </p:nvSpPr>
+        <p:spPr/>
+        <p:txBody>
+          <a:bodyPr/>
+          <a:lstStyle/>
+          <a:p>
+            <a:endParaRPr lang="ko-KR" altLang="en-US"/>
+          </a:p>
+        </p:txBody>
+      </p:sp>
+      <p:sp>
+        <p:nvSpPr>
+          <p:cNvPr id="6" name="내용 개체 틀 5">
+            <a:extLst>
+              <a:ext uri="{FF2B5EF4-FFF2-40B4-BE49-F238E27FC236}">
+                <a16:creationId xmlns:a16="http://schemas.microsoft.com/office/drawing/2014/main" id="{83F58A6C-6834-A11D-D20C-98B18CBEDD14}"/>
+              </a:ext>
+            </a:extLst>
+          </p:cNvPr>
+          <p:cNvSpPr>
+            <a:spLocks noGrp="1"/>
+          </p:cNvSpPr>
+          <p:nvPr>
+            <p:ph sz="quarter" idx="13"/>
+          </p:nvPr>
+        </p:nvSpPr>
+        <p:spPr/>
+        <p:txBody>
+          <a:bodyPr/>
+          <a:lstStyle/>
+          <a:p>
+            <a:endParaRPr lang="ko-KR" altLang="en-US"/>
+          </a:p>
+        </p:txBody>
+      </p:sp>
+      <p:sp>
+        <p:nvSpPr>
+          <p:cNvPr id="8" name="타원 7">
+            <a:extLst>
+              <a:ext uri="{FF2B5EF4-FFF2-40B4-BE49-F238E27FC236}">
+                <a16:creationId xmlns:a16="http://schemas.microsoft.com/office/drawing/2014/main" id="{23C9947D-7B6B-15C5-6DAF-05C5DA6D34AB}"/>
+              </a:ext>
+            </a:extLst>
+          </p:cNvPr>
+          <p:cNvSpPr/>
+          <p:nvPr/>
+        </p:nvSpPr>
+        <p:spPr>
+          <a:xfrm rot="20292011">
+            <a:off x="2244725" y="4510279"/>
+            <a:ext cx="288007" cy="188618"/>
+          </a:xfrm>
+          <a:prstGeom prst="ellipse">
+            <a:avLst/>
+          </a:prstGeom>
+          <a:noFill/>
+          <a:ln>
+            <a:solidFill>
+              <a:schemeClr val="tx1"/>
+            </a:solidFill>
+          </a:ln>
+        </p:spPr>
+        <p:style>
+          <a:lnRef idx="2">
+            <a:schemeClr val="accent1">
+              <a:shade val="15000"/>
+            </a:schemeClr>
+          </a:lnRef>
+          <a:fillRef idx="1">
+            <a:schemeClr val="accent1"/>
+          </a:fillRef>
+          <a:effectRef idx="0">
+            <a:schemeClr val="accent1"/>
+          </a:effectRef>
+          <a:fontRef idx="minor">
+            <a:schemeClr val="lt1"/>
+          </a:fontRef>
+        </p:style>
+        <p:txBody>
+          <a:bodyPr rtlCol="0" anchor="ctr"/>
+          <a:lstStyle/>
+          <a:p>
+            <a:pPr algn="ctr"/>
+            <a:endParaRPr lang="ko-KR" altLang="en-US"/>
+          </a:p>
+        </p:txBody>
+      </p:sp>
+      <p:sp>
+        <p:nvSpPr>
+          <p:cNvPr id="10" name="자유형: 도형 9">
+            <a:extLst>
+              <a:ext uri="{FF2B5EF4-FFF2-40B4-BE49-F238E27FC236}">
+                <a16:creationId xmlns:a16="http://schemas.microsoft.com/office/drawing/2014/main" id="{4BD287AA-CA3F-AE90-D812-A36C5F78267A}"/>
+              </a:ext>
+            </a:extLst>
+          </p:cNvPr>
+          <p:cNvSpPr/>
+          <p:nvPr/>
+        </p:nvSpPr>
+        <p:spPr>
+          <a:xfrm>
+            <a:off x="2133595" y="4362418"/>
+            <a:ext cx="552450" cy="557453"/>
+          </a:xfrm>
+          <a:custGeom>
+            <a:avLst/>
+            <a:gdLst>
+              <a:gd name="csX0" fmla="*/ 261937 w 552450"/>
+              <a:gd name="csY0" fmla="*/ 32 h 557453"/>
+              <a:gd name="csX1" fmla="*/ 233362 w 552450"/>
+              <a:gd name="csY1" fmla="*/ 19082 h 557453"/>
+              <a:gd name="csX2" fmla="*/ 190500 w 552450"/>
+              <a:gd name="csY2" fmla="*/ 38132 h 557453"/>
+              <a:gd name="csX3" fmla="*/ 104775 w 552450"/>
+              <a:gd name="csY3" fmla="*/ 90520 h 557453"/>
+              <a:gd name="csX4" fmla="*/ 85725 w 552450"/>
+              <a:gd name="csY4" fmla="*/ 119095 h 557453"/>
+              <a:gd name="csX5" fmla="*/ 42862 w 552450"/>
+              <a:gd name="csY5" fmla="*/ 171482 h 557453"/>
+              <a:gd name="csX6" fmla="*/ 19050 w 552450"/>
+              <a:gd name="csY6" fmla="*/ 228632 h 557453"/>
+              <a:gd name="csX7" fmla="*/ 14287 w 552450"/>
+              <a:gd name="csY7" fmla="*/ 247682 h 557453"/>
+              <a:gd name="csX8" fmla="*/ 0 w 552450"/>
+              <a:gd name="csY8" fmla="*/ 295307 h 557453"/>
+              <a:gd name="csX9" fmla="*/ 19050 w 552450"/>
+              <a:gd name="csY9" fmla="*/ 376270 h 557453"/>
+              <a:gd name="csX10" fmla="*/ 47625 w 552450"/>
+              <a:gd name="csY10" fmla="*/ 400082 h 557453"/>
+              <a:gd name="csX11" fmla="*/ 104775 w 552450"/>
+              <a:gd name="csY11" fmla="*/ 447707 h 557453"/>
+              <a:gd name="csX12" fmla="*/ 133350 w 552450"/>
+              <a:gd name="csY12" fmla="*/ 452470 h 557453"/>
+              <a:gd name="csX13" fmla="*/ 242887 w 552450"/>
+              <a:gd name="csY13" fmla="*/ 509620 h 557453"/>
+              <a:gd name="csX14" fmla="*/ 266700 w 552450"/>
+              <a:gd name="csY14" fmla="*/ 519145 h 557453"/>
+              <a:gd name="csX15" fmla="*/ 295275 w 552450"/>
+              <a:gd name="csY15" fmla="*/ 523907 h 557453"/>
+              <a:gd name="csX16" fmla="*/ 352425 w 552450"/>
+              <a:gd name="csY16" fmla="*/ 557245 h 557453"/>
+              <a:gd name="csX17" fmla="*/ 400050 w 552450"/>
+              <a:gd name="csY17" fmla="*/ 528670 h 557453"/>
+              <a:gd name="csX18" fmla="*/ 481012 w 552450"/>
+              <a:gd name="csY18" fmla="*/ 395320 h 557453"/>
+              <a:gd name="csX19" fmla="*/ 500062 w 552450"/>
+              <a:gd name="csY19" fmla="*/ 381032 h 557453"/>
+              <a:gd name="csX20" fmla="*/ 519112 w 552450"/>
+              <a:gd name="csY20" fmla="*/ 333407 h 557453"/>
+              <a:gd name="csX21" fmla="*/ 523875 w 552450"/>
+              <a:gd name="csY21" fmla="*/ 309595 h 557453"/>
+              <a:gd name="csX22" fmla="*/ 552450 w 552450"/>
+              <a:gd name="csY22" fmla="*/ 200057 h 557453"/>
+              <a:gd name="csX23" fmla="*/ 528637 w 552450"/>
+              <a:gd name="csY23" fmla="*/ 100045 h 557453"/>
+              <a:gd name="csX24" fmla="*/ 457200 w 552450"/>
+              <a:gd name="csY24" fmla="*/ 95282 h 557453"/>
+              <a:gd name="csX25" fmla="*/ 414337 w 552450"/>
+              <a:gd name="csY25" fmla="*/ 80995 h 557453"/>
+              <a:gd name="csX26" fmla="*/ 395287 w 552450"/>
+              <a:gd name="csY26" fmla="*/ 71470 h 557453"/>
+              <a:gd name="csX27" fmla="*/ 352425 w 552450"/>
+              <a:gd name="csY27" fmla="*/ 66707 h 557453"/>
+              <a:gd name="csX28" fmla="*/ 347662 w 552450"/>
+              <a:gd name="csY28" fmla="*/ 52420 h 557453"/>
+              <a:gd name="csX29" fmla="*/ 300037 w 552450"/>
+              <a:gd name="csY29" fmla="*/ 28607 h 557453"/>
+              <a:gd name="csX30" fmla="*/ 276225 w 552450"/>
+              <a:gd name="csY30" fmla="*/ 14320 h 557453"/>
+              <a:gd name="csX31" fmla="*/ 261937 w 552450"/>
+              <a:gd name="csY31" fmla="*/ 32 h 557453"/>
+            </a:gdLst>
+            <a:ahLst/>
+            <a:cxnLst>
+              <a:cxn ang="0">
+                <a:pos x="csX0" y="csY0"/>
+              </a:cxn>
+              <a:cxn ang="0">
+                <a:pos x="csX1" y="csY1"/>
+              </a:cxn>
+              <a:cxn ang="0">
+                <a:pos x="csX2" y="csY2"/>
+              </a:cxn>
+              <a:cxn ang="0">
+                <a:pos x="csX3" y="csY3"/>
+              </a:cxn>
+              <a:cxn ang="0">
+                <a:pos x="csX4" y="csY4"/>
+              </a:cxn>
+              <a:cxn ang="0">
+                <a:pos x="csX5" y="csY5"/>
+              </a:cxn>
+              <a:cxn ang="0">
+                <a:pos x="csX6" y="csY6"/>
+              </a:cxn>
+              <a:cxn ang="0">
+                <a:pos x="csX7" y="csY7"/>
+              </a:cxn>
+              <a:cxn ang="0">
+                <a:pos x="csX8" y="csY8"/>
+              </a:cxn>
+              <a:cxn ang="0">
+                <a:pos x="csX9" y="csY9"/>
+              </a:cxn>
+              <a:cxn ang="0">
+                <a:pos x="csX10" y="csY10"/>
+              </a:cxn>
+              <a:cxn ang="0">
+                <a:pos x="csX11" y="csY11"/>
+              </a:cxn>
+              <a:cxn ang="0">
+                <a:pos x="csX12" y="csY12"/>
+              </a:cxn>
+              <a:cxn ang="0">
+                <a:pos x="csX13" y="csY13"/>
+              </a:cxn>
+              <a:cxn ang="0">
+                <a:pos x="csX14" y="csY14"/>
+              </a:cxn>
+              <a:cxn ang="0">
+                <a:pos x="csX15" y="csY15"/>
+              </a:cxn>
+              <a:cxn ang="0">
+                <a:pos x="csX16" y="csY16"/>
+              </a:cxn>
+              <a:cxn ang="0">
+                <a:pos x="csX17" y="csY17"/>
+              </a:cxn>
+              <a:cxn ang="0">
+                <a:pos x="csX18" y="csY18"/>
+              </a:cxn>
+              <a:cxn ang="0">
+                <a:pos x="csX19" y="csY19"/>
+              </a:cxn>
+              <a:cxn ang="0">
+                <a:pos x="csX20" y="csY20"/>
+              </a:cxn>
+              <a:cxn ang="0">
+                <a:pos x="csX21" y="csY21"/>
+              </a:cxn>
+              <a:cxn ang="0">
+                <a:pos x="csX22" y="csY22"/>
+              </a:cxn>
+              <a:cxn ang="0">
+                <a:pos x="csX23" y="csY23"/>
+              </a:cxn>
+              <a:cxn ang="0">
+                <a:pos x="csX24" y="csY24"/>
+              </a:cxn>
+              <a:cxn ang="0">
+                <a:pos x="csX25" y="csY25"/>
+              </a:cxn>
+              <a:cxn ang="0">
+                <a:pos x="csX26" y="csY26"/>
+              </a:cxn>
+              <a:cxn ang="0">
+                <a:pos x="csX27" y="csY27"/>
+              </a:cxn>
+              <a:cxn ang="0">
+                <a:pos x="csX28" y="csY28"/>
+              </a:cxn>
+              <a:cxn ang="0">
+                <a:pos x="csX29" y="csY29"/>
+              </a:cxn>
+              <a:cxn ang="0">
+                <a:pos x="csX30" y="csY30"/>
+              </a:cxn>
+              <a:cxn ang="0">
+                <a:pos x="csX31" y="csY31"/>
+              </a:cxn>
+            </a:cxnLst>
+            <a:rect l="l" t="t" r="r" b="b"/>
+            <a:pathLst>
+              <a:path w="552450" h="557453">
+                <a:moveTo>
+                  <a:pt x="261937" y="32"/>
+                </a:moveTo>
+                <a:cubicBezTo>
+                  <a:pt x="254793" y="826"/>
+                  <a:pt x="243463" y="13695"/>
+                  <a:pt x="233362" y="19082"/>
+                </a:cubicBezTo>
+                <a:cubicBezTo>
+                  <a:pt x="219567" y="26440"/>
+                  <a:pt x="203960" y="30178"/>
+                  <a:pt x="190500" y="38132"/>
+                </a:cubicBezTo>
+                <a:cubicBezTo>
+                  <a:pt x="84941" y="100508"/>
+                  <a:pt x="164364" y="66684"/>
+                  <a:pt x="104775" y="90520"/>
+                </a:cubicBezTo>
+                <a:cubicBezTo>
+                  <a:pt x="98425" y="100045"/>
+                  <a:pt x="93175" y="110403"/>
+                  <a:pt x="85725" y="119095"/>
+                </a:cubicBezTo>
+                <a:cubicBezTo>
+                  <a:pt x="51984" y="158459"/>
+                  <a:pt x="65932" y="140723"/>
+                  <a:pt x="42862" y="171482"/>
+                </a:cubicBezTo>
+                <a:cubicBezTo>
+                  <a:pt x="19007" y="254977"/>
+                  <a:pt x="48724" y="161867"/>
+                  <a:pt x="19050" y="228632"/>
+                </a:cubicBezTo>
+                <a:cubicBezTo>
+                  <a:pt x="16392" y="234613"/>
+                  <a:pt x="16168" y="241413"/>
+                  <a:pt x="14287" y="247682"/>
+                </a:cubicBezTo>
+                <a:cubicBezTo>
+                  <a:pt x="-3099" y="305632"/>
+                  <a:pt x="10972" y="251415"/>
+                  <a:pt x="0" y="295307"/>
+                </a:cubicBezTo>
+                <a:cubicBezTo>
+                  <a:pt x="6350" y="322295"/>
+                  <a:pt x="7577" y="351030"/>
+                  <a:pt x="19050" y="376270"/>
+                </a:cubicBezTo>
+                <a:cubicBezTo>
+                  <a:pt x="24181" y="387557"/>
+                  <a:pt x="38358" y="391845"/>
+                  <a:pt x="47625" y="400082"/>
+                </a:cubicBezTo>
+                <a:cubicBezTo>
+                  <a:pt x="63711" y="414381"/>
+                  <a:pt x="86156" y="444604"/>
+                  <a:pt x="104775" y="447707"/>
+                </a:cubicBezTo>
+                <a:lnTo>
+                  <a:pt x="133350" y="452470"/>
+                </a:lnTo>
+                <a:cubicBezTo>
+                  <a:pt x="193418" y="488511"/>
+                  <a:pt x="172818" y="478478"/>
+                  <a:pt x="242887" y="509620"/>
+                </a:cubicBezTo>
+                <a:cubicBezTo>
+                  <a:pt x="250699" y="513092"/>
+                  <a:pt x="258452" y="516896"/>
+                  <a:pt x="266700" y="519145"/>
+                </a:cubicBezTo>
+                <a:cubicBezTo>
+                  <a:pt x="276016" y="521686"/>
+                  <a:pt x="285750" y="522320"/>
+                  <a:pt x="295275" y="523907"/>
+                </a:cubicBezTo>
+                <a:cubicBezTo>
+                  <a:pt x="306294" y="532722"/>
+                  <a:pt x="336190" y="560110"/>
+                  <a:pt x="352425" y="557245"/>
+                </a:cubicBezTo>
+                <a:cubicBezTo>
+                  <a:pt x="370657" y="554028"/>
+                  <a:pt x="384175" y="538195"/>
+                  <a:pt x="400050" y="528670"/>
+                </a:cubicBezTo>
+                <a:cubicBezTo>
+                  <a:pt x="405720" y="518876"/>
+                  <a:pt x="460359" y="420104"/>
+                  <a:pt x="481012" y="395320"/>
+                </a:cubicBezTo>
+                <a:cubicBezTo>
+                  <a:pt x="486094" y="389222"/>
+                  <a:pt x="493712" y="385795"/>
+                  <a:pt x="500062" y="381032"/>
+                </a:cubicBezTo>
+                <a:cubicBezTo>
+                  <a:pt x="513758" y="326255"/>
+                  <a:pt x="491567" y="409154"/>
+                  <a:pt x="519112" y="333407"/>
+                </a:cubicBezTo>
+                <a:cubicBezTo>
+                  <a:pt x="521878" y="325800"/>
+                  <a:pt x="522119" y="317497"/>
+                  <a:pt x="523875" y="309595"/>
+                </a:cubicBezTo>
+                <a:cubicBezTo>
+                  <a:pt x="539318" y="240100"/>
+                  <a:pt x="534087" y="261265"/>
+                  <a:pt x="552450" y="200057"/>
+                </a:cubicBezTo>
+                <a:cubicBezTo>
+                  <a:pt x="544512" y="166720"/>
+                  <a:pt x="551689" y="125402"/>
+                  <a:pt x="528637" y="100045"/>
+                </a:cubicBezTo>
+                <a:cubicBezTo>
+                  <a:pt x="512584" y="82386"/>
+                  <a:pt x="480740" y="99205"/>
+                  <a:pt x="457200" y="95282"/>
+                </a:cubicBezTo>
+                <a:cubicBezTo>
+                  <a:pt x="442344" y="92806"/>
+                  <a:pt x="428394" y="86401"/>
+                  <a:pt x="414337" y="80995"/>
+                </a:cubicBezTo>
+                <a:cubicBezTo>
+                  <a:pt x="407711" y="78446"/>
+                  <a:pt x="402205" y="73066"/>
+                  <a:pt x="395287" y="71470"/>
+                </a:cubicBezTo>
+                <a:cubicBezTo>
+                  <a:pt x="381280" y="68237"/>
+                  <a:pt x="366712" y="68295"/>
+                  <a:pt x="352425" y="66707"/>
+                </a:cubicBezTo>
+                <a:cubicBezTo>
+                  <a:pt x="350837" y="61945"/>
+                  <a:pt x="351722" y="55373"/>
+                  <a:pt x="347662" y="52420"/>
+                </a:cubicBezTo>
+                <a:cubicBezTo>
+                  <a:pt x="333308" y="41981"/>
+                  <a:pt x="315257" y="37739"/>
+                  <a:pt x="300037" y="28607"/>
+                </a:cubicBezTo>
+                <a:cubicBezTo>
+                  <a:pt x="292100" y="23845"/>
+                  <a:pt x="284733" y="17966"/>
+                  <a:pt x="276225" y="14320"/>
+                </a:cubicBezTo>
+                <a:cubicBezTo>
+                  <a:pt x="273307" y="13069"/>
+                  <a:pt x="269081" y="-762"/>
+                  <a:pt x="261937" y="32"/>
+                </a:cubicBezTo>
+                <a:close/>
+              </a:path>
+            </a:pathLst>
+          </a:custGeom>
+          <a:noFill/>
+          <a:ln>
+            <a:solidFill>
+              <a:schemeClr val="tx1"/>
+            </a:solidFill>
+          </a:ln>
+        </p:spPr>
+        <p:style>
+          <a:lnRef idx="2">
+            <a:schemeClr val="accent1">
+              <a:shade val="15000"/>
+            </a:schemeClr>
+          </a:lnRef>
+          <a:fillRef idx="1">
+            <a:schemeClr val="accent1"/>
+          </a:fillRef>
+          <a:effectRef idx="0">
+            <a:schemeClr val="accent1"/>
+          </a:effectRef>
+          <a:fontRef idx="minor">
+            <a:schemeClr val="lt1"/>
+          </a:fontRef>
+        </p:style>
+        <p:txBody>
+          <a:bodyPr rtlCol="0" anchor="ctr"/>
+          <a:lstStyle/>
+          <a:p>
+            <a:pPr algn="ctr"/>
+            <a:endParaRPr lang="ko-KR" altLang="en-US"/>
+          </a:p>
+        </p:txBody>
+      </p:sp>
+      <p:sp>
+        <p:nvSpPr>
+          <p:cNvPr id="12" name="자유형: 도형 11">
+            <a:extLst>
+              <a:ext uri="{FF2B5EF4-FFF2-40B4-BE49-F238E27FC236}">
+                <a16:creationId xmlns:a16="http://schemas.microsoft.com/office/drawing/2014/main" id="{14DD3935-5F3D-803F-BCAE-F7745B85FF85}"/>
+              </a:ext>
+            </a:extLst>
+          </p:cNvPr>
+          <p:cNvSpPr/>
+          <p:nvPr/>
+        </p:nvSpPr>
+        <p:spPr>
+          <a:xfrm>
+            <a:off x="1913224" y="4281488"/>
+            <a:ext cx="1066772" cy="780555"/>
+          </a:xfrm>
+          <a:custGeom>
+            <a:avLst/>
+            <a:gdLst>
+              <a:gd name="csX0" fmla="*/ 77496 w 1066772"/>
+              <a:gd name="csY0" fmla="*/ 128587 h 780555"/>
+              <a:gd name="csX1" fmla="*/ 120358 w 1066772"/>
+              <a:gd name="csY1" fmla="*/ 114300 h 780555"/>
+              <a:gd name="csX2" fmla="*/ 267996 w 1066772"/>
+              <a:gd name="csY2" fmla="*/ 52387 h 780555"/>
+              <a:gd name="csX3" fmla="*/ 377533 w 1066772"/>
+              <a:gd name="csY3" fmla="*/ 19050 h 780555"/>
+              <a:gd name="csX4" fmla="*/ 439446 w 1066772"/>
+              <a:gd name="csY4" fmla="*/ 0 h 780555"/>
+              <a:gd name="csX5" fmla="*/ 710908 w 1066772"/>
+              <a:gd name="csY5" fmla="*/ 9525 h 780555"/>
+              <a:gd name="csX6" fmla="*/ 801396 w 1066772"/>
+              <a:gd name="csY6" fmla="*/ 38100 h 780555"/>
+              <a:gd name="csX7" fmla="*/ 849021 w 1066772"/>
+              <a:gd name="csY7" fmla="*/ 71437 h 780555"/>
+              <a:gd name="csX8" fmla="*/ 953796 w 1066772"/>
+              <a:gd name="csY8" fmla="*/ 161925 h 780555"/>
+              <a:gd name="csX9" fmla="*/ 987133 w 1066772"/>
+              <a:gd name="csY9" fmla="*/ 200025 h 780555"/>
+              <a:gd name="csX10" fmla="*/ 1053808 w 1066772"/>
+              <a:gd name="csY10" fmla="*/ 309562 h 780555"/>
+              <a:gd name="csX11" fmla="*/ 1039521 w 1066772"/>
+              <a:gd name="csY11" fmla="*/ 523875 h 780555"/>
+              <a:gd name="csX12" fmla="*/ 944271 w 1066772"/>
+              <a:gd name="csY12" fmla="*/ 628650 h 780555"/>
+              <a:gd name="csX13" fmla="*/ 853783 w 1066772"/>
+              <a:gd name="csY13" fmla="*/ 666750 h 780555"/>
+              <a:gd name="csX14" fmla="*/ 829971 w 1066772"/>
+              <a:gd name="csY14" fmla="*/ 681037 h 780555"/>
+              <a:gd name="csX15" fmla="*/ 787108 w 1066772"/>
+              <a:gd name="csY15" fmla="*/ 695325 h 780555"/>
+              <a:gd name="csX16" fmla="*/ 749008 w 1066772"/>
+              <a:gd name="csY16" fmla="*/ 709612 h 780555"/>
+              <a:gd name="csX17" fmla="*/ 706146 w 1066772"/>
+              <a:gd name="csY17" fmla="*/ 728662 h 780555"/>
+              <a:gd name="csX18" fmla="*/ 658521 w 1066772"/>
+              <a:gd name="csY18" fmla="*/ 757237 h 780555"/>
+              <a:gd name="csX19" fmla="*/ 620421 w 1066772"/>
+              <a:gd name="csY19" fmla="*/ 762000 h 780555"/>
+              <a:gd name="csX20" fmla="*/ 348958 w 1066772"/>
+              <a:gd name="csY20" fmla="*/ 757237 h 780555"/>
+              <a:gd name="csX21" fmla="*/ 291808 w 1066772"/>
+              <a:gd name="csY21" fmla="*/ 733425 h 780555"/>
+              <a:gd name="csX22" fmla="*/ 172746 w 1066772"/>
+              <a:gd name="csY22" fmla="*/ 609600 h 780555"/>
+              <a:gd name="csX23" fmla="*/ 120358 w 1066772"/>
+              <a:gd name="csY23" fmla="*/ 547687 h 780555"/>
+              <a:gd name="csX24" fmla="*/ 96546 w 1066772"/>
+              <a:gd name="csY24" fmla="*/ 504825 h 780555"/>
+              <a:gd name="csX25" fmla="*/ 58446 w 1066772"/>
+              <a:gd name="csY25" fmla="*/ 414337 h 780555"/>
+              <a:gd name="csX26" fmla="*/ 44158 w 1066772"/>
+              <a:gd name="csY26" fmla="*/ 395287 h 780555"/>
+              <a:gd name="csX27" fmla="*/ 25108 w 1066772"/>
+              <a:gd name="csY27" fmla="*/ 357187 h 780555"/>
+              <a:gd name="csX28" fmla="*/ 6058 w 1066772"/>
+              <a:gd name="csY28" fmla="*/ 323850 h 780555"/>
+              <a:gd name="csX29" fmla="*/ 6058 w 1066772"/>
+              <a:gd name="csY29" fmla="*/ 209550 h 780555"/>
+              <a:gd name="csX30" fmla="*/ 20346 w 1066772"/>
+              <a:gd name="csY30" fmla="*/ 190500 h 780555"/>
+              <a:gd name="csX31" fmla="*/ 72733 w 1066772"/>
+              <a:gd name="csY31" fmla="*/ 171450 h 780555"/>
+              <a:gd name="csX32" fmla="*/ 87021 w 1066772"/>
+              <a:gd name="csY32" fmla="*/ 161925 h 780555"/>
+              <a:gd name="csX33" fmla="*/ 77496 w 1066772"/>
+              <a:gd name="csY33" fmla="*/ 128587 h 780555"/>
+            </a:gdLst>
+            <a:ahLst/>
+            <a:cxnLst>
+              <a:cxn ang="0">
+                <a:pos x="csX0" y="csY0"/>
+              </a:cxn>
+              <a:cxn ang="0">
+                <a:pos x="csX1" y="csY1"/>
+              </a:cxn>
+              <a:cxn ang="0">
+                <a:pos x="csX2" y="csY2"/>
+              </a:cxn>
+              <a:cxn ang="0">
+                <a:pos x="csX3" y="csY3"/>
+              </a:cxn>
+              <a:cxn ang="0">
+                <a:pos x="csX4" y="csY4"/>
+              </a:cxn>
+              <a:cxn ang="0">
+                <a:pos x="csX5" y="csY5"/>
+              </a:cxn>
+              <a:cxn ang="0">
+                <a:pos x="csX6" y="csY6"/>
+              </a:cxn>
+              <a:cxn ang="0">
+                <a:pos x="csX7" y="csY7"/>
+              </a:cxn>
+              <a:cxn ang="0">
+                <a:pos x="csX8" y="csY8"/>
+              </a:cxn>
+              <a:cxn ang="0">
+                <a:pos x="csX9" y="csY9"/>
+              </a:cxn>
+              <a:cxn ang="0">
+                <a:pos x="csX10" y="csY10"/>
+              </a:cxn>
+              <a:cxn ang="0">
+                <a:pos x="csX11" y="csY11"/>
+              </a:cxn>
+              <a:cxn ang="0">
+                <a:pos x="csX12" y="csY12"/>
+              </a:cxn>
+              <a:cxn ang="0">
+                <a:pos x="csX13" y="csY13"/>
+              </a:cxn>
+              <a:cxn ang="0">
+                <a:pos x="csX14" y="csY14"/>
+              </a:cxn>
+              <a:cxn ang="0">
+                <a:pos x="csX15" y="csY15"/>
+              </a:cxn>
+              <a:cxn ang="0">
+                <a:pos x="csX16" y="csY16"/>
+              </a:cxn>
+              <a:cxn ang="0">
+                <a:pos x="csX17" y="csY17"/>
+              </a:cxn>
+              <a:cxn ang="0">
+                <a:pos x="csX18" y="csY18"/>
+              </a:cxn>
+              <a:cxn ang="0">
+                <a:pos x="csX19" y="csY19"/>
+              </a:cxn>
+              <a:cxn ang="0">
+                <a:pos x="csX20" y="csY20"/>
+              </a:cxn>
+              <a:cxn ang="0">
+                <a:pos x="csX21" y="csY21"/>
+              </a:cxn>
+              <a:cxn ang="0">
+                <a:pos x="csX22" y="csY22"/>
+              </a:cxn>
+              <a:cxn ang="0">
+                <a:pos x="csX23" y="csY23"/>
+              </a:cxn>
+              <a:cxn ang="0">
+                <a:pos x="csX24" y="csY24"/>
+              </a:cxn>
+              <a:cxn ang="0">
+                <a:pos x="csX25" y="csY25"/>
+              </a:cxn>
+              <a:cxn ang="0">
+                <a:pos x="csX26" y="csY26"/>
+              </a:cxn>
+              <a:cxn ang="0">
+                <a:pos x="csX27" y="csY27"/>
+              </a:cxn>
+              <a:cxn ang="0">
+                <a:pos x="csX28" y="csY28"/>
+              </a:cxn>
+              <a:cxn ang="0">
+                <a:pos x="csX29" y="csY29"/>
+              </a:cxn>
+              <a:cxn ang="0">
+                <a:pos x="csX30" y="csY30"/>
+              </a:cxn>
+              <a:cxn ang="0">
+                <a:pos x="csX31" y="csY31"/>
+              </a:cxn>
+              <a:cxn ang="0">
+                <a:pos x="csX32" y="csY32"/>
+              </a:cxn>
+              <a:cxn ang="0">
+                <a:pos x="csX33" y="csY33"/>
+              </a:cxn>
+            </a:cxnLst>
+            <a:rect l="l" t="t" r="r" b="b"/>
+            <a:pathLst>
+              <a:path w="1066772" h="780555">
+                <a:moveTo>
+                  <a:pt x="77496" y="128587"/>
+                </a:moveTo>
+                <a:cubicBezTo>
+                  <a:pt x="83052" y="120649"/>
+                  <a:pt x="106375" y="119893"/>
+                  <a:pt x="120358" y="114300"/>
+                </a:cubicBezTo>
+                <a:cubicBezTo>
+                  <a:pt x="169906" y="94481"/>
+                  <a:pt x="217953" y="70921"/>
+                  <a:pt x="267996" y="52387"/>
+                </a:cubicBezTo>
+                <a:cubicBezTo>
+                  <a:pt x="303786" y="39131"/>
+                  <a:pt x="341326" y="31119"/>
+                  <a:pt x="377533" y="19050"/>
+                </a:cubicBezTo>
+                <a:cubicBezTo>
+                  <a:pt x="443868" y="-3062"/>
+                  <a:pt x="379679" y="9960"/>
+                  <a:pt x="439446" y="0"/>
+                </a:cubicBezTo>
+                <a:cubicBezTo>
+                  <a:pt x="529933" y="3175"/>
+                  <a:pt x="620602" y="2981"/>
+                  <a:pt x="710908" y="9525"/>
+                </a:cubicBezTo>
+                <a:cubicBezTo>
+                  <a:pt x="730245" y="10926"/>
+                  <a:pt x="780513" y="25816"/>
+                  <a:pt x="801396" y="38100"/>
+                </a:cubicBezTo>
+                <a:cubicBezTo>
+                  <a:pt x="818098" y="47925"/>
+                  <a:pt x="833784" y="59465"/>
+                  <a:pt x="849021" y="71437"/>
+                </a:cubicBezTo>
+                <a:cubicBezTo>
+                  <a:pt x="871232" y="88889"/>
+                  <a:pt x="925444" y="130995"/>
+                  <a:pt x="953796" y="161925"/>
+                </a:cubicBezTo>
+                <a:cubicBezTo>
+                  <a:pt x="965199" y="174365"/>
+                  <a:pt x="977379" y="186254"/>
+                  <a:pt x="987133" y="200025"/>
+                </a:cubicBezTo>
+                <a:cubicBezTo>
+                  <a:pt x="1011260" y="234087"/>
+                  <a:pt x="1032836" y="272862"/>
+                  <a:pt x="1053808" y="309562"/>
+                </a:cubicBezTo>
+                <a:cubicBezTo>
+                  <a:pt x="1069350" y="395043"/>
+                  <a:pt x="1077418" y="407656"/>
+                  <a:pt x="1039521" y="523875"/>
+                </a:cubicBezTo>
+                <a:cubicBezTo>
+                  <a:pt x="1035998" y="534678"/>
+                  <a:pt x="956490" y="621066"/>
+                  <a:pt x="944271" y="628650"/>
+                </a:cubicBezTo>
+                <a:cubicBezTo>
+                  <a:pt x="916465" y="645909"/>
+                  <a:pt x="881847" y="649912"/>
+                  <a:pt x="853783" y="666750"/>
+                </a:cubicBezTo>
+                <a:cubicBezTo>
+                  <a:pt x="845846" y="671512"/>
+                  <a:pt x="838479" y="677391"/>
+                  <a:pt x="829971" y="681037"/>
+                </a:cubicBezTo>
+                <a:cubicBezTo>
+                  <a:pt x="816128" y="686970"/>
+                  <a:pt x="801310" y="690313"/>
+                  <a:pt x="787108" y="695325"/>
+                </a:cubicBezTo>
+                <a:cubicBezTo>
+                  <a:pt x="774318" y="699839"/>
+                  <a:pt x="761550" y="704448"/>
+                  <a:pt x="749008" y="709612"/>
+                </a:cubicBezTo>
+                <a:cubicBezTo>
+                  <a:pt x="734551" y="715565"/>
+                  <a:pt x="719982" y="721380"/>
+                  <a:pt x="706146" y="728662"/>
+                </a:cubicBezTo>
+                <a:cubicBezTo>
+                  <a:pt x="689763" y="737285"/>
+                  <a:pt x="675775" y="750527"/>
+                  <a:pt x="658521" y="757237"/>
+                </a:cubicBezTo>
+                <a:cubicBezTo>
+                  <a:pt x="646592" y="761876"/>
+                  <a:pt x="633121" y="760412"/>
+                  <a:pt x="620421" y="762000"/>
+                </a:cubicBezTo>
+                <a:cubicBezTo>
+                  <a:pt x="527161" y="793082"/>
+                  <a:pt x="569959" y="780676"/>
+                  <a:pt x="348958" y="757237"/>
+                </a:cubicBezTo>
+                <a:cubicBezTo>
+                  <a:pt x="328436" y="755060"/>
+                  <a:pt x="310858" y="741362"/>
+                  <a:pt x="291808" y="733425"/>
+                </a:cubicBezTo>
+                <a:cubicBezTo>
+                  <a:pt x="252121" y="692150"/>
+                  <a:pt x="209733" y="653311"/>
+                  <a:pt x="172746" y="609600"/>
+                </a:cubicBezTo>
+                <a:cubicBezTo>
+                  <a:pt x="155283" y="588962"/>
+                  <a:pt x="133487" y="571319"/>
+                  <a:pt x="120358" y="547687"/>
+                </a:cubicBezTo>
+                <a:cubicBezTo>
+                  <a:pt x="112421" y="533400"/>
+                  <a:pt x="103429" y="519649"/>
+                  <a:pt x="96546" y="504825"/>
+                </a:cubicBezTo>
+                <a:cubicBezTo>
+                  <a:pt x="82764" y="475141"/>
+                  <a:pt x="78083" y="440519"/>
+                  <a:pt x="58446" y="414337"/>
+                </a:cubicBezTo>
+                <a:cubicBezTo>
+                  <a:pt x="53683" y="407987"/>
+                  <a:pt x="48158" y="402143"/>
+                  <a:pt x="44158" y="395287"/>
+                </a:cubicBezTo>
+                <a:cubicBezTo>
+                  <a:pt x="37003" y="383022"/>
+                  <a:pt x="31790" y="369716"/>
+                  <a:pt x="25108" y="357187"/>
+                </a:cubicBezTo>
+                <a:cubicBezTo>
+                  <a:pt x="19085" y="345894"/>
+                  <a:pt x="12408" y="334962"/>
+                  <a:pt x="6058" y="323850"/>
+                </a:cubicBezTo>
+                <a:cubicBezTo>
+                  <a:pt x="506" y="279430"/>
+                  <a:pt x="-4208" y="260878"/>
+                  <a:pt x="6058" y="209550"/>
+                </a:cubicBezTo>
+                <a:cubicBezTo>
+                  <a:pt x="7615" y="201767"/>
+                  <a:pt x="13996" y="195263"/>
+                  <a:pt x="20346" y="190500"/>
+                </a:cubicBezTo>
+                <a:cubicBezTo>
+                  <a:pt x="26886" y="185595"/>
+                  <a:pt x="67282" y="173873"/>
+                  <a:pt x="72733" y="171450"/>
+                </a:cubicBezTo>
+                <a:cubicBezTo>
+                  <a:pt x="77964" y="169125"/>
+                  <a:pt x="81901" y="164485"/>
+                  <a:pt x="87021" y="161925"/>
+                </a:cubicBezTo>
+                <a:cubicBezTo>
+                  <a:pt x="97835" y="156518"/>
+                  <a:pt x="71940" y="136525"/>
+                  <a:pt x="77496" y="128587"/>
+                </a:cubicBezTo>
+                <a:close/>
+              </a:path>
+            </a:pathLst>
+          </a:custGeom>
+          <a:noFill/>
+          <a:ln>
+            <a:solidFill>
+              <a:schemeClr val="tx1"/>
+            </a:solidFill>
+          </a:ln>
+        </p:spPr>
+        <p:style>
+          <a:lnRef idx="2">
+            <a:schemeClr val="accent1">
+              <a:shade val="15000"/>
+            </a:schemeClr>
+          </a:lnRef>
+          <a:fillRef idx="1">
+            <a:schemeClr val="accent1"/>
+          </a:fillRef>
+          <a:effectRef idx="0">
+            <a:schemeClr val="accent1"/>
+          </a:effectRef>
+          <a:fontRef idx="minor">
+            <a:schemeClr val="lt1"/>
+          </a:fontRef>
+        </p:style>
+        <p:txBody>
+          <a:bodyPr rtlCol="0" anchor="ctr"/>
+          <a:lstStyle/>
+          <a:p>
+            <a:pPr algn="ctr"/>
+            <a:endParaRPr lang="ko-KR" altLang="en-US"/>
+          </a:p>
+        </p:txBody>
+      </p:sp>
+      <p:sp>
+        <p:nvSpPr>
+          <p:cNvPr id="14" name="자유형: 도형 13">
+            <a:extLst>
+              <a:ext uri="{FF2B5EF4-FFF2-40B4-BE49-F238E27FC236}">
+                <a16:creationId xmlns:a16="http://schemas.microsoft.com/office/drawing/2014/main" id="{3D770341-1118-F06C-F6CA-AFA96BF83803}"/>
+              </a:ext>
+            </a:extLst>
+          </p:cNvPr>
+          <p:cNvSpPr/>
+          <p:nvPr/>
+        </p:nvSpPr>
+        <p:spPr>
+          <a:xfrm>
+            <a:off x="3100796" y="4962328"/>
+            <a:ext cx="342486" cy="329007"/>
+          </a:xfrm>
+          <a:custGeom>
+            <a:avLst/>
+            <a:gdLst>
+              <a:gd name="csX0" fmla="*/ 4349 w 342486"/>
+              <a:gd name="csY0" fmla="*/ 81160 h 329007"/>
+              <a:gd name="csX1" fmla="*/ 90074 w 342486"/>
+              <a:gd name="csY1" fmla="*/ 157360 h 329007"/>
+              <a:gd name="csX2" fmla="*/ 132936 w 342486"/>
+              <a:gd name="csY2" fmla="*/ 209747 h 329007"/>
+              <a:gd name="csX3" fmla="*/ 161511 w 342486"/>
+              <a:gd name="csY3" fmla="*/ 252610 h 329007"/>
+              <a:gd name="csX4" fmla="*/ 213899 w 342486"/>
+              <a:gd name="csY4" fmla="*/ 304997 h 329007"/>
+              <a:gd name="csX5" fmla="*/ 228186 w 342486"/>
+              <a:gd name="csY5" fmla="*/ 319285 h 329007"/>
+              <a:gd name="csX6" fmla="*/ 271049 w 342486"/>
+              <a:gd name="csY6" fmla="*/ 324047 h 329007"/>
+              <a:gd name="csX7" fmla="*/ 290099 w 342486"/>
+              <a:gd name="csY7" fmla="*/ 328810 h 329007"/>
+              <a:gd name="csX8" fmla="*/ 323436 w 342486"/>
+              <a:gd name="csY8" fmla="*/ 314522 h 329007"/>
+              <a:gd name="csX9" fmla="*/ 342486 w 342486"/>
+              <a:gd name="csY9" fmla="*/ 243085 h 329007"/>
+              <a:gd name="csX10" fmla="*/ 275811 w 342486"/>
+              <a:gd name="csY10" fmla="*/ 176410 h 329007"/>
+              <a:gd name="csX11" fmla="*/ 256761 w 342486"/>
+              <a:gd name="csY11" fmla="*/ 157360 h 329007"/>
+              <a:gd name="csX12" fmla="*/ 232949 w 342486"/>
+              <a:gd name="csY12" fmla="*/ 124022 h 329007"/>
+              <a:gd name="csX13" fmla="*/ 223424 w 342486"/>
+              <a:gd name="csY13" fmla="*/ 104972 h 329007"/>
+              <a:gd name="csX14" fmla="*/ 199611 w 342486"/>
+              <a:gd name="csY14" fmla="*/ 85922 h 329007"/>
+              <a:gd name="csX15" fmla="*/ 190086 w 342486"/>
+              <a:gd name="csY15" fmla="*/ 71635 h 329007"/>
+              <a:gd name="csX16" fmla="*/ 104361 w 342486"/>
+              <a:gd name="csY16" fmla="*/ 9722 h 329007"/>
+              <a:gd name="csX17" fmla="*/ 66261 w 342486"/>
+              <a:gd name="csY17" fmla="*/ 4960 h 329007"/>
+              <a:gd name="csX18" fmla="*/ 47211 w 342486"/>
+              <a:gd name="csY18" fmla="*/ 197 h 329007"/>
+              <a:gd name="csX19" fmla="*/ 4349 w 342486"/>
+              <a:gd name="csY19" fmla="*/ 81160 h 329007"/>
+            </a:gdLst>
+            <a:ahLst/>
+            <a:cxnLst>
+              <a:cxn ang="0">
+                <a:pos x="csX0" y="csY0"/>
+              </a:cxn>
+              <a:cxn ang="0">
+                <a:pos x="csX1" y="csY1"/>
+              </a:cxn>
+              <a:cxn ang="0">
+                <a:pos x="csX2" y="csY2"/>
+              </a:cxn>
+              <a:cxn ang="0">
+                <a:pos x="csX3" y="csY3"/>
+              </a:cxn>
+              <a:cxn ang="0">
+                <a:pos x="csX4" y="csY4"/>
+              </a:cxn>
+              <a:cxn ang="0">
+                <a:pos x="csX5" y="csY5"/>
+              </a:cxn>
+              <a:cxn ang="0">
+                <a:pos x="csX6" y="csY6"/>
+              </a:cxn>
+              <a:cxn ang="0">
+                <a:pos x="csX7" y="csY7"/>
+              </a:cxn>
+              <a:cxn ang="0">
+                <a:pos x="csX8" y="csY8"/>
+              </a:cxn>
+              <a:cxn ang="0">
+                <a:pos x="csX9" y="csY9"/>
+              </a:cxn>
+              <a:cxn ang="0">
+                <a:pos x="csX10" y="csY10"/>
+              </a:cxn>
+              <a:cxn ang="0">
+                <a:pos x="csX11" y="csY11"/>
+              </a:cxn>
+              <a:cxn ang="0">
+                <a:pos x="csX12" y="csY12"/>
+              </a:cxn>
+              <a:cxn ang="0">
+                <a:pos x="csX13" y="csY13"/>
+              </a:cxn>
+              <a:cxn ang="0">
+                <a:pos x="csX14" y="csY14"/>
+              </a:cxn>
+              <a:cxn ang="0">
+                <a:pos x="csX15" y="csY15"/>
+              </a:cxn>
+              <a:cxn ang="0">
+                <a:pos x="csX16" y="csY16"/>
+              </a:cxn>
+              <a:cxn ang="0">
+                <a:pos x="csX17" y="csY17"/>
+              </a:cxn>
+              <a:cxn ang="0">
+                <a:pos x="csX18" y="csY18"/>
+              </a:cxn>
+              <a:cxn ang="0">
+                <a:pos x="csX19" y="csY19"/>
+              </a:cxn>
+            </a:cxnLst>
+            <a:rect l="l" t="t" r="r" b="b"/>
+            <a:pathLst>
+              <a:path w="342486" h="329007">
+                <a:moveTo>
+                  <a:pt x="4349" y="81160"/>
+                </a:moveTo>
+                <a:cubicBezTo>
+                  <a:pt x="11493" y="107354"/>
+                  <a:pt x="31262" y="111617"/>
+                  <a:pt x="90074" y="157360"/>
+                </a:cubicBezTo>
+                <a:cubicBezTo>
+                  <a:pt x="111826" y="200864"/>
+                  <a:pt x="83071" y="148374"/>
+                  <a:pt x="132936" y="209747"/>
+                </a:cubicBezTo>
+                <a:cubicBezTo>
+                  <a:pt x="143764" y="223074"/>
+                  <a:pt x="151208" y="238873"/>
+                  <a:pt x="161511" y="252610"/>
+                </a:cubicBezTo>
+                <a:cubicBezTo>
+                  <a:pt x="192210" y="293542"/>
+                  <a:pt x="181777" y="276890"/>
+                  <a:pt x="213899" y="304997"/>
+                </a:cubicBezTo>
+                <a:cubicBezTo>
+                  <a:pt x="218968" y="309432"/>
+                  <a:pt x="221796" y="317155"/>
+                  <a:pt x="228186" y="319285"/>
+                </a:cubicBezTo>
+                <a:cubicBezTo>
+                  <a:pt x="241824" y="323831"/>
+                  <a:pt x="256761" y="322460"/>
+                  <a:pt x="271049" y="324047"/>
+                </a:cubicBezTo>
+                <a:cubicBezTo>
+                  <a:pt x="277399" y="325635"/>
+                  <a:pt x="283659" y="329981"/>
+                  <a:pt x="290099" y="328810"/>
+                </a:cubicBezTo>
+                <a:cubicBezTo>
+                  <a:pt x="301994" y="326647"/>
+                  <a:pt x="316065" y="324105"/>
+                  <a:pt x="323436" y="314522"/>
+                </a:cubicBezTo>
+                <a:cubicBezTo>
+                  <a:pt x="330921" y="304791"/>
+                  <a:pt x="338932" y="260856"/>
+                  <a:pt x="342486" y="243085"/>
+                </a:cubicBezTo>
+                <a:lnTo>
+                  <a:pt x="275811" y="176410"/>
+                </a:lnTo>
+                <a:cubicBezTo>
+                  <a:pt x="269461" y="170060"/>
+                  <a:pt x="262149" y="164544"/>
+                  <a:pt x="256761" y="157360"/>
+                </a:cubicBezTo>
+                <a:cubicBezTo>
+                  <a:pt x="250627" y="149181"/>
+                  <a:pt x="238521" y="133772"/>
+                  <a:pt x="232949" y="124022"/>
+                </a:cubicBezTo>
+                <a:cubicBezTo>
+                  <a:pt x="229427" y="117858"/>
+                  <a:pt x="228099" y="110315"/>
+                  <a:pt x="223424" y="104972"/>
+                </a:cubicBezTo>
+                <a:cubicBezTo>
+                  <a:pt x="216730" y="97322"/>
+                  <a:pt x="206799" y="93110"/>
+                  <a:pt x="199611" y="85922"/>
+                </a:cubicBezTo>
+                <a:cubicBezTo>
+                  <a:pt x="195564" y="81875"/>
+                  <a:pt x="193889" y="75913"/>
+                  <a:pt x="190086" y="71635"/>
+                </a:cubicBezTo>
+                <a:cubicBezTo>
+                  <a:pt x="170694" y="49819"/>
+                  <a:pt x="132580" y="13249"/>
+                  <a:pt x="104361" y="9722"/>
+                </a:cubicBezTo>
+                <a:lnTo>
+                  <a:pt x="66261" y="4960"/>
+                </a:lnTo>
+                <a:cubicBezTo>
+                  <a:pt x="59911" y="3372"/>
+                  <a:pt x="53651" y="-974"/>
+                  <a:pt x="47211" y="197"/>
+                </a:cubicBezTo>
+                <a:cubicBezTo>
+                  <a:pt x="-8013" y="10238"/>
+                  <a:pt x="-2795" y="54966"/>
+                  <a:pt x="4349" y="81160"/>
+                </a:cubicBezTo>
+                <a:close/>
+              </a:path>
+            </a:pathLst>
+          </a:custGeom>
+          <a:noFill/>
+          <a:ln>
+            <a:solidFill>
+              <a:schemeClr val="tx1"/>
+            </a:solidFill>
+          </a:ln>
+        </p:spPr>
+        <p:style>
+          <a:lnRef idx="2">
+            <a:schemeClr val="accent1">
+              <a:shade val="15000"/>
+            </a:schemeClr>
+          </a:lnRef>
+          <a:fillRef idx="1">
+            <a:schemeClr val="accent1"/>
+          </a:fillRef>
+          <a:effectRef idx="0">
+            <a:schemeClr val="accent1"/>
+          </a:effectRef>
+          <a:fontRef idx="minor">
+            <a:schemeClr val="lt1"/>
+          </a:fontRef>
+        </p:style>
+        <p:txBody>
+          <a:bodyPr rtlCol="0" anchor="ctr"/>
+          <a:lstStyle/>
+          <a:p>
+            <a:pPr algn="ctr"/>
+            <a:endParaRPr lang="ko-KR" altLang="en-US"/>
+          </a:p>
+        </p:txBody>
+      </p:sp>
+      <p:sp>
+        <p:nvSpPr>
+          <p:cNvPr id="16" name="자유형: 도형 15">
+            <a:extLst>
+              <a:ext uri="{FF2B5EF4-FFF2-40B4-BE49-F238E27FC236}">
+                <a16:creationId xmlns:a16="http://schemas.microsoft.com/office/drawing/2014/main" id="{A56A5FE9-367B-0C1D-7952-46FA99C8927C}"/>
+              </a:ext>
+            </a:extLst>
+          </p:cNvPr>
+          <p:cNvSpPr/>
+          <p:nvPr/>
+        </p:nvSpPr>
+        <p:spPr>
+          <a:xfrm>
+            <a:off x="2988443" y="4838700"/>
+            <a:ext cx="731093" cy="595313"/>
+          </a:xfrm>
+          <a:custGeom>
+            <a:avLst/>
+            <a:gdLst>
+              <a:gd name="csX0" fmla="*/ 235764 w 731093"/>
+              <a:gd name="csY0" fmla="*/ 9525 h 595313"/>
+              <a:gd name="csX1" fmla="*/ 269102 w 731093"/>
+              <a:gd name="csY1" fmla="*/ 28575 h 595313"/>
+              <a:gd name="csX2" fmla="*/ 383402 w 731093"/>
+              <a:gd name="csY2" fmla="*/ 85725 h 595313"/>
+              <a:gd name="csX3" fmla="*/ 454839 w 731093"/>
+              <a:gd name="csY3" fmla="*/ 123825 h 595313"/>
+              <a:gd name="csX4" fmla="*/ 526277 w 731093"/>
+              <a:gd name="csY4" fmla="*/ 209550 h 595313"/>
+              <a:gd name="csX5" fmla="*/ 531039 w 731093"/>
+              <a:gd name="csY5" fmla="*/ 242888 h 595313"/>
+              <a:gd name="csX6" fmla="*/ 569139 w 731093"/>
+              <a:gd name="csY6" fmla="*/ 300038 h 595313"/>
+              <a:gd name="csX7" fmla="*/ 645339 w 731093"/>
+              <a:gd name="csY7" fmla="*/ 347663 h 595313"/>
+              <a:gd name="csX8" fmla="*/ 664389 w 731093"/>
+              <a:gd name="csY8" fmla="*/ 361950 h 595313"/>
+              <a:gd name="csX9" fmla="*/ 669152 w 731093"/>
+              <a:gd name="csY9" fmla="*/ 381000 h 595313"/>
+              <a:gd name="csX10" fmla="*/ 683439 w 731093"/>
+              <a:gd name="csY10" fmla="*/ 400050 h 595313"/>
+              <a:gd name="csX11" fmla="*/ 712014 w 731093"/>
+              <a:gd name="csY11" fmla="*/ 433388 h 595313"/>
+              <a:gd name="csX12" fmla="*/ 731064 w 731093"/>
+              <a:gd name="csY12" fmla="*/ 504825 h 595313"/>
+              <a:gd name="csX13" fmla="*/ 683439 w 731093"/>
+              <a:gd name="csY13" fmla="*/ 590550 h 595313"/>
+              <a:gd name="csX14" fmla="*/ 664389 w 731093"/>
+              <a:gd name="csY14" fmla="*/ 595313 h 595313"/>
+              <a:gd name="csX15" fmla="*/ 583427 w 731093"/>
+              <a:gd name="csY15" fmla="*/ 590550 h 595313"/>
+              <a:gd name="csX16" fmla="*/ 526277 w 731093"/>
+              <a:gd name="csY16" fmla="*/ 576263 h 595313"/>
+              <a:gd name="csX17" fmla="*/ 497702 w 731093"/>
+              <a:gd name="csY17" fmla="*/ 571500 h 595313"/>
+              <a:gd name="csX18" fmla="*/ 402452 w 731093"/>
+              <a:gd name="csY18" fmla="*/ 533400 h 595313"/>
+              <a:gd name="csX19" fmla="*/ 383402 w 731093"/>
+              <a:gd name="csY19" fmla="*/ 519113 h 595313"/>
+              <a:gd name="csX20" fmla="*/ 331014 w 731093"/>
+              <a:gd name="csY20" fmla="*/ 495300 h 595313"/>
+              <a:gd name="csX21" fmla="*/ 278627 w 731093"/>
+              <a:gd name="csY21" fmla="*/ 461963 h 595313"/>
+              <a:gd name="csX22" fmla="*/ 173852 w 731093"/>
+              <a:gd name="csY22" fmla="*/ 409575 h 595313"/>
+              <a:gd name="csX23" fmla="*/ 145277 w 731093"/>
+              <a:gd name="csY23" fmla="*/ 376238 h 595313"/>
+              <a:gd name="csX24" fmla="*/ 107177 w 731093"/>
+              <a:gd name="csY24" fmla="*/ 304800 h 595313"/>
+              <a:gd name="csX25" fmla="*/ 92889 w 731093"/>
+              <a:gd name="csY25" fmla="*/ 276225 h 595313"/>
+              <a:gd name="csX26" fmla="*/ 88127 w 731093"/>
+              <a:gd name="csY26" fmla="*/ 261938 h 595313"/>
+              <a:gd name="csX27" fmla="*/ 64314 w 731093"/>
+              <a:gd name="csY27" fmla="*/ 238125 h 595313"/>
+              <a:gd name="csX28" fmla="*/ 50027 w 731093"/>
+              <a:gd name="csY28" fmla="*/ 200025 h 595313"/>
+              <a:gd name="csX29" fmla="*/ 30977 w 731093"/>
+              <a:gd name="csY29" fmla="*/ 176213 h 595313"/>
+              <a:gd name="csX30" fmla="*/ 7164 w 731093"/>
+              <a:gd name="csY30" fmla="*/ 138113 h 595313"/>
+              <a:gd name="csX31" fmla="*/ 16689 w 731093"/>
+              <a:gd name="csY31" fmla="*/ 33338 h 595313"/>
+              <a:gd name="csX32" fmla="*/ 30977 w 731093"/>
+              <a:gd name="csY32" fmla="*/ 19050 h 595313"/>
+              <a:gd name="csX33" fmla="*/ 50027 w 731093"/>
+              <a:gd name="csY33" fmla="*/ 4763 h 595313"/>
+              <a:gd name="csX34" fmla="*/ 83364 w 731093"/>
+              <a:gd name="csY34" fmla="*/ 0 h 595313"/>
+              <a:gd name="csX35" fmla="*/ 188139 w 731093"/>
+              <a:gd name="csY35" fmla="*/ 4763 h 595313"/>
+              <a:gd name="csX36" fmla="*/ 202427 w 731093"/>
+              <a:gd name="csY36" fmla="*/ 14288 h 595313"/>
+              <a:gd name="csX37" fmla="*/ 235764 w 731093"/>
+              <a:gd name="csY37" fmla="*/ 9525 h 595313"/>
+            </a:gdLst>
+            <a:ahLst/>
+            <a:cxnLst>
+              <a:cxn ang="0">
+                <a:pos x="csX0" y="csY0"/>
+              </a:cxn>
+              <a:cxn ang="0">
+                <a:pos x="csX1" y="csY1"/>
+              </a:cxn>
+              <a:cxn ang="0">
+                <a:pos x="csX2" y="csY2"/>
+              </a:cxn>
+              <a:cxn ang="0">
+                <a:pos x="csX3" y="csY3"/>
+              </a:cxn>
+              <a:cxn ang="0">
+                <a:pos x="csX4" y="csY4"/>
+              </a:cxn>
+              <a:cxn ang="0">
+                <a:pos x="csX5" y="csY5"/>
+              </a:cxn>
+              <a:cxn ang="0">
+                <a:pos x="csX6" y="csY6"/>
+              </a:cxn>
+              <a:cxn ang="0">
+                <a:pos x="csX7" y="csY7"/>
+              </a:cxn>
+              <a:cxn ang="0">
+                <a:pos x="csX8" y="csY8"/>
+              </a:cxn>
+              <a:cxn ang="0">
+                <a:pos x="csX9" y="csY9"/>
+              </a:cxn>
+              <a:cxn ang="0">
+                <a:pos x="csX10" y="csY10"/>
+              </a:cxn>
+              <a:cxn ang="0">
+                <a:pos x="csX11" y="csY11"/>
+              </a:cxn>
+              <a:cxn ang="0">
+                <a:pos x="csX12" y="csY12"/>
+              </a:cxn>
+              <a:cxn ang="0">
+                <a:pos x="csX13" y="csY13"/>
+              </a:cxn>
+              <a:cxn ang="0">
+                <a:pos x="csX14" y="csY14"/>
+              </a:cxn>
+              <a:cxn ang="0">
+                <a:pos x="csX15" y="csY15"/>
+              </a:cxn>
+              <a:cxn ang="0">
+                <a:pos x="csX16" y="csY16"/>
+              </a:cxn>
+              <a:cxn ang="0">
+                <a:pos x="csX17" y="csY17"/>
+              </a:cxn>
+              <a:cxn ang="0">
+                <a:pos x="csX18" y="csY18"/>
+              </a:cxn>
+              <a:cxn ang="0">
+                <a:pos x="csX19" y="csY19"/>
+              </a:cxn>
+              <a:cxn ang="0">
+                <a:pos x="csX20" y="csY20"/>
+              </a:cxn>
+              <a:cxn ang="0">
+                <a:pos x="csX21" y="csY21"/>
+              </a:cxn>
+              <a:cxn ang="0">
+                <a:pos x="csX22" y="csY22"/>
+              </a:cxn>
+              <a:cxn ang="0">
+                <a:pos x="csX23" y="csY23"/>
+              </a:cxn>
+              <a:cxn ang="0">
+                <a:pos x="csX24" y="csY24"/>
+              </a:cxn>
+              <a:cxn ang="0">
+                <a:pos x="csX25" y="csY25"/>
+              </a:cxn>
+              <a:cxn ang="0">
+                <a:pos x="csX26" y="csY26"/>
+              </a:cxn>
+              <a:cxn ang="0">
+                <a:pos x="csX27" y="csY27"/>
+              </a:cxn>
+              <a:cxn ang="0">
+                <a:pos x="csX28" y="csY28"/>
+              </a:cxn>
+              <a:cxn ang="0">
+                <a:pos x="csX29" y="csY29"/>
+              </a:cxn>
+              <a:cxn ang="0">
+                <a:pos x="csX30" y="csY30"/>
+              </a:cxn>
+              <a:cxn ang="0">
+                <a:pos x="csX31" y="csY31"/>
+              </a:cxn>
+              <a:cxn ang="0">
+                <a:pos x="csX32" y="csY32"/>
+              </a:cxn>
+              <a:cxn ang="0">
+                <a:pos x="csX33" y="csY33"/>
+              </a:cxn>
+              <a:cxn ang="0">
+                <a:pos x="csX34" y="csY34"/>
+              </a:cxn>
+              <a:cxn ang="0">
+                <a:pos x="csX35" y="csY35"/>
+              </a:cxn>
+              <a:cxn ang="0">
+                <a:pos x="csX36" y="csY36"/>
+              </a:cxn>
+              <a:cxn ang="0">
+                <a:pos x="csX37" y="csY37"/>
+              </a:cxn>
+            </a:cxnLst>
+            <a:rect l="l" t="t" r="r" b="b"/>
+            <a:pathLst>
+              <a:path w="731093" h="595313">
+                <a:moveTo>
+                  <a:pt x="235764" y="9525"/>
+                </a:moveTo>
+                <a:cubicBezTo>
+                  <a:pt x="246877" y="11906"/>
+                  <a:pt x="257729" y="22705"/>
+                  <a:pt x="269102" y="28575"/>
+                </a:cubicBezTo>
+                <a:cubicBezTo>
+                  <a:pt x="306955" y="48112"/>
+                  <a:pt x="346418" y="64591"/>
+                  <a:pt x="383402" y="85725"/>
+                </a:cubicBezTo>
+                <a:cubicBezTo>
+                  <a:pt x="429067" y="111820"/>
+                  <a:pt x="405292" y="99051"/>
+                  <a:pt x="454839" y="123825"/>
+                </a:cubicBezTo>
+                <a:cubicBezTo>
+                  <a:pt x="517155" y="196527"/>
+                  <a:pt x="494425" y="167083"/>
+                  <a:pt x="526277" y="209550"/>
+                </a:cubicBezTo>
+                <a:cubicBezTo>
+                  <a:pt x="527864" y="220663"/>
+                  <a:pt x="527264" y="232316"/>
+                  <a:pt x="531039" y="242888"/>
+                </a:cubicBezTo>
+                <a:cubicBezTo>
+                  <a:pt x="535613" y="255697"/>
+                  <a:pt x="557596" y="289545"/>
+                  <a:pt x="569139" y="300038"/>
+                </a:cubicBezTo>
+                <a:cubicBezTo>
+                  <a:pt x="594165" y="322789"/>
+                  <a:pt x="616406" y="329858"/>
+                  <a:pt x="645339" y="347663"/>
+                </a:cubicBezTo>
+                <a:cubicBezTo>
+                  <a:pt x="652099" y="351823"/>
+                  <a:pt x="658039" y="357188"/>
+                  <a:pt x="664389" y="361950"/>
+                </a:cubicBezTo>
+                <a:cubicBezTo>
+                  <a:pt x="665977" y="368300"/>
+                  <a:pt x="666225" y="375146"/>
+                  <a:pt x="669152" y="381000"/>
+                </a:cubicBezTo>
+                <a:cubicBezTo>
+                  <a:pt x="672702" y="388099"/>
+                  <a:pt x="678413" y="393907"/>
+                  <a:pt x="683439" y="400050"/>
+                </a:cubicBezTo>
+                <a:cubicBezTo>
+                  <a:pt x="692707" y="411378"/>
+                  <a:pt x="702489" y="422275"/>
+                  <a:pt x="712014" y="433388"/>
+                </a:cubicBezTo>
+                <a:cubicBezTo>
+                  <a:pt x="717615" y="450192"/>
+                  <a:pt x="731827" y="489560"/>
+                  <a:pt x="731064" y="504825"/>
+                </a:cubicBezTo>
+                <a:cubicBezTo>
+                  <a:pt x="729895" y="528210"/>
+                  <a:pt x="714597" y="582760"/>
+                  <a:pt x="683439" y="590550"/>
+                </a:cubicBezTo>
+                <a:lnTo>
+                  <a:pt x="664389" y="595313"/>
+                </a:lnTo>
+                <a:cubicBezTo>
+                  <a:pt x="637402" y="593725"/>
+                  <a:pt x="610207" y="594244"/>
+                  <a:pt x="583427" y="590550"/>
+                </a:cubicBezTo>
+                <a:cubicBezTo>
+                  <a:pt x="563975" y="587867"/>
+                  <a:pt x="545446" y="580523"/>
+                  <a:pt x="526277" y="576263"/>
+                </a:cubicBezTo>
+                <a:cubicBezTo>
+                  <a:pt x="516851" y="574168"/>
+                  <a:pt x="507227" y="573088"/>
+                  <a:pt x="497702" y="571500"/>
+                </a:cubicBezTo>
+                <a:cubicBezTo>
+                  <a:pt x="465952" y="558800"/>
+                  <a:pt x="429809" y="553917"/>
+                  <a:pt x="402452" y="533400"/>
+                </a:cubicBezTo>
+                <a:cubicBezTo>
+                  <a:pt x="396102" y="528638"/>
+                  <a:pt x="390133" y="523320"/>
+                  <a:pt x="383402" y="519113"/>
+                </a:cubicBezTo>
+                <a:cubicBezTo>
+                  <a:pt x="366950" y="508830"/>
+                  <a:pt x="348038" y="504467"/>
+                  <a:pt x="331014" y="495300"/>
+                </a:cubicBezTo>
+                <a:cubicBezTo>
+                  <a:pt x="281952" y="468882"/>
+                  <a:pt x="322593" y="483946"/>
+                  <a:pt x="278627" y="461963"/>
+                </a:cubicBezTo>
+                <a:cubicBezTo>
+                  <a:pt x="220720" y="433010"/>
+                  <a:pt x="239973" y="450901"/>
+                  <a:pt x="173852" y="409575"/>
+                </a:cubicBezTo>
+                <a:cubicBezTo>
+                  <a:pt x="164484" y="403720"/>
+                  <a:pt x="151192" y="384125"/>
+                  <a:pt x="145277" y="376238"/>
+                </a:cubicBezTo>
+                <a:cubicBezTo>
+                  <a:pt x="133797" y="307367"/>
+                  <a:pt x="153454" y="397351"/>
+                  <a:pt x="107177" y="304800"/>
+                </a:cubicBezTo>
+                <a:cubicBezTo>
+                  <a:pt x="102414" y="295275"/>
+                  <a:pt x="97214" y="285956"/>
+                  <a:pt x="92889" y="276225"/>
+                </a:cubicBezTo>
+                <a:cubicBezTo>
+                  <a:pt x="90850" y="271638"/>
+                  <a:pt x="91139" y="265954"/>
+                  <a:pt x="88127" y="261938"/>
+                </a:cubicBezTo>
+                <a:cubicBezTo>
+                  <a:pt x="81392" y="252958"/>
+                  <a:pt x="72252" y="246063"/>
+                  <a:pt x="64314" y="238125"/>
+                </a:cubicBezTo>
+                <a:cubicBezTo>
+                  <a:pt x="59552" y="225425"/>
+                  <a:pt x="56457" y="211967"/>
+                  <a:pt x="50027" y="200025"/>
+                </a:cubicBezTo>
+                <a:cubicBezTo>
+                  <a:pt x="45208" y="191075"/>
+                  <a:pt x="37076" y="184345"/>
+                  <a:pt x="30977" y="176213"/>
+                </a:cubicBezTo>
+                <a:cubicBezTo>
+                  <a:pt x="23652" y="166446"/>
+                  <a:pt x="12537" y="147067"/>
+                  <a:pt x="7164" y="138113"/>
+                </a:cubicBezTo>
+                <a:cubicBezTo>
+                  <a:pt x="-3466" y="95587"/>
+                  <a:pt x="-3795" y="105033"/>
+                  <a:pt x="16689" y="33338"/>
+                </a:cubicBezTo>
+                <a:cubicBezTo>
+                  <a:pt x="18539" y="26862"/>
+                  <a:pt x="25863" y="23433"/>
+                  <a:pt x="30977" y="19050"/>
+                </a:cubicBezTo>
+                <a:cubicBezTo>
+                  <a:pt x="37004" y="13884"/>
+                  <a:pt x="42567" y="7476"/>
+                  <a:pt x="50027" y="4763"/>
+                </a:cubicBezTo>
+                <a:cubicBezTo>
+                  <a:pt x="60576" y="927"/>
+                  <a:pt x="72252" y="1588"/>
+                  <a:pt x="83364" y="0"/>
+                </a:cubicBezTo>
+                <a:cubicBezTo>
+                  <a:pt x="118289" y="1588"/>
+                  <a:pt x="153427" y="597"/>
+                  <a:pt x="188139" y="4763"/>
+                </a:cubicBezTo>
+                <a:cubicBezTo>
+                  <a:pt x="193822" y="5445"/>
+                  <a:pt x="197166" y="12033"/>
+                  <a:pt x="202427" y="14288"/>
+                </a:cubicBezTo>
+                <a:cubicBezTo>
+                  <a:pt x="208443" y="16866"/>
+                  <a:pt x="224651" y="7144"/>
+                  <a:pt x="235764" y="9525"/>
+                </a:cubicBezTo>
+                <a:close/>
+              </a:path>
+            </a:pathLst>
+          </a:custGeom>
+          <a:noFill/>
+          <a:ln>
+            <a:solidFill>
+              <a:schemeClr val="tx1"/>
+            </a:solidFill>
+          </a:ln>
+        </p:spPr>
+        <p:style>
+          <a:lnRef idx="2">
+            <a:schemeClr val="accent1">
+              <a:shade val="15000"/>
+            </a:schemeClr>
+          </a:lnRef>
+          <a:fillRef idx="1">
+            <a:schemeClr val="accent1"/>
+          </a:fillRef>
+          <a:effectRef idx="0">
+            <a:schemeClr val="accent1"/>
+          </a:effectRef>
+          <a:fontRef idx="minor">
+            <a:schemeClr val="lt1"/>
+          </a:fontRef>
+        </p:style>
+        <p:txBody>
+          <a:bodyPr rtlCol="0" anchor="ctr"/>
+          <a:lstStyle/>
+          <a:p>
+            <a:pPr algn="ctr"/>
+            <a:endParaRPr lang="ko-KR" altLang="en-US"/>
+          </a:p>
+        </p:txBody>
+      </p:sp>
+      <p:sp>
+        <p:nvSpPr>
+          <p:cNvPr id="18" name="자유형: 도형 17">
+            <a:extLst>
+              <a:ext uri="{FF2B5EF4-FFF2-40B4-BE49-F238E27FC236}">
+                <a16:creationId xmlns:a16="http://schemas.microsoft.com/office/drawing/2014/main" id="{1410E483-BF39-5265-187C-1934F34611AC}"/>
+              </a:ext>
+            </a:extLst>
+          </p:cNvPr>
+          <p:cNvSpPr/>
+          <p:nvPr/>
+        </p:nvSpPr>
+        <p:spPr>
+          <a:xfrm>
+            <a:off x="3957441" y="5553075"/>
+            <a:ext cx="119413" cy="100040"/>
+          </a:xfrm>
+          <a:custGeom>
+            <a:avLst/>
+            <a:gdLst>
+              <a:gd name="csX0" fmla="*/ 19241 w 119413"/>
+              <a:gd name="csY0" fmla="*/ 71438 h 100040"/>
+              <a:gd name="csX1" fmla="*/ 4954 w 119413"/>
+              <a:gd name="csY1" fmla="*/ 42863 h 100040"/>
+              <a:gd name="csX2" fmla="*/ 191 w 119413"/>
+              <a:gd name="csY2" fmla="*/ 28575 h 100040"/>
+              <a:gd name="csX3" fmla="*/ 14479 w 119413"/>
+              <a:gd name="csY3" fmla="*/ 0 h 100040"/>
+              <a:gd name="csX4" fmla="*/ 66866 w 119413"/>
+              <a:gd name="csY4" fmla="*/ 14288 h 100040"/>
+              <a:gd name="csX5" fmla="*/ 90679 w 119413"/>
+              <a:gd name="csY5" fmla="*/ 28575 h 100040"/>
+              <a:gd name="csX6" fmla="*/ 109729 w 119413"/>
+              <a:gd name="csY6" fmla="*/ 38100 h 100040"/>
+              <a:gd name="csX7" fmla="*/ 119254 w 119413"/>
+              <a:gd name="csY7" fmla="*/ 90488 h 100040"/>
+              <a:gd name="csX8" fmla="*/ 104966 w 119413"/>
+              <a:gd name="csY8" fmla="*/ 100013 h 100040"/>
+              <a:gd name="csX9" fmla="*/ 33529 w 119413"/>
+              <a:gd name="csY9" fmla="*/ 76200 h 100040"/>
+              <a:gd name="csX10" fmla="*/ 19241 w 119413"/>
+              <a:gd name="csY10" fmla="*/ 71438 h 100040"/>
+            </a:gdLst>
+            <a:ahLst/>
+            <a:cxnLst>
+              <a:cxn ang="0">
+                <a:pos x="csX0" y="csY0"/>
+              </a:cxn>
+              <a:cxn ang="0">
+                <a:pos x="csX1" y="csY1"/>
+              </a:cxn>
+              <a:cxn ang="0">
+                <a:pos x="csX2" y="csY2"/>
+              </a:cxn>
+              <a:cxn ang="0">
+                <a:pos x="csX3" y="csY3"/>
+              </a:cxn>
+              <a:cxn ang="0">
+                <a:pos x="csX4" y="csY4"/>
+              </a:cxn>
+              <a:cxn ang="0">
+                <a:pos x="csX5" y="csY5"/>
+              </a:cxn>
+              <a:cxn ang="0">
+                <a:pos x="csX6" y="csY6"/>
+              </a:cxn>
+              <a:cxn ang="0">
+                <a:pos x="csX7" y="csY7"/>
+              </a:cxn>
+              <a:cxn ang="0">
+                <a:pos x="csX8" y="csY8"/>
+              </a:cxn>
+              <a:cxn ang="0">
+                <a:pos x="csX9" y="csY9"/>
+              </a:cxn>
+              <a:cxn ang="0">
+                <a:pos x="csX10" y="csY10"/>
+              </a:cxn>
+            </a:cxnLst>
+            <a:rect l="l" t="t" r="r" b="b"/>
+            <a:pathLst>
+              <a:path w="119413" h="100040">
+                <a:moveTo>
+                  <a:pt x="19241" y="71438"/>
+                </a:moveTo>
+                <a:cubicBezTo>
+                  <a:pt x="14479" y="65882"/>
+                  <a:pt x="9279" y="52594"/>
+                  <a:pt x="4954" y="42863"/>
+                </a:cubicBezTo>
+                <a:cubicBezTo>
+                  <a:pt x="2915" y="38275"/>
+                  <a:pt x="-898" y="33476"/>
+                  <a:pt x="191" y="28575"/>
+                </a:cubicBezTo>
+                <a:cubicBezTo>
+                  <a:pt x="2501" y="18179"/>
+                  <a:pt x="9716" y="9525"/>
+                  <a:pt x="14479" y="0"/>
+                </a:cubicBezTo>
+                <a:cubicBezTo>
+                  <a:pt x="31941" y="4763"/>
+                  <a:pt x="49918" y="7933"/>
+                  <a:pt x="66866" y="14288"/>
+                </a:cubicBezTo>
+                <a:cubicBezTo>
+                  <a:pt x="75533" y="17538"/>
+                  <a:pt x="82587" y="24080"/>
+                  <a:pt x="90679" y="28575"/>
+                </a:cubicBezTo>
+                <a:cubicBezTo>
+                  <a:pt x="96885" y="32023"/>
+                  <a:pt x="103379" y="34925"/>
+                  <a:pt x="109729" y="38100"/>
+                </a:cubicBezTo>
+                <a:cubicBezTo>
+                  <a:pt x="112904" y="55563"/>
+                  <a:pt x="120615" y="72791"/>
+                  <a:pt x="119254" y="90488"/>
+                </a:cubicBezTo>
+                <a:cubicBezTo>
+                  <a:pt x="118815" y="96195"/>
+                  <a:pt x="110675" y="100421"/>
+                  <a:pt x="104966" y="100013"/>
+                </a:cubicBezTo>
+                <a:cubicBezTo>
+                  <a:pt x="85284" y="98607"/>
+                  <a:pt x="53254" y="88034"/>
+                  <a:pt x="33529" y="76200"/>
+                </a:cubicBezTo>
+                <a:cubicBezTo>
+                  <a:pt x="31604" y="75045"/>
+                  <a:pt x="24003" y="76994"/>
+                  <a:pt x="19241" y="71438"/>
+                </a:cubicBezTo>
+                <a:close/>
+              </a:path>
+            </a:pathLst>
+          </a:custGeom>
+          <a:noFill/>
+          <a:ln>
+            <a:solidFill>
+              <a:schemeClr val="tx1"/>
+            </a:solidFill>
+          </a:ln>
+        </p:spPr>
+        <p:style>
+          <a:lnRef idx="2">
+            <a:schemeClr val="accent1">
+              <a:shade val="15000"/>
+            </a:schemeClr>
+          </a:lnRef>
+          <a:fillRef idx="1">
+            <a:schemeClr val="accent1"/>
+          </a:fillRef>
+          <a:effectRef idx="0">
+            <a:schemeClr val="accent1"/>
+          </a:effectRef>
+          <a:fontRef idx="minor">
+            <a:schemeClr val="lt1"/>
+          </a:fontRef>
+        </p:style>
+        <p:txBody>
+          <a:bodyPr rtlCol="0" anchor="ctr"/>
+          <a:lstStyle/>
+          <a:p>
+            <a:pPr algn="ctr"/>
+            <a:endParaRPr lang="ko-KR" altLang="en-US"/>
+          </a:p>
+        </p:txBody>
+      </p:sp>
+      <p:sp>
+        <p:nvSpPr>
+          <p:cNvPr id="20" name="자유형: 도형 19">
+            <a:extLst>
+              <a:ext uri="{FF2B5EF4-FFF2-40B4-BE49-F238E27FC236}">
+                <a16:creationId xmlns:a16="http://schemas.microsoft.com/office/drawing/2014/main" id="{E309FAD8-4B1E-7D5F-A28B-0A530777A5FA}"/>
+              </a:ext>
+            </a:extLst>
+          </p:cNvPr>
+          <p:cNvSpPr/>
+          <p:nvPr/>
+        </p:nvSpPr>
+        <p:spPr>
+          <a:xfrm>
+            <a:off x="2871782" y="4700288"/>
+            <a:ext cx="1390727" cy="1100437"/>
+          </a:xfrm>
+          <a:custGeom>
+            <a:avLst/>
+            <a:gdLst>
+              <a:gd name="csX0" fmla="*/ 619125 w 1390727"/>
+              <a:gd name="csY0" fmla="*/ 176512 h 1100437"/>
+              <a:gd name="csX1" fmla="*/ 733425 w 1390727"/>
+              <a:gd name="csY1" fmla="*/ 267000 h 1100437"/>
+              <a:gd name="csX2" fmla="*/ 766763 w 1390727"/>
+              <a:gd name="csY2" fmla="*/ 300337 h 1100437"/>
+              <a:gd name="csX3" fmla="*/ 804863 w 1390727"/>
+              <a:gd name="csY3" fmla="*/ 352725 h 1100437"/>
+              <a:gd name="csX4" fmla="*/ 866775 w 1390727"/>
+              <a:gd name="csY4" fmla="*/ 419400 h 1100437"/>
+              <a:gd name="csX5" fmla="*/ 890588 w 1390727"/>
+              <a:gd name="csY5" fmla="*/ 452737 h 1100437"/>
+              <a:gd name="csX6" fmla="*/ 914400 w 1390727"/>
+              <a:gd name="csY6" fmla="*/ 471787 h 1100437"/>
+              <a:gd name="csX7" fmla="*/ 957263 w 1390727"/>
+              <a:gd name="csY7" fmla="*/ 524175 h 1100437"/>
+              <a:gd name="csX8" fmla="*/ 1009650 w 1390727"/>
+              <a:gd name="csY8" fmla="*/ 609900 h 1100437"/>
+              <a:gd name="csX9" fmla="*/ 1028700 w 1390727"/>
+              <a:gd name="csY9" fmla="*/ 638475 h 1100437"/>
+              <a:gd name="csX10" fmla="*/ 1133475 w 1390727"/>
+              <a:gd name="csY10" fmla="*/ 700387 h 1100437"/>
+              <a:gd name="csX11" fmla="*/ 1185863 w 1390727"/>
+              <a:gd name="csY11" fmla="*/ 719437 h 1100437"/>
+              <a:gd name="csX12" fmla="*/ 1219200 w 1390727"/>
+              <a:gd name="csY12" fmla="*/ 738487 h 1100437"/>
+              <a:gd name="csX13" fmla="*/ 1295400 w 1390727"/>
+              <a:gd name="csY13" fmla="*/ 786112 h 1100437"/>
+              <a:gd name="csX14" fmla="*/ 1333500 w 1390727"/>
+              <a:gd name="csY14" fmla="*/ 833737 h 1100437"/>
+              <a:gd name="csX15" fmla="*/ 1376363 w 1390727"/>
+              <a:gd name="csY15" fmla="*/ 900412 h 1100437"/>
+              <a:gd name="csX16" fmla="*/ 1381125 w 1390727"/>
+              <a:gd name="csY16" fmla="*/ 957562 h 1100437"/>
+              <a:gd name="csX17" fmla="*/ 1381125 w 1390727"/>
+              <a:gd name="csY17" fmla="*/ 1071862 h 1100437"/>
+              <a:gd name="csX18" fmla="*/ 1362075 w 1390727"/>
+              <a:gd name="csY18" fmla="*/ 1086150 h 1100437"/>
+              <a:gd name="csX19" fmla="*/ 1309688 w 1390727"/>
+              <a:gd name="csY19" fmla="*/ 1100437 h 1100437"/>
+              <a:gd name="csX20" fmla="*/ 1243013 w 1390727"/>
+              <a:gd name="csY20" fmla="*/ 1081387 h 1100437"/>
+              <a:gd name="csX21" fmla="*/ 1209675 w 1390727"/>
+              <a:gd name="csY21" fmla="*/ 1067100 h 1100437"/>
+              <a:gd name="csX22" fmla="*/ 1095375 w 1390727"/>
+              <a:gd name="csY22" fmla="*/ 1033762 h 1100437"/>
+              <a:gd name="csX23" fmla="*/ 1076325 w 1390727"/>
+              <a:gd name="csY23" fmla="*/ 1024237 h 1100437"/>
+              <a:gd name="csX24" fmla="*/ 995363 w 1390727"/>
+              <a:gd name="csY24" fmla="*/ 952800 h 1100437"/>
+              <a:gd name="csX25" fmla="*/ 981075 w 1390727"/>
+              <a:gd name="csY25" fmla="*/ 933750 h 1100437"/>
+              <a:gd name="csX26" fmla="*/ 947738 w 1390727"/>
+              <a:gd name="csY26" fmla="*/ 900412 h 1100437"/>
+              <a:gd name="csX27" fmla="*/ 900113 w 1390727"/>
+              <a:gd name="csY27" fmla="*/ 843262 h 1100437"/>
+              <a:gd name="csX28" fmla="*/ 885825 w 1390727"/>
+              <a:gd name="csY28" fmla="*/ 824212 h 1100437"/>
+              <a:gd name="csX29" fmla="*/ 790575 w 1390727"/>
+              <a:gd name="csY29" fmla="*/ 805162 h 1100437"/>
+              <a:gd name="csX30" fmla="*/ 757238 w 1390727"/>
+              <a:gd name="csY30" fmla="*/ 795637 h 1100437"/>
+              <a:gd name="csX31" fmla="*/ 652463 w 1390727"/>
+              <a:gd name="csY31" fmla="*/ 786112 h 1100437"/>
+              <a:gd name="csX32" fmla="*/ 633413 w 1390727"/>
+              <a:gd name="csY32" fmla="*/ 776587 h 1100437"/>
+              <a:gd name="csX33" fmla="*/ 604838 w 1390727"/>
+              <a:gd name="csY33" fmla="*/ 771825 h 1100437"/>
+              <a:gd name="csX34" fmla="*/ 585788 w 1390727"/>
+              <a:gd name="csY34" fmla="*/ 757537 h 1100437"/>
+              <a:gd name="csX35" fmla="*/ 504825 w 1390727"/>
+              <a:gd name="csY35" fmla="*/ 724200 h 1100437"/>
+              <a:gd name="csX36" fmla="*/ 457200 w 1390727"/>
+              <a:gd name="csY36" fmla="*/ 690862 h 1100437"/>
+              <a:gd name="csX37" fmla="*/ 371475 w 1390727"/>
+              <a:gd name="csY37" fmla="*/ 652762 h 1100437"/>
+              <a:gd name="csX38" fmla="*/ 280988 w 1390727"/>
+              <a:gd name="csY38" fmla="*/ 595612 h 1100437"/>
+              <a:gd name="csX39" fmla="*/ 209550 w 1390727"/>
+              <a:gd name="csY39" fmla="*/ 557512 h 1100437"/>
+              <a:gd name="csX40" fmla="*/ 195263 w 1390727"/>
+              <a:gd name="csY40" fmla="*/ 543225 h 1100437"/>
+              <a:gd name="csX41" fmla="*/ 147638 w 1390727"/>
+              <a:gd name="csY41" fmla="*/ 514650 h 1100437"/>
+              <a:gd name="csX42" fmla="*/ 109538 w 1390727"/>
+              <a:gd name="csY42" fmla="*/ 471787 h 1100437"/>
+              <a:gd name="csX43" fmla="*/ 66675 w 1390727"/>
+              <a:gd name="csY43" fmla="*/ 414637 h 1100437"/>
+              <a:gd name="csX44" fmla="*/ 52388 w 1390727"/>
+              <a:gd name="csY44" fmla="*/ 390825 h 1100437"/>
+              <a:gd name="csX45" fmla="*/ 42863 w 1390727"/>
+              <a:gd name="csY45" fmla="*/ 357487 h 1100437"/>
+              <a:gd name="csX46" fmla="*/ 23813 w 1390727"/>
+              <a:gd name="csY46" fmla="*/ 324150 h 1100437"/>
+              <a:gd name="csX47" fmla="*/ 14288 w 1390727"/>
+              <a:gd name="csY47" fmla="*/ 290812 h 1100437"/>
+              <a:gd name="csX48" fmla="*/ 0 w 1390727"/>
+              <a:gd name="csY48" fmla="*/ 247950 h 1100437"/>
+              <a:gd name="csX49" fmla="*/ 14288 w 1390727"/>
+              <a:gd name="csY49" fmla="*/ 166987 h 1100437"/>
+              <a:gd name="csX50" fmla="*/ 28575 w 1390727"/>
+              <a:gd name="csY50" fmla="*/ 162225 h 1100437"/>
+              <a:gd name="csX51" fmla="*/ 80963 w 1390727"/>
+              <a:gd name="csY51" fmla="*/ 95550 h 1100437"/>
+              <a:gd name="csX52" fmla="*/ 85725 w 1390727"/>
+              <a:gd name="csY52" fmla="*/ 81262 h 1100437"/>
+              <a:gd name="csX53" fmla="*/ 133350 w 1390727"/>
+              <a:gd name="csY53" fmla="*/ 24112 h 1100437"/>
+              <a:gd name="csX54" fmla="*/ 152400 w 1390727"/>
+              <a:gd name="csY54" fmla="*/ 300 h 1100437"/>
+              <a:gd name="csX55" fmla="*/ 285750 w 1390727"/>
+              <a:gd name="csY55" fmla="*/ 43162 h 1100437"/>
+              <a:gd name="csX56" fmla="*/ 319088 w 1390727"/>
+              <a:gd name="csY56" fmla="*/ 57450 h 1100437"/>
+              <a:gd name="csX57" fmla="*/ 442913 w 1390727"/>
+              <a:gd name="csY57" fmla="*/ 71737 h 1100437"/>
+              <a:gd name="csX58" fmla="*/ 466725 w 1390727"/>
+              <a:gd name="csY58" fmla="*/ 76500 h 1100437"/>
+              <a:gd name="csX59" fmla="*/ 495300 w 1390727"/>
+              <a:gd name="csY59" fmla="*/ 81262 h 1100437"/>
+              <a:gd name="csX60" fmla="*/ 519113 w 1390727"/>
+              <a:gd name="csY60" fmla="*/ 95550 h 1100437"/>
+              <a:gd name="csX61" fmla="*/ 552450 w 1390727"/>
+              <a:gd name="csY61" fmla="*/ 109837 h 1100437"/>
+              <a:gd name="csX62" fmla="*/ 628650 w 1390727"/>
+              <a:gd name="csY62" fmla="*/ 162225 h 1100437"/>
+              <a:gd name="csX63" fmla="*/ 619125 w 1390727"/>
+              <a:gd name="csY63" fmla="*/ 176512 h 1100437"/>
+            </a:gdLst>
+            <a:ahLst/>
+            <a:cxnLst>
+              <a:cxn ang="0">
+                <a:pos x="csX0" y="csY0"/>
+              </a:cxn>
+              <a:cxn ang="0">
+                <a:pos x="csX1" y="csY1"/>
+              </a:cxn>
+              <a:cxn ang="0">
+                <a:pos x="csX2" y="csY2"/>
+              </a:cxn>
+              <a:cxn ang="0">
+                <a:pos x="csX3" y="csY3"/>
+              </a:cxn>
+              <a:cxn ang="0">
+                <a:pos x="csX4" y="csY4"/>
+              </a:cxn>
+              <a:cxn ang="0">
+                <a:pos x="csX5" y="csY5"/>
+              </a:cxn>
+              <a:cxn ang="0">
+                <a:pos x="csX6" y="csY6"/>
+              </a:cxn>
+              <a:cxn ang="0">
+                <a:pos x="csX7" y="csY7"/>
+              </a:cxn>
+              <a:cxn ang="0">
+                <a:pos x="csX8" y="csY8"/>
+              </a:cxn>
+              <a:cxn ang="0">
+                <a:pos x="csX9" y="csY9"/>
+              </a:cxn>
+              <a:cxn ang="0">
+                <a:pos x="csX10" y="csY10"/>
+              </a:cxn>
+              <a:cxn ang="0">
+                <a:pos x="csX11" y="csY11"/>
+              </a:cxn>
+              <a:cxn ang="0">
+                <a:pos x="csX12" y="csY12"/>
+              </a:cxn>
+              <a:cxn ang="0">
+                <a:pos x="csX13" y="csY13"/>
+              </a:cxn>
+              <a:cxn ang="0">
+                <a:pos x="csX14" y="csY14"/>
+              </a:cxn>
+              <a:cxn ang="0">
+                <a:pos x="csX15" y="csY15"/>
+              </a:cxn>
+              <a:cxn ang="0">
+                <a:pos x="csX16" y="csY16"/>
+              </a:cxn>
+              <a:cxn ang="0">
+                <a:pos x="csX17" y="csY17"/>
+              </a:cxn>
+              <a:cxn ang="0">
+                <a:pos x="csX18" y="csY18"/>
+              </a:cxn>
+              <a:cxn ang="0">
+                <a:pos x="csX19" y="csY19"/>
+              </a:cxn>
+              <a:cxn ang="0">
+                <a:pos x="csX20" y="csY20"/>
+              </a:cxn>
+              <a:cxn ang="0">
+                <a:pos x="csX21" y="csY21"/>
+              </a:cxn>
+              <a:cxn ang="0">
+                <a:pos x="csX22" y="csY22"/>
+              </a:cxn>
+              <a:cxn ang="0">
+                <a:pos x="csX23" y="csY23"/>
+              </a:cxn>
+              <a:cxn ang="0">
+                <a:pos x="csX24" y="csY24"/>
+              </a:cxn>
+              <a:cxn ang="0">
+                <a:pos x="csX25" y="csY25"/>
+              </a:cxn>
+              <a:cxn ang="0">
+                <a:pos x="csX26" y="csY26"/>
+              </a:cxn>
+              <a:cxn ang="0">
+                <a:pos x="csX27" y="csY27"/>
+              </a:cxn>
+              <a:cxn ang="0">
+                <a:pos x="csX28" y="csY28"/>
+              </a:cxn>
+              <a:cxn ang="0">
+                <a:pos x="csX29" y="csY29"/>
+              </a:cxn>
+              <a:cxn ang="0">
+                <a:pos x="csX30" y="csY30"/>
+              </a:cxn>
+              <a:cxn ang="0">
+                <a:pos x="csX31" y="csY31"/>
+              </a:cxn>
+              <a:cxn ang="0">
+                <a:pos x="csX32" y="csY32"/>
+              </a:cxn>
+              <a:cxn ang="0">
+                <a:pos x="csX33" y="csY33"/>
+              </a:cxn>
+              <a:cxn ang="0">
+                <a:pos x="csX34" y="csY34"/>
+              </a:cxn>
+              <a:cxn ang="0">
+                <a:pos x="csX35" y="csY35"/>
+              </a:cxn>
+              <a:cxn ang="0">
+                <a:pos x="csX36" y="csY36"/>
+              </a:cxn>
+              <a:cxn ang="0">
+                <a:pos x="csX37" y="csY37"/>
+              </a:cxn>
+              <a:cxn ang="0">
+                <a:pos x="csX38" y="csY38"/>
+              </a:cxn>
+              <a:cxn ang="0">
+                <a:pos x="csX39" y="csY39"/>
+              </a:cxn>
+              <a:cxn ang="0">
+                <a:pos x="csX40" y="csY40"/>
+              </a:cxn>
+              <a:cxn ang="0">
+                <a:pos x="csX41" y="csY41"/>
+              </a:cxn>
+              <a:cxn ang="0">
+                <a:pos x="csX42" y="csY42"/>
+              </a:cxn>
+              <a:cxn ang="0">
+                <a:pos x="csX43" y="csY43"/>
+              </a:cxn>
+              <a:cxn ang="0">
+                <a:pos x="csX44" y="csY44"/>
+              </a:cxn>
+              <a:cxn ang="0">
+                <a:pos x="csX45" y="csY45"/>
+              </a:cxn>
+              <a:cxn ang="0">
+                <a:pos x="csX46" y="csY46"/>
+              </a:cxn>
+              <a:cxn ang="0">
+                <a:pos x="csX47" y="csY47"/>
+              </a:cxn>
+              <a:cxn ang="0">
+                <a:pos x="csX48" y="csY48"/>
+              </a:cxn>
+              <a:cxn ang="0">
+                <a:pos x="csX49" y="csY49"/>
+              </a:cxn>
+              <a:cxn ang="0">
+                <a:pos x="csX50" y="csY50"/>
+              </a:cxn>
+              <a:cxn ang="0">
+                <a:pos x="csX51" y="csY51"/>
+              </a:cxn>
+              <a:cxn ang="0">
+                <a:pos x="csX52" y="csY52"/>
+              </a:cxn>
+              <a:cxn ang="0">
+                <a:pos x="csX53" y="csY53"/>
+              </a:cxn>
+              <a:cxn ang="0">
+                <a:pos x="csX54" y="csY54"/>
+              </a:cxn>
+              <a:cxn ang="0">
+                <a:pos x="csX55" y="csY55"/>
+              </a:cxn>
+              <a:cxn ang="0">
+                <a:pos x="csX56" y="csY56"/>
+              </a:cxn>
+              <a:cxn ang="0">
+                <a:pos x="csX57" y="csY57"/>
+              </a:cxn>
+              <a:cxn ang="0">
+                <a:pos x="csX58" y="csY58"/>
+              </a:cxn>
+              <a:cxn ang="0">
+                <a:pos x="csX59" y="csY59"/>
+              </a:cxn>
+              <a:cxn ang="0">
+                <a:pos x="csX60" y="csY60"/>
+              </a:cxn>
+              <a:cxn ang="0">
+                <a:pos x="csX61" y="csY61"/>
+              </a:cxn>
+              <a:cxn ang="0">
+                <a:pos x="csX62" y="csY62"/>
+              </a:cxn>
+              <a:cxn ang="0">
+                <a:pos x="csX63" y="csY63"/>
+              </a:cxn>
+            </a:cxnLst>
+            <a:rect l="l" t="t" r="r" b="b"/>
+            <a:pathLst>
+              <a:path w="1390727" h="1100437">
+                <a:moveTo>
+                  <a:pt x="619125" y="176512"/>
+                </a:moveTo>
+                <a:cubicBezTo>
+                  <a:pt x="657225" y="206675"/>
+                  <a:pt x="699063" y="232639"/>
+                  <a:pt x="733425" y="267000"/>
+                </a:cubicBezTo>
+                <a:cubicBezTo>
+                  <a:pt x="744538" y="278112"/>
+                  <a:pt x="756612" y="288340"/>
+                  <a:pt x="766763" y="300337"/>
+                </a:cubicBezTo>
+                <a:cubicBezTo>
+                  <a:pt x="833383" y="379069"/>
+                  <a:pt x="741428" y="282946"/>
+                  <a:pt x="804863" y="352725"/>
+                </a:cubicBezTo>
+                <a:cubicBezTo>
+                  <a:pt x="848320" y="400528"/>
+                  <a:pt x="820873" y="362023"/>
+                  <a:pt x="866775" y="419400"/>
+                </a:cubicBezTo>
+                <a:cubicBezTo>
+                  <a:pt x="875306" y="430064"/>
+                  <a:pt x="881402" y="442632"/>
+                  <a:pt x="890588" y="452737"/>
+                </a:cubicBezTo>
+                <a:cubicBezTo>
+                  <a:pt x="897426" y="460258"/>
+                  <a:pt x="907464" y="464356"/>
+                  <a:pt x="914400" y="471787"/>
+                </a:cubicBezTo>
+                <a:cubicBezTo>
+                  <a:pt x="929795" y="488282"/>
+                  <a:pt x="957263" y="524175"/>
+                  <a:pt x="957263" y="524175"/>
+                </a:cubicBezTo>
+                <a:cubicBezTo>
+                  <a:pt x="976556" y="591700"/>
+                  <a:pt x="952501" y="524176"/>
+                  <a:pt x="1009650" y="609900"/>
+                </a:cubicBezTo>
+                <a:cubicBezTo>
+                  <a:pt x="1016000" y="619425"/>
+                  <a:pt x="1020144" y="630870"/>
+                  <a:pt x="1028700" y="638475"/>
+                </a:cubicBezTo>
+                <a:cubicBezTo>
+                  <a:pt x="1098654" y="700656"/>
+                  <a:pt x="1073654" y="673197"/>
+                  <a:pt x="1133475" y="700387"/>
+                </a:cubicBezTo>
+                <a:cubicBezTo>
+                  <a:pt x="1184769" y="723702"/>
+                  <a:pt x="1082487" y="693593"/>
+                  <a:pt x="1185863" y="719437"/>
+                </a:cubicBezTo>
+                <a:cubicBezTo>
+                  <a:pt x="1196975" y="725787"/>
+                  <a:pt x="1208347" y="731704"/>
+                  <a:pt x="1219200" y="738487"/>
+                </a:cubicBezTo>
+                <a:cubicBezTo>
+                  <a:pt x="1314332" y="797944"/>
+                  <a:pt x="1216133" y="740816"/>
+                  <a:pt x="1295400" y="786112"/>
+                </a:cubicBezTo>
+                <a:cubicBezTo>
+                  <a:pt x="1308100" y="801987"/>
+                  <a:pt x="1321440" y="817370"/>
+                  <a:pt x="1333500" y="833737"/>
+                </a:cubicBezTo>
+                <a:cubicBezTo>
+                  <a:pt x="1351645" y="858363"/>
+                  <a:pt x="1361630" y="875859"/>
+                  <a:pt x="1376363" y="900412"/>
+                </a:cubicBezTo>
+                <a:cubicBezTo>
+                  <a:pt x="1377950" y="919462"/>
+                  <a:pt x="1378934" y="938572"/>
+                  <a:pt x="1381125" y="957562"/>
+                </a:cubicBezTo>
+                <a:cubicBezTo>
+                  <a:pt x="1386070" y="1000423"/>
+                  <a:pt x="1400006" y="1030952"/>
+                  <a:pt x="1381125" y="1071862"/>
+                </a:cubicBezTo>
+                <a:cubicBezTo>
+                  <a:pt x="1377799" y="1079069"/>
+                  <a:pt x="1369301" y="1082865"/>
+                  <a:pt x="1362075" y="1086150"/>
+                </a:cubicBezTo>
+                <a:cubicBezTo>
+                  <a:pt x="1355151" y="1089297"/>
+                  <a:pt x="1321427" y="1097503"/>
+                  <a:pt x="1309688" y="1100437"/>
+                </a:cubicBezTo>
+                <a:cubicBezTo>
+                  <a:pt x="1287463" y="1094087"/>
+                  <a:pt x="1264941" y="1088696"/>
+                  <a:pt x="1243013" y="1081387"/>
+                </a:cubicBezTo>
+                <a:cubicBezTo>
+                  <a:pt x="1231543" y="1077564"/>
+                  <a:pt x="1221274" y="1070511"/>
+                  <a:pt x="1209675" y="1067100"/>
+                </a:cubicBezTo>
+                <a:cubicBezTo>
+                  <a:pt x="1087467" y="1031157"/>
+                  <a:pt x="1252284" y="1094783"/>
+                  <a:pt x="1095375" y="1033762"/>
+                </a:cubicBezTo>
+                <a:cubicBezTo>
+                  <a:pt x="1088758" y="1031189"/>
+                  <a:pt x="1081843" y="1028704"/>
+                  <a:pt x="1076325" y="1024237"/>
+                </a:cubicBezTo>
+                <a:cubicBezTo>
+                  <a:pt x="1048351" y="1001592"/>
+                  <a:pt x="1016958" y="981592"/>
+                  <a:pt x="995363" y="952800"/>
+                </a:cubicBezTo>
+                <a:cubicBezTo>
+                  <a:pt x="990600" y="946450"/>
+                  <a:pt x="986414" y="939623"/>
+                  <a:pt x="981075" y="933750"/>
+                </a:cubicBezTo>
+                <a:cubicBezTo>
+                  <a:pt x="970504" y="922121"/>
+                  <a:pt x="957447" y="912769"/>
+                  <a:pt x="947738" y="900412"/>
+                </a:cubicBezTo>
+                <a:cubicBezTo>
+                  <a:pt x="854215" y="781381"/>
+                  <a:pt x="1004707" y="947856"/>
+                  <a:pt x="900113" y="843262"/>
+                </a:cubicBezTo>
+                <a:cubicBezTo>
+                  <a:pt x="894500" y="837649"/>
+                  <a:pt x="893018" y="827569"/>
+                  <a:pt x="885825" y="824212"/>
+                </a:cubicBezTo>
+                <a:cubicBezTo>
+                  <a:pt x="860376" y="812336"/>
+                  <a:pt x="819403" y="808766"/>
+                  <a:pt x="790575" y="805162"/>
+                </a:cubicBezTo>
+                <a:cubicBezTo>
+                  <a:pt x="779463" y="801987"/>
+                  <a:pt x="768706" y="797070"/>
+                  <a:pt x="757238" y="795637"/>
+                </a:cubicBezTo>
+                <a:cubicBezTo>
+                  <a:pt x="589655" y="774690"/>
+                  <a:pt x="726300" y="800881"/>
+                  <a:pt x="652463" y="786112"/>
+                </a:cubicBezTo>
+                <a:cubicBezTo>
+                  <a:pt x="646113" y="782937"/>
+                  <a:pt x="640213" y="778627"/>
+                  <a:pt x="633413" y="776587"/>
+                </a:cubicBezTo>
+                <a:cubicBezTo>
+                  <a:pt x="624164" y="773812"/>
+                  <a:pt x="613804" y="775411"/>
+                  <a:pt x="604838" y="771825"/>
+                </a:cubicBezTo>
+                <a:cubicBezTo>
+                  <a:pt x="597468" y="768877"/>
+                  <a:pt x="592644" y="761537"/>
+                  <a:pt x="585788" y="757537"/>
+                </a:cubicBezTo>
+                <a:cubicBezTo>
+                  <a:pt x="551408" y="737482"/>
+                  <a:pt x="542925" y="736899"/>
+                  <a:pt x="504825" y="724200"/>
+                </a:cubicBezTo>
+                <a:cubicBezTo>
+                  <a:pt x="488950" y="713087"/>
+                  <a:pt x="474366" y="699854"/>
+                  <a:pt x="457200" y="690862"/>
+                </a:cubicBezTo>
+                <a:cubicBezTo>
+                  <a:pt x="353134" y="636350"/>
+                  <a:pt x="448258" y="702444"/>
+                  <a:pt x="371475" y="652762"/>
+                </a:cubicBezTo>
+                <a:cubicBezTo>
+                  <a:pt x="298763" y="605714"/>
+                  <a:pt x="350655" y="632495"/>
+                  <a:pt x="280988" y="595612"/>
+                </a:cubicBezTo>
+                <a:cubicBezTo>
+                  <a:pt x="261081" y="585073"/>
+                  <a:pt x="228498" y="570775"/>
+                  <a:pt x="209550" y="557512"/>
+                </a:cubicBezTo>
+                <a:cubicBezTo>
+                  <a:pt x="204032" y="553650"/>
+                  <a:pt x="200579" y="547360"/>
+                  <a:pt x="195263" y="543225"/>
+                </a:cubicBezTo>
+                <a:cubicBezTo>
+                  <a:pt x="174574" y="527133"/>
+                  <a:pt x="168373" y="525018"/>
+                  <a:pt x="147638" y="514650"/>
+                </a:cubicBezTo>
+                <a:cubicBezTo>
+                  <a:pt x="124482" y="479915"/>
+                  <a:pt x="156655" y="526152"/>
+                  <a:pt x="109538" y="471787"/>
+                </a:cubicBezTo>
+                <a:cubicBezTo>
+                  <a:pt x="97438" y="457826"/>
+                  <a:pt x="78412" y="433417"/>
+                  <a:pt x="66675" y="414637"/>
+                </a:cubicBezTo>
+                <a:cubicBezTo>
+                  <a:pt x="61769" y="406788"/>
+                  <a:pt x="57150" y="398762"/>
+                  <a:pt x="52388" y="390825"/>
+                </a:cubicBezTo>
+                <a:cubicBezTo>
+                  <a:pt x="49213" y="379712"/>
+                  <a:pt x="46813" y="368349"/>
+                  <a:pt x="42863" y="357487"/>
+                </a:cubicBezTo>
+                <a:cubicBezTo>
+                  <a:pt x="38029" y="344193"/>
+                  <a:pt x="31431" y="335576"/>
+                  <a:pt x="23813" y="324150"/>
+                </a:cubicBezTo>
+                <a:cubicBezTo>
+                  <a:pt x="20638" y="313037"/>
+                  <a:pt x="18238" y="301674"/>
+                  <a:pt x="14288" y="290812"/>
+                </a:cubicBezTo>
+                <a:cubicBezTo>
+                  <a:pt x="-3240" y="242609"/>
+                  <a:pt x="11153" y="303708"/>
+                  <a:pt x="0" y="247950"/>
+                </a:cubicBezTo>
+                <a:cubicBezTo>
+                  <a:pt x="4763" y="220962"/>
+                  <a:pt x="5622" y="192985"/>
+                  <a:pt x="14288" y="166987"/>
+                </a:cubicBezTo>
+                <a:cubicBezTo>
+                  <a:pt x="15875" y="162225"/>
+                  <a:pt x="24797" y="165531"/>
+                  <a:pt x="28575" y="162225"/>
+                </a:cubicBezTo>
+                <a:cubicBezTo>
+                  <a:pt x="38461" y="153575"/>
+                  <a:pt x="75793" y="102443"/>
+                  <a:pt x="80963" y="95550"/>
+                </a:cubicBezTo>
+                <a:cubicBezTo>
+                  <a:pt x="82550" y="90787"/>
+                  <a:pt x="82756" y="85310"/>
+                  <a:pt x="85725" y="81262"/>
+                </a:cubicBezTo>
+                <a:cubicBezTo>
+                  <a:pt x="100389" y="61265"/>
+                  <a:pt x="133350" y="24112"/>
+                  <a:pt x="133350" y="24112"/>
+                </a:cubicBezTo>
+                <a:cubicBezTo>
+                  <a:pt x="135442" y="17836"/>
+                  <a:pt x="139045" y="-2716"/>
+                  <a:pt x="152400" y="300"/>
+                </a:cubicBezTo>
+                <a:cubicBezTo>
+                  <a:pt x="197943" y="10584"/>
+                  <a:pt x="242836" y="24770"/>
+                  <a:pt x="285750" y="43162"/>
+                </a:cubicBezTo>
+                <a:cubicBezTo>
+                  <a:pt x="296863" y="47925"/>
+                  <a:pt x="307193" y="55287"/>
+                  <a:pt x="319088" y="57450"/>
+                </a:cubicBezTo>
+                <a:cubicBezTo>
+                  <a:pt x="359967" y="64882"/>
+                  <a:pt x="401706" y="66420"/>
+                  <a:pt x="442913" y="71737"/>
+                </a:cubicBezTo>
+                <a:cubicBezTo>
+                  <a:pt x="450941" y="72773"/>
+                  <a:pt x="458761" y="75052"/>
+                  <a:pt x="466725" y="76500"/>
+                </a:cubicBezTo>
+                <a:cubicBezTo>
+                  <a:pt x="476226" y="78227"/>
+                  <a:pt x="485775" y="79675"/>
+                  <a:pt x="495300" y="81262"/>
+                </a:cubicBezTo>
+                <a:cubicBezTo>
+                  <a:pt x="503238" y="86025"/>
+                  <a:pt x="510833" y="91410"/>
+                  <a:pt x="519113" y="95550"/>
+                </a:cubicBezTo>
+                <a:cubicBezTo>
+                  <a:pt x="529926" y="100957"/>
+                  <a:pt x="542123" y="103551"/>
+                  <a:pt x="552450" y="109837"/>
+                </a:cubicBezTo>
+                <a:cubicBezTo>
+                  <a:pt x="578780" y="125864"/>
+                  <a:pt x="628650" y="162225"/>
+                  <a:pt x="628650" y="162225"/>
+                </a:cubicBezTo>
+                <a:lnTo>
+                  <a:pt x="619125" y="176512"/>
+                </a:lnTo>
+                <a:close/>
+              </a:path>
+            </a:pathLst>
+          </a:custGeom>
+          <a:noFill/>
+          <a:ln>
+            <a:solidFill>
+              <a:schemeClr val="tx1"/>
+            </a:solidFill>
+          </a:ln>
+        </p:spPr>
+        <p:style>
+          <a:lnRef idx="2">
+            <a:schemeClr val="accent1">
+              <a:shade val="15000"/>
+            </a:schemeClr>
+          </a:lnRef>
+          <a:fillRef idx="1">
+            <a:schemeClr val="accent1"/>
+          </a:fillRef>
+          <a:effectRef idx="0">
+            <a:schemeClr val="accent1"/>
+          </a:effectRef>
+          <a:fontRef idx="minor">
+            <a:schemeClr val="lt1"/>
+          </a:fontRef>
+        </p:style>
+        <p:txBody>
+          <a:bodyPr rtlCol="0" anchor="ctr"/>
+          <a:lstStyle/>
+          <a:p>
+            <a:pPr algn="ctr"/>
+            <a:endParaRPr lang="ko-KR" altLang="en-US"/>
+          </a:p>
+        </p:txBody>
+      </p:sp>
+      <p:sp>
+        <p:nvSpPr>
+          <p:cNvPr id="22" name="자유형: 도형 21">
+            <a:extLst>
+              <a:ext uri="{FF2B5EF4-FFF2-40B4-BE49-F238E27FC236}">
+                <a16:creationId xmlns:a16="http://schemas.microsoft.com/office/drawing/2014/main" id="{0E3D2D36-1489-F68F-A3F1-28392939E1C2}"/>
+              </a:ext>
+            </a:extLst>
+          </p:cNvPr>
+          <p:cNvSpPr/>
+          <p:nvPr/>
+        </p:nvSpPr>
+        <p:spPr>
+          <a:xfrm>
+            <a:off x="2971795" y="4572000"/>
+            <a:ext cx="1638302" cy="1238250"/>
+          </a:xfrm>
+          <a:custGeom>
+            <a:avLst/>
+            <a:gdLst>
+              <a:gd name="csX0" fmla="*/ 0 w 1638302"/>
+              <a:gd name="csY0" fmla="*/ 0 h 1238250"/>
+              <a:gd name="csX1" fmla="*/ 185737 w 1638302"/>
+              <a:gd name="csY1" fmla="*/ 14288 h 1238250"/>
+              <a:gd name="csX2" fmla="*/ 238125 w 1638302"/>
+              <a:gd name="csY2" fmla="*/ 42863 h 1238250"/>
+              <a:gd name="csX3" fmla="*/ 276225 w 1638302"/>
+              <a:gd name="csY3" fmla="*/ 57150 h 1238250"/>
+              <a:gd name="csX4" fmla="*/ 295275 w 1638302"/>
+              <a:gd name="csY4" fmla="*/ 66675 h 1238250"/>
+              <a:gd name="csX5" fmla="*/ 381000 w 1638302"/>
+              <a:gd name="csY5" fmla="*/ 95250 h 1238250"/>
+              <a:gd name="csX6" fmla="*/ 461962 w 1638302"/>
+              <a:gd name="csY6" fmla="*/ 100013 h 1238250"/>
+              <a:gd name="csX7" fmla="*/ 647700 w 1638302"/>
+              <a:gd name="csY7" fmla="*/ 114300 h 1238250"/>
+              <a:gd name="csX8" fmla="*/ 700087 w 1638302"/>
+              <a:gd name="csY8" fmla="*/ 123825 h 1238250"/>
+              <a:gd name="csX9" fmla="*/ 747712 w 1638302"/>
+              <a:gd name="csY9" fmla="*/ 128588 h 1238250"/>
+              <a:gd name="csX10" fmla="*/ 900112 w 1638302"/>
+              <a:gd name="csY10" fmla="*/ 180975 h 1238250"/>
+              <a:gd name="csX11" fmla="*/ 1114425 w 1638302"/>
+              <a:gd name="csY11" fmla="*/ 319088 h 1238250"/>
+              <a:gd name="csX12" fmla="*/ 1157287 w 1638302"/>
+              <a:gd name="csY12" fmla="*/ 342900 h 1238250"/>
+              <a:gd name="csX13" fmla="*/ 1238250 w 1638302"/>
+              <a:gd name="csY13" fmla="*/ 428625 h 1238250"/>
+              <a:gd name="csX14" fmla="*/ 1257300 w 1638302"/>
+              <a:gd name="csY14" fmla="*/ 490538 h 1238250"/>
+              <a:gd name="csX15" fmla="*/ 1262062 w 1638302"/>
+              <a:gd name="csY15" fmla="*/ 509588 h 1238250"/>
+              <a:gd name="csX16" fmla="*/ 1362075 w 1638302"/>
+              <a:gd name="csY16" fmla="*/ 619125 h 1238250"/>
+              <a:gd name="csX17" fmla="*/ 1433512 w 1638302"/>
+              <a:gd name="csY17" fmla="*/ 714375 h 1238250"/>
+              <a:gd name="csX18" fmla="*/ 1471612 w 1638302"/>
+              <a:gd name="csY18" fmla="*/ 752475 h 1238250"/>
+              <a:gd name="csX19" fmla="*/ 1519237 w 1638302"/>
+              <a:gd name="csY19" fmla="*/ 804863 h 1238250"/>
+              <a:gd name="csX20" fmla="*/ 1557337 w 1638302"/>
+              <a:gd name="csY20" fmla="*/ 871538 h 1238250"/>
+              <a:gd name="csX21" fmla="*/ 1585912 w 1638302"/>
+              <a:gd name="csY21" fmla="*/ 923925 h 1238250"/>
+              <a:gd name="csX22" fmla="*/ 1600200 w 1638302"/>
+              <a:gd name="csY22" fmla="*/ 962025 h 1238250"/>
+              <a:gd name="csX23" fmla="*/ 1619250 w 1638302"/>
+              <a:gd name="csY23" fmla="*/ 1190625 h 1238250"/>
+              <a:gd name="csX24" fmla="*/ 1638300 w 1638302"/>
+              <a:gd name="csY24" fmla="*/ 1238250 h 1238250"/>
+            </a:gdLst>
+            <a:ahLst/>
+            <a:cxnLst>
+              <a:cxn ang="0">
+                <a:pos x="csX0" y="csY0"/>
+              </a:cxn>
+              <a:cxn ang="0">
+                <a:pos x="csX1" y="csY1"/>
+              </a:cxn>
+              <a:cxn ang="0">
+                <a:pos x="csX2" y="csY2"/>
+              </a:cxn>
+              <a:cxn ang="0">
+                <a:pos x="csX3" y="csY3"/>
+              </a:cxn>
+              <a:cxn ang="0">
+                <a:pos x="csX4" y="csY4"/>
+              </a:cxn>
+              <a:cxn ang="0">
+                <a:pos x="csX5" y="csY5"/>
+              </a:cxn>
+              <a:cxn ang="0">
+                <a:pos x="csX6" y="csY6"/>
+              </a:cxn>
+              <a:cxn ang="0">
+                <a:pos x="csX7" y="csY7"/>
+              </a:cxn>
+              <a:cxn ang="0">
+                <a:pos x="csX8" y="csY8"/>
+              </a:cxn>
+              <a:cxn ang="0">
+                <a:pos x="csX9" y="csY9"/>
+              </a:cxn>
+              <a:cxn ang="0">
+                <a:pos x="csX10" y="csY10"/>
+              </a:cxn>
+              <a:cxn ang="0">
+                <a:pos x="csX11" y="csY11"/>
+              </a:cxn>
+              <a:cxn ang="0">
+                <a:pos x="csX12" y="csY12"/>
+              </a:cxn>
+              <a:cxn ang="0">
+                <a:pos x="csX13" y="csY13"/>
+              </a:cxn>
+              <a:cxn ang="0">
+                <a:pos x="csX14" y="csY14"/>
+              </a:cxn>
+              <a:cxn ang="0">
+                <a:pos x="csX15" y="csY15"/>
+              </a:cxn>
+              <a:cxn ang="0">
+                <a:pos x="csX16" y="csY16"/>
+              </a:cxn>
+              <a:cxn ang="0">
+                <a:pos x="csX17" y="csY17"/>
+              </a:cxn>
+              <a:cxn ang="0">
+                <a:pos x="csX18" y="csY18"/>
+              </a:cxn>
+              <a:cxn ang="0">
+                <a:pos x="csX19" y="csY19"/>
+              </a:cxn>
+              <a:cxn ang="0">
+                <a:pos x="csX20" y="csY20"/>
+              </a:cxn>
+              <a:cxn ang="0">
+                <a:pos x="csX21" y="csY21"/>
+              </a:cxn>
+              <a:cxn ang="0">
+                <a:pos x="csX22" y="csY22"/>
+              </a:cxn>
+              <a:cxn ang="0">
+                <a:pos x="csX23" y="csY23"/>
+              </a:cxn>
+              <a:cxn ang="0">
+                <a:pos x="csX24" y="csY24"/>
+              </a:cxn>
+            </a:cxnLst>
+            <a:rect l="l" t="t" r="r" b="b"/>
+            <a:pathLst>
+              <a:path w="1638302" h="1238250">
+                <a:moveTo>
+                  <a:pt x="0" y="0"/>
+                </a:moveTo>
+                <a:cubicBezTo>
+                  <a:pt x="61912" y="4763"/>
+                  <a:pt x="124163" y="6257"/>
+                  <a:pt x="185737" y="14288"/>
+                </a:cubicBezTo>
+                <a:cubicBezTo>
+                  <a:pt x="223190" y="19173"/>
+                  <a:pt x="211491" y="29546"/>
+                  <a:pt x="238125" y="42863"/>
+                </a:cubicBezTo>
+                <a:cubicBezTo>
+                  <a:pt x="250257" y="48929"/>
+                  <a:pt x="263705" y="51933"/>
+                  <a:pt x="276225" y="57150"/>
+                </a:cubicBezTo>
+                <a:cubicBezTo>
+                  <a:pt x="282778" y="59881"/>
+                  <a:pt x="288722" y="63944"/>
+                  <a:pt x="295275" y="66675"/>
+                </a:cubicBezTo>
+                <a:cubicBezTo>
+                  <a:pt x="312524" y="73862"/>
+                  <a:pt x="364825" y="92854"/>
+                  <a:pt x="381000" y="95250"/>
+                </a:cubicBezTo>
+                <a:cubicBezTo>
+                  <a:pt x="407742" y="99212"/>
+                  <a:pt x="434975" y="98425"/>
+                  <a:pt x="461962" y="100013"/>
+                </a:cubicBezTo>
+                <a:cubicBezTo>
+                  <a:pt x="651793" y="125324"/>
+                  <a:pt x="381468" y="91481"/>
+                  <a:pt x="647700" y="114300"/>
+                </a:cubicBezTo>
+                <a:cubicBezTo>
+                  <a:pt x="665384" y="115816"/>
+                  <a:pt x="682517" y="121315"/>
+                  <a:pt x="700087" y="123825"/>
+                </a:cubicBezTo>
+                <a:cubicBezTo>
+                  <a:pt x="715881" y="126081"/>
+                  <a:pt x="731837" y="127000"/>
+                  <a:pt x="747712" y="128588"/>
+                </a:cubicBezTo>
+                <a:cubicBezTo>
+                  <a:pt x="809322" y="142805"/>
+                  <a:pt x="839848" y="146135"/>
+                  <a:pt x="900112" y="180975"/>
+                </a:cubicBezTo>
+                <a:cubicBezTo>
+                  <a:pt x="973688" y="223511"/>
+                  <a:pt x="1040133" y="277815"/>
+                  <a:pt x="1114425" y="319088"/>
+                </a:cubicBezTo>
+                <a:cubicBezTo>
+                  <a:pt x="1128712" y="327025"/>
+                  <a:pt x="1144524" y="332690"/>
+                  <a:pt x="1157287" y="342900"/>
+                </a:cubicBezTo>
+                <a:cubicBezTo>
+                  <a:pt x="1185802" y="365712"/>
+                  <a:pt x="1213884" y="400199"/>
+                  <a:pt x="1238250" y="428625"/>
+                </a:cubicBezTo>
+                <a:cubicBezTo>
+                  <a:pt x="1249034" y="471765"/>
+                  <a:pt x="1235490" y="419656"/>
+                  <a:pt x="1257300" y="490538"/>
+                </a:cubicBezTo>
+                <a:cubicBezTo>
+                  <a:pt x="1259225" y="496794"/>
+                  <a:pt x="1257927" y="504514"/>
+                  <a:pt x="1262062" y="509588"/>
+                </a:cubicBezTo>
+                <a:cubicBezTo>
+                  <a:pt x="1293293" y="547917"/>
+                  <a:pt x="1332410" y="579571"/>
+                  <a:pt x="1362075" y="619125"/>
+                </a:cubicBezTo>
+                <a:cubicBezTo>
+                  <a:pt x="1385887" y="650875"/>
+                  <a:pt x="1405449" y="686312"/>
+                  <a:pt x="1433512" y="714375"/>
+                </a:cubicBezTo>
+                <a:cubicBezTo>
+                  <a:pt x="1446212" y="727075"/>
+                  <a:pt x="1459923" y="738838"/>
+                  <a:pt x="1471612" y="752475"/>
+                </a:cubicBezTo>
+                <a:cubicBezTo>
+                  <a:pt x="1523469" y="812974"/>
+                  <a:pt x="1453784" y="750318"/>
+                  <a:pt x="1519237" y="804863"/>
+                </a:cubicBezTo>
+                <a:cubicBezTo>
+                  <a:pt x="1531937" y="827088"/>
+                  <a:pt x="1544511" y="849385"/>
+                  <a:pt x="1557337" y="871538"/>
+                </a:cubicBezTo>
+                <a:cubicBezTo>
+                  <a:pt x="1570276" y="893887"/>
+                  <a:pt x="1575341" y="899259"/>
+                  <a:pt x="1585912" y="923925"/>
+                </a:cubicBezTo>
+                <a:cubicBezTo>
+                  <a:pt x="1591255" y="936392"/>
+                  <a:pt x="1595437" y="949325"/>
+                  <a:pt x="1600200" y="962025"/>
+                </a:cubicBezTo>
+                <a:cubicBezTo>
+                  <a:pt x="1603658" y="1010447"/>
+                  <a:pt x="1615561" y="1182324"/>
+                  <a:pt x="1619250" y="1190625"/>
+                </a:cubicBezTo>
+                <a:cubicBezTo>
+                  <a:pt x="1638945" y="1234939"/>
+                  <a:pt x="1638300" y="1217853"/>
+                  <a:pt x="1638300" y="1238250"/>
+                </a:cubicBezTo>
+              </a:path>
+            </a:pathLst>
+          </a:custGeom>
+          <a:noFill/>
+        </p:spPr>
+        <p:style>
+          <a:lnRef idx="2">
+            <a:schemeClr val="accent1">
+              <a:shade val="15000"/>
+            </a:schemeClr>
+          </a:lnRef>
+          <a:fillRef idx="1">
+            <a:schemeClr val="accent1"/>
+          </a:fillRef>
+          <a:effectRef idx="0">
+            <a:schemeClr val="accent1"/>
+          </a:effectRef>
+          <a:fontRef idx="minor">
+            <a:schemeClr val="lt1"/>
+          </a:fontRef>
+        </p:style>
+        <p:txBody>
+          <a:bodyPr rtlCol="0" anchor="ctr"/>
+          <a:lstStyle/>
+          <a:p>
+            <a:pPr algn="ctr"/>
+            <a:endParaRPr lang="ko-KR" altLang="en-US"/>
+          </a:p>
+        </p:txBody>
+      </p:sp>
+      <p:sp>
+        <p:nvSpPr>
+          <p:cNvPr id="24" name="자유형: 도형 23">
+            <a:extLst>
+              <a:ext uri="{FF2B5EF4-FFF2-40B4-BE49-F238E27FC236}">
+                <a16:creationId xmlns:a16="http://schemas.microsoft.com/office/drawing/2014/main" id="{0725C691-545A-65AB-D83E-83006CF5B2F1}"/>
+              </a:ext>
+            </a:extLst>
+          </p:cNvPr>
+          <p:cNvSpPr/>
+          <p:nvPr/>
+        </p:nvSpPr>
+        <p:spPr>
+          <a:xfrm>
+            <a:off x="2666995" y="5019675"/>
+            <a:ext cx="1155680" cy="824634"/>
+          </a:xfrm>
+          <a:custGeom>
+            <a:avLst/>
+            <a:gdLst>
+              <a:gd name="csX0" fmla="*/ 0 w 1155680"/>
+              <a:gd name="csY0" fmla="*/ 0 h 824634"/>
+              <a:gd name="csX1" fmla="*/ 57150 w 1155680"/>
+              <a:gd name="csY1" fmla="*/ 176213 h 824634"/>
+              <a:gd name="csX2" fmla="*/ 90487 w 1155680"/>
+              <a:gd name="csY2" fmla="*/ 242888 h 824634"/>
+              <a:gd name="csX3" fmla="*/ 109537 w 1155680"/>
+              <a:gd name="csY3" fmla="*/ 266700 h 824634"/>
+              <a:gd name="csX4" fmla="*/ 123825 w 1155680"/>
+              <a:gd name="csY4" fmla="*/ 300038 h 824634"/>
+              <a:gd name="csX5" fmla="*/ 142875 w 1155680"/>
+              <a:gd name="csY5" fmla="*/ 314325 h 824634"/>
+              <a:gd name="csX6" fmla="*/ 204787 w 1155680"/>
+              <a:gd name="csY6" fmla="*/ 357188 h 824634"/>
+              <a:gd name="csX7" fmla="*/ 276225 w 1155680"/>
+              <a:gd name="csY7" fmla="*/ 404813 h 824634"/>
+              <a:gd name="csX8" fmla="*/ 319087 w 1155680"/>
+              <a:gd name="csY8" fmla="*/ 442913 h 824634"/>
+              <a:gd name="csX9" fmla="*/ 352425 w 1155680"/>
+              <a:gd name="csY9" fmla="*/ 476250 h 824634"/>
+              <a:gd name="csX10" fmla="*/ 385762 w 1155680"/>
+              <a:gd name="csY10" fmla="*/ 495300 h 824634"/>
+              <a:gd name="csX11" fmla="*/ 404812 w 1155680"/>
+              <a:gd name="csY11" fmla="*/ 514350 h 824634"/>
+              <a:gd name="csX12" fmla="*/ 442912 w 1155680"/>
+              <a:gd name="csY12" fmla="*/ 533400 h 824634"/>
+              <a:gd name="csX13" fmla="*/ 533400 w 1155680"/>
+              <a:gd name="csY13" fmla="*/ 581025 h 824634"/>
+              <a:gd name="csX14" fmla="*/ 609600 w 1155680"/>
+              <a:gd name="csY14" fmla="*/ 600075 h 824634"/>
+              <a:gd name="csX15" fmla="*/ 819150 w 1155680"/>
+              <a:gd name="csY15" fmla="*/ 595313 h 824634"/>
+              <a:gd name="csX16" fmla="*/ 895350 w 1155680"/>
+              <a:gd name="csY16" fmla="*/ 619125 h 824634"/>
+              <a:gd name="csX17" fmla="*/ 928687 w 1155680"/>
+              <a:gd name="csY17" fmla="*/ 633413 h 824634"/>
+              <a:gd name="csX18" fmla="*/ 957262 w 1155680"/>
+              <a:gd name="csY18" fmla="*/ 638175 h 824634"/>
+              <a:gd name="csX19" fmla="*/ 1009650 w 1155680"/>
+              <a:gd name="csY19" fmla="*/ 676275 h 824634"/>
+              <a:gd name="csX20" fmla="*/ 1028700 w 1155680"/>
+              <a:gd name="csY20" fmla="*/ 690563 h 824634"/>
+              <a:gd name="csX21" fmla="*/ 1081087 w 1155680"/>
+              <a:gd name="csY21" fmla="*/ 733425 h 824634"/>
+              <a:gd name="csX22" fmla="*/ 1090612 w 1155680"/>
+              <a:gd name="csY22" fmla="*/ 747713 h 824634"/>
+              <a:gd name="csX23" fmla="*/ 1100137 w 1155680"/>
+              <a:gd name="csY23" fmla="*/ 766763 h 824634"/>
+              <a:gd name="csX24" fmla="*/ 1123950 w 1155680"/>
+              <a:gd name="csY24" fmla="*/ 790575 h 824634"/>
+              <a:gd name="csX25" fmla="*/ 1152525 w 1155680"/>
+              <a:gd name="csY25" fmla="*/ 823913 h 824634"/>
+              <a:gd name="csX26" fmla="*/ 1152525 w 1155680"/>
+              <a:gd name="csY26" fmla="*/ 800100 h 824634"/>
+            </a:gdLst>
+            <a:ahLst/>
+            <a:cxnLst>
+              <a:cxn ang="0">
+                <a:pos x="csX0" y="csY0"/>
+              </a:cxn>
+              <a:cxn ang="0">
+                <a:pos x="csX1" y="csY1"/>
+              </a:cxn>
+              <a:cxn ang="0">
+                <a:pos x="csX2" y="csY2"/>
+              </a:cxn>
+              <a:cxn ang="0">
+                <a:pos x="csX3" y="csY3"/>
+              </a:cxn>
+              <a:cxn ang="0">
+                <a:pos x="csX4" y="csY4"/>
+              </a:cxn>
+              <a:cxn ang="0">
+                <a:pos x="csX5" y="csY5"/>
+              </a:cxn>
+              <a:cxn ang="0">
+                <a:pos x="csX6" y="csY6"/>
+              </a:cxn>
+              <a:cxn ang="0">
+                <a:pos x="csX7" y="csY7"/>
+              </a:cxn>
+              <a:cxn ang="0">
+                <a:pos x="csX8" y="csY8"/>
+              </a:cxn>
+              <a:cxn ang="0">
+                <a:pos x="csX9" y="csY9"/>
+              </a:cxn>
+              <a:cxn ang="0">
+                <a:pos x="csX10" y="csY10"/>
+              </a:cxn>
+              <a:cxn ang="0">
+                <a:pos x="csX11" y="csY11"/>
+              </a:cxn>
+              <a:cxn ang="0">
+                <a:pos x="csX12" y="csY12"/>
+              </a:cxn>
+              <a:cxn ang="0">
+                <a:pos x="csX13" y="csY13"/>
+              </a:cxn>
+              <a:cxn ang="0">
+                <a:pos x="csX14" y="csY14"/>
+              </a:cxn>
+              <a:cxn ang="0">
+                <a:pos x="csX15" y="csY15"/>
+              </a:cxn>
+              <a:cxn ang="0">
+                <a:pos x="csX16" y="csY16"/>
+              </a:cxn>
+              <a:cxn ang="0">
+                <a:pos x="csX17" y="csY17"/>
+              </a:cxn>
+              <a:cxn ang="0">
+                <a:pos x="csX18" y="csY18"/>
+              </a:cxn>
+              <a:cxn ang="0">
+                <a:pos x="csX19" y="csY19"/>
+              </a:cxn>
+              <a:cxn ang="0">
+                <a:pos x="csX20" y="csY20"/>
+              </a:cxn>
+              <a:cxn ang="0">
+                <a:pos x="csX21" y="csY21"/>
+              </a:cxn>
+              <a:cxn ang="0">
+                <a:pos x="csX22" y="csY22"/>
+              </a:cxn>
+              <a:cxn ang="0">
+                <a:pos x="csX23" y="csY23"/>
+              </a:cxn>
+              <a:cxn ang="0">
+                <a:pos x="csX24" y="csY24"/>
+              </a:cxn>
+              <a:cxn ang="0">
+                <a:pos x="csX25" y="csY25"/>
+              </a:cxn>
+              <a:cxn ang="0">
+                <a:pos x="csX26" y="csY26"/>
+              </a:cxn>
+            </a:cxnLst>
+            <a:rect l="l" t="t" r="r" b="b"/>
+            <a:pathLst>
+              <a:path w="1155680" h="824634">
+                <a:moveTo>
+                  <a:pt x="0" y="0"/>
+                </a:moveTo>
+                <a:cubicBezTo>
+                  <a:pt x="15404" y="57764"/>
+                  <a:pt x="30565" y="123042"/>
+                  <a:pt x="57150" y="176213"/>
+                </a:cubicBezTo>
+                <a:cubicBezTo>
+                  <a:pt x="68262" y="198438"/>
+                  <a:pt x="74964" y="223485"/>
+                  <a:pt x="90487" y="242888"/>
+                </a:cubicBezTo>
+                <a:cubicBezTo>
+                  <a:pt x="96837" y="250825"/>
+                  <a:pt x="104415" y="257920"/>
+                  <a:pt x="109537" y="266700"/>
+                </a:cubicBezTo>
+                <a:cubicBezTo>
+                  <a:pt x="115629" y="277143"/>
+                  <a:pt x="116892" y="290133"/>
+                  <a:pt x="123825" y="300038"/>
+                </a:cubicBezTo>
+                <a:cubicBezTo>
+                  <a:pt x="128377" y="306541"/>
+                  <a:pt x="136390" y="309748"/>
+                  <a:pt x="142875" y="314325"/>
+                </a:cubicBezTo>
+                <a:cubicBezTo>
+                  <a:pt x="163381" y="328800"/>
+                  <a:pt x="184071" y="343014"/>
+                  <a:pt x="204787" y="357188"/>
+                </a:cubicBezTo>
+                <a:cubicBezTo>
+                  <a:pt x="213165" y="362920"/>
+                  <a:pt x="275564" y="404152"/>
+                  <a:pt x="276225" y="404813"/>
+                </a:cubicBezTo>
+                <a:cubicBezTo>
+                  <a:pt x="374996" y="503584"/>
+                  <a:pt x="242020" y="372853"/>
+                  <a:pt x="319087" y="442913"/>
+                </a:cubicBezTo>
+                <a:cubicBezTo>
+                  <a:pt x="330716" y="453484"/>
+                  <a:pt x="340068" y="466541"/>
+                  <a:pt x="352425" y="476250"/>
+                </a:cubicBezTo>
+                <a:cubicBezTo>
+                  <a:pt x="362489" y="484157"/>
+                  <a:pt x="375411" y="487772"/>
+                  <a:pt x="385762" y="495300"/>
+                </a:cubicBezTo>
+                <a:cubicBezTo>
+                  <a:pt x="393025" y="500582"/>
+                  <a:pt x="397340" y="509369"/>
+                  <a:pt x="404812" y="514350"/>
+                </a:cubicBezTo>
+                <a:cubicBezTo>
+                  <a:pt x="416626" y="522226"/>
+                  <a:pt x="430796" y="525996"/>
+                  <a:pt x="442912" y="533400"/>
+                </a:cubicBezTo>
+                <a:cubicBezTo>
+                  <a:pt x="506282" y="572127"/>
+                  <a:pt x="469505" y="563135"/>
+                  <a:pt x="533400" y="581025"/>
+                </a:cubicBezTo>
+                <a:cubicBezTo>
+                  <a:pt x="558612" y="588084"/>
+                  <a:pt x="609600" y="600075"/>
+                  <a:pt x="609600" y="600075"/>
+                </a:cubicBezTo>
+                <a:cubicBezTo>
+                  <a:pt x="732849" y="585854"/>
+                  <a:pt x="712292" y="578873"/>
+                  <a:pt x="819150" y="595313"/>
+                </a:cubicBezTo>
+                <a:cubicBezTo>
+                  <a:pt x="845447" y="599359"/>
+                  <a:pt x="870856" y="609327"/>
+                  <a:pt x="895350" y="619125"/>
+                </a:cubicBezTo>
+                <a:cubicBezTo>
+                  <a:pt x="906575" y="623615"/>
+                  <a:pt x="917132" y="629857"/>
+                  <a:pt x="928687" y="633413"/>
+                </a:cubicBezTo>
+                <a:cubicBezTo>
+                  <a:pt x="937916" y="636253"/>
+                  <a:pt x="947737" y="636588"/>
+                  <a:pt x="957262" y="638175"/>
+                </a:cubicBezTo>
+                <a:lnTo>
+                  <a:pt x="1009650" y="676275"/>
+                </a:lnTo>
+                <a:cubicBezTo>
+                  <a:pt x="1016051" y="680969"/>
+                  <a:pt x="1022673" y="685397"/>
+                  <a:pt x="1028700" y="690563"/>
+                </a:cubicBezTo>
+                <a:cubicBezTo>
+                  <a:pt x="1068063" y="724304"/>
+                  <a:pt x="1050328" y="710357"/>
+                  <a:pt x="1081087" y="733425"/>
+                </a:cubicBezTo>
+                <a:cubicBezTo>
+                  <a:pt x="1084262" y="738188"/>
+                  <a:pt x="1087772" y="742743"/>
+                  <a:pt x="1090612" y="747713"/>
+                </a:cubicBezTo>
+                <a:cubicBezTo>
+                  <a:pt x="1094134" y="753877"/>
+                  <a:pt x="1095778" y="761159"/>
+                  <a:pt x="1100137" y="766763"/>
+                </a:cubicBezTo>
+                <a:cubicBezTo>
+                  <a:pt x="1107029" y="775624"/>
+                  <a:pt x="1116012" y="782638"/>
+                  <a:pt x="1123950" y="790575"/>
+                </a:cubicBezTo>
+                <a:cubicBezTo>
+                  <a:pt x="1125965" y="794606"/>
+                  <a:pt x="1140160" y="830095"/>
+                  <a:pt x="1152525" y="823913"/>
+                </a:cubicBezTo>
+                <a:cubicBezTo>
+                  <a:pt x="1159625" y="820363"/>
+                  <a:pt x="1152525" y="808038"/>
+                  <a:pt x="1152525" y="800100"/>
+                </a:cubicBezTo>
+              </a:path>
+            </a:pathLst>
+          </a:custGeom>
+          <a:noFill/>
+        </p:spPr>
+        <p:style>
+          <a:lnRef idx="2">
+            <a:schemeClr val="accent1">
+              <a:shade val="15000"/>
+            </a:schemeClr>
+          </a:lnRef>
+          <a:fillRef idx="1">
+            <a:schemeClr val="accent1"/>
+          </a:fillRef>
+          <a:effectRef idx="0">
+            <a:schemeClr val="accent1"/>
+          </a:effectRef>
+          <a:fontRef idx="minor">
+            <a:schemeClr val="lt1"/>
+          </a:fontRef>
+        </p:style>
+        <p:txBody>
+          <a:bodyPr rtlCol="0" anchor="ctr"/>
+          <a:lstStyle/>
+          <a:p>
+            <a:pPr algn="ctr"/>
+            <a:endParaRPr lang="ko-KR" altLang="en-US"/>
+          </a:p>
+        </p:txBody>
+      </p:sp>
+      <p:sp>
+        <p:nvSpPr>
+          <p:cNvPr id="26" name="자유형: 도형 25">
+            <a:extLst>
+              <a:ext uri="{FF2B5EF4-FFF2-40B4-BE49-F238E27FC236}">
+                <a16:creationId xmlns:a16="http://schemas.microsoft.com/office/drawing/2014/main" id="{4C39BFFB-1241-2C76-AB47-1B9AE05BAA58}"/>
+              </a:ext>
+            </a:extLst>
+          </p:cNvPr>
+          <p:cNvSpPr/>
+          <p:nvPr/>
+        </p:nvSpPr>
+        <p:spPr>
+          <a:xfrm>
+            <a:off x="2857495" y="4367213"/>
+            <a:ext cx="1885950" cy="1485980"/>
+          </a:xfrm>
+          <a:custGeom>
+            <a:avLst/>
+            <a:gdLst>
+              <a:gd name="csX0" fmla="*/ 0 w 1885950"/>
+              <a:gd name="csY0" fmla="*/ 57150 h 1485980"/>
+              <a:gd name="csX1" fmla="*/ 114300 w 1885950"/>
+              <a:gd name="csY1" fmla="*/ 28575 h 1485980"/>
+              <a:gd name="csX2" fmla="*/ 214312 w 1885950"/>
+              <a:gd name="csY2" fmla="*/ 4762 h 1485980"/>
+              <a:gd name="csX3" fmla="*/ 280987 w 1885950"/>
+              <a:gd name="csY3" fmla="*/ 0 h 1485980"/>
+              <a:gd name="csX4" fmla="*/ 442912 w 1885950"/>
+              <a:gd name="csY4" fmla="*/ 4762 h 1485980"/>
+              <a:gd name="csX5" fmla="*/ 514350 w 1885950"/>
+              <a:gd name="csY5" fmla="*/ 47625 h 1485980"/>
+              <a:gd name="csX6" fmla="*/ 547687 w 1885950"/>
+              <a:gd name="csY6" fmla="*/ 66675 h 1485980"/>
+              <a:gd name="csX7" fmla="*/ 638175 w 1885950"/>
+              <a:gd name="csY7" fmla="*/ 123825 h 1485980"/>
+              <a:gd name="csX8" fmla="*/ 728662 w 1885950"/>
+              <a:gd name="csY8" fmla="*/ 157162 h 1485980"/>
+              <a:gd name="csX9" fmla="*/ 766762 w 1885950"/>
+              <a:gd name="csY9" fmla="*/ 161925 h 1485980"/>
+              <a:gd name="csX10" fmla="*/ 862012 w 1885950"/>
+              <a:gd name="csY10" fmla="*/ 180975 h 1485980"/>
+              <a:gd name="csX11" fmla="*/ 995362 w 1885950"/>
+              <a:gd name="csY11" fmla="*/ 195262 h 1485980"/>
+              <a:gd name="csX12" fmla="*/ 1028700 w 1885950"/>
+              <a:gd name="csY12" fmla="*/ 209550 h 1485980"/>
+              <a:gd name="csX13" fmla="*/ 1071562 w 1885950"/>
+              <a:gd name="csY13" fmla="*/ 223837 h 1485980"/>
+              <a:gd name="csX14" fmla="*/ 1138237 w 1885950"/>
+              <a:gd name="csY14" fmla="*/ 276225 h 1485980"/>
+              <a:gd name="csX15" fmla="*/ 1181100 w 1885950"/>
+              <a:gd name="csY15" fmla="*/ 328612 h 1485980"/>
+              <a:gd name="csX16" fmla="*/ 1252537 w 1885950"/>
+              <a:gd name="csY16" fmla="*/ 395287 h 1485980"/>
+              <a:gd name="csX17" fmla="*/ 1271587 w 1885950"/>
+              <a:gd name="csY17" fmla="*/ 423862 h 1485980"/>
+              <a:gd name="csX18" fmla="*/ 1314450 w 1885950"/>
+              <a:gd name="csY18" fmla="*/ 466725 h 1485980"/>
+              <a:gd name="csX19" fmla="*/ 1343025 w 1885950"/>
+              <a:gd name="csY19" fmla="*/ 495300 h 1485980"/>
+              <a:gd name="csX20" fmla="*/ 1390650 w 1885950"/>
+              <a:gd name="csY20" fmla="*/ 566737 h 1485980"/>
+              <a:gd name="csX21" fmla="*/ 1409700 w 1885950"/>
+              <a:gd name="csY21" fmla="*/ 600075 h 1485980"/>
+              <a:gd name="csX22" fmla="*/ 1447800 w 1885950"/>
+              <a:gd name="csY22" fmla="*/ 652462 h 1485980"/>
+              <a:gd name="csX23" fmla="*/ 1504950 w 1885950"/>
+              <a:gd name="csY23" fmla="*/ 742950 h 1485980"/>
+              <a:gd name="csX24" fmla="*/ 1538287 w 1885950"/>
+              <a:gd name="csY24" fmla="*/ 800100 h 1485980"/>
+              <a:gd name="csX25" fmla="*/ 1566862 w 1885950"/>
+              <a:gd name="csY25" fmla="*/ 838200 h 1485980"/>
+              <a:gd name="csX26" fmla="*/ 1600200 w 1885950"/>
+              <a:gd name="csY26" fmla="*/ 904875 h 1485980"/>
+              <a:gd name="csX27" fmla="*/ 1633537 w 1885950"/>
+              <a:gd name="csY27" fmla="*/ 938212 h 1485980"/>
+              <a:gd name="csX28" fmla="*/ 1652587 w 1885950"/>
+              <a:gd name="csY28" fmla="*/ 957262 h 1485980"/>
+              <a:gd name="csX29" fmla="*/ 1690687 w 1885950"/>
+              <a:gd name="csY29" fmla="*/ 1023937 h 1485980"/>
+              <a:gd name="csX30" fmla="*/ 1719262 w 1885950"/>
+              <a:gd name="csY30" fmla="*/ 1062037 h 1485980"/>
+              <a:gd name="csX31" fmla="*/ 1738312 w 1885950"/>
+              <a:gd name="csY31" fmla="*/ 1100137 h 1485980"/>
+              <a:gd name="csX32" fmla="*/ 1743075 w 1885950"/>
+              <a:gd name="csY32" fmla="*/ 1119187 h 1485980"/>
+              <a:gd name="csX33" fmla="*/ 1771650 w 1885950"/>
+              <a:gd name="csY33" fmla="*/ 1143000 h 1485980"/>
+              <a:gd name="csX34" fmla="*/ 1790700 w 1885950"/>
+              <a:gd name="csY34" fmla="*/ 1200150 h 1485980"/>
+              <a:gd name="csX35" fmla="*/ 1828800 w 1885950"/>
+              <a:gd name="csY35" fmla="*/ 1290637 h 1485980"/>
+              <a:gd name="csX36" fmla="*/ 1847850 w 1885950"/>
+              <a:gd name="csY36" fmla="*/ 1428750 h 1485980"/>
+              <a:gd name="csX37" fmla="*/ 1862137 w 1885950"/>
+              <a:gd name="csY37" fmla="*/ 1438275 h 1485980"/>
+              <a:gd name="csX38" fmla="*/ 1866900 w 1885950"/>
+              <a:gd name="csY38" fmla="*/ 1481137 h 1485980"/>
+              <a:gd name="csX39" fmla="*/ 1885950 w 1885950"/>
+              <a:gd name="csY39" fmla="*/ 1485900 h 1485980"/>
+            </a:gdLst>
+            <a:ahLst/>
+            <a:cxnLst>
+              <a:cxn ang="0">
+                <a:pos x="csX0" y="csY0"/>
+              </a:cxn>
+              <a:cxn ang="0">
+                <a:pos x="csX1" y="csY1"/>
+              </a:cxn>
+              <a:cxn ang="0">
+                <a:pos x="csX2" y="csY2"/>
+              </a:cxn>
+              <a:cxn ang="0">
+                <a:pos x="csX3" y="csY3"/>
+              </a:cxn>
+              <a:cxn ang="0">
+                <a:pos x="csX4" y="csY4"/>
+              </a:cxn>
+              <a:cxn ang="0">
+                <a:pos x="csX5" y="csY5"/>
+              </a:cxn>
+              <a:cxn ang="0">
+                <a:pos x="csX6" y="csY6"/>
+              </a:cxn>
+              <a:cxn ang="0">
+                <a:pos x="csX7" y="csY7"/>
+              </a:cxn>
+              <a:cxn ang="0">
+                <a:pos x="csX8" y="csY8"/>
+              </a:cxn>
+              <a:cxn ang="0">
+                <a:pos x="csX9" y="csY9"/>
+              </a:cxn>
+              <a:cxn ang="0">
+                <a:pos x="csX10" y="csY10"/>
+              </a:cxn>
+              <a:cxn ang="0">
+                <a:pos x="csX11" y="csY11"/>
+              </a:cxn>
+              <a:cxn ang="0">
+                <a:pos x="csX12" y="csY12"/>
+              </a:cxn>
+              <a:cxn ang="0">
+                <a:pos x="csX13" y="csY13"/>
+              </a:cxn>
+              <a:cxn ang="0">
+                <a:pos x="csX14" y="csY14"/>
+              </a:cxn>
+              <a:cxn ang="0">
+                <a:pos x="csX15" y="csY15"/>
+              </a:cxn>
+              <a:cxn ang="0">
+                <a:pos x="csX16" y="csY16"/>
+              </a:cxn>
+              <a:cxn ang="0">
+                <a:pos x="csX17" y="csY17"/>
+              </a:cxn>
+              <a:cxn ang="0">
+                <a:pos x="csX18" y="csY18"/>
+              </a:cxn>
+              <a:cxn ang="0">
+                <a:pos x="csX19" y="csY19"/>
+              </a:cxn>
+              <a:cxn ang="0">
+                <a:pos x="csX20" y="csY20"/>
+              </a:cxn>
+              <a:cxn ang="0">
+                <a:pos x="csX21" y="csY21"/>
+              </a:cxn>
+              <a:cxn ang="0">
+                <a:pos x="csX22" y="csY22"/>
+              </a:cxn>
+              <a:cxn ang="0">
+                <a:pos x="csX23" y="csY23"/>
+              </a:cxn>
+              <a:cxn ang="0">
+                <a:pos x="csX24" y="csY24"/>
+              </a:cxn>
+              <a:cxn ang="0">
+                <a:pos x="csX25" y="csY25"/>
+              </a:cxn>
+              <a:cxn ang="0">
+                <a:pos x="csX26" y="csY26"/>
+              </a:cxn>
+              <a:cxn ang="0">
+                <a:pos x="csX27" y="csY27"/>
+              </a:cxn>
+              <a:cxn ang="0">
+                <a:pos x="csX28" y="csY28"/>
+              </a:cxn>
+              <a:cxn ang="0">
+                <a:pos x="csX29" y="csY29"/>
+              </a:cxn>
+              <a:cxn ang="0">
+                <a:pos x="csX30" y="csY30"/>
+              </a:cxn>
+              <a:cxn ang="0">
+                <a:pos x="csX31" y="csY31"/>
+              </a:cxn>
+              <a:cxn ang="0">
+                <a:pos x="csX32" y="csY32"/>
+              </a:cxn>
+              <a:cxn ang="0">
+                <a:pos x="csX33" y="csY33"/>
+              </a:cxn>
+              <a:cxn ang="0">
+                <a:pos x="csX34" y="csY34"/>
+              </a:cxn>
+              <a:cxn ang="0">
+                <a:pos x="csX35" y="csY35"/>
+              </a:cxn>
+              <a:cxn ang="0">
+                <a:pos x="csX36" y="csY36"/>
+              </a:cxn>
+              <a:cxn ang="0">
+                <a:pos x="csX37" y="csY37"/>
+              </a:cxn>
+              <a:cxn ang="0">
+                <a:pos x="csX38" y="csY38"/>
+              </a:cxn>
+              <a:cxn ang="0">
+                <a:pos x="csX39" y="csY39"/>
+              </a:cxn>
+            </a:cxnLst>
+            <a:rect l="l" t="t" r="r" b="b"/>
+            <a:pathLst>
+              <a:path w="1885950" h="1485980">
+                <a:moveTo>
+                  <a:pt x="0" y="57150"/>
+                </a:moveTo>
+                <a:cubicBezTo>
+                  <a:pt x="97405" y="35504"/>
+                  <a:pt x="-22612" y="62803"/>
+                  <a:pt x="114300" y="28575"/>
+                </a:cubicBezTo>
+                <a:cubicBezTo>
+                  <a:pt x="147546" y="20263"/>
+                  <a:pt x="180535" y="10552"/>
+                  <a:pt x="214312" y="4762"/>
+                </a:cubicBezTo>
+                <a:cubicBezTo>
+                  <a:pt x="236273" y="997"/>
+                  <a:pt x="258762" y="1587"/>
+                  <a:pt x="280987" y="0"/>
+                </a:cubicBezTo>
+                <a:lnTo>
+                  <a:pt x="442912" y="4762"/>
+                </a:lnTo>
+                <a:cubicBezTo>
+                  <a:pt x="456048" y="6595"/>
+                  <a:pt x="500005" y="38797"/>
+                  <a:pt x="514350" y="47625"/>
+                </a:cubicBezTo>
+                <a:cubicBezTo>
+                  <a:pt x="525250" y="54333"/>
+                  <a:pt x="536787" y="59967"/>
+                  <a:pt x="547687" y="66675"/>
+                </a:cubicBezTo>
+                <a:cubicBezTo>
+                  <a:pt x="578070" y="85372"/>
+                  <a:pt x="605052" y="110576"/>
+                  <a:pt x="638175" y="123825"/>
+                </a:cubicBezTo>
+                <a:cubicBezTo>
+                  <a:pt x="659860" y="132499"/>
+                  <a:pt x="704745" y="151534"/>
+                  <a:pt x="728662" y="157162"/>
+                </a:cubicBezTo>
+                <a:cubicBezTo>
+                  <a:pt x="741121" y="160093"/>
+                  <a:pt x="754062" y="160337"/>
+                  <a:pt x="766762" y="161925"/>
+                </a:cubicBezTo>
+                <a:cubicBezTo>
+                  <a:pt x="826474" y="184316"/>
+                  <a:pt x="786112" y="173123"/>
+                  <a:pt x="862012" y="180975"/>
+                </a:cubicBezTo>
+                <a:cubicBezTo>
+                  <a:pt x="1071650" y="202662"/>
+                  <a:pt x="844120" y="181514"/>
+                  <a:pt x="995362" y="195262"/>
+                </a:cubicBezTo>
+                <a:cubicBezTo>
+                  <a:pt x="1006475" y="200025"/>
+                  <a:pt x="1017380" y="205305"/>
+                  <a:pt x="1028700" y="209550"/>
+                </a:cubicBezTo>
+                <a:cubicBezTo>
+                  <a:pt x="1042801" y="214838"/>
+                  <a:pt x="1057915" y="217468"/>
+                  <a:pt x="1071562" y="223837"/>
+                </a:cubicBezTo>
+                <a:cubicBezTo>
+                  <a:pt x="1089948" y="232417"/>
+                  <a:pt x="1127241" y="264582"/>
+                  <a:pt x="1138237" y="276225"/>
+                </a:cubicBezTo>
+                <a:cubicBezTo>
+                  <a:pt x="1153729" y="292628"/>
+                  <a:pt x="1165475" y="312336"/>
+                  <a:pt x="1181100" y="328612"/>
+                </a:cubicBezTo>
+                <a:cubicBezTo>
+                  <a:pt x="1203658" y="352109"/>
+                  <a:pt x="1230103" y="371672"/>
+                  <a:pt x="1252537" y="395287"/>
+                </a:cubicBezTo>
+                <a:cubicBezTo>
+                  <a:pt x="1260422" y="403587"/>
+                  <a:pt x="1264090" y="415211"/>
+                  <a:pt x="1271587" y="423862"/>
+                </a:cubicBezTo>
+                <a:cubicBezTo>
+                  <a:pt x="1284820" y="439131"/>
+                  <a:pt x="1300162" y="452437"/>
+                  <a:pt x="1314450" y="466725"/>
+                </a:cubicBezTo>
+                <a:cubicBezTo>
+                  <a:pt x="1323975" y="476250"/>
+                  <a:pt x="1337001" y="483252"/>
+                  <a:pt x="1343025" y="495300"/>
+                </a:cubicBezTo>
+                <a:cubicBezTo>
+                  <a:pt x="1382889" y="575027"/>
+                  <a:pt x="1338127" y="493205"/>
+                  <a:pt x="1390650" y="566737"/>
+                </a:cubicBezTo>
+                <a:cubicBezTo>
+                  <a:pt x="1398089" y="577152"/>
+                  <a:pt x="1402600" y="589426"/>
+                  <a:pt x="1409700" y="600075"/>
+                </a:cubicBezTo>
+                <a:cubicBezTo>
+                  <a:pt x="1421677" y="618041"/>
+                  <a:pt x="1438144" y="633149"/>
+                  <a:pt x="1447800" y="652462"/>
+                </a:cubicBezTo>
+                <a:cubicBezTo>
+                  <a:pt x="1492915" y="742695"/>
+                  <a:pt x="1409821" y="579869"/>
+                  <a:pt x="1504950" y="742950"/>
+                </a:cubicBezTo>
+                <a:cubicBezTo>
+                  <a:pt x="1516062" y="762000"/>
+                  <a:pt x="1526268" y="781609"/>
+                  <a:pt x="1538287" y="800100"/>
+                </a:cubicBezTo>
+                <a:cubicBezTo>
+                  <a:pt x="1546939" y="813410"/>
+                  <a:pt x="1558813" y="824517"/>
+                  <a:pt x="1566862" y="838200"/>
+                </a:cubicBezTo>
+                <a:cubicBezTo>
+                  <a:pt x="1579558" y="859784"/>
+                  <a:pt x="1583855" y="885262"/>
+                  <a:pt x="1600200" y="904875"/>
+                </a:cubicBezTo>
+                <a:cubicBezTo>
+                  <a:pt x="1610261" y="916948"/>
+                  <a:pt x="1622425" y="927100"/>
+                  <a:pt x="1633537" y="938212"/>
+                </a:cubicBezTo>
+                <a:cubicBezTo>
+                  <a:pt x="1639887" y="944562"/>
+                  <a:pt x="1648132" y="949465"/>
+                  <a:pt x="1652587" y="957262"/>
+                </a:cubicBezTo>
+                <a:cubicBezTo>
+                  <a:pt x="1665287" y="979487"/>
+                  <a:pt x="1675328" y="1003459"/>
+                  <a:pt x="1690687" y="1023937"/>
+                </a:cubicBezTo>
+                <a:cubicBezTo>
+                  <a:pt x="1700212" y="1036637"/>
+                  <a:pt x="1710848" y="1048575"/>
+                  <a:pt x="1719262" y="1062037"/>
+                </a:cubicBezTo>
+                <a:cubicBezTo>
+                  <a:pt x="1726787" y="1074078"/>
+                  <a:pt x="1732851" y="1087030"/>
+                  <a:pt x="1738312" y="1100137"/>
+                </a:cubicBezTo>
+                <a:cubicBezTo>
+                  <a:pt x="1740830" y="1106179"/>
+                  <a:pt x="1739056" y="1114020"/>
+                  <a:pt x="1743075" y="1119187"/>
+                </a:cubicBezTo>
+                <a:cubicBezTo>
+                  <a:pt x="1750687" y="1128974"/>
+                  <a:pt x="1762125" y="1135062"/>
+                  <a:pt x="1771650" y="1143000"/>
+                </a:cubicBezTo>
+                <a:cubicBezTo>
+                  <a:pt x="1778000" y="1162050"/>
+                  <a:pt x="1783097" y="1181565"/>
+                  <a:pt x="1790700" y="1200150"/>
+                </a:cubicBezTo>
+                <a:cubicBezTo>
+                  <a:pt x="1845691" y="1334575"/>
+                  <a:pt x="1788158" y="1168715"/>
+                  <a:pt x="1828800" y="1290637"/>
+                </a:cubicBezTo>
+                <a:cubicBezTo>
+                  <a:pt x="1831015" y="1334943"/>
+                  <a:pt x="1825072" y="1386990"/>
+                  <a:pt x="1847850" y="1428750"/>
+                </a:cubicBezTo>
+                <a:cubicBezTo>
+                  <a:pt x="1850591" y="1433775"/>
+                  <a:pt x="1857375" y="1435100"/>
+                  <a:pt x="1862137" y="1438275"/>
+                </a:cubicBezTo>
+                <a:cubicBezTo>
+                  <a:pt x="1863725" y="1452562"/>
+                  <a:pt x="1860471" y="1468279"/>
+                  <a:pt x="1866900" y="1481137"/>
+                </a:cubicBezTo>
+                <a:cubicBezTo>
+                  <a:pt x="1869827" y="1486991"/>
+                  <a:pt x="1885950" y="1485900"/>
+                  <a:pt x="1885950" y="1485900"/>
+                </a:cubicBezTo>
+              </a:path>
+            </a:pathLst>
+          </a:custGeom>
+          <a:noFill/>
+        </p:spPr>
+        <p:style>
+          <a:lnRef idx="2">
+            <a:schemeClr val="accent1">
+              <a:shade val="15000"/>
+            </a:schemeClr>
+          </a:lnRef>
+          <a:fillRef idx="1">
+            <a:schemeClr val="accent1"/>
+          </a:fillRef>
+          <a:effectRef idx="0">
+            <a:schemeClr val="accent1"/>
+          </a:effectRef>
+          <a:fontRef idx="minor">
+            <a:schemeClr val="lt1"/>
+          </a:fontRef>
+        </p:style>
+        <p:txBody>
+          <a:bodyPr rtlCol="0" anchor="ctr"/>
+          <a:lstStyle/>
+          <a:p>
+            <a:pPr algn="ctr"/>
+            <a:endParaRPr lang="ko-KR" altLang="en-US"/>
+          </a:p>
+        </p:txBody>
+      </p:sp>
+    </p:spTree>
+    <p:extLst>
+      <p:ext uri="{BB962C8B-B14F-4D97-AF65-F5344CB8AC3E}">
+        <p14:creationId xmlns:p14="http://schemas.microsoft.com/office/powerpoint/2010/main" val="2274469743"/>
+      </p:ext>
+    </p:extLst>
+  </p:cSld>
+  <p:clrMapOvr>
+    <a:masterClrMapping/>
+  </p:clrMapOvr>
+</p:sld>
+</file>
+
+<file path=ppt/slides/slide27.xml><?xml version="1.0" encoding="utf-8"?>
+<p:sld xmlns:a="http://schemas.openxmlformats.org/drawingml/2006/main" xmlns:r="http://schemas.openxmlformats.org/officeDocument/2006/relationships" xmlns:p="http://schemas.openxmlformats.org/presentationml/2006/main">
+  <p:cSld>
+    <p:spTree>
+      <p:nvGrpSpPr>
+        <p:cNvPr id="1" name=""/>
+        <p:cNvGrpSpPr/>
+        <p:nvPr/>
+      </p:nvGrpSpPr>
+      <p:grpSpPr>
+        <a:xfrm>
+          <a:off x="0" y="0"/>
+          <a:ext cx="0" cy="0"/>
+          <a:chOff x="0" y="0"/>
+          <a:chExt cx="0" cy="0"/>
+        </a:xfrm>
+      </p:grpSpPr>
+      <p:sp>
+        <p:nvSpPr>
           <p:cNvPr id="8" name="제목 7">
             <a:extLst>
               <a:ext uri="{FF2B5EF4-FFF2-40B4-BE49-F238E27FC236}">
@@ -25788,7 +29389,7 @@
           <a:p>
             <a:fld id="{492E84DF-9BBC-4DFC-AB92-EB3DF1902948}" type="datetime1">
               <a:rPr lang="en-US" altLang="ko-KR" smtClean="0"/>
-              <a:t>9/25/2026</a:t>
+              <a:t>9/26/2026</a:t>
             </a:fld>
             <a:endParaRPr lang="ko-KR" altLang="en-US"/>
           </a:p>
@@ -25817,7 +29418,7 @@
           <a:p>
             <a:fld id="{4419BE51-E1DC-4D7D-A982-2D579B035180}" type="slidenum">
               <a:rPr lang="ko-KR" altLang="en-US" smtClean="0"/>
-              <a:t>26</a:t>
+              <a:t>27</a:t>
             </a:fld>
             <a:endParaRPr lang="ko-KR" altLang="en-US"/>
           </a:p>
@@ -30056,7 +33657,7 @@
           <a:p>
             <a:fld id="{492E84DF-9BBC-4DFC-AB92-EB3DF1902948}" type="datetime1">
               <a:rPr lang="en-US" altLang="ko-KR" smtClean="0"/>
-              <a:t>9/25/2026</a:t>
+              <a:t>9/26/2026</a:t>
             </a:fld>
             <a:endParaRPr lang="ko-KR" altLang="en-US"/>
           </a:p>
@@ -30221,6 +33822,36 @@
           <a:chExt cx="0" cy="0"/>
         </a:xfrm>
       </p:grpSpPr>
+      <p:pic>
+        <p:nvPicPr>
+          <p:cNvPr id="11" name="그림 10">
+            <a:extLst>
+              <a:ext uri="{FF2B5EF4-FFF2-40B4-BE49-F238E27FC236}">
+                <a16:creationId xmlns:a16="http://schemas.microsoft.com/office/drawing/2014/main" id="{837C140D-E86B-270D-1CE5-4851CC513ED1}"/>
+              </a:ext>
+            </a:extLst>
+          </p:cNvPr>
+          <p:cNvPicPr>
+            <a:picLocks noChangeAspect="1"/>
+          </p:cNvPicPr>
+          <p:nvPr/>
+        </p:nvPicPr>
+        <p:blipFill>
+          <a:blip r:embed="rId2"/>
+          <a:stretch>
+            <a:fillRect/>
+          </a:stretch>
+        </p:blipFill>
+        <p:spPr>
+          <a:xfrm>
+            <a:off x="1242992" y="1529202"/>
+            <a:ext cx="4320000" cy="4320000"/>
+          </a:xfrm>
+          <a:prstGeom prst="rect">
+            <a:avLst/>
+          </a:prstGeom>
+        </p:spPr>
+      </p:pic>
       <p:sp>
         <p:nvSpPr>
           <p:cNvPr id="2" name="제목 1">
@@ -30251,31 +33882,6 @@
       </p:sp>
       <p:sp>
         <p:nvSpPr>
-          <p:cNvPr id="3" name="내용 개체 틀 2">
-            <a:extLst>
-              <a:ext uri="{FF2B5EF4-FFF2-40B4-BE49-F238E27FC236}">
-                <a16:creationId xmlns:a16="http://schemas.microsoft.com/office/drawing/2014/main" id="{6308174C-9B5D-792B-E720-012AFFC73302}"/>
-              </a:ext>
-            </a:extLst>
-          </p:cNvPr>
-          <p:cNvSpPr>
-            <a:spLocks noGrp="1"/>
-          </p:cNvSpPr>
-          <p:nvPr>
-            <p:ph sz="half" idx="1"/>
-          </p:nvPr>
-        </p:nvSpPr>
-        <p:spPr/>
-        <p:txBody>
-          <a:bodyPr/>
-          <a:lstStyle/>
-          <a:p>
-            <a:endParaRPr lang="ko-KR" altLang="en-US" dirty="0"/>
-          </a:p>
-        </p:txBody>
-      </p:sp>
-      <p:sp>
-        <p:nvSpPr>
           <p:cNvPr id="4" name="내용 개체 틀 3">
             <a:extLst>
               <a:ext uri="{FF2B5EF4-FFF2-40B4-BE49-F238E27FC236}">
@@ -30387,7 +33993,7 @@
           <a:p>
             <a:fld id="{492E84DF-9BBC-4DFC-AB92-EB3DF1902948}" type="datetime1">
               <a:rPr lang="en-US" altLang="ko-KR" smtClean="0"/>
-              <a:t>9/25/2026</a:t>
+              <a:t>9/26/2026</a:t>
             </a:fld>
             <a:endParaRPr lang="ko-KR" altLang="en-US"/>
           </a:p>
@@ -30447,6 +34053,825 @@
               <a:rPr lang="ko-KR" altLang="en-US" dirty="0"/>
               <a:t>컨텐츠</a:t>
             </a:r>
+          </a:p>
+        </p:txBody>
+      </p:sp>
+      <p:sp>
+        <p:nvSpPr>
+          <p:cNvPr id="12" name="십자형 11">
+            <a:extLst>
+              <a:ext uri="{FF2B5EF4-FFF2-40B4-BE49-F238E27FC236}">
+                <a16:creationId xmlns:a16="http://schemas.microsoft.com/office/drawing/2014/main" id="{EBD7E6DC-F3F8-DD0A-B4B4-560D135E85D9}"/>
+              </a:ext>
+            </a:extLst>
+          </p:cNvPr>
+          <p:cNvSpPr/>
+          <p:nvPr/>
+        </p:nvSpPr>
+        <p:spPr>
+          <a:xfrm>
+            <a:off x="1285875" y="5216099"/>
+            <a:ext cx="923925" cy="590550"/>
+          </a:xfrm>
+          <a:prstGeom prst="plus">
+            <a:avLst/>
+          </a:prstGeom>
+          <a:solidFill>
+            <a:srgbClr val="FFFF00"/>
+          </a:solidFill>
+          <a:ln>
+            <a:noFill/>
+          </a:ln>
+        </p:spPr>
+        <p:style>
+          <a:lnRef idx="2">
+            <a:schemeClr val="accent1">
+              <a:shade val="15000"/>
+            </a:schemeClr>
+          </a:lnRef>
+          <a:fillRef idx="1">
+            <a:schemeClr val="accent1"/>
+          </a:fillRef>
+          <a:effectRef idx="0">
+            <a:schemeClr val="accent1"/>
+          </a:effectRef>
+          <a:fontRef idx="minor">
+            <a:schemeClr val="lt1"/>
+          </a:fontRef>
+        </p:style>
+        <p:txBody>
+          <a:bodyPr rtlCol="0" anchor="ctr"/>
+          <a:lstStyle/>
+          <a:p>
+            <a:pPr algn="ctr"/>
+            <a:r>
+              <a:rPr lang="ko-KR" altLang="en-US" sz="1400" dirty="0">
+                <a:solidFill>
+                  <a:sysClr val="windowText" lastClr="000000"/>
+                </a:solidFill>
+              </a:rPr>
+              <a:t>본거지</a:t>
+            </a:r>
+            <a:br>
+              <a:rPr lang="en-US" altLang="ko-KR" sz="1400" dirty="0">
+                <a:solidFill>
+                  <a:sysClr val="windowText" lastClr="000000"/>
+                </a:solidFill>
+              </a:rPr>
+            </a:br>
+            <a:r>
+              <a:rPr lang="en-US" altLang="ko-KR" sz="1400" dirty="0">
+                <a:solidFill>
+                  <a:sysClr val="windowText" lastClr="000000"/>
+                </a:solidFill>
+              </a:rPr>
+              <a:t>(</a:t>
+            </a:r>
+            <a:r>
+              <a:rPr lang="ko-KR" altLang="en-US" sz="1400" dirty="0">
+                <a:solidFill>
+                  <a:sysClr val="windowText" lastClr="000000"/>
+                </a:solidFill>
+              </a:rPr>
+              <a:t>시작점</a:t>
+            </a:r>
+            <a:r>
+              <a:rPr lang="en-US" altLang="ko-KR" sz="1400" dirty="0">
+                <a:solidFill>
+                  <a:sysClr val="windowText" lastClr="000000"/>
+                </a:solidFill>
+              </a:rPr>
+              <a:t>)</a:t>
+            </a:r>
+            <a:endParaRPr lang="ko-KR" altLang="en-US" sz="1400" dirty="0">
+              <a:solidFill>
+                <a:sysClr val="windowText" lastClr="000000"/>
+              </a:solidFill>
+            </a:endParaRPr>
+          </a:p>
+        </p:txBody>
+      </p:sp>
+      <p:sp>
+        <p:nvSpPr>
+          <p:cNvPr id="13" name="이등변 삼각형 12">
+            <a:extLst>
+              <a:ext uri="{FF2B5EF4-FFF2-40B4-BE49-F238E27FC236}">
+                <a16:creationId xmlns:a16="http://schemas.microsoft.com/office/drawing/2014/main" id="{464D9BB8-0976-DFF1-EDFB-CB02D160AFD1}"/>
+              </a:ext>
+            </a:extLst>
+          </p:cNvPr>
+          <p:cNvSpPr/>
+          <p:nvPr/>
+        </p:nvSpPr>
+        <p:spPr>
+          <a:xfrm>
+            <a:off x="3771901" y="1635125"/>
+            <a:ext cx="290512" cy="190500"/>
+          </a:xfrm>
+          <a:prstGeom prst="triangle">
+            <a:avLst/>
+          </a:prstGeom>
+          <a:solidFill>
+            <a:schemeClr val="accent2"/>
+          </a:solidFill>
+          <a:ln>
+            <a:noFill/>
+          </a:ln>
+        </p:spPr>
+        <p:style>
+          <a:lnRef idx="2">
+            <a:schemeClr val="accent1">
+              <a:shade val="15000"/>
+            </a:schemeClr>
+          </a:lnRef>
+          <a:fillRef idx="1">
+            <a:schemeClr val="accent1"/>
+          </a:fillRef>
+          <a:effectRef idx="0">
+            <a:schemeClr val="accent1"/>
+          </a:effectRef>
+          <a:fontRef idx="minor">
+            <a:schemeClr val="lt1"/>
+          </a:fontRef>
+        </p:style>
+        <p:txBody>
+          <a:bodyPr rtlCol="0" anchor="ctr"/>
+          <a:lstStyle/>
+          <a:p>
+            <a:pPr algn="ctr"/>
+            <a:endParaRPr lang="ko-KR" altLang="en-US" sz="1200" dirty="0">
+              <a:solidFill>
+                <a:sysClr val="windowText" lastClr="000000"/>
+              </a:solidFill>
+            </a:endParaRPr>
+          </a:p>
+        </p:txBody>
+      </p:sp>
+      <p:sp>
+        <p:nvSpPr>
+          <p:cNvPr id="14" name="TextBox 13">
+            <a:extLst>
+              <a:ext uri="{FF2B5EF4-FFF2-40B4-BE49-F238E27FC236}">
+                <a16:creationId xmlns:a16="http://schemas.microsoft.com/office/drawing/2014/main" id="{25C1C8B2-C126-642B-FBD6-82F8A408532B}"/>
+              </a:ext>
+            </a:extLst>
+          </p:cNvPr>
+          <p:cNvSpPr txBox="1"/>
+          <p:nvPr/>
+        </p:nvSpPr>
+        <p:spPr>
+          <a:xfrm>
+            <a:off x="3438525" y="1067537"/>
+            <a:ext cx="1025912" cy="523220"/>
+          </a:xfrm>
+          <a:prstGeom prst="rect">
+            <a:avLst/>
+          </a:prstGeom>
+          <a:noFill/>
+        </p:spPr>
+        <p:txBody>
+          <a:bodyPr wrap="square" rtlCol="0">
+            <a:spAutoFit/>
+          </a:bodyPr>
+          <a:lstStyle/>
+          <a:p>
+            <a:pPr algn="ctr"/>
+            <a:r>
+              <a:rPr lang="ko-KR" altLang="en-US" sz="1400" dirty="0">
+                <a:solidFill>
+                  <a:sysClr val="windowText" lastClr="000000"/>
+                </a:solidFill>
+              </a:rPr>
+              <a:t>주거지</a:t>
+            </a:r>
+            <a:br>
+              <a:rPr lang="en-US" altLang="ko-KR" sz="1400" dirty="0">
+                <a:solidFill>
+                  <a:sysClr val="windowText" lastClr="000000"/>
+                </a:solidFill>
+              </a:rPr>
+            </a:br>
+            <a:r>
+              <a:rPr lang="en-US" altLang="ko-KR" sz="1400" dirty="0">
+                <a:solidFill>
+                  <a:sysClr val="windowText" lastClr="000000"/>
+                </a:solidFill>
+              </a:rPr>
+              <a:t>(</a:t>
+            </a:r>
+            <a:r>
+              <a:rPr lang="ko-KR" altLang="en-US" sz="1400" dirty="0">
+                <a:solidFill>
+                  <a:sysClr val="windowText" lastClr="000000"/>
+                </a:solidFill>
+              </a:rPr>
+              <a:t>배송지</a:t>
+            </a:r>
+            <a:r>
+              <a:rPr lang="en-US" altLang="ko-KR" sz="1400" dirty="0">
+                <a:solidFill>
+                  <a:sysClr val="windowText" lastClr="000000"/>
+                </a:solidFill>
+              </a:rPr>
+              <a:t>)</a:t>
+            </a:r>
+            <a:endParaRPr lang="ko-KR" altLang="en-US" sz="1400" dirty="0">
+              <a:solidFill>
+                <a:sysClr val="windowText" lastClr="000000"/>
+              </a:solidFill>
+            </a:endParaRPr>
+          </a:p>
+        </p:txBody>
+      </p:sp>
+      <p:sp>
+        <p:nvSpPr>
+          <p:cNvPr id="27" name="사각형: 잘린 대각선 방향 모서리 26">
+            <a:extLst>
+              <a:ext uri="{FF2B5EF4-FFF2-40B4-BE49-F238E27FC236}">
+                <a16:creationId xmlns:a16="http://schemas.microsoft.com/office/drawing/2014/main" id="{630BB9DE-1E50-5805-7990-3BE5A2E1C179}"/>
+              </a:ext>
+            </a:extLst>
+          </p:cNvPr>
+          <p:cNvSpPr/>
+          <p:nvPr/>
+        </p:nvSpPr>
+        <p:spPr>
+          <a:xfrm>
+            <a:off x="1242991" y="1529203"/>
+            <a:ext cx="1781197" cy="1194948"/>
+          </a:xfrm>
+          <a:prstGeom prst="snip2DiagRect">
+            <a:avLst>
+              <a:gd name="adj1" fmla="val 0"/>
+              <a:gd name="adj2" fmla="val 50000"/>
+            </a:avLst>
+          </a:prstGeom>
+          <a:solidFill>
+            <a:schemeClr val="accent2">
+              <a:lumMod val="20000"/>
+              <a:lumOff val="80000"/>
+            </a:schemeClr>
+          </a:solidFill>
+        </p:spPr>
+        <p:style>
+          <a:lnRef idx="2">
+            <a:schemeClr val="accent1">
+              <a:shade val="15000"/>
+            </a:schemeClr>
+          </a:lnRef>
+          <a:fillRef idx="1">
+            <a:schemeClr val="accent1"/>
+          </a:fillRef>
+          <a:effectRef idx="0">
+            <a:schemeClr val="accent1"/>
+          </a:effectRef>
+          <a:fontRef idx="minor">
+            <a:schemeClr val="lt1"/>
+          </a:fontRef>
+        </p:style>
+        <p:txBody>
+          <a:bodyPr rtlCol="0" anchor="ctr"/>
+          <a:lstStyle/>
+          <a:p>
+            <a:pPr algn="ctr"/>
+            <a:r>
+              <a:rPr lang="ko-KR" altLang="en-US" dirty="0">
+                <a:solidFill>
+                  <a:sysClr val="windowText" lastClr="000000"/>
+                </a:solidFill>
+              </a:rPr>
+              <a:t>모래언덕</a:t>
+            </a:r>
+          </a:p>
+        </p:txBody>
+      </p:sp>
+      <p:sp>
+        <p:nvSpPr>
+          <p:cNvPr id="28" name="사각형: 둥근 모서리 27">
+            <a:extLst>
+              <a:ext uri="{FF2B5EF4-FFF2-40B4-BE49-F238E27FC236}">
+                <a16:creationId xmlns:a16="http://schemas.microsoft.com/office/drawing/2014/main" id="{19778F73-C79D-4121-BEE5-BE0413C0082E}"/>
+              </a:ext>
+            </a:extLst>
+          </p:cNvPr>
+          <p:cNvSpPr/>
+          <p:nvPr/>
+        </p:nvSpPr>
+        <p:spPr>
+          <a:xfrm>
+            <a:off x="2900363" y="2418165"/>
+            <a:ext cx="1524390" cy="1010835"/>
+          </a:xfrm>
+          <a:prstGeom prst="roundRect">
+            <a:avLst/>
+          </a:prstGeom>
+          <a:solidFill>
+            <a:schemeClr val="accent6">
+              <a:lumMod val="40000"/>
+              <a:lumOff val="60000"/>
+            </a:schemeClr>
+          </a:solidFill>
+        </p:spPr>
+        <p:style>
+          <a:lnRef idx="2">
+            <a:schemeClr val="accent1">
+              <a:shade val="15000"/>
+            </a:schemeClr>
+          </a:lnRef>
+          <a:fillRef idx="1">
+            <a:schemeClr val="accent1"/>
+          </a:fillRef>
+          <a:effectRef idx="0">
+            <a:schemeClr val="accent1"/>
+          </a:effectRef>
+          <a:fontRef idx="minor">
+            <a:schemeClr val="lt1"/>
+          </a:fontRef>
+        </p:style>
+        <p:txBody>
+          <a:bodyPr rtlCol="0" anchor="ctr"/>
+          <a:lstStyle/>
+          <a:p>
+            <a:pPr algn="ctr"/>
+            <a:r>
+              <a:rPr lang="ko-KR" altLang="en-US">
+                <a:solidFill>
+                  <a:sysClr val="windowText" lastClr="000000"/>
+                </a:solidFill>
+              </a:rPr>
+              <a:t>숲</a:t>
+            </a:r>
+          </a:p>
+        </p:txBody>
+      </p:sp>
+      <p:pic>
+        <p:nvPicPr>
+          <p:cNvPr id="31" name="그림 30">
+            <a:extLst>
+              <a:ext uri="{FF2B5EF4-FFF2-40B4-BE49-F238E27FC236}">
+                <a16:creationId xmlns:a16="http://schemas.microsoft.com/office/drawing/2014/main" id="{A3C68D09-1906-3268-BBA6-D01C19066B3C}"/>
+              </a:ext>
+            </a:extLst>
+          </p:cNvPr>
+          <p:cNvPicPr>
+            <a:picLocks noChangeAspect="1"/>
+          </p:cNvPicPr>
+          <p:nvPr/>
+        </p:nvPicPr>
+        <p:blipFill>
+          <a:blip r:embed="rId3"/>
+          <a:stretch>
+            <a:fillRect/>
+          </a:stretch>
+        </p:blipFill>
+        <p:spPr>
+          <a:xfrm>
+            <a:off x="1938333" y="4479534"/>
+            <a:ext cx="2434865" cy="1363734"/>
+          </a:xfrm>
+          <a:prstGeom prst="rect">
+            <a:avLst/>
+          </a:prstGeom>
+        </p:spPr>
+      </p:pic>
+      <p:sp>
+        <p:nvSpPr>
+          <p:cNvPr id="93" name="자유형: 도형 92">
+            <a:extLst>
+              <a:ext uri="{FF2B5EF4-FFF2-40B4-BE49-F238E27FC236}">
+                <a16:creationId xmlns:a16="http://schemas.microsoft.com/office/drawing/2014/main" id="{F088EC4D-00A9-11FF-3933-F03C131EE552}"/>
+              </a:ext>
+            </a:extLst>
+          </p:cNvPr>
+          <p:cNvSpPr/>
+          <p:nvPr/>
+        </p:nvSpPr>
+        <p:spPr>
+          <a:xfrm>
+            <a:off x="4368614" y="1533525"/>
+            <a:ext cx="1164454" cy="4320000"/>
+          </a:xfrm>
+          <a:custGeom>
+            <a:avLst/>
+            <a:gdLst>
+              <a:gd name="csX0" fmla="*/ 1160649 w 1164454"/>
+              <a:gd name="csY0" fmla="*/ 0 h 4424944"/>
+              <a:gd name="csX1" fmla="*/ 1046349 w 1164454"/>
+              <a:gd name="csY1" fmla="*/ 1457325 h 4424944"/>
+              <a:gd name="csX2" fmla="*/ 379599 w 1164454"/>
+              <a:gd name="csY2" fmla="*/ 2519363 h 4424944"/>
+              <a:gd name="csX3" fmla="*/ 31936 w 1164454"/>
+              <a:gd name="csY3" fmla="*/ 4257675 h 4424944"/>
+              <a:gd name="csX4" fmla="*/ 36699 w 1164454"/>
+              <a:gd name="csY4" fmla="*/ 4257675 h 4424944"/>
+            </a:gdLst>
+            <a:ahLst/>
+            <a:cxnLst>
+              <a:cxn ang="0">
+                <a:pos x="csX0" y="csY0"/>
+              </a:cxn>
+              <a:cxn ang="0">
+                <a:pos x="csX1" y="csY1"/>
+              </a:cxn>
+              <a:cxn ang="0">
+                <a:pos x="csX2" y="csY2"/>
+              </a:cxn>
+              <a:cxn ang="0">
+                <a:pos x="csX3" y="csY3"/>
+              </a:cxn>
+              <a:cxn ang="0">
+                <a:pos x="csX4" y="csY4"/>
+              </a:cxn>
+            </a:cxnLst>
+            <a:rect l="l" t="t" r="r" b="b"/>
+            <a:pathLst>
+              <a:path w="1164454" h="4424944">
+                <a:moveTo>
+                  <a:pt x="1160649" y="0"/>
+                </a:moveTo>
+                <a:cubicBezTo>
+                  <a:pt x="1168586" y="518715"/>
+                  <a:pt x="1176524" y="1037431"/>
+                  <a:pt x="1046349" y="1457325"/>
+                </a:cubicBezTo>
+                <a:cubicBezTo>
+                  <a:pt x="916174" y="1877219"/>
+                  <a:pt x="548668" y="2052638"/>
+                  <a:pt x="379599" y="2519363"/>
+                </a:cubicBezTo>
+                <a:cubicBezTo>
+                  <a:pt x="210530" y="2986088"/>
+                  <a:pt x="89086" y="3967956"/>
+                  <a:pt x="31936" y="4257675"/>
+                </a:cubicBezTo>
+                <a:cubicBezTo>
+                  <a:pt x="-25214" y="4547394"/>
+                  <a:pt x="5742" y="4402534"/>
+                  <a:pt x="36699" y="4257675"/>
+                </a:cubicBezTo>
+              </a:path>
+            </a:pathLst>
+          </a:custGeom>
+          <a:noFill/>
+          <a:ln>
+            <a:solidFill>
+              <a:schemeClr val="accent1"/>
+            </a:solidFill>
+          </a:ln>
+        </p:spPr>
+        <p:style>
+          <a:lnRef idx="2">
+            <a:schemeClr val="accent1">
+              <a:shade val="15000"/>
+            </a:schemeClr>
+          </a:lnRef>
+          <a:fillRef idx="1">
+            <a:schemeClr val="accent1"/>
+          </a:fillRef>
+          <a:effectRef idx="0">
+            <a:schemeClr val="accent1"/>
+          </a:effectRef>
+          <a:fontRef idx="minor">
+            <a:schemeClr val="lt1"/>
+          </a:fontRef>
+        </p:style>
+        <p:txBody>
+          <a:bodyPr rtlCol="0" anchor="ctr"/>
+          <a:lstStyle/>
+          <a:p>
+            <a:pPr algn="ctr"/>
+            <a:endParaRPr lang="ko-KR" altLang="en-US">
+              <a:solidFill>
+                <a:srgbClr val="0070C0"/>
+              </a:solidFill>
+            </a:endParaRPr>
+          </a:p>
+        </p:txBody>
+      </p:sp>
+      <p:sp>
+        <p:nvSpPr>
+          <p:cNvPr id="95" name="자유형: 도형 94">
+            <a:extLst>
+              <a:ext uri="{FF2B5EF4-FFF2-40B4-BE49-F238E27FC236}">
+                <a16:creationId xmlns:a16="http://schemas.microsoft.com/office/drawing/2014/main" id="{D5810BEF-430A-903B-AFDD-8B3F3341E935}"/>
+              </a:ext>
+            </a:extLst>
+          </p:cNvPr>
+          <p:cNvSpPr/>
+          <p:nvPr/>
+        </p:nvSpPr>
+        <p:spPr>
+          <a:xfrm>
+            <a:off x="4133850" y="1533526"/>
+            <a:ext cx="1217417" cy="3790950"/>
+          </a:xfrm>
+          <a:custGeom>
+            <a:avLst/>
+            <a:gdLst>
+              <a:gd name="csX0" fmla="*/ 1160649 w 1164454"/>
+              <a:gd name="csY0" fmla="*/ 0 h 4424944"/>
+              <a:gd name="csX1" fmla="*/ 1046349 w 1164454"/>
+              <a:gd name="csY1" fmla="*/ 1457325 h 4424944"/>
+              <a:gd name="csX2" fmla="*/ 379599 w 1164454"/>
+              <a:gd name="csY2" fmla="*/ 2519363 h 4424944"/>
+              <a:gd name="csX3" fmla="*/ 31936 w 1164454"/>
+              <a:gd name="csY3" fmla="*/ 4257675 h 4424944"/>
+              <a:gd name="csX4" fmla="*/ 36699 w 1164454"/>
+              <a:gd name="csY4" fmla="*/ 4257675 h 4424944"/>
+            </a:gdLst>
+            <a:ahLst/>
+            <a:cxnLst>
+              <a:cxn ang="0">
+                <a:pos x="csX0" y="csY0"/>
+              </a:cxn>
+              <a:cxn ang="0">
+                <a:pos x="csX1" y="csY1"/>
+              </a:cxn>
+              <a:cxn ang="0">
+                <a:pos x="csX2" y="csY2"/>
+              </a:cxn>
+              <a:cxn ang="0">
+                <a:pos x="csX3" y="csY3"/>
+              </a:cxn>
+              <a:cxn ang="0">
+                <a:pos x="csX4" y="csY4"/>
+              </a:cxn>
+            </a:cxnLst>
+            <a:rect l="l" t="t" r="r" b="b"/>
+            <a:pathLst>
+              <a:path w="1164454" h="4424944">
+                <a:moveTo>
+                  <a:pt x="1160649" y="0"/>
+                </a:moveTo>
+                <a:cubicBezTo>
+                  <a:pt x="1168586" y="518715"/>
+                  <a:pt x="1176524" y="1037431"/>
+                  <a:pt x="1046349" y="1457325"/>
+                </a:cubicBezTo>
+                <a:cubicBezTo>
+                  <a:pt x="916174" y="1877219"/>
+                  <a:pt x="548668" y="2052638"/>
+                  <a:pt x="379599" y="2519363"/>
+                </a:cubicBezTo>
+                <a:cubicBezTo>
+                  <a:pt x="210530" y="2986088"/>
+                  <a:pt x="89086" y="3967956"/>
+                  <a:pt x="31936" y="4257675"/>
+                </a:cubicBezTo>
+                <a:cubicBezTo>
+                  <a:pt x="-25214" y="4547394"/>
+                  <a:pt x="5742" y="4402534"/>
+                  <a:pt x="36699" y="4257675"/>
+                </a:cubicBezTo>
+              </a:path>
+            </a:pathLst>
+          </a:custGeom>
+          <a:noFill/>
+          <a:ln>
+            <a:solidFill>
+              <a:schemeClr val="accent1"/>
+            </a:solidFill>
+          </a:ln>
+        </p:spPr>
+        <p:style>
+          <a:lnRef idx="2">
+            <a:schemeClr val="accent1">
+              <a:shade val="15000"/>
+            </a:schemeClr>
+          </a:lnRef>
+          <a:fillRef idx="1">
+            <a:schemeClr val="accent1"/>
+          </a:fillRef>
+          <a:effectRef idx="0">
+            <a:schemeClr val="accent1"/>
+          </a:effectRef>
+          <a:fontRef idx="minor">
+            <a:schemeClr val="lt1"/>
+          </a:fontRef>
+        </p:style>
+        <p:txBody>
+          <a:bodyPr rtlCol="0" anchor="ctr"/>
+          <a:lstStyle/>
+          <a:p>
+            <a:pPr algn="ctr"/>
+            <a:endParaRPr lang="ko-KR" altLang="en-US">
+              <a:solidFill>
+                <a:srgbClr val="0070C0"/>
+              </a:solidFill>
+            </a:endParaRPr>
+          </a:p>
+        </p:txBody>
+      </p:sp>
+      <p:sp>
+        <p:nvSpPr>
+          <p:cNvPr id="96" name="타원 95">
+            <a:extLst>
+              <a:ext uri="{FF2B5EF4-FFF2-40B4-BE49-F238E27FC236}">
+                <a16:creationId xmlns:a16="http://schemas.microsoft.com/office/drawing/2014/main" id="{6C3AF25B-74B2-87EF-DA55-49672FD67636}"/>
+              </a:ext>
+            </a:extLst>
+          </p:cNvPr>
+          <p:cNvSpPr/>
+          <p:nvPr/>
+        </p:nvSpPr>
+        <p:spPr>
+          <a:xfrm>
+            <a:off x="4045209" y="2324101"/>
+            <a:ext cx="1192728" cy="800100"/>
+          </a:xfrm>
+          <a:prstGeom prst="ellipse">
+            <a:avLst/>
+          </a:prstGeom>
+          <a:solidFill>
+            <a:schemeClr val="accent4">
+              <a:lumMod val="20000"/>
+              <a:lumOff val="80000"/>
+            </a:schemeClr>
+          </a:solidFill>
+          <a:ln>
+            <a:solidFill>
+              <a:schemeClr val="tx1"/>
+            </a:solidFill>
+          </a:ln>
+        </p:spPr>
+        <p:style>
+          <a:lnRef idx="2">
+            <a:schemeClr val="accent1">
+              <a:shade val="15000"/>
+            </a:schemeClr>
+          </a:lnRef>
+          <a:fillRef idx="1">
+            <a:schemeClr val="accent1"/>
+          </a:fillRef>
+          <a:effectRef idx="0">
+            <a:schemeClr val="accent1"/>
+          </a:effectRef>
+          <a:fontRef idx="minor">
+            <a:schemeClr val="lt1"/>
+          </a:fontRef>
+        </p:style>
+        <p:txBody>
+          <a:bodyPr rtlCol="0" anchor="ctr"/>
+          <a:lstStyle/>
+          <a:p>
+            <a:pPr algn="ctr"/>
+            <a:r>
+              <a:rPr lang="ko-KR" altLang="en-US" dirty="0">
+                <a:solidFill>
+                  <a:sysClr val="windowText" lastClr="000000"/>
+                </a:solidFill>
+              </a:rPr>
+              <a:t>늪</a:t>
+            </a:r>
+          </a:p>
+        </p:txBody>
+      </p:sp>
+      <p:sp>
+        <p:nvSpPr>
+          <p:cNvPr id="98" name="사각형: 둥근 모서리 97">
+            <a:extLst>
+              <a:ext uri="{FF2B5EF4-FFF2-40B4-BE49-F238E27FC236}">
+                <a16:creationId xmlns:a16="http://schemas.microsoft.com/office/drawing/2014/main" id="{E0A76D0A-56A2-8E7C-F21A-DF9F58C58BF5}"/>
+              </a:ext>
+            </a:extLst>
+          </p:cNvPr>
+          <p:cNvSpPr/>
+          <p:nvPr/>
+        </p:nvSpPr>
+        <p:spPr>
+          <a:xfrm>
+            <a:off x="1248444" y="3460716"/>
+            <a:ext cx="1361405" cy="1082709"/>
+          </a:xfrm>
+          <a:prstGeom prst="roundRect">
+            <a:avLst/>
+          </a:prstGeom>
+          <a:solidFill>
+            <a:schemeClr val="accent6">
+              <a:lumMod val="40000"/>
+              <a:lumOff val="60000"/>
+            </a:schemeClr>
+          </a:solidFill>
+        </p:spPr>
+        <p:style>
+          <a:lnRef idx="2">
+            <a:schemeClr val="accent1">
+              <a:shade val="15000"/>
+            </a:schemeClr>
+          </a:lnRef>
+          <a:fillRef idx="1">
+            <a:schemeClr val="accent1"/>
+          </a:fillRef>
+          <a:effectRef idx="0">
+            <a:schemeClr val="accent1"/>
+          </a:effectRef>
+          <a:fontRef idx="minor">
+            <a:schemeClr val="lt1"/>
+          </a:fontRef>
+        </p:style>
+        <p:txBody>
+          <a:bodyPr rtlCol="0" anchor="ctr"/>
+          <a:lstStyle/>
+          <a:p>
+            <a:pPr algn="ctr"/>
+            <a:r>
+              <a:rPr lang="ko-KR" altLang="en-US">
+                <a:solidFill>
+                  <a:sysClr val="windowText" lastClr="000000"/>
+                </a:solidFill>
+              </a:rPr>
+              <a:t>숲</a:t>
+            </a:r>
+          </a:p>
+        </p:txBody>
+      </p:sp>
+      <p:sp>
+        <p:nvSpPr>
+          <p:cNvPr id="100" name="TextBox 99">
+            <a:extLst>
+              <a:ext uri="{FF2B5EF4-FFF2-40B4-BE49-F238E27FC236}">
+                <a16:creationId xmlns:a16="http://schemas.microsoft.com/office/drawing/2014/main" id="{340EB758-5DD8-06B5-CF66-DB08701E0965}"/>
+              </a:ext>
+            </a:extLst>
+          </p:cNvPr>
+          <p:cNvSpPr txBox="1"/>
+          <p:nvPr/>
+        </p:nvSpPr>
+        <p:spPr>
+          <a:xfrm>
+            <a:off x="4349071" y="3341690"/>
+            <a:ext cx="1025912" cy="307777"/>
+          </a:xfrm>
+          <a:prstGeom prst="rect">
+            <a:avLst/>
+          </a:prstGeom>
+          <a:noFill/>
+        </p:spPr>
+        <p:txBody>
+          <a:bodyPr wrap="square" rtlCol="0">
+            <a:spAutoFit/>
+          </a:bodyPr>
+          <a:lstStyle/>
+          <a:p>
+            <a:pPr algn="ctr"/>
+            <a:r>
+              <a:rPr lang="ko-KR" altLang="en-US" sz="1400" b="1">
+                <a:solidFill>
+                  <a:srgbClr val="0070C0"/>
+                </a:solidFill>
+              </a:rPr>
+              <a:t>강</a:t>
+            </a:r>
+            <a:endParaRPr lang="ko-KR" altLang="en-US" sz="1400" b="1" dirty="0">
+              <a:solidFill>
+                <a:srgbClr val="0070C0"/>
+              </a:solidFill>
+            </a:endParaRPr>
+          </a:p>
+        </p:txBody>
+      </p:sp>
+      <p:sp>
+        <p:nvSpPr>
+          <p:cNvPr id="102" name="TextBox 101">
+            <a:extLst>
+              <a:ext uri="{FF2B5EF4-FFF2-40B4-BE49-F238E27FC236}">
+                <a16:creationId xmlns:a16="http://schemas.microsoft.com/office/drawing/2014/main" id="{E2DB6651-59F0-73C0-E771-4DAC49EC1B07}"/>
+              </a:ext>
+            </a:extLst>
+          </p:cNvPr>
+          <p:cNvSpPr txBox="1"/>
+          <p:nvPr/>
+        </p:nvSpPr>
+        <p:spPr>
+          <a:xfrm>
+            <a:off x="2848932" y="4942057"/>
+            <a:ext cx="1025912" cy="338554"/>
+          </a:xfrm>
+          <a:prstGeom prst="rect">
+            <a:avLst/>
+          </a:prstGeom>
+          <a:noFill/>
+        </p:spPr>
+        <p:txBody>
+          <a:bodyPr wrap="square" rtlCol="0">
+            <a:spAutoFit/>
+          </a:bodyPr>
+          <a:lstStyle/>
+          <a:p>
+            <a:pPr algn="ctr"/>
+            <a:r>
+              <a:rPr lang="ko-KR" altLang="en-US" sz="1600" b="1">
+                <a:solidFill>
+                  <a:sysClr val="windowText" lastClr="000000"/>
+                </a:solidFill>
+              </a:rPr>
+              <a:t>산</a:t>
+            </a:r>
+            <a:endParaRPr lang="ko-KR" altLang="en-US" sz="1600" b="1" dirty="0">
+              <a:solidFill>
+                <a:sysClr val="windowText" lastClr="000000"/>
+              </a:solidFill>
+            </a:endParaRPr>
           </a:p>
         </p:txBody>
       </p:sp>
@@ -30717,7 +35142,7 @@
           <a:p>
             <a:fld id="{492E84DF-9BBC-4DFC-AB92-EB3DF1902948}" type="datetime1">
               <a:rPr lang="en-US" altLang="ko-KR" smtClean="0"/>
-              <a:t>9/25/2026</a:t>
+              <a:t>9/26/2026</a:t>
             </a:fld>
             <a:endParaRPr lang="ko-KR" altLang="en-US"/>
           </a:p>
@@ -30780,33 +35205,902 @@
           </a:p>
         </p:txBody>
       </p:sp>
+      <p:pic>
+        <p:nvPicPr>
+          <p:cNvPr id="8" name="그림 7">
+            <a:extLst>
+              <a:ext uri="{FF2B5EF4-FFF2-40B4-BE49-F238E27FC236}">
+                <a16:creationId xmlns:a16="http://schemas.microsoft.com/office/drawing/2014/main" id="{279DACBC-3CAB-8EF9-57B8-7C2921780618}"/>
+              </a:ext>
+            </a:extLst>
+          </p:cNvPr>
+          <p:cNvPicPr>
+            <a:picLocks noChangeAspect="1"/>
+          </p:cNvPicPr>
+          <p:nvPr/>
+        </p:nvPicPr>
+        <p:blipFill>
+          <a:blip r:embed="rId2"/>
+          <a:stretch>
+            <a:fillRect/>
+          </a:stretch>
+        </p:blipFill>
+        <p:spPr>
+          <a:xfrm>
+            <a:off x="1242992" y="1529202"/>
+            <a:ext cx="4320000" cy="4320000"/>
+          </a:xfrm>
+          <a:prstGeom prst="rect">
+            <a:avLst/>
+          </a:prstGeom>
+        </p:spPr>
+      </p:pic>
       <p:sp>
         <p:nvSpPr>
-          <p:cNvPr id="12" name="내용 개체 틀 2">
-            <a:extLst>
-              <a:ext uri="{FF2B5EF4-FFF2-40B4-BE49-F238E27FC236}">
-                <a16:creationId xmlns:a16="http://schemas.microsoft.com/office/drawing/2014/main" id="{7CC0537B-2D9C-E857-41CC-0A210225D33D}"/>
-              </a:ext>
-            </a:extLst>
-          </p:cNvPr>
-          <p:cNvSpPr>
-            <a:spLocks noGrp="1"/>
-          </p:cNvSpPr>
-          <p:nvPr>
-            <p:ph sz="half" idx="1"/>
-          </p:nvPr>
+          <p:cNvPr id="15" name="사각형: 잘린 대각선 방향 모서리 14">
+            <a:extLst>
+              <a:ext uri="{FF2B5EF4-FFF2-40B4-BE49-F238E27FC236}">
+                <a16:creationId xmlns:a16="http://schemas.microsoft.com/office/drawing/2014/main" id="{6EE55D26-E1DF-0F72-9B4A-80B5BEA678EA}"/>
+              </a:ext>
+            </a:extLst>
+          </p:cNvPr>
+          <p:cNvSpPr/>
+          <p:nvPr/>
         </p:nvSpPr>
         <p:spPr>
           <a:xfrm>
-            <a:off x="838200" y="1825625"/>
-            <a:ext cx="5181600" cy="4351338"/>
+            <a:off x="1242991" y="1529203"/>
+            <a:ext cx="1781197" cy="1194948"/>
           </a:xfrm>
+          <a:prstGeom prst="snip2DiagRect">
+            <a:avLst>
+              <a:gd name="adj1" fmla="val 0"/>
+              <a:gd name="adj2" fmla="val 50000"/>
+            </a:avLst>
+          </a:prstGeom>
+          <a:solidFill>
+            <a:schemeClr val="accent2">
+              <a:lumMod val="20000"/>
+              <a:lumOff val="80000"/>
+            </a:schemeClr>
+          </a:solidFill>
+        </p:spPr>
+        <p:style>
+          <a:lnRef idx="2">
+            <a:schemeClr val="accent1">
+              <a:shade val="15000"/>
+            </a:schemeClr>
+          </a:lnRef>
+          <a:fillRef idx="1">
+            <a:schemeClr val="accent1"/>
+          </a:fillRef>
+          <a:effectRef idx="0">
+            <a:schemeClr val="accent1"/>
+          </a:effectRef>
+          <a:fontRef idx="minor">
+            <a:schemeClr val="lt1"/>
+          </a:fontRef>
+        </p:style>
+        <p:txBody>
+          <a:bodyPr rtlCol="0" anchor="ctr"/>
+          <a:lstStyle/>
+          <a:p>
+            <a:pPr algn="ctr"/>
+            <a:r>
+              <a:rPr lang="ko-KR" altLang="en-US" dirty="0">
+                <a:solidFill>
+                  <a:sysClr val="windowText" lastClr="000000"/>
+                </a:solidFill>
+              </a:rPr>
+              <a:t>모래언덕</a:t>
+            </a:r>
+          </a:p>
+        </p:txBody>
+      </p:sp>
+      <p:sp>
+        <p:nvSpPr>
+          <p:cNvPr id="17" name="사각형: 둥근 모서리 16">
+            <a:extLst>
+              <a:ext uri="{FF2B5EF4-FFF2-40B4-BE49-F238E27FC236}">
+                <a16:creationId xmlns:a16="http://schemas.microsoft.com/office/drawing/2014/main" id="{30EBA149-695C-638F-AF81-E11BBE51039B}"/>
+              </a:ext>
+            </a:extLst>
+          </p:cNvPr>
+          <p:cNvSpPr/>
+          <p:nvPr/>
+        </p:nvSpPr>
+        <p:spPr>
+          <a:xfrm>
+            <a:off x="2900363" y="2418165"/>
+            <a:ext cx="1524390" cy="1010835"/>
+          </a:xfrm>
+          <a:prstGeom prst="roundRect">
+            <a:avLst/>
+          </a:prstGeom>
+          <a:solidFill>
+            <a:schemeClr val="accent6">
+              <a:lumMod val="40000"/>
+              <a:lumOff val="60000"/>
+            </a:schemeClr>
+          </a:solidFill>
+        </p:spPr>
+        <p:style>
+          <a:lnRef idx="2">
+            <a:schemeClr val="accent1">
+              <a:shade val="15000"/>
+            </a:schemeClr>
+          </a:lnRef>
+          <a:fillRef idx="1">
+            <a:schemeClr val="accent1"/>
+          </a:fillRef>
+          <a:effectRef idx="0">
+            <a:schemeClr val="accent1"/>
+          </a:effectRef>
+          <a:fontRef idx="minor">
+            <a:schemeClr val="lt1"/>
+          </a:fontRef>
+        </p:style>
+        <p:txBody>
+          <a:bodyPr rtlCol="0" anchor="ctr"/>
+          <a:lstStyle/>
+          <a:p>
+            <a:pPr algn="ctr"/>
+            <a:r>
+              <a:rPr lang="ko-KR" altLang="en-US">
+                <a:solidFill>
+                  <a:sysClr val="windowText" lastClr="000000"/>
+                </a:solidFill>
+              </a:rPr>
+              <a:t>숲</a:t>
+            </a:r>
+          </a:p>
+        </p:txBody>
+      </p:sp>
+      <p:pic>
+        <p:nvPicPr>
+          <p:cNvPr id="19" name="그림 18">
+            <a:extLst>
+              <a:ext uri="{FF2B5EF4-FFF2-40B4-BE49-F238E27FC236}">
+                <a16:creationId xmlns:a16="http://schemas.microsoft.com/office/drawing/2014/main" id="{C8FFDABD-E7F9-1848-1C81-F5E58C10C872}"/>
+              </a:ext>
+            </a:extLst>
+          </p:cNvPr>
+          <p:cNvPicPr>
+            <a:picLocks noChangeAspect="1"/>
+          </p:cNvPicPr>
+          <p:nvPr/>
+        </p:nvPicPr>
+        <p:blipFill>
+          <a:blip r:embed="rId3"/>
+          <a:stretch>
+            <a:fillRect/>
+          </a:stretch>
+        </p:blipFill>
+        <p:spPr>
+          <a:xfrm>
+            <a:off x="1938333" y="4479534"/>
+            <a:ext cx="2434865" cy="1363734"/>
+          </a:xfrm>
+          <a:prstGeom prst="rect">
+            <a:avLst/>
+          </a:prstGeom>
+        </p:spPr>
+      </p:pic>
+      <p:sp>
+        <p:nvSpPr>
+          <p:cNvPr id="21" name="자유형: 도형 20">
+            <a:extLst>
+              <a:ext uri="{FF2B5EF4-FFF2-40B4-BE49-F238E27FC236}">
+                <a16:creationId xmlns:a16="http://schemas.microsoft.com/office/drawing/2014/main" id="{F06EF77A-6096-EC45-E887-2FE11306664A}"/>
+              </a:ext>
+            </a:extLst>
+          </p:cNvPr>
+          <p:cNvSpPr/>
+          <p:nvPr/>
+        </p:nvSpPr>
+        <p:spPr>
+          <a:xfrm>
+            <a:off x="4368614" y="1533525"/>
+            <a:ext cx="1164454" cy="4320000"/>
+          </a:xfrm>
+          <a:custGeom>
+            <a:avLst/>
+            <a:gdLst>
+              <a:gd name="csX0" fmla="*/ 1160649 w 1164454"/>
+              <a:gd name="csY0" fmla="*/ 0 h 4424944"/>
+              <a:gd name="csX1" fmla="*/ 1046349 w 1164454"/>
+              <a:gd name="csY1" fmla="*/ 1457325 h 4424944"/>
+              <a:gd name="csX2" fmla="*/ 379599 w 1164454"/>
+              <a:gd name="csY2" fmla="*/ 2519363 h 4424944"/>
+              <a:gd name="csX3" fmla="*/ 31936 w 1164454"/>
+              <a:gd name="csY3" fmla="*/ 4257675 h 4424944"/>
+              <a:gd name="csX4" fmla="*/ 36699 w 1164454"/>
+              <a:gd name="csY4" fmla="*/ 4257675 h 4424944"/>
+            </a:gdLst>
+            <a:ahLst/>
+            <a:cxnLst>
+              <a:cxn ang="0">
+                <a:pos x="csX0" y="csY0"/>
+              </a:cxn>
+              <a:cxn ang="0">
+                <a:pos x="csX1" y="csY1"/>
+              </a:cxn>
+              <a:cxn ang="0">
+                <a:pos x="csX2" y="csY2"/>
+              </a:cxn>
+              <a:cxn ang="0">
+                <a:pos x="csX3" y="csY3"/>
+              </a:cxn>
+              <a:cxn ang="0">
+                <a:pos x="csX4" y="csY4"/>
+              </a:cxn>
+            </a:cxnLst>
+            <a:rect l="l" t="t" r="r" b="b"/>
+            <a:pathLst>
+              <a:path w="1164454" h="4424944">
+                <a:moveTo>
+                  <a:pt x="1160649" y="0"/>
+                </a:moveTo>
+                <a:cubicBezTo>
+                  <a:pt x="1168586" y="518715"/>
+                  <a:pt x="1176524" y="1037431"/>
+                  <a:pt x="1046349" y="1457325"/>
+                </a:cubicBezTo>
+                <a:cubicBezTo>
+                  <a:pt x="916174" y="1877219"/>
+                  <a:pt x="548668" y="2052638"/>
+                  <a:pt x="379599" y="2519363"/>
+                </a:cubicBezTo>
+                <a:cubicBezTo>
+                  <a:pt x="210530" y="2986088"/>
+                  <a:pt x="89086" y="3967956"/>
+                  <a:pt x="31936" y="4257675"/>
+                </a:cubicBezTo>
+                <a:cubicBezTo>
+                  <a:pt x="-25214" y="4547394"/>
+                  <a:pt x="5742" y="4402534"/>
+                  <a:pt x="36699" y="4257675"/>
+                </a:cubicBezTo>
+              </a:path>
+            </a:pathLst>
+          </a:custGeom>
+          <a:noFill/>
+          <a:ln>
+            <a:solidFill>
+              <a:schemeClr val="accent1"/>
+            </a:solidFill>
+          </a:ln>
+        </p:spPr>
+        <p:style>
+          <a:lnRef idx="2">
+            <a:schemeClr val="accent1">
+              <a:shade val="15000"/>
+            </a:schemeClr>
+          </a:lnRef>
+          <a:fillRef idx="1">
+            <a:schemeClr val="accent1"/>
+          </a:fillRef>
+          <a:effectRef idx="0">
+            <a:schemeClr val="accent1"/>
+          </a:effectRef>
+          <a:fontRef idx="minor">
+            <a:schemeClr val="lt1"/>
+          </a:fontRef>
+        </p:style>
+        <p:txBody>
+          <a:bodyPr rtlCol="0" anchor="ctr"/>
+          <a:lstStyle/>
+          <a:p>
+            <a:pPr algn="ctr"/>
+            <a:endParaRPr lang="ko-KR" altLang="en-US">
+              <a:solidFill>
+                <a:srgbClr val="0070C0"/>
+              </a:solidFill>
+            </a:endParaRPr>
+          </a:p>
+        </p:txBody>
+      </p:sp>
+      <p:sp>
+        <p:nvSpPr>
+          <p:cNvPr id="23" name="자유형: 도형 22">
+            <a:extLst>
+              <a:ext uri="{FF2B5EF4-FFF2-40B4-BE49-F238E27FC236}">
+                <a16:creationId xmlns:a16="http://schemas.microsoft.com/office/drawing/2014/main" id="{9C6DC375-A670-3774-7911-2A16DFA4EB52}"/>
+              </a:ext>
+            </a:extLst>
+          </p:cNvPr>
+          <p:cNvSpPr/>
+          <p:nvPr/>
+        </p:nvSpPr>
+        <p:spPr>
+          <a:xfrm>
+            <a:off x="4133850" y="1533526"/>
+            <a:ext cx="1217417" cy="3790950"/>
+          </a:xfrm>
+          <a:custGeom>
+            <a:avLst/>
+            <a:gdLst>
+              <a:gd name="csX0" fmla="*/ 1160649 w 1164454"/>
+              <a:gd name="csY0" fmla="*/ 0 h 4424944"/>
+              <a:gd name="csX1" fmla="*/ 1046349 w 1164454"/>
+              <a:gd name="csY1" fmla="*/ 1457325 h 4424944"/>
+              <a:gd name="csX2" fmla="*/ 379599 w 1164454"/>
+              <a:gd name="csY2" fmla="*/ 2519363 h 4424944"/>
+              <a:gd name="csX3" fmla="*/ 31936 w 1164454"/>
+              <a:gd name="csY3" fmla="*/ 4257675 h 4424944"/>
+              <a:gd name="csX4" fmla="*/ 36699 w 1164454"/>
+              <a:gd name="csY4" fmla="*/ 4257675 h 4424944"/>
+            </a:gdLst>
+            <a:ahLst/>
+            <a:cxnLst>
+              <a:cxn ang="0">
+                <a:pos x="csX0" y="csY0"/>
+              </a:cxn>
+              <a:cxn ang="0">
+                <a:pos x="csX1" y="csY1"/>
+              </a:cxn>
+              <a:cxn ang="0">
+                <a:pos x="csX2" y="csY2"/>
+              </a:cxn>
+              <a:cxn ang="0">
+                <a:pos x="csX3" y="csY3"/>
+              </a:cxn>
+              <a:cxn ang="0">
+                <a:pos x="csX4" y="csY4"/>
+              </a:cxn>
+            </a:cxnLst>
+            <a:rect l="l" t="t" r="r" b="b"/>
+            <a:pathLst>
+              <a:path w="1164454" h="4424944">
+                <a:moveTo>
+                  <a:pt x="1160649" y="0"/>
+                </a:moveTo>
+                <a:cubicBezTo>
+                  <a:pt x="1168586" y="518715"/>
+                  <a:pt x="1176524" y="1037431"/>
+                  <a:pt x="1046349" y="1457325"/>
+                </a:cubicBezTo>
+                <a:cubicBezTo>
+                  <a:pt x="916174" y="1877219"/>
+                  <a:pt x="548668" y="2052638"/>
+                  <a:pt x="379599" y="2519363"/>
+                </a:cubicBezTo>
+                <a:cubicBezTo>
+                  <a:pt x="210530" y="2986088"/>
+                  <a:pt x="89086" y="3967956"/>
+                  <a:pt x="31936" y="4257675"/>
+                </a:cubicBezTo>
+                <a:cubicBezTo>
+                  <a:pt x="-25214" y="4547394"/>
+                  <a:pt x="5742" y="4402534"/>
+                  <a:pt x="36699" y="4257675"/>
+                </a:cubicBezTo>
+              </a:path>
+            </a:pathLst>
+          </a:custGeom>
+          <a:noFill/>
+          <a:ln>
+            <a:solidFill>
+              <a:schemeClr val="accent1"/>
+            </a:solidFill>
+          </a:ln>
+        </p:spPr>
+        <p:style>
+          <a:lnRef idx="2">
+            <a:schemeClr val="accent1">
+              <a:shade val="15000"/>
+            </a:schemeClr>
+          </a:lnRef>
+          <a:fillRef idx="1">
+            <a:schemeClr val="accent1"/>
+          </a:fillRef>
+          <a:effectRef idx="0">
+            <a:schemeClr val="accent1"/>
+          </a:effectRef>
+          <a:fontRef idx="minor">
+            <a:schemeClr val="lt1"/>
+          </a:fontRef>
+        </p:style>
+        <p:txBody>
+          <a:bodyPr rtlCol="0" anchor="ctr"/>
+          <a:lstStyle/>
+          <a:p>
+            <a:pPr algn="ctr"/>
+            <a:endParaRPr lang="ko-KR" altLang="en-US">
+              <a:solidFill>
+                <a:srgbClr val="0070C0"/>
+              </a:solidFill>
+            </a:endParaRPr>
+          </a:p>
+        </p:txBody>
+      </p:sp>
+      <p:sp>
+        <p:nvSpPr>
+          <p:cNvPr id="25" name="타원 24">
+            <a:extLst>
+              <a:ext uri="{FF2B5EF4-FFF2-40B4-BE49-F238E27FC236}">
+                <a16:creationId xmlns:a16="http://schemas.microsoft.com/office/drawing/2014/main" id="{7E653197-3FFA-609C-581C-24AC71DCC634}"/>
+              </a:ext>
+            </a:extLst>
+          </p:cNvPr>
+          <p:cNvSpPr/>
+          <p:nvPr/>
+        </p:nvSpPr>
+        <p:spPr>
+          <a:xfrm>
+            <a:off x="4045209" y="2324101"/>
+            <a:ext cx="1192728" cy="800100"/>
+          </a:xfrm>
+          <a:prstGeom prst="ellipse">
+            <a:avLst/>
+          </a:prstGeom>
+          <a:solidFill>
+            <a:schemeClr val="accent4">
+              <a:lumMod val="20000"/>
+              <a:lumOff val="80000"/>
+            </a:schemeClr>
+          </a:solidFill>
+          <a:ln>
+            <a:solidFill>
+              <a:schemeClr val="tx1"/>
+            </a:solidFill>
+          </a:ln>
+        </p:spPr>
+        <p:style>
+          <a:lnRef idx="2">
+            <a:schemeClr val="accent1">
+              <a:shade val="15000"/>
+            </a:schemeClr>
+          </a:lnRef>
+          <a:fillRef idx="1">
+            <a:schemeClr val="accent1"/>
+          </a:fillRef>
+          <a:effectRef idx="0">
+            <a:schemeClr val="accent1"/>
+          </a:effectRef>
+          <a:fontRef idx="minor">
+            <a:schemeClr val="lt1"/>
+          </a:fontRef>
+        </p:style>
+        <p:txBody>
+          <a:bodyPr rtlCol="0" anchor="ctr"/>
+          <a:lstStyle/>
+          <a:p>
+            <a:pPr algn="ctr"/>
+            <a:r>
+              <a:rPr lang="ko-KR" altLang="en-US" dirty="0">
+                <a:solidFill>
+                  <a:sysClr val="windowText" lastClr="000000"/>
+                </a:solidFill>
+              </a:rPr>
+              <a:t>늪</a:t>
+            </a:r>
+          </a:p>
+        </p:txBody>
+      </p:sp>
+      <p:sp>
+        <p:nvSpPr>
+          <p:cNvPr id="27" name="사각형: 둥근 모서리 26">
+            <a:extLst>
+              <a:ext uri="{FF2B5EF4-FFF2-40B4-BE49-F238E27FC236}">
+                <a16:creationId xmlns:a16="http://schemas.microsoft.com/office/drawing/2014/main" id="{295C96E5-2419-8F85-B650-ABE6377F0E7A}"/>
+              </a:ext>
+            </a:extLst>
+          </p:cNvPr>
+          <p:cNvSpPr/>
+          <p:nvPr/>
+        </p:nvSpPr>
+        <p:spPr>
+          <a:xfrm>
+            <a:off x="1248444" y="3460716"/>
+            <a:ext cx="1361405" cy="1082709"/>
+          </a:xfrm>
+          <a:prstGeom prst="roundRect">
+            <a:avLst/>
+          </a:prstGeom>
+          <a:solidFill>
+            <a:schemeClr val="accent6">
+              <a:lumMod val="40000"/>
+              <a:lumOff val="60000"/>
+            </a:schemeClr>
+          </a:solidFill>
+        </p:spPr>
+        <p:style>
+          <a:lnRef idx="2">
+            <a:schemeClr val="accent1">
+              <a:shade val="15000"/>
+            </a:schemeClr>
+          </a:lnRef>
+          <a:fillRef idx="1">
+            <a:schemeClr val="accent1"/>
+          </a:fillRef>
+          <a:effectRef idx="0">
+            <a:schemeClr val="accent1"/>
+          </a:effectRef>
+          <a:fontRef idx="minor">
+            <a:schemeClr val="lt1"/>
+          </a:fontRef>
+        </p:style>
+        <p:txBody>
+          <a:bodyPr rtlCol="0" anchor="ctr"/>
+          <a:lstStyle/>
+          <a:p>
+            <a:pPr algn="ctr"/>
+            <a:r>
+              <a:rPr lang="ko-KR" altLang="en-US">
+                <a:solidFill>
+                  <a:sysClr val="windowText" lastClr="000000"/>
+                </a:solidFill>
+              </a:rPr>
+              <a:t>숲</a:t>
+            </a:r>
+          </a:p>
+        </p:txBody>
+      </p:sp>
+      <p:sp>
+        <p:nvSpPr>
+          <p:cNvPr id="29" name="TextBox 28">
+            <a:extLst>
+              <a:ext uri="{FF2B5EF4-FFF2-40B4-BE49-F238E27FC236}">
+                <a16:creationId xmlns:a16="http://schemas.microsoft.com/office/drawing/2014/main" id="{A77DC269-5F72-D3C4-1657-AE99E3839134}"/>
+              </a:ext>
+            </a:extLst>
+          </p:cNvPr>
+          <p:cNvSpPr txBox="1"/>
+          <p:nvPr/>
+        </p:nvSpPr>
+        <p:spPr>
+          <a:xfrm>
+            <a:off x="4349071" y="3341690"/>
+            <a:ext cx="1025912" cy="307777"/>
+          </a:xfrm>
+          <a:prstGeom prst="rect">
+            <a:avLst/>
+          </a:prstGeom>
+          <a:noFill/>
+        </p:spPr>
+        <p:txBody>
+          <a:bodyPr wrap="square" rtlCol="0">
+            <a:spAutoFit/>
+          </a:bodyPr>
+          <a:lstStyle/>
+          <a:p>
+            <a:pPr algn="ctr"/>
+            <a:r>
+              <a:rPr lang="ko-KR" altLang="en-US" sz="1400" b="1">
+                <a:solidFill>
+                  <a:srgbClr val="0070C0"/>
+                </a:solidFill>
+              </a:rPr>
+              <a:t>강</a:t>
+            </a:r>
+            <a:endParaRPr lang="ko-KR" altLang="en-US" sz="1400" b="1" dirty="0">
+              <a:solidFill>
+                <a:srgbClr val="0070C0"/>
+              </a:solidFill>
+            </a:endParaRPr>
+          </a:p>
+        </p:txBody>
+      </p:sp>
+      <p:sp>
+        <p:nvSpPr>
+          <p:cNvPr id="31" name="TextBox 30">
+            <a:extLst>
+              <a:ext uri="{FF2B5EF4-FFF2-40B4-BE49-F238E27FC236}">
+                <a16:creationId xmlns:a16="http://schemas.microsoft.com/office/drawing/2014/main" id="{3EAC2BA5-1C89-B81F-0D15-E2EEB5BC2D53}"/>
+              </a:ext>
+            </a:extLst>
+          </p:cNvPr>
+          <p:cNvSpPr txBox="1"/>
+          <p:nvPr/>
+        </p:nvSpPr>
+        <p:spPr>
+          <a:xfrm>
+            <a:off x="2848932" y="4942057"/>
+            <a:ext cx="1025912" cy="338554"/>
+          </a:xfrm>
+          <a:prstGeom prst="rect">
+            <a:avLst/>
+          </a:prstGeom>
+          <a:noFill/>
+        </p:spPr>
+        <p:txBody>
+          <a:bodyPr wrap="square" rtlCol="0">
+            <a:spAutoFit/>
+          </a:bodyPr>
+          <a:lstStyle/>
+          <a:p>
+            <a:pPr algn="ctr"/>
+            <a:r>
+              <a:rPr lang="ko-KR" altLang="en-US" sz="1600" b="1">
+                <a:solidFill>
+                  <a:sysClr val="windowText" lastClr="000000"/>
+                </a:solidFill>
+              </a:rPr>
+              <a:t>산</a:t>
+            </a:r>
+            <a:endParaRPr lang="ko-KR" altLang="en-US" sz="1600" b="1" dirty="0">
+              <a:solidFill>
+                <a:sysClr val="windowText" lastClr="000000"/>
+              </a:solidFill>
+            </a:endParaRPr>
+          </a:p>
+        </p:txBody>
+      </p:sp>
+      <p:sp>
+        <p:nvSpPr>
+          <p:cNvPr id="33" name="그래픽 34" descr="배지 1 단색으로 채워진">
+            <a:extLst>
+              <a:ext uri="{FF2B5EF4-FFF2-40B4-BE49-F238E27FC236}">
+                <a16:creationId xmlns:a16="http://schemas.microsoft.com/office/drawing/2014/main" id="{783B4CBB-616D-3F80-1059-79845394D219}"/>
+              </a:ext>
+            </a:extLst>
+          </p:cNvPr>
+          <p:cNvSpPr/>
+          <p:nvPr/>
+        </p:nvSpPr>
+        <p:spPr>
+          <a:xfrm>
+            <a:off x="6063976" y="1931695"/>
+            <a:ext cx="389964" cy="389964"/>
+          </a:xfrm>
+          <a:custGeom>
+            <a:avLst/>
+            <a:gdLst>
+              <a:gd name="csX0" fmla="*/ 194982 w 389964"/>
+              <a:gd name="csY0" fmla="*/ 0 h 389964"/>
+              <a:gd name="csX1" fmla="*/ 0 w 389964"/>
+              <a:gd name="csY1" fmla="*/ 194982 h 389964"/>
+              <a:gd name="csX2" fmla="*/ 194982 w 389964"/>
+              <a:gd name="csY2" fmla="*/ 389964 h 389964"/>
+              <a:gd name="csX3" fmla="*/ 389964 w 389964"/>
+              <a:gd name="csY3" fmla="*/ 194982 h 389964"/>
+              <a:gd name="csX4" fmla="*/ 389964 w 389964"/>
+              <a:gd name="csY4" fmla="*/ 194962 h 389964"/>
+              <a:gd name="csX5" fmla="*/ 195136 w 389964"/>
+              <a:gd name="csY5" fmla="*/ 0 h 389964"/>
+              <a:gd name="csX6" fmla="*/ 194982 w 389964"/>
+              <a:gd name="csY6" fmla="*/ 0 h 389964"/>
+              <a:gd name="csX7" fmla="*/ 216370 w 389964"/>
+              <a:gd name="csY7" fmla="*/ 277747 h 389964"/>
+              <a:gd name="csX8" fmla="*/ 186711 w 389964"/>
+              <a:gd name="csY8" fmla="*/ 277747 h 389964"/>
+              <a:gd name="csX9" fmla="*/ 186711 w 389964"/>
+              <a:gd name="csY9" fmla="*/ 136096 h 389964"/>
+              <a:gd name="csX10" fmla="*/ 178779 w 389964"/>
+              <a:gd name="csY10" fmla="*/ 141040 h 389964"/>
+              <a:gd name="csX11" fmla="*/ 170175 w 389964"/>
+              <a:gd name="csY11" fmla="*/ 145301 h 389964"/>
+              <a:gd name="csX12" fmla="*/ 160118 w 389964"/>
+              <a:gd name="csY12" fmla="*/ 148797 h 389964"/>
+              <a:gd name="csX13" fmla="*/ 148525 w 389964"/>
+              <a:gd name="csY13" fmla="*/ 151950 h 389964"/>
+              <a:gd name="csX14" fmla="*/ 148525 w 389964"/>
+              <a:gd name="csY14" fmla="*/ 128256 h 389964"/>
+              <a:gd name="csX15" fmla="*/ 156277 w 389964"/>
+              <a:gd name="csY15" fmla="*/ 125869 h 389964"/>
+              <a:gd name="csX16" fmla="*/ 163188 w 389964"/>
+              <a:gd name="csY16" fmla="*/ 123482 h 389964"/>
+              <a:gd name="csX17" fmla="*/ 170006 w 389964"/>
+              <a:gd name="csY17" fmla="*/ 120668 h 389964"/>
+              <a:gd name="csX18" fmla="*/ 176823 w 389964"/>
+              <a:gd name="csY18" fmla="*/ 117855 h 389964"/>
+              <a:gd name="csX19" fmla="*/ 183380 w 389964"/>
+              <a:gd name="csY19" fmla="*/ 114446 h 389964"/>
+              <a:gd name="csX20" fmla="*/ 189951 w 389964"/>
+              <a:gd name="csY20" fmla="*/ 110852 h 389964"/>
+              <a:gd name="csX21" fmla="*/ 197020 w 389964"/>
+              <a:gd name="csY21" fmla="*/ 106745 h 389964"/>
+              <a:gd name="csX22" fmla="*/ 204100 w 389964"/>
+              <a:gd name="csY22" fmla="*/ 102638 h 389964"/>
+              <a:gd name="csX23" fmla="*/ 216370 w 389964"/>
+              <a:gd name="csY23" fmla="*/ 102638 h 389964"/>
+            </a:gdLst>
+            <a:ahLst/>
+            <a:cxnLst>
+              <a:cxn ang="0">
+                <a:pos x="csX0" y="csY0"/>
+              </a:cxn>
+              <a:cxn ang="0">
+                <a:pos x="csX1" y="csY1"/>
+              </a:cxn>
+              <a:cxn ang="0">
+                <a:pos x="csX2" y="csY2"/>
+              </a:cxn>
+              <a:cxn ang="0">
+                <a:pos x="csX3" y="csY3"/>
+              </a:cxn>
+              <a:cxn ang="0">
+                <a:pos x="csX4" y="csY4"/>
+              </a:cxn>
+              <a:cxn ang="0">
+                <a:pos x="csX5" y="csY5"/>
+              </a:cxn>
+              <a:cxn ang="0">
+                <a:pos x="csX6" y="csY6"/>
+              </a:cxn>
+              <a:cxn ang="0">
+                <a:pos x="csX7" y="csY7"/>
+              </a:cxn>
+              <a:cxn ang="0">
+                <a:pos x="csX8" y="csY8"/>
+              </a:cxn>
+              <a:cxn ang="0">
+                <a:pos x="csX9" y="csY9"/>
+              </a:cxn>
+              <a:cxn ang="0">
+                <a:pos x="csX10" y="csY10"/>
+              </a:cxn>
+              <a:cxn ang="0">
+                <a:pos x="csX11" y="csY11"/>
+              </a:cxn>
+              <a:cxn ang="0">
+                <a:pos x="csX12" y="csY12"/>
+              </a:cxn>
+              <a:cxn ang="0">
+                <a:pos x="csX13" y="csY13"/>
+              </a:cxn>
+              <a:cxn ang="0">
+                <a:pos x="csX14" y="csY14"/>
+              </a:cxn>
+              <a:cxn ang="0">
+                <a:pos x="csX15" y="csY15"/>
+              </a:cxn>
+              <a:cxn ang="0">
+                <a:pos x="csX16" y="csY16"/>
+              </a:cxn>
+              <a:cxn ang="0">
+                <a:pos x="csX17" y="csY17"/>
+              </a:cxn>
+              <a:cxn ang="0">
+                <a:pos x="csX18" y="csY18"/>
+              </a:cxn>
+              <a:cxn ang="0">
+                <a:pos x="csX19" y="csY19"/>
+              </a:cxn>
+              <a:cxn ang="0">
+                <a:pos x="csX20" y="csY20"/>
+              </a:cxn>
+              <a:cxn ang="0">
+                <a:pos x="csX21" y="csY21"/>
+              </a:cxn>
+              <a:cxn ang="0">
+                <a:pos x="csX22" y="csY22"/>
+              </a:cxn>
+              <a:cxn ang="0">
+                <a:pos x="csX23" y="csY23"/>
+              </a:cxn>
+            </a:cxnLst>
+            <a:rect l="l" t="t" r="r" b="b"/>
+            <a:pathLst>
+              <a:path w="389964" h="389964">
+                <a:moveTo>
+                  <a:pt x="194982" y="0"/>
+                </a:moveTo>
+                <a:cubicBezTo>
+                  <a:pt x="87297" y="0"/>
+                  <a:pt x="0" y="87297"/>
+                  <a:pt x="0" y="194982"/>
+                </a:cubicBezTo>
+                <a:cubicBezTo>
+                  <a:pt x="0" y="302668"/>
+                  <a:pt x="87297" y="389964"/>
+                  <a:pt x="194982" y="389964"/>
+                </a:cubicBezTo>
+                <a:cubicBezTo>
+                  <a:pt x="302668" y="389964"/>
+                  <a:pt x="389964" y="302668"/>
+                  <a:pt x="389964" y="194982"/>
+                </a:cubicBezTo>
+                <a:cubicBezTo>
+                  <a:pt x="389964" y="194976"/>
+                  <a:pt x="389964" y="194968"/>
+                  <a:pt x="389964" y="194962"/>
+                </a:cubicBezTo>
+                <a:cubicBezTo>
+                  <a:pt x="390001" y="87324"/>
+                  <a:pt x="302774" y="37"/>
+                  <a:pt x="195136" y="0"/>
+                </a:cubicBezTo>
+                <a:cubicBezTo>
+                  <a:pt x="195085" y="0"/>
+                  <a:pt x="195034" y="0"/>
+                  <a:pt x="194982" y="0"/>
+                </a:cubicBezTo>
+                <a:close/>
+                <a:moveTo>
+                  <a:pt x="216370" y="277747"/>
+                </a:moveTo>
+                <a:lnTo>
+                  <a:pt x="186711" y="277747"/>
+                </a:lnTo>
+                <a:lnTo>
+                  <a:pt x="186711" y="136096"/>
+                </a:lnTo>
+                <a:cubicBezTo>
+                  <a:pt x="184206" y="137807"/>
+                  <a:pt x="181562" y="139455"/>
+                  <a:pt x="178779" y="141040"/>
+                </a:cubicBezTo>
+                <a:cubicBezTo>
+                  <a:pt x="175998" y="142630"/>
+                  <a:pt x="173125" y="144052"/>
+                  <a:pt x="170175" y="145301"/>
+                </a:cubicBezTo>
+                <a:cubicBezTo>
+                  <a:pt x="166985" y="146554"/>
+                  <a:pt x="163633" y="147719"/>
+                  <a:pt x="160118" y="148797"/>
+                </a:cubicBezTo>
+                <a:cubicBezTo>
+                  <a:pt x="156602" y="149875"/>
+                  <a:pt x="152739" y="150926"/>
+                  <a:pt x="148525" y="151950"/>
+                </a:cubicBezTo>
+                <a:lnTo>
+                  <a:pt x="148525" y="128256"/>
+                </a:lnTo>
+                <a:cubicBezTo>
+                  <a:pt x="151366" y="127459"/>
+                  <a:pt x="153950" y="126663"/>
+                  <a:pt x="156277" y="125869"/>
+                </a:cubicBezTo>
+                <a:cubicBezTo>
+                  <a:pt x="158605" y="125075"/>
+                  <a:pt x="160908" y="124279"/>
+                  <a:pt x="163188" y="123482"/>
+                </a:cubicBezTo>
+                <a:cubicBezTo>
+                  <a:pt x="165452" y="122573"/>
+                  <a:pt x="167731" y="121639"/>
+                  <a:pt x="170006" y="120668"/>
+                </a:cubicBezTo>
+                <a:cubicBezTo>
+                  <a:pt x="172280" y="119698"/>
+                  <a:pt x="174549" y="118769"/>
+                  <a:pt x="176823" y="117855"/>
+                </a:cubicBezTo>
+                <a:cubicBezTo>
+                  <a:pt x="178980" y="116719"/>
+                  <a:pt x="181165" y="115582"/>
+                  <a:pt x="183380" y="114446"/>
+                </a:cubicBezTo>
+                <a:cubicBezTo>
+                  <a:pt x="185594" y="113310"/>
+                  <a:pt x="187784" y="112112"/>
+                  <a:pt x="189951" y="110852"/>
+                </a:cubicBezTo>
+                <a:cubicBezTo>
+                  <a:pt x="192347" y="109606"/>
+                  <a:pt x="194703" y="108238"/>
+                  <a:pt x="197020" y="106745"/>
+                </a:cubicBezTo>
+                <a:cubicBezTo>
+                  <a:pt x="199337" y="105253"/>
+                  <a:pt x="201697" y="103884"/>
+                  <a:pt x="204100" y="102638"/>
+                </a:cubicBezTo>
+                <a:lnTo>
+                  <a:pt x="216370" y="102638"/>
+                </a:lnTo>
+                <a:close/>
+              </a:path>
+            </a:pathLst>
+          </a:custGeom>
+          <a:solidFill>
+            <a:srgbClr val="7030A0"/>
+          </a:solidFill>
+          <a:ln w="5060" cap="flat">
+            <a:noFill/>
+            <a:prstDash val="solid"/>
+            <a:miter/>
+          </a:ln>
         </p:spPr>
         <p:txBody>
           <a:bodyPr/>
           <a:lstStyle/>
           <a:p>
-            <a:endParaRPr lang="ko-KR" altLang="en-US" dirty="0"/>
+            <a:endParaRPr lang="ko-KR" altLang="en-US"/>
           </a:p>
         </p:txBody>
       </p:sp>

--- a/documents/HyunahKwon/design/designing/for_teammates/프로토타입_기획.pptx
+++ b/documents/HyunahKwon/design/designing/for_teammates/프로토타입_기획.pptx
@@ -34957,165 +34957,170 @@
             <p:ph sz="half" idx="2"/>
           </p:nvPr>
         </p:nvSpPr>
-        <p:spPr/>
+        <p:spPr>
+          <a:xfrm>
+            <a:off x="6172200" y="1356659"/>
+            <a:ext cx="5181600" cy="4820304"/>
+          </a:xfrm>
+        </p:spPr>
         <p:txBody>
-          <a:bodyPr>
-            <a:normAutofit fontScale="70000" lnSpcReduction="20000"/>
+          <a:bodyPr anchor="ctr">
+            <a:normAutofit/>
           </a:bodyPr>
           <a:lstStyle/>
           <a:p>
-            <a:pPr>
-              <a:lnSpc>
-                <a:spcPct val="120000"/>
-              </a:lnSpc>
+            <a:pPr marL="0" indent="0">
+              <a:buNone/>
             </a:pPr>
             <a:r>
-              <a:rPr lang="ko-KR" altLang="en-US" dirty="0"/>
+              <a:rPr lang="ko-KR" altLang="en-US" sz="1800" dirty="0"/>
               <a:t>모래 지형 </a:t>
             </a:r>
             <a:r>
-              <a:rPr lang="en-US" altLang="ko-KR" dirty="0"/>
+              <a:rPr lang="en-US" altLang="ko-KR" sz="1800" dirty="0"/>
               <a:t>: </a:t>
             </a:r>
             <a:r>
-              <a:rPr lang="ko-KR" altLang="en-US" dirty="0"/>
+              <a:rPr lang="ko-KR" altLang="en-US" sz="1800" dirty="0"/>
               <a:t>플레이어 이동속도 </a:t>
             </a:r>
             <a:r>
-              <a:rPr lang="en-US" altLang="ko-KR" dirty="0"/>
+              <a:rPr lang="en-US" altLang="ko-KR" sz="1800" dirty="0"/>
               <a:t>1/3 </a:t>
             </a:r>
             <a:r>
-              <a:rPr lang="ko-KR" altLang="en-US" dirty="0"/>
+              <a:rPr lang="ko-KR" altLang="en-US" sz="1800" dirty="0"/>
               <a:t>감소</a:t>
             </a:r>
             <a:r>
-              <a:rPr lang="en-US" altLang="ko-KR" dirty="0"/>
+              <a:rPr lang="en-US" altLang="ko-KR" sz="1800" dirty="0"/>
               <a:t>, </a:t>
             </a:r>
             <a:r>
-              <a:rPr lang="ko-KR" altLang="en-US" dirty="0"/>
+              <a:rPr lang="ko-KR" altLang="en-US" sz="1800" dirty="0"/>
               <a:t>몬스터 없음</a:t>
             </a:r>
-            <a:endParaRPr lang="en-US" altLang="ko-KR" dirty="0"/>
-          </a:p>
-          <a:p>
-            <a:pPr>
-              <a:lnSpc>
-                <a:spcPct val="120000"/>
-              </a:lnSpc>
+            <a:endParaRPr lang="en-US" altLang="ko-KR" sz="1800" dirty="0"/>
+          </a:p>
+          <a:p>
+            <a:pPr marL="0" indent="0">
+              <a:buNone/>
             </a:pPr>
-            <a:endParaRPr lang="en-US" altLang="ko-KR" dirty="0"/>
-          </a:p>
-          <a:p>
-            <a:pPr>
-              <a:lnSpc>
-                <a:spcPct val="120000"/>
-              </a:lnSpc>
+            <a:endParaRPr lang="en-US" altLang="ko-KR" sz="1800" dirty="0"/>
+          </a:p>
+          <a:p>
+            <a:pPr marL="0" indent="0">
+              <a:buNone/>
             </a:pPr>
             <a:r>
-              <a:rPr lang="ko-KR" altLang="en-US" dirty="0"/>
+              <a:rPr lang="ko-KR" altLang="en-US" sz="1800" dirty="0"/>
               <a:t>늪 지형 </a:t>
             </a:r>
             <a:r>
-              <a:rPr lang="en-US" altLang="ko-KR" dirty="0"/>
+              <a:rPr lang="en-US" altLang="ko-KR" sz="1800" dirty="0"/>
               <a:t>: </a:t>
             </a:r>
             <a:r>
-              <a:rPr lang="ko-KR" altLang="en-US" dirty="0"/>
+              <a:rPr lang="ko-KR" altLang="en-US" sz="1800" dirty="0"/>
               <a:t>플레이어 이동속도 </a:t>
             </a:r>
             <a:r>
-              <a:rPr lang="en-US" altLang="ko-KR" dirty="0"/>
+              <a:rPr lang="en-US" altLang="ko-KR" sz="1800" dirty="0"/>
               <a:t>1/2 </a:t>
             </a:r>
             <a:r>
-              <a:rPr lang="ko-KR" altLang="en-US" dirty="0"/>
+              <a:rPr lang="ko-KR" altLang="en-US" sz="1800" dirty="0"/>
               <a:t>감소</a:t>
             </a:r>
             <a:r>
-              <a:rPr lang="en-US" altLang="ko-KR" dirty="0"/>
+              <a:rPr lang="en-US" altLang="ko-KR" sz="1800" dirty="0"/>
               <a:t>, </a:t>
             </a:r>
-            <a:br>
-              <a:rPr lang="en-US" altLang="ko-KR" dirty="0"/>
-            </a:br>
-            <a:r>
-              <a:rPr lang="ko-KR" altLang="en-US" dirty="0"/>
+            <a:r>
+              <a:rPr lang="ko-KR" altLang="en-US" sz="1800" dirty="0"/>
               <a:t>방향전환율 </a:t>
             </a:r>
             <a:r>
-              <a:rPr lang="en-US" altLang="ko-KR" dirty="0"/>
+              <a:rPr lang="en-US" altLang="ko-KR" sz="1800" dirty="0"/>
               <a:t>1/4 </a:t>
             </a:r>
             <a:r>
-              <a:rPr lang="ko-KR" altLang="en-US" dirty="0"/>
+              <a:rPr lang="ko-KR" altLang="en-US" sz="1800" dirty="0"/>
               <a:t>감소</a:t>
             </a:r>
-            <a:endParaRPr lang="en-US" altLang="ko-KR" dirty="0"/>
-          </a:p>
-          <a:p>
-            <a:pPr>
-              <a:lnSpc>
-                <a:spcPct val="120000"/>
-              </a:lnSpc>
+            <a:endParaRPr lang="en-US" altLang="ko-KR" sz="1800" dirty="0"/>
+          </a:p>
+          <a:p>
+            <a:pPr marL="0" indent="0">
+              <a:buNone/>
             </a:pPr>
-            <a:endParaRPr lang="en-US" altLang="ko-KR" dirty="0"/>
-          </a:p>
-          <a:p>
-            <a:pPr>
-              <a:lnSpc>
-                <a:spcPct val="120000"/>
-              </a:lnSpc>
+            <a:endParaRPr lang="en-US" altLang="ko-KR" sz="1800" dirty="0"/>
+          </a:p>
+          <a:p>
+            <a:pPr marL="0" indent="0">
+              <a:buNone/>
             </a:pPr>
             <a:r>
-              <a:rPr lang="ko-KR" altLang="en-US" dirty="0"/>
+              <a:rPr lang="ko-KR" altLang="en-US" sz="1800" dirty="0"/>
               <a:t>수중 지형 </a:t>
             </a:r>
             <a:r>
-              <a:rPr lang="en-US" altLang="ko-KR" dirty="0"/>
+              <a:rPr lang="en-US" altLang="ko-KR" sz="1800" dirty="0"/>
               <a:t>: </a:t>
             </a:r>
             <a:r>
-              <a:rPr lang="ko-KR" altLang="en-US" dirty="0"/>
+              <a:rPr lang="ko-KR" altLang="en-US" sz="1800" dirty="0"/>
               <a:t>플레이어에게 묻은 냄새 제거</a:t>
             </a:r>
-            <a:endParaRPr lang="en-US" altLang="ko-KR" dirty="0"/>
-          </a:p>
-          <a:p>
-            <a:pPr>
-              <a:lnSpc>
-                <a:spcPct val="120000"/>
-              </a:lnSpc>
+            <a:endParaRPr lang="en-US" altLang="ko-KR" sz="1800" dirty="0"/>
+          </a:p>
+          <a:p>
+            <a:pPr marL="0" indent="0">
+              <a:buNone/>
             </a:pPr>
-            <a:endParaRPr lang="en-US" altLang="ko-KR" dirty="0"/>
-          </a:p>
-          <a:p>
-            <a:pPr>
-              <a:lnSpc>
-                <a:spcPct val="120000"/>
-              </a:lnSpc>
+            <a:endParaRPr lang="en-US" altLang="ko-KR" sz="1800" dirty="0"/>
+          </a:p>
+          <a:p>
+            <a:pPr marL="0" indent="0">
+              <a:buNone/>
             </a:pPr>
             <a:r>
-              <a:rPr lang="ko-KR" altLang="en-US" dirty="0"/>
+              <a:rPr lang="ko-KR" altLang="en-US" sz="1800" dirty="0"/>
               <a:t>산 </a:t>
             </a:r>
             <a:r>
-              <a:rPr lang="en-US" altLang="ko-KR" dirty="0"/>
+              <a:rPr lang="en-US" altLang="ko-KR" sz="1800" dirty="0"/>
               <a:t>: </a:t>
             </a:r>
             <a:r>
-              <a:rPr lang="ko-KR" altLang="en-US" dirty="0"/>
-              <a:t>일반적으로 지나갈 수 </a:t>
-            </a:r>
-            <a:br>
-              <a:rPr lang="en-US" altLang="ko-KR" dirty="0"/>
-            </a:br>
-            <a:r>
-              <a:rPr lang="ko-KR" altLang="en-US" dirty="0"/>
-              <a:t>없을 정도로 강한 존재가 있음</a:t>
-            </a:r>
-            <a:endParaRPr lang="en-US" altLang="ko-KR" dirty="0"/>
+              <a:rPr lang="ko-KR" altLang="en-US" sz="1800" dirty="0"/>
+              <a:t>일반적으로 지나갈 수 없을 정도로 강한 존재가 있음</a:t>
+            </a:r>
+            <a:endParaRPr lang="en-US" altLang="ko-KR" sz="1800" dirty="0"/>
+          </a:p>
+          <a:p>
+            <a:pPr marL="0" indent="0">
+              <a:buNone/>
+            </a:pPr>
+            <a:endParaRPr lang="en-US" altLang="ko-KR" sz="1800" dirty="0"/>
+          </a:p>
+          <a:p>
+            <a:pPr marL="0" indent="0">
+              <a:buNone/>
+            </a:pPr>
+            <a:r>
+              <a:rPr lang="ko-KR" altLang="en-US" sz="1800" dirty="0"/>
+              <a:t>숲</a:t>
+            </a:r>
+            <a:r>
+              <a:rPr lang="en-US" altLang="ko-KR" sz="1800" dirty="0"/>
+              <a:t>: </a:t>
+            </a:r>
+            <a:r>
+              <a:rPr lang="ko-KR" altLang="en-US" sz="1800" dirty="0"/>
+              <a:t>일반 지형</a:t>
+            </a:r>
+            <a:endParaRPr lang="en-US" altLang="ko-KR" sz="1800" dirty="0"/>
           </a:p>
         </p:txBody>
       </p:sp>
@@ -35841,7 +35846,7 @@
         </p:nvSpPr>
         <p:spPr>
           <a:xfrm>
-            <a:off x="6063976" y="1931695"/>
+            <a:off x="5789062" y="1620924"/>
             <a:ext cx="389964" cy="389964"/>
           </a:xfrm>
           <a:custGeom>
@@ -36104,6 +36109,3069 @@
           </a:p>
         </p:txBody>
       </p:sp>
+      <p:sp>
+        <p:nvSpPr>
+          <p:cNvPr id="35" name="그래픽 34" descr="배지 1 단색으로 채워진">
+            <a:extLst>
+              <a:ext uri="{FF2B5EF4-FFF2-40B4-BE49-F238E27FC236}">
+                <a16:creationId xmlns:a16="http://schemas.microsoft.com/office/drawing/2014/main" id="{7D6C51E4-EF6A-F351-B463-EDD8C3A034F8}"/>
+              </a:ext>
+            </a:extLst>
+          </p:cNvPr>
+          <p:cNvSpPr/>
+          <p:nvPr/>
+        </p:nvSpPr>
+        <p:spPr>
+          <a:xfrm>
+            <a:off x="1369459" y="1671785"/>
+            <a:ext cx="389964" cy="389964"/>
+          </a:xfrm>
+          <a:custGeom>
+            <a:avLst/>
+            <a:gdLst>
+              <a:gd name="csX0" fmla="*/ 194982 w 389964"/>
+              <a:gd name="csY0" fmla="*/ 0 h 389964"/>
+              <a:gd name="csX1" fmla="*/ 0 w 389964"/>
+              <a:gd name="csY1" fmla="*/ 194982 h 389964"/>
+              <a:gd name="csX2" fmla="*/ 194982 w 389964"/>
+              <a:gd name="csY2" fmla="*/ 389964 h 389964"/>
+              <a:gd name="csX3" fmla="*/ 389964 w 389964"/>
+              <a:gd name="csY3" fmla="*/ 194982 h 389964"/>
+              <a:gd name="csX4" fmla="*/ 389964 w 389964"/>
+              <a:gd name="csY4" fmla="*/ 194962 h 389964"/>
+              <a:gd name="csX5" fmla="*/ 195136 w 389964"/>
+              <a:gd name="csY5" fmla="*/ 0 h 389964"/>
+              <a:gd name="csX6" fmla="*/ 194982 w 389964"/>
+              <a:gd name="csY6" fmla="*/ 0 h 389964"/>
+              <a:gd name="csX7" fmla="*/ 216370 w 389964"/>
+              <a:gd name="csY7" fmla="*/ 277747 h 389964"/>
+              <a:gd name="csX8" fmla="*/ 186711 w 389964"/>
+              <a:gd name="csY8" fmla="*/ 277747 h 389964"/>
+              <a:gd name="csX9" fmla="*/ 186711 w 389964"/>
+              <a:gd name="csY9" fmla="*/ 136096 h 389964"/>
+              <a:gd name="csX10" fmla="*/ 178779 w 389964"/>
+              <a:gd name="csY10" fmla="*/ 141040 h 389964"/>
+              <a:gd name="csX11" fmla="*/ 170175 w 389964"/>
+              <a:gd name="csY11" fmla="*/ 145301 h 389964"/>
+              <a:gd name="csX12" fmla="*/ 160118 w 389964"/>
+              <a:gd name="csY12" fmla="*/ 148797 h 389964"/>
+              <a:gd name="csX13" fmla="*/ 148525 w 389964"/>
+              <a:gd name="csY13" fmla="*/ 151950 h 389964"/>
+              <a:gd name="csX14" fmla="*/ 148525 w 389964"/>
+              <a:gd name="csY14" fmla="*/ 128256 h 389964"/>
+              <a:gd name="csX15" fmla="*/ 156277 w 389964"/>
+              <a:gd name="csY15" fmla="*/ 125869 h 389964"/>
+              <a:gd name="csX16" fmla="*/ 163188 w 389964"/>
+              <a:gd name="csY16" fmla="*/ 123482 h 389964"/>
+              <a:gd name="csX17" fmla="*/ 170006 w 389964"/>
+              <a:gd name="csY17" fmla="*/ 120668 h 389964"/>
+              <a:gd name="csX18" fmla="*/ 176823 w 389964"/>
+              <a:gd name="csY18" fmla="*/ 117855 h 389964"/>
+              <a:gd name="csX19" fmla="*/ 183380 w 389964"/>
+              <a:gd name="csY19" fmla="*/ 114446 h 389964"/>
+              <a:gd name="csX20" fmla="*/ 189951 w 389964"/>
+              <a:gd name="csY20" fmla="*/ 110852 h 389964"/>
+              <a:gd name="csX21" fmla="*/ 197020 w 389964"/>
+              <a:gd name="csY21" fmla="*/ 106745 h 389964"/>
+              <a:gd name="csX22" fmla="*/ 204100 w 389964"/>
+              <a:gd name="csY22" fmla="*/ 102638 h 389964"/>
+              <a:gd name="csX23" fmla="*/ 216370 w 389964"/>
+              <a:gd name="csY23" fmla="*/ 102638 h 389964"/>
+            </a:gdLst>
+            <a:ahLst/>
+            <a:cxnLst>
+              <a:cxn ang="0">
+                <a:pos x="csX0" y="csY0"/>
+              </a:cxn>
+              <a:cxn ang="0">
+                <a:pos x="csX1" y="csY1"/>
+              </a:cxn>
+              <a:cxn ang="0">
+                <a:pos x="csX2" y="csY2"/>
+              </a:cxn>
+              <a:cxn ang="0">
+                <a:pos x="csX3" y="csY3"/>
+              </a:cxn>
+              <a:cxn ang="0">
+                <a:pos x="csX4" y="csY4"/>
+              </a:cxn>
+              <a:cxn ang="0">
+                <a:pos x="csX5" y="csY5"/>
+              </a:cxn>
+              <a:cxn ang="0">
+                <a:pos x="csX6" y="csY6"/>
+              </a:cxn>
+              <a:cxn ang="0">
+                <a:pos x="csX7" y="csY7"/>
+              </a:cxn>
+              <a:cxn ang="0">
+                <a:pos x="csX8" y="csY8"/>
+              </a:cxn>
+              <a:cxn ang="0">
+                <a:pos x="csX9" y="csY9"/>
+              </a:cxn>
+              <a:cxn ang="0">
+                <a:pos x="csX10" y="csY10"/>
+              </a:cxn>
+              <a:cxn ang="0">
+                <a:pos x="csX11" y="csY11"/>
+              </a:cxn>
+              <a:cxn ang="0">
+                <a:pos x="csX12" y="csY12"/>
+              </a:cxn>
+              <a:cxn ang="0">
+                <a:pos x="csX13" y="csY13"/>
+              </a:cxn>
+              <a:cxn ang="0">
+                <a:pos x="csX14" y="csY14"/>
+              </a:cxn>
+              <a:cxn ang="0">
+                <a:pos x="csX15" y="csY15"/>
+              </a:cxn>
+              <a:cxn ang="0">
+                <a:pos x="csX16" y="csY16"/>
+              </a:cxn>
+              <a:cxn ang="0">
+                <a:pos x="csX17" y="csY17"/>
+              </a:cxn>
+              <a:cxn ang="0">
+                <a:pos x="csX18" y="csY18"/>
+              </a:cxn>
+              <a:cxn ang="0">
+                <a:pos x="csX19" y="csY19"/>
+              </a:cxn>
+              <a:cxn ang="0">
+                <a:pos x="csX20" y="csY20"/>
+              </a:cxn>
+              <a:cxn ang="0">
+                <a:pos x="csX21" y="csY21"/>
+              </a:cxn>
+              <a:cxn ang="0">
+                <a:pos x="csX22" y="csY22"/>
+              </a:cxn>
+              <a:cxn ang="0">
+                <a:pos x="csX23" y="csY23"/>
+              </a:cxn>
+            </a:cxnLst>
+            <a:rect l="l" t="t" r="r" b="b"/>
+            <a:pathLst>
+              <a:path w="389964" h="389964">
+                <a:moveTo>
+                  <a:pt x="194982" y="0"/>
+                </a:moveTo>
+                <a:cubicBezTo>
+                  <a:pt x="87297" y="0"/>
+                  <a:pt x="0" y="87297"/>
+                  <a:pt x="0" y="194982"/>
+                </a:cubicBezTo>
+                <a:cubicBezTo>
+                  <a:pt x="0" y="302668"/>
+                  <a:pt x="87297" y="389964"/>
+                  <a:pt x="194982" y="389964"/>
+                </a:cubicBezTo>
+                <a:cubicBezTo>
+                  <a:pt x="302668" y="389964"/>
+                  <a:pt x="389964" y="302668"/>
+                  <a:pt x="389964" y="194982"/>
+                </a:cubicBezTo>
+                <a:cubicBezTo>
+                  <a:pt x="389964" y="194976"/>
+                  <a:pt x="389964" y="194968"/>
+                  <a:pt x="389964" y="194962"/>
+                </a:cubicBezTo>
+                <a:cubicBezTo>
+                  <a:pt x="390001" y="87324"/>
+                  <a:pt x="302774" y="37"/>
+                  <a:pt x="195136" y="0"/>
+                </a:cubicBezTo>
+                <a:cubicBezTo>
+                  <a:pt x="195085" y="0"/>
+                  <a:pt x="195034" y="0"/>
+                  <a:pt x="194982" y="0"/>
+                </a:cubicBezTo>
+                <a:close/>
+                <a:moveTo>
+                  <a:pt x="216370" y="277747"/>
+                </a:moveTo>
+                <a:lnTo>
+                  <a:pt x="186711" y="277747"/>
+                </a:lnTo>
+                <a:lnTo>
+                  <a:pt x="186711" y="136096"/>
+                </a:lnTo>
+                <a:cubicBezTo>
+                  <a:pt x="184206" y="137807"/>
+                  <a:pt x="181562" y="139455"/>
+                  <a:pt x="178779" y="141040"/>
+                </a:cubicBezTo>
+                <a:cubicBezTo>
+                  <a:pt x="175998" y="142630"/>
+                  <a:pt x="173125" y="144052"/>
+                  <a:pt x="170175" y="145301"/>
+                </a:cubicBezTo>
+                <a:cubicBezTo>
+                  <a:pt x="166985" y="146554"/>
+                  <a:pt x="163633" y="147719"/>
+                  <a:pt x="160118" y="148797"/>
+                </a:cubicBezTo>
+                <a:cubicBezTo>
+                  <a:pt x="156602" y="149875"/>
+                  <a:pt x="152739" y="150926"/>
+                  <a:pt x="148525" y="151950"/>
+                </a:cubicBezTo>
+                <a:lnTo>
+                  <a:pt x="148525" y="128256"/>
+                </a:lnTo>
+                <a:cubicBezTo>
+                  <a:pt x="151366" y="127459"/>
+                  <a:pt x="153950" y="126663"/>
+                  <a:pt x="156277" y="125869"/>
+                </a:cubicBezTo>
+                <a:cubicBezTo>
+                  <a:pt x="158605" y="125075"/>
+                  <a:pt x="160908" y="124279"/>
+                  <a:pt x="163188" y="123482"/>
+                </a:cubicBezTo>
+                <a:cubicBezTo>
+                  <a:pt x="165452" y="122573"/>
+                  <a:pt x="167731" y="121639"/>
+                  <a:pt x="170006" y="120668"/>
+                </a:cubicBezTo>
+                <a:cubicBezTo>
+                  <a:pt x="172280" y="119698"/>
+                  <a:pt x="174549" y="118769"/>
+                  <a:pt x="176823" y="117855"/>
+                </a:cubicBezTo>
+                <a:cubicBezTo>
+                  <a:pt x="178980" y="116719"/>
+                  <a:pt x="181165" y="115582"/>
+                  <a:pt x="183380" y="114446"/>
+                </a:cubicBezTo>
+                <a:cubicBezTo>
+                  <a:pt x="185594" y="113310"/>
+                  <a:pt x="187784" y="112112"/>
+                  <a:pt x="189951" y="110852"/>
+                </a:cubicBezTo>
+                <a:cubicBezTo>
+                  <a:pt x="192347" y="109606"/>
+                  <a:pt x="194703" y="108238"/>
+                  <a:pt x="197020" y="106745"/>
+                </a:cubicBezTo>
+                <a:cubicBezTo>
+                  <a:pt x="199337" y="105253"/>
+                  <a:pt x="201697" y="103884"/>
+                  <a:pt x="204100" y="102638"/>
+                </a:cubicBezTo>
+                <a:lnTo>
+                  <a:pt x="216370" y="102638"/>
+                </a:lnTo>
+                <a:close/>
+              </a:path>
+            </a:pathLst>
+          </a:custGeom>
+          <a:solidFill>
+            <a:srgbClr val="7030A0"/>
+          </a:solidFill>
+          <a:ln w="5060" cap="flat">
+            <a:noFill/>
+            <a:prstDash val="solid"/>
+            <a:miter/>
+          </a:ln>
+        </p:spPr>
+        <p:txBody>
+          <a:bodyPr/>
+          <a:lstStyle/>
+          <a:p>
+            <a:endParaRPr lang="ko-KR" altLang="en-US"/>
+          </a:p>
+        </p:txBody>
+      </p:sp>
+      <p:sp>
+        <p:nvSpPr>
+          <p:cNvPr id="37" name="그래픽 39" descr="배지 단색으로 채워진">
+            <a:extLst>
+              <a:ext uri="{FF2B5EF4-FFF2-40B4-BE49-F238E27FC236}">
+                <a16:creationId xmlns:a16="http://schemas.microsoft.com/office/drawing/2014/main" id="{1881E76B-01E6-66EE-9FB5-F3CAF335B115}"/>
+              </a:ext>
+            </a:extLst>
+          </p:cNvPr>
+          <p:cNvSpPr/>
+          <p:nvPr/>
+        </p:nvSpPr>
+        <p:spPr>
+          <a:xfrm>
+            <a:off x="5821086" y="2668840"/>
+            <a:ext cx="389031" cy="389964"/>
+          </a:xfrm>
+          <a:custGeom>
+            <a:avLst/>
+            <a:gdLst>
+              <a:gd name="csX0" fmla="*/ 176368 w 352735"/>
+              <a:gd name="csY0" fmla="*/ 0 h 352735"/>
+              <a:gd name="csX1" fmla="*/ 0 w 352735"/>
+              <a:gd name="csY1" fmla="*/ 176368 h 352735"/>
+              <a:gd name="csX2" fmla="*/ 176368 w 352735"/>
+              <a:gd name="csY2" fmla="*/ 352736 h 352735"/>
+              <a:gd name="csX3" fmla="*/ 352735 w 352735"/>
+              <a:gd name="csY3" fmla="*/ 176368 h 352735"/>
+              <a:gd name="csX4" fmla="*/ 352735 w 352735"/>
+              <a:gd name="csY4" fmla="*/ 176354 h 352735"/>
+              <a:gd name="csX5" fmla="*/ 176502 w 352735"/>
+              <a:gd name="csY5" fmla="*/ 0 h 352735"/>
+              <a:gd name="csX6" fmla="*/ 176368 w 352735"/>
+              <a:gd name="csY6" fmla="*/ 0 h 352735"/>
+              <a:gd name="csX7" fmla="*/ 226790 w 352735"/>
+              <a:gd name="csY7" fmla="*/ 255452 h 352735"/>
+              <a:gd name="csX8" fmla="*/ 125950 w 352735"/>
+              <a:gd name="csY8" fmla="*/ 255452 h 352735"/>
+              <a:gd name="csX9" fmla="*/ 125950 w 352735"/>
+              <a:gd name="csY9" fmla="*/ 240652 h 352735"/>
+              <a:gd name="csX10" fmla="*/ 129340 w 352735"/>
+              <a:gd name="csY10" fmla="*/ 222541 h 352735"/>
+              <a:gd name="csX11" fmla="*/ 138665 w 352735"/>
+              <a:gd name="csY11" fmla="*/ 207681 h 352735"/>
+              <a:gd name="csX12" fmla="*/ 152471 w 352735"/>
+              <a:gd name="csY12" fmla="*/ 195041 h 352735"/>
+              <a:gd name="csX13" fmla="*/ 169430 w 352735"/>
+              <a:gd name="csY13" fmla="*/ 183631 h 352735"/>
+              <a:gd name="csX14" fmla="*/ 183826 w 352735"/>
+              <a:gd name="csY14" fmla="*/ 173298 h 352735"/>
+              <a:gd name="csX15" fmla="*/ 192784 w 352735"/>
+              <a:gd name="csY15" fmla="*/ 163463 h 352735"/>
+              <a:gd name="csX16" fmla="*/ 197339 w 352735"/>
+              <a:gd name="csY16" fmla="*/ 153515 h 352735"/>
+              <a:gd name="csX17" fmla="*/ 198570 w 352735"/>
+              <a:gd name="csY17" fmla="*/ 142412 h 352735"/>
+              <a:gd name="csX18" fmla="*/ 197028 w 352735"/>
+              <a:gd name="csY18" fmla="*/ 132855 h 352735"/>
+              <a:gd name="csX19" fmla="*/ 192477 w 352735"/>
+              <a:gd name="csY19" fmla="*/ 124761 h 352735"/>
+              <a:gd name="csX20" fmla="*/ 184768 w 352735"/>
+              <a:gd name="csY20" fmla="*/ 119188 h 352735"/>
+              <a:gd name="csX21" fmla="*/ 173902 w 352735"/>
+              <a:gd name="csY21" fmla="*/ 117108 h 352735"/>
+              <a:gd name="csX22" fmla="*/ 152930 w 352735"/>
+              <a:gd name="csY22" fmla="*/ 122044 h 352735"/>
+              <a:gd name="csX23" fmla="*/ 134276 w 352735"/>
+              <a:gd name="csY23" fmla="*/ 135302 h 352735"/>
+              <a:gd name="csX24" fmla="*/ 134276 w 352735"/>
+              <a:gd name="csY24" fmla="*/ 111247 h 352735"/>
+              <a:gd name="csX25" fmla="*/ 153005 w 352735"/>
+              <a:gd name="csY25" fmla="*/ 100455 h 352735"/>
+              <a:gd name="csX26" fmla="*/ 176224 w 352735"/>
+              <a:gd name="csY26" fmla="*/ 97205 h 352735"/>
+              <a:gd name="csX27" fmla="*/ 194725 w 352735"/>
+              <a:gd name="csY27" fmla="*/ 99991 h 352735"/>
+              <a:gd name="csX28" fmla="*/ 209836 w 352735"/>
+              <a:gd name="csY28" fmla="*/ 108085 h 352735"/>
+              <a:gd name="csX29" fmla="*/ 220015 w 352735"/>
+              <a:gd name="csY29" fmla="*/ 121343 h 352735"/>
+              <a:gd name="csX30" fmla="*/ 223730 w 352735"/>
+              <a:gd name="csY30" fmla="*/ 139454 h 352735"/>
+              <a:gd name="csX31" fmla="*/ 221794 w 352735"/>
+              <a:gd name="csY31" fmla="*/ 156102 h 352735"/>
+              <a:gd name="csX32" fmla="*/ 215441 w 352735"/>
+              <a:gd name="csY32" fmla="*/ 170493 h 352735"/>
+              <a:gd name="csX33" fmla="*/ 203961 w 352735"/>
+              <a:gd name="csY33" fmla="*/ 183603 h 352735"/>
+              <a:gd name="csX34" fmla="*/ 186691 w 352735"/>
+              <a:gd name="csY34" fmla="*/ 196397 h 352735"/>
+              <a:gd name="csX35" fmla="*/ 171886 w 352735"/>
+              <a:gd name="csY35" fmla="*/ 206111 h 352735"/>
+              <a:gd name="csX36" fmla="*/ 160857 w 352735"/>
+              <a:gd name="csY36" fmla="*/ 214976 h 352735"/>
+              <a:gd name="csX37" fmla="*/ 154003 w 352735"/>
+              <a:gd name="csY37" fmla="*/ 224074 h 352735"/>
+              <a:gd name="csX38" fmla="*/ 151681 w 352735"/>
+              <a:gd name="csY38" fmla="*/ 234485 h 352735"/>
+              <a:gd name="csX39" fmla="*/ 226772 w 352735"/>
+              <a:gd name="csY39" fmla="*/ 234485 h 352735"/>
+            </a:gdLst>
+            <a:ahLst/>
+            <a:cxnLst>
+              <a:cxn ang="0">
+                <a:pos x="csX0" y="csY0"/>
+              </a:cxn>
+              <a:cxn ang="0">
+                <a:pos x="csX1" y="csY1"/>
+              </a:cxn>
+              <a:cxn ang="0">
+                <a:pos x="csX2" y="csY2"/>
+              </a:cxn>
+              <a:cxn ang="0">
+                <a:pos x="csX3" y="csY3"/>
+              </a:cxn>
+              <a:cxn ang="0">
+                <a:pos x="csX4" y="csY4"/>
+              </a:cxn>
+              <a:cxn ang="0">
+                <a:pos x="csX5" y="csY5"/>
+              </a:cxn>
+              <a:cxn ang="0">
+                <a:pos x="csX6" y="csY6"/>
+              </a:cxn>
+              <a:cxn ang="0">
+                <a:pos x="csX7" y="csY7"/>
+              </a:cxn>
+              <a:cxn ang="0">
+                <a:pos x="csX8" y="csY8"/>
+              </a:cxn>
+              <a:cxn ang="0">
+                <a:pos x="csX9" y="csY9"/>
+              </a:cxn>
+              <a:cxn ang="0">
+                <a:pos x="csX10" y="csY10"/>
+              </a:cxn>
+              <a:cxn ang="0">
+                <a:pos x="csX11" y="csY11"/>
+              </a:cxn>
+              <a:cxn ang="0">
+                <a:pos x="csX12" y="csY12"/>
+              </a:cxn>
+              <a:cxn ang="0">
+                <a:pos x="csX13" y="csY13"/>
+              </a:cxn>
+              <a:cxn ang="0">
+                <a:pos x="csX14" y="csY14"/>
+              </a:cxn>
+              <a:cxn ang="0">
+                <a:pos x="csX15" y="csY15"/>
+              </a:cxn>
+              <a:cxn ang="0">
+                <a:pos x="csX16" y="csY16"/>
+              </a:cxn>
+              <a:cxn ang="0">
+                <a:pos x="csX17" y="csY17"/>
+              </a:cxn>
+              <a:cxn ang="0">
+                <a:pos x="csX18" y="csY18"/>
+              </a:cxn>
+              <a:cxn ang="0">
+                <a:pos x="csX19" y="csY19"/>
+              </a:cxn>
+              <a:cxn ang="0">
+                <a:pos x="csX20" y="csY20"/>
+              </a:cxn>
+              <a:cxn ang="0">
+                <a:pos x="csX21" y="csY21"/>
+              </a:cxn>
+              <a:cxn ang="0">
+                <a:pos x="csX22" y="csY22"/>
+              </a:cxn>
+              <a:cxn ang="0">
+                <a:pos x="csX23" y="csY23"/>
+              </a:cxn>
+              <a:cxn ang="0">
+                <a:pos x="csX24" y="csY24"/>
+              </a:cxn>
+              <a:cxn ang="0">
+                <a:pos x="csX25" y="csY25"/>
+              </a:cxn>
+              <a:cxn ang="0">
+                <a:pos x="csX26" y="csY26"/>
+              </a:cxn>
+              <a:cxn ang="0">
+                <a:pos x="csX27" y="csY27"/>
+              </a:cxn>
+              <a:cxn ang="0">
+                <a:pos x="csX28" y="csY28"/>
+              </a:cxn>
+              <a:cxn ang="0">
+                <a:pos x="csX29" y="csY29"/>
+              </a:cxn>
+              <a:cxn ang="0">
+                <a:pos x="csX30" y="csY30"/>
+              </a:cxn>
+              <a:cxn ang="0">
+                <a:pos x="csX31" y="csY31"/>
+              </a:cxn>
+              <a:cxn ang="0">
+                <a:pos x="csX32" y="csY32"/>
+              </a:cxn>
+              <a:cxn ang="0">
+                <a:pos x="csX33" y="csY33"/>
+              </a:cxn>
+              <a:cxn ang="0">
+                <a:pos x="csX34" y="csY34"/>
+              </a:cxn>
+              <a:cxn ang="0">
+                <a:pos x="csX35" y="csY35"/>
+              </a:cxn>
+              <a:cxn ang="0">
+                <a:pos x="csX36" y="csY36"/>
+              </a:cxn>
+              <a:cxn ang="0">
+                <a:pos x="csX37" y="csY37"/>
+              </a:cxn>
+              <a:cxn ang="0">
+                <a:pos x="csX38" y="csY38"/>
+              </a:cxn>
+              <a:cxn ang="0">
+                <a:pos x="csX39" y="csY39"/>
+              </a:cxn>
+            </a:cxnLst>
+            <a:rect l="l" t="t" r="r" b="b"/>
+            <a:pathLst>
+              <a:path w="352735" h="352735">
+                <a:moveTo>
+                  <a:pt x="176368" y="0"/>
+                </a:moveTo>
+                <a:cubicBezTo>
+                  <a:pt x="78963" y="0"/>
+                  <a:pt x="0" y="78963"/>
+                  <a:pt x="0" y="176368"/>
+                </a:cubicBezTo>
+                <a:cubicBezTo>
+                  <a:pt x="0" y="273773"/>
+                  <a:pt x="78963" y="352736"/>
+                  <a:pt x="176368" y="352736"/>
+                </a:cubicBezTo>
+                <a:cubicBezTo>
+                  <a:pt x="273773" y="352736"/>
+                  <a:pt x="352735" y="273773"/>
+                  <a:pt x="352735" y="176368"/>
+                </a:cubicBezTo>
+                <a:cubicBezTo>
+                  <a:pt x="352735" y="176363"/>
+                  <a:pt x="352735" y="176358"/>
+                  <a:pt x="352735" y="176354"/>
+                </a:cubicBezTo>
+                <a:cubicBezTo>
+                  <a:pt x="352769" y="78990"/>
+                  <a:pt x="273867" y="33"/>
+                  <a:pt x="176502" y="0"/>
+                </a:cubicBezTo>
+                <a:cubicBezTo>
+                  <a:pt x="176457" y="0"/>
+                  <a:pt x="176413" y="0"/>
+                  <a:pt x="176368" y="0"/>
+                </a:cubicBezTo>
+                <a:close/>
+                <a:moveTo>
+                  <a:pt x="226790" y="255452"/>
+                </a:moveTo>
+                <a:lnTo>
+                  <a:pt x="125950" y="255452"/>
+                </a:lnTo>
+                <a:lnTo>
+                  <a:pt x="125950" y="240652"/>
+                </a:lnTo>
+                <a:cubicBezTo>
+                  <a:pt x="125858" y="234449"/>
+                  <a:pt x="127010" y="228291"/>
+                  <a:pt x="129340" y="222541"/>
+                </a:cubicBezTo>
+                <a:cubicBezTo>
+                  <a:pt x="131623" y="217115"/>
+                  <a:pt x="134772" y="212096"/>
+                  <a:pt x="138665" y="207681"/>
+                </a:cubicBezTo>
+                <a:cubicBezTo>
+                  <a:pt x="142807" y="202992"/>
+                  <a:pt x="147435" y="198755"/>
+                  <a:pt x="152471" y="195041"/>
+                </a:cubicBezTo>
+                <a:cubicBezTo>
+                  <a:pt x="157715" y="191137"/>
+                  <a:pt x="163368" y="187333"/>
+                  <a:pt x="169430" y="183631"/>
+                </a:cubicBezTo>
+                <a:cubicBezTo>
+                  <a:pt x="174506" y="180591"/>
+                  <a:pt x="179321" y="177135"/>
+                  <a:pt x="183826" y="173298"/>
+                </a:cubicBezTo>
+                <a:cubicBezTo>
+                  <a:pt x="187212" y="170408"/>
+                  <a:pt x="190222" y="167104"/>
+                  <a:pt x="192784" y="163463"/>
+                </a:cubicBezTo>
+                <a:cubicBezTo>
+                  <a:pt x="194892" y="160450"/>
+                  <a:pt x="196436" y="157080"/>
+                  <a:pt x="197339" y="153515"/>
+                </a:cubicBezTo>
+                <a:cubicBezTo>
+                  <a:pt x="198186" y="149876"/>
+                  <a:pt x="198600" y="146149"/>
+                  <a:pt x="198570" y="142412"/>
+                </a:cubicBezTo>
+                <a:cubicBezTo>
+                  <a:pt x="198575" y="139164"/>
+                  <a:pt x="198055" y="135937"/>
+                  <a:pt x="197028" y="132855"/>
+                </a:cubicBezTo>
+                <a:cubicBezTo>
+                  <a:pt x="196061" y="129883"/>
+                  <a:pt x="194514" y="127132"/>
+                  <a:pt x="192477" y="124761"/>
+                </a:cubicBezTo>
+                <a:cubicBezTo>
+                  <a:pt x="190354" y="122353"/>
+                  <a:pt x="187721" y="120449"/>
+                  <a:pt x="184768" y="119188"/>
+                </a:cubicBezTo>
+                <a:cubicBezTo>
+                  <a:pt x="181332" y="117742"/>
+                  <a:pt x="177630" y="117033"/>
+                  <a:pt x="173902" y="117108"/>
+                </a:cubicBezTo>
+                <a:cubicBezTo>
+                  <a:pt x="166620" y="117081"/>
+                  <a:pt x="159435" y="118772"/>
+                  <a:pt x="152930" y="122044"/>
+                </a:cubicBezTo>
+                <a:cubicBezTo>
+                  <a:pt x="146090" y="125516"/>
+                  <a:pt x="139803" y="129983"/>
+                  <a:pt x="134276" y="135302"/>
+                </a:cubicBezTo>
+                <a:lnTo>
+                  <a:pt x="134276" y="111247"/>
+                </a:lnTo>
+                <a:cubicBezTo>
+                  <a:pt x="139617" y="106273"/>
+                  <a:pt x="146022" y="102581"/>
+                  <a:pt x="153005" y="100455"/>
+                </a:cubicBezTo>
+                <a:cubicBezTo>
+                  <a:pt x="160539" y="98221"/>
+                  <a:pt x="168366" y="97125"/>
+                  <a:pt x="176224" y="97205"/>
+                </a:cubicBezTo>
+                <a:cubicBezTo>
+                  <a:pt x="182499" y="97161"/>
+                  <a:pt x="188741" y="98101"/>
+                  <a:pt x="194725" y="99991"/>
+                </a:cubicBezTo>
+                <a:cubicBezTo>
+                  <a:pt x="200231" y="101704"/>
+                  <a:pt x="205359" y="104451"/>
+                  <a:pt x="209836" y="108085"/>
+                </a:cubicBezTo>
+                <a:cubicBezTo>
+                  <a:pt x="214188" y="111677"/>
+                  <a:pt x="217669" y="116210"/>
+                  <a:pt x="220015" y="121343"/>
+                </a:cubicBezTo>
+                <a:cubicBezTo>
+                  <a:pt x="222569" y="127034"/>
+                  <a:pt x="223837" y="133217"/>
+                  <a:pt x="223730" y="139454"/>
+                </a:cubicBezTo>
+                <a:cubicBezTo>
+                  <a:pt x="223784" y="145063"/>
+                  <a:pt x="223134" y="150656"/>
+                  <a:pt x="221794" y="156102"/>
+                </a:cubicBezTo>
+                <a:cubicBezTo>
+                  <a:pt x="220480" y="161215"/>
+                  <a:pt x="218334" y="166078"/>
+                  <a:pt x="215441" y="170493"/>
+                </a:cubicBezTo>
+                <a:cubicBezTo>
+                  <a:pt x="212216" y="175355"/>
+                  <a:pt x="208355" y="179764"/>
+                  <a:pt x="203961" y="183603"/>
+                </a:cubicBezTo>
+                <a:cubicBezTo>
+                  <a:pt x="198553" y="188319"/>
+                  <a:pt x="192778" y="192597"/>
+                  <a:pt x="186691" y="196397"/>
+                </a:cubicBezTo>
+                <a:cubicBezTo>
+                  <a:pt x="181137" y="199895"/>
+                  <a:pt x="176202" y="203133"/>
+                  <a:pt x="171886" y="206111"/>
+                </a:cubicBezTo>
+                <a:cubicBezTo>
+                  <a:pt x="167977" y="208765"/>
+                  <a:pt x="164289" y="211730"/>
+                  <a:pt x="160857" y="214976"/>
+                </a:cubicBezTo>
+                <a:cubicBezTo>
+                  <a:pt x="158066" y="217592"/>
+                  <a:pt x="155748" y="220670"/>
+                  <a:pt x="154003" y="224074"/>
+                </a:cubicBezTo>
+                <a:cubicBezTo>
+                  <a:pt x="152434" y="227318"/>
+                  <a:pt x="151639" y="230882"/>
+                  <a:pt x="151681" y="234485"/>
+                </a:cubicBezTo>
+                <a:lnTo>
+                  <a:pt x="226772" y="234485"/>
+                </a:lnTo>
+                <a:close/>
+              </a:path>
+            </a:pathLst>
+          </a:custGeom>
+          <a:solidFill>
+            <a:srgbClr val="7030A0"/>
+          </a:solidFill>
+          <a:ln w="4564" cap="flat">
+            <a:noFill/>
+            <a:prstDash val="solid"/>
+            <a:miter/>
+          </a:ln>
+        </p:spPr>
+        <p:txBody>
+          <a:bodyPr/>
+          <a:lstStyle/>
+          <a:p>
+            <a:endParaRPr lang="ko-KR" altLang="en-US"/>
+          </a:p>
+        </p:txBody>
+      </p:sp>
+      <p:sp>
+        <p:nvSpPr>
+          <p:cNvPr id="39" name="그래픽 42" descr="배지 3 단색으로 채워진">
+            <a:extLst>
+              <a:ext uri="{FF2B5EF4-FFF2-40B4-BE49-F238E27FC236}">
+                <a16:creationId xmlns:a16="http://schemas.microsoft.com/office/drawing/2014/main" id="{6D0AA926-C5DC-1199-AF1F-12AE57BA2C59}"/>
+              </a:ext>
+            </a:extLst>
+          </p:cNvPr>
+          <p:cNvSpPr/>
+          <p:nvPr/>
+        </p:nvSpPr>
+        <p:spPr>
+          <a:xfrm>
+            <a:off x="5821086" y="3711210"/>
+            <a:ext cx="389031" cy="389963"/>
+          </a:xfrm>
+          <a:custGeom>
+            <a:avLst/>
+            <a:gdLst>
+              <a:gd name="csX0" fmla="*/ 176297 w 352584"/>
+              <a:gd name="csY0" fmla="*/ 0 h 352584"/>
+              <a:gd name="csX1" fmla="*/ 0 w 352584"/>
+              <a:gd name="csY1" fmla="*/ 176288 h 352584"/>
+              <a:gd name="csX2" fmla="*/ 176288 w 352584"/>
+              <a:gd name="csY2" fmla="*/ 352585 h 352584"/>
+              <a:gd name="csX3" fmla="*/ 352585 w 352584"/>
+              <a:gd name="csY3" fmla="*/ 176297 h 352584"/>
+              <a:gd name="csX4" fmla="*/ 352585 w 352584"/>
+              <a:gd name="csY4" fmla="*/ 176279 h 352584"/>
+              <a:gd name="csX5" fmla="*/ 176436 w 352584"/>
+              <a:gd name="csY5" fmla="*/ 0 h 352584"/>
+              <a:gd name="csX6" fmla="*/ 176297 w 352584"/>
+              <a:gd name="csY6" fmla="*/ 0 h 352584"/>
+              <a:gd name="csX7" fmla="*/ 222937 w 352584"/>
+              <a:gd name="csY7" fmla="*/ 229914 h 352584"/>
+              <a:gd name="csX8" fmla="*/ 209755 w 352584"/>
+              <a:gd name="csY8" fmla="*/ 244400 h 352584"/>
+              <a:gd name="csX9" fmla="*/ 190417 w 352584"/>
+              <a:gd name="csY9" fmla="*/ 253261 h 352584"/>
+              <a:gd name="csX10" fmla="*/ 167209 w 352584"/>
+              <a:gd name="csY10" fmla="*/ 256269 h 352584"/>
+              <a:gd name="csX11" fmla="*/ 143629 w 352584"/>
+              <a:gd name="csY11" fmla="*/ 254185 h 352584"/>
+              <a:gd name="csX12" fmla="*/ 124983 w 352584"/>
+              <a:gd name="csY12" fmla="*/ 247947 h 352584"/>
+              <a:gd name="csX13" fmla="*/ 124983 w 352584"/>
+              <a:gd name="csY13" fmla="*/ 224195 h 352584"/>
+              <a:gd name="csX14" fmla="*/ 145406 w 352584"/>
+              <a:gd name="csY14" fmla="*/ 233599 h 352584"/>
+              <a:gd name="csX15" fmla="*/ 167979 w 352584"/>
+              <a:gd name="csY15" fmla="*/ 236681 h 352584"/>
+              <a:gd name="csX16" fmla="*/ 178924 w 352584"/>
+              <a:gd name="csY16" fmla="*/ 235600 h 352584"/>
+              <a:gd name="csX17" fmla="*/ 189795 w 352584"/>
+              <a:gd name="csY17" fmla="*/ 231673 h 352584"/>
+              <a:gd name="csX18" fmla="*/ 198118 w 352584"/>
+              <a:gd name="csY18" fmla="*/ 223889 h 352584"/>
+              <a:gd name="csX19" fmla="*/ 201423 w 352584"/>
+              <a:gd name="csY19" fmla="*/ 211407 h 352584"/>
+              <a:gd name="csX20" fmla="*/ 198271 w 352584"/>
+              <a:gd name="csY20" fmla="*/ 198536 h 352584"/>
+              <a:gd name="csX21" fmla="*/ 189484 w 352584"/>
+              <a:gd name="csY21" fmla="*/ 189907 h 352584"/>
+              <a:gd name="csX22" fmla="*/ 176232 w 352584"/>
+              <a:gd name="csY22" fmla="*/ 185051 h 352584"/>
+              <a:gd name="csX23" fmla="*/ 159657 w 352584"/>
+              <a:gd name="csY23" fmla="*/ 183510 h 352584"/>
+              <a:gd name="csX24" fmla="*/ 145332 w 352584"/>
+              <a:gd name="csY24" fmla="*/ 183510 h 352584"/>
+              <a:gd name="csX25" fmla="*/ 145332 w 352584"/>
+              <a:gd name="csY25" fmla="*/ 163783 h 352584"/>
+              <a:gd name="csX26" fmla="*/ 158895 w 352584"/>
+              <a:gd name="csY26" fmla="*/ 163783 h 352584"/>
+              <a:gd name="csX27" fmla="*/ 173619 w 352584"/>
+              <a:gd name="csY27" fmla="*/ 162391 h 352584"/>
+              <a:gd name="csX28" fmla="*/ 185177 w 352584"/>
+              <a:gd name="csY28" fmla="*/ 157846 h 352584"/>
+              <a:gd name="csX29" fmla="*/ 192729 w 352584"/>
+              <a:gd name="csY29" fmla="*/ 149751 h 352584"/>
+              <a:gd name="csX30" fmla="*/ 195426 w 352584"/>
+              <a:gd name="csY30" fmla="*/ 137734 h 352584"/>
+              <a:gd name="csX31" fmla="*/ 192887 w 352584"/>
+              <a:gd name="csY31" fmla="*/ 126867 h 352584"/>
+              <a:gd name="csX32" fmla="*/ 186388 w 352584"/>
+              <a:gd name="csY32" fmla="*/ 120239 h 352584"/>
+              <a:gd name="csX33" fmla="*/ 177829 w 352584"/>
+              <a:gd name="csY33" fmla="*/ 116925 h 352584"/>
+              <a:gd name="csX34" fmla="*/ 168894 w 352584"/>
+              <a:gd name="csY34" fmla="*/ 115997 h 352584"/>
+              <a:gd name="csX35" fmla="*/ 149779 w 352584"/>
+              <a:gd name="csY35" fmla="*/ 118782 h 352584"/>
+              <a:gd name="csX36" fmla="*/ 131593 w 352584"/>
+              <a:gd name="csY36" fmla="*/ 127100 h 352584"/>
+              <a:gd name="csX37" fmla="*/ 131593 w 352584"/>
+              <a:gd name="csY37" fmla="*/ 105232 h 352584"/>
+              <a:gd name="csX38" fmla="*/ 149904 w 352584"/>
+              <a:gd name="csY38" fmla="*/ 98525 h 352584"/>
+              <a:gd name="csX39" fmla="*/ 171089 w 352584"/>
+              <a:gd name="csY39" fmla="*/ 96292 h 352584"/>
+              <a:gd name="csX40" fmla="*/ 189976 w 352584"/>
+              <a:gd name="csY40" fmla="*/ 98525 h 352584"/>
+              <a:gd name="csX41" fmla="*/ 206222 w 352584"/>
+              <a:gd name="csY41" fmla="*/ 105386 h 352584"/>
+              <a:gd name="csX42" fmla="*/ 217553 w 352584"/>
+              <a:gd name="csY42" fmla="*/ 117097 h 352584"/>
+              <a:gd name="csX43" fmla="*/ 221786 w 352584"/>
+              <a:gd name="csY43" fmla="*/ 133895 h 352584"/>
+              <a:gd name="csX44" fmla="*/ 212930 w 352584"/>
+              <a:gd name="csY44" fmla="*/ 159174 h 352584"/>
+              <a:gd name="csX45" fmla="*/ 188653 w 352584"/>
+              <a:gd name="csY45" fmla="*/ 172579 h 352584"/>
+              <a:gd name="csX46" fmla="*/ 203293 w 352584"/>
+              <a:gd name="csY46" fmla="*/ 176293 h 352584"/>
+              <a:gd name="csX47" fmla="*/ 215858 w 352584"/>
+              <a:gd name="csY47" fmla="*/ 184077 h 352584"/>
+              <a:gd name="csX48" fmla="*/ 224562 w 352584"/>
+              <a:gd name="csY48" fmla="*/ 195481 h 352584"/>
+              <a:gd name="csX49" fmla="*/ 227811 w 352584"/>
+              <a:gd name="csY49" fmla="*/ 209894 h 352584"/>
+              <a:gd name="csX50" fmla="*/ 222937 w 352584"/>
+              <a:gd name="csY50" fmla="*/ 229914 h 352584"/>
+            </a:gdLst>
+            <a:ahLst/>
+            <a:cxnLst>
+              <a:cxn ang="0">
+                <a:pos x="csX0" y="csY0"/>
+              </a:cxn>
+              <a:cxn ang="0">
+                <a:pos x="csX1" y="csY1"/>
+              </a:cxn>
+              <a:cxn ang="0">
+                <a:pos x="csX2" y="csY2"/>
+              </a:cxn>
+              <a:cxn ang="0">
+                <a:pos x="csX3" y="csY3"/>
+              </a:cxn>
+              <a:cxn ang="0">
+                <a:pos x="csX4" y="csY4"/>
+              </a:cxn>
+              <a:cxn ang="0">
+                <a:pos x="csX5" y="csY5"/>
+              </a:cxn>
+              <a:cxn ang="0">
+                <a:pos x="csX6" y="csY6"/>
+              </a:cxn>
+              <a:cxn ang="0">
+                <a:pos x="csX7" y="csY7"/>
+              </a:cxn>
+              <a:cxn ang="0">
+                <a:pos x="csX8" y="csY8"/>
+              </a:cxn>
+              <a:cxn ang="0">
+                <a:pos x="csX9" y="csY9"/>
+              </a:cxn>
+              <a:cxn ang="0">
+                <a:pos x="csX10" y="csY10"/>
+              </a:cxn>
+              <a:cxn ang="0">
+                <a:pos x="csX11" y="csY11"/>
+              </a:cxn>
+              <a:cxn ang="0">
+                <a:pos x="csX12" y="csY12"/>
+              </a:cxn>
+              <a:cxn ang="0">
+                <a:pos x="csX13" y="csY13"/>
+              </a:cxn>
+              <a:cxn ang="0">
+                <a:pos x="csX14" y="csY14"/>
+              </a:cxn>
+              <a:cxn ang="0">
+                <a:pos x="csX15" y="csY15"/>
+              </a:cxn>
+              <a:cxn ang="0">
+                <a:pos x="csX16" y="csY16"/>
+              </a:cxn>
+              <a:cxn ang="0">
+                <a:pos x="csX17" y="csY17"/>
+              </a:cxn>
+              <a:cxn ang="0">
+                <a:pos x="csX18" y="csY18"/>
+              </a:cxn>
+              <a:cxn ang="0">
+                <a:pos x="csX19" y="csY19"/>
+              </a:cxn>
+              <a:cxn ang="0">
+                <a:pos x="csX20" y="csY20"/>
+              </a:cxn>
+              <a:cxn ang="0">
+                <a:pos x="csX21" y="csY21"/>
+              </a:cxn>
+              <a:cxn ang="0">
+                <a:pos x="csX22" y="csY22"/>
+              </a:cxn>
+              <a:cxn ang="0">
+                <a:pos x="csX23" y="csY23"/>
+              </a:cxn>
+              <a:cxn ang="0">
+                <a:pos x="csX24" y="csY24"/>
+              </a:cxn>
+              <a:cxn ang="0">
+                <a:pos x="csX25" y="csY25"/>
+              </a:cxn>
+              <a:cxn ang="0">
+                <a:pos x="csX26" y="csY26"/>
+              </a:cxn>
+              <a:cxn ang="0">
+                <a:pos x="csX27" y="csY27"/>
+              </a:cxn>
+              <a:cxn ang="0">
+                <a:pos x="csX28" y="csY28"/>
+              </a:cxn>
+              <a:cxn ang="0">
+                <a:pos x="csX29" y="csY29"/>
+              </a:cxn>
+              <a:cxn ang="0">
+                <a:pos x="csX30" y="csY30"/>
+              </a:cxn>
+              <a:cxn ang="0">
+                <a:pos x="csX31" y="csY31"/>
+              </a:cxn>
+              <a:cxn ang="0">
+                <a:pos x="csX32" y="csY32"/>
+              </a:cxn>
+              <a:cxn ang="0">
+                <a:pos x="csX33" y="csY33"/>
+              </a:cxn>
+              <a:cxn ang="0">
+                <a:pos x="csX34" y="csY34"/>
+              </a:cxn>
+              <a:cxn ang="0">
+                <a:pos x="csX35" y="csY35"/>
+              </a:cxn>
+              <a:cxn ang="0">
+                <a:pos x="csX36" y="csY36"/>
+              </a:cxn>
+              <a:cxn ang="0">
+                <a:pos x="csX37" y="csY37"/>
+              </a:cxn>
+              <a:cxn ang="0">
+                <a:pos x="csX38" y="csY38"/>
+              </a:cxn>
+              <a:cxn ang="0">
+                <a:pos x="csX39" y="csY39"/>
+              </a:cxn>
+              <a:cxn ang="0">
+                <a:pos x="csX40" y="csY40"/>
+              </a:cxn>
+              <a:cxn ang="0">
+                <a:pos x="csX41" y="csY41"/>
+              </a:cxn>
+              <a:cxn ang="0">
+                <a:pos x="csX42" y="csY42"/>
+              </a:cxn>
+              <a:cxn ang="0">
+                <a:pos x="csX43" y="csY43"/>
+              </a:cxn>
+              <a:cxn ang="0">
+                <a:pos x="csX44" y="csY44"/>
+              </a:cxn>
+              <a:cxn ang="0">
+                <a:pos x="csX45" y="csY45"/>
+              </a:cxn>
+              <a:cxn ang="0">
+                <a:pos x="csX46" y="csY46"/>
+              </a:cxn>
+              <a:cxn ang="0">
+                <a:pos x="csX47" y="csY47"/>
+              </a:cxn>
+              <a:cxn ang="0">
+                <a:pos x="csX48" y="csY48"/>
+              </a:cxn>
+              <a:cxn ang="0">
+                <a:pos x="csX49" y="csY49"/>
+              </a:cxn>
+              <a:cxn ang="0">
+                <a:pos x="csX50" y="csY50"/>
+              </a:cxn>
+            </a:cxnLst>
+            <a:rect l="l" t="t" r="r" b="b"/>
+            <a:pathLst>
+              <a:path w="352584" h="352584">
+                <a:moveTo>
+                  <a:pt x="176297" y="0"/>
+                </a:moveTo>
+                <a:cubicBezTo>
+                  <a:pt x="78933" y="-3"/>
+                  <a:pt x="3" y="78924"/>
+                  <a:pt x="0" y="176288"/>
+                </a:cubicBezTo>
+                <a:cubicBezTo>
+                  <a:pt x="-3" y="273652"/>
+                  <a:pt x="78924" y="352582"/>
+                  <a:pt x="176288" y="352585"/>
+                </a:cubicBezTo>
+                <a:cubicBezTo>
+                  <a:pt x="273652" y="352587"/>
+                  <a:pt x="352582" y="273661"/>
+                  <a:pt x="352585" y="176297"/>
+                </a:cubicBezTo>
+                <a:cubicBezTo>
+                  <a:pt x="352585" y="176291"/>
+                  <a:pt x="352585" y="176285"/>
+                  <a:pt x="352585" y="176279"/>
+                </a:cubicBezTo>
+                <a:cubicBezTo>
+                  <a:pt x="352621" y="78958"/>
+                  <a:pt x="273757" y="36"/>
+                  <a:pt x="176436" y="0"/>
+                </a:cubicBezTo>
+                <a:cubicBezTo>
+                  <a:pt x="176390" y="0"/>
+                  <a:pt x="176344" y="0"/>
+                  <a:pt x="176297" y="0"/>
+                </a:cubicBezTo>
+                <a:close/>
+                <a:moveTo>
+                  <a:pt x="222937" y="229914"/>
+                </a:moveTo>
+                <a:cubicBezTo>
+                  <a:pt x="219694" y="235676"/>
+                  <a:pt x="215187" y="240630"/>
+                  <a:pt x="209755" y="244400"/>
+                </a:cubicBezTo>
+                <a:cubicBezTo>
+                  <a:pt x="203875" y="248459"/>
+                  <a:pt x="197330" y="251458"/>
+                  <a:pt x="190417" y="253261"/>
+                </a:cubicBezTo>
+                <a:cubicBezTo>
+                  <a:pt x="182850" y="255295"/>
+                  <a:pt x="175044" y="256307"/>
+                  <a:pt x="167209" y="256269"/>
+                </a:cubicBezTo>
+                <a:cubicBezTo>
+                  <a:pt x="159301" y="256297"/>
+                  <a:pt x="151409" y="255599"/>
+                  <a:pt x="143629" y="254185"/>
+                </a:cubicBezTo>
+                <a:cubicBezTo>
+                  <a:pt x="137115" y="253136"/>
+                  <a:pt x="130817" y="251028"/>
+                  <a:pt x="124983" y="247947"/>
+                </a:cubicBezTo>
+                <a:lnTo>
+                  <a:pt x="124983" y="224195"/>
+                </a:lnTo>
+                <a:cubicBezTo>
+                  <a:pt x="131177" y="228519"/>
+                  <a:pt x="138093" y="231704"/>
+                  <a:pt x="145406" y="233599"/>
+                </a:cubicBezTo>
+                <a:cubicBezTo>
+                  <a:pt x="152763" y="235614"/>
+                  <a:pt x="160352" y="236651"/>
+                  <a:pt x="167979" y="236681"/>
+                </a:cubicBezTo>
+                <a:cubicBezTo>
+                  <a:pt x="171653" y="236655"/>
+                  <a:pt x="175317" y="236293"/>
+                  <a:pt x="178924" y="235600"/>
+                </a:cubicBezTo>
+                <a:cubicBezTo>
+                  <a:pt x="182744" y="234913"/>
+                  <a:pt x="186419" y="233586"/>
+                  <a:pt x="189795" y="231673"/>
+                </a:cubicBezTo>
+                <a:cubicBezTo>
+                  <a:pt x="193140" y="229764"/>
+                  <a:pt x="195990" y="227098"/>
+                  <a:pt x="198118" y="223889"/>
+                </a:cubicBezTo>
+                <a:cubicBezTo>
+                  <a:pt x="200444" y="220153"/>
+                  <a:pt x="201595" y="215805"/>
+                  <a:pt x="201423" y="211407"/>
+                </a:cubicBezTo>
+                <a:cubicBezTo>
+                  <a:pt x="201559" y="206910"/>
+                  <a:pt x="200469" y="202461"/>
+                  <a:pt x="198271" y="198536"/>
+                </a:cubicBezTo>
+                <a:cubicBezTo>
+                  <a:pt x="196125" y="194957"/>
+                  <a:pt x="193101" y="191987"/>
+                  <a:pt x="189484" y="189907"/>
+                </a:cubicBezTo>
+                <a:cubicBezTo>
+                  <a:pt x="185368" y="187563"/>
+                  <a:pt x="180889" y="185922"/>
+                  <a:pt x="176232" y="185051"/>
+                </a:cubicBezTo>
+                <a:cubicBezTo>
+                  <a:pt x="170772" y="183989"/>
+                  <a:pt x="165219" y="183473"/>
+                  <a:pt x="159657" y="183510"/>
+                </a:cubicBezTo>
+                <a:lnTo>
+                  <a:pt x="145332" y="183510"/>
+                </a:lnTo>
+                <a:lnTo>
+                  <a:pt x="145332" y="163783"/>
+                </a:lnTo>
+                <a:lnTo>
+                  <a:pt x="158895" y="163783"/>
+                </a:lnTo>
+                <a:cubicBezTo>
+                  <a:pt x="163838" y="163819"/>
+                  <a:pt x="168771" y="163353"/>
+                  <a:pt x="173619" y="162391"/>
+                </a:cubicBezTo>
+                <a:cubicBezTo>
+                  <a:pt x="177722" y="161614"/>
+                  <a:pt x="181643" y="160072"/>
+                  <a:pt x="185177" y="157846"/>
+                </a:cubicBezTo>
+                <a:cubicBezTo>
+                  <a:pt x="188334" y="155825"/>
+                  <a:pt x="190932" y="153041"/>
+                  <a:pt x="192729" y="149751"/>
+                </a:cubicBezTo>
+                <a:cubicBezTo>
+                  <a:pt x="194626" y="146036"/>
+                  <a:pt x="195554" y="141903"/>
+                  <a:pt x="195426" y="137734"/>
+                </a:cubicBezTo>
+                <a:cubicBezTo>
+                  <a:pt x="195580" y="133948"/>
+                  <a:pt x="194703" y="130192"/>
+                  <a:pt x="192887" y="126867"/>
+                </a:cubicBezTo>
+                <a:cubicBezTo>
+                  <a:pt x="191300" y="124156"/>
+                  <a:pt x="189067" y="121880"/>
+                  <a:pt x="186388" y="120239"/>
+                </a:cubicBezTo>
+                <a:cubicBezTo>
+                  <a:pt x="183752" y="118641"/>
+                  <a:pt x="180854" y="117519"/>
+                  <a:pt x="177829" y="116925"/>
+                </a:cubicBezTo>
+                <a:cubicBezTo>
+                  <a:pt x="174888" y="116322"/>
+                  <a:pt x="171895" y="116011"/>
+                  <a:pt x="168894" y="115997"/>
+                </a:cubicBezTo>
+                <a:cubicBezTo>
+                  <a:pt x="162425" y="116056"/>
+                  <a:pt x="155995" y="116994"/>
+                  <a:pt x="149779" y="118782"/>
+                </a:cubicBezTo>
+                <a:cubicBezTo>
+                  <a:pt x="143302" y="120539"/>
+                  <a:pt x="137158" y="123349"/>
+                  <a:pt x="131593" y="127100"/>
+                </a:cubicBezTo>
+                <a:lnTo>
+                  <a:pt x="131593" y="105232"/>
+                </a:lnTo>
+                <a:cubicBezTo>
+                  <a:pt x="137363" y="102174"/>
+                  <a:pt x="143524" y="99918"/>
+                  <a:pt x="149904" y="98525"/>
+                </a:cubicBezTo>
+                <a:cubicBezTo>
+                  <a:pt x="156862" y="97003"/>
+                  <a:pt x="163967" y="96254"/>
+                  <a:pt x="171089" y="96292"/>
+                </a:cubicBezTo>
+                <a:cubicBezTo>
+                  <a:pt x="177452" y="96281"/>
+                  <a:pt x="183792" y="97031"/>
+                  <a:pt x="189976" y="98525"/>
+                </a:cubicBezTo>
+                <a:cubicBezTo>
+                  <a:pt x="195741" y="99874"/>
+                  <a:pt x="201235" y="102194"/>
+                  <a:pt x="206222" y="105386"/>
+                </a:cubicBezTo>
+                <a:cubicBezTo>
+                  <a:pt x="210849" y="108367"/>
+                  <a:pt x="214726" y="112374"/>
+                  <a:pt x="217553" y="117097"/>
+                </a:cubicBezTo>
+                <a:cubicBezTo>
+                  <a:pt x="220473" y="122204"/>
+                  <a:pt x="221937" y="128014"/>
+                  <a:pt x="221786" y="133895"/>
+                </a:cubicBezTo>
+                <a:cubicBezTo>
+                  <a:pt x="222154" y="143140"/>
+                  <a:pt x="218987" y="152179"/>
+                  <a:pt x="212930" y="159174"/>
+                </a:cubicBezTo>
+                <a:cubicBezTo>
+                  <a:pt x="206443" y="166077"/>
+                  <a:pt x="197951" y="170766"/>
+                  <a:pt x="188653" y="172579"/>
+                </a:cubicBezTo>
+                <a:cubicBezTo>
+                  <a:pt x="193688" y="173099"/>
+                  <a:pt x="198620" y="174350"/>
+                  <a:pt x="203293" y="176293"/>
+                </a:cubicBezTo>
+                <a:cubicBezTo>
+                  <a:pt x="207887" y="178167"/>
+                  <a:pt x="212134" y="180798"/>
+                  <a:pt x="215858" y="184077"/>
+                </a:cubicBezTo>
+                <a:cubicBezTo>
+                  <a:pt x="219473" y="187276"/>
+                  <a:pt x="222430" y="191150"/>
+                  <a:pt x="224562" y="195481"/>
+                </a:cubicBezTo>
+                <a:cubicBezTo>
+                  <a:pt x="226751" y="199967"/>
+                  <a:pt x="227864" y="204902"/>
+                  <a:pt x="227811" y="209894"/>
+                </a:cubicBezTo>
+                <a:cubicBezTo>
+                  <a:pt x="227957" y="216878"/>
+                  <a:pt x="226277" y="223778"/>
+                  <a:pt x="222937" y="229914"/>
+                </a:cubicBezTo>
+                <a:close/>
+              </a:path>
+            </a:pathLst>
+          </a:custGeom>
+          <a:solidFill>
+            <a:srgbClr val="7030A0"/>
+          </a:solidFill>
+          <a:ln w="4564" cap="flat">
+            <a:noFill/>
+            <a:prstDash val="solid"/>
+            <a:miter/>
+          </a:ln>
+        </p:spPr>
+        <p:txBody>
+          <a:bodyPr/>
+          <a:lstStyle/>
+          <a:p>
+            <a:endParaRPr lang="ko-KR" altLang="en-US"/>
+          </a:p>
+        </p:txBody>
+      </p:sp>
+      <p:sp>
+        <p:nvSpPr>
+          <p:cNvPr id="41" name="그래픽 39" descr="배지 단색으로 채워진">
+            <a:extLst>
+              <a:ext uri="{FF2B5EF4-FFF2-40B4-BE49-F238E27FC236}">
+                <a16:creationId xmlns:a16="http://schemas.microsoft.com/office/drawing/2014/main" id="{DEEC308A-6045-2162-381B-F39E36CBC779}"/>
+              </a:ext>
+            </a:extLst>
+          </p:cNvPr>
+          <p:cNvSpPr/>
+          <p:nvPr/>
+        </p:nvSpPr>
+        <p:spPr>
+          <a:xfrm>
+            <a:off x="4241173" y="2247335"/>
+            <a:ext cx="389031" cy="389964"/>
+          </a:xfrm>
+          <a:custGeom>
+            <a:avLst/>
+            <a:gdLst>
+              <a:gd name="csX0" fmla="*/ 176368 w 352735"/>
+              <a:gd name="csY0" fmla="*/ 0 h 352735"/>
+              <a:gd name="csX1" fmla="*/ 0 w 352735"/>
+              <a:gd name="csY1" fmla="*/ 176368 h 352735"/>
+              <a:gd name="csX2" fmla="*/ 176368 w 352735"/>
+              <a:gd name="csY2" fmla="*/ 352736 h 352735"/>
+              <a:gd name="csX3" fmla="*/ 352735 w 352735"/>
+              <a:gd name="csY3" fmla="*/ 176368 h 352735"/>
+              <a:gd name="csX4" fmla="*/ 352735 w 352735"/>
+              <a:gd name="csY4" fmla="*/ 176354 h 352735"/>
+              <a:gd name="csX5" fmla="*/ 176502 w 352735"/>
+              <a:gd name="csY5" fmla="*/ 0 h 352735"/>
+              <a:gd name="csX6" fmla="*/ 176368 w 352735"/>
+              <a:gd name="csY6" fmla="*/ 0 h 352735"/>
+              <a:gd name="csX7" fmla="*/ 226790 w 352735"/>
+              <a:gd name="csY7" fmla="*/ 255452 h 352735"/>
+              <a:gd name="csX8" fmla="*/ 125950 w 352735"/>
+              <a:gd name="csY8" fmla="*/ 255452 h 352735"/>
+              <a:gd name="csX9" fmla="*/ 125950 w 352735"/>
+              <a:gd name="csY9" fmla="*/ 240652 h 352735"/>
+              <a:gd name="csX10" fmla="*/ 129340 w 352735"/>
+              <a:gd name="csY10" fmla="*/ 222541 h 352735"/>
+              <a:gd name="csX11" fmla="*/ 138665 w 352735"/>
+              <a:gd name="csY11" fmla="*/ 207681 h 352735"/>
+              <a:gd name="csX12" fmla="*/ 152471 w 352735"/>
+              <a:gd name="csY12" fmla="*/ 195041 h 352735"/>
+              <a:gd name="csX13" fmla="*/ 169430 w 352735"/>
+              <a:gd name="csY13" fmla="*/ 183631 h 352735"/>
+              <a:gd name="csX14" fmla="*/ 183826 w 352735"/>
+              <a:gd name="csY14" fmla="*/ 173298 h 352735"/>
+              <a:gd name="csX15" fmla="*/ 192784 w 352735"/>
+              <a:gd name="csY15" fmla="*/ 163463 h 352735"/>
+              <a:gd name="csX16" fmla="*/ 197339 w 352735"/>
+              <a:gd name="csY16" fmla="*/ 153515 h 352735"/>
+              <a:gd name="csX17" fmla="*/ 198570 w 352735"/>
+              <a:gd name="csY17" fmla="*/ 142412 h 352735"/>
+              <a:gd name="csX18" fmla="*/ 197028 w 352735"/>
+              <a:gd name="csY18" fmla="*/ 132855 h 352735"/>
+              <a:gd name="csX19" fmla="*/ 192477 w 352735"/>
+              <a:gd name="csY19" fmla="*/ 124761 h 352735"/>
+              <a:gd name="csX20" fmla="*/ 184768 w 352735"/>
+              <a:gd name="csY20" fmla="*/ 119188 h 352735"/>
+              <a:gd name="csX21" fmla="*/ 173902 w 352735"/>
+              <a:gd name="csY21" fmla="*/ 117108 h 352735"/>
+              <a:gd name="csX22" fmla="*/ 152930 w 352735"/>
+              <a:gd name="csY22" fmla="*/ 122044 h 352735"/>
+              <a:gd name="csX23" fmla="*/ 134276 w 352735"/>
+              <a:gd name="csY23" fmla="*/ 135302 h 352735"/>
+              <a:gd name="csX24" fmla="*/ 134276 w 352735"/>
+              <a:gd name="csY24" fmla="*/ 111247 h 352735"/>
+              <a:gd name="csX25" fmla="*/ 153005 w 352735"/>
+              <a:gd name="csY25" fmla="*/ 100455 h 352735"/>
+              <a:gd name="csX26" fmla="*/ 176224 w 352735"/>
+              <a:gd name="csY26" fmla="*/ 97205 h 352735"/>
+              <a:gd name="csX27" fmla="*/ 194725 w 352735"/>
+              <a:gd name="csY27" fmla="*/ 99991 h 352735"/>
+              <a:gd name="csX28" fmla="*/ 209836 w 352735"/>
+              <a:gd name="csY28" fmla="*/ 108085 h 352735"/>
+              <a:gd name="csX29" fmla="*/ 220015 w 352735"/>
+              <a:gd name="csY29" fmla="*/ 121343 h 352735"/>
+              <a:gd name="csX30" fmla="*/ 223730 w 352735"/>
+              <a:gd name="csY30" fmla="*/ 139454 h 352735"/>
+              <a:gd name="csX31" fmla="*/ 221794 w 352735"/>
+              <a:gd name="csY31" fmla="*/ 156102 h 352735"/>
+              <a:gd name="csX32" fmla="*/ 215441 w 352735"/>
+              <a:gd name="csY32" fmla="*/ 170493 h 352735"/>
+              <a:gd name="csX33" fmla="*/ 203961 w 352735"/>
+              <a:gd name="csY33" fmla="*/ 183603 h 352735"/>
+              <a:gd name="csX34" fmla="*/ 186691 w 352735"/>
+              <a:gd name="csY34" fmla="*/ 196397 h 352735"/>
+              <a:gd name="csX35" fmla="*/ 171886 w 352735"/>
+              <a:gd name="csY35" fmla="*/ 206111 h 352735"/>
+              <a:gd name="csX36" fmla="*/ 160857 w 352735"/>
+              <a:gd name="csY36" fmla="*/ 214976 h 352735"/>
+              <a:gd name="csX37" fmla="*/ 154003 w 352735"/>
+              <a:gd name="csY37" fmla="*/ 224074 h 352735"/>
+              <a:gd name="csX38" fmla="*/ 151681 w 352735"/>
+              <a:gd name="csY38" fmla="*/ 234485 h 352735"/>
+              <a:gd name="csX39" fmla="*/ 226772 w 352735"/>
+              <a:gd name="csY39" fmla="*/ 234485 h 352735"/>
+            </a:gdLst>
+            <a:ahLst/>
+            <a:cxnLst>
+              <a:cxn ang="0">
+                <a:pos x="csX0" y="csY0"/>
+              </a:cxn>
+              <a:cxn ang="0">
+                <a:pos x="csX1" y="csY1"/>
+              </a:cxn>
+              <a:cxn ang="0">
+                <a:pos x="csX2" y="csY2"/>
+              </a:cxn>
+              <a:cxn ang="0">
+                <a:pos x="csX3" y="csY3"/>
+              </a:cxn>
+              <a:cxn ang="0">
+                <a:pos x="csX4" y="csY4"/>
+              </a:cxn>
+              <a:cxn ang="0">
+                <a:pos x="csX5" y="csY5"/>
+              </a:cxn>
+              <a:cxn ang="0">
+                <a:pos x="csX6" y="csY6"/>
+              </a:cxn>
+              <a:cxn ang="0">
+                <a:pos x="csX7" y="csY7"/>
+              </a:cxn>
+              <a:cxn ang="0">
+                <a:pos x="csX8" y="csY8"/>
+              </a:cxn>
+              <a:cxn ang="0">
+                <a:pos x="csX9" y="csY9"/>
+              </a:cxn>
+              <a:cxn ang="0">
+                <a:pos x="csX10" y="csY10"/>
+              </a:cxn>
+              <a:cxn ang="0">
+                <a:pos x="csX11" y="csY11"/>
+              </a:cxn>
+              <a:cxn ang="0">
+                <a:pos x="csX12" y="csY12"/>
+              </a:cxn>
+              <a:cxn ang="0">
+                <a:pos x="csX13" y="csY13"/>
+              </a:cxn>
+              <a:cxn ang="0">
+                <a:pos x="csX14" y="csY14"/>
+              </a:cxn>
+              <a:cxn ang="0">
+                <a:pos x="csX15" y="csY15"/>
+              </a:cxn>
+              <a:cxn ang="0">
+                <a:pos x="csX16" y="csY16"/>
+              </a:cxn>
+              <a:cxn ang="0">
+                <a:pos x="csX17" y="csY17"/>
+              </a:cxn>
+              <a:cxn ang="0">
+                <a:pos x="csX18" y="csY18"/>
+              </a:cxn>
+              <a:cxn ang="0">
+                <a:pos x="csX19" y="csY19"/>
+              </a:cxn>
+              <a:cxn ang="0">
+                <a:pos x="csX20" y="csY20"/>
+              </a:cxn>
+              <a:cxn ang="0">
+                <a:pos x="csX21" y="csY21"/>
+              </a:cxn>
+              <a:cxn ang="0">
+                <a:pos x="csX22" y="csY22"/>
+              </a:cxn>
+              <a:cxn ang="0">
+                <a:pos x="csX23" y="csY23"/>
+              </a:cxn>
+              <a:cxn ang="0">
+                <a:pos x="csX24" y="csY24"/>
+              </a:cxn>
+              <a:cxn ang="0">
+                <a:pos x="csX25" y="csY25"/>
+              </a:cxn>
+              <a:cxn ang="0">
+                <a:pos x="csX26" y="csY26"/>
+              </a:cxn>
+              <a:cxn ang="0">
+                <a:pos x="csX27" y="csY27"/>
+              </a:cxn>
+              <a:cxn ang="0">
+                <a:pos x="csX28" y="csY28"/>
+              </a:cxn>
+              <a:cxn ang="0">
+                <a:pos x="csX29" y="csY29"/>
+              </a:cxn>
+              <a:cxn ang="0">
+                <a:pos x="csX30" y="csY30"/>
+              </a:cxn>
+              <a:cxn ang="0">
+                <a:pos x="csX31" y="csY31"/>
+              </a:cxn>
+              <a:cxn ang="0">
+                <a:pos x="csX32" y="csY32"/>
+              </a:cxn>
+              <a:cxn ang="0">
+                <a:pos x="csX33" y="csY33"/>
+              </a:cxn>
+              <a:cxn ang="0">
+                <a:pos x="csX34" y="csY34"/>
+              </a:cxn>
+              <a:cxn ang="0">
+                <a:pos x="csX35" y="csY35"/>
+              </a:cxn>
+              <a:cxn ang="0">
+                <a:pos x="csX36" y="csY36"/>
+              </a:cxn>
+              <a:cxn ang="0">
+                <a:pos x="csX37" y="csY37"/>
+              </a:cxn>
+              <a:cxn ang="0">
+                <a:pos x="csX38" y="csY38"/>
+              </a:cxn>
+              <a:cxn ang="0">
+                <a:pos x="csX39" y="csY39"/>
+              </a:cxn>
+            </a:cxnLst>
+            <a:rect l="l" t="t" r="r" b="b"/>
+            <a:pathLst>
+              <a:path w="352735" h="352735">
+                <a:moveTo>
+                  <a:pt x="176368" y="0"/>
+                </a:moveTo>
+                <a:cubicBezTo>
+                  <a:pt x="78963" y="0"/>
+                  <a:pt x="0" y="78963"/>
+                  <a:pt x="0" y="176368"/>
+                </a:cubicBezTo>
+                <a:cubicBezTo>
+                  <a:pt x="0" y="273773"/>
+                  <a:pt x="78963" y="352736"/>
+                  <a:pt x="176368" y="352736"/>
+                </a:cubicBezTo>
+                <a:cubicBezTo>
+                  <a:pt x="273773" y="352736"/>
+                  <a:pt x="352735" y="273773"/>
+                  <a:pt x="352735" y="176368"/>
+                </a:cubicBezTo>
+                <a:cubicBezTo>
+                  <a:pt x="352735" y="176363"/>
+                  <a:pt x="352735" y="176358"/>
+                  <a:pt x="352735" y="176354"/>
+                </a:cubicBezTo>
+                <a:cubicBezTo>
+                  <a:pt x="352769" y="78990"/>
+                  <a:pt x="273867" y="33"/>
+                  <a:pt x="176502" y="0"/>
+                </a:cubicBezTo>
+                <a:cubicBezTo>
+                  <a:pt x="176457" y="0"/>
+                  <a:pt x="176413" y="0"/>
+                  <a:pt x="176368" y="0"/>
+                </a:cubicBezTo>
+                <a:close/>
+                <a:moveTo>
+                  <a:pt x="226790" y="255452"/>
+                </a:moveTo>
+                <a:lnTo>
+                  <a:pt x="125950" y="255452"/>
+                </a:lnTo>
+                <a:lnTo>
+                  <a:pt x="125950" y="240652"/>
+                </a:lnTo>
+                <a:cubicBezTo>
+                  <a:pt x="125858" y="234449"/>
+                  <a:pt x="127010" y="228291"/>
+                  <a:pt x="129340" y="222541"/>
+                </a:cubicBezTo>
+                <a:cubicBezTo>
+                  <a:pt x="131623" y="217115"/>
+                  <a:pt x="134772" y="212096"/>
+                  <a:pt x="138665" y="207681"/>
+                </a:cubicBezTo>
+                <a:cubicBezTo>
+                  <a:pt x="142807" y="202992"/>
+                  <a:pt x="147435" y="198755"/>
+                  <a:pt x="152471" y="195041"/>
+                </a:cubicBezTo>
+                <a:cubicBezTo>
+                  <a:pt x="157715" y="191137"/>
+                  <a:pt x="163368" y="187333"/>
+                  <a:pt x="169430" y="183631"/>
+                </a:cubicBezTo>
+                <a:cubicBezTo>
+                  <a:pt x="174506" y="180591"/>
+                  <a:pt x="179321" y="177135"/>
+                  <a:pt x="183826" y="173298"/>
+                </a:cubicBezTo>
+                <a:cubicBezTo>
+                  <a:pt x="187212" y="170408"/>
+                  <a:pt x="190222" y="167104"/>
+                  <a:pt x="192784" y="163463"/>
+                </a:cubicBezTo>
+                <a:cubicBezTo>
+                  <a:pt x="194892" y="160450"/>
+                  <a:pt x="196436" y="157080"/>
+                  <a:pt x="197339" y="153515"/>
+                </a:cubicBezTo>
+                <a:cubicBezTo>
+                  <a:pt x="198186" y="149876"/>
+                  <a:pt x="198600" y="146149"/>
+                  <a:pt x="198570" y="142412"/>
+                </a:cubicBezTo>
+                <a:cubicBezTo>
+                  <a:pt x="198575" y="139164"/>
+                  <a:pt x="198055" y="135937"/>
+                  <a:pt x="197028" y="132855"/>
+                </a:cubicBezTo>
+                <a:cubicBezTo>
+                  <a:pt x="196061" y="129883"/>
+                  <a:pt x="194514" y="127132"/>
+                  <a:pt x="192477" y="124761"/>
+                </a:cubicBezTo>
+                <a:cubicBezTo>
+                  <a:pt x="190354" y="122353"/>
+                  <a:pt x="187721" y="120449"/>
+                  <a:pt x="184768" y="119188"/>
+                </a:cubicBezTo>
+                <a:cubicBezTo>
+                  <a:pt x="181332" y="117742"/>
+                  <a:pt x="177630" y="117033"/>
+                  <a:pt x="173902" y="117108"/>
+                </a:cubicBezTo>
+                <a:cubicBezTo>
+                  <a:pt x="166620" y="117081"/>
+                  <a:pt x="159435" y="118772"/>
+                  <a:pt x="152930" y="122044"/>
+                </a:cubicBezTo>
+                <a:cubicBezTo>
+                  <a:pt x="146090" y="125516"/>
+                  <a:pt x="139803" y="129983"/>
+                  <a:pt x="134276" y="135302"/>
+                </a:cubicBezTo>
+                <a:lnTo>
+                  <a:pt x="134276" y="111247"/>
+                </a:lnTo>
+                <a:cubicBezTo>
+                  <a:pt x="139617" y="106273"/>
+                  <a:pt x="146022" y="102581"/>
+                  <a:pt x="153005" y="100455"/>
+                </a:cubicBezTo>
+                <a:cubicBezTo>
+                  <a:pt x="160539" y="98221"/>
+                  <a:pt x="168366" y="97125"/>
+                  <a:pt x="176224" y="97205"/>
+                </a:cubicBezTo>
+                <a:cubicBezTo>
+                  <a:pt x="182499" y="97161"/>
+                  <a:pt x="188741" y="98101"/>
+                  <a:pt x="194725" y="99991"/>
+                </a:cubicBezTo>
+                <a:cubicBezTo>
+                  <a:pt x="200231" y="101704"/>
+                  <a:pt x="205359" y="104451"/>
+                  <a:pt x="209836" y="108085"/>
+                </a:cubicBezTo>
+                <a:cubicBezTo>
+                  <a:pt x="214188" y="111677"/>
+                  <a:pt x="217669" y="116210"/>
+                  <a:pt x="220015" y="121343"/>
+                </a:cubicBezTo>
+                <a:cubicBezTo>
+                  <a:pt x="222569" y="127034"/>
+                  <a:pt x="223837" y="133217"/>
+                  <a:pt x="223730" y="139454"/>
+                </a:cubicBezTo>
+                <a:cubicBezTo>
+                  <a:pt x="223784" y="145063"/>
+                  <a:pt x="223134" y="150656"/>
+                  <a:pt x="221794" y="156102"/>
+                </a:cubicBezTo>
+                <a:cubicBezTo>
+                  <a:pt x="220480" y="161215"/>
+                  <a:pt x="218334" y="166078"/>
+                  <a:pt x="215441" y="170493"/>
+                </a:cubicBezTo>
+                <a:cubicBezTo>
+                  <a:pt x="212216" y="175355"/>
+                  <a:pt x="208355" y="179764"/>
+                  <a:pt x="203961" y="183603"/>
+                </a:cubicBezTo>
+                <a:cubicBezTo>
+                  <a:pt x="198553" y="188319"/>
+                  <a:pt x="192778" y="192597"/>
+                  <a:pt x="186691" y="196397"/>
+                </a:cubicBezTo>
+                <a:cubicBezTo>
+                  <a:pt x="181137" y="199895"/>
+                  <a:pt x="176202" y="203133"/>
+                  <a:pt x="171886" y="206111"/>
+                </a:cubicBezTo>
+                <a:cubicBezTo>
+                  <a:pt x="167977" y="208765"/>
+                  <a:pt x="164289" y="211730"/>
+                  <a:pt x="160857" y="214976"/>
+                </a:cubicBezTo>
+                <a:cubicBezTo>
+                  <a:pt x="158066" y="217592"/>
+                  <a:pt x="155748" y="220670"/>
+                  <a:pt x="154003" y="224074"/>
+                </a:cubicBezTo>
+                <a:cubicBezTo>
+                  <a:pt x="152434" y="227318"/>
+                  <a:pt x="151639" y="230882"/>
+                  <a:pt x="151681" y="234485"/>
+                </a:cubicBezTo>
+                <a:lnTo>
+                  <a:pt x="226772" y="234485"/>
+                </a:lnTo>
+                <a:close/>
+              </a:path>
+            </a:pathLst>
+          </a:custGeom>
+          <a:solidFill>
+            <a:srgbClr val="7030A0"/>
+          </a:solidFill>
+          <a:ln w="4564" cap="flat">
+            <a:noFill/>
+            <a:prstDash val="solid"/>
+            <a:miter/>
+          </a:ln>
+        </p:spPr>
+        <p:txBody>
+          <a:bodyPr/>
+          <a:lstStyle/>
+          <a:p>
+            <a:endParaRPr lang="ko-KR" altLang="en-US"/>
+          </a:p>
+        </p:txBody>
+      </p:sp>
+      <p:sp>
+        <p:nvSpPr>
+          <p:cNvPr id="43" name="그래픽 42" descr="배지 3 단색으로 채워진">
+            <a:extLst>
+              <a:ext uri="{FF2B5EF4-FFF2-40B4-BE49-F238E27FC236}">
+                <a16:creationId xmlns:a16="http://schemas.microsoft.com/office/drawing/2014/main" id="{2299B07F-2549-DACA-EFDA-5FB3EC77500E}"/>
+              </a:ext>
+            </a:extLst>
+          </p:cNvPr>
+          <p:cNvSpPr/>
+          <p:nvPr/>
+        </p:nvSpPr>
+        <p:spPr>
+          <a:xfrm>
+            <a:off x="4920894" y="3081619"/>
+            <a:ext cx="389031" cy="389963"/>
+          </a:xfrm>
+          <a:custGeom>
+            <a:avLst/>
+            <a:gdLst>
+              <a:gd name="csX0" fmla="*/ 176297 w 352584"/>
+              <a:gd name="csY0" fmla="*/ 0 h 352584"/>
+              <a:gd name="csX1" fmla="*/ 0 w 352584"/>
+              <a:gd name="csY1" fmla="*/ 176288 h 352584"/>
+              <a:gd name="csX2" fmla="*/ 176288 w 352584"/>
+              <a:gd name="csY2" fmla="*/ 352585 h 352584"/>
+              <a:gd name="csX3" fmla="*/ 352585 w 352584"/>
+              <a:gd name="csY3" fmla="*/ 176297 h 352584"/>
+              <a:gd name="csX4" fmla="*/ 352585 w 352584"/>
+              <a:gd name="csY4" fmla="*/ 176279 h 352584"/>
+              <a:gd name="csX5" fmla="*/ 176436 w 352584"/>
+              <a:gd name="csY5" fmla="*/ 0 h 352584"/>
+              <a:gd name="csX6" fmla="*/ 176297 w 352584"/>
+              <a:gd name="csY6" fmla="*/ 0 h 352584"/>
+              <a:gd name="csX7" fmla="*/ 222937 w 352584"/>
+              <a:gd name="csY7" fmla="*/ 229914 h 352584"/>
+              <a:gd name="csX8" fmla="*/ 209755 w 352584"/>
+              <a:gd name="csY8" fmla="*/ 244400 h 352584"/>
+              <a:gd name="csX9" fmla="*/ 190417 w 352584"/>
+              <a:gd name="csY9" fmla="*/ 253261 h 352584"/>
+              <a:gd name="csX10" fmla="*/ 167209 w 352584"/>
+              <a:gd name="csY10" fmla="*/ 256269 h 352584"/>
+              <a:gd name="csX11" fmla="*/ 143629 w 352584"/>
+              <a:gd name="csY11" fmla="*/ 254185 h 352584"/>
+              <a:gd name="csX12" fmla="*/ 124983 w 352584"/>
+              <a:gd name="csY12" fmla="*/ 247947 h 352584"/>
+              <a:gd name="csX13" fmla="*/ 124983 w 352584"/>
+              <a:gd name="csY13" fmla="*/ 224195 h 352584"/>
+              <a:gd name="csX14" fmla="*/ 145406 w 352584"/>
+              <a:gd name="csY14" fmla="*/ 233599 h 352584"/>
+              <a:gd name="csX15" fmla="*/ 167979 w 352584"/>
+              <a:gd name="csY15" fmla="*/ 236681 h 352584"/>
+              <a:gd name="csX16" fmla="*/ 178924 w 352584"/>
+              <a:gd name="csY16" fmla="*/ 235600 h 352584"/>
+              <a:gd name="csX17" fmla="*/ 189795 w 352584"/>
+              <a:gd name="csY17" fmla="*/ 231673 h 352584"/>
+              <a:gd name="csX18" fmla="*/ 198118 w 352584"/>
+              <a:gd name="csY18" fmla="*/ 223889 h 352584"/>
+              <a:gd name="csX19" fmla="*/ 201423 w 352584"/>
+              <a:gd name="csY19" fmla="*/ 211407 h 352584"/>
+              <a:gd name="csX20" fmla="*/ 198271 w 352584"/>
+              <a:gd name="csY20" fmla="*/ 198536 h 352584"/>
+              <a:gd name="csX21" fmla="*/ 189484 w 352584"/>
+              <a:gd name="csY21" fmla="*/ 189907 h 352584"/>
+              <a:gd name="csX22" fmla="*/ 176232 w 352584"/>
+              <a:gd name="csY22" fmla="*/ 185051 h 352584"/>
+              <a:gd name="csX23" fmla="*/ 159657 w 352584"/>
+              <a:gd name="csY23" fmla="*/ 183510 h 352584"/>
+              <a:gd name="csX24" fmla="*/ 145332 w 352584"/>
+              <a:gd name="csY24" fmla="*/ 183510 h 352584"/>
+              <a:gd name="csX25" fmla="*/ 145332 w 352584"/>
+              <a:gd name="csY25" fmla="*/ 163783 h 352584"/>
+              <a:gd name="csX26" fmla="*/ 158895 w 352584"/>
+              <a:gd name="csY26" fmla="*/ 163783 h 352584"/>
+              <a:gd name="csX27" fmla="*/ 173619 w 352584"/>
+              <a:gd name="csY27" fmla="*/ 162391 h 352584"/>
+              <a:gd name="csX28" fmla="*/ 185177 w 352584"/>
+              <a:gd name="csY28" fmla="*/ 157846 h 352584"/>
+              <a:gd name="csX29" fmla="*/ 192729 w 352584"/>
+              <a:gd name="csY29" fmla="*/ 149751 h 352584"/>
+              <a:gd name="csX30" fmla="*/ 195426 w 352584"/>
+              <a:gd name="csY30" fmla="*/ 137734 h 352584"/>
+              <a:gd name="csX31" fmla="*/ 192887 w 352584"/>
+              <a:gd name="csY31" fmla="*/ 126867 h 352584"/>
+              <a:gd name="csX32" fmla="*/ 186388 w 352584"/>
+              <a:gd name="csY32" fmla="*/ 120239 h 352584"/>
+              <a:gd name="csX33" fmla="*/ 177829 w 352584"/>
+              <a:gd name="csY33" fmla="*/ 116925 h 352584"/>
+              <a:gd name="csX34" fmla="*/ 168894 w 352584"/>
+              <a:gd name="csY34" fmla="*/ 115997 h 352584"/>
+              <a:gd name="csX35" fmla="*/ 149779 w 352584"/>
+              <a:gd name="csY35" fmla="*/ 118782 h 352584"/>
+              <a:gd name="csX36" fmla="*/ 131593 w 352584"/>
+              <a:gd name="csY36" fmla="*/ 127100 h 352584"/>
+              <a:gd name="csX37" fmla="*/ 131593 w 352584"/>
+              <a:gd name="csY37" fmla="*/ 105232 h 352584"/>
+              <a:gd name="csX38" fmla="*/ 149904 w 352584"/>
+              <a:gd name="csY38" fmla="*/ 98525 h 352584"/>
+              <a:gd name="csX39" fmla="*/ 171089 w 352584"/>
+              <a:gd name="csY39" fmla="*/ 96292 h 352584"/>
+              <a:gd name="csX40" fmla="*/ 189976 w 352584"/>
+              <a:gd name="csY40" fmla="*/ 98525 h 352584"/>
+              <a:gd name="csX41" fmla="*/ 206222 w 352584"/>
+              <a:gd name="csY41" fmla="*/ 105386 h 352584"/>
+              <a:gd name="csX42" fmla="*/ 217553 w 352584"/>
+              <a:gd name="csY42" fmla="*/ 117097 h 352584"/>
+              <a:gd name="csX43" fmla="*/ 221786 w 352584"/>
+              <a:gd name="csY43" fmla="*/ 133895 h 352584"/>
+              <a:gd name="csX44" fmla="*/ 212930 w 352584"/>
+              <a:gd name="csY44" fmla="*/ 159174 h 352584"/>
+              <a:gd name="csX45" fmla="*/ 188653 w 352584"/>
+              <a:gd name="csY45" fmla="*/ 172579 h 352584"/>
+              <a:gd name="csX46" fmla="*/ 203293 w 352584"/>
+              <a:gd name="csY46" fmla="*/ 176293 h 352584"/>
+              <a:gd name="csX47" fmla="*/ 215858 w 352584"/>
+              <a:gd name="csY47" fmla="*/ 184077 h 352584"/>
+              <a:gd name="csX48" fmla="*/ 224562 w 352584"/>
+              <a:gd name="csY48" fmla="*/ 195481 h 352584"/>
+              <a:gd name="csX49" fmla="*/ 227811 w 352584"/>
+              <a:gd name="csY49" fmla="*/ 209894 h 352584"/>
+              <a:gd name="csX50" fmla="*/ 222937 w 352584"/>
+              <a:gd name="csY50" fmla="*/ 229914 h 352584"/>
+            </a:gdLst>
+            <a:ahLst/>
+            <a:cxnLst>
+              <a:cxn ang="0">
+                <a:pos x="csX0" y="csY0"/>
+              </a:cxn>
+              <a:cxn ang="0">
+                <a:pos x="csX1" y="csY1"/>
+              </a:cxn>
+              <a:cxn ang="0">
+                <a:pos x="csX2" y="csY2"/>
+              </a:cxn>
+              <a:cxn ang="0">
+                <a:pos x="csX3" y="csY3"/>
+              </a:cxn>
+              <a:cxn ang="0">
+                <a:pos x="csX4" y="csY4"/>
+              </a:cxn>
+              <a:cxn ang="0">
+                <a:pos x="csX5" y="csY5"/>
+              </a:cxn>
+              <a:cxn ang="0">
+                <a:pos x="csX6" y="csY6"/>
+              </a:cxn>
+              <a:cxn ang="0">
+                <a:pos x="csX7" y="csY7"/>
+              </a:cxn>
+              <a:cxn ang="0">
+                <a:pos x="csX8" y="csY8"/>
+              </a:cxn>
+              <a:cxn ang="0">
+                <a:pos x="csX9" y="csY9"/>
+              </a:cxn>
+              <a:cxn ang="0">
+                <a:pos x="csX10" y="csY10"/>
+              </a:cxn>
+              <a:cxn ang="0">
+                <a:pos x="csX11" y="csY11"/>
+              </a:cxn>
+              <a:cxn ang="0">
+                <a:pos x="csX12" y="csY12"/>
+              </a:cxn>
+              <a:cxn ang="0">
+                <a:pos x="csX13" y="csY13"/>
+              </a:cxn>
+              <a:cxn ang="0">
+                <a:pos x="csX14" y="csY14"/>
+              </a:cxn>
+              <a:cxn ang="0">
+                <a:pos x="csX15" y="csY15"/>
+              </a:cxn>
+              <a:cxn ang="0">
+                <a:pos x="csX16" y="csY16"/>
+              </a:cxn>
+              <a:cxn ang="0">
+                <a:pos x="csX17" y="csY17"/>
+              </a:cxn>
+              <a:cxn ang="0">
+                <a:pos x="csX18" y="csY18"/>
+              </a:cxn>
+              <a:cxn ang="0">
+                <a:pos x="csX19" y="csY19"/>
+              </a:cxn>
+              <a:cxn ang="0">
+                <a:pos x="csX20" y="csY20"/>
+              </a:cxn>
+              <a:cxn ang="0">
+                <a:pos x="csX21" y="csY21"/>
+              </a:cxn>
+              <a:cxn ang="0">
+                <a:pos x="csX22" y="csY22"/>
+              </a:cxn>
+              <a:cxn ang="0">
+                <a:pos x="csX23" y="csY23"/>
+              </a:cxn>
+              <a:cxn ang="0">
+                <a:pos x="csX24" y="csY24"/>
+              </a:cxn>
+              <a:cxn ang="0">
+                <a:pos x="csX25" y="csY25"/>
+              </a:cxn>
+              <a:cxn ang="0">
+                <a:pos x="csX26" y="csY26"/>
+              </a:cxn>
+              <a:cxn ang="0">
+                <a:pos x="csX27" y="csY27"/>
+              </a:cxn>
+              <a:cxn ang="0">
+                <a:pos x="csX28" y="csY28"/>
+              </a:cxn>
+              <a:cxn ang="0">
+                <a:pos x="csX29" y="csY29"/>
+              </a:cxn>
+              <a:cxn ang="0">
+                <a:pos x="csX30" y="csY30"/>
+              </a:cxn>
+              <a:cxn ang="0">
+                <a:pos x="csX31" y="csY31"/>
+              </a:cxn>
+              <a:cxn ang="0">
+                <a:pos x="csX32" y="csY32"/>
+              </a:cxn>
+              <a:cxn ang="0">
+                <a:pos x="csX33" y="csY33"/>
+              </a:cxn>
+              <a:cxn ang="0">
+                <a:pos x="csX34" y="csY34"/>
+              </a:cxn>
+              <a:cxn ang="0">
+                <a:pos x="csX35" y="csY35"/>
+              </a:cxn>
+              <a:cxn ang="0">
+                <a:pos x="csX36" y="csY36"/>
+              </a:cxn>
+              <a:cxn ang="0">
+                <a:pos x="csX37" y="csY37"/>
+              </a:cxn>
+              <a:cxn ang="0">
+                <a:pos x="csX38" y="csY38"/>
+              </a:cxn>
+              <a:cxn ang="0">
+                <a:pos x="csX39" y="csY39"/>
+              </a:cxn>
+              <a:cxn ang="0">
+                <a:pos x="csX40" y="csY40"/>
+              </a:cxn>
+              <a:cxn ang="0">
+                <a:pos x="csX41" y="csY41"/>
+              </a:cxn>
+              <a:cxn ang="0">
+                <a:pos x="csX42" y="csY42"/>
+              </a:cxn>
+              <a:cxn ang="0">
+                <a:pos x="csX43" y="csY43"/>
+              </a:cxn>
+              <a:cxn ang="0">
+                <a:pos x="csX44" y="csY44"/>
+              </a:cxn>
+              <a:cxn ang="0">
+                <a:pos x="csX45" y="csY45"/>
+              </a:cxn>
+              <a:cxn ang="0">
+                <a:pos x="csX46" y="csY46"/>
+              </a:cxn>
+              <a:cxn ang="0">
+                <a:pos x="csX47" y="csY47"/>
+              </a:cxn>
+              <a:cxn ang="0">
+                <a:pos x="csX48" y="csY48"/>
+              </a:cxn>
+              <a:cxn ang="0">
+                <a:pos x="csX49" y="csY49"/>
+              </a:cxn>
+              <a:cxn ang="0">
+                <a:pos x="csX50" y="csY50"/>
+              </a:cxn>
+            </a:cxnLst>
+            <a:rect l="l" t="t" r="r" b="b"/>
+            <a:pathLst>
+              <a:path w="352584" h="352584">
+                <a:moveTo>
+                  <a:pt x="176297" y="0"/>
+                </a:moveTo>
+                <a:cubicBezTo>
+                  <a:pt x="78933" y="-3"/>
+                  <a:pt x="3" y="78924"/>
+                  <a:pt x="0" y="176288"/>
+                </a:cubicBezTo>
+                <a:cubicBezTo>
+                  <a:pt x="-3" y="273652"/>
+                  <a:pt x="78924" y="352582"/>
+                  <a:pt x="176288" y="352585"/>
+                </a:cubicBezTo>
+                <a:cubicBezTo>
+                  <a:pt x="273652" y="352587"/>
+                  <a:pt x="352582" y="273661"/>
+                  <a:pt x="352585" y="176297"/>
+                </a:cubicBezTo>
+                <a:cubicBezTo>
+                  <a:pt x="352585" y="176291"/>
+                  <a:pt x="352585" y="176285"/>
+                  <a:pt x="352585" y="176279"/>
+                </a:cubicBezTo>
+                <a:cubicBezTo>
+                  <a:pt x="352621" y="78958"/>
+                  <a:pt x="273757" y="36"/>
+                  <a:pt x="176436" y="0"/>
+                </a:cubicBezTo>
+                <a:cubicBezTo>
+                  <a:pt x="176390" y="0"/>
+                  <a:pt x="176344" y="0"/>
+                  <a:pt x="176297" y="0"/>
+                </a:cubicBezTo>
+                <a:close/>
+                <a:moveTo>
+                  <a:pt x="222937" y="229914"/>
+                </a:moveTo>
+                <a:cubicBezTo>
+                  <a:pt x="219694" y="235676"/>
+                  <a:pt x="215187" y="240630"/>
+                  <a:pt x="209755" y="244400"/>
+                </a:cubicBezTo>
+                <a:cubicBezTo>
+                  <a:pt x="203875" y="248459"/>
+                  <a:pt x="197330" y="251458"/>
+                  <a:pt x="190417" y="253261"/>
+                </a:cubicBezTo>
+                <a:cubicBezTo>
+                  <a:pt x="182850" y="255295"/>
+                  <a:pt x="175044" y="256307"/>
+                  <a:pt x="167209" y="256269"/>
+                </a:cubicBezTo>
+                <a:cubicBezTo>
+                  <a:pt x="159301" y="256297"/>
+                  <a:pt x="151409" y="255599"/>
+                  <a:pt x="143629" y="254185"/>
+                </a:cubicBezTo>
+                <a:cubicBezTo>
+                  <a:pt x="137115" y="253136"/>
+                  <a:pt x="130817" y="251028"/>
+                  <a:pt x="124983" y="247947"/>
+                </a:cubicBezTo>
+                <a:lnTo>
+                  <a:pt x="124983" y="224195"/>
+                </a:lnTo>
+                <a:cubicBezTo>
+                  <a:pt x="131177" y="228519"/>
+                  <a:pt x="138093" y="231704"/>
+                  <a:pt x="145406" y="233599"/>
+                </a:cubicBezTo>
+                <a:cubicBezTo>
+                  <a:pt x="152763" y="235614"/>
+                  <a:pt x="160352" y="236651"/>
+                  <a:pt x="167979" y="236681"/>
+                </a:cubicBezTo>
+                <a:cubicBezTo>
+                  <a:pt x="171653" y="236655"/>
+                  <a:pt x="175317" y="236293"/>
+                  <a:pt x="178924" y="235600"/>
+                </a:cubicBezTo>
+                <a:cubicBezTo>
+                  <a:pt x="182744" y="234913"/>
+                  <a:pt x="186419" y="233586"/>
+                  <a:pt x="189795" y="231673"/>
+                </a:cubicBezTo>
+                <a:cubicBezTo>
+                  <a:pt x="193140" y="229764"/>
+                  <a:pt x="195990" y="227098"/>
+                  <a:pt x="198118" y="223889"/>
+                </a:cubicBezTo>
+                <a:cubicBezTo>
+                  <a:pt x="200444" y="220153"/>
+                  <a:pt x="201595" y="215805"/>
+                  <a:pt x="201423" y="211407"/>
+                </a:cubicBezTo>
+                <a:cubicBezTo>
+                  <a:pt x="201559" y="206910"/>
+                  <a:pt x="200469" y="202461"/>
+                  <a:pt x="198271" y="198536"/>
+                </a:cubicBezTo>
+                <a:cubicBezTo>
+                  <a:pt x="196125" y="194957"/>
+                  <a:pt x="193101" y="191987"/>
+                  <a:pt x="189484" y="189907"/>
+                </a:cubicBezTo>
+                <a:cubicBezTo>
+                  <a:pt x="185368" y="187563"/>
+                  <a:pt x="180889" y="185922"/>
+                  <a:pt x="176232" y="185051"/>
+                </a:cubicBezTo>
+                <a:cubicBezTo>
+                  <a:pt x="170772" y="183989"/>
+                  <a:pt x="165219" y="183473"/>
+                  <a:pt x="159657" y="183510"/>
+                </a:cubicBezTo>
+                <a:lnTo>
+                  <a:pt x="145332" y="183510"/>
+                </a:lnTo>
+                <a:lnTo>
+                  <a:pt x="145332" y="163783"/>
+                </a:lnTo>
+                <a:lnTo>
+                  <a:pt x="158895" y="163783"/>
+                </a:lnTo>
+                <a:cubicBezTo>
+                  <a:pt x="163838" y="163819"/>
+                  <a:pt x="168771" y="163353"/>
+                  <a:pt x="173619" y="162391"/>
+                </a:cubicBezTo>
+                <a:cubicBezTo>
+                  <a:pt x="177722" y="161614"/>
+                  <a:pt x="181643" y="160072"/>
+                  <a:pt x="185177" y="157846"/>
+                </a:cubicBezTo>
+                <a:cubicBezTo>
+                  <a:pt x="188334" y="155825"/>
+                  <a:pt x="190932" y="153041"/>
+                  <a:pt x="192729" y="149751"/>
+                </a:cubicBezTo>
+                <a:cubicBezTo>
+                  <a:pt x="194626" y="146036"/>
+                  <a:pt x="195554" y="141903"/>
+                  <a:pt x="195426" y="137734"/>
+                </a:cubicBezTo>
+                <a:cubicBezTo>
+                  <a:pt x="195580" y="133948"/>
+                  <a:pt x="194703" y="130192"/>
+                  <a:pt x="192887" y="126867"/>
+                </a:cubicBezTo>
+                <a:cubicBezTo>
+                  <a:pt x="191300" y="124156"/>
+                  <a:pt x="189067" y="121880"/>
+                  <a:pt x="186388" y="120239"/>
+                </a:cubicBezTo>
+                <a:cubicBezTo>
+                  <a:pt x="183752" y="118641"/>
+                  <a:pt x="180854" y="117519"/>
+                  <a:pt x="177829" y="116925"/>
+                </a:cubicBezTo>
+                <a:cubicBezTo>
+                  <a:pt x="174888" y="116322"/>
+                  <a:pt x="171895" y="116011"/>
+                  <a:pt x="168894" y="115997"/>
+                </a:cubicBezTo>
+                <a:cubicBezTo>
+                  <a:pt x="162425" y="116056"/>
+                  <a:pt x="155995" y="116994"/>
+                  <a:pt x="149779" y="118782"/>
+                </a:cubicBezTo>
+                <a:cubicBezTo>
+                  <a:pt x="143302" y="120539"/>
+                  <a:pt x="137158" y="123349"/>
+                  <a:pt x="131593" y="127100"/>
+                </a:cubicBezTo>
+                <a:lnTo>
+                  <a:pt x="131593" y="105232"/>
+                </a:lnTo>
+                <a:cubicBezTo>
+                  <a:pt x="137363" y="102174"/>
+                  <a:pt x="143524" y="99918"/>
+                  <a:pt x="149904" y="98525"/>
+                </a:cubicBezTo>
+                <a:cubicBezTo>
+                  <a:pt x="156862" y="97003"/>
+                  <a:pt x="163967" y="96254"/>
+                  <a:pt x="171089" y="96292"/>
+                </a:cubicBezTo>
+                <a:cubicBezTo>
+                  <a:pt x="177452" y="96281"/>
+                  <a:pt x="183792" y="97031"/>
+                  <a:pt x="189976" y="98525"/>
+                </a:cubicBezTo>
+                <a:cubicBezTo>
+                  <a:pt x="195741" y="99874"/>
+                  <a:pt x="201235" y="102194"/>
+                  <a:pt x="206222" y="105386"/>
+                </a:cubicBezTo>
+                <a:cubicBezTo>
+                  <a:pt x="210849" y="108367"/>
+                  <a:pt x="214726" y="112374"/>
+                  <a:pt x="217553" y="117097"/>
+                </a:cubicBezTo>
+                <a:cubicBezTo>
+                  <a:pt x="220473" y="122204"/>
+                  <a:pt x="221937" y="128014"/>
+                  <a:pt x="221786" y="133895"/>
+                </a:cubicBezTo>
+                <a:cubicBezTo>
+                  <a:pt x="222154" y="143140"/>
+                  <a:pt x="218987" y="152179"/>
+                  <a:pt x="212930" y="159174"/>
+                </a:cubicBezTo>
+                <a:cubicBezTo>
+                  <a:pt x="206443" y="166077"/>
+                  <a:pt x="197951" y="170766"/>
+                  <a:pt x="188653" y="172579"/>
+                </a:cubicBezTo>
+                <a:cubicBezTo>
+                  <a:pt x="193688" y="173099"/>
+                  <a:pt x="198620" y="174350"/>
+                  <a:pt x="203293" y="176293"/>
+                </a:cubicBezTo>
+                <a:cubicBezTo>
+                  <a:pt x="207887" y="178167"/>
+                  <a:pt x="212134" y="180798"/>
+                  <a:pt x="215858" y="184077"/>
+                </a:cubicBezTo>
+                <a:cubicBezTo>
+                  <a:pt x="219473" y="187276"/>
+                  <a:pt x="222430" y="191150"/>
+                  <a:pt x="224562" y="195481"/>
+                </a:cubicBezTo>
+                <a:cubicBezTo>
+                  <a:pt x="226751" y="199967"/>
+                  <a:pt x="227864" y="204902"/>
+                  <a:pt x="227811" y="209894"/>
+                </a:cubicBezTo>
+                <a:cubicBezTo>
+                  <a:pt x="227957" y="216878"/>
+                  <a:pt x="226277" y="223778"/>
+                  <a:pt x="222937" y="229914"/>
+                </a:cubicBezTo>
+                <a:close/>
+              </a:path>
+            </a:pathLst>
+          </a:custGeom>
+          <a:solidFill>
+            <a:srgbClr val="7030A0"/>
+          </a:solidFill>
+          <a:ln w="4564" cap="flat">
+            <a:noFill/>
+            <a:prstDash val="solid"/>
+            <a:miter/>
+          </a:ln>
+        </p:spPr>
+        <p:txBody>
+          <a:bodyPr/>
+          <a:lstStyle/>
+          <a:p>
+            <a:endParaRPr lang="ko-KR" altLang="en-US"/>
+          </a:p>
+        </p:txBody>
+      </p:sp>
+      <p:sp>
+        <p:nvSpPr>
+          <p:cNvPr id="48" name="그래픽 44" descr="배지 5 단색으로 채워진">
+            <a:extLst>
+              <a:ext uri="{FF2B5EF4-FFF2-40B4-BE49-F238E27FC236}">
+                <a16:creationId xmlns:a16="http://schemas.microsoft.com/office/drawing/2014/main" id="{CC988554-8A06-5541-0B75-E4689ED6DB1E}"/>
+              </a:ext>
+            </a:extLst>
+          </p:cNvPr>
+          <p:cNvSpPr/>
+          <p:nvPr/>
+        </p:nvSpPr>
+        <p:spPr>
+          <a:xfrm>
+            <a:off x="5837990" y="5596674"/>
+            <a:ext cx="380209" cy="389963"/>
+          </a:xfrm>
+          <a:custGeom>
+            <a:avLst/>
+            <a:gdLst>
+              <a:gd name="csX0" fmla="*/ 361750 w 723499"/>
+              <a:gd name="csY0" fmla="*/ 0 h 723500"/>
+              <a:gd name="csX1" fmla="*/ 0 w 723499"/>
+              <a:gd name="csY1" fmla="*/ 361750 h 723500"/>
+              <a:gd name="csX2" fmla="*/ 361750 w 723499"/>
+              <a:gd name="csY2" fmla="*/ 723500 h 723500"/>
+              <a:gd name="csX3" fmla="*/ 723500 w 723499"/>
+              <a:gd name="csY3" fmla="*/ 361750 h 723500"/>
+              <a:gd name="csX4" fmla="*/ 362093 w 723499"/>
+              <a:gd name="csY4" fmla="*/ 0 h 723500"/>
+              <a:gd name="csX5" fmla="*/ 361750 w 723499"/>
+              <a:gd name="csY5" fmla="*/ 0 h 723500"/>
+              <a:gd name="csX6" fmla="*/ 468735 w 723499"/>
+              <a:gd name="csY6" fmla="*/ 461420 h 723500"/>
+              <a:gd name="csX7" fmla="*/ 439007 w 723499"/>
+              <a:gd name="csY7" fmla="*/ 493205 h 723500"/>
+              <a:gd name="csX8" fmla="*/ 396478 w 723499"/>
+              <a:gd name="csY8" fmla="*/ 511540 h 723500"/>
+              <a:gd name="csX9" fmla="*/ 346510 w 723499"/>
+              <a:gd name="csY9" fmla="*/ 517389 h 723500"/>
+              <a:gd name="csX10" fmla="*/ 268405 w 723499"/>
+              <a:gd name="csY10" fmla="*/ 504111 h 723500"/>
+              <a:gd name="csX11" fmla="*/ 268405 w 723499"/>
+              <a:gd name="csY11" fmla="*/ 456362 h 723500"/>
+              <a:gd name="csX12" fmla="*/ 347139 w 723499"/>
+              <a:gd name="csY12" fmla="*/ 477250 h 723500"/>
+              <a:gd name="csX13" fmla="*/ 378771 w 723499"/>
+              <a:gd name="csY13" fmla="*/ 473440 h 723500"/>
+              <a:gd name="csX14" fmla="*/ 403898 w 723499"/>
+              <a:gd name="csY14" fmla="*/ 462010 h 723500"/>
+              <a:gd name="csX15" fmla="*/ 426520 w 723499"/>
+              <a:gd name="csY15" fmla="*/ 417100 h 723500"/>
+              <a:gd name="csX16" fmla="*/ 419395 w 723499"/>
+              <a:gd name="csY16" fmla="*/ 391325 h 723500"/>
+              <a:gd name="csX17" fmla="*/ 400422 w 723499"/>
+              <a:gd name="csY17" fmla="*/ 373771 h 723500"/>
+              <a:gd name="csX18" fmla="*/ 372799 w 723499"/>
+              <a:gd name="csY18" fmla="*/ 363655 h 723500"/>
+              <a:gd name="csX19" fmla="*/ 339585 w 723499"/>
+              <a:gd name="csY19" fmla="*/ 360493 h 723500"/>
+              <a:gd name="csX20" fmla="*/ 280445 w 723499"/>
+              <a:gd name="csY20" fmla="*/ 363350 h 723500"/>
+              <a:gd name="csX21" fmla="*/ 296228 w 723499"/>
+              <a:gd name="csY21" fmla="*/ 194501 h 723500"/>
+              <a:gd name="csX22" fmla="*/ 462915 w 723499"/>
+              <a:gd name="csY22" fmla="*/ 194501 h 723500"/>
+              <a:gd name="csX23" fmla="*/ 462915 w 723499"/>
+              <a:gd name="csY23" fmla="*/ 236877 h 723500"/>
+              <a:gd name="csX24" fmla="*/ 343348 w 723499"/>
+              <a:gd name="csY24" fmla="*/ 236877 h 723500"/>
+              <a:gd name="csX25" fmla="*/ 335128 w 723499"/>
+              <a:gd name="csY25" fmla="*/ 320373 h 723500"/>
+              <a:gd name="csX26" fmla="*/ 341452 w 723499"/>
+              <a:gd name="csY26" fmla="*/ 319897 h 723500"/>
+              <a:gd name="csX27" fmla="*/ 344757 w 723499"/>
+              <a:gd name="csY27" fmla="*/ 319583 h 723500"/>
+              <a:gd name="csX28" fmla="*/ 347777 w 723499"/>
+              <a:gd name="csY28" fmla="*/ 319421 h 723500"/>
+              <a:gd name="csX29" fmla="*/ 353149 w 723499"/>
+              <a:gd name="csY29" fmla="*/ 319421 h 723500"/>
+              <a:gd name="csX30" fmla="*/ 401222 w 723499"/>
+              <a:gd name="csY30" fmla="*/ 324641 h 723500"/>
+              <a:gd name="csX31" fmla="*/ 441703 w 723499"/>
+              <a:gd name="csY31" fmla="*/ 341243 h 723500"/>
+              <a:gd name="csX32" fmla="*/ 469583 w 723499"/>
+              <a:gd name="csY32" fmla="*/ 370818 h 723500"/>
+              <a:gd name="csX33" fmla="*/ 480060 w 723499"/>
+              <a:gd name="csY33" fmla="*/ 414938 h 723500"/>
+              <a:gd name="csX34" fmla="*/ 468735 w 723499"/>
+              <a:gd name="csY34" fmla="*/ 461420 h 723500"/>
+            </a:gdLst>
+            <a:ahLst/>
+            <a:cxnLst>
+              <a:cxn ang="0">
+                <a:pos x="csX0" y="csY0"/>
+              </a:cxn>
+              <a:cxn ang="0">
+                <a:pos x="csX1" y="csY1"/>
+              </a:cxn>
+              <a:cxn ang="0">
+                <a:pos x="csX2" y="csY2"/>
+              </a:cxn>
+              <a:cxn ang="0">
+                <a:pos x="csX3" y="csY3"/>
+              </a:cxn>
+              <a:cxn ang="0">
+                <a:pos x="csX4" y="csY4"/>
+              </a:cxn>
+              <a:cxn ang="0">
+                <a:pos x="csX5" y="csY5"/>
+              </a:cxn>
+              <a:cxn ang="0">
+                <a:pos x="csX6" y="csY6"/>
+              </a:cxn>
+              <a:cxn ang="0">
+                <a:pos x="csX7" y="csY7"/>
+              </a:cxn>
+              <a:cxn ang="0">
+                <a:pos x="csX8" y="csY8"/>
+              </a:cxn>
+              <a:cxn ang="0">
+                <a:pos x="csX9" y="csY9"/>
+              </a:cxn>
+              <a:cxn ang="0">
+                <a:pos x="csX10" y="csY10"/>
+              </a:cxn>
+              <a:cxn ang="0">
+                <a:pos x="csX11" y="csY11"/>
+              </a:cxn>
+              <a:cxn ang="0">
+                <a:pos x="csX12" y="csY12"/>
+              </a:cxn>
+              <a:cxn ang="0">
+                <a:pos x="csX13" y="csY13"/>
+              </a:cxn>
+              <a:cxn ang="0">
+                <a:pos x="csX14" y="csY14"/>
+              </a:cxn>
+              <a:cxn ang="0">
+                <a:pos x="csX15" y="csY15"/>
+              </a:cxn>
+              <a:cxn ang="0">
+                <a:pos x="csX16" y="csY16"/>
+              </a:cxn>
+              <a:cxn ang="0">
+                <a:pos x="csX17" y="csY17"/>
+              </a:cxn>
+              <a:cxn ang="0">
+                <a:pos x="csX18" y="csY18"/>
+              </a:cxn>
+              <a:cxn ang="0">
+                <a:pos x="csX19" y="csY19"/>
+              </a:cxn>
+              <a:cxn ang="0">
+                <a:pos x="csX20" y="csY20"/>
+              </a:cxn>
+              <a:cxn ang="0">
+                <a:pos x="csX21" y="csY21"/>
+              </a:cxn>
+              <a:cxn ang="0">
+                <a:pos x="csX22" y="csY22"/>
+              </a:cxn>
+              <a:cxn ang="0">
+                <a:pos x="csX23" y="csY23"/>
+              </a:cxn>
+              <a:cxn ang="0">
+                <a:pos x="csX24" y="csY24"/>
+              </a:cxn>
+              <a:cxn ang="0">
+                <a:pos x="csX25" y="csY25"/>
+              </a:cxn>
+              <a:cxn ang="0">
+                <a:pos x="csX26" y="csY26"/>
+              </a:cxn>
+              <a:cxn ang="0">
+                <a:pos x="csX27" y="csY27"/>
+              </a:cxn>
+              <a:cxn ang="0">
+                <a:pos x="csX28" y="csY28"/>
+              </a:cxn>
+              <a:cxn ang="0">
+                <a:pos x="csX29" y="csY29"/>
+              </a:cxn>
+              <a:cxn ang="0">
+                <a:pos x="csX30" y="csY30"/>
+              </a:cxn>
+              <a:cxn ang="0">
+                <a:pos x="csX31" y="csY31"/>
+              </a:cxn>
+              <a:cxn ang="0">
+                <a:pos x="csX32" y="csY32"/>
+              </a:cxn>
+              <a:cxn ang="0">
+                <a:pos x="csX33" y="csY33"/>
+              </a:cxn>
+              <a:cxn ang="0">
+                <a:pos x="csX34" y="csY34"/>
+              </a:cxn>
+            </a:cxnLst>
+            <a:rect l="l" t="t" r="r" b="b"/>
+            <a:pathLst>
+              <a:path w="723499" h="723500">
+                <a:moveTo>
+                  <a:pt x="361750" y="0"/>
+                </a:moveTo>
+                <a:cubicBezTo>
+                  <a:pt x="161961" y="0"/>
+                  <a:pt x="0" y="161961"/>
+                  <a:pt x="0" y="361750"/>
+                </a:cubicBezTo>
+                <a:cubicBezTo>
+                  <a:pt x="0" y="561539"/>
+                  <a:pt x="161961" y="723500"/>
+                  <a:pt x="361750" y="723500"/>
+                </a:cubicBezTo>
+                <a:cubicBezTo>
+                  <a:pt x="561539" y="723500"/>
+                  <a:pt x="723500" y="561539"/>
+                  <a:pt x="723500" y="361750"/>
+                </a:cubicBezTo>
+                <a:cubicBezTo>
+                  <a:pt x="723594" y="162056"/>
+                  <a:pt x="561787" y="94"/>
+                  <a:pt x="362093" y="0"/>
+                </a:cubicBezTo>
+                <a:cubicBezTo>
+                  <a:pt x="361979" y="0"/>
+                  <a:pt x="361864" y="0"/>
+                  <a:pt x="361750" y="0"/>
+                </a:cubicBezTo>
+                <a:close/>
+                <a:moveTo>
+                  <a:pt x="468735" y="461420"/>
+                </a:moveTo>
+                <a:cubicBezTo>
+                  <a:pt x="461383" y="474146"/>
+                  <a:pt x="451215" y="485020"/>
+                  <a:pt x="439007" y="493205"/>
+                </a:cubicBezTo>
+                <a:cubicBezTo>
+                  <a:pt x="426041" y="501810"/>
+                  <a:pt x="411637" y="508021"/>
+                  <a:pt x="396478" y="511540"/>
+                </a:cubicBezTo>
+                <a:cubicBezTo>
+                  <a:pt x="380116" y="515480"/>
+                  <a:pt x="363340" y="517444"/>
+                  <a:pt x="346510" y="517389"/>
+                </a:cubicBezTo>
+                <a:cubicBezTo>
+                  <a:pt x="311725" y="517389"/>
+                  <a:pt x="285690" y="512962"/>
+                  <a:pt x="268405" y="504111"/>
+                </a:cubicBezTo>
+                <a:lnTo>
+                  <a:pt x="268405" y="456362"/>
+                </a:lnTo>
+                <a:cubicBezTo>
+                  <a:pt x="292490" y="469799"/>
+                  <a:pt x="319560" y="476981"/>
+                  <a:pt x="347139" y="477250"/>
+                </a:cubicBezTo>
+                <a:cubicBezTo>
+                  <a:pt x="357802" y="477335"/>
+                  <a:pt x="368433" y="476055"/>
+                  <a:pt x="378771" y="473440"/>
+                </a:cubicBezTo>
+                <a:cubicBezTo>
+                  <a:pt x="387779" y="471209"/>
+                  <a:pt x="396297" y="467334"/>
+                  <a:pt x="403898" y="462010"/>
+                </a:cubicBezTo>
+                <a:cubicBezTo>
+                  <a:pt x="418546" y="451826"/>
+                  <a:pt x="427055" y="434932"/>
+                  <a:pt x="426520" y="417100"/>
+                </a:cubicBezTo>
+                <a:cubicBezTo>
+                  <a:pt x="426800" y="407986"/>
+                  <a:pt x="424316" y="399001"/>
+                  <a:pt x="419395" y="391325"/>
+                </a:cubicBezTo>
+                <a:cubicBezTo>
+                  <a:pt x="414483" y="384111"/>
+                  <a:pt x="407995" y="378108"/>
+                  <a:pt x="400422" y="373771"/>
+                </a:cubicBezTo>
+                <a:cubicBezTo>
+                  <a:pt x="391841" y="368884"/>
+                  <a:pt x="382506" y="365465"/>
+                  <a:pt x="372799" y="363655"/>
+                </a:cubicBezTo>
+                <a:cubicBezTo>
+                  <a:pt x="361859" y="361511"/>
+                  <a:pt x="350733" y="360452"/>
+                  <a:pt x="339585" y="360493"/>
+                </a:cubicBezTo>
+                <a:cubicBezTo>
+                  <a:pt x="328841" y="360493"/>
+                  <a:pt x="309127" y="361445"/>
+                  <a:pt x="280445" y="363350"/>
+                </a:cubicBezTo>
+                <a:lnTo>
+                  <a:pt x="296228" y="194501"/>
+                </a:lnTo>
+                <a:lnTo>
+                  <a:pt x="462915" y="194501"/>
+                </a:lnTo>
+                <a:lnTo>
+                  <a:pt x="462915" y="236877"/>
+                </a:lnTo>
+                <a:lnTo>
+                  <a:pt x="343348" y="236877"/>
+                </a:lnTo>
+                <a:lnTo>
+                  <a:pt x="335128" y="320373"/>
+                </a:lnTo>
+                <a:cubicBezTo>
+                  <a:pt x="338061" y="320164"/>
+                  <a:pt x="340185" y="320002"/>
+                  <a:pt x="341452" y="319897"/>
+                </a:cubicBezTo>
+                <a:cubicBezTo>
+                  <a:pt x="342719" y="319792"/>
+                  <a:pt x="343814" y="319688"/>
+                  <a:pt x="344757" y="319583"/>
+                </a:cubicBezTo>
+                <a:cubicBezTo>
+                  <a:pt x="345760" y="319473"/>
+                  <a:pt x="346768" y="319420"/>
+                  <a:pt x="347777" y="319421"/>
+                </a:cubicBezTo>
+                <a:lnTo>
+                  <a:pt x="353149" y="319421"/>
+                </a:lnTo>
+                <a:cubicBezTo>
+                  <a:pt x="369318" y="319370"/>
+                  <a:pt x="385441" y="321121"/>
+                  <a:pt x="401222" y="324641"/>
+                </a:cubicBezTo>
+                <a:cubicBezTo>
+                  <a:pt x="415602" y="327704"/>
+                  <a:pt x="429313" y="333327"/>
+                  <a:pt x="441703" y="341243"/>
+                </a:cubicBezTo>
+                <a:cubicBezTo>
+                  <a:pt x="453223" y="348734"/>
+                  <a:pt x="462784" y="358875"/>
+                  <a:pt x="469583" y="370818"/>
+                </a:cubicBezTo>
+                <a:cubicBezTo>
+                  <a:pt x="476898" y="384345"/>
+                  <a:pt x="480512" y="399565"/>
+                  <a:pt x="480060" y="414938"/>
+                </a:cubicBezTo>
+                <a:cubicBezTo>
+                  <a:pt x="480499" y="431164"/>
+                  <a:pt x="476589" y="447213"/>
+                  <a:pt x="468735" y="461420"/>
+                </a:cubicBezTo>
+                <a:close/>
+              </a:path>
+            </a:pathLst>
+          </a:custGeom>
+          <a:solidFill>
+            <a:srgbClr val="7030A0"/>
+          </a:solidFill>
+          <a:ln w="9525" cap="flat">
+            <a:noFill/>
+            <a:prstDash val="solid"/>
+            <a:miter/>
+          </a:ln>
+        </p:spPr>
+        <p:txBody>
+          <a:bodyPr/>
+          <a:lstStyle/>
+          <a:p>
+            <a:endParaRPr lang="ko-KR" altLang="en-US"/>
+          </a:p>
+        </p:txBody>
+      </p:sp>
+      <p:pic>
+        <p:nvPicPr>
+          <p:cNvPr id="53" name="그림 52">
+            <a:extLst>
+              <a:ext uri="{FF2B5EF4-FFF2-40B4-BE49-F238E27FC236}">
+                <a16:creationId xmlns:a16="http://schemas.microsoft.com/office/drawing/2014/main" id="{32A6F23D-4C0B-4EA2-8C8A-379625CF6106}"/>
+              </a:ext>
+            </a:extLst>
+          </p:cNvPr>
+          <p:cNvPicPr>
+            <a:picLocks noChangeAspect="1"/>
+          </p:cNvPicPr>
+          <p:nvPr/>
+        </p:nvPicPr>
+        <p:blipFill>
+          <a:blip r:embed="rId4"/>
+          <a:stretch>
+            <a:fillRect/>
+          </a:stretch>
+        </p:blipFill>
+        <p:spPr>
+          <a:xfrm>
+            <a:off x="5830623" y="4554305"/>
+            <a:ext cx="387752" cy="387752"/>
+          </a:xfrm>
+          <a:prstGeom prst="rect">
+            <a:avLst/>
+          </a:prstGeom>
+        </p:spPr>
+      </p:pic>
+      <p:sp>
+        <p:nvSpPr>
+          <p:cNvPr id="55" name="그래픽 44" descr="배지 5 단색으로 채워진">
+            <a:extLst>
+              <a:ext uri="{FF2B5EF4-FFF2-40B4-BE49-F238E27FC236}">
+                <a16:creationId xmlns:a16="http://schemas.microsoft.com/office/drawing/2014/main" id="{D0352FE1-A545-F535-9EFC-EC43B4D8132F}"/>
+              </a:ext>
+            </a:extLst>
+          </p:cNvPr>
+          <p:cNvSpPr/>
+          <p:nvPr/>
+        </p:nvSpPr>
+        <p:spPr>
+          <a:xfrm>
+            <a:off x="1480165" y="3612107"/>
+            <a:ext cx="380209" cy="389963"/>
+          </a:xfrm>
+          <a:custGeom>
+            <a:avLst/>
+            <a:gdLst>
+              <a:gd name="csX0" fmla="*/ 361750 w 723499"/>
+              <a:gd name="csY0" fmla="*/ 0 h 723500"/>
+              <a:gd name="csX1" fmla="*/ 0 w 723499"/>
+              <a:gd name="csY1" fmla="*/ 361750 h 723500"/>
+              <a:gd name="csX2" fmla="*/ 361750 w 723499"/>
+              <a:gd name="csY2" fmla="*/ 723500 h 723500"/>
+              <a:gd name="csX3" fmla="*/ 723500 w 723499"/>
+              <a:gd name="csY3" fmla="*/ 361750 h 723500"/>
+              <a:gd name="csX4" fmla="*/ 362093 w 723499"/>
+              <a:gd name="csY4" fmla="*/ 0 h 723500"/>
+              <a:gd name="csX5" fmla="*/ 361750 w 723499"/>
+              <a:gd name="csY5" fmla="*/ 0 h 723500"/>
+              <a:gd name="csX6" fmla="*/ 468735 w 723499"/>
+              <a:gd name="csY6" fmla="*/ 461420 h 723500"/>
+              <a:gd name="csX7" fmla="*/ 439007 w 723499"/>
+              <a:gd name="csY7" fmla="*/ 493205 h 723500"/>
+              <a:gd name="csX8" fmla="*/ 396478 w 723499"/>
+              <a:gd name="csY8" fmla="*/ 511540 h 723500"/>
+              <a:gd name="csX9" fmla="*/ 346510 w 723499"/>
+              <a:gd name="csY9" fmla="*/ 517389 h 723500"/>
+              <a:gd name="csX10" fmla="*/ 268405 w 723499"/>
+              <a:gd name="csY10" fmla="*/ 504111 h 723500"/>
+              <a:gd name="csX11" fmla="*/ 268405 w 723499"/>
+              <a:gd name="csY11" fmla="*/ 456362 h 723500"/>
+              <a:gd name="csX12" fmla="*/ 347139 w 723499"/>
+              <a:gd name="csY12" fmla="*/ 477250 h 723500"/>
+              <a:gd name="csX13" fmla="*/ 378771 w 723499"/>
+              <a:gd name="csY13" fmla="*/ 473440 h 723500"/>
+              <a:gd name="csX14" fmla="*/ 403898 w 723499"/>
+              <a:gd name="csY14" fmla="*/ 462010 h 723500"/>
+              <a:gd name="csX15" fmla="*/ 426520 w 723499"/>
+              <a:gd name="csY15" fmla="*/ 417100 h 723500"/>
+              <a:gd name="csX16" fmla="*/ 419395 w 723499"/>
+              <a:gd name="csY16" fmla="*/ 391325 h 723500"/>
+              <a:gd name="csX17" fmla="*/ 400422 w 723499"/>
+              <a:gd name="csY17" fmla="*/ 373771 h 723500"/>
+              <a:gd name="csX18" fmla="*/ 372799 w 723499"/>
+              <a:gd name="csY18" fmla="*/ 363655 h 723500"/>
+              <a:gd name="csX19" fmla="*/ 339585 w 723499"/>
+              <a:gd name="csY19" fmla="*/ 360493 h 723500"/>
+              <a:gd name="csX20" fmla="*/ 280445 w 723499"/>
+              <a:gd name="csY20" fmla="*/ 363350 h 723500"/>
+              <a:gd name="csX21" fmla="*/ 296228 w 723499"/>
+              <a:gd name="csY21" fmla="*/ 194501 h 723500"/>
+              <a:gd name="csX22" fmla="*/ 462915 w 723499"/>
+              <a:gd name="csY22" fmla="*/ 194501 h 723500"/>
+              <a:gd name="csX23" fmla="*/ 462915 w 723499"/>
+              <a:gd name="csY23" fmla="*/ 236877 h 723500"/>
+              <a:gd name="csX24" fmla="*/ 343348 w 723499"/>
+              <a:gd name="csY24" fmla="*/ 236877 h 723500"/>
+              <a:gd name="csX25" fmla="*/ 335128 w 723499"/>
+              <a:gd name="csY25" fmla="*/ 320373 h 723500"/>
+              <a:gd name="csX26" fmla="*/ 341452 w 723499"/>
+              <a:gd name="csY26" fmla="*/ 319897 h 723500"/>
+              <a:gd name="csX27" fmla="*/ 344757 w 723499"/>
+              <a:gd name="csY27" fmla="*/ 319583 h 723500"/>
+              <a:gd name="csX28" fmla="*/ 347777 w 723499"/>
+              <a:gd name="csY28" fmla="*/ 319421 h 723500"/>
+              <a:gd name="csX29" fmla="*/ 353149 w 723499"/>
+              <a:gd name="csY29" fmla="*/ 319421 h 723500"/>
+              <a:gd name="csX30" fmla="*/ 401222 w 723499"/>
+              <a:gd name="csY30" fmla="*/ 324641 h 723500"/>
+              <a:gd name="csX31" fmla="*/ 441703 w 723499"/>
+              <a:gd name="csY31" fmla="*/ 341243 h 723500"/>
+              <a:gd name="csX32" fmla="*/ 469583 w 723499"/>
+              <a:gd name="csY32" fmla="*/ 370818 h 723500"/>
+              <a:gd name="csX33" fmla="*/ 480060 w 723499"/>
+              <a:gd name="csY33" fmla="*/ 414938 h 723500"/>
+              <a:gd name="csX34" fmla="*/ 468735 w 723499"/>
+              <a:gd name="csY34" fmla="*/ 461420 h 723500"/>
+            </a:gdLst>
+            <a:ahLst/>
+            <a:cxnLst>
+              <a:cxn ang="0">
+                <a:pos x="csX0" y="csY0"/>
+              </a:cxn>
+              <a:cxn ang="0">
+                <a:pos x="csX1" y="csY1"/>
+              </a:cxn>
+              <a:cxn ang="0">
+                <a:pos x="csX2" y="csY2"/>
+              </a:cxn>
+              <a:cxn ang="0">
+                <a:pos x="csX3" y="csY3"/>
+              </a:cxn>
+              <a:cxn ang="0">
+                <a:pos x="csX4" y="csY4"/>
+              </a:cxn>
+              <a:cxn ang="0">
+                <a:pos x="csX5" y="csY5"/>
+              </a:cxn>
+              <a:cxn ang="0">
+                <a:pos x="csX6" y="csY6"/>
+              </a:cxn>
+              <a:cxn ang="0">
+                <a:pos x="csX7" y="csY7"/>
+              </a:cxn>
+              <a:cxn ang="0">
+                <a:pos x="csX8" y="csY8"/>
+              </a:cxn>
+              <a:cxn ang="0">
+                <a:pos x="csX9" y="csY9"/>
+              </a:cxn>
+              <a:cxn ang="0">
+                <a:pos x="csX10" y="csY10"/>
+              </a:cxn>
+              <a:cxn ang="0">
+                <a:pos x="csX11" y="csY11"/>
+              </a:cxn>
+              <a:cxn ang="0">
+                <a:pos x="csX12" y="csY12"/>
+              </a:cxn>
+              <a:cxn ang="0">
+                <a:pos x="csX13" y="csY13"/>
+              </a:cxn>
+              <a:cxn ang="0">
+                <a:pos x="csX14" y="csY14"/>
+              </a:cxn>
+              <a:cxn ang="0">
+                <a:pos x="csX15" y="csY15"/>
+              </a:cxn>
+              <a:cxn ang="0">
+                <a:pos x="csX16" y="csY16"/>
+              </a:cxn>
+              <a:cxn ang="0">
+                <a:pos x="csX17" y="csY17"/>
+              </a:cxn>
+              <a:cxn ang="0">
+                <a:pos x="csX18" y="csY18"/>
+              </a:cxn>
+              <a:cxn ang="0">
+                <a:pos x="csX19" y="csY19"/>
+              </a:cxn>
+              <a:cxn ang="0">
+                <a:pos x="csX20" y="csY20"/>
+              </a:cxn>
+              <a:cxn ang="0">
+                <a:pos x="csX21" y="csY21"/>
+              </a:cxn>
+              <a:cxn ang="0">
+                <a:pos x="csX22" y="csY22"/>
+              </a:cxn>
+              <a:cxn ang="0">
+                <a:pos x="csX23" y="csY23"/>
+              </a:cxn>
+              <a:cxn ang="0">
+                <a:pos x="csX24" y="csY24"/>
+              </a:cxn>
+              <a:cxn ang="0">
+                <a:pos x="csX25" y="csY25"/>
+              </a:cxn>
+              <a:cxn ang="0">
+                <a:pos x="csX26" y="csY26"/>
+              </a:cxn>
+              <a:cxn ang="0">
+                <a:pos x="csX27" y="csY27"/>
+              </a:cxn>
+              <a:cxn ang="0">
+                <a:pos x="csX28" y="csY28"/>
+              </a:cxn>
+              <a:cxn ang="0">
+                <a:pos x="csX29" y="csY29"/>
+              </a:cxn>
+              <a:cxn ang="0">
+                <a:pos x="csX30" y="csY30"/>
+              </a:cxn>
+              <a:cxn ang="0">
+                <a:pos x="csX31" y="csY31"/>
+              </a:cxn>
+              <a:cxn ang="0">
+                <a:pos x="csX32" y="csY32"/>
+              </a:cxn>
+              <a:cxn ang="0">
+                <a:pos x="csX33" y="csY33"/>
+              </a:cxn>
+              <a:cxn ang="0">
+                <a:pos x="csX34" y="csY34"/>
+              </a:cxn>
+            </a:cxnLst>
+            <a:rect l="l" t="t" r="r" b="b"/>
+            <a:pathLst>
+              <a:path w="723499" h="723500">
+                <a:moveTo>
+                  <a:pt x="361750" y="0"/>
+                </a:moveTo>
+                <a:cubicBezTo>
+                  <a:pt x="161961" y="0"/>
+                  <a:pt x="0" y="161961"/>
+                  <a:pt x="0" y="361750"/>
+                </a:cubicBezTo>
+                <a:cubicBezTo>
+                  <a:pt x="0" y="561539"/>
+                  <a:pt x="161961" y="723500"/>
+                  <a:pt x="361750" y="723500"/>
+                </a:cubicBezTo>
+                <a:cubicBezTo>
+                  <a:pt x="561539" y="723500"/>
+                  <a:pt x="723500" y="561539"/>
+                  <a:pt x="723500" y="361750"/>
+                </a:cubicBezTo>
+                <a:cubicBezTo>
+                  <a:pt x="723594" y="162056"/>
+                  <a:pt x="561787" y="94"/>
+                  <a:pt x="362093" y="0"/>
+                </a:cubicBezTo>
+                <a:cubicBezTo>
+                  <a:pt x="361979" y="0"/>
+                  <a:pt x="361864" y="0"/>
+                  <a:pt x="361750" y="0"/>
+                </a:cubicBezTo>
+                <a:close/>
+                <a:moveTo>
+                  <a:pt x="468735" y="461420"/>
+                </a:moveTo>
+                <a:cubicBezTo>
+                  <a:pt x="461383" y="474146"/>
+                  <a:pt x="451215" y="485020"/>
+                  <a:pt x="439007" y="493205"/>
+                </a:cubicBezTo>
+                <a:cubicBezTo>
+                  <a:pt x="426041" y="501810"/>
+                  <a:pt x="411637" y="508021"/>
+                  <a:pt x="396478" y="511540"/>
+                </a:cubicBezTo>
+                <a:cubicBezTo>
+                  <a:pt x="380116" y="515480"/>
+                  <a:pt x="363340" y="517444"/>
+                  <a:pt x="346510" y="517389"/>
+                </a:cubicBezTo>
+                <a:cubicBezTo>
+                  <a:pt x="311725" y="517389"/>
+                  <a:pt x="285690" y="512962"/>
+                  <a:pt x="268405" y="504111"/>
+                </a:cubicBezTo>
+                <a:lnTo>
+                  <a:pt x="268405" y="456362"/>
+                </a:lnTo>
+                <a:cubicBezTo>
+                  <a:pt x="292490" y="469799"/>
+                  <a:pt x="319560" y="476981"/>
+                  <a:pt x="347139" y="477250"/>
+                </a:cubicBezTo>
+                <a:cubicBezTo>
+                  <a:pt x="357802" y="477335"/>
+                  <a:pt x="368433" y="476055"/>
+                  <a:pt x="378771" y="473440"/>
+                </a:cubicBezTo>
+                <a:cubicBezTo>
+                  <a:pt x="387779" y="471209"/>
+                  <a:pt x="396297" y="467334"/>
+                  <a:pt x="403898" y="462010"/>
+                </a:cubicBezTo>
+                <a:cubicBezTo>
+                  <a:pt x="418546" y="451826"/>
+                  <a:pt x="427055" y="434932"/>
+                  <a:pt x="426520" y="417100"/>
+                </a:cubicBezTo>
+                <a:cubicBezTo>
+                  <a:pt x="426800" y="407986"/>
+                  <a:pt x="424316" y="399001"/>
+                  <a:pt x="419395" y="391325"/>
+                </a:cubicBezTo>
+                <a:cubicBezTo>
+                  <a:pt x="414483" y="384111"/>
+                  <a:pt x="407995" y="378108"/>
+                  <a:pt x="400422" y="373771"/>
+                </a:cubicBezTo>
+                <a:cubicBezTo>
+                  <a:pt x="391841" y="368884"/>
+                  <a:pt x="382506" y="365465"/>
+                  <a:pt x="372799" y="363655"/>
+                </a:cubicBezTo>
+                <a:cubicBezTo>
+                  <a:pt x="361859" y="361511"/>
+                  <a:pt x="350733" y="360452"/>
+                  <a:pt x="339585" y="360493"/>
+                </a:cubicBezTo>
+                <a:cubicBezTo>
+                  <a:pt x="328841" y="360493"/>
+                  <a:pt x="309127" y="361445"/>
+                  <a:pt x="280445" y="363350"/>
+                </a:cubicBezTo>
+                <a:lnTo>
+                  <a:pt x="296228" y="194501"/>
+                </a:lnTo>
+                <a:lnTo>
+                  <a:pt x="462915" y="194501"/>
+                </a:lnTo>
+                <a:lnTo>
+                  <a:pt x="462915" y="236877"/>
+                </a:lnTo>
+                <a:lnTo>
+                  <a:pt x="343348" y="236877"/>
+                </a:lnTo>
+                <a:lnTo>
+                  <a:pt x="335128" y="320373"/>
+                </a:lnTo>
+                <a:cubicBezTo>
+                  <a:pt x="338061" y="320164"/>
+                  <a:pt x="340185" y="320002"/>
+                  <a:pt x="341452" y="319897"/>
+                </a:cubicBezTo>
+                <a:cubicBezTo>
+                  <a:pt x="342719" y="319792"/>
+                  <a:pt x="343814" y="319688"/>
+                  <a:pt x="344757" y="319583"/>
+                </a:cubicBezTo>
+                <a:cubicBezTo>
+                  <a:pt x="345760" y="319473"/>
+                  <a:pt x="346768" y="319420"/>
+                  <a:pt x="347777" y="319421"/>
+                </a:cubicBezTo>
+                <a:lnTo>
+                  <a:pt x="353149" y="319421"/>
+                </a:lnTo>
+                <a:cubicBezTo>
+                  <a:pt x="369318" y="319370"/>
+                  <a:pt x="385441" y="321121"/>
+                  <a:pt x="401222" y="324641"/>
+                </a:cubicBezTo>
+                <a:cubicBezTo>
+                  <a:pt x="415602" y="327704"/>
+                  <a:pt x="429313" y="333327"/>
+                  <a:pt x="441703" y="341243"/>
+                </a:cubicBezTo>
+                <a:cubicBezTo>
+                  <a:pt x="453223" y="348734"/>
+                  <a:pt x="462784" y="358875"/>
+                  <a:pt x="469583" y="370818"/>
+                </a:cubicBezTo>
+                <a:cubicBezTo>
+                  <a:pt x="476898" y="384345"/>
+                  <a:pt x="480512" y="399565"/>
+                  <a:pt x="480060" y="414938"/>
+                </a:cubicBezTo>
+                <a:cubicBezTo>
+                  <a:pt x="480499" y="431164"/>
+                  <a:pt x="476589" y="447213"/>
+                  <a:pt x="468735" y="461420"/>
+                </a:cubicBezTo>
+                <a:close/>
+              </a:path>
+            </a:pathLst>
+          </a:custGeom>
+          <a:solidFill>
+            <a:srgbClr val="7030A0"/>
+          </a:solidFill>
+          <a:ln w="9525" cap="flat">
+            <a:noFill/>
+            <a:prstDash val="solid"/>
+            <a:miter/>
+          </a:ln>
+        </p:spPr>
+        <p:txBody>
+          <a:bodyPr/>
+          <a:lstStyle/>
+          <a:p>
+            <a:endParaRPr lang="ko-KR" altLang="en-US"/>
+          </a:p>
+        </p:txBody>
+      </p:sp>
+      <p:pic>
+        <p:nvPicPr>
+          <p:cNvPr id="57" name="그림 56">
+            <a:extLst>
+              <a:ext uri="{FF2B5EF4-FFF2-40B4-BE49-F238E27FC236}">
+                <a16:creationId xmlns:a16="http://schemas.microsoft.com/office/drawing/2014/main" id="{D9FB4A57-A602-FD19-5938-DBA67D8B0226}"/>
+              </a:ext>
+            </a:extLst>
+          </p:cNvPr>
+          <p:cNvPicPr>
+            <a:picLocks noChangeAspect="1"/>
+          </p:cNvPicPr>
+          <p:nvPr/>
+        </p:nvPicPr>
+        <p:blipFill>
+          <a:blip r:embed="rId4"/>
+          <a:stretch>
+            <a:fillRect/>
+          </a:stretch>
+        </p:blipFill>
+        <p:spPr>
+          <a:xfrm>
+            <a:off x="2900363" y="4742247"/>
+            <a:ext cx="387752" cy="387752"/>
+          </a:xfrm>
+          <a:prstGeom prst="rect">
+            <a:avLst/>
+          </a:prstGeom>
+        </p:spPr>
+      </p:pic>
     </p:spTree>
     <p:extLst>
       <p:ext uri="{BB962C8B-B14F-4D97-AF65-F5344CB8AC3E}">

--- a/documents/HyunahKwon/design/designing/for_teammates/프로토타입_기획.pptx
+++ b/documents/HyunahKwon/design/designing/for_teammates/프로토타입_기획.pptx
@@ -6,7 +6,7 @@
     <p:sldMasterId id="2147483666" r:id="rId2"/>
   </p:sldMasterIdLst>
   <p:notesMasterIdLst>
-    <p:notesMasterId r:id="rId30"/>
+    <p:notesMasterId r:id="rId31"/>
   </p:notesMasterIdLst>
   <p:sldIdLst>
     <p:sldId id="256" r:id="rId3"/>
@@ -21,7 +21,7 @@
     <p:sldId id="273" r:id="rId12"/>
     <p:sldId id="272" r:id="rId13"/>
     <p:sldId id="279" r:id="rId14"/>
-    <p:sldId id="277" r:id="rId15"/>
+    <p:sldId id="306" r:id="rId15"/>
     <p:sldId id="304" r:id="rId16"/>
     <p:sldId id="303" r:id="rId17"/>
     <p:sldId id="262" r:id="rId18"/>
@@ -34,8 +34,9 @@
     <p:sldId id="290" r:id="rId25"/>
     <p:sldId id="297" r:id="rId26"/>
     <p:sldId id="263" r:id="rId27"/>
-    <p:sldId id="305" r:id="rId28"/>
-    <p:sldId id="270" r:id="rId29"/>
+    <p:sldId id="277" r:id="rId28"/>
+    <p:sldId id="305" r:id="rId29"/>
+    <p:sldId id="270" r:id="rId30"/>
   </p:sldIdLst>
   <p:sldSz cx="12192000" cy="6858000"/>
   <p:notesSz cx="6858000" cy="9144000"/>
@@ -6691,7 +6692,13 @@
   <p:cSld>
     <p:spTree>
       <p:nvGrpSpPr>
-        <p:cNvPr id="1" name=""/>
+        <p:cNvPr id="1" name="">
+          <a:extLst>
+            <a:ext uri="{FF2B5EF4-FFF2-40B4-BE49-F238E27FC236}">
+              <a16:creationId xmlns:a16="http://schemas.microsoft.com/office/drawing/2014/main" id="{F3076DE3-0E15-A4E3-AD51-80CFCE742219}"/>
+            </a:ext>
+          </a:extLst>
+        </p:cNvPr>
         <p:cNvGrpSpPr/>
         <p:nvPr/>
       </p:nvGrpSpPr>
@@ -6703,12 +6710,42 @@
           <a:chExt cx="0" cy="0"/>
         </a:xfrm>
       </p:grpSpPr>
+      <p:pic>
+        <p:nvPicPr>
+          <p:cNvPr id="11" name="그림 10">
+            <a:extLst>
+              <a:ext uri="{FF2B5EF4-FFF2-40B4-BE49-F238E27FC236}">
+                <a16:creationId xmlns:a16="http://schemas.microsoft.com/office/drawing/2014/main" id="{C10A5533-2494-995E-04E9-3605D14584A0}"/>
+              </a:ext>
+            </a:extLst>
+          </p:cNvPr>
+          <p:cNvPicPr>
+            <a:picLocks noChangeAspect="1"/>
+          </p:cNvPicPr>
+          <p:nvPr/>
+        </p:nvPicPr>
+        <p:blipFill>
+          <a:blip r:embed="rId2"/>
+          <a:stretch>
+            <a:fillRect/>
+          </a:stretch>
+        </p:blipFill>
+        <p:spPr>
+          <a:xfrm>
+            <a:off x="1242992" y="1529202"/>
+            <a:ext cx="4320000" cy="4320000"/>
+          </a:xfrm>
+          <a:prstGeom prst="rect">
+            <a:avLst/>
+          </a:prstGeom>
+        </p:spPr>
+      </p:pic>
       <p:sp>
         <p:nvSpPr>
           <p:cNvPr id="2" name="제목 1">
             <a:extLst>
               <a:ext uri="{FF2B5EF4-FFF2-40B4-BE49-F238E27FC236}">
-                <a16:creationId xmlns:a16="http://schemas.microsoft.com/office/drawing/2014/main" id="{C339B108-C7FB-752A-B8FF-FD74F9A33A5C}"/>
+                <a16:creationId xmlns:a16="http://schemas.microsoft.com/office/drawing/2014/main" id="{FBFF5E8E-A9CD-330E-9FC8-B676E0158B49}"/>
               </a:ext>
             </a:extLst>
           </p:cNvPr>
@@ -6726,21 +6763,112 @@
           <a:p>
             <a:r>
               <a:rPr lang="ko-KR" altLang="en-US" dirty="0"/>
-              <a:t>상호작용</a:t>
+              <a:t>경로 예측</a:t>
+            </a:r>
+          </a:p>
+        </p:txBody>
+      </p:sp>
+      <p:sp>
+        <p:nvSpPr>
+          <p:cNvPr id="4" name="내용 개체 틀 3">
+            <a:extLst>
+              <a:ext uri="{FF2B5EF4-FFF2-40B4-BE49-F238E27FC236}">
+                <a16:creationId xmlns:a16="http://schemas.microsoft.com/office/drawing/2014/main" id="{50F0538A-2066-F481-809B-FBA490AA0ABD}"/>
+              </a:ext>
+            </a:extLst>
+          </p:cNvPr>
+          <p:cNvSpPr>
+            <a:spLocks noGrp="1"/>
+          </p:cNvSpPr>
+          <p:nvPr>
+            <p:ph sz="half" idx="2"/>
+          </p:nvPr>
+        </p:nvSpPr>
+        <p:spPr/>
+        <p:txBody>
+          <a:bodyPr/>
+          <a:lstStyle/>
+          <a:p>
+            <a:pPr marL="0" indent="0">
+              <a:buNone/>
+            </a:pPr>
+            <a:r>
+              <a:rPr lang="en-US" altLang="ko-KR" dirty="0">
+                <a:sym typeface="Wingdings" panose="05000000000000000000" pitchFamily="2" charset="2"/>
+              </a:rPr>
+              <a:t> </a:t>
+            </a:r>
+            <a:r>
+              <a:rPr lang="ko-KR" altLang="en-US" dirty="0"/>
+              <a:t>도우미</a:t>
             </a:r>
             <a:r>
               <a:rPr lang="en-US" altLang="ko-KR" dirty="0"/>
-              <a:t>_</a:t>
-            </a:r>
-            <a:r>
-              <a:rPr lang="ko-KR" altLang="en-US" dirty="0" err="1"/>
-              <a:t>배달품</a:t>
-            </a:r>
-            <a:endParaRPr lang="ko-KR" altLang="en-US" dirty="0">
-              <a:solidFill>
-                <a:schemeClr val="accent3"/>
-              </a:solidFill>
-            </a:endParaRPr>
+              <a:t>UI</a:t>
+            </a:r>
+            <a:r>
+              <a:rPr lang="ko-KR" altLang="en-US" dirty="0"/>
+              <a:t>가 알려줄 수 있는 경로 시각화</a:t>
+            </a:r>
+            <a:endParaRPr lang="en-US" altLang="ko-KR" dirty="0"/>
+          </a:p>
+        </p:txBody>
+      </p:sp>
+      <p:sp>
+        <p:nvSpPr>
+          <p:cNvPr id="5" name="날짜 개체 틀 4">
+            <a:extLst>
+              <a:ext uri="{FF2B5EF4-FFF2-40B4-BE49-F238E27FC236}">
+                <a16:creationId xmlns:a16="http://schemas.microsoft.com/office/drawing/2014/main" id="{E787598D-BF01-6FA4-27BE-4C634CE2EF34}"/>
+              </a:ext>
+            </a:extLst>
+          </p:cNvPr>
+          <p:cNvSpPr>
+            <a:spLocks noGrp="1"/>
+          </p:cNvSpPr>
+          <p:nvPr>
+            <p:ph type="dt" sz="half" idx="10"/>
+          </p:nvPr>
+        </p:nvSpPr>
+        <p:spPr/>
+        <p:txBody>
+          <a:bodyPr/>
+          <a:lstStyle/>
+          <a:p>
+            <a:fld id="{492E84DF-9BBC-4DFC-AB92-EB3DF1902948}" type="datetime1">
+              <a:rPr lang="en-US" altLang="ko-KR" smtClean="0"/>
+              <a:t>9/26/2026</a:t>
+            </a:fld>
+            <a:endParaRPr lang="ko-KR" altLang="en-US"/>
+          </a:p>
+        </p:txBody>
+      </p:sp>
+      <p:sp>
+        <p:nvSpPr>
+          <p:cNvPr id="6" name="슬라이드 번호 개체 틀 5">
+            <a:extLst>
+              <a:ext uri="{FF2B5EF4-FFF2-40B4-BE49-F238E27FC236}">
+                <a16:creationId xmlns:a16="http://schemas.microsoft.com/office/drawing/2014/main" id="{B13B68A3-DC4A-32C0-16C5-C911CDA40E28}"/>
+              </a:ext>
+            </a:extLst>
+          </p:cNvPr>
+          <p:cNvSpPr>
+            <a:spLocks noGrp="1"/>
+          </p:cNvSpPr>
+          <p:nvPr>
+            <p:ph type="sldNum" sz="quarter" idx="12"/>
+          </p:nvPr>
+        </p:nvSpPr>
+        <p:spPr/>
+        <p:txBody>
+          <a:bodyPr/>
+          <a:lstStyle/>
+          <a:p>
+            <a:fld id="{4419BE51-E1DC-4D7D-A982-2D579B035180}" type="slidenum">
+              <a:rPr lang="ko-KR" altLang="en-US" smtClean="0"/>
+              <a:t>13</a:t>
+            </a:fld>
+            <a:endParaRPr lang="ko-KR" altLang="en-US"/>
           </a:p>
         </p:txBody>
       </p:sp>
@@ -6749,7 +6877,7 @@
           <p:cNvPr id="7" name="내용 개체 틀 6">
             <a:extLst>
               <a:ext uri="{FF2B5EF4-FFF2-40B4-BE49-F238E27FC236}">
-                <a16:creationId xmlns:a16="http://schemas.microsoft.com/office/drawing/2014/main" id="{EA8B8630-EB4F-A5EB-39E9-475AD1C75298}"/>
+                <a16:creationId xmlns:a16="http://schemas.microsoft.com/office/drawing/2014/main" id="{A5AEA602-BF4B-7886-C855-2581E77291B8}"/>
               </a:ext>
             </a:extLst>
           </p:cNvPr>
@@ -6772,108 +6900,12 @@
           </a:p>
         </p:txBody>
       </p:sp>
-      <p:cxnSp>
-        <p:nvCxnSpPr>
-          <p:cNvPr id="16" name="꺾인 양쪽 화살표 연결선 18">
-            <a:extLst>
-              <a:ext uri="{FF2B5EF4-FFF2-40B4-BE49-F238E27FC236}">
-                <a16:creationId xmlns:a16="http://schemas.microsoft.com/office/drawing/2014/main" id="{56F6801E-A777-D7E2-3F7D-FE70833DC17E}"/>
-              </a:ext>
-            </a:extLst>
-          </p:cNvPr>
-          <p:cNvCxnSpPr>
-            <a:cxnSpLocks/>
-            <a:stCxn id="37" idx="3"/>
-            <a:endCxn id="48" idx="1"/>
-          </p:cNvCxnSpPr>
-          <p:nvPr/>
-        </p:nvCxnSpPr>
-        <p:spPr>
-          <a:xfrm>
-            <a:off x="8503153" y="4148177"/>
-            <a:ext cx="864860" cy="1973394"/>
-          </a:xfrm>
-          <a:prstGeom prst="bentConnector3">
-            <a:avLst>
-              <a:gd name="adj1" fmla="val 50000"/>
-            </a:avLst>
-          </a:prstGeom>
-          <a:ln>
-            <a:solidFill>
-              <a:schemeClr val="dk1"/>
-            </a:solidFill>
-            <a:tailEnd type="arrow"/>
-          </a:ln>
-        </p:spPr>
-        <p:style>
-          <a:lnRef idx="1">
-            <a:schemeClr val="accent1"/>
-          </a:lnRef>
-          <a:fillRef idx="0">
-            <a:schemeClr val="accent1"/>
-          </a:fillRef>
-          <a:effectRef idx="0">
-            <a:schemeClr val="accent1"/>
-          </a:effectRef>
-          <a:fontRef idx="minor">
-            <a:schemeClr val="tx1"/>
-          </a:fontRef>
-        </p:style>
-      </p:cxnSp>
-      <p:cxnSp>
-        <p:nvCxnSpPr>
-          <p:cNvPr id="23" name="꺾인 양쪽 화살표 연결선 18">
-            <a:extLst>
-              <a:ext uri="{FF2B5EF4-FFF2-40B4-BE49-F238E27FC236}">
-                <a16:creationId xmlns:a16="http://schemas.microsoft.com/office/drawing/2014/main" id="{EAE3C6E4-905B-F746-6227-97B6038FD9CE}"/>
-              </a:ext>
-            </a:extLst>
-          </p:cNvPr>
-          <p:cNvCxnSpPr>
-            <a:cxnSpLocks/>
-            <a:stCxn id="129" idx="3"/>
-            <a:endCxn id="29" idx="1"/>
-          </p:cNvCxnSpPr>
-          <p:nvPr/>
-        </p:nvCxnSpPr>
-        <p:spPr>
-          <a:xfrm flipV="1">
-            <a:off x="2219172" y="2994316"/>
-            <a:ext cx="501944" cy="665501"/>
-          </a:xfrm>
-          <a:prstGeom prst="bentConnector3">
-            <a:avLst>
-              <a:gd name="adj1" fmla="val 50000"/>
-            </a:avLst>
-          </a:prstGeom>
-          <a:ln>
-            <a:solidFill>
-              <a:schemeClr val="dk1"/>
-            </a:solidFill>
-            <a:tailEnd type="arrow"/>
-          </a:ln>
-        </p:spPr>
-        <p:style>
-          <a:lnRef idx="1">
-            <a:schemeClr val="accent1"/>
-          </a:lnRef>
-          <a:fillRef idx="0">
-            <a:schemeClr val="accent1"/>
-          </a:fillRef>
-          <a:effectRef idx="0">
-            <a:schemeClr val="accent1"/>
-          </a:effectRef>
-          <a:fontRef idx="minor">
-            <a:schemeClr val="tx1"/>
-          </a:fontRef>
-        </p:style>
-      </p:cxnSp>
       <p:sp>
         <p:nvSpPr>
-          <p:cNvPr id="29" name="직사각형 28">
-            <a:extLst>
-              <a:ext uri="{FF2B5EF4-FFF2-40B4-BE49-F238E27FC236}">
-                <a16:creationId xmlns:a16="http://schemas.microsoft.com/office/drawing/2014/main" id="{E9179219-7D61-354A-E365-1F27ABBEE98F}"/>
+          <p:cNvPr id="12" name="십자형 11">
+            <a:extLst>
+              <a:ext uri="{FF2B5EF4-FFF2-40B4-BE49-F238E27FC236}">
+                <a16:creationId xmlns:a16="http://schemas.microsoft.com/office/drawing/2014/main" id="{4DB2FB71-1CD1-7FEF-D981-FD35DA664AD3}"/>
               </a:ext>
             </a:extLst>
           </p:cNvPr>
@@ -6882,25 +6914,421 @@
         </p:nvSpPr>
         <p:spPr>
           <a:xfrm>
-            <a:off x="2721116" y="2668631"/>
-            <a:ext cx="1897821" cy="651370"/>
+            <a:off x="1285875" y="5216099"/>
+            <a:ext cx="923925" cy="590550"/>
+          </a:xfrm>
+          <a:prstGeom prst="plus">
+            <a:avLst/>
+          </a:prstGeom>
+          <a:solidFill>
+            <a:srgbClr val="FFFF00"/>
+          </a:solidFill>
+          <a:ln>
+            <a:noFill/>
+          </a:ln>
+        </p:spPr>
+        <p:style>
+          <a:lnRef idx="2">
+            <a:schemeClr val="accent1">
+              <a:shade val="15000"/>
+            </a:schemeClr>
+          </a:lnRef>
+          <a:fillRef idx="1">
+            <a:schemeClr val="accent1"/>
+          </a:fillRef>
+          <a:effectRef idx="0">
+            <a:schemeClr val="accent1"/>
+          </a:effectRef>
+          <a:fontRef idx="minor">
+            <a:schemeClr val="lt1"/>
+          </a:fontRef>
+        </p:style>
+        <p:txBody>
+          <a:bodyPr rtlCol="0" anchor="ctr"/>
+          <a:lstStyle/>
+          <a:p>
+            <a:pPr algn="ctr"/>
+            <a:r>
+              <a:rPr lang="ko-KR" altLang="en-US" sz="1400" dirty="0">
+                <a:solidFill>
+                  <a:sysClr val="windowText" lastClr="000000"/>
+                </a:solidFill>
+              </a:rPr>
+              <a:t>본거지</a:t>
+            </a:r>
+            <a:br>
+              <a:rPr lang="en-US" altLang="ko-KR" sz="1400" dirty="0">
+                <a:solidFill>
+                  <a:sysClr val="windowText" lastClr="000000"/>
+                </a:solidFill>
+              </a:rPr>
+            </a:br>
+            <a:r>
+              <a:rPr lang="en-US" altLang="ko-KR" sz="1400" dirty="0">
+                <a:solidFill>
+                  <a:sysClr val="windowText" lastClr="000000"/>
+                </a:solidFill>
+              </a:rPr>
+              <a:t>(</a:t>
+            </a:r>
+            <a:r>
+              <a:rPr lang="ko-KR" altLang="en-US" sz="1400" dirty="0">
+                <a:solidFill>
+                  <a:sysClr val="windowText" lastClr="000000"/>
+                </a:solidFill>
+              </a:rPr>
+              <a:t>시작점</a:t>
+            </a:r>
+            <a:r>
+              <a:rPr lang="en-US" altLang="ko-KR" sz="1400" dirty="0">
+                <a:solidFill>
+                  <a:sysClr val="windowText" lastClr="000000"/>
+                </a:solidFill>
+              </a:rPr>
+              <a:t>)</a:t>
+            </a:r>
+            <a:endParaRPr lang="ko-KR" altLang="en-US" sz="1400" dirty="0">
+              <a:solidFill>
+                <a:sysClr val="windowText" lastClr="000000"/>
+              </a:solidFill>
+            </a:endParaRPr>
+          </a:p>
+        </p:txBody>
+      </p:sp>
+      <p:sp>
+        <p:nvSpPr>
+          <p:cNvPr id="13" name="이등변 삼각형 12">
+            <a:extLst>
+              <a:ext uri="{FF2B5EF4-FFF2-40B4-BE49-F238E27FC236}">
+                <a16:creationId xmlns:a16="http://schemas.microsoft.com/office/drawing/2014/main" id="{A62AA2FF-0FAA-5A42-1E66-54DFF1F89F2F}"/>
+              </a:ext>
+            </a:extLst>
+          </p:cNvPr>
+          <p:cNvSpPr/>
+          <p:nvPr/>
+        </p:nvSpPr>
+        <p:spPr>
+          <a:xfrm>
+            <a:off x="3988594" y="1679663"/>
+            <a:ext cx="290512" cy="190500"/>
+          </a:xfrm>
+          <a:prstGeom prst="triangle">
+            <a:avLst/>
+          </a:prstGeom>
+          <a:solidFill>
+            <a:schemeClr val="accent2"/>
+          </a:solidFill>
+          <a:ln>
+            <a:noFill/>
+          </a:ln>
+        </p:spPr>
+        <p:style>
+          <a:lnRef idx="2">
+            <a:schemeClr val="accent1">
+              <a:shade val="15000"/>
+            </a:schemeClr>
+          </a:lnRef>
+          <a:fillRef idx="1">
+            <a:schemeClr val="accent1"/>
+          </a:fillRef>
+          <a:effectRef idx="0">
+            <a:schemeClr val="accent1"/>
+          </a:effectRef>
+          <a:fontRef idx="minor">
+            <a:schemeClr val="lt1"/>
+          </a:fontRef>
+        </p:style>
+        <p:txBody>
+          <a:bodyPr rtlCol="0" anchor="ctr"/>
+          <a:lstStyle/>
+          <a:p>
+            <a:pPr algn="ctr"/>
+            <a:endParaRPr lang="ko-KR" altLang="en-US" sz="1200" dirty="0">
+              <a:solidFill>
+                <a:sysClr val="windowText" lastClr="000000"/>
+              </a:solidFill>
+            </a:endParaRPr>
+          </a:p>
+        </p:txBody>
+      </p:sp>
+      <p:sp>
+        <p:nvSpPr>
+          <p:cNvPr id="14" name="TextBox 13">
+            <a:extLst>
+              <a:ext uri="{FF2B5EF4-FFF2-40B4-BE49-F238E27FC236}">
+                <a16:creationId xmlns:a16="http://schemas.microsoft.com/office/drawing/2014/main" id="{E593D62A-05DA-08D7-EB76-628C4B5E0674}"/>
+              </a:ext>
+            </a:extLst>
+          </p:cNvPr>
+          <p:cNvSpPr txBox="1"/>
+          <p:nvPr/>
+        </p:nvSpPr>
+        <p:spPr>
+          <a:xfrm>
+            <a:off x="3620894" y="1504293"/>
+            <a:ext cx="1025912" cy="307777"/>
           </a:xfrm>
           <a:prstGeom prst="rect">
             <a:avLst/>
           </a:prstGeom>
+          <a:noFill/>
+        </p:spPr>
+        <p:txBody>
+          <a:bodyPr wrap="square" rtlCol="0">
+            <a:spAutoFit/>
+          </a:bodyPr>
+          <a:lstStyle/>
+          <a:p>
+            <a:pPr algn="ctr"/>
+            <a:r>
+              <a:rPr lang="ko-KR" altLang="en-US" sz="1400" dirty="0">
+                <a:solidFill>
+                  <a:sysClr val="windowText" lastClr="000000"/>
+                </a:solidFill>
+              </a:rPr>
+              <a:t>목적지</a:t>
+            </a:r>
+          </a:p>
+        </p:txBody>
+      </p:sp>
+      <p:sp>
+        <p:nvSpPr>
+          <p:cNvPr id="27" name="사각형: 잘린 대각선 방향 모서리 26">
+            <a:extLst>
+              <a:ext uri="{FF2B5EF4-FFF2-40B4-BE49-F238E27FC236}">
+                <a16:creationId xmlns:a16="http://schemas.microsoft.com/office/drawing/2014/main" id="{1EA77AB9-DF44-A84A-41DB-F629F902BD02}"/>
+              </a:ext>
+            </a:extLst>
+          </p:cNvPr>
+          <p:cNvSpPr/>
+          <p:nvPr/>
+        </p:nvSpPr>
+        <p:spPr>
+          <a:xfrm>
+            <a:off x="1242991" y="1529203"/>
+            <a:ext cx="1781197" cy="1194948"/>
+          </a:xfrm>
+          <a:prstGeom prst="snip2DiagRect">
+            <a:avLst>
+              <a:gd name="adj1" fmla="val 0"/>
+              <a:gd name="adj2" fmla="val 50000"/>
+            </a:avLst>
+          </a:prstGeom>
           <a:solidFill>
+            <a:schemeClr val="bg2">
+              <a:lumMod val="90000"/>
+            </a:schemeClr>
+          </a:solidFill>
+        </p:spPr>
+        <p:style>
+          <a:lnRef idx="2">
+            <a:schemeClr val="accent1">
+              <a:shade val="15000"/>
+            </a:schemeClr>
+          </a:lnRef>
+          <a:fillRef idx="1">
+            <a:schemeClr val="accent1"/>
+          </a:fillRef>
+          <a:effectRef idx="0">
+            <a:schemeClr val="accent1"/>
+          </a:effectRef>
+          <a:fontRef idx="minor">
             <a:schemeClr val="lt1"/>
+          </a:fontRef>
+        </p:style>
+        <p:txBody>
+          <a:bodyPr rtlCol="0" anchor="ctr"/>
+          <a:lstStyle/>
+          <a:p>
+            <a:pPr algn="ctr"/>
+            <a:r>
+              <a:rPr lang="ko-KR" altLang="en-US" dirty="0">
+                <a:solidFill>
+                  <a:sysClr val="windowText" lastClr="000000"/>
+                </a:solidFill>
+              </a:rPr>
+              <a:t>모래언덕</a:t>
+            </a:r>
+          </a:p>
+        </p:txBody>
+      </p:sp>
+      <p:sp>
+        <p:nvSpPr>
+          <p:cNvPr id="28" name="사각형: 둥근 모서리 27">
+            <a:extLst>
+              <a:ext uri="{FF2B5EF4-FFF2-40B4-BE49-F238E27FC236}">
+                <a16:creationId xmlns:a16="http://schemas.microsoft.com/office/drawing/2014/main" id="{9B6B2778-A5F5-35CB-EF2E-C08179C3082B}"/>
+              </a:ext>
+            </a:extLst>
+          </p:cNvPr>
+          <p:cNvSpPr/>
+          <p:nvPr/>
+        </p:nvSpPr>
+        <p:spPr>
+          <a:xfrm>
+            <a:off x="2900363" y="2418165"/>
+            <a:ext cx="1524390" cy="1010835"/>
+          </a:xfrm>
+          <a:prstGeom prst="roundRect">
+            <a:avLst/>
+          </a:prstGeom>
+          <a:solidFill>
+            <a:schemeClr val="bg2">
+              <a:lumMod val="90000"/>
+            </a:schemeClr>
           </a:solidFill>
+        </p:spPr>
+        <p:style>
+          <a:lnRef idx="2">
+            <a:schemeClr val="accent1">
+              <a:shade val="15000"/>
+            </a:schemeClr>
+          </a:lnRef>
+          <a:fillRef idx="1">
+            <a:schemeClr val="accent1"/>
+          </a:fillRef>
+          <a:effectRef idx="0">
+            <a:schemeClr val="accent1"/>
+          </a:effectRef>
+          <a:fontRef idx="minor">
+            <a:schemeClr val="lt1"/>
+          </a:fontRef>
+        </p:style>
+        <p:txBody>
+          <a:bodyPr rtlCol="0" anchor="ctr"/>
+          <a:lstStyle/>
+          <a:p>
+            <a:pPr algn="ctr"/>
+            <a:r>
+              <a:rPr lang="ko-KR" altLang="en-US">
+                <a:solidFill>
+                  <a:sysClr val="windowText" lastClr="000000"/>
+                </a:solidFill>
+              </a:rPr>
+              <a:t>숲</a:t>
+            </a:r>
+          </a:p>
+        </p:txBody>
+      </p:sp>
+      <p:pic>
+        <p:nvPicPr>
+          <p:cNvPr id="31" name="그림 30">
+            <a:extLst>
+              <a:ext uri="{FF2B5EF4-FFF2-40B4-BE49-F238E27FC236}">
+                <a16:creationId xmlns:a16="http://schemas.microsoft.com/office/drawing/2014/main" id="{EAF3308F-4788-4387-6DEA-CF3B38B6AE92}"/>
+              </a:ext>
+            </a:extLst>
+          </p:cNvPr>
+          <p:cNvPicPr>
+            <a:picLocks noChangeAspect="1"/>
+          </p:cNvPicPr>
+          <p:nvPr/>
+        </p:nvPicPr>
+        <p:blipFill>
+          <a:blip r:embed="rId3"/>
+          <a:stretch>
+            <a:fillRect/>
+          </a:stretch>
+        </p:blipFill>
+        <p:spPr>
+          <a:xfrm>
+            <a:off x="1938333" y="4479534"/>
+            <a:ext cx="2434865" cy="1363734"/>
+          </a:xfrm>
+          <a:prstGeom prst="rect">
+            <a:avLst/>
+          </a:prstGeom>
+        </p:spPr>
+      </p:pic>
+      <p:sp>
+        <p:nvSpPr>
+          <p:cNvPr id="93" name="자유형: 도형 92">
+            <a:extLst>
+              <a:ext uri="{FF2B5EF4-FFF2-40B4-BE49-F238E27FC236}">
+                <a16:creationId xmlns:a16="http://schemas.microsoft.com/office/drawing/2014/main" id="{B60C7EBE-E326-576B-EA70-9812E3FF3224}"/>
+              </a:ext>
+            </a:extLst>
+          </p:cNvPr>
+          <p:cNvSpPr/>
+          <p:nvPr/>
+        </p:nvSpPr>
+        <p:spPr>
+          <a:xfrm>
+            <a:off x="4368614" y="1533525"/>
+            <a:ext cx="1164454" cy="4320000"/>
+          </a:xfrm>
+          <a:custGeom>
+            <a:avLst/>
+            <a:gdLst>
+              <a:gd name="csX0" fmla="*/ 1160649 w 1164454"/>
+              <a:gd name="csY0" fmla="*/ 0 h 4424944"/>
+              <a:gd name="csX1" fmla="*/ 1046349 w 1164454"/>
+              <a:gd name="csY1" fmla="*/ 1457325 h 4424944"/>
+              <a:gd name="csX2" fmla="*/ 379599 w 1164454"/>
+              <a:gd name="csY2" fmla="*/ 2519363 h 4424944"/>
+              <a:gd name="csX3" fmla="*/ 31936 w 1164454"/>
+              <a:gd name="csY3" fmla="*/ 4257675 h 4424944"/>
+              <a:gd name="csX4" fmla="*/ 36699 w 1164454"/>
+              <a:gd name="csY4" fmla="*/ 4257675 h 4424944"/>
+            </a:gdLst>
+            <a:ahLst/>
+            <a:cxnLst>
+              <a:cxn ang="0">
+                <a:pos x="csX0" y="csY0"/>
+              </a:cxn>
+              <a:cxn ang="0">
+                <a:pos x="csX1" y="csY1"/>
+              </a:cxn>
+              <a:cxn ang="0">
+                <a:pos x="csX2" y="csY2"/>
+              </a:cxn>
+              <a:cxn ang="0">
+                <a:pos x="csX3" y="csY3"/>
+              </a:cxn>
+              <a:cxn ang="0">
+                <a:pos x="csX4" y="csY4"/>
+              </a:cxn>
+            </a:cxnLst>
+            <a:rect l="l" t="t" r="r" b="b"/>
+            <a:pathLst>
+              <a:path w="1164454" h="4424944">
+                <a:moveTo>
+                  <a:pt x="1160649" y="0"/>
+                </a:moveTo>
+                <a:cubicBezTo>
+                  <a:pt x="1168586" y="518715"/>
+                  <a:pt x="1176524" y="1037431"/>
+                  <a:pt x="1046349" y="1457325"/>
+                </a:cubicBezTo>
+                <a:cubicBezTo>
+                  <a:pt x="916174" y="1877219"/>
+                  <a:pt x="548668" y="2052638"/>
+                  <a:pt x="379599" y="2519363"/>
+                </a:cubicBezTo>
+                <a:cubicBezTo>
+                  <a:pt x="210530" y="2986088"/>
+                  <a:pt x="89086" y="3967956"/>
+                  <a:pt x="31936" y="4257675"/>
+                </a:cubicBezTo>
+                <a:cubicBezTo>
+                  <a:pt x="-25214" y="4547394"/>
+                  <a:pt x="5742" y="4402534"/>
+                  <a:pt x="36699" y="4257675"/>
+                </a:cubicBezTo>
+              </a:path>
+            </a:pathLst>
+          </a:custGeom>
+          <a:noFill/>
           <a:ln>
             <a:solidFill>
-              <a:schemeClr val="dk1"/>
+              <a:schemeClr val="accent1"/>
             </a:solidFill>
           </a:ln>
         </p:spPr>
         <p:style>
           <a:lnRef idx="2">
             <a:schemeClr val="accent1">
-              <a:shade val="20000"/>
+              <a:shade val="15000"/>
             </a:schemeClr>
           </a:lnRef>
           <a:fillRef idx="1">
@@ -6914,70 +7342,13 @@
           </a:fontRef>
         </p:style>
         <p:txBody>
-          <a:bodyPr anchor="ctr"/>
+          <a:bodyPr rtlCol="0" anchor="ctr"/>
           <a:lstStyle/>
           <a:p>
-            <a:pPr lvl="0" algn="ctr">
-              <a:defRPr/>
-            </a:pPr>
-            <a:r>
-              <a:rPr lang="ko-KR" altLang="en-US" dirty="0">
-                <a:solidFill>
-                  <a:srgbClr val="000000"/>
-                </a:solidFill>
-              </a:rPr>
-              <a:t>경로</a:t>
-            </a:r>
-            <a:r>
-              <a:rPr lang="en-US" altLang="ko-KR" dirty="0">
-                <a:solidFill>
-                  <a:srgbClr val="000000"/>
-                </a:solidFill>
-              </a:rPr>
-              <a:t>a_</a:t>
-            </a:r>
-            <a:r>
-              <a:rPr lang="ko-KR" altLang="en-US" dirty="0">
-                <a:solidFill>
-                  <a:srgbClr val="000000"/>
-                </a:solidFill>
-              </a:rPr>
-              <a:t>숲</a:t>
-            </a:r>
-            <a:br>
-              <a:rPr lang="en-US" altLang="ko-KR" dirty="0">
-                <a:solidFill>
-                  <a:srgbClr val="000000"/>
-                </a:solidFill>
-              </a:rPr>
-            </a:br>
-            <a:r>
-              <a:rPr lang="en-US" altLang="ko-KR" dirty="0">
-                <a:solidFill>
-                  <a:srgbClr val="000000"/>
-                </a:solidFill>
-              </a:rPr>
-              <a:t>: </a:t>
-            </a:r>
-            <a:r>
-              <a:rPr lang="ko-KR" altLang="en-US" dirty="0">
-                <a:solidFill>
-                  <a:srgbClr val="000000"/>
-                </a:solidFill>
-              </a:rPr>
-              <a:t>직선 거리</a:t>
-            </a:r>
-            <a:r>
-              <a:rPr lang="en-US" altLang="ko-KR" dirty="0">
-                <a:solidFill>
-                  <a:srgbClr val="000000"/>
-                </a:solidFill>
-              </a:rPr>
-              <a:t>[40T] </a:t>
-            </a:r>
-            <a:endParaRPr lang="ko-KR" altLang="en-US" dirty="0">
+            <a:pPr algn="ctr"/>
+            <a:endParaRPr lang="ko-KR" altLang="en-US">
               <a:solidFill>
-                <a:srgbClr val="000000"/>
+                <a:srgbClr val="0070C0"/>
               </a:solidFill>
             </a:endParaRPr>
           </a:p>
@@ -6985,10 +7356,10 @@
       </p:sp>
       <p:sp>
         <p:nvSpPr>
-          <p:cNvPr id="33" name="직사각형 32">
-            <a:extLst>
-              <a:ext uri="{FF2B5EF4-FFF2-40B4-BE49-F238E27FC236}">
-                <a16:creationId xmlns:a16="http://schemas.microsoft.com/office/drawing/2014/main" id="{30F3819E-3AFB-EA66-9364-82EF1C520019}"/>
+          <p:cNvPr id="95" name="자유형: 도형 94">
+            <a:extLst>
+              <a:ext uri="{FF2B5EF4-FFF2-40B4-BE49-F238E27FC236}">
+                <a16:creationId xmlns:a16="http://schemas.microsoft.com/office/drawing/2014/main" id="{C69234DE-C068-8877-1766-4EDF9BD36689}"/>
               </a:ext>
             </a:extLst>
           </p:cNvPr>
@@ -6997,25 +7368,81 @@
         </p:nvSpPr>
         <p:spPr>
           <a:xfrm>
-            <a:off x="2676829" y="3989070"/>
-            <a:ext cx="1942107" cy="651370"/>
+            <a:off x="4133850" y="1533526"/>
+            <a:ext cx="1217417" cy="3790950"/>
           </a:xfrm>
-          <a:prstGeom prst="rect">
+          <a:custGeom>
             <a:avLst/>
-          </a:prstGeom>
-          <a:solidFill>
-            <a:schemeClr val="lt1"/>
-          </a:solidFill>
+            <a:gdLst>
+              <a:gd name="csX0" fmla="*/ 1160649 w 1164454"/>
+              <a:gd name="csY0" fmla="*/ 0 h 4424944"/>
+              <a:gd name="csX1" fmla="*/ 1046349 w 1164454"/>
+              <a:gd name="csY1" fmla="*/ 1457325 h 4424944"/>
+              <a:gd name="csX2" fmla="*/ 379599 w 1164454"/>
+              <a:gd name="csY2" fmla="*/ 2519363 h 4424944"/>
+              <a:gd name="csX3" fmla="*/ 31936 w 1164454"/>
+              <a:gd name="csY3" fmla="*/ 4257675 h 4424944"/>
+              <a:gd name="csX4" fmla="*/ 36699 w 1164454"/>
+              <a:gd name="csY4" fmla="*/ 4257675 h 4424944"/>
+            </a:gdLst>
+            <a:ahLst/>
+            <a:cxnLst>
+              <a:cxn ang="0">
+                <a:pos x="csX0" y="csY0"/>
+              </a:cxn>
+              <a:cxn ang="0">
+                <a:pos x="csX1" y="csY1"/>
+              </a:cxn>
+              <a:cxn ang="0">
+                <a:pos x="csX2" y="csY2"/>
+              </a:cxn>
+              <a:cxn ang="0">
+                <a:pos x="csX3" y="csY3"/>
+              </a:cxn>
+              <a:cxn ang="0">
+                <a:pos x="csX4" y="csY4"/>
+              </a:cxn>
+            </a:cxnLst>
+            <a:rect l="l" t="t" r="r" b="b"/>
+            <a:pathLst>
+              <a:path w="1164454" h="4424944">
+                <a:moveTo>
+                  <a:pt x="1160649" y="0"/>
+                </a:moveTo>
+                <a:cubicBezTo>
+                  <a:pt x="1168586" y="518715"/>
+                  <a:pt x="1176524" y="1037431"/>
+                  <a:pt x="1046349" y="1457325"/>
+                </a:cubicBezTo>
+                <a:cubicBezTo>
+                  <a:pt x="916174" y="1877219"/>
+                  <a:pt x="548668" y="2052638"/>
+                  <a:pt x="379599" y="2519363"/>
+                </a:cubicBezTo>
+                <a:cubicBezTo>
+                  <a:pt x="210530" y="2986088"/>
+                  <a:pt x="89086" y="3967956"/>
+                  <a:pt x="31936" y="4257675"/>
+                </a:cubicBezTo>
+                <a:cubicBezTo>
+                  <a:pt x="-25214" y="4547394"/>
+                  <a:pt x="5742" y="4402534"/>
+                  <a:pt x="36699" y="4257675"/>
+                </a:cubicBezTo>
+              </a:path>
+            </a:pathLst>
+          </a:custGeom>
+          <a:noFill/>
           <a:ln>
             <a:solidFill>
-              <a:schemeClr val="dk1"/>
+              <a:schemeClr val="accent1"/>
             </a:solidFill>
           </a:ln>
         </p:spPr>
         <p:style>
           <a:lnRef idx="2">
             <a:schemeClr val="accent1">
-              <a:shade val="20000"/>
+              <a:shade val="15000"/>
             </a:schemeClr>
           </a:lnRef>
           <a:fillRef idx="1">
@@ -7029,70 +7456,13 @@
           </a:fontRef>
         </p:style>
         <p:txBody>
-          <a:bodyPr anchor="ctr"/>
+          <a:bodyPr rtlCol="0" anchor="ctr"/>
           <a:lstStyle/>
           <a:p>
-            <a:pPr lvl="0" algn="ctr">
-              <a:defRPr/>
-            </a:pPr>
-            <a:r>
-              <a:rPr lang="ko-KR" altLang="en-US" dirty="0">
-                <a:solidFill>
-                  <a:srgbClr val="000000"/>
-                </a:solidFill>
-              </a:rPr>
-              <a:t>경로</a:t>
-            </a:r>
-            <a:r>
-              <a:rPr lang="en-US" altLang="ko-KR" dirty="0">
-                <a:solidFill>
-                  <a:srgbClr val="000000"/>
-                </a:solidFill>
-              </a:rPr>
-              <a:t>b_</a:t>
-            </a:r>
-            <a:r>
-              <a:rPr lang="ko-KR" altLang="en-US" dirty="0">
-                <a:solidFill>
-                  <a:srgbClr val="000000"/>
-                </a:solidFill>
-              </a:rPr>
-              <a:t>모래언덕</a:t>
-            </a:r>
-            <a:br>
-              <a:rPr lang="en-US" altLang="ko-KR" dirty="0">
-                <a:solidFill>
-                  <a:srgbClr val="000000"/>
-                </a:solidFill>
-              </a:rPr>
-            </a:br>
-            <a:r>
-              <a:rPr lang="en-US" altLang="ko-KR" dirty="0">
-                <a:solidFill>
-                  <a:srgbClr val="000000"/>
-                </a:solidFill>
-              </a:rPr>
-              <a:t>: </a:t>
-            </a:r>
-            <a:r>
-              <a:rPr lang="ko-KR" altLang="en-US" dirty="0">
-                <a:solidFill>
-                  <a:srgbClr val="000000"/>
-                </a:solidFill>
-              </a:rPr>
-              <a:t>곡선 거리</a:t>
-            </a:r>
-            <a:r>
-              <a:rPr lang="en-US" altLang="ko-KR" dirty="0">
-                <a:solidFill>
-                  <a:srgbClr val="000000"/>
-                </a:solidFill>
-              </a:rPr>
-              <a:t>[80T]</a:t>
-            </a:r>
-            <a:endParaRPr lang="ko-KR" altLang="en-US" dirty="0">
+            <a:pPr algn="ctr"/>
+            <a:endParaRPr lang="ko-KR" altLang="en-US">
               <a:solidFill>
-                <a:srgbClr val="000000"/>
+                <a:srgbClr val="0070C0"/>
               </a:solidFill>
             </a:endParaRPr>
           </a:p>
@@ -7100,10 +7470,10 @@
       </p:sp>
       <p:sp>
         <p:nvSpPr>
-          <p:cNvPr id="35" name="직사각형 34">
-            <a:extLst>
-              <a:ext uri="{FF2B5EF4-FFF2-40B4-BE49-F238E27FC236}">
-                <a16:creationId xmlns:a16="http://schemas.microsoft.com/office/drawing/2014/main" id="{FE17D59C-8575-F0A7-0903-28793FD4E8D3}"/>
+          <p:cNvPr id="96" name="타원 95">
+            <a:extLst>
+              <a:ext uri="{FF2B5EF4-FFF2-40B4-BE49-F238E27FC236}">
+                <a16:creationId xmlns:a16="http://schemas.microsoft.com/office/drawing/2014/main" id="{02868A49-7460-5A45-B609-CA58D758D5DC}"/>
               </a:ext>
             </a:extLst>
           </p:cNvPr>
@@ -7112,586 +7482,16 @@
         </p:nvSpPr>
         <p:spPr>
           <a:xfrm>
-            <a:off x="6513951" y="1404947"/>
-            <a:ext cx="1947707" cy="651370"/>
+            <a:off x="4045209" y="2324101"/>
+            <a:ext cx="1192728" cy="800100"/>
           </a:xfrm>
-          <a:prstGeom prst="rect">
+          <a:prstGeom prst="ellipse">
             <a:avLst/>
           </a:prstGeom>
           <a:solidFill>
-            <a:schemeClr val="lt1"/>
-          </a:solidFill>
-          <a:ln>
-            <a:solidFill>
-              <a:schemeClr val="dk1"/>
-            </a:solidFill>
-          </a:ln>
-        </p:spPr>
-        <p:style>
-          <a:lnRef idx="2">
-            <a:schemeClr val="accent1">
-              <a:shade val="20000"/>
+            <a:schemeClr val="bg2">
+              <a:lumMod val="90000"/>
             </a:schemeClr>
-          </a:lnRef>
-          <a:fillRef idx="1">
-            <a:schemeClr val="accent1"/>
-          </a:fillRef>
-          <a:effectRef idx="0">
-            <a:schemeClr val="accent1"/>
-          </a:effectRef>
-          <a:fontRef idx="minor">
-            <a:schemeClr val="lt1"/>
-          </a:fontRef>
-        </p:style>
-        <p:txBody>
-          <a:bodyPr anchor="ctr"/>
-          <a:lstStyle/>
-          <a:p>
-            <a:pPr lvl="0" algn="ctr">
-              <a:defRPr/>
-            </a:pPr>
-            <a:r>
-              <a:rPr lang="ko-KR" altLang="en-US" dirty="0">
-                <a:solidFill>
-                  <a:srgbClr val="000000"/>
-                </a:solidFill>
-              </a:rPr>
-              <a:t>경로</a:t>
-            </a:r>
-            <a:r>
-              <a:rPr lang="en-US" altLang="ko-KR" dirty="0" err="1">
-                <a:solidFill>
-                  <a:srgbClr val="000000"/>
-                </a:solidFill>
-              </a:rPr>
-              <a:t>a_a</a:t>
-            </a:r>
-            <a:r>
-              <a:rPr lang="en-US" altLang="ko-KR" dirty="0">
-                <a:solidFill>
-                  <a:srgbClr val="000000"/>
-                </a:solidFill>
-              </a:rPr>
-              <a:t>_</a:t>
-            </a:r>
-            <a:r>
-              <a:rPr lang="ko-KR" altLang="en-US" dirty="0">
-                <a:solidFill>
-                  <a:srgbClr val="000000"/>
-                </a:solidFill>
-              </a:rPr>
-              <a:t>숲</a:t>
-            </a:r>
-            <a:br>
-              <a:rPr lang="en-US" altLang="ko-KR" dirty="0">
-                <a:solidFill>
-                  <a:srgbClr val="000000"/>
-                </a:solidFill>
-              </a:rPr>
-            </a:br>
-            <a:r>
-              <a:rPr lang="en-US" altLang="ko-KR" dirty="0">
-                <a:solidFill>
-                  <a:srgbClr val="000000"/>
-                </a:solidFill>
-              </a:rPr>
-              <a:t>: </a:t>
-            </a:r>
-            <a:r>
-              <a:rPr lang="ko-KR" altLang="en-US" dirty="0">
-                <a:solidFill>
-                  <a:srgbClr val="000000"/>
-                </a:solidFill>
-              </a:rPr>
-              <a:t>곡선 거리</a:t>
-            </a:r>
-            <a:r>
-              <a:rPr lang="en-US" altLang="ko-KR" dirty="0">
-                <a:solidFill>
-                  <a:srgbClr val="000000"/>
-                </a:solidFill>
-              </a:rPr>
-              <a:t>[20T] </a:t>
-            </a:r>
-            <a:endParaRPr lang="ko-KR" altLang="en-US" dirty="0">
-              <a:solidFill>
-                <a:srgbClr val="000000"/>
-              </a:solidFill>
-            </a:endParaRPr>
-          </a:p>
-        </p:txBody>
-      </p:sp>
-      <p:sp>
-        <p:nvSpPr>
-          <p:cNvPr id="37" name="직사각형 36">
-            <a:extLst>
-              <a:ext uri="{FF2B5EF4-FFF2-40B4-BE49-F238E27FC236}">
-                <a16:creationId xmlns:a16="http://schemas.microsoft.com/office/drawing/2014/main" id="{ECAA3893-299B-A643-F7AB-7FAF127ACB8F}"/>
-              </a:ext>
-            </a:extLst>
-          </p:cNvPr>
-          <p:cNvSpPr/>
-          <p:nvPr/>
-        </p:nvSpPr>
-        <p:spPr>
-          <a:xfrm>
-            <a:off x="6561043" y="3822492"/>
-            <a:ext cx="1942110" cy="651370"/>
-          </a:xfrm>
-          <a:prstGeom prst="rect">
-            <a:avLst/>
-          </a:prstGeom>
-          <a:solidFill>
-            <a:schemeClr val="lt1"/>
-          </a:solidFill>
-          <a:ln>
-            <a:solidFill>
-              <a:schemeClr val="dk1"/>
-            </a:solidFill>
-          </a:ln>
-        </p:spPr>
-        <p:style>
-          <a:lnRef idx="2">
-            <a:schemeClr val="accent1">
-              <a:shade val="20000"/>
-            </a:schemeClr>
-          </a:lnRef>
-          <a:fillRef idx="1">
-            <a:schemeClr val="accent1"/>
-          </a:fillRef>
-          <a:effectRef idx="0">
-            <a:schemeClr val="accent1"/>
-          </a:effectRef>
-          <a:fontRef idx="minor">
-            <a:schemeClr val="lt1"/>
-          </a:fontRef>
-        </p:style>
-        <p:txBody>
-          <a:bodyPr anchor="ctr"/>
-          <a:lstStyle/>
-          <a:p>
-            <a:pPr lvl="0" algn="ctr">
-              <a:defRPr/>
-            </a:pPr>
-            <a:r>
-              <a:rPr lang="ko-KR" altLang="en-US" dirty="0">
-                <a:solidFill>
-                  <a:srgbClr val="000000"/>
-                </a:solidFill>
-              </a:rPr>
-              <a:t>경로</a:t>
-            </a:r>
-            <a:r>
-              <a:rPr lang="en-US" altLang="ko-KR" dirty="0" err="1">
-                <a:solidFill>
-                  <a:srgbClr val="000000"/>
-                </a:solidFill>
-              </a:rPr>
-              <a:t>a_b</a:t>
-            </a:r>
-            <a:r>
-              <a:rPr lang="en-US" altLang="ko-KR" dirty="0">
-                <a:solidFill>
-                  <a:srgbClr val="000000"/>
-                </a:solidFill>
-              </a:rPr>
-              <a:t>_</a:t>
-            </a:r>
-            <a:r>
-              <a:rPr lang="ko-KR" altLang="en-US" dirty="0">
-                <a:solidFill>
-                  <a:srgbClr val="000000"/>
-                </a:solidFill>
-              </a:rPr>
-              <a:t>늪</a:t>
-            </a:r>
-            <a:br>
-              <a:rPr lang="en-US" altLang="ko-KR" dirty="0">
-                <a:solidFill>
-                  <a:srgbClr val="000000"/>
-                </a:solidFill>
-              </a:rPr>
-            </a:br>
-            <a:r>
-              <a:rPr lang="en-US" altLang="ko-KR" dirty="0">
-                <a:solidFill>
-                  <a:srgbClr val="000000"/>
-                </a:solidFill>
-              </a:rPr>
-              <a:t>: </a:t>
-            </a:r>
-            <a:r>
-              <a:rPr lang="ko-KR" altLang="en-US" dirty="0">
-                <a:solidFill>
-                  <a:srgbClr val="000000"/>
-                </a:solidFill>
-              </a:rPr>
-              <a:t>직선 거리</a:t>
-            </a:r>
-            <a:r>
-              <a:rPr lang="en-US" altLang="ko-KR" dirty="0">
-                <a:solidFill>
-                  <a:srgbClr val="000000"/>
-                </a:solidFill>
-              </a:rPr>
-              <a:t>[10T] </a:t>
-            </a:r>
-            <a:endParaRPr lang="ko-KR" altLang="en-US" dirty="0">
-              <a:solidFill>
-                <a:srgbClr val="000000"/>
-              </a:solidFill>
-            </a:endParaRPr>
-          </a:p>
-        </p:txBody>
-      </p:sp>
-      <p:cxnSp>
-        <p:nvCxnSpPr>
-          <p:cNvPr id="41" name="꺾인 양쪽 화살표 연결선 18">
-            <a:extLst>
-              <a:ext uri="{FF2B5EF4-FFF2-40B4-BE49-F238E27FC236}">
-                <a16:creationId xmlns:a16="http://schemas.microsoft.com/office/drawing/2014/main" id="{ADAD90DE-F6E9-A2FB-0C2C-B653BCD7729D}"/>
-              </a:ext>
-            </a:extLst>
-          </p:cNvPr>
-          <p:cNvCxnSpPr>
-            <a:cxnSpLocks/>
-            <a:stCxn id="129" idx="3"/>
-            <a:endCxn id="33" idx="1"/>
-          </p:cNvCxnSpPr>
-          <p:nvPr/>
-        </p:nvCxnSpPr>
-        <p:spPr>
-          <a:xfrm>
-            <a:off x="2219172" y="3659817"/>
-            <a:ext cx="457657" cy="654938"/>
-          </a:xfrm>
-          <a:prstGeom prst="bentConnector3">
-            <a:avLst>
-              <a:gd name="adj1" fmla="val 50000"/>
-            </a:avLst>
-          </a:prstGeom>
-          <a:ln>
-            <a:solidFill>
-              <a:schemeClr val="dk1"/>
-            </a:solidFill>
-            <a:tailEnd type="arrow"/>
-          </a:ln>
-        </p:spPr>
-        <p:style>
-          <a:lnRef idx="1">
-            <a:schemeClr val="accent1"/>
-          </a:lnRef>
-          <a:fillRef idx="0">
-            <a:schemeClr val="accent1"/>
-          </a:fillRef>
-          <a:effectRef idx="0">
-            <a:schemeClr val="accent1"/>
-          </a:effectRef>
-          <a:fontRef idx="minor">
-            <a:schemeClr val="tx1"/>
-          </a:fontRef>
-        </p:style>
-      </p:cxnSp>
-      <p:sp>
-        <p:nvSpPr>
-          <p:cNvPr id="48" name="직사각형 47">
-            <a:extLst>
-              <a:ext uri="{FF2B5EF4-FFF2-40B4-BE49-F238E27FC236}">
-                <a16:creationId xmlns:a16="http://schemas.microsoft.com/office/drawing/2014/main" id="{EC84C43D-6067-0DF0-B9A6-B76471F4F9D7}"/>
-              </a:ext>
-            </a:extLst>
-          </p:cNvPr>
-          <p:cNvSpPr/>
-          <p:nvPr/>
-        </p:nvSpPr>
-        <p:spPr>
-          <a:xfrm>
-            <a:off x="9368013" y="5795886"/>
-            <a:ext cx="1316825" cy="651370"/>
-          </a:xfrm>
-          <a:prstGeom prst="rect">
-            <a:avLst/>
-          </a:prstGeom>
-          <a:solidFill>
-            <a:schemeClr val="lt1"/>
-          </a:solidFill>
-          <a:ln>
-            <a:solidFill>
-              <a:schemeClr val="dk1"/>
-            </a:solidFill>
-          </a:ln>
-        </p:spPr>
-        <p:style>
-          <a:lnRef idx="2">
-            <a:schemeClr val="accent1">
-              <a:shade val="20000"/>
-            </a:schemeClr>
-          </a:lnRef>
-          <a:fillRef idx="1">
-            <a:schemeClr val="accent1"/>
-          </a:fillRef>
-          <a:effectRef idx="0">
-            <a:schemeClr val="accent1"/>
-          </a:effectRef>
-          <a:fontRef idx="minor">
-            <a:schemeClr val="lt1"/>
-          </a:fontRef>
-        </p:style>
-        <p:txBody>
-          <a:bodyPr anchor="ctr"/>
-          <a:lstStyle/>
-          <a:p>
-            <a:pPr lvl="0" algn="ctr">
-              <a:defRPr/>
-            </a:pPr>
-            <a:r>
-              <a:rPr lang="ko-KR" altLang="en-US" dirty="0">
-                <a:solidFill>
-                  <a:srgbClr val="000000"/>
-                </a:solidFill>
-              </a:rPr>
-              <a:t>주거지</a:t>
-            </a:r>
-            <a:r>
-              <a:rPr lang="en-US" altLang="ko-KR" dirty="0">
-                <a:solidFill>
-                  <a:srgbClr val="000000"/>
-                </a:solidFill>
-              </a:rPr>
-              <a:t>3</a:t>
-            </a:r>
-            <a:br>
-              <a:rPr lang="en-US" altLang="ko-KR" dirty="0">
-                <a:solidFill>
-                  <a:srgbClr val="000000"/>
-                </a:solidFill>
-              </a:rPr>
-            </a:br>
-            <a:r>
-              <a:rPr lang="ko-KR" altLang="en-US" dirty="0">
-                <a:solidFill>
-                  <a:srgbClr val="000000"/>
-                </a:solidFill>
-              </a:rPr>
-              <a:t>도착</a:t>
-            </a:r>
-          </a:p>
-        </p:txBody>
-      </p:sp>
-      <p:cxnSp>
-        <p:nvCxnSpPr>
-          <p:cNvPr id="52" name="꺾인 양쪽 화살표 연결선 18">
-            <a:extLst>
-              <a:ext uri="{FF2B5EF4-FFF2-40B4-BE49-F238E27FC236}">
-                <a16:creationId xmlns:a16="http://schemas.microsoft.com/office/drawing/2014/main" id="{D7DA4324-C9E0-8070-3D26-EBAE550692AB}"/>
-              </a:ext>
-            </a:extLst>
-          </p:cNvPr>
-          <p:cNvCxnSpPr>
-            <a:cxnSpLocks/>
-            <a:stCxn id="35" idx="3"/>
-            <a:endCxn id="48" idx="1"/>
-          </p:cNvCxnSpPr>
-          <p:nvPr/>
-        </p:nvCxnSpPr>
-        <p:spPr>
-          <a:xfrm>
-            <a:off x="8461658" y="1730632"/>
-            <a:ext cx="906355" cy="4390939"/>
-          </a:xfrm>
-          <a:prstGeom prst="bentConnector3">
-            <a:avLst>
-              <a:gd name="adj1" fmla="val 50000"/>
-            </a:avLst>
-          </a:prstGeom>
-          <a:ln>
-            <a:solidFill>
-              <a:schemeClr val="dk1"/>
-            </a:solidFill>
-            <a:tailEnd type="arrow"/>
-          </a:ln>
-        </p:spPr>
-        <p:style>
-          <a:lnRef idx="1">
-            <a:schemeClr val="accent1"/>
-          </a:lnRef>
-          <a:fillRef idx="0">
-            <a:schemeClr val="accent1"/>
-          </a:fillRef>
-          <a:effectRef idx="0">
-            <a:schemeClr val="accent1"/>
-          </a:effectRef>
-          <a:fontRef idx="minor">
-            <a:schemeClr val="tx1"/>
-          </a:fontRef>
-        </p:style>
-      </p:cxnSp>
-      <p:cxnSp>
-        <p:nvCxnSpPr>
-          <p:cNvPr id="55" name="꺾인 양쪽 화살표 연결선 18">
-            <a:extLst>
-              <a:ext uri="{FF2B5EF4-FFF2-40B4-BE49-F238E27FC236}">
-                <a16:creationId xmlns:a16="http://schemas.microsoft.com/office/drawing/2014/main" id="{AA4BF786-2129-746A-9AA3-9A21F4DA95DC}"/>
-              </a:ext>
-            </a:extLst>
-          </p:cNvPr>
-          <p:cNvCxnSpPr>
-            <a:cxnSpLocks/>
-            <a:stCxn id="33" idx="3"/>
-            <a:endCxn id="48" idx="1"/>
-          </p:cNvCxnSpPr>
-          <p:nvPr/>
-        </p:nvCxnSpPr>
-        <p:spPr>
-          <a:xfrm>
-            <a:off x="4618936" y="4314755"/>
-            <a:ext cx="4749077" cy="1806816"/>
-          </a:xfrm>
-          <a:prstGeom prst="bentConnector3">
-            <a:avLst>
-              <a:gd name="adj1" fmla="val 16038"/>
-            </a:avLst>
-          </a:prstGeom>
-          <a:ln>
-            <a:solidFill>
-              <a:schemeClr val="dk1"/>
-            </a:solidFill>
-            <a:tailEnd type="arrow"/>
-          </a:ln>
-        </p:spPr>
-        <p:style>
-          <a:lnRef idx="1">
-            <a:schemeClr val="accent1"/>
-          </a:lnRef>
-          <a:fillRef idx="0">
-            <a:schemeClr val="accent1"/>
-          </a:fillRef>
-          <a:effectRef idx="0">
-            <a:schemeClr val="accent1"/>
-          </a:effectRef>
-          <a:fontRef idx="minor">
-            <a:schemeClr val="tx1"/>
-          </a:fontRef>
-        </p:style>
-      </p:cxnSp>
-      <p:cxnSp>
-        <p:nvCxnSpPr>
-          <p:cNvPr id="61" name="꺾인 양쪽 화살표 연결선 18">
-            <a:extLst>
-              <a:ext uri="{FF2B5EF4-FFF2-40B4-BE49-F238E27FC236}">
-                <a16:creationId xmlns:a16="http://schemas.microsoft.com/office/drawing/2014/main" id="{33A2FA1F-665E-2689-2ACB-CEAC982402CF}"/>
-              </a:ext>
-            </a:extLst>
-          </p:cNvPr>
-          <p:cNvCxnSpPr>
-            <a:cxnSpLocks/>
-            <a:stCxn id="29" idx="3"/>
-            <a:endCxn id="37" idx="1"/>
-          </p:cNvCxnSpPr>
-          <p:nvPr/>
-        </p:nvCxnSpPr>
-        <p:spPr>
-          <a:xfrm>
-            <a:off x="4618937" y="2994316"/>
-            <a:ext cx="1942106" cy="1153861"/>
-          </a:xfrm>
-          <a:prstGeom prst="bentConnector3">
-            <a:avLst>
-              <a:gd name="adj1" fmla="val 50000"/>
-            </a:avLst>
-          </a:prstGeom>
-          <a:ln>
-            <a:solidFill>
-              <a:schemeClr val="dk1"/>
-            </a:solidFill>
-            <a:tailEnd type="arrow"/>
-          </a:ln>
-        </p:spPr>
-        <p:style>
-          <a:lnRef idx="1">
-            <a:schemeClr val="accent1"/>
-          </a:lnRef>
-          <a:fillRef idx="0">
-            <a:schemeClr val="accent1"/>
-          </a:fillRef>
-          <a:effectRef idx="0">
-            <a:schemeClr val="accent1"/>
-          </a:effectRef>
-          <a:fontRef idx="minor">
-            <a:schemeClr val="tx1"/>
-          </a:fontRef>
-        </p:style>
-      </p:cxnSp>
-      <p:cxnSp>
-        <p:nvCxnSpPr>
-          <p:cNvPr id="64" name="꺾인 양쪽 화살표 연결선 18">
-            <a:extLst>
-              <a:ext uri="{FF2B5EF4-FFF2-40B4-BE49-F238E27FC236}">
-                <a16:creationId xmlns:a16="http://schemas.microsoft.com/office/drawing/2014/main" id="{3D03D58E-FB20-BB79-DE7C-06A42C45BB70}"/>
-              </a:ext>
-            </a:extLst>
-          </p:cNvPr>
-          <p:cNvCxnSpPr>
-            <a:cxnSpLocks/>
-            <a:stCxn id="29" idx="3"/>
-            <a:endCxn id="35" idx="1"/>
-          </p:cNvCxnSpPr>
-          <p:nvPr/>
-        </p:nvCxnSpPr>
-        <p:spPr>
-          <a:xfrm flipV="1">
-            <a:off x="4618937" y="1730632"/>
-            <a:ext cx="1895014" cy="1263684"/>
-          </a:xfrm>
-          <a:prstGeom prst="bentConnector3">
-            <a:avLst>
-              <a:gd name="adj1" fmla="val 50000"/>
-            </a:avLst>
-          </a:prstGeom>
-          <a:ln>
-            <a:solidFill>
-              <a:schemeClr val="dk1"/>
-            </a:solidFill>
-            <a:tailEnd type="arrow"/>
-          </a:ln>
-        </p:spPr>
-        <p:style>
-          <a:lnRef idx="1">
-            <a:schemeClr val="accent1"/>
-          </a:lnRef>
-          <a:fillRef idx="0">
-            <a:schemeClr val="accent1"/>
-          </a:fillRef>
-          <a:effectRef idx="0">
-            <a:schemeClr val="accent1"/>
-          </a:effectRef>
-          <a:fontRef idx="minor">
-            <a:schemeClr val="tx1"/>
-          </a:fontRef>
-        </p:style>
-      </p:cxnSp>
-      <p:sp>
-        <p:nvSpPr>
-          <p:cNvPr id="91" name="다이아몬드 90">
-            <a:extLst>
-              <a:ext uri="{FF2B5EF4-FFF2-40B4-BE49-F238E27FC236}">
-                <a16:creationId xmlns:a16="http://schemas.microsoft.com/office/drawing/2014/main" id="{74CC2370-1DBC-167A-14C8-CAF8233671AE}"/>
-              </a:ext>
-            </a:extLst>
-          </p:cNvPr>
-          <p:cNvSpPr/>
-          <p:nvPr/>
-        </p:nvSpPr>
-        <p:spPr>
-          <a:xfrm>
-            <a:off x="2448748" y="4656985"/>
-            <a:ext cx="2390498" cy="1693186"/>
-          </a:xfrm>
-          <a:prstGeom prst="diamond">
-            <a:avLst/>
-          </a:prstGeom>
-          <a:solidFill>
-            <a:schemeClr val="bg1"/>
           </a:solidFill>
           <a:ln>
             <a:solidFill>
@@ -7726,72 +7526,17 @@
                   <a:sysClr val="windowText" lastClr="000000"/>
                 </a:solidFill>
               </a:rPr>
-              <a:t>모래 지형</a:t>
-            </a:r>
-            <a:r>
-              <a:rPr lang="en-US" altLang="ko-KR" dirty="0">
-                <a:solidFill>
-                  <a:sysClr val="windowText" lastClr="000000"/>
-                </a:solidFill>
-              </a:rPr>
-              <a:t>,</a:t>
-            </a:r>
-            <a:br>
-              <a:rPr lang="en-US" altLang="ko-KR" dirty="0">
-                <a:solidFill>
-                  <a:sysClr val="windowText" lastClr="000000"/>
-                </a:solidFill>
-              </a:rPr>
-            </a:br>
-            <a:r>
-              <a:rPr lang="ko-KR" altLang="en-US" dirty="0">
-                <a:solidFill>
-                  <a:sysClr val="windowText" lastClr="000000"/>
-                </a:solidFill>
-              </a:rPr>
-              <a:t>플레이어</a:t>
-            </a:r>
-            <a:r>
-              <a:rPr lang="en-US" altLang="ko-KR" dirty="0">
-                <a:solidFill>
-                  <a:sysClr val="windowText" lastClr="000000"/>
-                </a:solidFill>
-              </a:rPr>
-              <a:t> </a:t>
-            </a:r>
-            <a:r>
-              <a:rPr lang="ko-KR" altLang="en-US" dirty="0">
-                <a:solidFill>
-                  <a:sysClr val="windowText" lastClr="000000"/>
-                </a:solidFill>
-              </a:rPr>
-              <a:t>이동속도 </a:t>
-            </a:r>
-            <a:r>
-              <a:rPr lang="en-US" altLang="ko-KR" dirty="0">
-                <a:solidFill>
-                  <a:sysClr val="windowText" lastClr="000000"/>
-                </a:solidFill>
-              </a:rPr>
-              <a:t>1/3</a:t>
-            </a:r>
-            <a:r>
-              <a:rPr lang="ko-KR" altLang="en-US" dirty="0">
-                <a:solidFill>
-                  <a:sysClr val="windowText" lastClr="000000"/>
-                </a:solidFill>
-              </a:rPr>
-              <a:t>감소</a:t>
+              <a:t>늪</a:t>
             </a:r>
           </a:p>
         </p:txBody>
       </p:sp>
       <p:sp>
         <p:nvSpPr>
-          <p:cNvPr id="94" name="다이아몬드 93">
-            <a:extLst>
-              <a:ext uri="{FF2B5EF4-FFF2-40B4-BE49-F238E27FC236}">
-                <a16:creationId xmlns:a16="http://schemas.microsoft.com/office/drawing/2014/main" id="{7A49AC89-C484-B2DE-89BB-FD81F1C06155}"/>
+          <p:cNvPr id="98" name="사각형: 둥근 모서리 97">
+            <a:extLst>
+              <a:ext uri="{FF2B5EF4-FFF2-40B4-BE49-F238E27FC236}">
+                <a16:creationId xmlns:a16="http://schemas.microsoft.com/office/drawing/2014/main" id="{2B81C346-04AC-C07E-17EE-9D82F2DD08C9}"/>
               </a:ext>
             </a:extLst>
           </p:cNvPr>
@@ -7800,20 +7545,17 @@
         </p:nvSpPr>
         <p:spPr>
           <a:xfrm>
-            <a:off x="6340736" y="4473562"/>
-            <a:ext cx="2390498" cy="1222580"/>
+            <a:off x="1248444" y="3460716"/>
+            <a:ext cx="1361405" cy="1082709"/>
           </a:xfrm>
-          <a:prstGeom prst="diamond">
+          <a:prstGeom prst="roundRect">
             <a:avLst/>
           </a:prstGeom>
           <a:solidFill>
-            <a:schemeClr val="bg1"/>
+            <a:schemeClr val="bg2">
+              <a:lumMod val="90000"/>
+            </a:schemeClr>
           </a:solidFill>
-          <a:ln>
-            <a:solidFill>
-              <a:schemeClr val="tx1"/>
-            </a:solidFill>
-          </a:ln>
         </p:spPr>
         <p:style>
           <a:lnRef idx="2">
@@ -7837,66 +7579,462 @@
           <a:p>
             <a:pPr algn="ctr"/>
             <a:r>
-              <a:rPr lang="ko-KR" altLang="en-US" dirty="0">
+              <a:rPr lang="ko-KR" altLang="en-US">
                 <a:solidFill>
                   <a:sysClr val="windowText" lastClr="000000"/>
                 </a:solidFill>
               </a:rPr>
-              <a:t>늪 지형</a:t>
-            </a:r>
-            <a:r>
-              <a:rPr lang="en-US" altLang="ko-KR" dirty="0">
-                <a:solidFill>
-                  <a:sysClr val="windowText" lastClr="000000"/>
-                </a:solidFill>
-              </a:rPr>
-              <a:t>, </a:t>
-            </a:r>
-            <a:r>
-              <a:rPr lang="ko-KR" altLang="en-US" dirty="0">
-                <a:solidFill>
-                  <a:sysClr val="windowText" lastClr="000000"/>
-                </a:solidFill>
-              </a:rPr>
-              <a:t>이동속도 </a:t>
-            </a:r>
-            <a:r>
-              <a:rPr lang="en-US" altLang="ko-KR" dirty="0">
-                <a:solidFill>
-                  <a:sysClr val="windowText" lastClr="000000"/>
-                </a:solidFill>
-              </a:rPr>
-              <a:t>1/2</a:t>
-            </a:r>
-            <a:r>
-              <a:rPr lang="ko-KR" altLang="en-US" dirty="0">
-                <a:solidFill>
-                  <a:sysClr val="windowText" lastClr="000000"/>
-                </a:solidFill>
-              </a:rPr>
-              <a:t>감소</a:t>
+              <a:t>숲</a:t>
             </a:r>
           </a:p>
         </p:txBody>
       </p:sp>
       <p:sp>
         <p:nvSpPr>
-          <p:cNvPr id="104" name="타원 103">
-            <a:extLst>
-              <a:ext uri="{FF2B5EF4-FFF2-40B4-BE49-F238E27FC236}">
-                <a16:creationId xmlns:a16="http://schemas.microsoft.com/office/drawing/2014/main" id="{A8042C3D-45F7-D27A-3EBC-34591A33679D}"/>
-              </a:ext>
-            </a:extLst>
-          </p:cNvPr>
-          <p:cNvSpPr/>
+          <p:cNvPr id="100" name="TextBox 99">
+            <a:extLst>
+              <a:ext uri="{FF2B5EF4-FFF2-40B4-BE49-F238E27FC236}">
+                <a16:creationId xmlns:a16="http://schemas.microsoft.com/office/drawing/2014/main" id="{08F24490-07A8-ED4D-12EE-2780966A078B}"/>
+              </a:ext>
+            </a:extLst>
+          </p:cNvPr>
+          <p:cNvSpPr txBox="1"/>
           <p:nvPr/>
         </p:nvSpPr>
         <p:spPr>
           <a:xfrm>
-            <a:off x="8467256" y="901440"/>
-            <a:ext cx="3601601" cy="1677957"/>
+            <a:off x="4349071" y="3341690"/>
+            <a:ext cx="1025912" cy="307777"/>
           </a:xfrm>
-          <a:prstGeom prst="ellipse">
+          <a:prstGeom prst="rect">
+            <a:avLst/>
+          </a:prstGeom>
+          <a:noFill/>
+        </p:spPr>
+        <p:txBody>
+          <a:bodyPr wrap="square" rtlCol="0">
+            <a:spAutoFit/>
+          </a:bodyPr>
+          <a:lstStyle/>
+          <a:p>
+            <a:pPr algn="ctr"/>
+            <a:r>
+              <a:rPr lang="ko-KR" altLang="en-US" sz="1400" b="1" dirty="0"/>
+              <a:t>강</a:t>
+            </a:r>
+          </a:p>
+        </p:txBody>
+      </p:sp>
+      <p:sp>
+        <p:nvSpPr>
+          <p:cNvPr id="102" name="TextBox 101">
+            <a:extLst>
+              <a:ext uri="{FF2B5EF4-FFF2-40B4-BE49-F238E27FC236}">
+                <a16:creationId xmlns:a16="http://schemas.microsoft.com/office/drawing/2014/main" id="{1E3C8048-2622-E91A-F569-A33A08409DE3}"/>
+              </a:ext>
+            </a:extLst>
+          </p:cNvPr>
+          <p:cNvSpPr txBox="1"/>
+          <p:nvPr/>
+        </p:nvSpPr>
+        <p:spPr>
+          <a:xfrm>
+            <a:off x="2418364" y="4552710"/>
+            <a:ext cx="1025912" cy="338554"/>
+          </a:xfrm>
+          <a:prstGeom prst="rect">
+            <a:avLst/>
+          </a:prstGeom>
+          <a:noFill/>
+        </p:spPr>
+        <p:txBody>
+          <a:bodyPr wrap="square" rtlCol="0">
+            <a:spAutoFit/>
+          </a:bodyPr>
+          <a:lstStyle/>
+          <a:p>
+            <a:pPr algn="ctr"/>
+            <a:r>
+              <a:rPr lang="ko-KR" altLang="en-US" sz="1600" b="1" dirty="0">
+                <a:solidFill>
+                  <a:sysClr val="windowText" lastClr="000000"/>
+                </a:solidFill>
+              </a:rPr>
+              <a:t>산</a:t>
+            </a:r>
+          </a:p>
+        </p:txBody>
+      </p:sp>
+      <p:cxnSp>
+        <p:nvCxnSpPr>
+          <p:cNvPr id="8" name="직선 연결선 7">
+            <a:extLst>
+              <a:ext uri="{FF2B5EF4-FFF2-40B4-BE49-F238E27FC236}">
+                <a16:creationId xmlns:a16="http://schemas.microsoft.com/office/drawing/2014/main" id="{7CE35D27-4ADD-BA38-B676-C231C0D37567}"/>
+              </a:ext>
+            </a:extLst>
+          </p:cNvPr>
+          <p:cNvCxnSpPr>
+            <a:cxnSpLocks/>
+          </p:cNvCxnSpPr>
+          <p:nvPr/>
+        </p:nvCxnSpPr>
+        <p:spPr>
+          <a:xfrm flipV="1">
+            <a:off x="1679275" y="4175185"/>
+            <a:ext cx="316302" cy="966158"/>
+          </a:xfrm>
+          <a:prstGeom prst="line">
+            <a:avLst/>
+          </a:prstGeom>
+          <a:ln w="57150">
+            <a:solidFill>
+              <a:srgbClr val="FF0000"/>
+            </a:solidFill>
+            <a:prstDash val="sysDash"/>
+          </a:ln>
+        </p:spPr>
+        <p:style>
+          <a:lnRef idx="1">
+            <a:schemeClr val="accent1"/>
+          </a:lnRef>
+          <a:fillRef idx="0">
+            <a:schemeClr val="accent1"/>
+          </a:fillRef>
+          <a:effectRef idx="0">
+            <a:schemeClr val="accent1"/>
+          </a:effectRef>
+          <a:fontRef idx="minor">
+            <a:schemeClr val="tx1"/>
+          </a:fontRef>
+        </p:style>
+      </p:cxnSp>
+      <p:cxnSp>
+        <p:nvCxnSpPr>
+          <p:cNvPr id="10" name="직선 연결선 9">
+            <a:extLst>
+              <a:ext uri="{FF2B5EF4-FFF2-40B4-BE49-F238E27FC236}">
+                <a16:creationId xmlns:a16="http://schemas.microsoft.com/office/drawing/2014/main" id="{C32A5188-0E8F-0D78-4410-22EF23692B67}"/>
+              </a:ext>
+            </a:extLst>
+          </p:cNvPr>
+          <p:cNvCxnSpPr>
+            <a:cxnSpLocks/>
+          </p:cNvCxnSpPr>
+          <p:nvPr/>
+        </p:nvCxnSpPr>
+        <p:spPr>
+          <a:xfrm flipV="1">
+            <a:off x="2288875" y="4819291"/>
+            <a:ext cx="465827" cy="638354"/>
+          </a:xfrm>
+          <a:prstGeom prst="line">
+            <a:avLst/>
+          </a:prstGeom>
+          <a:ln w="57150">
+            <a:solidFill>
+              <a:srgbClr val="FF0000"/>
+            </a:solidFill>
+            <a:prstDash val="sysDash"/>
+          </a:ln>
+        </p:spPr>
+        <p:style>
+          <a:lnRef idx="1">
+            <a:schemeClr val="accent1"/>
+          </a:lnRef>
+          <a:fillRef idx="0">
+            <a:schemeClr val="accent1"/>
+          </a:fillRef>
+          <a:effectRef idx="0">
+            <a:schemeClr val="accent1"/>
+          </a:effectRef>
+          <a:fontRef idx="minor">
+            <a:schemeClr val="tx1"/>
+          </a:fontRef>
+        </p:style>
+      </p:cxnSp>
+      <p:cxnSp>
+        <p:nvCxnSpPr>
+          <p:cNvPr id="19" name="직선 연결선 18">
+            <a:extLst>
+              <a:ext uri="{FF2B5EF4-FFF2-40B4-BE49-F238E27FC236}">
+                <a16:creationId xmlns:a16="http://schemas.microsoft.com/office/drawing/2014/main" id="{5550E6E8-9B6F-C35B-594F-70AE0A6F1B58}"/>
+              </a:ext>
+            </a:extLst>
+          </p:cNvPr>
+          <p:cNvCxnSpPr>
+            <a:cxnSpLocks/>
+          </p:cNvCxnSpPr>
+          <p:nvPr/>
+        </p:nvCxnSpPr>
+        <p:spPr>
+          <a:xfrm flipH="1">
+            <a:off x="2104845" y="2923582"/>
+            <a:ext cx="1264273" cy="1021565"/>
+          </a:xfrm>
+          <a:prstGeom prst="line">
+            <a:avLst/>
+          </a:prstGeom>
+          <a:ln w="57150">
+            <a:solidFill>
+              <a:srgbClr val="FF0000"/>
+            </a:solidFill>
+            <a:prstDash val="sysDash"/>
+          </a:ln>
+        </p:spPr>
+        <p:style>
+          <a:lnRef idx="1">
+            <a:schemeClr val="accent1"/>
+          </a:lnRef>
+          <a:fillRef idx="0">
+            <a:schemeClr val="accent1"/>
+          </a:fillRef>
+          <a:effectRef idx="0">
+            <a:schemeClr val="accent1"/>
+          </a:effectRef>
+          <a:fontRef idx="minor">
+            <a:schemeClr val="tx1"/>
+          </a:fontRef>
+        </p:style>
+      </p:cxnSp>
+      <p:cxnSp>
+        <p:nvCxnSpPr>
+          <p:cNvPr id="24" name="직선 연결선 23">
+            <a:extLst>
+              <a:ext uri="{FF2B5EF4-FFF2-40B4-BE49-F238E27FC236}">
+                <a16:creationId xmlns:a16="http://schemas.microsoft.com/office/drawing/2014/main" id="{2044B077-A0C3-6C14-F814-4F7E526E3BE8}"/>
+              </a:ext>
+            </a:extLst>
+          </p:cNvPr>
+          <p:cNvCxnSpPr>
+            <a:cxnSpLocks/>
+          </p:cNvCxnSpPr>
+          <p:nvPr/>
+        </p:nvCxnSpPr>
+        <p:spPr>
+          <a:xfrm flipH="1">
+            <a:off x="2104845" y="2324101"/>
+            <a:ext cx="333555" cy="1621046"/>
+          </a:xfrm>
+          <a:prstGeom prst="line">
+            <a:avLst/>
+          </a:prstGeom>
+          <a:ln w="57150">
+            <a:solidFill>
+              <a:srgbClr val="FF0000"/>
+            </a:solidFill>
+            <a:prstDash val="sysDash"/>
+          </a:ln>
+        </p:spPr>
+        <p:style>
+          <a:lnRef idx="1">
+            <a:schemeClr val="accent1"/>
+          </a:lnRef>
+          <a:fillRef idx="0">
+            <a:schemeClr val="accent1"/>
+          </a:fillRef>
+          <a:effectRef idx="0">
+            <a:schemeClr val="accent1"/>
+          </a:effectRef>
+          <a:fontRef idx="minor">
+            <a:schemeClr val="tx1"/>
+          </a:fontRef>
+        </p:style>
+      </p:cxnSp>
+      <p:cxnSp>
+        <p:nvCxnSpPr>
+          <p:cNvPr id="29" name="직선 연결선 28">
+            <a:extLst>
+              <a:ext uri="{FF2B5EF4-FFF2-40B4-BE49-F238E27FC236}">
+                <a16:creationId xmlns:a16="http://schemas.microsoft.com/office/drawing/2014/main" id="{1A2DE262-B537-122C-114B-463C87EDB9D2}"/>
+              </a:ext>
+            </a:extLst>
+          </p:cNvPr>
+          <p:cNvCxnSpPr>
+            <a:cxnSpLocks/>
+          </p:cNvCxnSpPr>
+          <p:nvPr/>
+        </p:nvCxnSpPr>
+        <p:spPr>
+          <a:xfrm flipV="1">
+            <a:off x="2609849" y="1870163"/>
+            <a:ext cx="1435360" cy="119663"/>
+          </a:xfrm>
+          <a:prstGeom prst="line">
+            <a:avLst/>
+          </a:prstGeom>
+          <a:ln w="57150">
+            <a:solidFill>
+              <a:srgbClr val="FF0000"/>
+            </a:solidFill>
+            <a:prstDash val="sysDash"/>
+          </a:ln>
+        </p:spPr>
+        <p:style>
+          <a:lnRef idx="1">
+            <a:schemeClr val="accent1"/>
+          </a:lnRef>
+          <a:fillRef idx="0">
+            <a:schemeClr val="accent1"/>
+          </a:fillRef>
+          <a:effectRef idx="0">
+            <a:schemeClr val="accent1"/>
+          </a:effectRef>
+          <a:fontRef idx="minor">
+            <a:schemeClr val="tx1"/>
+          </a:fontRef>
+        </p:style>
+      </p:cxnSp>
+      <p:cxnSp>
+        <p:nvCxnSpPr>
+          <p:cNvPr id="33" name="직선 연결선 32">
+            <a:extLst>
+              <a:ext uri="{FF2B5EF4-FFF2-40B4-BE49-F238E27FC236}">
+                <a16:creationId xmlns:a16="http://schemas.microsoft.com/office/drawing/2014/main" id="{10DC381D-8F6D-AD90-56EC-EA030D352556}"/>
+              </a:ext>
+            </a:extLst>
+          </p:cNvPr>
+          <p:cNvCxnSpPr>
+            <a:cxnSpLocks/>
+          </p:cNvCxnSpPr>
+          <p:nvPr/>
+        </p:nvCxnSpPr>
+        <p:spPr>
+          <a:xfrm flipH="1">
+            <a:off x="2104845" y="2915728"/>
+            <a:ext cx="2541917" cy="983412"/>
+          </a:xfrm>
+          <a:prstGeom prst="line">
+            <a:avLst/>
+          </a:prstGeom>
+          <a:ln w="57150">
+            <a:solidFill>
+              <a:srgbClr val="FF0000"/>
+            </a:solidFill>
+            <a:prstDash val="sysDash"/>
+          </a:ln>
+        </p:spPr>
+        <p:style>
+          <a:lnRef idx="1">
+            <a:schemeClr val="accent1"/>
+          </a:lnRef>
+          <a:fillRef idx="0">
+            <a:schemeClr val="accent1"/>
+          </a:fillRef>
+          <a:effectRef idx="0">
+            <a:schemeClr val="accent1"/>
+          </a:effectRef>
+          <a:fontRef idx="minor">
+            <a:schemeClr val="tx1"/>
+          </a:fontRef>
+        </p:style>
+      </p:cxnSp>
+      <p:cxnSp>
+        <p:nvCxnSpPr>
+          <p:cNvPr id="37" name="직선 연결선 36">
+            <a:extLst>
+              <a:ext uri="{FF2B5EF4-FFF2-40B4-BE49-F238E27FC236}">
+                <a16:creationId xmlns:a16="http://schemas.microsoft.com/office/drawing/2014/main" id="{51D14DB9-DFE9-90E0-FF84-06986793D0EB}"/>
+              </a:ext>
+            </a:extLst>
+          </p:cNvPr>
+          <p:cNvCxnSpPr>
+            <a:cxnSpLocks/>
+          </p:cNvCxnSpPr>
+          <p:nvPr/>
+        </p:nvCxnSpPr>
+        <p:spPr>
+          <a:xfrm>
+            <a:off x="4133850" y="1920815"/>
+            <a:ext cx="512912" cy="649857"/>
+          </a:xfrm>
+          <a:prstGeom prst="line">
+            <a:avLst/>
+          </a:prstGeom>
+          <a:ln w="57150">
+            <a:solidFill>
+              <a:srgbClr val="FF0000"/>
+            </a:solidFill>
+            <a:prstDash val="sysDash"/>
+          </a:ln>
+        </p:spPr>
+        <p:style>
+          <a:lnRef idx="1">
+            <a:schemeClr val="accent1"/>
+          </a:lnRef>
+          <a:fillRef idx="0">
+            <a:schemeClr val="accent1"/>
+          </a:fillRef>
+          <a:effectRef idx="0">
+            <a:schemeClr val="accent1"/>
+          </a:effectRef>
+          <a:fontRef idx="minor">
+            <a:schemeClr val="tx1"/>
+          </a:fontRef>
+        </p:style>
+      </p:cxnSp>
+      <p:cxnSp>
+        <p:nvCxnSpPr>
+          <p:cNvPr id="43" name="직선 연결선 42">
+            <a:extLst>
+              <a:ext uri="{FF2B5EF4-FFF2-40B4-BE49-F238E27FC236}">
+                <a16:creationId xmlns:a16="http://schemas.microsoft.com/office/drawing/2014/main" id="{4B06D98F-2AB5-E389-09B3-1630D4725358}"/>
+              </a:ext>
+            </a:extLst>
+          </p:cNvPr>
+          <p:cNvCxnSpPr>
+            <a:cxnSpLocks/>
+          </p:cNvCxnSpPr>
+          <p:nvPr/>
+        </p:nvCxnSpPr>
+        <p:spPr>
+          <a:xfrm flipH="1">
+            <a:off x="3581400" y="1938478"/>
+            <a:ext cx="470912" cy="740012"/>
+          </a:xfrm>
+          <a:prstGeom prst="line">
+            <a:avLst/>
+          </a:prstGeom>
+          <a:ln w="57150">
+            <a:solidFill>
+              <a:srgbClr val="FF0000"/>
+            </a:solidFill>
+            <a:prstDash val="sysDash"/>
+          </a:ln>
+        </p:spPr>
+        <p:style>
+          <a:lnRef idx="1">
+            <a:schemeClr val="accent1"/>
+          </a:lnRef>
+          <a:fillRef idx="0">
+            <a:schemeClr val="accent1"/>
+          </a:fillRef>
+          <a:effectRef idx="0">
+            <a:schemeClr val="accent1"/>
+          </a:effectRef>
+          <a:fontRef idx="minor">
+            <a:schemeClr val="tx1"/>
+          </a:fontRef>
+        </p:style>
+      </p:cxnSp>
+      <p:sp>
+        <p:nvSpPr>
+          <p:cNvPr id="47" name="TextBox 46">
+            <a:extLst>
+              <a:ext uri="{FF2B5EF4-FFF2-40B4-BE49-F238E27FC236}">
+                <a16:creationId xmlns:a16="http://schemas.microsoft.com/office/drawing/2014/main" id="{D9E3BDF6-E604-94D5-E7EE-4F46917F1B41}"/>
+              </a:ext>
+            </a:extLst>
+          </p:cNvPr>
+          <p:cNvSpPr txBox="1"/>
+          <p:nvPr/>
+        </p:nvSpPr>
+        <p:spPr>
+          <a:xfrm>
+            <a:off x="1221173" y="4568334"/>
+            <a:ext cx="652416" cy="307777"/>
+          </a:xfrm>
+          <a:prstGeom prst="rect">
             <a:avLst/>
           </a:prstGeom>
           <a:solidFill>
@@ -7904,542 +8042,59 @@
           </a:solidFill>
           <a:ln>
             <a:solidFill>
-              <a:schemeClr val="tx1"/>
+              <a:srgbClr val="FF0000"/>
             </a:solidFill>
           </a:ln>
         </p:spPr>
-        <p:style>
-          <a:lnRef idx="2">
-            <a:schemeClr val="accent1">
-              <a:shade val="15000"/>
-            </a:schemeClr>
-          </a:lnRef>
-          <a:fillRef idx="1">
-            <a:schemeClr val="accent1"/>
-          </a:fillRef>
-          <a:effectRef idx="0">
-            <a:schemeClr val="accent1"/>
-          </a:effectRef>
-          <a:fontRef idx="minor">
-            <a:schemeClr val="lt1"/>
-          </a:fontRef>
-        </p:style>
         <p:txBody>
-          <a:bodyPr rtlCol="0" anchor="ctr"/>
+          <a:bodyPr wrap="square" rtlCol="0">
+            <a:spAutoFit/>
+          </a:bodyPr>
           <a:lstStyle/>
           <a:p>
             <a:pPr algn="ctr"/>
             <a:r>
-              <a:rPr lang="ko-KR" altLang="en-US" dirty="0">
-                <a:solidFill>
-                  <a:sysClr val="windowText" lastClr="000000"/>
-                </a:solidFill>
-              </a:rPr>
-              <a:t>생물</a:t>
-            </a:r>
-            <a:r>
-              <a:rPr lang="en-US" altLang="ko-KR" dirty="0">
-                <a:solidFill>
-                  <a:sysClr val="windowText" lastClr="000000"/>
-                </a:solidFill>
-              </a:rPr>
-              <a:t>_</a:t>
-            </a:r>
-            <a:r>
-              <a:rPr lang="ko-KR" altLang="en-US" dirty="0">
-                <a:solidFill>
-                  <a:sysClr val="windowText" lastClr="000000"/>
-                </a:solidFill>
-              </a:rPr>
-              <a:t>벌</a:t>
-            </a:r>
-            <a:br>
-              <a:rPr lang="en-US" altLang="ko-KR" dirty="0">
-                <a:solidFill>
-                  <a:sysClr val="windowText" lastClr="000000"/>
-                </a:solidFill>
-              </a:rPr>
-            </a:br>
-            <a:r>
-              <a:rPr lang="en-US" altLang="ko-KR" dirty="0">
-                <a:solidFill>
-                  <a:sysClr val="windowText" lastClr="000000"/>
-                </a:solidFill>
-              </a:rPr>
-              <a:t>: </a:t>
-            </a:r>
-            <a:r>
-              <a:rPr lang="ko-KR" altLang="en-US" dirty="0">
-                <a:solidFill>
-                  <a:sysClr val="windowText" lastClr="000000"/>
-                </a:solidFill>
-              </a:rPr>
-              <a:t>플레이어 방해</a:t>
-            </a:r>
-            <a:r>
-              <a:rPr lang="en-US" altLang="ko-KR" dirty="0">
-                <a:solidFill>
-                  <a:sysClr val="windowText" lastClr="000000"/>
-                </a:solidFill>
-              </a:rPr>
-              <a:t>,</a:t>
-            </a:r>
-            <a:br>
-              <a:rPr lang="en-US" altLang="ko-KR" dirty="0">
-                <a:solidFill>
-                  <a:sysClr val="windowText" lastClr="000000"/>
-                </a:solidFill>
-              </a:rPr>
-            </a:br>
-            <a:r>
-              <a:rPr lang="ko-KR" altLang="en-US" dirty="0">
-                <a:solidFill>
-                  <a:sysClr val="windowText" lastClr="000000"/>
-                </a:solidFill>
-              </a:rPr>
-              <a:t>플레이어 이동속도 </a:t>
-            </a:r>
-            <a:r>
-              <a:rPr lang="en-US" altLang="ko-KR" dirty="0">
-                <a:solidFill>
-                  <a:sysClr val="windowText" lastClr="000000"/>
-                </a:solidFill>
-              </a:rPr>
-              <a:t>6/5</a:t>
-            </a:r>
-            <a:r>
-              <a:rPr lang="ko-KR" altLang="en-US" dirty="0">
-                <a:solidFill>
-                  <a:sysClr val="windowText" lastClr="000000"/>
-                </a:solidFill>
-              </a:rPr>
-              <a:t>증가</a:t>
-            </a:r>
-            <a:r>
-              <a:rPr lang="en-US" altLang="ko-KR" dirty="0">
-                <a:solidFill>
-                  <a:sysClr val="windowText" lastClr="000000"/>
-                </a:solidFill>
-              </a:rPr>
-              <a:t>, </a:t>
-            </a:r>
-            <a:r>
-              <a:rPr lang="ko-KR" altLang="en-US" dirty="0">
-                <a:solidFill>
-                  <a:sysClr val="windowText" lastClr="000000"/>
-                </a:solidFill>
-              </a:rPr>
-              <a:t>방향회전율 </a:t>
-            </a:r>
-            <a:r>
-              <a:rPr lang="en-US" altLang="ko-KR" dirty="0">
-                <a:solidFill>
-                  <a:sysClr val="windowText" lastClr="000000"/>
-                </a:solidFill>
-              </a:rPr>
-              <a:t>3/2</a:t>
-            </a:r>
-            <a:r>
-              <a:rPr lang="ko-KR" altLang="en-US" dirty="0">
-                <a:solidFill>
-                  <a:sysClr val="windowText" lastClr="000000"/>
-                </a:solidFill>
-              </a:rPr>
-              <a:t>증가</a:t>
-            </a:r>
-            <a:r>
-              <a:rPr lang="en-US" altLang="ko-KR" dirty="0">
-                <a:solidFill>
-                  <a:sysClr val="windowText" lastClr="000000"/>
-                </a:solidFill>
-              </a:rPr>
-              <a:t>, </a:t>
-            </a:r>
-            <a:r>
-              <a:rPr lang="ko-KR" altLang="en-US" dirty="0">
-                <a:solidFill>
-                  <a:sysClr val="windowText" lastClr="000000"/>
-                </a:solidFill>
-              </a:rPr>
-              <a:t>최대 </a:t>
-            </a:r>
-            <a:r>
-              <a:rPr lang="en-US" altLang="ko-KR" dirty="0">
-                <a:solidFill>
-                  <a:sysClr val="windowText" lastClr="000000"/>
-                </a:solidFill>
-              </a:rPr>
-              <a:t>[15T] </a:t>
-            </a:r>
-            <a:r>
-              <a:rPr lang="ko-KR" altLang="en-US" dirty="0">
-                <a:solidFill>
-                  <a:sysClr val="windowText" lastClr="000000"/>
-                </a:solidFill>
-              </a:rPr>
-              <a:t>지속</a:t>
-            </a:r>
-            <a:endParaRPr lang="en-US" altLang="ko-KR" dirty="0">
+              <a:rPr lang="ko-KR" altLang="en-US" sz="1400" b="1" dirty="0">
+                <a:solidFill>
+                  <a:srgbClr val="C00000"/>
+                </a:solidFill>
+              </a:rPr>
+              <a:t>경로</a:t>
+            </a:r>
+            <a:r>
+              <a:rPr lang="en-US" altLang="ko-KR" sz="1400" b="1" dirty="0">
+                <a:solidFill>
+                  <a:srgbClr val="C00000"/>
+                </a:solidFill>
+              </a:rPr>
+              <a:t>a</a:t>
+            </a:r>
+            <a:endParaRPr lang="ko-KR" altLang="en-US" sz="1400" b="1" dirty="0">
               <a:solidFill>
-                <a:sysClr val="windowText" lastClr="000000"/>
+                <a:srgbClr val="C00000"/>
               </a:solidFill>
             </a:endParaRPr>
           </a:p>
         </p:txBody>
       </p:sp>
-      <p:grpSp>
-        <p:nvGrpSpPr>
-          <p:cNvPr id="108" name="그룹 107">
-            <a:extLst>
-              <a:ext uri="{FF2B5EF4-FFF2-40B4-BE49-F238E27FC236}">
-                <a16:creationId xmlns:a16="http://schemas.microsoft.com/office/drawing/2014/main" id="{1601F852-A91A-A0DF-CC44-F42BB55A71EC}"/>
-              </a:ext>
-            </a:extLst>
-          </p:cNvPr>
-          <p:cNvGrpSpPr/>
-          <p:nvPr/>
-        </p:nvGrpSpPr>
-        <p:grpSpPr>
-          <a:xfrm>
-            <a:off x="123143" y="802178"/>
-            <a:ext cx="4046434" cy="1477328"/>
-            <a:chOff x="9079016" y="0"/>
-            <a:chExt cx="4046434" cy="1477328"/>
-          </a:xfrm>
-        </p:grpSpPr>
-        <p:sp>
-          <p:nvSpPr>
-            <p:cNvPr id="44" name="TextBox 43">
-              <a:extLst>
-                <a:ext uri="{FF2B5EF4-FFF2-40B4-BE49-F238E27FC236}">
-                  <a16:creationId xmlns:a16="http://schemas.microsoft.com/office/drawing/2014/main" id="{6CC55629-E4F3-57CF-CC18-E93B5BE95B2E}"/>
-                </a:ext>
-              </a:extLst>
-            </p:cNvPr>
-            <p:cNvSpPr txBox="1"/>
-            <p:nvPr/>
-          </p:nvSpPr>
-          <p:spPr>
-            <a:xfrm>
-              <a:off x="9079016" y="0"/>
-              <a:ext cx="4046434" cy="1477328"/>
-            </a:xfrm>
-            <a:prstGeom prst="rect">
-              <a:avLst/>
-            </a:prstGeom>
-            <a:noFill/>
-            <a:ln>
-              <a:solidFill>
-                <a:schemeClr val="accent1"/>
-              </a:solidFill>
-            </a:ln>
-          </p:spPr>
-          <p:txBody>
-            <a:bodyPr wrap="square" rtlCol="0">
-              <a:spAutoFit/>
-            </a:bodyPr>
-            <a:lstStyle/>
-            <a:p>
-              <a:r>
-                <a:rPr lang="ko-KR" altLang="en-US" dirty="0"/>
-                <a:t>제한시간 </a:t>
-              </a:r>
-              <a:r>
-                <a:rPr lang="en-US" altLang="ko-KR" dirty="0"/>
-                <a:t>= 100T (T</a:t>
-              </a:r>
-              <a:r>
-                <a:rPr lang="ko-KR" altLang="en-US" dirty="0"/>
-                <a:t>는 임의의 수</a:t>
-              </a:r>
-              <a:r>
-                <a:rPr lang="en-US" altLang="ko-KR" dirty="0"/>
-                <a:t>)</a:t>
-              </a:r>
-              <a:br>
-                <a:rPr lang="en-US" altLang="ko-KR" dirty="0"/>
-              </a:br>
-              <a:r>
-                <a:rPr lang="en-US" altLang="ko-KR" dirty="0"/>
-                <a:t>[</a:t>
-              </a:r>
-              <a:r>
-                <a:rPr lang="en-US" altLang="ko-KR" dirty="0" err="1"/>
-                <a:t>nT</a:t>
-              </a:r>
-              <a:r>
-                <a:rPr lang="en-US" altLang="ko-KR" dirty="0"/>
-                <a:t>] : </a:t>
-              </a:r>
-              <a:r>
-                <a:rPr lang="ko-KR" altLang="en-US" dirty="0"/>
-                <a:t>직선 거리기반 예측 시간</a:t>
-              </a:r>
-              <a:endParaRPr lang="en-US" altLang="ko-KR" dirty="0"/>
-            </a:p>
-            <a:p>
-              <a:r>
-                <a:rPr lang="en-US" altLang="ko-KR" dirty="0"/>
-                <a:t>     : 1</a:t>
-              </a:r>
-              <a:r>
-                <a:rPr lang="ko-KR" altLang="en-US" dirty="0"/>
-                <a:t>차 요소</a:t>
-              </a:r>
-              <a:r>
-                <a:rPr lang="en-US" altLang="ko-KR" dirty="0"/>
-                <a:t>(</a:t>
-              </a:r>
-              <a:r>
-                <a:rPr lang="ko-KR" altLang="en-US" dirty="0"/>
-                <a:t>거리 기반</a:t>
-              </a:r>
-              <a:r>
-                <a:rPr lang="en-US" altLang="ko-KR" dirty="0"/>
-                <a:t>)</a:t>
-              </a:r>
-            </a:p>
-            <a:p>
-              <a:r>
-                <a:rPr lang="en-US" altLang="ko-KR" dirty="0"/>
-                <a:t>     : 2</a:t>
-              </a:r>
-              <a:r>
-                <a:rPr lang="ko-KR" altLang="en-US" dirty="0"/>
-                <a:t>차 요소</a:t>
-              </a:r>
-              <a:r>
-                <a:rPr lang="en-US" altLang="ko-KR" dirty="0"/>
-                <a:t>(</a:t>
-              </a:r>
-              <a:r>
-                <a:rPr lang="ko-KR" altLang="en-US" dirty="0"/>
-                <a:t>지형 기반</a:t>
-              </a:r>
-              <a:r>
-                <a:rPr lang="en-US" altLang="ko-KR" dirty="0"/>
-                <a:t>)</a:t>
-              </a:r>
-            </a:p>
-            <a:p>
-              <a:r>
-                <a:rPr lang="en-US" altLang="ko-KR" dirty="0"/>
-                <a:t>     : 3</a:t>
-              </a:r>
-              <a:r>
-                <a:rPr lang="ko-KR" altLang="en-US" dirty="0"/>
-                <a:t>차 요소</a:t>
-              </a:r>
-              <a:r>
-                <a:rPr lang="en-US" altLang="ko-KR" dirty="0"/>
-                <a:t>(</a:t>
-              </a:r>
-              <a:r>
-                <a:rPr lang="ko-KR" altLang="en-US" dirty="0"/>
-                <a:t>생물 기반</a:t>
-              </a:r>
-              <a:r>
-                <a:rPr lang="en-US" altLang="ko-KR" dirty="0"/>
-                <a:t>)</a:t>
-              </a:r>
-            </a:p>
-          </p:txBody>
-        </p:sp>
-        <p:sp>
-          <p:nvSpPr>
-            <p:cNvPr id="97" name="다이아몬드 96">
-              <a:extLst>
-                <a:ext uri="{FF2B5EF4-FFF2-40B4-BE49-F238E27FC236}">
-                  <a16:creationId xmlns:a16="http://schemas.microsoft.com/office/drawing/2014/main" id="{5611A8C6-9AFC-15AE-4E74-434A6FECAF3A}"/>
-                </a:ext>
-              </a:extLst>
-            </p:cNvPr>
-            <p:cNvSpPr/>
-            <p:nvPr/>
-          </p:nvSpPr>
-          <p:spPr>
-            <a:xfrm>
-              <a:off x="9120807" y="904332"/>
-              <a:ext cx="398820" cy="271347"/>
-            </a:xfrm>
-            <a:prstGeom prst="diamond">
-              <a:avLst/>
-            </a:prstGeom>
-            <a:solidFill>
-              <a:schemeClr val="bg1"/>
-            </a:solidFill>
-            <a:ln>
-              <a:solidFill>
-                <a:schemeClr val="accent1"/>
-              </a:solidFill>
-            </a:ln>
-          </p:spPr>
-          <p:style>
-            <a:lnRef idx="2">
-              <a:schemeClr val="accent1">
-                <a:shade val="15000"/>
-              </a:schemeClr>
-            </a:lnRef>
-            <a:fillRef idx="1">
-              <a:schemeClr val="accent1"/>
-            </a:fillRef>
-            <a:effectRef idx="0">
-              <a:schemeClr val="accent1"/>
-            </a:effectRef>
-            <a:fontRef idx="minor">
-              <a:schemeClr val="lt1"/>
-            </a:fontRef>
-          </p:style>
-          <p:txBody>
-            <a:bodyPr rtlCol="0" anchor="ctr"/>
-            <a:lstStyle/>
-            <a:p>
-              <a:pPr algn="ctr"/>
-              <a:endParaRPr lang="ko-KR" altLang="en-US" dirty="0">
-                <a:solidFill>
-                  <a:sysClr val="windowText" lastClr="000000"/>
-                </a:solidFill>
-              </a:endParaRPr>
-            </a:p>
-          </p:txBody>
-        </p:sp>
-        <p:sp>
-          <p:nvSpPr>
-            <p:cNvPr id="99" name="직사각형 98">
-              <a:extLst>
-                <a:ext uri="{FF2B5EF4-FFF2-40B4-BE49-F238E27FC236}">
-                  <a16:creationId xmlns:a16="http://schemas.microsoft.com/office/drawing/2014/main" id="{32C9CC5E-83D7-4903-86B4-80FF36DDA064}"/>
-                </a:ext>
-              </a:extLst>
-            </p:cNvPr>
-            <p:cNvSpPr/>
-            <p:nvPr/>
-          </p:nvSpPr>
-          <p:spPr>
-            <a:xfrm>
-              <a:off x="9137515" y="652463"/>
-              <a:ext cx="365403" cy="224700"/>
-            </a:xfrm>
-            <a:prstGeom prst="rect">
-              <a:avLst/>
-            </a:prstGeom>
-            <a:solidFill>
-              <a:schemeClr val="lt1"/>
-            </a:solidFill>
-            <a:ln>
-              <a:solidFill>
-                <a:schemeClr val="accent1"/>
-              </a:solidFill>
-            </a:ln>
-          </p:spPr>
-          <p:style>
-            <a:lnRef idx="2">
-              <a:schemeClr val="accent1">
-                <a:shade val="20000"/>
-              </a:schemeClr>
-            </a:lnRef>
-            <a:fillRef idx="1">
-              <a:schemeClr val="accent1"/>
-            </a:fillRef>
-            <a:effectRef idx="0">
-              <a:schemeClr val="accent1"/>
-            </a:effectRef>
-            <a:fontRef idx="minor">
-              <a:schemeClr val="lt1"/>
-            </a:fontRef>
-          </p:style>
-          <p:txBody>
-            <a:bodyPr anchor="ctr"/>
-            <a:lstStyle/>
-            <a:p>
-              <a:pPr lvl="0" algn="ctr">
-                <a:defRPr/>
-              </a:pPr>
-              <a:endParaRPr lang="ko-KR" altLang="en-US" dirty="0">
-                <a:solidFill>
-                  <a:srgbClr val="000000"/>
-                </a:solidFill>
-              </a:endParaRPr>
-            </a:p>
-          </p:txBody>
-        </p:sp>
-        <p:sp>
-          <p:nvSpPr>
-            <p:cNvPr id="106" name="타원 105">
-              <a:extLst>
-                <a:ext uri="{FF2B5EF4-FFF2-40B4-BE49-F238E27FC236}">
-                  <a16:creationId xmlns:a16="http://schemas.microsoft.com/office/drawing/2014/main" id="{71225554-CD4A-1C98-996D-29327B292E34}"/>
-                </a:ext>
-              </a:extLst>
-            </p:cNvPr>
-            <p:cNvSpPr/>
-            <p:nvPr/>
-          </p:nvSpPr>
-          <p:spPr>
-            <a:xfrm>
-              <a:off x="9137515" y="1203406"/>
-              <a:ext cx="339383" cy="220891"/>
-            </a:xfrm>
-            <a:prstGeom prst="ellipse">
-              <a:avLst/>
-            </a:prstGeom>
-            <a:solidFill>
-              <a:schemeClr val="bg1"/>
-            </a:solidFill>
-            <a:ln>
-              <a:solidFill>
-                <a:schemeClr val="accent1"/>
-              </a:solidFill>
-            </a:ln>
-          </p:spPr>
-          <p:style>
-            <a:lnRef idx="2">
-              <a:schemeClr val="accent1">
-                <a:shade val="15000"/>
-              </a:schemeClr>
-            </a:lnRef>
-            <a:fillRef idx="1">
-              <a:schemeClr val="accent1"/>
-            </a:fillRef>
-            <a:effectRef idx="0">
-              <a:schemeClr val="accent1"/>
-            </a:effectRef>
-            <a:fontRef idx="minor">
-              <a:schemeClr val="lt1"/>
-            </a:fontRef>
-          </p:style>
-          <p:txBody>
-            <a:bodyPr rtlCol="0" anchor="ctr"/>
-            <a:lstStyle/>
-            <a:p>
-              <a:pPr algn="ctr"/>
-              <a:endParaRPr lang="ko-KR" altLang="en-US" dirty="0">
-                <a:solidFill>
-                  <a:sysClr val="windowText" lastClr="000000"/>
-                </a:solidFill>
-              </a:endParaRPr>
-            </a:p>
-          </p:txBody>
-        </p:sp>
-      </p:grpSp>
       <p:sp>
         <p:nvSpPr>
-          <p:cNvPr id="129" name="사각형: 둥근 모서리 128">
-            <a:extLst>
-              <a:ext uri="{FF2B5EF4-FFF2-40B4-BE49-F238E27FC236}">
-                <a16:creationId xmlns:a16="http://schemas.microsoft.com/office/drawing/2014/main" id="{F28FC141-8401-ECBB-69D9-2C923EE18BCD}"/>
-              </a:ext>
-            </a:extLst>
-          </p:cNvPr>
-          <p:cNvSpPr/>
+          <p:cNvPr id="51" name="TextBox 50">
+            <a:extLst>
+              <a:ext uri="{FF2B5EF4-FFF2-40B4-BE49-F238E27FC236}">
+                <a16:creationId xmlns:a16="http://schemas.microsoft.com/office/drawing/2014/main" id="{73D4D11C-36F3-0685-17A9-DEE3BA65A757}"/>
+              </a:ext>
+            </a:extLst>
+          </p:cNvPr>
+          <p:cNvSpPr txBox="1"/>
           <p:nvPr/>
         </p:nvSpPr>
         <p:spPr>
           <a:xfrm>
-            <a:off x="351333" y="3260695"/>
-            <a:ext cx="1867839" cy="798243"/>
+            <a:off x="2424550" y="5157907"/>
+            <a:ext cx="652416" cy="307777"/>
           </a:xfrm>
-          <a:prstGeom prst="roundRect">
+          <a:prstGeom prst="rect">
             <a:avLst/>
           </a:prstGeom>
           <a:solidFill>
@@ -8447,99 +8102,216 @@
           </a:solidFill>
           <a:ln>
             <a:solidFill>
-              <a:schemeClr val="tx2"/>
+              <a:srgbClr val="FF0000"/>
             </a:solidFill>
           </a:ln>
         </p:spPr>
-        <p:style>
-          <a:lnRef idx="2">
-            <a:schemeClr val="accent1">
-              <a:shade val="15000"/>
-            </a:schemeClr>
-          </a:lnRef>
-          <a:fillRef idx="1">
-            <a:schemeClr val="accent1"/>
-          </a:fillRef>
-          <a:effectRef idx="0">
-            <a:schemeClr val="accent1"/>
-          </a:effectRef>
-          <a:fontRef idx="minor">
-            <a:schemeClr val="lt1"/>
-          </a:fontRef>
-        </p:style>
         <p:txBody>
-          <a:bodyPr rtlCol="0" anchor="ctr"/>
+          <a:bodyPr wrap="square" rtlCol="0">
+            <a:spAutoFit/>
+          </a:bodyPr>
           <a:lstStyle/>
           <a:p>
-            <a:pPr lvl="0" algn="ctr">
-              <a:defRPr/>
-            </a:pPr>
-            <a:r>
-              <a:rPr lang="ko-KR" altLang="en-US">
-                <a:solidFill>
-                  <a:srgbClr val="000000"/>
-                </a:solidFill>
-              </a:rPr>
-              <a:t>배달품</a:t>
-            </a:r>
-            <a:r>
-              <a:rPr lang="en-US" altLang="ko-KR">
-                <a:solidFill>
-                  <a:srgbClr val="000000"/>
-                </a:solidFill>
-              </a:rPr>
-              <a:t>_</a:t>
-            </a:r>
-            <a:r>
-              <a:rPr lang="ko-KR" altLang="en-US">
-                <a:solidFill>
-                  <a:srgbClr val="000000"/>
-                </a:solidFill>
-              </a:rPr>
-              <a:t>꿀</a:t>
-            </a:r>
-            <a:br>
-              <a:rPr lang="en-US" altLang="ko-KR">
-                <a:solidFill>
-                  <a:srgbClr val="000000"/>
-                </a:solidFill>
-              </a:rPr>
-            </a:br>
-            <a:r>
-              <a:rPr lang="ko-KR" altLang="en-US">
-                <a:solidFill>
-                  <a:srgbClr val="000000"/>
-                </a:solidFill>
-              </a:rPr>
-              <a:t>배송지</a:t>
-            </a:r>
-            <a:r>
-              <a:rPr lang="en-US" altLang="ko-KR">
-                <a:solidFill>
-                  <a:srgbClr val="000000"/>
-                </a:solidFill>
-              </a:rPr>
-              <a:t>_</a:t>
-            </a:r>
-            <a:r>
-              <a:rPr lang="ko-KR" altLang="en-US">
-                <a:solidFill>
-                  <a:srgbClr val="000000"/>
-                </a:solidFill>
-              </a:rPr>
-              <a:t>주거지</a:t>
-            </a:r>
-            <a:r>
-              <a:rPr lang="en-US" altLang="ko-KR">
-                <a:solidFill>
-                  <a:srgbClr val="000000"/>
-                </a:solidFill>
-              </a:rPr>
-              <a:t>3</a:t>
-            </a:r>
-            <a:endParaRPr lang="ko-KR" altLang="en-US" dirty="0">
+            <a:pPr algn="ctr"/>
+            <a:r>
+              <a:rPr lang="ko-KR" altLang="en-US" sz="1400" b="1" dirty="0">
+                <a:solidFill>
+                  <a:srgbClr val="C00000"/>
+                </a:solidFill>
+              </a:rPr>
+              <a:t>경로</a:t>
+            </a:r>
+            <a:r>
+              <a:rPr lang="en-US" altLang="ko-KR" sz="1400" b="1" dirty="0">
+                <a:solidFill>
+                  <a:srgbClr val="C00000"/>
+                </a:solidFill>
+              </a:rPr>
+              <a:t>b</a:t>
+            </a:r>
+            <a:endParaRPr lang="ko-KR" altLang="en-US" sz="1400" b="1" dirty="0">
               <a:solidFill>
-                <a:srgbClr val="000000"/>
+                <a:srgbClr val="C00000"/>
+              </a:solidFill>
+            </a:endParaRPr>
+          </a:p>
+        </p:txBody>
+      </p:sp>
+      <p:sp>
+        <p:nvSpPr>
+          <p:cNvPr id="53" name="TextBox 52">
+            <a:extLst>
+              <a:ext uri="{FF2B5EF4-FFF2-40B4-BE49-F238E27FC236}">
+                <a16:creationId xmlns:a16="http://schemas.microsoft.com/office/drawing/2014/main" id="{1838375D-3EEB-E799-4221-62827EBA27B4}"/>
+              </a:ext>
+            </a:extLst>
+          </p:cNvPr>
+          <p:cNvSpPr txBox="1"/>
+          <p:nvPr/>
+        </p:nvSpPr>
+        <p:spPr>
+          <a:xfrm>
+            <a:off x="1477965" y="2492237"/>
+            <a:ext cx="853334" cy="307777"/>
+          </a:xfrm>
+          <a:prstGeom prst="rect">
+            <a:avLst/>
+          </a:prstGeom>
+          <a:solidFill>
+            <a:schemeClr val="bg1"/>
+          </a:solidFill>
+          <a:ln>
+            <a:solidFill>
+              <a:srgbClr val="FF0000"/>
+            </a:solidFill>
+          </a:ln>
+        </p:spPr>
+        <p:txBody>
+          <a:bodyPr wrap="square" rtlCol="0">
+            <a:spAutoFit/>
+          </a:bodyPr>
+          <a:lstStyle/>
+          <a:p>
+            <a:pPr algn="ctr"/>
+            <a:r>
+              <a:rPr lang="ko-KR" altLang="en-US" sz="1400" b="1" dirty="0">
+                <a:solidFill>
+                  <a:srgbClr val="C00000"/>
+                </a:solidFill>
+              </a:rPr>
+              <a:t>경로</a:t>
+            </a:r>
+            <a:r>
+              <a:rPr lang="en-US" altLang="ko-KR" sz="1400" b="1" dirty="0" err="1">
+                <a:solidFill>
+                  <a:srgbClr val="C00000"/>
+                </a:solidFill>
+              </a:rPr>
+              <a:t>a_a</a:t>
+            </a:r>
+            <a:endParaRPr lang="ko-KR" altLang="en-US" sz="1400" b="1" dirty="0">
+              <a:solidFill>
+                <a:srgbClr val="C00000"/>
+              </a:solidFill>
+            </a:endParaRPr>
+          </a:p>
+        </p:txBody>
+      </p:sp>
+      <p:sp>
+        <p:nvSpPr>
+          <p:cNvPr id="55" name="TextBox 54">
+            <a:extLst>
+              <a:ext uri="{FF2B5EF4-FFF2-40B4-BE49-F238E27FC236}">
+                <a16:creationId xmlns:a16="http://schemas.microsoft.com/office/drawing/2014/main" id="{701032E7-1D39-FDEE-6061-5957A677F3D3}"/>
+              </a:ext>
+            </a:extLst>
+          </p:cNvPr>
+          <p:cNvSpPr txBox="1"/>
+          <p:nvPr/>
+        </p:nvSpPr>
+        <p:spPr>
+          <a:xfrm>
+            <a:off x="3889224" y="3161889"/>
+            <a:ext cx="853334" cy="307777"/>
+          </a:xfrm>
+          <a:prstGeom prst="rect">
+            <a:avLst/>
+          </a:prstGeom>
+          <a:solidFill>
+            <a:schemeClr val="bg1"/>
+          </a:solidFill>
+          <a:ln>
+            <a:solidFill>
+              <a:srgbClr val="FF0000"/>
+            </a:solidFill>
+          </a:ln>
+        </p:spPr>
+        <p:txBody>
+          <a:bodyPr wrap="square" rtlCol="0">
+            <a:spAutoFit/>
+          </a:bodyPr>
+          <a:lstStyle/>
+          <a:p>
+            <a:pPr algn="ctr"/>
+            <a:r>
+              <a:rPr lang="ko-KR" altLang="en-US" sz="1400" b="1" dirty="0">
+                <a:solidFill>
+                  <a:srgbClr val="C00000"/>
+                </a:solidFill>
+              </a:rPr>
+              <a:t>경로</a:t>
+            </a:r>
+            <a:r>
+              <a:rPr lang="en-US" altLang="ko-KR" sz="1400" b="1" dirty="0" err="1">
+                <a:solidFill>
+                  <a:srgbClr val="C00000"/>
+                </a:solidFill>
+              </a:rPr>
+              <a:t>a_c</a:t>
+            </a:r>
+            <a:endParaRPr lang="ko-KR" altLang="en-US" sz="1400" b="1" dirty="0">
+              <a:solidFill>
+                <a:srgbClr val="C00000"/>
+              </a:solidFill>
+            </a:endParaRPr>
+          </a:p>
+        </p:txBody>
+      </p:sp>
+      <p:sp>
+        <p:nvSpPr>
+          <p:cNvPr id="57" name="TextBox 56">
+            <a:extLst>
+              <a:ext uri="{FF2B5EF4-FFF2-40B4-BE49-F238E27FC236}">
+                <a16:creationId xmlns:a16="http://schemas.microsoft.com/office/drawing/2014/main" id="{BA629B5A-90CD-BA3B-D926-C0CEA2ACF822}"/>
+              </a:ext>
+            </a:extLst>
+          </p:cNvPr>
+          <p:cNvSpPr txBox="1"/>
+          <p:nvPr/>
+        </p:nvSpPr>
+        <p:spPr>
+          <a:xfrm>
+            <a:off x="2449305" y="3059085"/>
+            <a:ext cx="853334" cy="307777"/>
+          </a:xfrm>
+          <a:prstGeom prst="rect">
+            <a:avLst/>
+          </a:prstGeom>
+          <a:solidFill>
+            <a:schemeClr val="bg1"/>
+          </a:solidFill>
+          <a:ln>
+            <a:solidFill>
+              <a:srgbClr val="FF0000"/>
+            </a:solidFill>
+          </a:ln>
+        </p:spPr>
+        <p:txBody>
+          <a:bodyPr wrap="square" rtlCol="0">
+            <a:spAutoFit/>
+          </a:bodyPr>
+          <a:lstStyle/>
+          <a:p>
+            <a:pPr algn="ctr"/>
+            <a:r>
+              <a:rPr lang="ko-KR" altLang="en-US" sz="1400" b="1" dirty="0">
+                <a:solidFill>
+                  <a:srgbClr val="C00000"/>
+                </a:solidFill>
+              </a:rPr>
+              <a:t>경로</a:t>
+            </a:r>
+            <a:r>
+              <a:rPr lang="en-US" altLang="ko-KR" sz="1400" b="1" dirty="0" err="1">
+                <a:solidFill>
+                  <a:srgbClr val="C00000"/>
+                </a:solidFill>
+              </a:rPr>
+              <a:t>a_b</a:t>
+            </a:r>
+            <a:endParaRPr lang="ko-KR" altLang="en-US" sz="1400" b="1" dirty="0">
+              <a:solidFill>
+                <a:srgbClr val="C00000"/>
               </a:solidFill>
             </a:endParaRPr>
           </a:p>
@@ -8548,7 +8320,7 @@
     </p:spTree>
     <p:extLst>
       <p:ext uri="{BB962C8B-B14F-4D97-AF65-F5344CB8AC3E}">
-        <p14:creationId xmlns:p14="http://schemas.microsoft.com/office/powerpoint/2010/main" val="686561383"/>
+        <p14:creationId xmlns:p14="http://schemas.microsoft.com/office/powerpoint/2010/main" val="808974731"/>
       </p:ext>
     </p:extLst>
   </p:cSld>
@@ -8661,15 +8433,63 @@
           </p:cNvPr>
           <p:cNvCxnSpPr>
             <a:cxnSpLocks/>
-            <a:stCxn id="37" idx="3"/>
+            <a:stCxn id="33" idx="3"/>
             <a:endCxn id="48" idx="1"/>
           </p:cNvCxnSpPr>
           <p:nvPr/>
         </p:nvCxnSpPr>
         <p:spPr>
+          <a:xfrm flipV="1">
+            <a:off x="7263443" y="4782829"/>
+            <a:ext cx="2846442" cy="76056"/>
+          </a:xfrm>
+          <a:prstGeom prst="bentConnector3">
+            <a:avLst>
+              <a:gd name="adj1" fmla="val 80306"/>
+            </a:avLst>
+          </a:prstGeom>
+          <a:ln>
+            <a:solidFill>
+              <a:schemeClr val="dk1"/>
+            </a:solidFill>
+            <a:tailEnd type="arrow"/>
+          </a:ln>
+        </p:spPr>
+        <p:style>
+          <a:lnRef idx="1">
+            <a:schemeClr val="accent1"/>
+          </a:lnRef>
+          <a:fillRef idx="0">
+            <a:schemeClr val="accent1"/>
+          </a:fillRef>
+          <a:effectRef idx="0">
+            <a:schemeClr val="accent1"/>
+          </a:effectRef>
+          <a:fontRef idx="minor">
+            <a:schemeClr val="tx1"/>
+          </a:fontRef>
+        </p:style>
+      </p:cxnSp>
+      <p:cxnSp>
+        <p:nvCxnSpPr>
+          <p:cNvPr id="23" name="꺾인 양쪽 화살표 연결선 18">
+            <a:extLst>
+              <a:ext uri="{FF2B5EF4-FFF2-40B4-BE49-F238E27FC236}">
+                <a16:creationId xmlns:a16="http://schemas.microsoft.com/office/drawing/2014/main" id="{D2192B84-B964-FBF7-A006-F951C73DDCE7}"/>
+              </a:ext>
+            </a:extLst>
+          </p:cNvPr>
+          <p:cNvCxnSpPr>
+            <a:cxnSpLocks/>
+            <a:stCxn id="129" idx="3"/>
+            <a:endCxn id="18" idx="1"/>
+          </p:cNvCxnSpPr>
+          <p:nvPr/>
+        </p:nvCxnSpPr>
+        <p:spPr>
           <a:xfrm>
-            <a:off x="8503153" y="4148177"/>
-            <a:ext cx="864860" cy="1973394"/>
+            <a:off x="2079463" y="2843589"/>
+            <a:ext cx="231403" cy="826820"/>
           </a:xfrm>
           <a:prstGeom prst="bentConnector3">
             <a:avLst>
@@ -8698,54 +8518,6 @@
           </a:fontRef>
         </p:style>
       </p:cxnSp>
-      <p:cxnSp>
-        <p:nvCxnSpPr>
-          <p:cNvPr id="23" name="꺾인 양쪽 화살표 연결선 18">
-            <a:extLst>
-              <a:ext uri="{FF2B5EF4-FFF2-40B4-BE49-F238E27FC236}">
-                <a16:creationId xmlns:a16="http://schemas.microsoft.com/office/drawing/2014/main" id="{D2192B84-B964-FBF7-A006-F951C73DDCE7}"/>
-              </a:ext>
-            </a:extLst>
-          </p:cNvPr>
-          <p:cNvCxnSpPr>
-            <a:cxnSpLocks/>
-            <a:stCxn id="129" idx="3"/>
-            <a:endCxn id="29" idx="1"/>
-          </p:cNvCxnSpPr>
-          <p:nvPr/>
-        </p:nvCxnSpPr>
-        <p:spPr>
-          <a:xfrm>
-            <a:off x="2249154" y="2931969"/>
-            <a:ext cx="471962" cy="62347"/>
-          </a:xfrm>
-          <a:prstGeom prst="bentConnector3">
-            <a:avLst>
-              <a:gd name="adj1" fmla="val 50000"/>
-            </a:avLst>
-          </a:prstGeom>
-          <a:ln>
-            <a:solidFill>
-              <a:schemeClr val="dk1"/>
-            </a:solidFill>
-            <a:tailEnd type="arrow"/>
-          </a:ln>
-        </p:spPr>
-        <p:style>
-          <a:lnRef idx="1">
-            <a:schemeClr val="accent1"/>
-          </a:lnRef>
-          <a:fillRef idx="0">
-            <a:schemeClr val="accent1"/>
-          </a:fillRef>
-          <a:effectRef idx="0">
-            <a:schemeClr val="accent1"/>
-          </a:effectRef>
-          <a:fontRef idx="minor">
-            <a:schemeClr val="tx1"/>
-          </a:fontRef>
-        </p:style>
-      </p:cxnSp>
       <p:sp>
         <p:nvSpPr>
           <p:cNvPr id="29" name="직사각형 28">
@@ -8760,8 +8532,8 @@
         </p:nvSpPr>
         <p:spPr>
           <a:xfrm>
-            <a:off x="2721116" y="2668631"/>
-            <a:ext cx="1897821" cy="651370"/>
+            <a:off x="5717006" y="3295233"/>
+            <a:ext cx="1547582" cy="651370"/>
           </a:xfrm>
           <a:prstGeom prst="rect">
             <a:avLst/>
@@ -8807,12 +8579,20 @@
               <a:t>경로</a:t>
             </a:r>
             <a:r>
+              <a:rPr lang="en-US" altLang="ko-KR" dirty="0" err="1">
+                <a:solidFill>
+                  <a:srgbClr val="000000"/>
+                </a:solidFill>
+              </a:rPr>
+              <a:t>a_b</a:t>
+            </a:r>
+            <a:r>
               <a:rPr lang="en-US" altLang="ko-KR" dirty="0">
                 <a:solidFill>
                   <a:srgbClr val="000000"/>
                 </a:solidFill>
               </a:rPr>
-              <a:t>a_</a:t>
+              <a:t>_</a:t>
             </a:r>
             <a:r>
               <a:rPr lang="ko-KR" altLang="en-US" dirty="0">
@@ -8822,42 +8602,6 @@
               </a:rPr>
               <a:t>숲</a:t>
             </a:r>
-            <a:br>
-              <a:rPr lang="en-US" altLang="ko-KR" dirty="0">
-                <a:solidFill>
-                  <a:srgbClr val="000000"/>
-                </a:solidFill>
-              </a:rPr>
-            </a:br>
-            <a:r>
-              <a:rPr lang="en-US" altLang="ko-KR" dirty="0">
-                <a:solidFill>
-                  <a:srgbClr val="000000"/>
-                </a:solidFill>
-              </a:rPr>
-              <a:t>: </a:t>
-            </a:r>
-            <a:r>
-              <a:rPr lang="ko-KR" altLang="en-US" dirty="0">
-                <a:solidFill>
-                  <a:srgbClr val="000000"/>
-                </a:solidFill>
-              </a:rPr>
-              <a:t>직선 거리</a:t>
-            </a:r>
-            <a:r>
-              <a:rPr lang="en-US" altLang="ko-KR" dirty="0">
-                <a:solidFill>
-                  <a:srgbClr val="000000"/>
-                </a:solidFill>
-              </a:rPr>
-              <a:t>[40T] </a:t>
-            </a:r>
-            <a:endParaRPr lang="ko-KR" altLang="en-US" dirty="0">
-              <a:solidFill>
-                <a:srgbClr val="000000"/>
-              </a:solidFill>
-            </a:endParaRPr>
           </a:p>
         </p:txBody>
       </p:sp>
@@ -8875,8 +8619,8 @@
         </p:nvSpPr>
         <p:spPr>
           <a:xfrm>
-            <a:off x="2717795" y="3538000"/>
-            <a:ext cx="1895014" cy="651370"/>
+            <a:off x="5718150" y="4533200"/>
+            <a:ext cx="1545293" cy="651370"/>
           </a:xfrm>
           <a:prstGeom prst="rect">
             <a:avLst/>
@@ -8922,12 +8666,20 @@
               <a:t>경로</a:t>
             </a:r>
             <a:r>
+              <a:rPr lang="en-US" altLang="ko-KR" dirty="0" err="1">
+                <a:solidFill>
+                  <a:srgbClr val="000000"/>
+                </a:solidFill>
+              </a:rPr>
+              <a:t>a_c</a:t>
+            </a:r>
+            <a:r>
               <a:rPr lang="en-US" altLang="ko-KR" dirty="0">
                 <a:solidFill>
                   <a:srgbClr val="000000"/>
                 </a:solidFill>
               </a:rPr>
-              <a:t>b_</a:t>
+              <a:t>_</a:t>
             </a:r>
             <a:r>
               <a:rPr lang="ko-KR" altLang="en-US" dirty="0">
@@ -8935,44 +8687,8 @@
                   <a:srgbClr val="000000"/>
                 </a:solidFill>
               </a:rPr>
-              <a:t>모래언덕</a:t>
-            </a:r>
-            <a:br>
-              <a:rPr lang="en-US" altLang="ko-KR" dirty="0">
-                <a:solidFill>
-                  <a:srgbClr val="000000"/>
-                </a:solidFill>
-              </a:rPr>
-            </a:br>
-            <a:r>
-              <a:rPr lang="en-US" altLang="ko-KR" dirty="0">
-                <a:solidFill>
-                  <a:srgbClr val="000000"/>
-                </a:solidFill>
-              </a:rPr>
-              <a:t>: </a:t>
-            </a:r>
-            <a:r>
-              <a:rPr lang="ko-KR" altLang="en-US" dirty="0">
-                <a:solidFill>
-                  <a:srgbClr val="000000"/>
-                </a:solidFill>
-              </a:rPr>
-              <a:t>곡선 거리</a:t>
-            </a:r>
-            <a:r>
-              <a:rPr lang="en-US" altLang="ko-KR" dirty="0">
-                <a:solidFill>
-                  <a:srgbClr val="000000"/>
-                </a:solidFill>
-              </a:rPr>
-              <a:t>[80T]</a:t>
-            </a:r>
-            <a:endParaRPr lang="ko-KR" altLang="en-US" dirty="0">
-              <a:solidFill>
-                <a:srgbClr val="000000"/>
-              </a:solidFill>
-            </a:endParaRPr>
+              <a:t>늪</a:t>
+            </a:r>
           </a:p>
         </p:txBody>
       </p:sp>
@@ -8990,8 +8706,8 @@
         </p:nvSpPr>
         <p:spPr>
           <a:xfrm>
-            <a:off x="6513951" y="1404947"/>
-            <a:ext cx="1947707" cy="651370"/>
+            <a:off x="5718150" y="2079439"/>
+            <a:ext cx="1545293" cy="651370"/>
           </a:xfrm>
           <a:prstGeom prst="rect">
             <a:avLst/>
@@ -9052,14 +8768,6 @@
               </a:rPr>
               <a:t>_</a:t>
             </a:r>
-            <a:r>
-              <a:rPr lang="ko-KR" altLang="en-US" dirty="0">
-                <a:solidFill>
-                  <a:srgbClr val="000000"/>
-                </a:solidFill>
-              </a:rPr>
-              <a:t>숲</a:t>
-            </a:r>
             <a:br>
               <a:rPr lang="en-US" altLang="ko-KR" dirty="0">
                 <a:solidFill>
@@ -9068,157 +8776,13 @@
               </a:rPr>
             </a:br>
             <a:r>
-              <a:rPr lang="en-US" altLang="ko-KR" dirty="0">
+              <a:rPr lang="ko-KR" altLang="en-US" dirty="0">
                 <a:solidFill>
                   <a:srgbClr val="000000"/>
                 </a:solidFill>
               </a:rPr>
-              <a:t>: </a:t>
-            </a:r>
-            <a:r>
-              <a:rPr lang="ko-KR" altLang="en-US" dirty="0">
-                <a:solidFill>
-                  <a:srgbClr val="000000"/>
-                </a:solidFill>
-              </a:rPr>
-              <a:t>곡선 거리</a:t>
-            </a:r>
-            <a:r>
-              <a:rPr lang="en-US" altLang="ko-KR" dirty="0">
-                <a:solidFill>
-                  <a:srgbClr val="000000"/>
-                </a:solidFill>
-              </a:rPr>
-              <a:t>[20T] </a:t>
-            </a:r>
-            <a:endParaRPr lang="ko-KR" altLang="en-US" dirty="0">
-              <a:solidFill>
-                <a:srgbClr val="000000"/>
-              </a:solidFill>
-            </a:endParaRPr>
-          </a:p>
-        </p:txBody>
-      </p:sp>
-      <p:sp>
-        <p:nvSpPr>
-          <p:cNvPr id="37" name="직사각형 36">
-            <a:extLst>
-              <a:ext uri="{FF2B5EF4-FFF2-40B4-BE49-F238E27FC236}">
-                <a16:creationId xmlns:a16="http://schemas.microsoft.com/office/drawing/2014/main" id="{3D549110-E78D-BC2D-38BF-24B661E25D57}"/>
-              </a:ext>
-            </a:extLst>
-          </p:cNvPr>
-          <p:cNvSpPr/>
-          <p:nvPr/>
-        </p:nvSpPr>
-        <p:spPr>
-          <a:xfrm>
-            <a:off x="6561043" y="3822492"/>
-            <a:ext cx="1942110" cy="651370"/>
-          </a:xfrm>
-          <a:prstGeom prst="rect">
-            <a:avLst/>
-          </a:prstGeom>
-          <a:solidFill>
-            <a:schemeClr val="lt1"/>
-          </a:solidFill>
-          <a:ln>
-            <a:solidFill>
-              <a:schemeClr val="dk1"/>
-            </a:solidFill>
-          </a:ln>
-        </p:spPr>
-        <p:style>
-          <a:lnRef idx="2">
-            <a:schemeClr val="accent1">
-              <a:shade val="20000"/>
-            </a:schemeClr>
-          </a:lnRef>
-          <a:fillRef idx="1">
-            <a:schemeClr val="accent1"/>
-          </a:fillRef>
-          <a:effectRef idx="0">
-            <a:schemeClr val="accent1"/>
-          </a:effectRef>
-          <a:fontRef idx="minor">
-            <a:schemeClr val="lt1"/>
-          </a:fontRef>
-        </p:style>
-        <p:txBody>
-          <a:bodyPr anchor="ctr"/>
-          <a:lstStyle/>
-          <a:p>
-            <a:pPr lvl="0" algn="ctr">
-              <a:defRPr/>
-            </a:pPr>
-            <a:r>
-              <a:rPr lang="ko-KR" altLang="en-US" dirty="0">
-                <a:solidFill>
-                  <a:srgbClr val="000000"/>
-                </a:solidFill>
-              </a:rPr>
-              <a:t>경로</a:t>
-            </a:r>
-            <a:r>
-              <a:rPr lang="en-US" altLang="ko-KR" dirty="0" err="1">
-                <a:solidFill>
-                  <a:srgbClr val="000000"/>
-                </a:solidFill>
-              </a:rPr>
-              <a:t>a_b</a:t>
-            </a:r>
-            <a:r>
-              <a:rPr lang="en-US" altLang="ko-KR" dirty="0">
-                <a:solidFill>
-                  <a:srgbClr val="000000"/>
-                </a:solidFill>
-              </a:rPr>
-              <a:t>_</a:t>
-            </a:r>
-            <a:r>
-              <a:rPr lang="ko-KR" altLang="en-US" dirty="0">
-                <a:solidFill>
-                  <a:srgbClr val="000000"/>
-                </a:solidFill>
-              </a:rPr>
-              <a:t>늪</a:t>
-            </a:r>
-            <a:br>
-              <a:rPr lang="en-US" altLang="ko-KR" dirty="0">
-                <a:solidFill>
-                  <a:srgbClr val="000000"/>
-                </a:solidFill>
-              </a:rPr>
-            </a:br>
-            <a:r>
-              <a:rPr lang="en-US" altLang="ko-KR" dirty="0">
-                <a:solidFill>
-                  <a:srgbClr val="000000"/>
-                </a:solidFill>
-              </a:rPr>
-              <a:t>: </a:t>
-            </a:r>
-            <a:r>
-              <a:rPr lang="ko-KR" altLang="en-US" dirty="0">
-                <a:solidFill>
-                  <a:srgbClr val="000000"/>
-                </a:solidFill>
-              </a:rPr>
-              <a:t>직선 거리</a:t>
-            </a:r>
-            <a:r>
-              <a:rPr lang="en-US" altLang="ko-KR" dirty="0">
-                <a:solidFill>
-                  <a:srgbClr val="000000"/>
-                </a:solidFill>
-              </a:rPr>
-              <a:t>[10T] </a:t>
-            </a:r>
-            <a:endParaRPr lang="ko-KR" altLang="en-US" dirty="0">
-              <a:solidFill>
-                <a:srgbClr val="000000"/>
-              </a:solidFill>
-            </a:endParaRPr>
+              <a:t>모래언덕</a:t>
+            </a:r>
           </a:p>
         </p:txBody>
       </p:sp>
@@ -9234,14 +8798,14 @@
           <p:cNvCxnSpPr>
             <a:cxnSpLocks/>
             <a:stCxn id="129" idx="3"/>
-            <a:endCxn id="33" idx="1"/>
+            <a:endCxn id="15" idx="1"/>
           </p:cNvCxnSpPr>
           <p:nvPr/>
         </p:nvCxnSpPr>
         <p:spPr>
-          <a:xfrm>
-            <a:off x="2249154" y="2931969"/>
-            <a:ext cx="468641" cy="931716"/>
+          <a:xfrm flipV="1">
+            <a:off x="2079463" y="2689050"/>
+            <a:ext cx="755198" cy="154539"/>
           </a:xfrm>
           <a:prstGeom prst="bentConnector3">
             <a:avLst>
@@ -9284,7 +8848,7 @@
         </p:nvSpPr>
         <p:spPr>
           <a:xfrm>
-            <a:off x="9368013" y="5795886"/>
+            <a:off x="10109885" y="4457144"/>
             <a:ext cx="1316825" cy="651370"/>
           </a:xfrm>
           <a:prstGeom prst="rect">
@@ -9374,8 +8938,56 @@
         </p:nvCxnSpPr>
         <p:spPr>
           <a:xfrm>
-            <a:off x="8461658" y="1730632"/>
-            <a:ext cx="906355" cy="4390939"/>
+            <a:off x="7263443" y="2405124"/>
+            <a:ext cx="2846442" cy="2377705"/>
+          </a:xfrm>
+          <a:prstGeom prst="bentConnector3">
+            <a:avLst>
+              <a:gd name="adj1" fmla="val 86367"/>
+            </a:avLst>
+          </a:prstGeom>
+          <a:ln>
+            <a:solidFill>
+              <a:schemeClr val="dk1"/>
+            </a:solidFill>
+            <a:tailEnd type="arrow"/>
+          </a:ln>
+        </p:spPr>
+        <p:style>
+          <a:lnRef idx="1">
+            <a:schemeClr val="accent1"/>
+          </a:lnRef>
+          <a:fillRef idx="0">
+            <a:schemeClr val="accent1"/>
+          </a:fillRef>
+          <a:effectRef idx="0">
+            <a:schemeClr val="accent1"/>
+          </a:effectRef>
+          <a:fontRef idx="minor">
+            <a:schemeClr val="tx1"/>
+          </a:fontRef>
+        </p:style>
+      </p:cxnSp>
+      <p:cxnSp>
+        <p:nvCxnSpPr>
+          <p:cNvPr id="55" name="꺾인 양쪽 화살표 연결선 18">
+            <a:extLst>
+              <a:ext uri="{FF2B5EF4-FFF2-40B4-BE49-F238E27FC236}">
+                <a16:creationId xmlns:a16="http://schemas.microsoft.com/office/drawing/2014/main" id="{E3BAE558-A243-5D1A-116D-896A5C8120CF}"/>
+              </a:ext>
+            </a:extLst>
+          </p:cNvPr>
+          <p:cNvCxnSpPr>
+            <a:cxnSpLocks/>
+            <a:stCxn id="15" idx="3"/>
+            <a:endCxn id="33" idx="1"/>
+          </p:cNvCxnSpPr>
+          <p:nvPr/>
+        </p:nvCxnSpPr>
+        <p:spPr>
+          <a:xfrm>
+            <a:off x="4271151" y="2689050"/>
+            <a:ext cx="1446999" cy="2169835"/>
           </a:xfrm>
           <a:prstGeom prst="bentConnector3">
             <a:avLst>
@@ -9406,24 +9018,24 @@
       </p:cxnSp>
       <p:cxnSp>
         <p:nvCxnSpPr>
-          <p:cNvPr id="55" name="꺾인 양쪽 화살표 연결선 18">
-            <a:extLst>
-              <a:ext uri="{FF2B5EF4-FFF2-40B4-BE49-F238E27FC236}">
-                <a16:creationId xmlns:a16="http://schemas.microsoft.com/office/drawing/2014/main" id="{E3BAE558-A243-5D1A-116D-896A5C8120CF}"/>
+          <p:cNvPr id="61" name="꺾인 양쪽 화살표 연결선 18">
+            <a:extLst>
+              <a:ext uri="{FF2B5EF4-FFF2-40B4-BE49-F238E27FC236}">
+                <a16:creationId xmlns:a16="http://schemas.microsoft.com/office/drawing/2014/main" id="{8E15F792-E1E2-E6D3-5C3E-8655A10F227B}"/>
               </a:ext>
             </a:extLst>
           </p:cNvPr>
           <p:cNvCxnSpPr>
             <a:cxnSpLocks/>
-            <a:stCxn id="33" idx="3"/>
-            <a:endCxn id="48" idx="1"/>
+            <a:stCxn id="15" idx="3"/>
+            <a:endCxn id="29" idx="1"/>
           </p:cNvCxnSpPr>
           <p:nvPr/>
         </p:nvCxnSpPr>
         <p:spPr>
           <a:xfrm>
-            <a:off x="4612809" y="3863685"/>
-            <a:ext cx="4755204" cy="2257886"/>
+            <a:off x="4271151" y="2689050"/>
+            <a:ext cx="1445855" cy="931868"/>
           </a:xfrm>
           <a:prstGeom prst="bentConnector3">
             <a:avLst>
@@ -9454,24 +9066,24 @@
       </p:cxnSp>
       <p:cxnSp>
         <p:nvCxnSpPr>
-          <p:cNvPr id="61" name="꺾인 양쪽 화살표 연결선 18">
-            <a:extLst>
-              <a:ext uri="{FF2B5EF4-FFF2-40B4-BE49-F238E27FC236}">
-                <a16:creationId xmlns:a16="http://schemas.microsoft.com/office/drawing/2014/main" id="{8E15F792-E1E2-E6D3-5C3E-8655A10F227B}"/>
+          <p:cNvPr id="64" name="꺾인 양쪽 화살표 연결선 18">
+            <a:extLst>
+              <a:ext uri="{FF2B5EF4-FFF2-40B4-BE49-F238E27FC236}">
+                <a16:creationId xmlns:a16="http://schemas.microsoft.com/office/drawing/2014/main" id="{8935A02D-E2CC-7F95-BE77-18B6CC902198}"/>
               </a:ext>
             </a:extLst>
           </p:cNvPr>
           <p:cNvCxnSpPr>
             <a:cxnSpLocks/>
-            <a:stCxn id="29" idx="3"/>
-            <a:endCxn id="37" idx="1"/>
+            <a:stCxn id="15" idx="3"/>
+            <a:endCxn id="35" idx="1"/>
           </p:cNvCxnSpPr>
           <p:nvPr/>
         </p:nvCxnSpPr>
         <p:spPr>
-          <a:xfrm>
-            <a:off x="4618937" y="2994316"/>
-            <a:ext cx="1942106" cy="1153861"/>
+          <a:xfrm flipV="1">
+            <a:off x="4271151" y="2405124"/>
+            <a:ext cx="1446999" cy="283926"/>
           </a:xfrm>
           <a:prstGeom prst="bentConnector3">
             <a:avLst>
@@ -9500,54 +9112,6 @@
           </a:fontRef>
         </p:style>
       </p:cxnSp>
-      <p:cxnSp>
-        <p:nvCxnSpPr>
-          <p:cNvPr id="64" name="꺾인 양쪽 화살표 연결선 18">
-            <a:extLst>
-              <a:ext uri="{FF2B5EF4-FFF2-40B4-BE49-F238E27FC236}">
-                <a16:creationId xmlns:a16="http://schemas.microsoft.com/office/drawing/2014/main" id="{8935A02D-E2CC-7F95-BE77-18B6CC902198}"/>
-              </a:ext>
-            </a:extLst>
-          </p:cNvPr>
-          <p:cNvCxnSpPr>
-            <a:cxnSpLocks/>
-            <a:stCxn id="29" idx="3"/>
-            <a:endCxn id="35" idx="1"/>
-          </p:cNvCxnSpPr>
-          <p:nvPr/>
-        </p:nvCxnSpPr>
-        <p:spPr>
-          <a:xfrm flipV="1">
-            <a:off x="4618937" y="1730632"/>
-            <a:ext cx="1895014" cy="1263684"/>
-          </a:xfrm>
-          <a:prstGeom prst="bentConnector3">
-            <a:avLst>
-              <a:gd name="adj1" fmla="val 50000"/>
-            </a:avLst>
-          </a:prstGeom>
-          <a:ln>
-            <a:solidFill>
-              <a:schemeClr val="dk1"/>
-            </a:solidFill>
-            <a:tailEnd type="arrow"/>
-          </a:ln>
-        </p:spPr>
-        <p:style>
-          <a:lnRef idx="1">
-            <a:schemeClr val="accent1"/>
-          </a:lnRef>
-          <a:fillRef idx="0">
-            <a:schemeClr val="accent1"/>
-          </a:fillRef>
-          <a:effectRef idx="0">
-            <a:schemeClr val="accent1"/>
-          </a:effectRef>
-          <a:fontRef idx="minor">
-            <a:schemeClr val="tx1"/>
-          </a:fontRef>
-        </p:style>
-      </p:cxnSp>
       <p:sp>
         <p:nvSpPr>
           <p:cNvPr id="91" name="다이아몬드 90">
@@ -9562,8 +9126,8 @@
         </p:nvSpPr>
         <p:spPr>
           <a:xfrm>
-            <a:off x="2489713" y="4205915"/>
-            <a:ext cx="2390498" cy="1693186"/>
+            <a:off x="5805897" y="1131614"/>
+            <a:ext cx="1369798" cy="927695"/>
           </a:xfrm>
           <a:prstGeom prst="diamond">
             <a:avLst/>
@@ -9606,61 +9170,6 @@
               </a:rPr>
               <a:t>모래 지형</a:t>
             </a:r>
-            <a:r>
-              <a:rPr lang="en-US" altLang="ko-KR" dirty="0">
-                <a:solidFill>
-                  <a:sysClr val="windowText" lastClr="000000"/>
-                </a:solidFill>
-              </a:rPr>
-              <a:t>,</a:t>
-            </a:r>
-            <a:br>
-              <a:rPr lang="en-US" altLang="ko-KR" dirty="0">
-                <a:solidFill>
-                  <a:sysClr val="windowText" lastClr="000000"/>
-                </a:solidFill>
-              </a:rPr>
-            </a:br>
-            <a:r>
-              <a:rPr lang="ko-KR" altLang="en-US" dirty="0">
-                <a:solidFill>
-                  <a:sysClr val="windowText" lastClr="000000"/>
-                </a:solidFill>
-              </a:rPr>
-              <a:t>플레이어</a:t>
-            </a:r>
-            <a:r>
-              <a:rPr lang="en-US" altLang="ko-KR" dirty="0">
-                <a:solidFill>
-                  <a:sysClr val="windowText" lastClr="000000"/>
-                </a:solidFill>
-              </a:rPr>
-              <a:t> </a:t>
-            </a:r>
-            <a:r>
-              <a:rPr lang="ko-KR" altLang="en-US" dirty="0">
-                <a:solidFill>
-                  <a:sysClr val="windowText" lastClr="000000"/>
-                </a:solidFill>
-              </a:rPr>
-              <a:t>이동속도 </a:t>
-            </a:r>
-            <a:r>
-              <a:rPr lang="en-US" altLang="ko-KR" dirty="0">
-                <a:solidFill>
-                  <a:sysClr val="windowText" lastClr="000000"/>
-                </a:solidFill>
-              </a:rPr>
-              <a:t>1/3</a:t>
-            </a:r>
-            <a:r>
-              <a:rPr lang="ko-KR" altLang="en-US" dirty="0">
-                <a:solidFill>
-                  <a:sysClr val="windowText" lastClr="000000"/>
-                </a:solidFill>
-              </a:rPr>
-              <a:t>감소</a:t>
-            </a:r>
           </a:p>
         </p:txBody>
       </p:sp>
@@ -9678,8 +9187,8 @@
         </p:nvSpPr>
         <p:spPr>
           <a:xfrm>
-            <a:off x="6340736" y="4473562"/>
-            <a:ext cx="2390498" cy="1222580"/>
+            <a:off x="5805897" y="5224829"/>
+            <a:ext cx="1369798" cy="1048329"/>
           </a:xfrm>
           <a:prstGeom prst="diamond">
             <a:avLst/>
@@ -9722,246 +9231,6 @@
               </a:rPr>
               <a:t>늪 지형</a:t>
             </a:r>
-            <a:r>
-              <a:rPr lang="en-US" altLang="ko-KR" dirty="0">
-                <a:solidFill>
-                  <a:sysClr val="windowText" lastClr="000000"/>
-                </a:solidFill>
-              </a:rPr>
-              <a:t>, </a:t>
-            </a:r>
-            <a:r>
-              <a:rPr lang="ko-KR" altLang="en-US" dirty="0">
-                <a:solidFill>
-                  <a:sysClr val="windowText" lastClr="000000"/>
-                </a:solidFill>
-              </a:rPr>
-              <a:t>이동속도 </a:t>
-            </a:r>
-            <a:r>
-              <a:rPr lang="en-US" altLang="ko-KR" dirty="0">
-                <a:solidFill>
-                  <a:sysClr val="windowText" lastClr="000000"/>
-                </a:solidFill>
-              </a:rPr>
-              <a:t>1/2</a:t>
-            </a:r>
-            <a:r>
-              <a:rPr lang="ko-KR" altLang="en-US" dirty="0">
-                <a:solidFill>
-                  <a:sysClr val="windowText" lastClr="000000"/>
-                </a:solidFill>
-              </a:rPr>
-              <a:t>감소</a:t>
-            </a:r>
-          </a:p>
-        </p:txBody>
-      </p:sp>
-      <p:sp>
-        <p:nvSpPr>
-          <p:cNvPr id="104" name="타원 103">
-            <a:extLst>
-              <a:ext uri="{FF2B5EF4-FFF2-40B4-BE49-F238E27FC236}">
-                <a16:creationId xmlns:a16="http://schemas.microsoft.com/office/drawing/2014/main" id="{B8726C45-0EAE-8256-2FDE-81B3E3FC9FC4}"/>
-              </a:ext>
-            </a:extLst>
-          </p:cNvPr>
-          <p:cNvSpPr/>
-          <p:nvPr/>
-        </p:nvSpPr>
-        <p:spPr>
-          <a:xfrm>
-            <a:off x="8467256" y="901440"/>
-            <a:ext cx="3601601" cy="1677957"/>
-          </a:xfrm>
-          <a:prstGeom prst="ellipse">
-            <a:avLst/>
-          </a:prstGeom>
-          <a:solidFill>
-            <a:schemeClr val="bg1"/>
-          </a:solidFill>
-          <a:ln>
-            <a:solidFill>
-              <a:schemeClr val="tx1"/>
-            </a:solidFill>
-          </a:ln>
-        </p:spPr>
-        <p:style>
-          <a:lnRef idx="2">
-            <a:schemeClr val="accent1">
-              <a:shade val="15000"/>
-            </a:schemeClr>
-          </a:lnRef>
-          <a:fillRef idx="1">
-            <a:schemeClr val="accent1"/>
-          </a:fillRef>
-          <a:effectRef idx="0">
-            <a:schemeClr val="accent1"/>
-          </a:effectRef>
-          <a:fontRef idx="minor">
-            <a:schemeClr val="lt1"/>
-          </a:fontRef>
-        </p:style>
-        <p:txBody>
-          <a:bodyPr rtlCol="0" anchor="ctr"/>
-          <a:lstStyle/>
-          <a:p>
-            <a:pPr algn="ctr"/>
-            <a:r>
-              <a:rPr lang="ko-KR" altLang="en-US" dirty="0">
-                <a:solidFill>
-                  <a:sysClr val="windowText" lastClr="000000"/>
-                </a:solidFill>
-              </a:rPr>
-              <a:t>생물</a:t>
-            </a:r>
-            <a:r>
-              <a:rPr lang="en-US" altLang="ko-KR" dirty="0">
-                <a:solidFill>
-                  <a:sysClr val="windowText" lastClr="000000"/>
-                </a:solidFill>
-              </a:rPr>
-              <a:t>_</a:t>
-            </a:r>
-            <a:r>
-              <a:rPr lang="ko-KR" altLang="en-US" dirty="0">
-                <a:solidFill>
-                  <a:sysClr val="windowText" lastClr="000000"/>
-                </a:solidFill>
-              </a:rPr>
-              <a:t>벌</a:t>
-            </a:r>
-            <a:br>
-              <a:rPr lang="en-US" altLang="ko-KR" dirty="0">
-                <a:solidFill>
-                  <a:sysClr val="windowText" lastClr="000000"/>
-                </a:solidFill>
-              </a:rPr>
-            </a:br>
-            <a:r>
-              <a:rPr lang="en-US" altLang="ko-KR" dirty="0">
-                <a:solidFill>
-                  <a:sysClr val="windowText" lastClr="000000"/>
-                </a:solidFill>
-              </a:rPr>
-              <a:t>: </a:t>
-            </a:r>
-            <a:r>
-              <a:rPr lang="ko-KR" altLang="en-US" dirty="0">
-                <a:solidFill>
-                  <a:sysClr val="windowText" lastClr="000000"/>
-                </a:solidFill>
-              </a:rPr>
-              <a:t>플레이어 방해</a:t>
-            </a:r>
-            <a:r>
-              <a:rPr lang="en-US" altLang="ko-KR" dirty="0">
-                <a:solidFill>
-                  <a:sysClr val="windowText" lastClr="000000"/>
-                </a:solidFill>
-              </a:rPr>
-              <a:t>,</a:t>
-            </a:r>
-            <a:br>
-              <a:rPr lang="en-US" altLang="ko-KR" dirty="0">
-                <a:solidFill>
-                  <a:sysClr val="windowText" lastClr="000000"/>
-                </a:solidFill>
-              </a:rPr>
-            </a:br>
-            <a:r>
-              <a:rPr lang="ko-KR" altLang="en-US" dirty="0">
-                <a:solidFill>
-                  <a:sysClr val="windowText" lastClr="000000"/>
-                </a:solidFill>
-              </a:rPr>
-              <a:t>플레이어 이동속도 </a:t>
-            </a:r>
-            <a:r>
-              <a:rPr lang="en-US" altLang="ko-KR" dirty="0">
-                <a:solidFill>
-                  <a:sysClr val="windowText" lastClr="000000"/>
-                </a:solidFill>
-              </a:rPr>
-              <a:t>6/5</a:t>
-            </a:r>
-            <a:r>
-              <a:rPr lang="ko-KR" altLang="en-US" dirty="0">
-                <a:solidFill>
-                  <a:sysClr val="windowText" lastClr="000000"/>
-                </a:solidFill>
-              </a:rPr>
-              <a:t>증가</a:t>
-            </a:r>
-            <a:r>
-              <a:rPr lang="en-US" altLang="ko-KR" dirty="0">
-                <a:solidFill>
-                  <a:sysClr val="windowText" lastClr="000000"/>
-                </a:solidFill>
-              </a:rPr>
-              <a:t>, </a:t>
-            </a:r>
-            <a:r>
-              <a:rPr lang="ko-KR" altLang="en-US" dirty="0">
-                <a:solidFill>
-                  <a:sysClr val="windowText" lastClr="000000"/>
-                </a:solidFill>
-              </a:rPr>
-              <a:t>방향회전율 </a:t>
-            </a:r>
-            <a:r>
-              <a:rPr lang="en-US" altLang="ko-KR" dirty="0">
-                <a:solidFill>
-                  <a:sysClr val="windowText" lastClr="000000"/>
-                </a:solidFill>
-              </a:rPr>
-              <a:t>3/2</a:t>
-            </a:r>
-            <a:r>
-              <a:rPr lang="ko-KR" altLang="en-US" dirty="0">
-                <a:solidFill>
-                  <a:sysClr val="windowText" lastClr="000000"/>
-                </a:solidFill>
-              </a:rPr>
-              <a:t>증가</a:t>
-            </a:r>
-            <a:r>
-              <a:rPr lang="en-US" altLang="ko-KR" dirty="0">
-                <a:solidFill>
-                  <a:sysClr val="windowText" lastClr="000000"/>
-                </a:solidFill>
-              </a:rPr>
-              <a:t>, </a:t>
-            </a:r>
-            <a:r>
-              <a:rPr lang="ko-KR" altLang="en-US" dirty="0">
-                <a:solidFill>
-                  <a:sysClr val="windowText" lastClr="000000"/>
-                </a:solidFill>
-              </a:rPr>
-              <a:t>최대 </a:t>
-            </a:r>
-            <a:r>
-              <a:rPr lang="en-US" altLang="ko-KR" dirty="0">
-                <a:solidFill>
-                  <a:sysClr val="windowText" lastClr="000000"/>
-                </a:solidFill>
-              </a:rPr>
-              <a:t>[15T] </a:t>
-            </a:r>
-            <a:r>
-              <a:rPr lang="ko-KR" altLang="en-US" dirty="0">
-                <a:solidFill>
-                  <a:sysClr val="windowText" lastClr="000000"/>
-                </a:solidFill>
-              </a:rPr>
-              <a:t>지속</a:t>
-            </a:r>
-            <a:endParaRPr lang="en-US" altLang="ko-KR" dirty="0">
-              <a:solidFill>
-                <a:sysClr val="windowText" lastClr="000000"/>
-              </a:solidFill>
-            </a:endParaRPr>
           </a:p>
         </p:txBody>
       </p:sp>
@@ -10314,7 +9583,7 @@
         </p:nvSpPr>
         <p:spPr>
           <a:xfrm>
-            <a:off x="351333" y="2532847"/>
+            <a:off x="181642" y="2444467"/>
             <a:ext cx="1897821" cy="798243"/>
           </a:xfrm>
           <a:prstGeom prst="roundRect">
@@ -10409,8 +9678,8 @@
         </p:nvSpPr>
         <p:spPr>
           <a:xfrm>
-            <a:off x="237035" y="3822192"/>
-            <a:ext cx="1897821" cy="651370"/>
+            <a:off x="2834661" y="2363365"/>
+            <a:ext cx="1436490" cy="651370"/>
           </a:xfrm>
           <a:prstGeom prst="rect">
             <a:avLst/>
@@ -10471,42 +9740,6 @@
               </a:rPr>
               <a:t>숲</a:t>
             </a:r>
-            <a:br>
-              <a:rPr lang="en-US" altLang="ko-KR" dirty="0">
-                <a:solidFill>
-                  <a:srgbClr val="000000"/>
-                </a:solidFill>
-              </a:rPr>
-            </a:br>
-            <a:r>
-              <a:rPr lang="en-US" altLang="ko-KR" dirty="0">
-                <a:solidFill>
-                  <a:srgbClr val="000000"/>
-                </a:solidFill>
-              </a:rPr>
-              <a:t>: </a:t>
-            </a:r>
-            <a:r>
-              <a:rPr lang="ko-KR" altLang="en-US" dirty="0">
-                <a:solidFill>
-                  <a:srgbClr val="000000"/>
-                </a:solidFill>
-              </a:rPr>
-              <a:t>직선 거리</a:t>
-            </a:r>
-            <a:r>
-              <a:rPr lang="en-US" altLang="ko-KR" dirty="0">
-                <a:solidFill>
-                  <a:srgbClr val="000000"/>
-                </a:solidFill>
-              </a:rPr>
-              <a:t>[40T] </a:t>
-            </a:r>
-            <a:endParaRPr lang="ko-KR" altLang="en-US" dirty="0">
-              <a:solidFill>
-                <a:srgbClr val="000000"/>
-              </a:solidFill>
-            </a:endParaRPr>
           </a:p>
         </p:txBody>
       </p:sp>
@@ -10524,8 +9757,8 @@
         </p:nvSpPr>
         <p:spPr>
           <a:xfrm>
-            <a:off x="233714" y="4691561"/>
-            <a:ext cx="1895014" cy="651370"/>
+            <a:off x="2310866" y="3066639"/>
+            <a:ext cx="2484081" cy="1207540"/>
           </a:xfrm>
           <a:prstGeom prst="rect">
             <a:avLst/>
@@ -10584,7 +9817,7 @@
                   <a:srgbClr val="000000"/>
                 </a:solidFill>
               </a:rPr>
-              <a:t>모래언덕</a:t>
+              <a:t>산</a:t>
             </a:r>
             <a:br>
               <a:rPr lang="en-US" altLang="ko-KR" dirty="0">
@@ -10599,7 +9832,7 @@
                   <a:srgbClr val="000000"/>
                 </a:solidFill>
               </a:rPr>
-              <a:t>: </a:t>
+              <a:t>(</a:t>
             </a:r>
             <a:r>
               <a:rPr lang="ko-KR" altLang="en-US" dirty="0">
@@ -10607,19 +9840,290 @@
                   <a:srgbClr val="000000"/>
                 </a:solidFill>
               </a:rPr>
-              <a:t>곡선 거리</a:t>
-            </a:r>
-            <a:r>
+              <a:t>경로를 보여는 주지만 실제로는 가기 </a:t>
+            </a:r>
+            <a:br>
               <a:rPr lang="en-US" altLang="ko-KR" dirty="0">
                 <a:solidFill>
                   <a:srgbClr val="000000"/>
                 </a:solidFill>
               </a:rPr>
-              <a:t>[80T]</a:t>
+            </a:br>
+            <a:r>
+              <a:rPr lang="ko-KR" altLang="en-US" dirty="0">
+                <a:solidFill>
+                  <a:srgbClr val="000000"/>
+                </a:solidFill>
+              </a:rPr>
+              <a:t>어려움도 알려줌</a:t>
+            </a:r>
+            <a:r>
+              <a:rPr lang="en-US" altLang="ko-KR" dirty="0">
+                <a:solidFill>
+                  <a:srgbClr val="000000"/>
+                </a:solidFill>
+              </a:rPr>
+              <a:t>)</a:t>
             </a:r>
             <a:endParaRPr lang="ko-KR" altLang="en-US" dirty="0">
               <a:solidFill>
                 <a:srgbClr val="000000"/>
+              </a:solidFill>
+            </a:endParaRPr>
+          </a:p>
+        </p:txBody>
+      </p:sp>
+      <p:cxnSp>
+        <p:nvCxnSpPr>
+          <p:cNvPr id="56" name="꺾인 양쪽 화살표 연결선 18">
+            <a:extLst>
+              <a:ext uri="{FF2B5EF4-FFF2-40B4-BE49-F238E27FC236}">
+                <a16:creationId xmlns:a16="http://schemas.microsoft.com/office/drawing/2014/main" id="{C56EA940-239E-2A5A-D1F2-B83DAC36102E}"/>
+              </a:ext>
+            </a:extLst>
+          </p:cNvPr>
+          <p:cNvCxnSpPr>
+            <a:cxnSpLocks/>
+            <a:stCxn id="104" idx="2"/>
+            <a:endCxn id="48" idx="1"/>
+          </p:cNvCxnSpPr>
+          <p:nvPr/>
+        </p:nvCxnSpPr>
+        <p:spPr>
+          <a:xfrm rot="10800000" flipH="1" flipV="1">
+            <a:off x="7263443" y="3620917"/>
+            <a:ext cx="2846442" cy="1161911"/>
+          </a:xfrm>
+          <a:prstGeom prst="bentConnector3">
+            <a:avLst>
+              <a:gd name="adj1" fmla="val 35812"/>
+            </a:avLst>
+          </a:prstGeom>
+          <a:ln>
+            <a:solidFill>
+              <a:schemeClr val="dk1"/>
+            </a:solidFill>
+            <a:tailEnd type="arrow"/>
+          </a:ln>
+        </p:spPr>
+        <p:style>
+          <a:lnRef idx="1">
+            <a:schemeClr val="accent1"/>
+          </a:lnRef>
+          <a:fillRef idx="0">
+            <a:schemeClr val="accent1"/>
+          </a:fillRef>
+          <a:effectRef idx="0">
+            <a:schemeClr val="accent1"/>
+          </a:effectRef>
+          <a:fontRef idx="minor">
+            <a:schemeClr val="tx1"/>
+          </a:fontRef>
+        </p:style>
+      </p:cxnSp>
+      <p:sp>
+        <p:nvSpPr>
+          <p:cNvPr id="104" name="타원 103">
+            <a:extLst>
+              <a:ext uri="{FF2B5EF4-FFF2-40B4-BE49-F238E27FC236}">
+                <a16:creationId xmlns:a16="http://schemas.microsoft.com/office/drawing/2014/main" id="{B8726C45-0EAE-8256-2FDE-81B3E3FC9FC4}"/>
+              </a:ext>
+            </a:extLst>
+          </p:cNvPr>
+          <p:cNvSpPr/>
+          <p:nvPr/>
+        </p:nvSpPr>
+        <p:spPr>
+          <a:xfrm>
+            <a:off x="7263443" y="2888906"/>
+            <a:ext cx="2329131" cy="1464024"/>
+          </a:xfrm>
+          <a:prstGeom prst="ellipse">
+            <a:avLst/>
+          </a:prstGeom>
+          <a:solidFill>
+            <a:schemeClr val="bg1"/>
+          </a:solidFill>
+          <a:ln>
+            <a:solidFill>
+              <a:schemeClr val="tx1"/>
+            </a:solidFill>
+          </a:ln>
+        </p:spPr>
+        <p:style>
+          <a:lnRef idx="2">
+            <a:schemeClr val="accent1">
+              <a:shade val="15000"/>
+            </a:schemeClr>
+          </a:lnRef>
+          <a:fillRef idx="1">
+            <a:schemeClr val="accent1"/>
+          </a:fillRef>
+          <a:effectRef idx="0">
+            <a:schemeClr val="accent1"/>
+          </a:effectRef>
+          <a:fontRef idx="minor">
+            <a:schemeClr val="lt1"/>
+          </a:fontRef>
+        </p:style>
+        <p:txBody>
+          <a:bodyPr rtlCol="0" anchor="ctr"/>
+          <a:lstStyle/>
+          <a:p>
+            <a:pPr algn="ctr"/>
+            <a:r>
+              <a:rPr lang="ko-KR" altLang="en-US" dirty="0">
+                <a:solidFill>
+                  <a:sysClr val="windowText" lastClr="000000"/>
+                </a:solidFill>
+              </a:rPr>
+              <a:t>생물</a:t>
+            </a:r>
+            <a:r>
+              <a:rPr lang="en-US" altLang="ko-KR" dirty="0">
+                <a:solidFill>
+                  <a:sysClr val="windowText" lastClr="000000"/>
+                </a:solidFill>
+              </a:rPr>
+              <a:t>_</a:t>
+            </a:r>
+            <a:r>
+              <a:rPr lang="ko-KR" altLang="en-US" dirty="0">
+                <a:solidFill>
+                  <a:sysClr val="windowText" lastClr="000000"/>
+                </a:solidFill>
+              </a:rPr>
+              <a:t>벌</a:t>
+            </a:r>
+            <a:br>
+              <a:rPr lang="en-US" altLang="ko-KR" dirty="0">
+                <a:solidFill>
+                  <a:sysClr val="windowText" lastClr="000000"/>
+                </a:solidFill>
+              </a:rPr>
+            </a:br>
+            <a:r>
+              <a:rPr lang="en-US" altLang="ko-KR" sz="1400" dirty="0">
+                <a:solidFill>
+                  <a:sysClr val="windowText" lastClr="000000"/>
+                </a:solidFill>
+              </a:rPr>
+              <a:t>: </a:t>
+            </a:r>
+            <a:r>
+              <a:rPr lang="ko-KR" altLang="en-US" sz="1400" dirty="0">
+                <a:solidFill>
+                  <a:sysClr val="windowText" lastClr="000000"/>
+                </a:solidFill>
+              </a:rPr>
+              <a:t>플레이어 방해</a:t>
+            </a:r>
+            <a:r>
+              <a:rPr lang="en-US" altLang="ko-KR" sz="1400" dirty="0">
+                <a:solidFill>
+                  <a:sysClr val="windowText" lastClr="000000"/>
+                </a:solidFill>
+              </a:rPr>
+              <a:t>,</a:t>
+            </a:r>
+            <a:br>
+              <a:rPr lang="en-US" altLang="ko-KR" sz="1400" dirty="0">
+                <a:solidFill>
+                  <a:sysClr val="windowText" lastClr="000000"/>
+                </a:solidFill>
+              </a:rPr>
+            </a:br>
+            <a:r>
+              <a:rPr lang="ko-KR" altLang="en-US" sz="1400" dirty="0">
+                <a:solidFill>
+                  <a:sysClr val="windowText" lastClr="000000"/>
+                </a:solidFill>
+              </a:rPr>
+              <a:t>플레이어 이동속도 </a:t>
+            </a:r>
+            <a:r>
+              <a:rPr lang="en-US" altLang="ko-KR" sz="1400" dirty="0">
+                <a:solidFill>
+                  <a:sysClr val="windowText" lastClr="000000"/>
+                </a:solidFill>
+              </a:rPr>
+              <a:t>6/5</a:t>
+            </a:r>
+            <a:r>
+              <a:rPr lang="ko-KR" altLang="en-US" sz="1400" dirty="0">
+                <a:solidFill>
+                  <a:sysClr val="windowText" lastClr="000000"/>
+                </a:solidFill>
+              </a:rPr>
+              <a:t>증가</a:t>
+            </a:r>
+            <a:r>
+              <a:rPr lang="en-US" altLang="ko-KR" sz="1400" dirty="0">
+                <a:solidFill>
+                  <a:sysClr val="windowText" lastClr="000000"/>
+                </a:solidFill>
+              </a:rPr>
+              <a:t>, </a:t>
+            </a:r>
+            <a:r>
+              <a:rPr lang="ko-KR" altLang="en-US" sz="1400" dirty="0">
+                <a:solidFill>
+                  <a:sysClr val="windowText" lastClr="000000"/>
+                </a:solidFill>
+              </a:rPr>
+              <a:t>방향 회전율 </a:t>
+            </a:r>
+            <a:r>
+              <a:rPr lang="en-US" altLang="ko-KR" sz="1400" dirty="0">
+                <a:solidFill>
+                  <a:sysClr val="windowText" lastClr="000000"/>
+                </a:solidFill>
+              </a:rPr>
+              <a:t>3/2</a:t>
+            </a:r>
+            <a:r>
+              <a:rPr lang="ko-KR" altLang="en-US" sz="1400" dirty="0">
+                <a:solidFill>
+                  <a:sysClr val="windowText" lastClr="000000"/>
+                </a:solidFill>
+              </a:rPr>
+              <a:t>증가</a:t>
+            </a:r>
+            <a:r>
+              <a:rPr lang="en-US" altLang="ko-KR" sz="1400" dirty="0">
+                <a:solidFill>
+                  <a:sysClr val="windowText" lastClr="000000"/>
+                </a:solidFill>
+              </a:rPr>
+              <a:t>, </a:t>
+            </a:r>
+            <a:r>
+              <a:rPr lang="ko-KR" altLang="en-US" sz="1400" dirty="0">
+                <a:solidFill>
+                  <a:sysClr val="windowText" lastClr="000000"/>
+                </a:solidFill>
+              </a:rPr>
+              <a:t>최대 </a:t>
+            </a:r>
+            <a:r>
+              <a:rPr lang="en-US" altLang="ko-KR" sz="1400" dirty="0">
+                <a:solidFill>
+                  <a:sysClr val="windowText" lastClr="000000"/>
+                </a:solidFill>
+              </a:rPr>
+              <a:t>[15T] </a:t>
+            </a:r>
+            <a:r>
+              <a:rPr lang="ko-KR" altLang="en-US" sz="1400" dirty="0">
+                <a:solidFill>
+                  <a:sysClr val="windowText" lastClr="000000"/>
+                </a:solidFill>
+              </a:rPr>
+              <a:t>지속</a:t>
+            </a:r>
+            <a:endParaRPr lang="en-US" altLang="ko-KR" dirty="0">
+              <a:solidFill>
+                <a:sysClr val="windowText" lastClr="000000"/>
               </a:solidFill>
             </a:endParaRPr>
           </a:p>
@@ -25545,6 +25049,1878 @@
       </p:grpSpPr>
       <p:sp>
         <p:nvSpPr>
+          <p:cNvPr id="2" name="제목 1">
+            <a:extLst>
+              <a:ext uri="{FF2B5EF4-FFF2-40B4-BE49-F238E27FC236}">
+                <a16:creationId xmlns:a16="http://schemas.microsoft.com/office/drawing/2014/main" id="{C339B108-C7FB-752A-B8FF-FD74F9A33A5C}"/>
+              </a:ext>
+            </a:extLst>
+          </p:cNvPr>
+          <p:cNvSpPr>
+            <a:spLocks noGrp="1"/>
+          </p:cNvSpPr>
+          <p:nvPr>
+            <p:ph type="title"/>
+          </p:nvPr>
+        </p:nvSpPr>
+        <p:spPr/>
+        <p:txBody>
+          <a:bodyPr/>
+          <a:lstStyle/>
+          <a:p>
+            <a:r>
+              <a:rPr lang="ko-KR" altLang="en-US" dirty="0"/>
+              <a:t>상호작용</a:t>
+            </a:r>
+            <a:r>
+              <a:rPr lang="en-US" altLang="ko-KR" dirty="0"/>
+              <a:t>_</a:t>
+            </a:r>
+            <a:r>
+              <a:rPr lang="ko-KR" altLang="en-US" dirty="0" err="1"/>
+              <a:t>배달품</a:t>
+            </a:r>
+            <a:endParaRPr lang="ko-KR" altLang="en-US" dirty="0">
+              <a:solidFill>
+                <a:schemeClr val="accent3"/>
+              </a:solidFill>
+            </a:endParaRPr>
+          </a:p>
+        </p:txBody>
+      </p:sp>
+      <p:sp>
+        <p:nvSpPr>
+          <p:cNvPr id="7" name="내용 개체 틀 6">
+            <a:extLst>
+              <a:ext uri="{FF2B5EF4-FFF2-40B4-BE49-F238E27FC236}">
+                <a16:creationId xmlns:a16="http://schemas.microsoft.com/office/drawing/2014/main" id="{EA8B8630-EB4F-A5EB-39E9-475AD1C75298}"/>
+              </a:ext>
+            </a:extLst>
+          </p:cNvPr>
+          <p:cNvSpPr>
+            <a:spLocks noGrp="1"/>
+          </p:cNvSpPr>
+          <p:nvPr>
+            <p:ph sz="quarter" idx="13"/>
+          </p:nvPr>
+        </p:nvSpPr>
+        <p:spPr/>
+        <p:txBody>
+          <a:bodyPr/>
+          <a:lstStyle/>
+          <a:p>
+            <a:r>
+              <a:rPr lang="ko-KR" altLang="en-US" dirty="0"/>
+              <a:t>컨텐츠</a:t>
+            </a:r>
+          </a:p>
+        </p:txBody>
+      </p:sp>
+      <p:cxnSp>
+        <p:nvCxnSpPr>
+          <p:cNvPr id="16" name="꺾인 양쪽 화살표 연결선 18">
+            <a:extLst>
+              <a:ext uri="{FF2B5EF4-FFF2-40B4-BE49-F238E27FC236}">
+                <a16:creationId xmlns:a16="http://schemas.microsoft.com/office/drawing/2014/main" id="{56F6801E-A777-D7E2-3F7D-FE70833DC17E}"/>
+              </a:ext>
+            </a:extLst>
+          </p:cNvPr>
+          <p:cNvCxnSpPr>
+            <a:cxnSpLocks/>
+            <a:stCxn id="37" idx="3"/>
+            <a:endCxn id="48" idx="1"/>
+          </p:cNvCxnSpPr>
+          <p:nvPr/>
+        </p:nvCxnSpPr>
+        <p:spPr>
+          <a:xfrm>
+            <a:off x="8503153" y="4148177"/>
+            <a:ext cx="864860" cy="1973394"/>
+          </a:xfrm>
+          <a:prstGeom prst="bentConnector3">
+            <a:avLst>
+              <a:gd name="adj1" fmla="val 50000"/>
+            </a:avLst>
+          </a:prstGeom>
+          <a:ln>
+            <a:solidFill>
+              <a:schemeClr val="dk1"/>
+            </a:solidFill>
+            <a:tailEnd type="arrow"/>
+          </a:ln>
+        </p:spPr>
+        <p:style>
+          <a:lnRef idx="1">
+            <a:schemeClr val="accent1"/>
+          </a:lnRef>
+          <a:fillRef idx="0">
+            <a:schemeClr val="accent1"/>
+          </a:fillRef>
+          <a:effectRef idx="0">
+            <a:schemeClr val="accent1"/>
+          </a:effectRef>
+          <a:fontRef idx="minor">
+            <a:schemeClr val="tx1"/>
+          </a:fontRef>
+        </p:style>
+      </p:cxnSp>
+      <p:cxnSp>
+        <p:nvCxnSpPr>
+          <p:cNvPr id="23" name="꺾인 양쪽 화살표 연결선 18">
+            <a:extLst>
+              <a:ext uri="{FF2B5EF4-FFF2-40B4-BE49-F238E27FC236}">
+                <a16:creationId xmlns:a16="http://schemas.microsoft.com/office/drawing/2014/main" id="{EAE3C6E4-905B-F746-6227-97B6038FD9CE}"/>
+              </a:ext>
+            </a:extLst>
+          </p:cNvPr>
+          <p:cNvCxnSpPr>
+            <a:cxnSpLocks/>
+            <a:stCxn id="129" idx="3"/>
+            <a:endCxn id="29" idx="1"/>
+          </p:cNvCxnSpPr>
+          <p:nvPr/>
+        </p:nvCxnSpPr>
+        <p:spPr>
+          <a:xfrm flipV="1">
+            <a:off x="2219172" y="2994316"/>
+            <a:ext cx="501944" cy="665501"/>
+          </a:xfrm>
+          <a:prstGeom prst="bentConnector3">
+            <a:avLst>
+              <a:gd name="adj1" fmla="val 50000"/>
+            </a:avLst>
+          </a:prstGeom>
+          <a:ln>
+            <a:solidFill>
+              <a:schemeClr val="dk1"/>
+            </a:solidFill>
+            <a:tailEnd type="arrow"/>
+          </a:ln>
+        </p:spPr>
+        <p:style>
+          <a:lnRef idx="1">
+            <a:schemeClr val="accent1"/>
+          </a:lnRef>
+          <a:fillRef idx="0">
+            <a:schemeClr val="accent1"/>
+          </a:fillRef>
+          <a:effectRef idx="0">
+            <a:schemeClr val="accent1"/>
+          </a:effectRef>
+          <a:fontRef idx="minor">
+            <a:schemeClr val="tx1"/>
+          </a:fontRef>
+        </p:style>
+      </p:cxnSp>
+      <p:sp>
+        <p:nvSpPr>
+          <p:cNvPr id="29" name="직사각형 28">
+            <a:extLst>
+              <a:ext uri="{FF2B5EF4-FFF2-40B4-BE49-F238E27FC236}">
+                <a16:creationId xmlns:a16="http://schemas.microsoft.com/office/drawing/2014/main" id="{E9179219-7D61-354A-E365-1F27ABBEE98F}"/>
+              </a:ext>
+            </a:extLst>
+          </p:cNvPr>
+          <p:cNvSpPr/>
+          <p:nvPr/>
+        </p:nvSpPr>
+        <p:spPr>
+          <a:xfrm>
+            <a:off x="2721116" y="2668631"/>
+            <a:ext cx="1897821" cy="651370"/>
+          </a:xfrm>
+          <a:prstGeom prst="rect">
+            <a:avLst/>
+          </a:prstGeom>
+          <a:solidFill>
+            <a:schemeClr val="lt1"/>
+          </a:solidFill>
+          <a:ln>
+            <a:solidFill>
+              <a:schemeClr val="dk1"/>
+            </a:solidFill>
+          </a:ln>
+        </p:spPr>
+        <p:style>
+          <a:lnRef idx="2">
+            <a:schemeClr val="accent1">
+              <a:shade val="20000"/>
+            </a:schemeClr>
+          </a:lnRef>
+          <a:fillRef idx="1">
+            <a:schemeClr val="accent1"/>
+          </a:fillRef>
+          <a:effectRef idx="0">
+            <a:schemeClr val="accent1"/>
+          </a:effectRef>
+          <a:fontRef idx="minor">
+            <a:schemeClr val="lt1"/>
+          </a:fontRef>
+        </p:style>
+        <p:txBody>
+          <a:bodyPr anchor="ctr"/>
+          <a:lstStyle/>
+          <a:p>
+            <a:pPr lvl="0" algn="ctr">
+              <a:defRPr/>
+            </a:pPr>
+            <a:r>
+              <a:rPr lang="ko-KR" altLang="en-US" dirty="0">
+                <a:solidFill>
+                  <a:srgbClr val="000000"/>
+                </a:solidFill>
+              </a:rPr>
+              <a:t>경로</a:t>
+            </a:r>
+            <a:r>
+              <a:rPr lang="en-US" altLang="ko-KR" dirty="0">
+                <a:solidFill>
+                  <a:srgbClr val="000000"/>
+                </a:solidFill>
+              </a:rPr>
+              <a:t>a_</a:t>
+            </a:r>
+            <a:r>
+              <a:rPr lang="ko-KR" altLang="en-US" dirty="0">
+                <a:solidFill>
+                  <a:srgbClr val="000000"/>
+                </a:solidFill>
+              </a:rPr>
+              <a:t>숲</a:t>
+            </a:r>
+            <a:br>
+              <a:rPr lang="en-US" altLang="ko-KR" dirty="0">
+                <a:solidFill>
+                  <a:srgbClr val="000000"/>
+                </a:solidFill>
+              </a:rPr>
+            </a:br>
+            <a:r>
+              <a:rPr lang="en-US" altLang="ko-KR" dirty="0">
+                <a:solidFill>
+                  <a:srgbClr val="000000"/>
+                </a:solidFill>
+              </a:rPr>
+              <a:t>: </a:t>
+            </a:r>
+            <a:r>
+              <a:rPr lang="ko-KR" altLang="en-US" dirty="0">
+                <a:solidFill>
+                  <a:srgbClr val="000000"/>
+                </a:solidFill>
+              </a:rPr>
+              <a:t>직선 거리</a:t>
+            </a:r>
+            <a:r>
+              <a:rPr lang="en-US" altLang="ko-KR" dirty="0">
+                <a:solidFill>
+                  <a:srgbClr val="000000"/>
+                </a:solidFill>
+              </a:rPr>
+              <a:t>[40T] </a:t>
+            </a:r>
+            <a:endParaRPr lang="ko-KR" altLang="en-US" dirty="0">
+              <a:solidFill>
+                <a:srgbClr val="000000"/>
+              </a:solidFill>
+            </a:endParaRPr>
+          </a:p>
+        </p:txBody>
+      </p:sp>
+      <p:sp>
+        <p:nvSpPr>
+          <p:cNvPr id="33" name="직사각형 32">
+            <a:extLst>
+              <a:ext uri="{FF2B5EF4-FFF2-40B4-BE49-F238E27FC236}">
+                <a16:creationId xmlns:a16="http://schemas.microsoft.com/office/drawing/2014/main" id="{30F3819E-3AFB-EA66-9364-82EF1C520019}"/>
+              </a:ext>
+            </a:extLst>
+          </p:cNvPr>
+          <p:cNvSpPr/>
+          <p:nvPr/>
+        </p:nvSpPr>
+        <p:spPr>
+          <a:xfrm>
+            <a:off x="2676829" y="3989070"/>
+            <a:ext cx="1942107" cy="651370"/>
+          </a:xfrm>
+          <a:prstGeom prst="rect">
+            <a:avLst/>
+          </a:prstGeom>
+          <a:solidFill>
+            <a:schemeClr val="lt1"/>
+          </a:solidFill>
+          <a:ln>
+            <a:solidFill>
+              <a:schemeClr val="dk1"/>
+            </a:solidFill>
+          </a:ln>
+        </p:spPr>
+        <p:style>
+          <a:lnRef idx="2">
+            <a:schemeClr val="accent1">
+              <a:shade val="20000"/>
+            </a:schemeClr>
+          </a:lnRef>
+          <a:fillRef idx="1">
+            <a:schemeClr val="accent1"/>
+          </a:fillRef>
+          <a:effectRef idx="0">
+            <a:schemeClr val="accent1"/>
+          </a:effectRef>
+          <a:fontRef idx="minor">
+            <a:schemeClr val="lt1"/>
+          </a:fontRef>
+        </p:style>
+        <p:txBody>
+          <a:bodyPr anchor="ctr"/>
+          <a:lstStyle/>
+          <a:p>
+            <a:pPr lvl="0" algn="ctr">
+              <a:defRPr/>
+            </a:pPr>
+            <a:r>
+              <a:rPr lang="ko-KR" altLang="en-US" dirty="0">
+                <a:solidFill>
+                  <a:srgbClr val="000000"/>
+                </a:solidFill>
+              </a:rPr>
+              <a:t>경로</a:t>
+            </a:r>
+            <a:r>
+              <a:rPr lang="en-US" altLang="ko-KR" dirty="0">
+                <a:solidFill>
+                  <a:srgbClr val="000000"/>
+                </a:solidFill>
+              </a:rPr>
+              <a:t>b_</a:t>
+            </a:r>
+            <a:r>
+              <a:rPr lang="ko-KR" altLang="en-US" dirty="0">
+                <a:solidFill>
+                  <a:srgbClr val="000000"/>
+                </a:solidFill>
+              </a:rPr>
+              <a:t>모래언덕</a:t>
+            </a:r>
+            <a:br>
+              <a:rPr lang="en-US" altLang="ko-KR" dirty="0">
+                <a:solidFill>
+                  <a:srgbClr val="000000"/>
+                </a:solidFill>
+              </a:rPr>
+            </a:br>
+            <a:r>
+              <a:rPr lang="en-US" altLang="ko-KR" dirty="0">
+                <a:solidFill>
+                  <a:srgbClr val="000000"/>
+                </a:solidFill>
+              </a:rPr>
+              <a:t>: </a:t>
+            </a:r>
+            <a:r>
+              <a:rPr lang="ko-KR" altLang="en-US" dirty="0">
+                <a:solidFill>
+                  <a:srgbClr val="000000"/>
+                </a:solidFill>
+              </a:rPr>
+              <a:t>곡선 거리</a:t>
+            </a:r>
+            <a:r>
+              <a:rPr lang="en-US" altLang="ko-KR" dirty="0">
+                <a:solidFill>
+                  <a:srgbClr val="000000"/>
+                </a:solidFill>
+              </a:rPr>
+              <a:t>[80T]</a:t>
+            </a:r>
+            <a:endParaRPr lang="ko-KR" altLang="en-US" dirty="0">
+              <a:solidFill>
+                <a:srgbClr val="000000"/>
+              </a:solidFill>
+            </a:endParaRPr>
+          </a:p>
+        </p:txBody>
+      </p:sp>
+      <p:sp>
+        <p:nvSpPr>
+          <p:cNvPr id="35" name="직사각형 34">
+            <a:extLst>
+              <a:ext uri="{FF2B5EF4-FFF2-40B4-BE49-F238E27FC236}">
+                <a16:creationId xmlns:a16="http://schemas.microsoft.com/office/drawing/2014/main" id="{FE17D59C-8575-F0A7-0903-28793FD4E8D3}"/>
+              </a:ext>
+            </a:extLst>
+          </p:cNvPr>
+          <p:cNvSpPr/>
+          <p:nvPr/>
+        </p:nvSpPr>
+        <p:spPr>
+          <a:xfrm>
+            <a:off x="6513951" y="1404947"/>
+            <a:ext cx="1947707" cy="651370"/>
+          </a:xfrm>
+          <a:prstGeom prst="rect">
+            <a:avLst/>
+          </a:prstGeom>
+          <a:solidFill>
+            <a:schemeClr val="lt1"/>
+          </a:solidFill>
+          <a:ln>
+            <a:solidFill>
+              <a:schemeClr val="dk1"/>
+            </a:solidFill>
+          </a:ln>
+        </p:spPr>
+        <p:style>
+          <a:lnRef idx="2">
+            <a:schemeClr val="accent1">
+              <a:shade val="20000"/>
+            </a:schemeClr>
+          </a:lnRef>
+          <a:fillRef idx="1">
+            <a:schemeClr val="accent1"/>
+          </a:fillRef>
+          <a:effectRef idx="0">
+            <a:schemeClr val="accent1"/>
+          </a:effectRef>
+          <a:fontRef idx="minor">
+            <a:schemeClr val="lt1"/>
+          </a:fontRef>
+        </p:style>
+        <p:txBody>
+          <a:bodyPr anchor="ctr"/>
+          <a:lstStyle/>
+          <a:p>
+            <a:pPr lvl="0" algn="ctr">
+              <a:defRPr/>
+            </a:pPr>
+            <a:r>
+              <a:rPr lang="ko-KR" altLang="en-US" dirty="0">
+                <a:solidFill>
+                  <a:srgbClr val="000000"/>
+                </a:solidFill>
+              </a:rPr>
+              <a:t>경로</a:t>
+            </a:r>
+            <a:r>
+              <a:rPr lang="en-US" altLang="ko-KR" dirty="0" err="1">
+                <a:solidFill>
+                  <a:srgbClr val="000000"/>
+                </a:solidFill>
+              </a:rPr>
+              <a:t>a_a</a:t>
+            </a:r>
+            <a:r>
+              <a:rPr lang="en-US" altLang="ko-KR" dirty="0">
+                <a:solidFill>
+                  <a:srgbClr val="000000"/>
+                </a:solidFill>
+              </a:rPr>
+              <a:t>_</a:t>
+            </a:r>
+            <a:r>
+              <a:rPr lang="ko-KR" altLang="en-US" dirty="0">
+                <a:solidFill>
+                  <a:srgbClr val="000000"/>
+                </a:solidFill>
+              </a:rPr>
+              <a:t>숲</a:t>
+            </a:r>
+            <a:br>
+              <a:rPr lang="en-US" altLang="ko-KR" dirty="0">
+                <a:solidFill>
+                  <a:srgbClr val="000000"/>
+                </a:solidFill>
+              </a:rPr>
+            </a:br>
+            <a:r>
+              <a:rPr lang="en-US" altLang="ko-KR" dirty="0">
+                <a:solidFill>
+                  <a:srgbClr val="000000"/>
+                </a:solidFill>
+              </a:rPr>
+              <a:t>: </a:t>
+            </a:r>
+            <a:r>
+              <a:rPr lang="ko-KR" altLang="en-US" dirty="0">
+                <a:solidFill>
+                  <a:srgbClr val="000000"/>
+                </a:solidFill>
+              </a:rPr>
+              <a:t>곡선 거리</a:t>
+            </a:r>
+            <a:r>
+              <a:rPr lang="en-US" altLang="ko-KR" dirty="0">
+                <a:solidFill>
+                  <a:srgbClr val="000000"/>
+                </a:solidFill>
+              </a:rPr>
+              <a:t>[20T] </a:t>
+            </a:r>
+            <a:endParaRPr lang="ko-KR" altLang="en-US" dirty="0">
+              <a:solidFill>
+                <a:srgbClr val="000000"/>
+              </a:solidFill>
+            </a:endParaRPr>
+          </a:p>
+        </p:txBody>
+      </p:sp>
+      <p:sp>
+        <p:nvSpPr>
+          <p:cNvPr id="37" name="직사각형 36">
+            <a:extLst>
+              <a:ext uri="{FF2B5EF4-FFF2-40B4-BE49-F238E27FC236}">
+                <a16:creationId xmlns:a16="http://schemas.microsoft.com/office/drawing/2014/main" id="{ECAA3893-299B-A643-F7AB-7FAF127ACB8F}"/>
+              </a:ext>
+            </a:extLst>
+          </p:cNvPr>
+          <p:cNvSpPr/>
+          <p:nvPr/>
+        </p:nvSpPr>
+        <p:spPr>
+          <a:xfrm>
+            <a:off x="6561043" y="3822492"/>
+            <a:ext cx="1942110" cy="651370"/>
+          </a:xfrm>
+          <a:prstGeom prst="rect">
+            <a:avLst/>
+          </a:prstGeom>
+          <a:solidFill>
+            <a:schemeClr val="lt1"/>
+          </a:solidFill>
+          <a:ln>
+            <a:solidFill>
+              <a:schemeClr val="dk1"/>
+            </a:solidFill>
+          </a:ln>
+        </p:spPr>
+        <p:style>
+          <a:lnRef idx="2">
+            <a:schemeClr val="accent1">
+              <a:shade val="20000"/>
+            </a:schemeClr>
+          </a:lnRef>
+          <a:fillRef idx="1">
+            <a:schemeClr val="accent1"/>
+          </a:fillRef>
+          <a:effectRef idx="0">
+            <a:schemeClr val="accent1"/>
+          </a:effectRef>
+          <a:fontRef idx="minor">
+            <a:schemeClr val="lt1"/>
+          </a:fontRef>
+        </p:style>
+        <p:txBody>
+          <a:bodyPr anchor="ctr"/>
+          <a:lstStyle/>
+          <a:p>
+            <a:pPr lvl="0" algn="ctr">
+              <a:defRPr/>
+            </a:pPr>
+            <a:r>
+              <a:rPr lang="ko-KR" altLang="en-US" dirty="0">
+                <a:solidFill>
+                  <a:srgbClr val="000000"/>
+                </a:solidFill>
+              </a:rPr>
+              <a:t>경로</a:t>
+            </a:r>
+            <a:r>
+              <a:rPr lang="en-US" altLang="ko-KR" dirty="0" err="1">
+                <a:solidFill>
+                  <a:srgbClr val="000000"/>
+                </a:solidFill>
+              </a:rPr>
+              <a:t>a_b</a:t>
+            </a:r>
+            <a:r>
+              <a:rPr lang="en-US" altLang="ko-KR" dirty="0">
+                <a:solidFill>
+                  <a:srgbClr val="000000"/>
+                </a:solidFill>
+              </a:rPr>
+              <a:t>_</a:t>
+            </a:r>
+            <a:r>
+              <a:rPr lang="ko-KR" altLang="en-US" dirty="0">
+                <a:solidFill>
+                  <a:srgbClr val="000000"/>
+                </a:solidFill>
+              </a:rPr>
+              <a:t>늪</a:t>
+            </a:r>
+            <a:br>
+              <a:rPr lang="en-US" altLang="ko-KR" dirty="0">
+                <a:solidFill>
+                  <a:srgbClr val="000000"/>
+                </a:solidFill>
+              </a:rPr>
+            </a:br>
+            <a:r>
+              <a:rPr lang="en-US" altLang="ko-KR" dirty="0">
+                <a:solidFill>
+                  <a:srgbClr val="000000"/>
+                </a:solidFill>
+              </a:rPr>
+              <a:t>: </a:t>
+            </a:r>
+            <a:r>
+              <a:rPr lang="ko-KR" altLang="en-US" dirty="0">
+                <a:solidFill>
+                  <a:srgbClr val="000000"/>
+                </a:solidFill>
+              </a:rPr>
+              <a:t>직선 거리</a:t>
+            </a:r>
+            <a:r>
+              <a:rPr lang="en-US" altLang="ko-KR" dirty="0">
+                <a:solidFill>
+                  <a:srgbClr val="000000"/>
+                </a:solidFill>
+              </a:rPr>
+              <a:t>[10T] </a:t>
+            </a:r>
+            <a:endParaRPr lang="ko-KR" altLang="en-US" dirty="0">
+              <a:solidFill>
+                <a:srgbClr val="000000"/>
+              </a:solidFill>
+            </a:endParaRPr>
+          </a:p>
+        </p:txBody>
+      </p:sp>
+      <p:cxnSp>
+        <p:nvCxnSpPr>
+          <p:cNvPr id="41" name="꺾인 양쪽 화살표 연결선 18">
+            <a:extLst>
+              <a:ext uri="{FF2B5EF4-FFF2-40B4-BE49-F238E27FC236}">
+                <a16:creationId xmlns:a16="http://schemas.microsoft.com/office/drawing/2014/main" id="{ADAD90DE-F6E9-A2FB-0C2C-B653BCD7729D}"/>
+              </a:ext>
+            </a:extLst>
+          </p:cNvPr>
+          <p:cNvCxnSpPr>
+            <a:cxnSpLocks/>
+            <a:stCxn id="129" idx="3"/>
+            <a:endCxn id="33" idx="1"/>
+          </p:cNvCxnSpPr>
+          <p:nvPr/>
+        </p:nvCxnSpPr>
+        <p:spPr>
+          <a:xfrm>
+            <a:off x="2219172" y="3659817"/>
+            <a:ext cx="457657" cy="654938"/>
+          </a:xfrm>
+          <a:prstGeom prst="bentConnector3">
+            <a:avLst>
+              <a:gd name="adj1" fmla="val 50000"/>
+            </a:avLst>
+          </a:prstGeom>
+          <a:ln>
+            <a:solidFill>
+              <a:schemeClr val="dk1"/>
+            </a:solidFill>
+            <a:tailEnd type="arrow"/>
+          </a:ln>
+        </p:spPr>
+        <p:style>
+          <a:lnRef idx="1">
+            <a:schemeClr val="accent1"/>
+          </a:lnRef>
+          <a:fillRef idx="0">
+            <a:schemeClr val="accent1"/>
+          </a:fillRef>
+          <a:effectRef idx="0">
+            <a:schemeClr val="accent1"/>
+          </a:effectRef>
+          <a:fontRef idx="minor">
+            <a:schemeClr val="tx1"/>
+          </a:fontRef>
+        </p:style>
+      </p:cxnSp>
+      <p:sp>
+        <p:nvSpPr>
+          <p:cNvPr id="48" name="직사각형 47">
+            <a:extLst>
+              <a:ext uri="{FF2B5EF4-FFF2-40B4-BE49-F238E27FC236}">
+                <a16:creationId xmlns:a16="http://schemas.microsoft.com/office/drawing/2014/main" id="{EC84C43D-6067-0DF0-B9A6-B76471F4F9D7}"/>
+              </a:ext>
+            </a:extLst>
+          </p:cNvPr>
+          <p:cNvSpPr/>
+          <p:nvPr/>
+        </p:nvSpPr>
+        <p:spPr>
+          <a:xfrm>
+            <a:off x="9368013" y="5795886"/>
+            <a:ext cx="1316825" cy="651370"/>
+          </a:xfrm>
+          <a:prstGeom prst="rect">
+            <a:avLst/>
+          </a:prstGeom>
+          <a:solidFill>
+            <a:schemeClr val="lt1"/>
+          </a:solidFill>
+          <a:ln>
+            <a:solidFill>
+              <a:schemeClr val="dk1"/>
+            </a:solidFill>
+          </a:ln>
+        </p:spPr>
+        <p:style>
+          <a:lnRef idx="2">
+            <a:schemeClr val="accent1">
+              <a:shade val="20000"/>
+            </a:schemeClr>
+          </a:lnRef>
+          <a:fillRef idx="1">
+            <a:schemeClr val="accent1"/>
+          </a:fillRef>
+          <a:effectRef idx="0">
+            <a:schemeClr val="accent1"/>
+          </a:effectRef>
+          <a:fontRef idx="minor">
+            <a:schemeClr val="lt1"/>
+          </a:fontRef>
+        </p:style>
+        <p:txBody>
+          <a:bodyPr anchor="ctr"/>
+          <a:lstStyle/>
+          <a:p>
+            <a:pPr lvl="0" algn="ctr">
+              <a:defRPr/>
+            </a:pPr>
+            <a:r>
+              <a:rPr lang="ko-KR" altLang="en-US" dirty="0">
+                <a:solidFill>
+                  <a:srgbClr val="000000"/>
+                </a:solidFill>
+              </a:rPr>
+              <a:t>주거지</a:t>
+            </a:r>
+            <a:r>
+              <a:rPr lang="en-US" altLang="ko-KR" dirty="0">
+                <a:solidFill>
+                  <a:srgbClr val="000000"/>
+                </a:solidFill>
+              </a:rPr>
+              <a:t>3</a:t>
+            </a:r>
+            <a:br>
+              <a:rPr lang="en-US" altLang="ko-KR" dirty="0">
+                <a:solidFill>
+                  <a:srgbClr val="000000"/>
+                </a:solidFill>
+              </a:rPr>
+            </a:br>
+            <a:r>
+              <a:rPr lang="ko-KR" altLang="en-US" dirty="0">
+                <a:solidFill>
+                  <a:srgbClr val="000000"/>
+                </a:solidFill>
+              </a:rPr>
+              <a:t>도착</a:t>
+            </a:r>
+          </a:p>
+        </p:txBody>
+      </p:sp>
+      <p:cxnSp>
+        <p:nvCxnSpPr>
+          <p:cNvPr id="52" name="꺾인 양쪽 화살표 연결선 18">
+            <a:extLst>
+              <a:ext uri="{FF2B5EF4-FFF2-40B4-BE49-F238E27FC236}">
+                <a16:creationId xmlns:a16="http://schemas.microsoft.com/office/drawing/2014/main" id="{D7DA4324-C9E0-8070-3D26-EBAE550692AB}"/>
+              </a:ext>
+            </a:extLst>
+          </p:cNvPr>
+          <p:cNvCxnSpPr>
+            <a:cxnSpLocks/>
+            <a:stCxn id="35" idx="3"/>
+            <a:endCxn id="48" idx="1"/>
+          </p:cNvCxnSpPr>
+          <p:nvPr/>
+        </p:nvCxnSpPr>
+        <p:spPr>
+          <a:xfrm>
+            <a:off x="8461658" y="1730632"/>
+            <a:ext cx="906355" cy="4390939"/>
+          </a:xfrm>
+          <a:prstGeom prst="bentConnector3">
+            <a:avLst>
+              <a:gd name="adj1" fmla="val 50000"/>
+            </a:avLst>
+          </a:prstGeom>
+          <a:ln>
+            <a:solidFill>
+              <a:schemeClr val="dk1"/>
+            </a:solidFill>
+            <a:tailEnd type="arrow"/>
+          </a:ln>
+        </p:spPr>
+        <p:style>
+          <a:lnRef idx="1">
+            <a:schemeClr val="accent1"/>
+          </a:lnRef>
+          <a:fillRef idx="0">
+            <a:schemeClr val="accent1"/>
+          </a:fillRef>
+          <a:effectRef idx="0">
+            <a:schemeClr val="accent1"/>
+          </a:effectRef>
+          <a:fontRef idx="minor">
+            <a:schemeClr val="tx1"/>
+          </a:fontRef>
+        </p:style>
+      </p:cxnSp>
+      <p:cxnSp>
+        <p:nvCxnSpPr>
+          <p:cNvPr id="55" name="꺾인 양쪽 화살표 연결선 18">
+            <a:extLst>
+              <a:ext uri="{FF2B5EF4-FFF2-40B4-BE49-F238E27FC236}">
+                <a16:creationId xmlns:a16="http://schemas.microsoft.com/office/drawing/2014/main" id="{AA4BF786-2129-746A-9AA3-9A21F4DA95DC}"/>
+              </a:ext>
+            </a:extLst>
+          </p:cNvPr>
+          <p:cNvCxnSpPr>
+            <a:cxnSpLocks/>
+            <a:stCxn id="33" idx="3"/>
+            <a:endCxn id="48" idx="1"/>
+          </p:cNvCxnSpPr>
+          <p:nvPr/>
+        </p:nvCxnSpPr>
+        <p:spPr>
+          <a:xfrm>
+            <a:off x="4618936" y="4314755"/>
+            <a:ext cx="4749077" cy="1806816"/>
+          </a:xfrm>
+          <a:prstGeom prst="bentConnector3">
+            <a:avLst>
+              <a:gd name="adj1" fmla="val 16038"/>
+            </a:avLst>
+          </a:prstGeom>
+          <a:ln>
+            <a:solidFill>
+              <a:schemeClr val="dk1"/>
+            </a:solidFill>
+            <a:tailEnd type="arrow"/>
+          </a:ln>
+        </p:spPr>
+        <p:style>
+          <a:lnRef idx="1">
+            <a:schemeClr val="accent1"/>
+          </a:lnRef>
+          <a:fillRef idx="0">
+            <a:schemeClr val="accent1"/>
+          </a:fillRef>
+          <a:effectRef idx="0">
+            <a:schemeClr val="accent1"/>
+          </a:effectRef>
+          <a:fontRef idx="minor">
+            <a:schemeClr val="tx1"/>
+          </a:fontRef>
+        </p:style>
+      </p:cxnSp>
+      <p:cxnSp>
+        <p:nvCxnSpPr>
+          <p:cNvPr id="61" name="꺾인 양쪽 화살표 연결선 18">
+            <a:extLst>
+              <a:ext uri="{FF2B5EF4-FFF2-40B4-BE49-F238E27FC236}">
+                <a16:creationId xmlns:a16="http://schemas.microsoft.com/office/drawing/2014/main" id="{33A2FA1F-665E-2689-2ACB-CEAC982402CF}"/>
+              </a:ext>
+            </a:extLst>
+          </p:cNvPr>
+          <p:cNvCxnSpPr>
+            <a:cxnSpLocks/>
+            <a:stCxn id="29" idx="3"/>
+            <a:endCxn id="37" idx="1"/>
+          </p:cNvCxnSpPr>
+          <p:nvPr/>
+        </p:nvCxnSpPr>
+        <p:spPr>
+          <a:xfrm>
+            <a:off x="4618937" y="2994316"/>
+            <a:ext cx="1942106" cy="1153861"/>
+          </a:xfrm>
+          <a:prstGeom prst="bentConnector3">
+            <a:avLst>
+              <a:gd name="adj1" fmla="val 50000"/>
+            </a:avLst>
+          </a:prstGeom>
+          <a:ln>
+            <a:solidFill>
+              <a:schemeClr val="dk1"/>
+            </a:solidFill>
+            <a:tailEnd type="arrow"/>
+          </a:ln>
+        </p:spPr>
+        <p:style>
+          <a:lnRef idx="1">
+            <a:schemeClr val="accent1"/>
+          </a:lnRef>
+          <a:fillRef idx="0">
+            <a:schemeClr val="accent1"/>
+          </a:fillRef>
+          <a:effectRef idx="0">
+            <a:schemeClr val="accent1"/>
+          </a:effectRef>
+          <a:fontRef idx="minor">
+            <a:schemeClr val="tx1"/>
+          </a:fontRef>
+        </p:style>
+      </p:cxnSp>
+      <p:cxnSp>
+        <p:nvCxnSpPr>
+          <p:cNvPr id="64" name="꺾인 양쪽 화살표 연결선 18">
+            <a:extLst>
+              <a:ext uri="{FF2B5EF4-FFF2-40B4-BE49-F238E27FC236}">
+                <a16:creationId xmlns:a16="http://schemas.microsoft.com/office/drawing/2014/main" id="{3D03D58E-FB20-BB79-DE7C-06A42C45BB70}"/>
+              </a:ext>
+            </a:extLst>
+          </p:cNvPr>
+          <p:cNvCxnSpPr>
+            <a:cxnSpLocks/>
+            <a:stCxn id="29" idx="3"/>
+            <a:endCxn id="35" idx="1"/>
+          </p:cNvCxnSpPr>
+          <p:nvPr/>
+        </p:nvCxnSpPr>
+        <p:spPr>
+          <a:xfrm flipV="1">
+            <a:off x="4618937" y="1730632"/>
+            <a:ext cx="1895014" cy="1263684"/>
+          </a:xfrm>
+          <a:prstGeom prst="bentConnector3">
+            <a:avLst>
+              <a:gd name="adj1" fmla="val 50000"/>
+            </a:avLst>
+          </a:prstGeom>
+          <a:ln>
+            <a:solidFill>
+              <a:schemeClr val="dk1"/>
+            </a:solidFill>
+            <a:tailEnd type="arrow"/>
+          </a:ln>
+        </p:spPr>
+        <p:style>
+          <a:lnRef idx="1">
+            <a:schemeClr val="accent1"/>
+          </a:lnRef>
+          <a:fillRef idx="0">
+            <a:schemeClr val="accent1"/>
+          </a:fillRef>
+          <a:effectRef idx="0">
+            <a:schemeClr val="accent1"/>
+          </a:effectRef>
+          <a:fontRef idx="minor">
+            <a:schemeClr val="tx1"/>
+          </a:fontRef>
+        </p:style>
+      </p:cxnSp>
+      <p:sp>
+        <p:nvSpPr>
+          <p:cNvPr id="91" name="다이아몬드 90">
+            <a:extLst>
+              <a:ext uri="{FF2B5EF4-FFF2-40B4-BE49-F238E27FC236}">
+                <a16:creationId xmlns:a16="http://schemas.microsoft.com/office/drawing/2014/main" id="{74CC2370-1DBC-167A-14C8-CAF8233671AE}"/>
+              </a:ext>
+            </a:extLst>
+          </p:cNvPr>
+          <p:cNvSpPr/>
+          <p:nvPr/>
+        </p:nvSpPr>
+        <p:spPr>
+          <a:xfrm>
+            <a:off x="2448748" y="4656985"/>
+            <a:ext cx="2390498" cy="1693186"/>
+          </a:xfrm>
+          <a:prstGeom prst="diamond">
+            <a:avLst/>
+          </a:prstGeom>
+          <a:solidFill>
+            <a:schemeClr val="bg1"/>
+          </a:solidFill>
+          <a:ln>
+            <a:solidFill>
+              <a:schemeClr val="tx1"/>
+            </a:solidFill>
+          </a:ln>
+        </p:spPr>
+        <p:style>
+          <a:lnRef idx="2">
+            <a:schemeClr val="accent1">
+              <a:shade val="15000"/>
+            </a:schemeClr>
+          </a:lnRef>
+          <a:fillRef idx="1">
+            <a:schemeClr val="accent1"/>
+          </a:fillRef>
+          <a:effectRef idx="0">
+            <a:schemeClr val="accent1"/>
+          </a:effectRef>
+          <a:fontRef idx="minor">
+            <a:schemeClr val="lt1"/>
+          </a:fontRef>
+        </p:style>
+        <p:txBody>
+          <a:bodyPr rtlCol="0" anchor="ctr"/>
+          <a:lstStyle/>
+          <a:p>
+            <a:pPr algn="ctr"/>
+            <a:r>
+              <a:rPr lang="ko-KR" altLang="en-US" dirty="0">
+                <a:solidFill>
+                  <a:sysClr val="windowText" lastClr="000000"/>
+                </a:solidFill>
+              </a:rPr>
+              <a:t>모래 지형</a:t>
+            </a:r>
+            <a:r>
+              <a:rPr lang="en-US" altLang="ko-KR" dirty="0">
+                <a:solidFill>
+                  <a:sysClr val="windowText" lastClr="000000"/>
+                </a:solidFill>
+              </a:rPr>
+              <a:t>,</a:t>
+            </a:r>
+            <a:br>
+              <a:rPr lang="en-US" altLang="ko-KR" dirty="0">
+                <a:solidFill>
+                  <a:sysClr val="windowText" lastClr="000000"/>
+                </a:solidFill>
+              </a:rPr>
+            </a:br>
+            <a:r>
+              <a:rPr lang="ko-KR" altLang="en-US" dirty="0">
+                <a:solidFill>
+                  <a:sysClr val="windowText" lastClr="000000"/>
+                </a:solidFill>
+              </a:rPr>
+              <a:t>플레이어</a:t>
+            </a:r>
+            <a:r>
+              <a:rPr lang="en-US" altLang="ko-KR" dirty="0">
+                <a:solidFill>
+                  <a:sysClr val="windowText" lastClr="000000"/>
+                </a:solidFill>
+              </a:rPr>
+              <a:t> </a:t>
+            </a:r>
+            <a:r>
+              <a:rPr lang="ko-KR" altLang="en-US" dirty="0">
+                <a:solidFill>
+                  <a:sysClr val="windowText" lastClr="000000"/>
+                </a:solidFill>
+              </a:rPr>
+              <a:t>이동속도 </a:t>
+            </a:r>
+            <a:r>
+              <a:rPr lang="en-US" altLang="ko-KR" dirty="0">
+                <a:solidFill>
+                  <a:sysClr val="windowText" lastClr="000000"/>
+                </a:solidFill>
+              </a:rPr>
+              <a:t>1/3</a:t>
+            </a:r>
+            <a:r>
+              <a:rPr lang="ko-KR" altLang="en-US" dirty="0">
+                <a:solidFill>
+                  <a:sysClr val="windowText" lastClr="000000"/>
+                </a:solidFill>
+              </a:rPr>
+              <a:t>감소</a:t>
+            </a:r>
+          </a:p>
+        </p:txBody>
+      </p:sp>
+      <p:sp>
+        <p:nvSpPr>
+          <p:cNvPr id="94" name="다이아몬드 93">
+            <a:extLst>
+              <a:ext uri="{FF2B5EF4-FFF2-40B4-BE49-F238E27FC236}">
+                <a16:creationId xmlns:a16="http://schemas.microsoft.com/office/drawing/2014/main" id="{7A49AC89-C484-B2DE-89BB-FD81F1C06155}"/>
+              </a:ext>
+            </a:extLst>
+          </p:cNvPr>
+          <p:cNvSpPr/>
+          <p:nvPr/>
+        </p:nvSpPr>
+        <p:spPr>
+          <a:xfrm>
+            <a:off x="6340736" y="4473562"/>
+            <a:ext cx="2390498" cy="1222580"/>
+          </a:xfrm>
+          <a:prstGeom prst="diamond">
+            <a:avLst/>
+          </a:prstGeom>
+          <a:solidFill>
+            <a:schemeClr val="bg1"/>
+          </a:solidFill>
+          <a:ln>
+            <a:solidFill>
+              <a:schemeClr val="tx1"/>
+            </a:solidFill>
+          </a:ln>
+        </p:spPr>
+        <p:style>
+          <a:lnRef idx="2">
+            <a:schemeClr val="accent1">
+              <a:shade val="15000"/>
+            </a:schemeClr>
+          </a:lnRef>
+          <a:fillRef idx="1">
+            <a:schemeClr val="accent1"/>
+          </a:fillRef>
+          <a:effectRef idx="0">
+            <a:schemeClr val="accent1"/>
+          </a:effectRef>
+          <a:fontRef idx="minor">
+            <a:schemeClr val="lt1"/>
+          </a:fontRef>
+        </p:style>
+        <p:txBody>
+          <a:bodyPr rtlCol="0" anchor="ctr"/>
+          <a:lstStyle/>
+          <a:p>
+            <a:pPr algn="ctr"/>
+            <a:r>
+              <a:rPr lang="ko-KR" altLang="en-US" dirty="0">
+                <a:solidFill>
+                  <a:sysClr val="windowText" lastClr="000000"/>
+                </a:solidFill>
+              </a:rPr>
+              <a:t>늪 지형</a:t>
+            </a:r>
+            <a:r>
+              <a:rPr lang="en-US" altLang="ko-KR" dirty="0">
+                <a:solidFill>
+                  <a:sysClr val="windowText" lastClr="000000"/>
+                </a:solidFill>
+              </a:rPr>
+              <a:t>, </a:t>
+            </a:r>
+            <a:r>
+              <a:rPr lang="ko-KR" altLang="en-US" dirty="0">
+                <a:solidFill>
+                  <a:sysClr val="windowText" lastClr="000000"/>
+                </a:solidFill>
+              </a:rPr>
+              <a:t>이동속도 </a:t>
+            </a:r>
+            <a:r>
+              <a:rPr lang="en-US" altLang="ko-KR" dirty="0">
+                <a:solidFill>
+                  <a:sysClr val="windowText" lastClr="000000"/>
+                </a:solidFill>
+              </a:rPr>
+              <a:t>1/2</a:t>
+            </a:r>
+            <a:r>
+              <a:rPr lang="ko-KR" altLang="en-US" dirty="0">
+                <a:solidFill>
+                  <a:sysClr val="windowText" lastClr="000000"/>
+                </a:solidFill>
+              </a:rPr>
+              <a:t>감소</a:t>
+            </a:r>
+          </a:p>
+        </p:txBody>
+      </p:sp>
+      <p:sp>
+        <p:nvSpPr>
+          <p:cNvPr id="104" name="타원 103">
+            <a:extLst>
+              <a:ext uri="{FF2B5EF4-FFF2-40B4-BE49-F238E27FC236}">
+                <a16:creationId xmlns:a16="http://schemas.microsoft.com/office/drawing/2014/main" id="{A8042C3D-45F7-D27A-3EBC-34591A33679D}"/>
+              </a:ext>
+            </a:extLst>
+          </p:cNvPr>
+          <p:cNvSpPr/>
+          <p:nvPr/>
+        </p:nvSpPr>
+        <p:spPr>
+          <a:xfrm>
+            <a:off x="8467256" y="901440"/>
+            <a:ext cx="3601601" cy="1677957"/>
+          </a:xfrm>
+          <a:prstGeom prst="ellipse">
+            <a:avLst/>
+          </a:prstGeom>
+          <a:solidFill>
+            <a:schemeClr val="bg1"/>
+          </a:solidFill>
+          <a:ln>
+            <a:solidFill>
+              <a:schemeClr val="tx1"/>
+            </a:solidFill>
+          </a:ln>
+        </p:spPr>
+        <p:style>
+          <a:lnRef idx="2">
+            <a:schemeClr val="accent1">
+              <a:shade val="15000"/>
+            </a:schemeClr>
+          </a:lnRef>
+          <a:fillRef idx="1">
+            <a:schemeClr val="accent1"/>
+          </a:fillRef>
+          <a:effectRef idx="0">
+            <a:schemeClr val="accent1"/>
+          </a:effectRef>
+          <a:fontRef idx="minor">
+            <a:schemeClr val="lt1"/>
+          </a:fontRef>
+        </p:style>
+        <p:txBody>
+          <a:bodyPr rtlCol="0" anchor="ctr"/>
+          <a:lstStyle/>
+          <a:p>
+            <a:pPr algn="ctr"/>
+            <a:r>
+              <a:rPr lang="ko-KR" altLang="en-US" dirty="0">
+                <a:solidFill>
+                  <a:sysClr val="windowText" lastClr="000000"/>
+                </a:solidFill>
+              </a:rPr>
+              <a:t>생물</a:t>
+            </a:r>
+            <a:r>
+              <a:rPr lang="en-US" altLang="ko-KR" dirty="0">
+                <a:solidFill>
+                  <a:sysClr val="windowText" lastClr="000000"/>
+                </a:solidFill>
+              </a:rPr>
+              <a:t>_</a:t>
+            </a:r>
+            <a:r>
+              <a:rPr lang="ko-KR" altLang="en-US" dirty="0">
+                <a:solidFill>
+                  <a:sysClr val="windowText" lastClr="000000"/>
+                </a:solidFill>
+              </a:rPr>
+              <a:t>벌</a:t>
+            </a:r>
+            <a:br>
+              <a:rPr lang="en-US" altLang="ko-KR" dirty="0">
+                <a:solidFill>
+                  <a:sysClr val="windowText" lastClr="000000"/>
+                </a:solidFill>
+              </a:rPr>
+            </a:br>
+            <a:r>
+              <a:rPr lang="en-US" altLang="ko-KR" dirty="0">
+                <a:solidFill>
+                  <a:sysClr val="windowText" lastClr="000000"/>
+                </a:solidFill>
+              </a:rPr>
+              <a:t>: </a:t>
+            </a:r>
+            <a:r>
+              <a:rPr lang="ko-KR" altLang="en-US" dirty="0">
+                <a:solidFill>
+                  <a:sysClr val="windowText" lastClr="000000"/>
+                </a:solidFill>
+              </a:rPr>
+              <a:t>플레이어 방해</a:t>
+            </a:r>
+            <a:r>
+              <a:rPr lang="en-US" altLang="ko-KR" dirty="0">
+                <a:solidFill>
+                  <a:sysClr val="windowText" lastClr="000000"/>
+                </a:solidFill>
+              </a:rPr>
+              <a:t>,</a:t>
+            </a:r>
+            <a:br>
+              <a:rPr lang="en-US" altLang="ko-KR" dirty="0">
+                <a:solidFill>
+                  <a:sysClr val="windowText" lastClr="000000"/>
+                </a:solidFill>
+              </a:rPr>
+            </a:br>
+            <a:r>
+              <a:rPr lang="ko-KR" altLang="en-US" dirty="0">
+                <a:solidFill>
+                  <a:sysClr val="windowText" lastClr="000000"/>
+                </a:solidFill>
+              </a:rPr>
+              <a:t>플레이어 이동속도 </a:t>
+            </a:r>
+            <a:r>
+              <a:rPr lang="en-US" altLang="ko-KR" dirty="0">
+                <a:solidFill>
+                  <a:sysClr val="windowText" lastClr="000000"/>
+                </a:solidFill>
+              </a:rPr>
+              <a:t>6/5</a:t>
+            </a:r>
+            <a:r>
+              <a:rPr lang="ko-KR" altLang="en-US" dirty="0">
+                <a:solidFill>
+                  <a:sysClr val="windowText" lastClr="000000"/>
+                </a:solidFill>
+              </a:rPr>
+              <a:t>증가</a:t>
+            </a:r>
+            <a:r>
+              <a:rPr lang="en-US" altLang="ko-KR" dirty="0">
+                <a:solidFill>
+                  <a:sysClr val="windowText" lastClr="000000"/>
+                </a:solidFill>
+              </a:rPr>
+              <a:t>, </a:t>
+            </a:r>
+            <a:r>
+              <a:rPr lang="ko-KR" altLang="en-US" dirty="0">
+                <a:solidFill>
+                  <a:sysClr val="windowText" lastClr="000000"/>
+                </a:solidFill>
+              </a:rPr>
+              <a:t>방향회전율 </a:t>
+            </a:r>
+            <a:r>
+              <a:rPr lang="en-US" altLang="ko-KR" dirty="0">
+                <a:solidFill>
+                  <a:sysClr val="windowText" lastClr="000000"/>
+                </a:solidFill>
+              </a:rPr>
+              <a:t>3/2</a:t>
+            </a:r>
+            <a:r>
+              <a:rPr lang="ko-KR" altLang="en-US" dirty="0">
+                <a:solidFill>
+                  <a:sysClr val="windowText" lastClr="000000"/>
+                </a:solidFill>
+              </a:rPr>
+              <a:t>증가</a:t>
+            </a:r>
+            <a:r>
+              <a:rPr lang="en-US" altLang="ko-KR" dirty="0">
+                <a:solidFill>
+                  <a:sysClr val="windowText" lastClr="000000"/>
+                </a:solidFill>
+              </a:rPr>
+              <a:t>, </a:t>
+            </a:r>
+            <a:r>
+              <a:rPr lang="ko-KR" altLang="en-US" dirty="0">
+                <a:solidFill>
+                  <a:sysClr val="windowText" lastClr="000000"/>
+                </a:solidFill>
+              </a:rPr>
+              <a:t>최대 </a:t>
+            </a:r>
+            <a:r>
+              <a:rPr lang="en-US" altLang="ko-KR" dirty="0">
+                <a:solidFill>
+                  <a:sysClr val="windowText" lastClr="000000"/>
+                </a:solidFill>
+              </a:rPr>
+              <a:t>[15T] </a:t>
+            </a:r>
+            <a:r>
+              <a:rPr lang="ko-KR" altLang="en-US" dirty="0">
+                <a:solidFill>
+                  <a:sysClr val="windowText" lastClr="000000"/>
+                </a:solidFill>
+              </a:rPr>
+              <a:t>지속</a:t>
+            </a:r>
+            <a:endParaRPr lang="en-US" altLang="ko-KR" dirty="0">
+              <a:solidFill>
+                <a:sysClr val="windowText" lastClr="000000"/>
+              </a:solidFill>
+            </a:endParaRPr>
+          </a:p>
+        </p:txBody>
+      </p:sp>
+      <p:grpSp>
+        <p:nvGrpSpPr>
+          <p:cNvPr id="108" name="그룹 107">
+            <a:extLst>
+              <a:ext uri="{FF2B5EF4-FFF2-40B4-BE49-F238E27FC236}">
+                <a16:creationId xmlns:a16="http://schemas.microsoft.com/office/drawing/2014/main" id="{1601F852-A91A-A0DF-CC44-F42BB55A71EC}"/>
+              </a:ext>
+            </a:extLst>
+          </p:cNvPr>
+          <p:cNvGrpSpPr/>
+          <p:nvPr/>
+        </p:nvGrpSpPr>
+        <p:grpSpPr>
+          <a:xfrm>
+            <a:off x="123143" y="802178"/>
+            <a:ext cx="4046434" cy="1477328"/>
+            <a:chOff x="9079016" y="0"/>
+            <a:chExt cx="4046434" cy="1477328"/>
+          </a:xfrm>
+        </p:grpSpPr>
+        <p:sp>
+          <p:nvSpPr>
+            <p:cNvPr id="44" name="TextBox 43">
+              <a:extLst>
+                <a:ext uri="{FF2B5EF4-FFF2-40B4-BE49-F238E27FC236}">
+                  <a16:creationId xmlns:a16="http://schemas.microsoft.com/office/drawing/2014/main" id="{6CC55629-E4F3-57CF-CC18-E93B5BE95B2E}"/>
+                </a:ext>
+              </a:extLst>
+            </p:cNvPr>
+            <p:cNvSpPr txBox="1"/>
+            <p:nvPr/>
+          </p:nvSpPr>
+          <p:spPr>
+            <a:xfrm>
+              <a:off x="9079016" y="0"/>
+              <a:ext cx="4046434" cy="1477328"/>
+            </a:xfrm>
+            <a:prstGeom prst="rect">
+              <a:avLst/>
+            </a:prstGeom>
+            <a:noFill/>
+            <a:ln>
+              <a:solidFill>
+                <a:schemeClr val="accent1"/>
+              </a:solidFill>
+            </a:ln>
+          </p:spPr>
+          <p:txBody>
+            <a:bodyPr wrap="square" rtlCol="0">
+              <a:spAutoFit/>
+            </a:bodyPr>
+            <a:lstStyle/>
+            <a:p>
+              <a:r>
+                <a:rPr lang="ko-KR" altLang="en-US" dirty="0"/>
+                <a:t>제한시간 </a:t>
+              </a:r>
+              <a:r>
+                <a:rPr lang="en-US" altLang="ko-KR" dirty="0"/>
+                <a:t>= 100T (T</a:t>
+              </a:r>
+              <a:r>
+                <a:rPr lang="ko-KR" altLang="en-US" dirty="0"/>
+                <a:t>는 임의의 수</a:t>
+              </a:r>
+              <a:r>
+                <a:rPr lang="en-US" altLang="ko-KR" dirty="0"/>
+                <a:t>)</a:t>
+              </a:r>
+              <a:br>
+                <a:rPr lang="en-US" altLang="ko-KR" dirty="0"/>
+              </a:br>
+              <a:r>
+                <a:rPr lang="en-US" altLang="ko-KR" dirty="0"/>
+                <a:t>[</a:t>
+              </a:r>
+              <a:r>
+                <a:rPr lang="en-US" altLang="ko-KR" dirty="0" err="1"/>
+                <a:t>nT</a:t>
+              </a:r>
+              <a:r>
+                <a:rPr lang="en-US" altLang="ko-KR" dirty="0"/>
+                <a:t>] : </a:t>
+              </a:r>
+              <a:r>
+                <a:rPr lang="ko-KR" altLang="en-US" dirty="0"/>
+                <a:t>직선 거리기반 예측 시간</a:t>
+              </a:r>
+              <a:endParaRPr lang="en-US" altLang="ko-KR" dirty="0"/>
+            </a:p>
+            <a:p>
+              <a:r>
+                <a:rPr lang="en-US" altLang="ko-KR" dirty="0"/>
+                <a:t>     : 1</a:t>
+              </a:r>
+              <a:r>
+                <a:rPr lang="ko-KR" altLang="en-US" dirty="0"/>
+                <a:t>차 요소</a:t>
+              </a:r>
+              <a:r>
+                <a:rPr lang="en-US" altLang="ko-KR" dirty="0"/>
+                <a:t>(</a:t>
+              </a:r>
+              <a:r>
+                <a:rPr lang="ko-KR" altLang="en-US" dirty="0"/>
+                <a:t>거리 기반</a:t>
+              </a:r>
+              <a:r>
+                <a:rPr lang="en-US" altLang="ko-KR" dirty="0"/>
+                <a:t>)</a:t>
+              </a:r>
+            </a:p>
+            <a:p>
+              <a:r>
+                <a:rPr lang="en-US" altLang="ko-KR" dirty="0"/>
+                <a:t>     : 2</a:t>
+              </a:r>
+              <a:r>
+                <a:rPr lang="ko-KR" altLang="en-US" dirty="0"/>
+                <a:t>차 요소</a:t>
+              </a:r>
+              <a:r>
+                <a:rPr lang="en-US" altLang="ko-KR" dirty="0"/>
+                <a:t>(</a:t>
+              </a:r>
+              <a:r>
+                <a:rPr lang="ko-KR" altLang="en-US" dirty="0"/>
+                <a:t>지형 기반</a:t>
+              </a:r>
+              <a:r>
+                <a:rPr lang="en-US" altLang="ko-KR" dirty="0"/>
+                <a:t>)</a:t>
+              </a:r>
+            </a:p>
+            <a:p>
+              <a:r>
+                <a:rPr lang="en-US" altLang="ko-KR" dirty="0"/>
+                <a:t>     : 3</a:t>
+              </a:r>
+              <a:r>
+                <a:rPr lang="ko-KR" altLang="en-US" dirty="0"/>
+                <a:t>차 요소</a:t>
+              </a:r>
+              <a:r>
+                <a:rPr lang="en-US" altLang="ko-KR" dirty="0"/>
+                <a:t>(</a:t>
+              </a:r>
+              <a:r>
+                <a:rPr lang="ko-KR" altLang="en-US" dirty="0"/>
+                <a:t>생물 기반</a:t>
+              </a:r>
+              <a:r>
+                <a:rPr lang="en-US" altLang="ko-KR" dirty="0"/>
+                <a:t>)</a:t>
+              </a:r>
+            </a:p>
+          </p:txBody>
+        </p:sp>
+        <p:sp>
+          <p:nvSpPr>
+            <p:cNvPr id="97" name="다이아몬드 96">
+              <a:extLst>
+                <a:ext uri="{FF2B5EF4-FFF2-40B4-BE49-F238E27FC236}">
+                  <a16:creationId xmlns:a16="http://schemas.microsoft.com/office/drawing/2014/main" id="{5611A8C6-9AFC-15AE-4E74-434A6FECAF3A}"/>
+                </a:ext>
+              </a:extLst>
+            </p:cNvPr>
+            <p:cNvSpPr/>
+            <p:nvPr/>
+          </p:nvSpPr>
+          <p:spPr>
+            <a:xfrm>
+              <a:off x="9120807" y="904332"/>
+              <a:ext cx="398820" cy="271347"/>
+            </a:xfrm>
+            <a:prstGeom prst="diamond">
+              <a:avLst/>
+            </a:prstGeom>
+            <a:solidFill>
+              <a:schemeClr val="bg1"/>
+            </a:solidFill>
+            <a:ln>
+              <a:solidFill>
+                <a:schemeClr val="accent1"/>
+              </a:solidFill>
+            </a:ln>
+          </p:spPr>
+          <p:style>
+            <a:lnRef idx="2">
+              <a:schemeClr val="accent1">
+                <a:shade val="15000"/>
+              </a:schemeClr>
+            </a:lnRef>
+            <a:fillRef idx="1">
+              <a:schemeClr val="accent1"/>
+            </a:fillRef>
+            <a:effectRef idx="0">
+              <a:schemeClr val="accent1"/>
+            </a:effectRef>
+            <a:fontRef idx="minor">
+              <a:schemeClr val="lt1"/>
+            </a:fontRef>
+          </p:style>
+          <p:txBody>
+            <a:bodyPr rtlCol="0" anchor="ctr"/>
+            <a:lstStyle/>
+            <a:p>
+              <a:pPr algn="ctr"/>
+              <a:endParaRPr lang="ko-KR" altLang="en-US" dirty="0">
+                <a:solidFill>
+                  <a:sysClr val="windowText" lastClr="000000"/>
+                </a:solidFill>
+              </a:endParaRPr>
+            </a:p>
+          </p:txBody>
+        </p:sp>
+        <p:sp>
+          <p:nvSpPr>
+            <p:cNvPr id="99" name="직사각형 98">
+              <a:extLst>
+                <a:ext uri="{FF2B5EF4-FFF2-40B4-BE49-F238E27FC236}">
+                  <a16:creationId xmlns:a16="http://schemas.microsoft.com/office/drawing/2014/main" id="{32C9CC5E-83D7-4903-86B4-80FF36DDA064}"/>
+                </a:ext>
+              </a:extLst>
+            </p:cNvPr>
+            <p:cNvSpPr/>
+            <p:nvPr/>
+          </p:nvSpPr>
+          <p:spPr>
+            <a:xfrm>
+              <a:off x="9137515" y="652463"/>
+              <a:ext cx="365403" cy="224700"/>
+            </a:xfrm>
+            <a:prstGeom prst="rect">
+              <a:avLst/>
+            </a:prstGeom>
+            <a:solidFill>
+              <a:schemeClr val="lt1"/>
+            </a:solidFill>
+            <a:ln>
+              <a:solidFill>
+                <a:schemeClr val="accent1"/>
+              </a:solidFill>
+            </a:ln>
+          </p:spPr>
+          <p:style>
+            <a:lnRef idx="2">
+              <a:schemeClr val="accent1">
+                <a:shade val="20000"/>
+              </a:schemeClr>
+            </a:lnRef>
+            <a:fillRef idx="1">
+              <a:schemeClr val="accent1"/>
+            </a:fillRef>
+            <a:effectRef idx="0">
+              <a:schemeClr val="accent1"/>
+            </a:effectRef>
+            <a:fontRef idx="minor">
+              <a:schemeClr val="lt1"/>
+            </a:fontRef>
+          </p:style>
+          <p:txBody>
+            <a:bodyPr anchor="ctr"/>
+            <a:lstStyle/>
+            <a:p>
+              <a:pPr lvl="0" algn="ctr">
+                <a:defRPr/>
+              </a:pPr>
+              <a:endParaRPr lang="ko-KR" altLang="en-US" dirty="0">
+                <a:solidFill>
+                  <a:srgbClr val="000000"/>
+                </a:solidFill>
+              </a:endParaRPr>
+            </a:p>
+          </p:txBody>
+        </p:sp>
+        <p:sp>
+          <p:nvSpPr>
+            <p:cNvPr id="106" name="타원 105">
+              <a:extLst>
+                <a:ext uri="{FF2B5EF4-FFF2-40B4-BE49-F238E27FC236}">
+                  <a16:creationId xmlns:a16="http://schemas.microsoft.com/office/drawing/2014/main" id="{71225554-CD4A-1C98-996D-29327B292E34}"/>
+                </a:ext>
+              </a:extLst>
+            </p:cNvPr>
+            <p:cNvSpPr/>
+            <p:nvPr/>
+          </p:nvSpPr>
+          <p:spPr>
+            <a:xfrm>
+              <a:off x="9137515" y="1203406"/>
+              <a:ext cx="339383" cy="220891"/>
+            </a:xfrm>
+            <a:prstGeom prst="ellipse">
+              <a:avLst/>
+            </a:prstGeom>
+            <a:solidFill>
+              <a:schemeClr val="bg1"/>
+            </a:solidFill>
+            <a:ln>
+              <a:solidFill>
+                <a:schemeClr val="accent1"/>
+              </a:solidFill>
+            </a:ln>
+          </p:spPr>
+          <p:style>
+            <a:lnRef idx="2">
+              <a:schemeClr val="accent1">
+                <a:shade val="15000"/>
+              </a:schemeClr>
+            </a:lnRef>
+            <a:fillRef idx="1">
+              <a:schemeClr val="accent1"/>
+            </a:fillRef>
+            <a:effectRef idx="0">
+              <a:schemeClr val="accent1"/>
+            </a:effectRef>
+            <a:fontRef idx="minor">
+              <a:schemeClr val="lt1"/>
+            </a:fontRef>
+          </p:style>
+          <p:txBody>
+            <a:bodyPr rtlCol="0" anchor="ctr"/>
+            <a:lstStyle/>
+            <a:p>
+              <a:pPr algn="ctr"/>
+              <a:endParaRPr lang="ko-KR" altLang="en-US" dirty="0">
+                <a:solidFill>
+                  <a:sysClr val="windowText" lastClr="000000"/>
+                </a:solidFill>
+              </a:endParaRPr>
+            </a:p>
+          </p:txBody>
+        </p:sp>
+      </p:grpSp>
+      <p:sp>
+        <p:nvSpPr>
+          <p:cNvPr id="129" name="사각형: 둥근 모서리 128">
+            <a:extLst>
+              <a:ext uri="{FF2B5EF4-FFF2-40B4-BE49-F238E27FC236}">
+                <a16:creationId xmlns:a16="http://schemas.microsoft.com/office/drawing/2014/main" id="{F28FC141-8401-ECBB-69D9-2C923EE18BCD}"/>
+              </a:ext>
+            </a:extLst>
+          </p:cNvPr>
+          <p:cNvSpPr/>
+          <p:nvPr/>
+        </p:nvSpPr>
+        <p:spPr>
+          <a:xfrm>
+            <a:off x="351333" y="3260695"/>
+            <a:ext cx="1867839" cy="798243"/>
+          </a:xfrm>
+          <a:prstGeom prst="roundRect">
+            <a:avLst/>
+          </a:prstGeom>
+          <a:solidFill>
+            <a:schemeClr val="bg1"/>
+          </a:solidFill>
+          <a:ln>
+            <a:solidFill>
+              <a:schemeClr val="tx2"/>
+            </a:solidFill>
+          </a:ln>
+        </p:spPr>
+        <p:style>
+          <a:lnRef idx="2">
+            <a:schemeClr val="accent1">
+              <a:shade val="15000"/>
+            </a:schemeClr>
+          </a:lnRef>
+          <a:fillRef idx="1">
+            <a:schemeClr val="accent1"/>
+          </a:fillRef>
+          <a:effectRef idx="0">
+            <a:schemeClr val="accent1"/>
+          </a:effectRef>
+          <a:fontRef idx="minor">
+            <a:schemeClr val="lt1"/>
+          </a:fontRef>
+        </p:style>
+        <p:txBody>
+          <a:bodyPr rtlCol="0" anchor="ctr"/>
+          <a:lstStyle/>
+          <a:p>
+            <a:pPr lvl="0" algn="ctr">
+              <a:defRPr/>
+            </a:pPr>
+            <a:r>
+              <a:rPr lang="ko-KR" altLang="en-US">
+                <a:solidFill>
+                  <a:srgbClr val="000000"/>
+                </a:solidFill>
+              </a:rPr>
+              <a:t>배달품</a:t>
+            </a:r>
+            <a:r>
+              <a:rPr lang="en-US" altLang="ko-KR">
+                <a:solidFill>
+                  <a:srgbClr val="000000"/>
+                </a:solidFill>
+              </a:rPr>
+              <a:t>_</a:t>
+            </a:r>
+            <a:r>
+              <a:rPr lang="ko-KR" altLang="en-US">
+                <a:solidFill>
+                  <a:srgbClr val="000000"/>
+                </a:solidFill>
+              </a:rPr>
+              <a:t>꿀</a:t>
+            </a:r>
+            <a:br>
+              <a:rPr lang="en-US" altLang="ko-KR">
+                <a:solidFill>
+                  <a:srgbClr val="000000"/>
+                </a:solidFill>
+              </a:rPr>
+            </a:br>
+            <a:r>
+              <a:rPr lang="ko-KR" altLang="en-US">
+                <a:solidFill>
+                  <a:srgbClr val="000000"/>
+                </a:solidFill>
+              </a:rPr>
+              <a:t>배송지</a:t>
+            </a:r>
+            <a:r>
+              <a:rPr lang="en-US" altLang="ko-KR">
+                <a:solidFill>
+                  <a:srgbClr val="000000"/>
+                </a:solidFill>
+              </a:rPr>
+              <a:t>_</a:t>
+            </a:r>
+            <a:r>
+              <a:rPr lang="ko-KR" altLang="en-US">
+                <a:solidFill>
+                  <a:srgbClr val="000000"/>
+                </a:solidFill>
+              </a:rPr>
+              <a:t>주거지</a:t>
+            </a:r>
+            <a:r>
+              <a:rPr lang="en-US" altLang="ko-KR">
+                <a:solidFill>
+                  <a:srgbClr val="000000"/>
+                </a:solidFill>
+              </a:rPr>
+              <a:t>3</a:t>
+            </a:r>
+            <a:endParaRPr lang="ko-KR" altLang="en-US" dirty="0">
+              <a:solidFill>
+                <a:srgbClr val="000000"/>
+              </a:solidFill>
+            </a:endParaRPr>
+          </a:p>
+        </p:txBody>
+      </p:sp>
+    </p:spTree>
+    <p:extLst>
+      <p:ext uri="{BB962C8B-B14F-4D97-AF65-F5344CB8AC3E}">
+        <p14:creationId xmlns:p14="http://schemas.microsoft.com/office/powerpoint/2010/main" val="686561383"/>
+      </p:ext>
+    </p:extLst>
+  </p:cSld>
+  <p:clrMapOvr>
+    <a:masterClrMapping/>
+  </p:clrMapOvr>
+</p:sld>
+</file>
+
+<file path=ppt/slides/slide27.xml><?xml version="1.0" encoding="utf-8"?>
+<p:sld xmlns:a="http://schemas.openxmlformats.org/drawingml/2006/main" xmlns:r="http://schemas.openxmlformats.org/officeDocument/2006/relationships" xmlns:p="http://schemas.openxmlformats.org/presentationml/2006/main">
+  <p:cSld>
+    <p:spTree>
+      <p:nvGrpSpPr>
+        <p:cNvPr id="1" name=""/>
+        <p:cNvGrpSpPr/>
+        <p:nvPr/>
+      </p:nvGrpSpPr>
+      <p:grpSpPr>
+        <a:xfrm>
+          <a:off x="0" y="0"/>
+          <a:ext cx="0" cy="0"/>
+          <a:chOff x="0" y="0"/>
+          <a:chExt cx="0" cy="0"/>
+        </a:xfrm>
+      </p:grpSpPr>
+      <p:sp>
+        <p:nvSpPr>
           <p:cNvPr id="4" name="제목 3">
             <a:extLst>
               <a:ext uri="{FF2B5EF4-FFF2-40B4-BE49-F238E27FC236}">
@@ -29110,7 +30486,7 @@
 </p:sld>
 </file>
 
-<file path=ppt/slides/slide27.xml><?xml version="1.0" encoding="utf-8"?>
+<file path=ppt/slides/slide28.xml><?xml version="1.0" encoding="utf-8"?>
 <p:sld xmlns:a="http://schemas.openxmlformats.org/drawingml/2006/main" xmlns:r="http://schemas.openxmlformats.org/officeDocument/2006/relationships" xmlns:p="http://schemas.openxmlformats.org/presentationml/2006/main">
   <p:cSld>
     <p:spTree>
@@ -29418,7 +30794,7 @@
           <a:p>
             <a:fld id="{4419BE51-E1DC-4D7D-A982-2D579B035180}" type="slidenum">
               <a:rPr lang="ko-KR" altLang="en-US" smtClean="0"/>
-              <a:t>27</a:t>
+              <a:t>28</a:t>
             </a:fld>
             <a:endParaRPr lang="ko-KR" altLang="en-US"/>
           </a:p>
@@ -34153,62 +35529,6 @@
       </p:sp>
       <p:sp>
         <p:nvSpPr>
-          <p:cNvPr id="13" name="이등변 삼각형 12">
-            <a:extLst>
-              <a:ext uri="{FF2B5EF4-FFF2-40B4-BE49-F238E27FC236}">
-                <a16:creationId xmlns:a16="http://schemas.microsoft.com/office/drawing/2014/main" id="{464D9BB8-0976-DFF1-EDFB-CB02D160AFD1}"/>
-              </a:ext>
-            </a:extLst>
-          </p:cNvPr>
-          <p:cNvSpPr/>
-          <p:nvPr/>
-        </p:nvSpPr>
-        <p:spPr>
-          <a:xfrm>
-            <a:off x="3771901" y="1635125"/>
-            <a:ext cx="290512" cy="190500"/>
-          </a:xfrm>
-          <a:prstGeom prst="triangle">
-            <a:avLst/>
-          </a:prstGeom>
-          <a:solidFill>
-            <a:schemeClr val="accent2"/>
-          </a:solidFill>
-          <a:ln>
-            <a:noFill/>
-          </a:ln>
-        </p:spPr>
-        <p:style>
-          <a:lnRef idx="2">
-            <a:schemeClr val="accent1">
-              <a:shade val="15000"/>
-            </a:schemeClr>
-          </a:lnRef>
-          <a:fillRef idx="1">
-            <a:schemeClr val="accent1"/>
-          </a:fillRef>
-          <a:effectRef idx="0">
-            <a:schemeClr val="accent1"/>
-          </a:effectRef>
-          <a:fontRef idx="minor">
-            <a:schemeClr val="lt1"/>
-          </a:fontRef>
-        </p:style>
-        <p:txBody>
-          <a:bodyPr rtlCol="0" anchor="ctr"/>
-          <a:lstStyle/>
-          <a:p>
-            <a:pPr algn="ctr"/>
-            <a:endParaRPr lang="ko-KR" altLang="en-US" sz="1200" dirty="0">
-              <a:solidFill>
-                <a:sysClr val="windowText" lastClr="000000"/>
-              </a:solidFill>
-            </a:endParaRPr>
-          </a:p>
-        </p:txBody>
-      </p:sp>
-      <p:sp>
-        <p:nvSpPr>
           <p:cNvPr id="14" name="TextBox 13">
             <a:extLst>
               <a:ext uri="{FF2B5EF4-FFF2-40B4-BE49-F238E27FC236}">
@@ -34221,7 +35541,7 @@
         </p:nvSpPr>
         <p:spPr>
           <a:xfrm>
-            <a:off x="3438525" y="1067537"/>
+            <a:off x="3590970" y="1131661"/>
             <a:ext cx="1025912" cy="523220"/>
           </a:xfrm>
           <a:prstGeom prst="rect">
@@ -34868,6 +36188,62 @@
               <a:t>산</a:t>
             </a:r>
             <a:endParaRPr lang="ko-KR" altLang="en-US" sz="1600" b="1" dirty="0">
+              <a:solidFill>
+                <a:sysClr val="windowText" lastClr="000000"/>
+              </a:solidFill>
+            </a:endParaRPr>
+          </a:p>
+        </p:txBody>
+      </p:sp>
+      <p:sp>
+        <p:nvSpPr>
+          <p:cNvPr id="106" name="이등변 삼각형 105">
+            <a:extLst>
+              <a:ext uri="{FF2B5EF4-FFF2-40B4-BE49-F238E27FC236}">
+                <a16:creationId xmlns:a16="http://schemas.microsoft.com/office/drawing/2014/main" id="{16050E1F-3C3F-8F16-B8DE-8DC9979AEBCA}"/>
+              </a:ext>
+            </a:extLst>
+          </p:cNvPr>
+          <p:cNvSpPr/>
+          <p:nvPr/>
+        </p:nvSpPr>
+        <p:spPr>
+          <a:xfrm>
+            <a:off x="3988594" y="1679663"/>
+            <a:ext cx="290512" cy="190500"/>
+          </a:xfrm>
+          <a:prstGeom prst="triangle">
+            <a:avLst/>
+          </a:prstGeom>
+          <a:solidFill>
+            <a:schemeClr val="accent2"/>
+          </a:solidFill>
+          <a:ln>
+            <a:noFill/>
+          </a:ln>
+        </p:spPr>
+        <p:style>
+          <a:lnRef idx="2">
+            <a:schemeClr val="accent1">
+              <a:shade val="15000"/>
+            </a:schemeClr>
+          </a:lnRef>
+          <a:fillRef idx="1">
+            <a:schemeClr val="accent1"/>
+          </a:fillRef>
+          <a:effectRef idx="0">
+            <a:schemeClr val="accent1"/>
+          </a:effectRef>
+          <a:fontRef idx="minor">
+            <a:schemeClr val="lt1"/>
+          </a:fontRef>
+        </p:style>
+        <p:txBody>
+          <a:bodyPr rtlCol="0" anchor="ctr"/>
+          <a:lstStyle/>
+          <a:p>
+            <a:pPr algn="ctr"/>
+            <a:endParaRPr lang="ko-KR" altLang="en-US" sz="1200" dirty="0">
               <a:solidFill>
                 <a:sysClr val="windowText" lastClr="000000"/>
               </a:solidFill>
@@ -34986,7 +36362,7 @@
             </a:r>
             <a:r>
               <a:rPr lang="en-US" altLang="ko-KR" sz="1800" dirty="0"/>
-              <a:t>1/3 </a:t>
+              <a:t>1/2 </a:t>
             </a:r>
             <a:r>
               <a:rPr lang="ko-KR" altLang="en-US" sz="1800" dirty="0"/>
@@ -35026,7 +36402,7 @@
             </a:r>
             <a:r>
               <a:rPr lang="en-US" altLang="ko-KR" sz="1800" dirty="0"/>
-              <a:t>1/2 </a:t>
+              <a:t>1/3 </a:t>
             </a:r>
             <a:r>
               <a:rPr lang="ko-KR" altLang="en-US" sz="1800" dirty="0"/>
@@ -39335,7 +40711,46 @@
               <a:rPr lang="en-US" altLang="ko-KR" sz="2400" dirty="0"/>
               <a:t>)</a:t>
             </a:r>
-            <a:endParaRPr lang="ko-KR" altLang="en-US" sz="2400" dirty="0"/>
+          </a:p>
+          <a:p>
+            <a:endParaRPr lang="en-US" altLang="ko-KR" sz="2400" dirty="0"/>
+          </a:p>
+          <a:p>
+            <a:r>
+              <a:rPr lang="en-US" altLang="ko-KR" sz="2400" dirty="0"/>
+              <a:t>HP</a:t>
+            </a:r>
+            <a:r>
+              <a:rPr lang="ko-KR" altLang="en-US" sz="2400" dirty="0"/>
+              <a:t>가 </a:t>
+            </a:r>
+            <a:r>
+              <a:rPr lang="en-US" altLang="ko-KR" sz="2400" dirty="0"/>
+              <a:t>0</a:t>
+            </a:r>
+            <a:r>
+              <a:rPr lang="ko-KR" altLang="en-US" sz="2400" dirty="0"/>
+              <a:t>이 되어 사망 시 </a:t>
+            </a:r>
+            <a:r>
+              <a:rPr lang="en-US" altLang="ko-KR" sz="2400" dirty="0"/>
+              <a:t>: </a:t>
+            </a:r>
+            <a:br>
+              <a:rPr lang="en-US" altLang="ko-KR" sz="2400" dirty="0"/>
+            </a:br>
+            <a:r>
+              <a:rPr lang="ko-KR" altLang="en-US" sz="2400" dirty="0"/>
+              <a:t>사망한 장소에서 </a:t>
+            </a:r>
+            <a:r>
+              <a:rPr lang="en-US" altLang="ko-KR" sz="2400" dirty="0"/>
+              <a:t>10</a:t>
+            </a:r>
+            <a:r>
+              <a:rPr lang="ko-KR" altLang="en-US" sz="2400" dirty="0"/>
+              <a:t>초 후 부활</a:t>
+            </a:r>
           </a:p>
         </p:txBody>
       </p:sp>

--- a/documents/HyunahKwon/design/designing/for_teammates/프로토타입_기획.pptx
+++ b/documents/HyunahKwon/design/designing/for_teammates/프로토타입_기획.pptx
@@ -6,7 +6,7 @@
     <p:sldMasterId id="2147483666" r:id="rId2"/>
   </p:sldMasterIdLst>
   <p:notesMasterIdLst>
-    <p:notesMasterId r:id="rId31"/>
+    <p:notesMasterId r:id="rId32"/>
   </p:notesMasterIdLst>
   <p:sldIdLst>
     <p:sldId id="256" r:id="rId3"/>
@@ -32,11 +32,12 @@
     <p:sldId id="294" r:id="rId23"/>
     <p:sldId id="291" r:id="rId24"/>
     <p:sldId id="290" r:id="rId25"/>
-    <p:sldId id="297" r:id="rId26"/>
-    <p:sldId id="263" r:id="rId27"/>
-    <p:sldId id="277" r:id="rId28"/>
-    <p:sldId id="305" r:id="rId29"/>
-    <p:sldId id="270" r:id="rId30"/>
+    <p:sldId id="307" r:id="rId26"/>
+    <p:sldId id="297" r:id="rId27"/>
+    <p:sldId id="263" r:id="rId28"/>
+    <p:sldId id="277" r:id="rId29"/>
+    <p:sldId id="305" r:id="rId30"/>
+    <p:sldId id="270" r:id="rId31"/>
   </p:sldIdLst>
   <p:sldSz cx="12192000" cy="6858000"/>
   <p:notesSz cx="6858000" cy="9144000"/>
@@ -7200,13 +7201,26 @@
           <a:p>
             <a:pPr algn="ctr"/>
             <a:r>
-              <a:rPr lang="ko-KR" altLang="en-US">
+              <a:rPr lang="ko-KR" altLang="en-US" dirty="0">
                 <a:solidFill>
                   <a:sysClr val="windowText" lastClr="000000"/>
                 </a:solidFill>
               </a:rPr>
               <a:t>숲</a:t>
             </a:r>
+            <a:r>
+              <a:rPr lang="en-US" altLang="ko-KR" dirty="0">
+                <a:solidFill>
+                  <a:sysClr val="windowText" lastClr="000000"/>
+                </a:solidFill>
+              </a:rPr>
+              <a:t>2</a:t>
+            </a:r>
+            <a:endParaRPr lang="ko-KR" altLang="en-US" dirty="0">
+              <a:solidFill>
+                <a:sysClr val="windowText" lastClr="000000"/>
+              </a:solidFill>
+            </a:endParaRPr>
           </a:p>
         </p:txBody>
       </p:sp>
@@ -7579,13 +7593,26 @@
           <a:p>
             <a:pPr algn="ctr"/>
             <a:r>
-              <a:rPr lang="ko-KR" altLang="en-US">
+              <a:rPr lang="ko-KR" altLang="en-US" dirty="0">
                 <a:solidFill>
                   <a:sysClr val="windowText" lastClr="000000"/>
                 </a:solidFill>
               </a:rPr>
               <a:t>숲</a:t>
             </a:r>
+            <a:r>
+              <a:rPr lang="en-US" altLang="ko-KR" dirty="0">
+                <a:solidFill>
+                  <a:sysClr val="windowText" lastClr="000000"/>
+                </a:solidFill>
+              </a:rPr>
+              <a:t>1</a:t>
+            </a:r>
+            <a:endParaRPr lang="ko-KR" altLang="en-US" dirty="0">
+              <a:solidFill>
+                <a:sysClr val="windowText" lastClr="000000"/>
+              </a:solidFill>
+            </a:endParaRPr>
           </a:p>
         </p:txBody>
       </p:sp>
@@ -8602,6 +8629,19 @@
               </a:rPr>
               <a:t>숲</a:t>
             </a:r>
+            <a:r>
+              <a:rPr lang="en-US" altLang="ko-KR" dirty="0">
+                <a:solidFill>
+                  <a:srgbClr val="000000"/>
+                </a:solidFill>
+              </a:rPr>
+              <a:t>2</a:t>
+            </a:r>
+            <a:endParaRPr lang="ko-KR" altLang="en-US" dirty="0">
+              <a:solidFill>
+                <a:srgbClr val="000000"/>
+              </a:solidFill>
+            </a:endParaRPr>
           </a:p>
         </p:txBody>
       </p:sp>
@@ -9740,6 +9780,19 @@
               </a:rPr>
               <a:t>숲</a:t>
             </a:r>
+            <a:r>
+              <a:rPr lang="en-US" altLang="ko-KR" dirty="0">
+                <a:solidFill>
+                  <a:srgbClr val="000000"/>
+                </a:solidFill>
+              </a:rPr>
+              <a:t>1</a:t>
+            </a:r>
+            <a:endParaRPr lang="ko-KR" altLang="en-US" dirty="0">
+              <a:solidFill>
+                <a:srgbClr val="000000"/>
+              </a:solidFill>
+            </a:endParaRPr>
           </a:p>
         </p:txBody>
       </p:sp>
@@ -24785,7 +24838,13 @@
   <p:cSld>
     <p:spTree>
       <p:nvGrpSpPr>
-        <p:cNvPr id="1" name=""/>
+        <p:cNvPr id="1" name="">
+          <a:extLst>
+            <a:ext uri="{FF2B5EF4-FFF2-40B4-BE49-F238E27FC236}">
+              <a16:creationId xmlns:a16="http://schemas.microsoft.com/office/drawing/2014/main" id="{83B7D4F6-795A-EB20-54C4-2E1FA3F0369C}"/>
+            </a:ext>
+          </a:extLst>
+        </p:cNvPr>
         <p:cNvGrpSpPr/>
         <p:nvPr/>
       </p:nvGrpSpPr>
@@ -24802,7 +24861,7 @@
           <p:cNvPr id="8" name="제목 7">
             <a:extLst>
               <a:ext uri="{FF2B5EF4-FFF2-40B4-BE49-F238E27FC236}">
-                <a16:creationId xmlns:a16="http://schemas.microsoft.com/office/drawing/2014/main" id="{5CF57BE9-8481-9F59-2C95-0BFBD58D1563}"/>
+                <a16:creationId xmlns:a16="http://schemas.microsoft.com/office/drawing/2014/main" id="{EF816BD5-858B-342C-B823-0402D9D95027}"/>
               </a:ext>
             </a:extLst>
           </p:cNvPr>
@@ -24825,37 +24884,285 @@
           </a:p>
         </p:txBody>
       </p:sp>
-      <p:sp>
-        <p:nvSpPr>
-          <p:cNvPr id="9" name="내용 개체 틀 8">
-            <a:extLst>
-              <a:ext uri="{FF2B5EF4-FFF2-40B4-BE49-F238E27FC236}">
-                <a16:creationId xmlns:a16="http://schemas.microsoft.com/office/drawing/2014/main" id="{ADFB9331-B4CC-7392-91EA-48172E75DE39}"/>
-              </a:ext>
-            </a:extLst>
-          </p:cNvPr>
-          <p:cNvSpPr>
-            <a:spLocks noGrp="1"/>
-          </p:cNvSpPr>
+      <p:graphicFrame>
+        <p:nvGraphicFramePr>
+          <p:cNvPr id="2" name="내용 개체 틀 1">
+            <a:extLst>
+              <a:ext uri="{FF2B5EF4-FFF2-40B4-BE49-F238E27FC236}">
+                <a16:creationId xmlns:a16="http://schemas.microsoft.com/office/drawing/2014/main" id="{20A946CA-1674-179B-AE75-4D66304C044B}"/>
+              </a:ext>
+            </a:extLst>
+          </p:cNvPr>
+          <p:cNvGraphicFramePr>
+            <a:graphicFrameLocks noGrp="1"/>
+          </p:cNvGraphicFramePr>
           <p:nvPr>
             <p:ph idx="1"/>
+            <p:extLst>
+              <p:ext uri="{D42A27DB-BD31-4B8C-83A1-F6EECF244321}">
+                <p14:modId xmlns:p14="http://schemas.microsoft.com/office/powerpoint/2010/main" val="2263442438"/>
+              </p:ext>
+            </p:extLst>
           </p:nvPr>
-        </p:nvSpPr>
-        <p:spPr/>
-        <p:txBody>
-          <a:bodyPr/>
-          <a:lstStyle/>
-          <a:p>
-            <a:endParaRPr lang="ko-KR" altLang="en-US"/>
-          </a:p>
-        </p:txBody>
-      </p:sp>
+        </p:nvGraphicFramePr>
+        <p:xfrm>
+          <a:off x="2473459" y="1553440"/>
+          <a:ext cx="2645434" cy="4268844"/>
+        </p:xfrm>
+        <a:graphic>
+          <a:graphicData uri="http://schemas.openxmlformats.org/drawingml/2006/table">
+            <a:tbl>
+              <a:tblPr firstRow="1" bandRow="1">
+                <a:tableStyleId>{5940675A-B579-460E-94D1-54222C63F5DA}</a:tableStyleId>
+              </a:tblPr>
+              <a:tblGrid>
+                <a:gridCol w="1322717">
+                  <a:extLst>
+                    <a:ext uri="{9D8B030D-6E8A-4147-A177-3AD203B41FA5}">
+                      <a16:colId xmlns:a16="http://schemas.microsoft.com/office/drawing/2014/main" val="4245382652"/>
+                    </a:ext>
+                  </a:extLst>
+                </a:gridCol>
+                <a:gridCol w="1322717">
+                  <a:extLst>
+                    <a:ext uri="{9D8B030D-6E8A-4147-A177-3AD203B41FA5}">
+                      <a16:colId xmlns:a16="http://schemas.microsoft.com/office/drawing/2014/main" val="1933533662"/>
+                    </a:ext>
+                  </a:extLst>
+                </a:gridCol>
+              </a:tblGrid>
+              <a:tr h="711474">
+                <a:tc>
+                  <a:txBody>
+                    <a:bodyPr/>
+                    <a:lstStyle/>
+                    <a:p>
+                      <a:pPr algn="ctr" latinLnBrk="1"/>
+                      <a:endParaRPr lang="ko-KR" altLang="en-US" dirty="0"/>
+                    </a:p>
+                  </a:txBody>
+                  <a:tcPr anchor="ctr"/>
+                </a:tc>
+                <a:tc>
+                  <a:txBody>
+                    <a:bodyPr/>
+                    <a:lstStyle/>
+                    <a:p>
+                      <a:pPr algn="ctr" latinLnBrk="1"/>
+                      <a:r>
+                        <a:rPr lang="ko-KR" altLang="en-US" dirty="0"/>
+                        <a:t>크기</a:t>
+                      </a:r>
+                    </a:p>
+                  </a:txBody>
+                  <a:tcPr anchor="ctr"/>
+                </a:tc>
+                <a:extLst>
+                  <a:ext uri="{0D108BD9-81ED-4DB2-BD59-A6C34878D82A}">
+                    <a16:rowId xmlns:a16="http://schemas.microsoft.com/office/drawing/2014/main" val="3362337053"/>
+                  </a:ext>
+                </a:extLst>
+              </a:tr>
+              <a:tr h="711474">
+                <a:tc>
+                  <a:txBody>
+                    <a:bodyPr/>
+                    <a:lstStyle/>
+                    <a:p>
+                      <a:pPr algn="ctr" latinLnBrk="1"/>
+                      <a:r>
+                        <a:rPr lang="ko-KR" altLang="en-US" dirty="0"/>
+                        <a:t>맵</a:t>
+                      </a:r>
+                    </a:p>
+                  </a:txBody>
+                  <a:tcPr anchor="ctr"/>
+                </a:tc>
+                <a:tc>
+                  <a:txBody>
+                    <a:bodyPr/>
+                    <a:lstStyle/>
+                    <a:p>
+                      <a:pPr algn="ctr" latinLnBrk="1"/>
+                      <a:r>
+                        <a:rPr lang="en-US" altLang="ko-KR" dirty="0"/>
+                        <a:t>100d*100d</a:t>
+                      </a:r>
+                      <a:endParaRPr lang="ko-KR" altLang="en-US" dirty="0"/>
+                    </a:p>
+                  </a:txBody>
+                  <a:tcPr anchor="ctr"/>
+                </a:tc>
+                <a:extLst>
+                  <a:ext uri="{0D108BD9-81ED-4DB2-BD59-A6C34878D82A}">
+                    <a16:rowId xmlns:a16="http://schemas.microsoft.com/office/drawing/2014/main" val="2546568347"/>
+                  </a:ext>
+                </a:extLst>
+              </a:tr>
+              <a:tr h="711474">
+                <a:tc>
+                  <a:txBody>
+                    <a:bodyPr/>
+                    <a:lstStyle/>
+                    <a:p>
+                      <a:pPr algn="ctr" latinLnBrk="1"/>
+                      <a:r>
+                        <a:rPr lang="ko-KR" altLang="en-US" dirty="0"/>
+                        <a:t>숲</a:t>
+                      </a:r>
+                      <a:r>
+                        <a:rPr lang="en-US" altLang="ko-KR" dirty="0"/>
+                        <a:t>1</a:t>
+                      </a:r>
+                      <a:endParaRPr lang="ko-KR" altLang="en-US" dirty="0"/>
+                    </a:p>
+                  </a:txBody>
+                  <a:tcPr anchor="ctr"/>
+                </a:tc>
+                <a:tc>
+                  <a:txBody>
+                    <a:bodyPr/>
+                    <a:lstStyle/>
+                    <a:p>
+                      <a:pPr algn="ctr" latinLnBrk="1"/>
+                      <a:r>
+                        <a:rPr lang="en-US" altLang="ko-KR" dirty="0"/>
+                        <a:t>30d*25d</a:t>
+                      </a:r>
+                      <a:endParaRPr lang="ko-KR" altLang="en-US" dirty="0"/>
+                    </a:p>
+                  </a:txBody>
+                  <a:tcPr anchor="ctr"/>
+                </a:tc>
+                <a:extLst>
+                  <a:ext uri="{0D108BD9-81ED-4DB2-BD59-A6C34878D82A}">
+                    <a16:rowId xmlns:a16="http://schemas.microsoft.com/office/drawing/2014/main" val="3861416552"/>
+                  </a:ext>
+                </a:extLst>
+              </a:tr>
+              <a:tr h="711474">
+                <a:tc>
+                  <a:txBody>
+                    <a:bodyPr/>
+                    <a:lstStyle/>
+                    <a:p>
+                      <a:pPr algn="ctr" latinLnBrk="1"/>
+                      <a:r>
+                        <a:rPr lang="ko-KR" altLang="en-US" dirty="0"/>
+                        <a:t>숲</a:t>
+                      </a:r>
+                      <a:r>
+                        <a:rPr lang="en-US" altLang="ko-KR" dirty="0"/>
+                        <a:t>2</a:t>
+                      </a:r>
+                      <a:endParaRPr lang="ko-KR" altLang="en-US" dirty="0"/>
+                    </a:p>
+                  </a:txBody>
+                  <a:tcPr anchor="ctr"/>
+                </a:tc>
+                <a:tc>
+                  <a:txBody>
+                    <a:bodyPr/>
+                    <a:lstStyle/>
+                    <a:p>
+                      <a:pPr algn="ctr" latinLnBrk="1"/>
+                      <a:r>
+                        <a:rPr lang="en-US" altLang="ko-KR" dirty="0"/>
+                        <a:t>40d*20d</a:t>
+                      </a:r>
+                      <a:endParaRPr lang="ko-KR" altLang="en-US" dirty="0"/>
+                    </a:p>
+                  </a:txBody>
+                  <a:tcPr anchor="ctr"/>
+                </a:tc>
+                <a:extLst>
+                  <a:ext uri="{0D108BD9-81ED-4DB2-BD59-A6C34878D82A}">
+                    <a16:rowId xmlns:a16="http://schemas.microsoft.com/office/drawing/2014/main" val="1381366608"/>
+                  </a:ext>
+                </a:extLst>
+              </a:tr>
+              <a:tr h="711474">
+                <a:tc>
+                  <a:txBody>
+                    <a:bodyPr/>
+                    <a:lstStyle/>
+                    <a:p>
+                      <a:pPr algn="ctr" latinLnBrk="1"/>
+                      <a:r>
+                        <a:rPr lang="ko-KR" altLang="en-US" dirty="0"/>
+                        <a:t>모래언덕</a:t>
+                      </a:r>
+                    </a:p>
+                  </a:txBody>
+                  <a:tcPr anchor="ctr"/>
+                </a:tc>
+                <a:tc>
+                  <a:txBody>
+                    <a:bodyPr/>
+                    <a:lstStyle/>
+                    <a:p>
+                      <a:pPr algn="ctr" latinLnBrk="1"/>
+                      <a:r>
+                        <a:rPr lang="en-US" altLang="ko-KR" dirty="0"/>
+                        <a:t>40d*25d</a:t>
+                      </a:r>
+                      <a:endParaRPr lang="ko-KR" altLang="en-US" dirty="0"/>
+                    </a:p>
+                  </a:txBody>
+                  <a:tcPr anchor="ctr"/>
+                </a:tc>
+                <a:extLst>
+                  <a:ext uri="{0D108BD9-81ED-4DB2-BD59-A6C34878D82A}">
+                    <a16:rowId xmlns:a16="http://schemas.microsoft.com/office/drawing/2014/main" val="2471084017"/>
+                  </a:ext>
+                </a:extLst>
+              </a:tr>
+              <a:tr h="711474">
+                <a:tc>
+                  <a:txBody>
+                    <a:bodyPr/>
+                    <a:lstStyle/>
+                    <a:p>
+                      <a:pPr algn="ctr" latinLnBrk="1"/>
+                      <a:r>
+                        <a:rPr lang="ko-KR" altLang="en-US" dirty="0"/>
+                        <a:t>늪</a:t>
+                      </a:r>
+                    </a:p>
+                  </a:txBody>
+                  <a:tcPr anchor="ctr"/>
+                </a:tc>
+                <a:tc>
+                  <a:txBody>
+                    <a:bodyPr/>
+                    <a:lstStyle/>
+                    <a:p>
+                      <a:pPr algn="ctr" latinLnBrk="1"/>
+                      <a:r>
+                        <a:rPr lang="en-US" altLang="ko-KR" dirty="0"/>
+                        <a:t>20d*15d</a:t>
+                      </a:r>
+                      <a:endParaRPr lang="ko-KR" altLang="en-US" dirty="0"/>
+                    </a:p>
+                  </a:txBody>
+                  <a:tcPr anchor="ctr"/>
+                </a:tc>
+                <a:extLst>
+                  <a:ext uri="{0D108BD9-81ED-4DB2-BD59-A6C34878D82A}">
+                    <a16:rowId xmlns:a16="http://schemas.microsoft.com/office/drawing/2014/main" val="316522120"/>
+                  </a:ext>
+                </a:extLst>
+              </a:tr>
+            </a:tbl>
+          </a:graphicData>
+        </a:graphic>
+      </p:graphicFrame>
       <p:sp>
         <p:nvSpPr>
           <p:cNvPr id="5" name="날짜 개체 틀 4">
             <a:extLst>
               <a:ext uri="{FF2B5EF4-FFF2-40B4-BE49-F238E27FC236}">
-                <a16:creationId xmlns:a16="http://schemas.microsoft.com/office/drawing/2014/main" id="{C2C8EE23-F6D7-9277-F5AF-5F6856D9E3E9}"/>
+                <a16:creationId xmlns:a16="http://schemas.microsoft.com/office/drawing/2014/main" id="{460946AB-3E4D-E33A-2A0B-17C37A306EF6}"/>
               </a:ext>
             </a:extLst>
           </p:cNvPr>
@@ -24873,7 +25180,7 @@
           <a:p>
             <a:fld id="{492E84DF-9BBC-4DFC-AB92-EB3DF1902948}" type="datetime1">
               <a:rPr lang="en-US" altLang="ko-KR" smtClean="0"/>
-              <a:t>9/26/2026</a:t>
+              <a:t>9/27/2026</a:t>
             </a:fld>
             <a:endParaRPr lang="ko-KR" altLang="en-US"/>
           </a:p>
@@ -24884,7 +25191,7 @@
           <p:cNvPr id="6" name="슬라이드 번호 개체 틀 5">
             <a:extLst>
               <a:ext uri="{FF2B5EF4-FFF2-40B4-BE49-F238E27FC236}">
-                <a16:creationId xmlns:a16="http://schemas.microsoft.com/office/drawing/2014/main" id="{336E2C10-5960-BF61-30DE-D6C4AA75966E}"/>
+                <a16:creationId xmlns:a16="http://schemas.microsoft.com/office/drawing/2014/main" id="{2DF43B1E-AD1F-E948-28C2-82FB3168E539}"/>
               </a:ext>
             </a:extLst>
           </p:cNvPr>
@@ -24913,7 +25220,7 @@
           <p:cNvPr id="10" name="내용 개체 틀 9">
             <a:extLst>
               <a:ext uri="{FF2B5EF4-FFF2-40B4-BE49-F238E27FC236}">
-                <a16:creationId xmlns:a16="http://schemas.microsoft.com/office/drawing/2014/main" id="{7D3AF6C5-2C25-B122-432E-F14FF0090F12}"/>
+                <a16:creationId xmlns:a16="http://schemas.microsoft.com/office/drawing/2014/main" id="{2B3BECAE-7C73-0F19-AE82-887C923DF66B}"/>
               </a:ext>
             </a:extLst>
           </p:cNvPr>
@@ -24933,10 +25240,1376 @@
           </a:p>
         </p:txBody>
       </p:sp>
+      <p:pic>
+        <p:nvPicPr>
+          <p:cNvPr id="32" name="그림 31">
+            <a:extLst>
+              <a:ext uri="{FF2B5EF4-FFF2-40B4-BE49-F238E27FC236}">
+                <a16:creationId xmlns:a16="http://schemas.microsoft.com/office/drawing/2014/main" id="{AD2F03D9-B845-BFFB-CCF6-9FB4E74653D8}"/>
+              </a:ext>
+            </a:extLst>
+          </p:cNvPr>
+          <p:cNvPicPr>
+            <a:picLocks noChangeAspect="1"/>
+          </p:cNvPicPr>
+          <p:nvPr/>
+        </p:nvPicPr>
+        <p:blipFill>
+          <a:blip r:embed="rId2"/>
+          <a:stretch>
+            <a:fillRect/>
+          </a:stretch>
+        </p:blipFill>
+        <p:spPr>
+          <a:xfrm>
+            <a:off x="6383543" y="1525774"/>
+            <a:ext cx="4152774" cy="4164488"/>
+          </a:xfrm>
+          <a:prstGeom prst="rect">
+            <a:avLst/>
+          </a:prstGeom>
+        </p:spPr>
+      </p:pic>
+      <p:sp>
+        <p:nvSpPr>
+          <p:cNvPr id="36" name="자유형: 도형 35">
+            <a:extLst>
+              <a:ext uri="{FF2B5EF4-FFF2-40B4-BE49-F238E27FC236}">
+                <a16:creationId xmlns:a16="http://schemas.microsoft.com/office/drawing/2014/main" id="{A9FC3793-CB72-77C8-51B2-9A89A355061A}"/>
+              </a:ext>
+            </a:extLst>
+          </p:cNvPr>
+          <p:cNvSpPr/>
+          <p:nvPr/>
+        </p:nvSpPr>
+        <p:spPr>
+          <a:xfrm>
+            <a:off x="6377792" y="1293938"/>
+            <a:ext cx="4129178" cy="235813"/>
+          </a:xfrm>
+          <a:custGeom>
+            <a:avLst/>
+            <a:gdLst>
+              <a:gd name="csX0" fmla="*/ 0 w 4129178"/>
+              <a:gd name="csY0" fmla="*/ 224311 h 235813"/>
+              <a:gd name="csX1" fmla="*/ 1955321 w 4129178"/>
+              <a:gd name="csY1" fmla="*/ 24 h 235813"/>
+              <a:gd name="csX2" fmla="*/ 4129178 w 4129178"/>
+              <a:gd name="csY2" fmla="*/ 235813 h 235813"/>
+            </a:gdLst>
+            <a:ahLst/>
+            <a:cxnLst>
+              <a:cxn ang="0">
+                <a:pos x="csX0" y="csY0"/>
+              </a:cxn>
+              <a:cxn ang="0">
+                <a:pos x="csX1" y="csY1"/>
+              </a:cxn>
+              <a:cxn ang="0">
+                <a:pos x="csX2" y="csY2"/>
+              </a:cxn>
+            </a:cxnLst>
+            <a:rect l="l" t="t" r="r" b="b"/>
+            <a:pathLst>
+              <a:path w="4129178" h="235813">
+                <a:moveTo>
+                  <a:pt x="0" y="224311"/>
+                </a:moveTo>
+                <a:cubicBezTo>
+                  <a:pt x="633562" y="111209"/>
+                  <a:pt x="1267125" y="-1893"/>
+                  <a:pt x="1955321" y="24"/>
+                </a:cubicBezTo>
+                <a:cubicBezTo>
+                  <a:pt x="2643517" y="1941"/>
+                  <a:pt x="3386347" y="118877"/>
+                  <a:pt x="4129178" y="235813"/>
+                </a:cubicBezTo>
+              </a:path>
+            </a:pathLst>
+          </a:custGeom>
+          <a:noFill/>
+          <a:ln w="19050">
+            <a:prstDash val="dash"/>
+          </a:ln>
+        </p:spPr>
+        <p:style>
+          <a:lnRef idx="2">
+            <a:schemeClr val="accent1">
+              <a:shade val="15000"/>
+            </a:schemeClr>
+          </a:lnRef>
+          <a:fillRef idx="1">
+            <a:schemeClr val="accent1"/>
+          </a:fillRef>
+          <a:effectRef idx="0">
+            <a:schemeClr val="accent1"/>
+          </a:effectRef>
+          <a:fontRef idx="minor">
+            <a:schemeClr val="lt1"/>
+          </a:fontRef>
+        </p:style>
+        <p:txBody>
+          <a:bodyPr rtlCol="0" anchor="ctr"/>
+          <a:lstStyle/>
+          <a:p>
+            <a:pPr algn="ctr"/>
+            <a:endParaRPr lang="ko-KR" altLang="en-US"/>
+          </a:p>
+        </p:txBody>
+      </p:sp>
+      <p:sp>
+        <p:nvSpPr>
+          <p:cNvPr id="38" name="자유형: 도형 37">
+            <a:extLst>
+              <a:ext uri="{FF2B5EF4-FFF2-40B4-BE49-F238E27FC236}">
+                <a16:creationId xmlns:a16="http://schemas.microsoft.com/office/drawing/2014/main" id="{72028BC5-0B37-AFD4-F158-2A6E32D34539}"/>
+              </a:ext>
+            </a:extLst>
+          </p:cNvPr>
+          <p:cNvSpPr/>
+          <p:nvPr/>
+        </p:nvSpPr>
+        <p:spPr>
+          <a:xfrm rot="5400000">
+            <a:off x="8589636" y="3490111"/>
+            <a:ext cx="4129178" cy="235813"/>
+          </a:xfrm>
+          <a:custGeom>
+            <a:avLst/>
+            <a:gdLst>
+              <a:gd name="csX0" fmla="*/ 0 w 4129178"/>
+              <a:gd name="csY0" fmla="*/ 224311 h 235813"/>
+              <a:gd name="csX1" fmla="*/ 1955321 w 4129178"/>
+              <a:gd name="csY1" fmla="*/ 24 h 235813"/>
+              <a:gd name="csX2" fmla="*/ 4129178 w 4129178"/>
+              <a:gd name="csY2" fmla="*/ 235813 h 235813"/>
+            </a:gdLst>
+            <a:ahLst/>
+            <a:cxnLst>
+              <a:cxn ang="0">
+                <a:pos x="csX0" y="csY0"/>
+              </a:cxn>
+              <a:cxn ang="0">
+                <a:pos x="csX1" y="csY1"/>
+              </a:cxn>
+              <a:cxn ang="0">
+                <a:pos x="csX2" y="csY2"/>
+              </a:cxn>
+            </a:cxnLst>
+            <a:rect l="l" t="t" r="r" b="b"/>
+            <a:pathLst>
+              <a:path w="4129178" h="235813">
+                <a:moveTo>
+                  <a:pt x="0" y="224311"/>
+                </a:moveTo>
+                <a:cubicBezTo>
+                  <a:pt x="633562" y="111209"/>
+                  <a:pt x="1267125" y="-1893"/>
+                  <a:pt x="1955321" y="24"/>
+                </a:cubicBezTo>
+                <a:cubicBezTo>
+                  <a:pt x="2643517" y="1941"/>
+                  <a:pt x="3386347" y="118877"/>
+                  <a:pt x="4129178" y="235813"/>
+                </a:cubicBezTo>
+              </a:path>
+            </a:pathLst>
+          </a:custGeom>
+          <a:noFill/>
+          <a:ln w="19050">
+            <a:prstDash val="dash"/>
+          </a:ln>
+        </p:spPr>
+        <p:style>
+          <a:lnRef idx="2">
+            <a:schemeClr val="accent1">
+              <a:shade val="15000"/>
+            </a:schemeClr>
+          </a:lnRef>
+          <a:fillRef idx="1">
+            <a:schemeClr val="accent1"/>
+          </a:fillRef>
+          <a:effectRef idx="0">
+            <a:schemeClr val="accent1"/>
+          </a:effectRef>
+          <a:fontRef idx="minor">
+            <a:schemeClr val="lt1"/>
+          </a:fontRef>
+        </p:style>
+        <p:txBody>
+          <a:bodyPr rtlCol="0" anchor="ctr"/>
+          <a:lstStyle/>
+          <a:p>
+            <a:pPr algn="ctr"/>
+            <a:endParaRPr lang="ko-KR" altLang="en-US"/>
+          </a:p>
+        </p:txBody>
+      </p:sp>
+      <p:sp>
+        <p:nvSpPr>
+          <p:cNvPr id="39" name="TextBox 38">
+            <a:extLst>
+              <a:ext uri="{FF2B5EF4-FFF2-40B4-BE49-F238E27FC236}">
+                <a16:creationId xmlns:a16="http://schemas.microsoft.com/office/drawing/2014/main" id="{5C5329C8-DCC7-A2F0-6B61-6A9432AB87EF}"/>
+              </a:ext>
+            </a:extLst>
+          </p:cNvPr>
+          <p:cNvSpPr txBox="1"/>
+          <p:nvPr/>
+        </p:nvSpPr>
+        <p:spPr>
+          <a:xfrm>
+            <a:off x="7879085" y="971408"/>
+            <a:ext cx="1161690" cy="369332"/>
+          </a:xfrm>
+          <a:prstGeom prst="rect">
+            <a:avLst/>
+          </a:prstGeom>
+          <a:noFill/>
+        </p:spPr>
+        <p:txBody>
+          <a:bodyPr wrap="square" rtlCol="0" anchor="ctr">
+            <a:spAutoFit/>
+          </a:bodyPr>
+          <a:lstStyle/>
+          <a:p>
+            <a:pPr algn="ctr"/>
+            <a:r>
+              <a:rPr lang="en-US" altLang="ko-KR" dirty="0"/>
+              <a:t>100d</a:t>
+            </a:r>
+            <a:endParaRPr lang="ko-KR" altLang="en-US" dirty="0"/>
+          </a:p>
+        </p:txBody>
+      </p:sp>
+      <p:sp>
+        <p:nvSpPr>
+          <p:cNvPr id="41" name="TextBox 40">
+            <a:extLst>
+              <a:ext uri="{FF2B5EF4-FFF2-40B4-BE49-F238E27FC236}">
+                <a16:creationId xmlns:a16="http://schemas.microsoft.com/office/drawing/2014/main" id="{3FE57484-2A68-488C-FE59-0B93B43FA7FB}"/>
+              </a:ext>
+            </a:extLst>
+          </p:cNvPr>
+          <p:cNvSpPr txBox="1"/>
+          <p:nvPr/>
+        </p:nvSpPr>
+        <p:spPr>
+          <a:xfrm>
+            <a:off x="10456649" y="3150381"/>
+            <a:ext cx="1161690" cy="369332"/>
+          </a:xfrm>
+          <a:prstGeom prst="rect">
+            <a:avLst/>
+          </a:prstGeom>
+          <a:noFill/>
+        </p:spPr>
+        <p:txBody>
+          <a:bodyPr wrap="square" rtlCol="0" anchor="ctr">
+            <a:spAutoFit/>
+          </a:bodyPr>
+          <a:lstStyle/>
+          <a:p>
+            <a:pPr algn="ctr"/>
+            <a:r>
+              <a:rPr lang="en-US" altLang="ko-KR" dirty="0"/>
+              <a:t>100d</a:t>
+            </a:r>
+            <a:endParaRPr lang="ko-KR" altLang="en-US" dirty="0"/>
+          </a:p>
+        </p:txBody>
+      </p:sp>
+      <p:cxnSp>
+        <p:nvCxnSpPr>
+          <p:cNvPr id="42" name="직선 연결선 41">
+            <a:extLst>
+              <a:ext uri="{FF2B5EF4-FFF2-40B4-BE49-F238E27FC236}">
+                <a16:creationId xmlns:a16="http://schemas.microsoft.com/office/drawing/2014/main" id="{24EF25E2-6D6F-DF10-2FB6-D98F803D0F88}"/>
+              </a:ext>
+            </a:extLst>
+          </p:cNvPr>
+          <p:cNvCxnSpPr>
+            <a:cxnSpLocks/>
+            <a:stCxn id="32" idx="0"/>
+            <a:endCxn id="32" idx="2"/>
+          </p:cNvCxnSpPr>
+          <p:nvPr/>
+        </p:nvCxnSpPr>
+        <p:spPr>
+          <a:xfrm>
+            <a:off x="8459930" y="1525774"/>
+            <a:ext cx="0" cy="4164488"/>
+          </a:xfrm>
+          <a:prstGeom prst="line">
+            <a:avLst/>
+          </a:prstGeom>
+          <a:ln>
+            <a:prstDash val="dash"/>
+          </a:ln>
+        </p:spPr>
+        <p:style>
+          <a:lnRef idx="1">
+            <a:schemeClr val="dk1"/>
+          </a:lnRef>
+          <a:fillRef idx="0">
+            <a:schemeClr val="dk1"/>
+          </a:fillRef>
+          <a:effectRef idx="0">
+            <a:schemeClr val="dk1"/>
+          </a:effectRef>
+          <a:fontRef idx="minor">
+            <a:schemeClr val="tx1"/>
+          </a:fontRef>
+        </p:style>
+      </p:cxnSp>
+      <p:cxnSp>
+        <p:nvCxnSpPr>
+          <p:cNvPr id="43" name="직선 연결선 42">
+            <a:extLst>
+              <a:ext uri="{FF2B5EF4-FFF2-40B4-BE49-F238E27FC236}">
+                <a16:creationId xmlns:a16="http://schemas.microsoft.com/office/drawing/2014/main" id="{350D21BC-03E8-4770-3F07-FA45CB9F81E4}"/>
+              </a:ext>
+            </a:extLst>
+          </p:cNvPr>
+          <p:cNvCxnSpPr>
+            <a:cxnSpLocks/>
+            <a:stCxn id="32" idx="1"/>
+            <a:endCxn id="32" idx="3"/>
+          </p:cNvCxnSpPr>
+          <p:nvPr/>
+        </p:nvCxnSpPr>
+        <p:spPr>
+          <a:xfrm>
+            <a:off x="6383543" y="3608018"/>
+            <a:ext cx="4152774" cy="0"/>
+          </a:xfrm>
+          <a:prstGeom prst="line">
+            <a:avLst/>
+          </a:prstGeom>
+          <a:ln>
+            <a:prstDash val="dash"/>
+          </a:ln>
+        </p:spPr>
+        <p:style>
+          <a:lnRef idx="1">
+            <a:schemeClr val="dk1"/>
+          </a:lnRef>
+          <a:fillRef idx="0">
+            <a:schemeClr val="dk1"/>
+          </a:fillRef>
+          <a:effectRef idx="0">
+            <a:schemeClr val="dk1"/>
+          </a:effectRef>
+          <a:fontRef idx="minor">
+            <a:schemeClr val="tx1"/>
+          </a:fontRef>
+        </p:style>
+      </p:cxnSp>
+      <p:sp>
+        <p:nvSpPr>
+          <p:cNvPr id="49" name="자유형: 도형 48">
+            <a:extLst>
+              <a:ext uri="{FF2B5EF4-FFF2-40B4-BE49-F238E27FC236}">
+                <a16:creationId xmlns:a16="http://schemas.microsoft.com/office/drawing/2014/main" id="{AA3CE3F5-BFCF-DD7C-F5BE-62E79C4744F3}"/>
+              </a:ext>
+            </a:extLst>
+          </p:cNvPr>
+          <p:cNvSpPr/>
+          <p:nvPr/>
+        </p:nvSpPr>
+        <p:spPr>
+          <a:xfrm>
+            <a:off x="6407140" y="3203274"/>
+            <a:ext cx="1253112" cy="235809"/>
+          </a:xfrm>
+          <a:custGeom>
+            <a:avLst/>
+            <a:gdLst>
+              <a:gd name="csX0" fmla="*/ 0 w 4129178"/>
+              <a:gd name="csY0" fmla="*/ 224311 h 235813"/>
+              <a:gd name="csX1" fmla="*/ 1955321 w 4129178"/>
+              <a:gd name="csY1" fmla="*/ 24 h 235813"/>
+              <a:gd name="csX2" fmla="*/ 4129178 w 4129178"/>
+              <a:gd name="csY2" fmla="*/ 235813 h 235813"/>
+            </a:gdLst>
+            <a:ahLst/>
+            <a:cxnLst>
+              <a:cxn ang="0">
+                <a:pos x="csX0" y="csY0"/>
+              </a:cxn>
+              <a:cxn ang="0">
+                <a:pos x="csX1" y="csY1"/>
+              </a:cxn>
+              <a:cxn ang="0">
+                <a:pos x="csX2" y="csY2"/>
+              </a:cxn>
+            </a:cxnLst>
+            <a:rect l="l" t="t" r="r" b="b"/>
+            <a:pathLst>
+              <a:path w="4129178" h="235813">
+                <a:moveTo>
+                  <a:pt x="0" y="224311"/>
+                </a:moveTo>
+                <a:cubicBezTo>
+                  <a:pt x="633562" y="111209"/>
+                  <a:pt x="1267125" y="-1893"/>
+                  <a:pt x="1955321" y="24"/>
+                </a:cubicBezTo>
+                <a:cubicBezTo>
+                  <a:pt x="2643517" y="1941"/>
+                  <a:pt x="3386347" y="118877"/>
+                  <a:pt x="4129178" y="235813"/>
+                </a:cubicBezTo>
+              </a:path>
+            </a:pathLst>
+          </a:custGeom>
+          <a:noFill/>
+          <a:ln w="19050">
+            <a:prstDash val="dash"/>
+          </a:ln>
+        </p:spPr>
+        <p:style>
+          <a:lnRef idx="2">
+            <a:schemeClr val="accent1">
+              <a:shade val="15000"/>
+            </a:schemeClr>
+          </a:lnRef>
+          <a:fillRef idx="1">
+            <a:schemeClr val="accent1"/>
+          </a:fillRef>
+          <a:effectRef idx="0">
+            <a:schemeClr val="accent1"/>
+          </a:effectRef>
+          <a:fontRef idx="minor">
+            <a:schemeClr val="lt1"/>
+          </a:fontRef>
+        </p:style>
+        <p:txBody>
+          <a:bodyPr rtlCol="0" anchor="ctr"/>
+          <a:lstStyle/>
+          <a:p>
+            <a:pPr algn="ctr"/>
+            <a:endParaRPr lang="ko-KR" altLang="en-US"/>
+          </a:p>
+        </p:txBody>
+      </p:sp>
+      <p:sp>
+        <p:nvSpPr>
+          <p:cNvPr id="51" name="자유형: 도형 50">
+            <a:extLst>
+              <a:ext uri="{FF2B5EF4-FFF2-40B4-BE49-F238E27FC236}">
+                <a16:creationId xmlns:a16="http://schemas.microsoft.com/office/drawing/2014/main" id="{7509C5AB-F4DE-3D4D-1834-0942DCFC0EF8}"/>
+              </a:ext>
+            </a:extLst>
+          </p:cNvPr>
+          <p:cNvSpPr/>
+          <p:nvPr/>
+        </p:nvSpPr>
+        <p:spPr>
+          <a:xfrm>
+            <a:off x="8014522" y="2195838"/>
+            <a:ext cx="1348010" cy="228185"/>
+          </a:xfrm>
+          <a:custGeom>
+            <a:avLst/>
+            <a:gdLst>
+              <a:gd name="csX0" fmla="*/ 0 w 4129178"/>
+              <a:gd name="csY0" fmla="*/ 224311 h 235813"/>
+              <a:gd name="csX1" fmla="*/ 1955321 w 4129178"/>
+              <a:gd name="csY1" fmla="*/ 24 h 235813"/>
+              <a:gd name="csX2" fmla="*/ 4129178 w 4129178"/>
+              <a:gd name="csY2" fmla="*/ 235813 h 235813"/>
+            </a:gdLst>
+            <a:ahLst/>
+            <a:cxnLst>
+              <a:cxn ang="0">
+                <a:pos x="csX0" y="csY0"/>
+              </a:cxn>
+              <a:cxn ang="0">
+                <a:pos x="csX1" y="csY1"/>
+              </a:cxn>
+              <a:cxn ang="0">
+                <a:pos x="csX2" y="csY2"/>
+              </a:cxn>
+            </a:cxnLst>
+            <a:rect l="l" t="t" r="r" b="b"/>
+            <a:pathLst>
+              <a:path w="4129178" h="235813">
+                <a:moveTo>
+                  <a:pt x="0" y="224311"/>
+                </a:moveTo>
+                <a:cubicBezTo>
+                  <a:pt x="633562" y="111209"/>
+                  <a:pt x="1267125" y="-1893"/>
+                  <a:pt x="1955321" y="24"/>
+                </a:cubicBezTo>
+                <a:cubicBezTo>
+                  <a:pt x="2643517" y="1941"/>
+                  <a:pt x="3386347" y="118877"/>
+                  <a:pt x="4129178" y="235813"/>
+                </a:cubicBezTo>
+              </a:path>
+            </a:pathLst>
+          </a:custGeom>
+          <a:noFill/>
+          <a:ln w="19050">
+            <a:prstDash val="dash"/>
+          </a:ln>
+        </p:spPr>
+        <p:style>
+          <a:lnRef idx="2">
+            <a:schemeClr val="accent1">
+              <a:shade val="15000"/>
+            </a:schemeClr>
+          </a:lnRef>
+          <a:fillRef idx="1">
+            <a:schemeClr val="accent1"/>
+          </a:fillRef>
+          <a:effectRef idx="0">
+            <a:schemeClr val="accent1"/>
+          </a:effectRef>
+          <a:fontRef idx="minor">
+            <a:schemeClr val="lt1"/>
+          </a:fontRef>
+        </p:style>
+        <p:txBody>
+          <a:bodyPr rtlCol="0" anchor="ctr"/>
+          <a:lstStyle/>
+          <a:p>
+            <a:pPr algn="ctr"/>
+            <a:endParaRPr lang="ko-KR" altLang="en-US"/>
+          </a:p>
+        </p:txBody>
+      </p:sp>
+      <p:sp>
+        <p:nvSpPr>
+          <p:cNvPr id="55" name="자유형: 도형 54">
+            <a:extLst>
+              <a:ext uri="{FF2B5EF4-FFF2-40B4-BE49-F238E27FC236}">
+                <a16:creationId xmlns:a16="http://schemas.microsoft.com/office/drawing/2014/main" id="{3BA74708-E3B2-BC6E-91F5-B4E1AF31ACE3}"/>
+              </a:ext>
+            </a:extLst>
+          </p:cNvPr>
+          <p:cNvSpPr/>
+          <p:nvPr/>
+        </p:nvSpPr>
+        <p:spPr>
+          <a:xfrm rot="5400000">
+            <a:off x="7277766" y="3815700"/>
+            <a:ext cx="941714" cy="168316"/>
+          </a:xfrm>
+          <a:custGeom>
+            <a:avLst/>
+            <a:gdLst>
+              <a:gd name="csX0" fmla="*/ 0 w 4129178"/>
+              <a:gd name="csY0" fmla="*/ 224311 h 235813"/>
+              <a:gd name="csX1" fmla="*/ 1955321 w 4129178"/>
+              <a:gd name="csY1" fmla="*/ 24 h 235813"/>
+              <a:gd name="csX2" fmla="*/ 4129178 w 4129178"/>
+              <a:gd name="csY2" fmla="*/ 235813 h 235813"/>
+            </a:gdLst>
+            <a:ahLst/>
+            <a:cxnLst>
+              <a:cxn ang="0">
+                <a:pos x="csX0" y="csY0"/>
+              </a:cxn>
+              <a:cxn ang="0">
+                <a:pos x="csX1" y="csY1"/>
+              </a:cxn>
+              <a:cxn ang="0">
+                <a:pos x="csX2" y="csY2"/>
+              </a:cxn>
+            </a:cxnLst>
+            <a:rect l="l" t="t" r="r" b="b"/>
+            <a:pathLst>
+              <a:path w="4129178" h="235813">
+                <a:moveTo>
+                  <a:pt x="0" y="224311"/>
+                </a:moveTo>
+                <a:cubicBezTo>
+                  <a:pt x="633562" y="111209"/>
+                  <a:pt x="1267125" y="-1893"/>
+                  <a:pt x="1955321" y="24"/>
+                </a:cubicBezTo>
+                <a:cubicBezTo>
+                  <a:pt x="2643517" y="1941"/>
+                  <a:pt x="3386347" y="118877"/>
+                  <a:pt x="4129178" y="235813"/>
+                </a:cubicBezTo>
+              </a:path>
+            </a:pathLst>
+          </a:custGeom>
+          <a:noFill/>
+          <a:ln w="19050">
+            <a:prstDash val="dash"/>
+          </a:ln>
+        </p:spPr>
+        <p:style>
+          <a:lnRef idx="2">
+            <a:schemeClr val="accent1">
+              <a:shade val="15000"/>
+            </a:schemeClr>
+          </a:lnRef>
+          <a:fillRef idx="1">
+            <a:schemeClr val="accent1"/>
+          </a:fillRef>
+          <a:effectRef idx="0">
+            <a:schemeClr val="accent1"/>
+          </a:effectRef>
+          <a:fontRef idx="minor">
+            <a:schemeClr val="lt1"/>
+          </a:fontRef>
+        </p:style>
+        <p:txBody>
+          <a:bodyPr rtlCol="0" anchor="ctr"/>
+          <a:lstStyle/>
+          <a:p>
+            <a:pPr algn="ctr"/>
+            <a:endParaRPr lang="ko-KR" altLang="en-US"/>
+          </a:p>
+        </p:txBody>
+      </p:sp>
+      <p:sp>
+        <p:nvSpPr>
+          <p:cNvPr id="57" name="자유형: 도형 56">
+            <a:extLst>
+              <a:ext uri="{FF2B5EF4-FFF2-40B4-BE49-F238E27FC236}">
+                <a16:creationId xmlns:a16="http://schemas.microsoft.com/office/drawing/2014/main" id="{BACC5BA7-437A-6B0B-3DFB-94BCE3ACE9A8}"/>
+              </a:ext>
+            </a:extLst>
+          </p:cNvPr>
+          <p:cNvSpPr/>
+          <p:nvPr/>
+        </p:nvSpPr>
+        <p:spPr>
+          <a:xfrm rot="5400000">
+            <a:off x="7491619" y="2033804"/>
+            <a:ext cx="1136945" cy="156193"/>
+          </a:xfrm>
+          <a:custGeom>
+            <a:avLst/>
+            <a:gdLst>
+              <a:gd name="csX0" fmla="*/ 0 w 4129178"/>
+              <a:gd name="csY0" fmla="*/ 224311 h 235813"/>
+              <a:gd name="csX1" fmla="*/ 1955321 w 4129178"/>
+              <a:gd name="csY1" fmla="*/ 24 h 235813"/>
+              <a:gd name="csX2" fmla="*/ 4129178 w 4129178"/>
+              <a:gd name="csY2" fmla="*/ 235813 h 235813"/>
+            </a:gdLst>
+            <a:ahLst/>
+            <a:cxnLst>
+              <a:cxn ang="0">
+                <a:pos x="csX0" y="csY0"/>
+              </a:cxn>
+              <a:cxn ang="0">
+                <a:pos x="csX1" y="csY1"/>
+              </a:cxn>
+              <a:cxn ang="0">
+                <a:pos x="csX2" y="csY2"/>
+              </a:cxn>
+            </a:cxnLst>
+            <a:rect l="l" t="t" r="r" b="b"/>
+            <a:pathLst>
+              <a:path w="4129178" h="235813">
+                <a:moveTo>
+                  <a:pt x="0" y="224311"/>
+                </a:moveTo>
+                <a:cubicBezTo>
+                  <a:pt x="633562" y="111209"/>
+                  <a:pt x="1267125" y="-1893"/>
+                  <a:pt x="1955321" y="24"/>
+                </a:cubicBezTo>
+                <a:cubicBezTo>
+                  <a:pt x="2643517" y="1941"/>
+                  <a:pt x="3386347" y="118877"/>
+                  <a:pt x="4129178" y="235813"/>
+                </a:cubicBezTo>
+              </a:path>
+            </a:pathLst>
+          </a:custGeom>
+          <a:noFill/>
+          <a:ln w="19050">
+            <a:prstDash val="dash"/>
+          </a:ln>
+        </p:spPr>
+        <p:style>
+          <a:lnRef idx="2">
+            <a:schemeClr val="accent1">
+              <a:shade val="15000"/>
+            </a:schemeClr>
+          </a:lnRef>
+          <a:fillRef idx="1">
+            <a:schemeClr val="accent1"/>
+          </a:fillRef>
+          <a:effectRef idx="0">
+            <a:schemeClr val="accent1"/>
+          </a:effectRef>
+          <a:fontRef idx="minor">
+            <a:schemeClr val="lt1"/>
+          </a:fontRef>
+        </p:style>
+        <p:txBody>
+          <a:bodyPr rtlCol="0" anchor="ctr"/>
+          <a:lstStyle/>
+          <a:p>
+            <a:pPr algn="ctr"/>
+            <a:endParaRPr lang="ko-KR" altLang="en-US"/>
+          </a:p>
+        </p:txBody>
+      </p:sp>
+      <p:sp>
+        <p:nvSpPr>
+          <p:cNvPr id="59" name="자유형: 도형 58">
+            <a:extLst>
+              <a:ext uri="{FF2B5EF4-FFF2-40B4-BE49-F238E27FC236}">
+                <a16:creationId xmlns:a16="http://schemas.microsoft.com/office/drawing/2014/main" id="{C220081B-D162-CB59-0713-6850674D6E95}"/>
+              </a:ext>
+            </a:extLst>
+          </p:cNvPr>
+          <p:cNvSpPr/>
+          <p:nvPr/>
+        </p:nvSpPr>
+        <p:spPr>
+          <a:xfrm>
+            <a:off x="6404693" y="1315351"/>
+            <a:ext cx="1609829" cy="235813"/>
+          </a:xfrm>
+          <a:custGeom>
+            <a:avLst/>
+            <a:gdLst>
+              <a:gd name="csX0" fmla="*/ 0 w 4129178"/>
+              <a:gd name="csY0" fmla="*/ 224311 h 235813"/>
+              <a:gd name="csX1" fmla="*/ 1955321 w 4129178"/>
+              <a:gd name="csY1" fmla="*/ 24 h 235813"/>
+              <a:gd name="csX2" fmla="*/ 4129178 w 4129178"/>
+              <a:gd name="csY2" fmla="*/ 235813 h 235813"/>
+            </a:gdLst>
+            <a:ahLst/>
+            <a:cxnLst>
+              <a:cxn ang="0">
+                <a:pos x="csX0" y="csY0"/>
+              </a:cxn>
+              <a:cxn ang="0">
+                <a:pos x="csX1" y="csY1"/>
+              </a:cxn>
+              <a:cxn ang="0">
+                <a:pos x="csX2" y="csY2"/>
+              </a:cxn>
+            </a:cxnLst>
+            <a:rect l="l" t="t" r="r" b="b"/>
+            <a:pathLst>
+              <a:path w="4129178" h="235813">
+                <a:moveTo>
+                  <a:pt x="0" y="224311"/>
+                </a:moveTo>
+                <a:cubicBezTo>
+                  <a:pt x="633562" y="111209"/>
+                  <a:pt x="1267125" y="-1893"/>
+                  <a:pt x="1955321" y="24"/>
+                </a:cubicBezTo>
+                <a:cubicBezTo>
+                  <a:pt x="2643517" y="1941"/>
+                  <a:pt x="3386347" y="118877"/>
+                  <a:pt x="4129178" y="235813"/>
+                </a:cubicBezTo>
+              </a:path>
+            </a:pathLst>
+          </a:custGeom>
+          <a:noFill/>
+          <a:ln w="19050">
+            <a:prstDash val="dash"/>
+          </a:ln>
+        </p:spPr>
+        <p:style>
+          <a:lnRef idx="2">
+            <a:schemeClr val="accent1">
+              <a:shade val="15000"/>
+            </a:schemeClr>
+          </a:lnRef>
+          <a:fillRef idx="1">
+            <a:schemeClr val="accent1"/>
+          </a:fillRef>
+          <a:effectRef idx="0">
+            <a:schemeClr val="accent1"/>
+          </a:effectRef>
+          <a:fontRef idx="minor">
+            <a:schemeClr val="lt1"/>
+          </a:fontRef>
+        </p:style>
+        <p:txBody>
+          <a:bodyPr rtlCol="0" anchor="ctr"/>
+          <a:lstStyle/>
+          <a:p>
+            <a:pPr algn="ctr"/>
+            <a:endParaRPr lang="ko-KR" altLang="en-US"/>
+          </a:p>
+        </p:txBody>
+      </p:sp>
+      <p:sp>
+        <p:nvSpPr>
+          <p:cNvPr id="61" name="자유형: 도형 60">
+            <a:extLst>
+              <a:ext uri="{FF2B5EF4-FFF2-40B4-BE49-F238E27FC236}">
+                <a16:creationId xmlns:a16="http://schemas.microsoft.com/office/drawing/2014/main" id="{AA566ED8-14E7-0976-0069-AD2185B7B2DC}"/>
+              </a:ext>
+            </a:extLst>
+          </p:cNvPr>
+          <p:cNvSpPr/>
+          <p:nvPr/>
+        </p:nvSpPr>
+        <p:spPr>
+          <a:xfrm>
+            <a:off x="9085048" y="2443274"/>
+            <a:ext cx="1129519" cy="235813"/>
+          </a:xfrm>
+          <a:custGeom>
+            <a:avLst/>
+            <a:gdLst>
+              <a:gd name="csX0" fmla="*/ 0 w 4129178"/>
+              <a:gd name="csY0" fmla="*/ 224311 h 235813"/>
+              <a:gd name="csX1" fmla="*/ 1955321 w 4129178"/>
+              <a:gd name="csY1" fmla="*/ 24 h 235813"/>
+              <a:gd name="csX2" fmla="*/ 4129178 w 4129178"/>
+              <a:gd name="csY2" fmla="*/ 235813 h 235813"/>
+            </a:gdLst>
+            <a:ahLst/>
+            <a:cxnLst>
+              <a:cxn ang="0">
+                <a:pos x="csX0" y="csY0"/>
+              </a:cxn>
+              <a:cxn ang="0">
+                <a:pos x="csX1" y="csY1"/>
+              </a:cxn>
+              <a:cxn ang="0">
+                <a:pos x="csX2" y="csY2"/>
+              </a:cxn>
+            </a:cxnLst>
+            <a:rect l="l" t="t" r="r" b="b"/>
+            <a:pathLst>
+              <a:path w="4129178" h="235813">
+                <a:moveTo>
+                  <a:pt x="0" y="224311"/>
+                </a:moveTo>
+                <a:cubicBezTo>
+                  <a:pt x="633562" y="111209"/>
+                  <a:pt x="1267125" y="-1893"/>
+                  <a:pt x="1955321" y="24"/>
+                </a:cubicBezTo>
+                <a:cubicBezTo>
+                  <a:pt x="2643517" y="1941"/>
+                  <a:pt x="3386347" y="118877"/>
+                  <a:pt x="4129178" y="235813"/>
+                </a:cubicBezTo>
+              </a:path>
+            </a:pathLst>
+          </a:custGeom>
+          <a:noFill/>
+          <a:ln w="19050">
+            <a:prstDash val="dash"/>
+          </a:ln>
+        </p:spPr>
+        <p:style>
+          <a:lnRef idx="2">
+            <a:schemeClr val="accent1">
+              <a:shade val="15000"/>
+            </a:schemeClr>
+          </a:lnRef>
+          <a:fillRef idx="1">
+            <a:schemeClr val="accent1"/>
+          </a:fillRef>
+          <a:effectRef idx="0">
+            <a:schemeClr val="accent1"/>
+          </a:effectRef>
+          <a:fontRef idx="minor">
+            <a:schemeClr val="lt1"/>
+          </a:fontRef>
+        </p:style>
+        <p:txBody>
+          <a:bodyPr rtlCol="0" anchor="ctr"/>
+          <a:lstStyle/>
+          <a:p>
+            <a:pPr algn="ctr"/>
+            <a:endParaRPr lang="ko-KR" altLang="en-US"/>
+          </a:p>
+        </p:txBody>
+      </p:sp>
+      <p:sp>
+        <p:nvSpPr>
+          <p:cNvPr id="65" name="자유형: 도형 64">
+            <a:extLst>
+              <a:ext uri="{FF2B5EF4-FFF2-40B4-BE49-F238E27FC236}">
+                <a16:creationId xmlns:a16="http://schemas.microsoft.com/office/drawing/2014/main" id="{91068D27-346D-48C1-9F8B-EBFA48CED659}"/>
+              </a:ext>
+            </a:extLst>
+          </p:cNvPr>
+          <p:cNvSpPr/>
+          <p:nvPr/>
+        </p:nvSpPr>
+        <p:spPr>
+          <a:xfrm rot="5400000">
+            <a:off x="9327516" y="2611465"/>
+            <a:ext cx="800773" cy="156193"/>
+          </a:xfrm>
+          <a:custGeom>
+            <a:avLst/>
+            <a:gdLst>
+              <a:gd name="csX0" fmla="*/ 0 w 4129178"/>
+              <a:gd name="csY0" fmla="*/ 224311 h 235813"/>
+              <a:gd name="csX1" fmla="*/ 1955321 w 4129178"/>
+              <a:gd name="csY1" fmla="*/ 24 h 235813"/>
+              <a:gd name="csX2" fmla="*/ 4129178 w 4129178"/>
+              <a:gd name="csY2" fmla="*/ 235813 h 235813"/>
+            </a:gdLst>
+            <a:ahLst/>
+            <a:cxnLst>
+              <a:cxn ang="0">
+                <a:pos x="csX0" y="csY0"/>
+              </a:cxn>
+              <a:cxn ang="0">
+                <a:pos x="csX1" y="csY1"/>
+              </a:cxn>
+              <a:cxn ang="0">
+                <a:pos x="csX2" y="csY2"/>
+              </a:cxn>
+            </a:cxnLst>
+            <a:rect l="l" t="t" r="r" b="b"/>
+            <a:pathLst>
+              <a:path w="4129178" h="235813">
+                <a:moveTo>
+                  <a:pt x="0" y="224311"/>
+                </a:moveTo>
+                <a:cubicBezTo>
+                  <a:pt x="633562" y="111209"/>
+                  <a:pt x="1267125" y="-1893"/>
+                  <a:pt x="1955321" y="24"/>
+                </a:cubicBezTo>
+                <a:cubicBezTo>
+                  <a:pt x="2643517" y="1941"/>
+                  <a:pt x="3386347" y="118877"/>
+                  <a:pt x="4129178" y="235813"/>
+                </a:cubicBezTo>
+              </a:path>
+            </a:pathLst>
+          </a:custGeom>
+          <a:noFill/>
+          <a:ln w="19050">
+            <a:prstDash val="dash"/>
+          </a:ln>
+        </p:spPr>
+        <p:style>
+          <a:lnRef idx="2">
+            <a:schemeClr val="accent1">
+              <a:shade val="15000"/>
+            </a:schemeClr>
+          </a:lnRef>
+          <a:fillRef idx="1">
+            <a:schemeClr val="accent1"/>
+          </a:fillRef>
+          <a:effectRef idx="0">
+            <a:schemeClr val="accent1"/>
+          </a:effectRef>
+          <a:fontRef idx="minor">
+            <a:schemeClr val="lt1"/>
+          </a:fontRef>
+        </p:style>
+        <p:txBody>
+          <a:bodyPr rtlCol="0" anchor="ctr"/>
+          <a:lstStyle/>
+          <a:p>
+            <a:pPr algn="ctr"/>
+            <a:endParaRPr lang="ko-KR" altLang="en-US"/>
+          </a:p>
+        </p:txBody>
+      </p:sp>
+      <p:sp>
+        <p:nvSpPr>
+          <p:cNvPr id="72" name="TextBox 71">
+            <a:extLst>
+              <a:ext uri="{FF2B5EF4-FFF2-40B4-BE49-F238E27FC236}">
+                <a16:creationId xmlns:a16="http://schemas.microsoft.com/office/drawing/2014/main" id="{060EAF07-D46E-6366-4DC7-063B5B2E853A}"/>
+              </a:ext>
+            </a:extLst>
+          </p:cNvPr>
+          <p:cNvSpPr txBox="1"/>
+          <p:nvPr/>
+        </p:nvSpPr>
+        <p:spPr>
+          <a:xfrm>
+            <a:off x="8060091" y="2023676"/>
+            <a:ext cx="1161690" cy="307777"/>
+          </a:xfrm>
+          <a:prstGeom prst="rect">
+            <a:avLst/>
+          </a:prstGeom>
+          <a:noFill/>
+        </p:spPr>
+        <p:txBody>
+          <a:bodyPr wrap="square" rtlCol="0" anchor="ctr">
+            <a:spAutoFit/>
+          </a:bodyPr>
+          <a:lstStyle/>
+          <a:p>
+            <a:pPr algn="ctr"/>
+            <a:r>
+              <a:rPr lang="en-US" altLang="ko-KR" sz="1400" dirty="0"/>
+              <a:t>40d</a:t>
+            </a:r>
+            <a:endParaRPr lang="ko-KR" altLang="en-US" sz="1400" dirty="0"/>
+          </a:p>
+        </p:txBody>
+      </p:sp>
+      <p:sp>
+        <p:nvSpPr>
+          <p:cNvPr id="74" name="TextBox 73">
+            <a:extLst>
+              <a:ext uri="{FF2B5EF4-FFF2-40B4-BE49-F238E27FC236}">
+                <a16:creationId xmlns:a16="http://schemas.microsoft.com/office/drawing/2014/main" id="{0390F07F-8FBC-2BDF-338B-03EBFCB08B79}"/>
+              </a:ext>
+            </a:extLst>
+          </p:cNvPr>
+          <p:cNvSpPr txBox="1"/>
+          <p:nvPr/>
+        </p:nvSpPr>
+        <p:spPr>
+          <a:xfrm>
+            <a:off x="6586933" y="1116820"/>
+            <a:ext cx="1161690" cy="307777"/>
+          </a:xfrm>
+          <a:prstGeom prst="rect">
+            <a:avLst/>
+          </a:prstGeom>
+          <a:noFill/>
+        </p:spPr>
+        <p:txBody>
+          <a:bodyPr wrap="square" rtlCol="0" anchor="ctr">
+            <a:spAutoFit/>
+          </a:bodyPr>
+          <a:lstStyle/>
+          <a:p>
+            <a:pPr algn="ctr"/>
+            <a:r>
+              <a:rPr lang="en-US" altLang="ko-KR" sz="1400" dirty="0"/>
+              <a:t>45d</a:t>
+            </a:r>
+            <a:endParaRPr lang="ko-KR" altLang="en-US" sz="1400" dirty="0"/>
+          </a:p>
+        </p:txBody>
+      </p:sp>
+      <p:sp>
+        <p:nvSpPr>
+          <p:cNvPr id="76" name="TextBox 75">
+            <a:extLst>
+              <a:ext uri="{FF2B5EF4-FFF2-40B4-BE49-F238E27FC236}">
+                <a16:creationId xmlns:a16="http://schemas.microsoft.com/office/drawing/2014/main" id="{2E2F1617-2E5F-BC2E-A5E6-91E4557AEEDC}"/>
+              </a:ext>
+            </a:extLst>
+          </p:cNvPr>
+          <p:cNvSpPr txBox="1"/>
+          <p:nvPr/>
+        </p:nvSpPr>
+        <p:spPr>
+          <a:xfrm>
+            <a:off x="7386089" y="3730655"/>
+            <a:ext cx="1161690" cy="307777"/>
+          </a:xfrm>
+          <a:prstGeom prst="rect">
+            <a:avLst/>
+          </a:prstGeom>
+          <a:noFill/>
+        </p:spPr>
+        <p:txBody>
+          <a:bodyPr wrap="square" rtlCol="0" anchor="ctr">
+            <a:spAutoFit/>
+          </a:bodyPr>
+          <a:lstStyle/>
+          <a:p>
+            <a:pPr algn="ctr"/>
+            <a:r>
+              <a:rPr lang="en-US" altLang="ko-KR" sz="1400" dirty="0"/>
+              <a:t>25d</a:t>
+            </a:r>
+            <a:endParaRPr lang="ko-KR" altLang="en-US" sz="1400" dirty="0"/>
+          </a:p>
+        </p:txBody>
+      </p:sp>
+      <p:sp>
+        <p:nvSpPr>
+          <p:cNvPr id="78" name="TextBox 77">
+            <a:extLst>
+              <a:ext uri="{FF2B5EF4-FFF2-40B4-BE49-F238E27FC236}">
+                <a16:creationId xmlns:a16="http://schemas.microsoft.com/office/drawing/2014/main" id="{B26442D4-5D2C-8674-81EC-A0EDC14D6F5A}"/>
+              </a:ext>
+            </a:extLst>
+          </p:cNvPr>
+          <p:cNvSpPr txBox="1"/>
+          <p:nvPr/>
+        </p:nvSpPr>
+        <p:spPr>
+          <a:xfrm>
+            <a:off x="6428702" y="3014596"/>
+            <a:ext cx="1161690" cy="307777"/>
+          </a:xfrm>
+          <a:prstGeom prst="rect">
+            <a:avLst/>
+          </a:prstGeom>
+          <a:noFill/>
+        </p:spPr>
+        <p:txBody>
+          <a:bodyPr wrap="square" rtlCol="0" anchor="ctr">
+            <a:spAutoFit/>
+          </a:bodyPr>
+          <a:lstStyle/>
+          <a:p>
+            <a:pPr algn="ctr"/>
+            <a:r>
+              <a:rPr lang="en-US" altLang="ko-KR" sz="1400" dirty="0"/>
+              <a:t>30d</a:t>
+            </a:r>
+            <a:endParaRPr lang="ko-KR" altLang="en-US" sz="1400" dirty="0"/>
+          </a:p>
+        </p:txBody>
+      </p:sp>
+      <p:sp>
+        <p:nvSpPr>
+          <p:cNvPr id="80" name="TextBox 79">
+            <a:extLst>
+              <a:ext uri="{FF2B5EF4-FFF2-40B4-BE49-F238E27FC236}">
+                <a16:creationId xmlns:a16="http://schemas.microsoft.com/office/drawing/2014/main" id="{25D3124B-A52E-814C-890B-01921229E181}"/>
+              </a:ext>
+            </a:extLst>
+          </p:cNvPr>
+          <p:cNvSpPr txBox="1"/>
+          <p:nvPr/>
+        </p:nvSpPr>
+        <p:spPr>
+          <a:xfrm>
+            <a:off x="7645191" y="1832262"/>
+            <a:ext cx="1161690" cy="307777"/>
+          </a:xfrm>
+          <a:prstGeom prst="rect">
+            <a:avLst/>
+          </a:prstGeom>
+          <a:noFill/>
+        </p:spPr>
+        <p:txBody>
+          <a:bodyPr wrap="square" rtlCol="0" anchor="ctr">
+            <a:spAutoFit/>
+          </a:bodyPr>
+          <a:lstStyle/>
+          <a:p>
+            <a:pPr algn="ctr"/>
+            <a:r>
+              <a:rPr lang="en-US" altLang="ko-KR" sz="1400" dirty="0"/>
+              <a:t>25d</a:t>
+            </a:r>
+            <a:endParaRPr lang="ko-KR" altLang="en-US" sz="1400" dirty="0"/>
+          </a:p>
+        </p:txBody>
+      </p:sp>
+      <p:sp>
+        <p:nvSpPr>
+          <p:cNvPr id="88" name="자유형: 도형 87">
+            <a:extLst>
+              <a:ext uri="{FF2B5EF4-FFF2-40B4-BE49-F238E27FC236}">
+                <a16:creationId xmlns:a16="http://schemas.microsoft.com/office/drawing/2014/main" id="{3651B9FD-A63F-07BA-D2D4-D02DC873D76F}"/>
+              </a:ext>
+            </a:extLst>
+          </p:cNvPr>
+          <p:cNvSpPr/>
+          <p:nvPr/>
+        </p:nvSpPr>
+        <p:spPr>
+          <a:xfrm rot="16200000" flipH="1">
+            <a:off x="7461221" y="2798634"/>
+            <a:ext cx="961031" cy="145038"/>
+          </a:xfrm>
+          <a:custGeom>
+            <a:avLst/>
+            <a:gdLst>
+              <a:gd name="csX0" fmla="*/ 0 w 4129178"/>
+              <a:gd name="csY0" fmla="*/ 224311 h 235813"/>
+              <a:gd name="csX1" fmla="*/ 1955321 w 4129178"/>
+              <a:gd name="csY1" fmla="*/ 24 h 235813"/>
+              <a:gd name="csX2" fmla="*/ 4129178 w 4129178"/>
+              <a:gd name="csY2" fmla="*/ 235813 h 235813"/>
+            </a:gdLst>
+            <a:ahLst/>
+            <a:cxnLst>
+              <a:cxn ang="0">
+                <a:pos x="csX0" y="csY0"/>
+              </a:cxn>
+              <a:cxn ang="0">
+                <a:pos x="csX1" y="csY1"/>
+              </a:cxn>
+              <a:cxn ang="0">
+                <a:pos x="csX2" y="csY2"/>
+              </a:cxn>
+            </a:cxnLst>
+            <a:rect l="l" t="t" r="r" b="b"/>
+            <a:pathLst>
+              <a:path w="4129178" h="235813">
+                <a:moveTo>
+                  <a:pt x="0" y="224311"/>
+                </a:moveTo>
+                <a:cubicBezTo>
+                  <a:pt x="633562" y="111209"/>
+                  <a:pt x="1267125" y="-1893"/>
+                  <a:pt x="1955321" y="24"/>
+                </a:cubicBezTo>
+                <a:cubicBezTo>
+                  <a:pt x="2643517" y="1941"/>
+                  <a:pt x="3386347" y="118877"/>
+                  <a:pt x="4129178" y="235813"/>
+                </a:cubicBezTo>
+              </a:path>
+            </a:pathLst>
+          </a:custGeom>
+          <a:noFill/>
+          <a:ln w="19050">
+            <a:prstDash val="dash"/>
+          </a:ln>
+        </p:spPr>
+        <p:style>
+          <a:lnRef idx="2">
+            <a:schemeClr val="accent1">
+              <a:shade val="15000"/>
+            </a:schemeClr>
+          </a:lnRef>
+          <a:fillRef idx="1">
+            <a:schemeClr val="accent1"/>
+          </a:fillRef>
+          <a:effectRef idx="0">
+            <a:schemeClr val="accent1"/>
+          </a:effectRef>
+          <a:fontRef idx="minor">
+            <a:schemeClr val="lt1"/>
+          </a:fontRef>
+        </p:style>
+        <p:txBody>
+          <a:bodyPr rtlCol="0" anchor="ctr"/>
+          <a:lstStyle/>
+          <a:p>
+            <a:pPr algn="ctr"/>
+            <a:endParaRPr lang="ko-KR" altLang="en-US"/>
+          </a:p>
+        </p:txBody>
+      </p:sp>
+      <p:sp>
+        <p:nvSpPr>
+          <p:cNvPr id="90" name="TextBox 89">
+            <a:extLst>
+              <a:ext uri="{FF2B5EF4-FFF2-40B4-BE49-F238E27FC236}">
+                <a16:creationId xmlns:a16="http://schemas.microsoft.com/office/drawing/2014/main" id="{8091B93C-2AF9-9A55-0F1E-E5971C5A2B8E}"/>
+              </a:ext>
+            </a:extLst>
+          </p:cNvPr>
+          <p:cNvSpPr txBox="1"/>
+          <p:nvPr/>
+        </p:nvSpPr>
+        <p:spPr>
+          <a:xfrm>
+            <a:off x="7177979" y="2721006"/>
+            <a:ext cx="1161690" cy="307777"/>
+          </a:xfrm>
+          <a:prstGeom prst="rect">
+            <a:avLst/>
+          </a:prstGeom>
+          <a:noFill/>
+        </p:spPr>
+        <p:txBody>
+          <a:bodyPr wrap="square" rtlCol="0" anchor="ctr">
+            <a:spAutoFit/>
+          </a:bodyPr>
+          <a:lstStyle/>
+          <a:p>
+            <a:pPr algn="ctr"/>
+            <a:r>
+              <a:rPr lang="en-US" altLang="ko-KR" sz="1400" dirty="0"/>
+              <a:t>20d</a:t>
+            </a:r>
+            <a:endParaRPr lang="ko-KR" altLang="en-US" sz="1400" dirty="0"/>
+          </a:p>
+        </p:txBody>
+      </p:sp>
+      <p:sp>
+        <p:nvSpPr>
+          <p:cNvPr id="92" name="TextBox 91">
+            <a:extLst>
+              <a:ext uri="{FF2B5EF4-FFF2-40B4-BE49-F238E27FC236}">
+                <a16:creationId xmlns:a16="http://schemas.microsoft.com/office/drawing/2014/main" id="{F7A5A53E-CBD6-4D27-7935-D88BFB023A30}"/>
+              </a:ext>
+            </a:extLst>
+          </p:cNvPr>
+          <p:cNvSpPr txBox="1"/>
+          <p:nvPr/>
+        </p:nvSpPr>
+        <p:spPr>
+          <a:xfrm>
+            <a:off x="9317350" y="2596139"/>
+            <a:ext cx="1161690" cy="307777"/>
+          </a:xfrm>
+          <a:prstGeom prst="rect">
+            <a:avLst/>
+          </a:prstGeom>
+          <a:noFill/>
+        </p:spPr>
+        <p:txBody>
+          <a:bodyPr wrap="square" rtlCol="0" anchor="ctr">
+            <a:spAutoFit/>
+          </a:bodyPr>
+          <a:lstStyle/>
+          <a:p>
+            <a:pPr algn="ctr"/>
+            <a:r>
+              <a:rPr lang="en-US" altLang="ko-KR" sz="1400" dirty="0"/>
+              <a:t>15d</a:t>
+            </a:r>
+            <a:endParaRPr lang="ko-KR" altLang="en-US" sz="1400" dirty="0"/>
+          </a:p>
+        </p:txBody>
+      </p:sp>
+      <p:sp>
+        <p:nvSpPr>
+          <p:cNvPr id="94" name="TextBox 93">
+            <a:extLst>
+              <a:ext uri="{FF2B5EF4-FFF2-40B4-BE49-F238E27FC236}">
+                <a16:creationId xmlns:a16="http://schemas.microsoft.com/office/drawing/2014/main" id="{866974E6-E12C-B465-BD5E-8F165C5D4856}"/>
+              </a:ext>
+            </a:extLst>
+          </p:cNvPr>
+          <p:cNvSpPr txBox="1"/>
+          <p:nvPr/>
+        </p:nvSpPr>
+        <p:spPr>
+          <a:xfrm>
+            <a:off x="9134645" y="2321731"/>
+            <a:ext cx="1161690" cy="307777"/>
+          </a:xfrm>
+          <a:prstGeom prst="rect">
+            <a:avLst/>
+          </a:prstGeom>
+          <a:noFill/>
+        </p:spPr>
+        <p:txBody>
+          <a:bodyPr wrap="square" rtlCol="0" anchor="ctr">
+            <a:spAutoFit/>
+          </a:bodyPr>
+          <a:lstStyle/>
+          <a:p>
+            <a:pPr algn="ctr"/>
+            <a:r>
+              <a:rPr lang="en-US" altLang="ko-KR" sz="1400" dirty="0"/>
+              <a:t>20d</a:t>
+            </a:r>
+            <a:endParaRPr lang="ko-KR" altLang="en-US" sz="1400" dirty="0"/>
+          </a:p>
+        </p:txBody>
+      </p:sp>
     </p:spTree>
     <p:extLst>
       <p:ext uri="{BB962C8B-B14F-4D97-AF65-F5344CB8AC3E}">
-        <p14:creationId xmlns:p14="http://schemas.microsoft.com/office/powerpoint/2010/main" val="4205086514"/>
+        <p14:creationId xmlns:p14="http://schemas.microsoft.com/office/powerpoint/2010/main" val="3443530477"/>
       </p:ext>
     </p:extLst>
   </p:cSld>
@@ -24965,6 +26638,954 @@
       </p:grpSpPr>
       <p:sp>
         <p:nvSpPr>
+          <p:cNvPr id="8" name="제목 7">
+            <a:extLst>
+              <a:ext uri="{FF2B5EF4-FFF2-40B4-BE49-F238E27FC236}">
+                <a16:creationId xmlns:a16="http://schemas.microsoft.com/office/drawing/2014/main" id="{5CF57BE9-8481-9F59-2C95-0BFBD58D1563}"/>
+              </a:ext>
+            </a:extLst>
+          </p:cNvPr>
+          <p:cNvSpPr>
+            <a:spLocks noGrp="1"/>
+          </p:cNvSpPr>
+          <p:nvPr>
+            <p:ph type="title"/>
+          </p:nvPr>
+        </p:nvSpPr>
+        <p:spPr/>
+        <p:txBody>
+          <a:bodyPr/>
+          <a:lstStyle/>
+          <a:p>
+            <a:r>
+              <a:rPr lang="ko-KR" altLang="en-US" dirty="0"/>
+              <a:t>데이터 테이블</a:t>
+            </a:r>
+          </a:p>
+        </p:txBody>
+      </p:sp>
+      <p:graphicFrame>
+        <p:nvGraphicFramePr>
+          <p:cNvPr id="2" name="내용 개체 틀 1">
+            <a:extLst>
+              <a:ext uri="{FF2B5EF4-FFF2-40B4-BE49-F238E27FC236}">
+                <a16:creationId xmlns:a16="http://schemas.microsoft.com/office/drawing/2014/main" id="{AAD9A12E-7B8A-8401-8786-3CD2FD3A94FF}"/>
+              </a:ext>
+            </a:extLst>
+          </p:cNvPr>
+          <p:cNvGraphicFramePr>
+            <a:graphicFrameLocks noGrp="1"/>
+          </p:cNvGraphicFramePr>
+          <p:nvPr>
+            <p:ph idx="1"/>
+            <p:extLst>
+              <p:ext uri="{D42A27DB-BD31-4B8C-83A1-F6EECF244321}">
+                <p14:modId xmlns:p14="http://schemas.microsoft.com/office/powerpoint/2010/main" val="2121374885"/>
+              </p:ext>
+            </p:extLst>
+          </p:nvPr>
+        </p:nvGraphicFramePr>
+        <p:xfrm>
+          <a:off x="838200" y="1017918"/>
+          <a:ext cx="10515600" cy="5183244"/>
+        </p:xfrm>
+        <a:graphic>
+          <a:graphicData uri="http://schemas.openxmlformats.org/drawingml/2006/table">
+            <a:tbl>
+              <a:tblPr firstRow="1" bandRow="1">
+                <a:tableStyleId>{5940675A-B579-460E-94D1-54222C63F5DA}</a:tableStyleId>
+              </a:tblPr>
+              <a:tblGrid>
+                <a:gridCol w="1314450">
+                  <a:extLst>
+                    <a:ext uri="{9D8B030D-6E8A-4147-A177-3AD203B41FA5}">
+                      <a16:colId xmlns:a16="http://schemas.microsoft.com/office/drawing/2014/main" val="4245382652"/>
+                    </a:ext>
+                  </a:extLst>
+                </a:gridCol>
+                <a:gridCol w="1314450">
+                  <a:extLst>
+                    <a:ext uri="{9D8B030D-6E8A-4147-A177-3AD203B41FA5}">
+                      <a16:colId xmlns:a16="http://schemas.microsoft.com/office/drawing/2014/main" val="1933533662"/>
+                    </a:ext>
+                  </a:extLst>
+                </a:gridCol>
+                <a:gridCol w="1314450">
+                  <a:extLst>
+                    <a:ext uri="{9D8B030D-6E8A-4147-A177-3AD203B41FA5}">
+                      <a16:colId xmlns:a16="http://schemas.microsoft.com/office/drawing/2014/main" val="33392647"/>
+                    </a:ext>
+                  </a:extLst>
+                </a:gridCol>
+                <a:gridCol w="1314450">
+                  <a:extLst>
+                    <a:ext uri="{9D8B030D-6E8A-4147-A177-3AD203B41FA5}">
+                      <a16:colId xmlns:a16="http://schemas.microsoft.com/office/drawing/2014/main" val="3082165443"/>
+                    </a:ext>
+                  </a:extLst>
+                </a:gridCol>
+                <a:gridCol w="1314450">
+                  <a:extLst>
+                    <a:ext uri="{9D8B030D-6E8A-4147-A177-3AD203B41FA5}">
+                      <a16:colId xmlns:a16="http://schemas.microsoft.com/office/drawing/2014/main" val="312063788"/>
+                    </a:ext>
+                  </a:extLst>
+                </a:gridCol>
+                <a:gridCol w="1314450">
+                  <a:extLst>
+                    <a:ext uri="{9D8B030D-6E8A-4147-A177-3AD203B41FA5}">
+                      <a16:colId xmlns:a16="http://schemas.microsoft.com/office/drawing/2014/main" val="1142584066"/>
+                    </a:ext>
+                  </a:extLst>
+                </a:gridCol>
+                <a:gridCol w="1314450">
+                  <a:extLst>
+                    <a:ext uri="{9D8B030D-6E8A-4147-A177-3AD203B41FA5}">
+                      <a16:colId xmlns:a16="http://schemas.microsoft.com/office/drawing/2014/main" val="4113416892"/>
+                    </a:ext>
+                  </a:extLst>
+                </a:gridCol>
+                <a:gridCol w="1314450">
+                  <a:extLst>
+                    <a:ext uri="{9D8B030D-6E8A-4147-A177-3AD203B41FA5}">
+                      <a16:colId xmlns:a16="http://schemas.microsoft.com/office/drawing/2014/main" val="1586902170"/>
+                    </a:ext>
+                  </a:extLst>
+                </a:gridCol>
+              </a:tblGrid>
+              <a:tr h="711474">
+                <a:tc>
+                  <a:txBody>
+                    <a:bodyPr/>
+                    <a:lstStyle/>
+                    <a:p>
+                      <a:pPr algn="ctr" latinLnBrk="1"/>
+                      <a:endParaRPr lang="ko-KR" altLang="en-US" dirty="0"/>
+                    </a:p>
+                  </a:txBody>
+                  <a:tcPr anchor="ctr"/>
+                </a:tc>
+                <a:tc>
+                  <a:txBody>
+                    <a:bodyPr/>
+                    <a:lstStyle/>
+                    <a:p>
+                      <a:pPr algn="ctr" latinLnBrk="1"/>
+                      <a:r>
+                        <a:rPr lang="en-US" altLang="ko-KR" dirty="0"/>
+                        <a:t>Walk</a:t>
+                      </a:r>
+                      <a:br>
+                        <a:rPr lang="en-US" altLang="ko-KR" dirty="0"/>
+                      </a:br>
+                      <a:r>
+                        <a:rPr lang="ko-KR" altLang="en-US" dirty="0"/>
+                        <a:t>이동 속도</a:t>
+                      </a:r>
+                    </a:p>
+                  </a:txBody>
+                  <a:tcPr anchor="ctr"/>
+                </a:tc>
+                <a:tc>
+                  <a:txBody>
+                    <a:bodyPr/>
+                    <a:lstStyle/>
+                    <a:p>
+                      <a:pPr algn="ctr" latinLnBrk="1"/>
+                      <a:r>
+                        <a:rPr lang="en-US" altLang="ko-KR" dirty="0"/>
+                        <a:t>Run</a:t>
+                      </a:r>
+                      <a:br>
+                        <a:rPr lang="en-US" altLang="ko-KR" dirty="0"/>
+                      </a:br>
+                      <a:r>
+                        <a:rPr lang="ko-KR" altLang="en-US" dirty="0"/>
+                        <a:t>달리는 속도</a:t>
+                      </a:r>
+                    </a:p>
+                  </a:txBody>
+                  <a:tcPr anchor="ctr"/>
+                </a:tc>
+                <a:tc>
+                  <a:txBody>
+                    <a:bodyPr/>
+                    <a:lstStyle/>
+                    <a:p>
+                      <a:pPr algn="ctr" latinLnBrk="1"/>
+                      <a:r>
+                        <a:rPr lang="en-US" altLang="ko-KR" dirty="0"/>
+                        <a:t>Jump</a:t>
+                      </a:r>
+                    </a:p>
+                    <a:p>
+                      <a:pPr algn="ctr" latinLnBrk="1"/>
+                      <a:r>
+                        <a:rPr lang="ko-KR" altLang="en-US" dirty="0"/>
+                        <a:t>높이</a:t>
+                      </a:r>
+                    </a:p>
+                  </a:txBody>
+                  <a:tcPr anchor="ctr"/>
+                </a:tc>
+                <a:tc>
+                  <a:txBody>
+                    <a:bodyPr/>
+                    <a:lstStyle/>
+                    <a:p>
+                      <a:pPr algn="ctr" latinLnBrk="1"/>
+                      <a:r>
+                        <a:rPr lang="ko-KR" altLang="en-US" dirty="0"/>
+                        <a:t>사격 속도</a:t>
+                      </a:r>
+                    </a:p>
+                  </a:txBody>
+                  <a:tcPr anchor="ctr"/>
+                </a:tc>
+                <a:tc>
+                  <a:txBody>
+                    <a:bodyPr/>
+                    <a:lstStyle/>
+                    <a:p>
+                      <a:pPr algn="ctr" latinLnBrk="1"/>
+                      <a:r>
+                        <a:rPr lang="ko-KR" altLang="en-US" dirty="0"/>
+                        <a:t>조준 범위</a:t>
+                      </a:r>
+                    </a:p>
+                  </a:txBody>
+                  <a:tcPr anchor="ctr"/>
+                </a:tc>
+                <a:tc>
+                  <a:txBody>
+                    <a:bodyPr/>
+                    <a:lstStyle/>
+                    <a:p>
+                      <a:pPr algn="ctr" latinLnBrk="1"/>
+                      <a:endParaRPr lang="ko-KR" altLang="en-US" dirty="0"/>
+                    </a:p>
+                  </a:txBody>
+                  <a:tcPr anchor="ctr"/>
+                </a:tc>
+                <a:tc>
+                  <a:txBody>
+                    <a:bodyPr/>
+                    <a:lstStyle/>
+                    <a:p>
+                      <a:pPr algn="ctr" latinLnBrk="1"/>
+                      <a:endParaRPr lang="ko-KR" altLang="en-US"/>
+                    </a:p>
+                  </a:txBody>
+                  <a:tcPr anchor="ctr"/>
+                </a:tc>
+                <a:extLst>
+                  <a:ext uri="{0D108BD9-81ED-4DB2-BD59-A6C34878D82A}">
+                    <a16:rowId xmlns:a16="http://schemas.microsoft.com/office/drawing/2014/main" val="3362337053"/>
+                  </a:ext>
+                </a:extLst>
+              </a:tr>
+              <a:tr h="711474">
+                <a:tc>
+                  <a:txBody>
+                    <a:bodyPr/>
+                    <a:lstStyle/>
+                    <a:p>
+                      <a:pPr algn="ctr" latinLnBrk="1"/>
+                      <a:r>
+                        <a:rPr lang="ko-KR" altLang="en-US" dirty="0"/>
+                        <a:t>플레이어</a:t>
+                      </a:r>
+                      <a:br>
+                        <a:rPr lang="en-US" altLang="ko-KR" dirty="0"/>
+                      </a:br>
+                      <a:r>
+                        <a:rPr lang="ko-KR" altLang="en-US" dirty="0"/>
+                        <a:t>캐릭터</a:t>
+                      </a:r>
+                    </a:p>
+                  </a:txBody>
+                  <a:tcPr anchor="ctr"/>
+                </a:tc>
+                <a:tc>
+                  <a:txBody>
+                    <a:bodyPr/>
+                    <a:lstStyle/>
+                    <a:p>
+                      <a:pPr algn="ctr" latinLnBrk="1"/>
+                      <a:endParaRPr lang="ko-KR" altLang="en-US" dirty="0"/>
+                    </a:p>
+                  </a:txBody>
+                  <a:tcPr anchor="ctr"/>
+                </a:tc>
+                <a:tc>
+                  <a:txBody>
+                    <a:bodyPr/>
+                    <a:lstStyle/>
+                    <a:p>
+                      <a:pPr algn="ctr" latinLnBrk="1"/>
+                      <a:endParaRPr lang="ko-KR" altLang="en-US"/>
+                    </a:p>
+                  </a:txBody>
+                  <a:tcPr anchor="ctr"/>
+                </a:tc>
+                <a:tc>
+                  <a:txBody>
+                    <a:bodyPr/>
+                    <a:lstStyle/>
+                    <a:p>
+                      <a:pPr algn="ctr" latinLnBrk="1"/>
+                      <a:endParaRPr lang="ko-KR" altLang="en-US"/>
+                    </a:p>
+                  </a:txBody>
+                  <a:tcPr anchor="ctr"/>
+                </a:tc>
+                <a:tc>
+                  <a:txBody>
+                    <a:bodyPr/>
+                    <a:lstStyle/>
+                    <a:p>
+                      <a:pPr algn="ctr" latinLnBrk="1"/>
+                      <a:endParaRPr lang="ko-KR" altLang="en-US"/>
+                    </a:p>
+                  </a:txBody>
+                  <a:tcPr anchor="ctr"/>
+                </a:tc>
+                <a:tc>
+                  <a:txBody>
+                    <a:bodyPr/>
+                    <a:lstStyle/>
+                    <a:p>
+                      <a:pPr algn="ctr" latinLnBrk="1"/>
+                      <a:endParaRPr lang="ko-KR" altLang="en-US"/>
+                    </a:p>
+                  </a:txBody>
+                  <a:tcPr anchor="ctr"/>
+                </a:tc>
+                <a:tc>
+                  <a:txBody>
+                    <a:bodyPr/>
+                    <a:lstStyle/>
+                    <a:p>
+                      <a:pPr algn="ctr" latinLnBrk="1"/>
+                      <a:endParaRPr lang="ko-KR" altLang="en-US"/>
+                    </a:p>
+                  </a:txBody>
+                  <a:tcPr anchor="ctr"/>
+                </a:tc>
+                <a:tc>
+                  <a:txBody>
+                    <a:bodyPr/>
+                    <a:lstStyle/>
+                    <a:p>
+                      <a:pPr algn="ctr" latinLnBrk="1"/>
+                      <a:endParaRPr lang="ko-KR" altLang="en-US"/>
+                    </a:p>
+                  </a:txBody>
+                  <a:tcPr anchor="ctr"/>
+                </a:tc>
+                <a:extLst>
+                  <a:ext uri="{0D108BD9-81ED-4DB2-BD59-A6C34878D82A}">
+                    <a16:rowId xmlns:a16="http://schemas.microsoft.com/office/drawing/2014/main" val="2546568347"/>
+                  </a:ext>
+                </a:extLst>
+              </a:tr>
+              <a:tr h="711474">
+                <a:tc>
+                  <a:txBody>
+                    <a:bodyPr/>
+                    <a:lstStyle/>
+                    <a:p>
+                      <a:pPr algn="ctr" latinLnBrk="1"/>
+                      <a:r>
+                        <a:rPr lang="ko-KR" altLang="en-US" dirty="0"/>
+                        <a:t>벌</a:t>
+                      </a:r>
+                    </a:p>
+                  </a:txBody>
+                  <a:tcPr anchor="ctr"/>
+                </a:tc>
+                <a:tc>
+                  <a:txBody>
+                    <a:bodyPr/>
+                    <a:lstStyle/>
+                    <a:p>
+                      <a:pPr algn="ctr" latinLnBrk="1"/>
+                      <a:endParaRPr lang="ko-KR" altLang="en-US" dirty="0"/>
+                    </a:p>
+                  </a:txBody>
+                  <a:tcPr anchor="ctr"/>
+                </a:tc>
+                <a:tc>
+                  <a:txBody>
+                    <a:bodyPr/>
+                    <a:lstStyle/>
+                    <a:p>
+                      <a:pPr algn="ctr" latinLnBrk="1"/>
+                      <a:endParaRPr lang="ko-KR" altLang="en-US"/>
+                    </a:p>
+                  </a:txBody>
+                  <a:tcPr anchor="ctr"/>
+                </a:tc>
+                <a:tc>
+                  <a:txBody>
+                    <a:bodyPr/>
+                    <a:lstStyle/>
+                    <a:p>
+                      <a:pPr algn="ctr" latinLnBrk="1"/>
+                      <a:endParaRPr lang="ko-KR" altLang="en-US"/>
+                    </a:p>
+                  </a:txBody>
+                  <a:tcPr anchor="ctr"/>
+                </a:tc>
+                <a:tc>
+                  <a:txBody>
+                    <a:bodyPr/>
+                    <a:lstStyle/>
+                    <a:p>
+                      <a:pPr algn="ctr" latinLnBrk="1"/>
+                      <a:endParaRPr lang="ko-KR" altLang="en-US"/>
+                    </a:p>
+                  </a:txBody>
+                  <a:tcPr anchor="ctr"/>
+                </a:tc>
+                <a:tc>
+                  <a:txBody>
+                    <a:bodyPr/>
+                    <a:lstStyle/>
+                    <a:p>
+                      <a:pPr algn="ctr" latinLnBrk="1"/>
+                      <a:endParaRPr lang="ko-KR" altLang="en-US"/>
+                    </a:p>
+                  </a:txBody>
+                  <a:tcPr anchor="ctr"/>
+                </a:tc>
+                <a:tc>
+                  <a:txBody>
+                    <a:bodyPr/>
+                    <a:lstStyle/>
+                    <a:p>
+                      <a:pPr algn="ctr" latinLnBrk="1"/>
+                      <a:endParaRPr lang="ko-KR" altLang="en-US"/>
+                    </a:p>
+                  </a:txBody>
+                  <a:tcPr anchor="ctr"/>
+                </a:tc>
+                <a:tc>
+                  <a:txBody>
+                    <a:bodyPr/>
+                    <a:lstStyle/>
+                    <a:p>
+                      <a:pPr algn="ctr" latinLnBrk="1"/>
+                      <a:endParaRPr lang="ko-KR" altLang="en-US"/>
+                    </a:p>
+                  </a:txBody>
+                  <a:tcPr anchor="ctr"/>
+                </a:tc>
+                <a:extLst>
+                  <a:ext uri="{0D108BD9-81ED-4DB2-BD59-A6C34878D82A}">
+                    <a16:rowId xmlns:a16="http://schemas.microsoft.com/office/drawing/2014/main" val="3861416552"/>
+                  </a:ext>
+                </a:extLst>
+              </a:tr>
+              <a:tr h="711474">
+                <a:tc>
+                  <a:txBody>
+                    <a:bodyPr/>
+                    <a:lstStyle/>
+                    <a:p>
+                      <a:pPr algn="ctr" latinLnBrk="1"/>
+                      <a:endParaRPr lang="ko-KR" altLang="en-US"/>
+                    </a:p>
+                  </a:txBody>
+                  <a:tcPr anchor="ctr"/>
+                </a:tc>
+                <a:tc>
+                  <a:txBody>
+                    <a:bodyPr/>
+                    <a:lstStyle/>
+                    <a:p>
+                      <a:pPr algn="ctr" latinLnBrk="1"/>
+                      <a:endParaRPr lang="ko-KR" altLang="en-US"/>
+                    </a:p>
+                  </a:txBody>
+                  <a:tcPr anchor="ctr"/>
+                </a:tc>
+                <a:tc>
+                  <a:txBody>
+                    <a:bodyPr/>
+                    <a:lstStyle/>
+                    <a:p>
+                      <a:pPr algn="ctr" latinLnBrk="1"/>
+                      <a:endParaRPr lang="ko-KR" altLang="en-US"/>
+                    </a:p>
+                  </a:txBody>
+                  <a:tcPr anchor="ctr"/>
+                </a:tc>
+                <a:tc>
+                  <a:txBody>
+                    <a:bodyPr/>
+                    <a:lstStyle/>
+                    <a:p>
+                      <a:pPr algn="ctr" latinLnBrk="1"/>
+                      <a:endParaRPr lang="ko-KR" altLang="en-US"/>
+                    </a:p>
+                  </a:txBody>
+                  <a:tcPr anchor="ctr"/>
+                </a:tc>
+                <a:tc>
+                  <a:txBody>
+                    <a:bodyPr/>
+                    <a:lstStyle/>
+                    <a:p>
+                      <a:pPr algn="ctr" latinLnBrk="1"/>
+                      <a:endParaRPr lang="ko-KR" altLang="en-US"/>
+                    </a:p>
+                  </a:txBody>
+                  <a:tcPr anchor="ctr"/>
+                </a:tc>
+                <a:tc>
+                  <a:txBody>
+                    <a:bodyPr/>
+                    <a:lstStyle/>
+                    <a:p>
+                      <a:pPr algn="ctr" latinLnBrk="1"/>
+                      <a:endParaRPr lang="ko-KR" altLang="en-US"/>
+                    </a:p>
+                  </a:txBody>
+                  <a:tcPr anchor="ctr"/>
+                </a:tc>
+                <a:tc>
+                  <a:txBody>
+                    <a:bodyPr/>
+                    <a:lstStyle/>
+                    <a:p>
+                      <a:pPr algn="ctr" latinLnBrk="1"/>
+                      <a:endParaRPr lang="ko-KR" altLang="en-US"/>
+                    </a:p>
+                  </a:txBody>
+                  <a:tcPr anchor="ctr"/>
+                </a:tc>
+                <a:tc>
+                  <a:txBody>
+                    <a:bodyPr/>
+                    <a:lstStyle/>
+                    <a:p>
+                      <a:pPr algn="ctr" latinLnBrk="1"/>
+                      <a:endParaRPr lang="ko-KR" altLang="en-US"/>
+                    </a:p>
+                  </a:txBody>
+                  <a:tcPr anchor="ctr"/>
+                </a:tc>
+                <a:extLst>
+                  <a:ext uri="{0D108BD9-81ED-4DB2-BD59-A6C34878D82A}">
+                    <a16:rowId xmlns:a16="http://schemas.microsoft.com/office/drawing/2014/main" val="1381366608"/>
+                  </a:ext>
+                </a:extLst>
+              </a:tr>
+              <a:tr h="711474">
+                <a:tc>
+                  <a:txBody>
+                    <a:bodyPr/>
+                    <a:lstStyle/>
+                    <a:p>
+                      <a:pPr algn="ctr" latinLnBrk="1"/>
+                      <a:endParaRPr lang="ko-KR" altLang="en-US"/>
+                    </a:p>
+                  </a:txBody>
+                  <a:tcPr anchor="ctr"/>
+                </a:tc>
+                <a:tc>
+                  <a:txBody>
+                    <a:bodyPr/>
+                    <a:lstStyle/>
+                    <a:p>
+                      <a:pPr algn="ctr" latinLnBrk="1"/>
+                      <a:endParaRPr lang="ko-KR" altLang="en-US"/>
+                    </a:p>
+                  </a:txBody>
+                  <a:tcPr anchor="ctr"/>
+                </a:tc>
+                <a:tc>
+                  <a:txBody>
+                    <a:bodyPr/>
+                    <a:lstStyle/>
+                    <a:p>
+                      <a:pPr algn="ctr" latinLnBrk="1"/>
+                      <a:endParaRPr lang="ko-KR" altLang="en-US"/>
+                    </a:p>
+                  </a:txBody>
+                  <a:tcPr anchor="ctr"/>
+                </a:tc>
+                <a:tc>
+                  <a:txBody>
+                    <a:bodyPr/>
+                    <a:lstStyle/>
+                    <a:p>
+                      <a:pPr algn="ctr" latinLnBrk="1"/>
+                      <a:endParaRPr lang="ko-KR" altLang="en-US"/>
+                    </a:p>
+                  </a:txBody>
+                  <a:tcPr anchor="ctr"/>
+                </a:tc>
+                <a:tc>
+                  <a:txBody>
+                    <a:bodyPr/>
+                    <a:lstStyle/>
+                    <a:p>
+                      <a:pPr algn="ctr" latinLnBrk="1"/>
+                      <a:endParaRPr lang="ko-KR" altLang="en-US"/>
+                    </a:p>
+                  </a:txBody>
+                  <a:tcPr anchor="ctr"/>
+                </a:tc>
+                <a:tc>
+                  <a:txBody>
+                    <a:bodyPr/>
+                    <a:lstStyle/>
+                    <a:p>
+                      <a:pPr algn="ctr" latinLnBrk="1"/>
+                      <a:endParaRPr lang="ko-KR" altLang="en-US"/>
+                    </a:p>
+                  </a:txBody>
+                  <a:tcPr anchor="ctr"/>
+                </a:tc>
+                <a:tc>
+                  <a:txBody>
+                    <a:bodyPr/>
+                    <a:lstStyle/>
+                    <a:p>
+                      <a:pPr algn="ctr" latinLnBrk="1"/>
+                      <a:endParaRPr lang="ko-KR" altLang="en-US"/>
+                    </a:p>
+                  </a:txBody>
+                  <a:tcPr anchor="ctr"/>
+                </a:tc>
+                <a:tc>
+                  <a:txBody>
+                    <a:bodyPr/>
+                    <a:lstStyle/>
+                    <a:p>
+                      <a:pPr algn="ctr" latinLnBrk="1"/>
+                      <a:endParaRPr lang="ko-KR" altLang="en-US"/>
+                    </a:p>
+                  </a:txBody>
+                  <a:tcPr anchor="ctr"/>
+                </a:tc>
+                <a:extLst>
+                  <a:ext uri="{0D108BD9-81ED-4DB2-BD59-A6C34878D82A}">
+                    <a16:rowId xmlns:a16="http://schemas.microsoft.com/office/drawing/2014/main" val="2471084017"/>
+                  </a:ext>
+                </a:extLst>
+              </a:tr>
+              <a:tr h="711474">
+                <a:tc>
+                  <a:txBody>
+                    <a:bodyPr/>
+                    <a:lstStyle/>
+                    <a:p>
+                      <a:pPr algn="ctr" latinLnBrk="1"/>
+                      <a:endParaRPr lang="ko-KR" altLang="en-US"/>
+                    </a:p>
+                  </a:txBody>
+                  <a:tcPr anchor="ctr"/>
+                </a:tc>
+                <a:tc>
+                  <a:txBody>
+                    <a:bodyPr/>
+                    <a:lstStyle/>
+                    <a:p>
+                      <a:pPr algn="ctr" latinLnBrk="1"/>
+                      <a:endParaRPr lang="ko-KR" altLang="en-US"/>
+                    </a:p>
+                  </a:txBody>
+                  <a:tcPr anchor="ctr"/>
+                </a:tc>
+                <a:tc>
+                  <a:txBody>
+                    <a:bodyPr/>
+                    <a:lstStyle/>
+                    <a:p>
+                      <a:pPr algn="ctr" latinLnBrk="1"/>
+                      <a:endParaRPr lang="ko-KR" altLang="en-US"/>
+                    </a:p>
+                  </a:txBody>
+                  <a:tcPr anchor="ctr"/>
+                </a:tc>
+                <a:tc>
+                  <a:txBody>
+                    <a:bodyPr/>
+                    <a:lstStyle/>
+                    <a:p>
+                      <a:pPr algn="ctr" latinLnBrk="1"/>
+                      <a:endParaRPr lang="ko-KR" altLang="en-US"/>
+                    </a:p>
+                  </a:txBody>
+                  <a:tcPr anchor="ctr"/>
+                </a:tc>
+                <a:tc>
+                  <a:txBody>
+                    <a:bodyPr/>
+                    <a:lstStyle/>
+                    <a:p>
+                      <a:pPr algn="ctr" latinLnBrk="1"/>
+                      <a:endParaRPr lang="ko-KR" altLang="en-US"/>
+                    </a:p>
+                  </a:txBody>
+                  <a:tcPr anchor="ctr"/>
+                </a:tc>
+                <a:tc>
+                  <a:txBody>
+                    <a:bodyPr/>
+                    <a:lstStyle/>
+                    <a:p>
+                      <a:pPr algn="ctr" latinLnBrk="1"/>
+                      <a:endParaRPr lang="ko-KR" altLang="en-US"/>
+                    </a:p>
+                  </a:txBody>
+                  <a:tcPr anchor="ctr"/>
+                </a:tc>
+                <a:tc>
+                  <a:txBody>
+                    <a:bodyPr/>
+                    <a:lstStyle/>
+                    <a:p>
+                      <a:pPr algn="ctr" latinLnBrk="1"/>
+                      <a:endParaRPr lang="ko-KR" altLang="en-US"/>
+                    </a:p>
+                  </a:txBody>
+                  <a:tcPr anchor="ctr"/>
+                </a:tc>
+                <a:tc>
+                  <a:txBody>
+                    <a:bodyPr/>
+                    <a:lstStyle/>
+                    <a:p>
+                      <a:pPr algn="ctr" latinLnBrk="1"/>
+                      <a:endParaRPr lang="ko-KR" altLang="en-US"/>
+                    </a:p>
+                  </a:txBody>
+                  <a:tcPr anchor="ctr"/>
+                </a:tc>
+                <a:extLst>
+                  <a:ext uri="{0D108BD9-81ED-4DB2-BD59-A6C34878D82A}">
+                    <a16:rowId xmlns:a16="http://schemas.microsoft.com/office/drawing/2014/main" val="316522120"/>
+                  </a:ext>
+                </a:extLst>
+              </a:tr>
+              <a:tr h="711474">
+                <a:tc>
+                  <a:txBody>
+                    <a:bodyPr/>
+                    <a:lstStyle/>
+                    <a:p>
+                      <a:pPr algn="ctr" latinLnBrk="1"/>
+                      <a:endParaRPr lang="ko-KR" altLang="en-US"/>
+                    </a:p>
+                  </a:txBody>
+                  <a:tcPr anchor="ctr"/>
+                </a:tc>
+                <a:tc>
+                  <a:txBody>
+                    <a:bodyPr/>
+                    <a:lstStyle/>
+                    <a:p>
+                      <a:pPr algn="ctr" latinLnBrk="1"/>
+                      <a:endParaRPr lang="ko-KR" altLang="en-US"/>
+                    </a:p>
+                  </a:txBody>
+                  <a:tcPr anchor="ctr"/>
+                </a:tc>
+                <a:tc>
+                  <a:txBody>
+                    <a:bodyPr/>
+                    <a:lstStyle/>
+                    <a:p>
+                      <a:pPr algn="ctr" latinLnBrk="1"/>
+                      <a:endParaRPr lang="ko-KR" altLang="en-US"/>
+                    </a:p>
+                  </a:txBody>
+                  <a:tcPr anchor="ctr"/>
+                </a:tc>
+                <a:tc>
+                  <a:txBody>
+                    <a:bodyPr/>
+                    <a:lstStyle/>
+                    <a:p>
+                      <a:pPr algn="ctr" latinLnBrk="1"/>
+                      <a:endParaRPr lang="ko-KR" altLang="en-US"/>
+                    </a:p>
+                  </a:txBody>
+                  <a:tcPr anchor="ctr"/>
+                </a:tc>
+                <a:tc>
+                  <a:txBody>
+                    <a:bodyPr/>
+                    <a:lstStyle/>
+                    <a:p>
+                      <a:pPr algn="ctr" latinLnBrk="1"/>
+                      <a:endParaRPr lang="ko-KR" altLang="en-US"/>
+                    </a:p>
+                  </a:txBody>
+                  <a:tcPr anchor="ctr"/>
+                </a:tc>
+                <a:tc>
+                  <a:txBody>
+                    <a:bodyPr/>
+                    <a:lstStyle/>
+                    <a:p>
+                      <a:pPr algn="ctr" latinLnBrk="1"/>
+                      <a:endParaRPr lang="ko-KR" altLang="en-US"/>
+                    </a:p>
+                  </a:txBody>
+                  <a:tcPr anchor="ctr"/>
+                </a:tc>
+                <a:tc>
+                  <a:txBody>
+                    <a:bodyPr/>
+                    <a:lstStyle/>
+                    <a:p>
+                      <a:pPr algn="ctr" latinLnBrk="1"/>
+                      <a:endParaRPr lang="ko-KR" altLang="en-US"/>
+                    </a:p>
+                  </a:txBody>
+                  <a:tcPr anchor="ctr"/>
+                </a:tc>
+                <a:tc>
+                  <a:txBody>
+                    <a:bodyPr/>
+                    <a:lstStyle/>
+                    <a:p>
+                      <a:pPr algn="ctr" latinLnBrk="1"/>
+                      <a:endParaRPr lang="ko-KR" altLang="en-US" dirty="0"/>
+                    </a:p>
+                  </a:txBody>
+                  <a:tcPr anchor="ctr"/>
+                </a:tc>
+                <a:extLst>
+                  <a:ext uri="{0D108BD9-81ED-4DB2-BD59-A6C34878D82A}">
+                    <a16:rowId xmlns:a16="http://schemas.microsoft.com/office/drawing/2014/main" val="1238568261"/>
+                  </a:ext>
+                </a:extLst>
+              </a:tr>
+            </a:tbl>
+          </a:graphicData>
+        </a:graphic>
+      </p:graphicFrame>
+      <p:sp>
+        <p:nvSpPr>
+          <p:cNvPr id="5" name="날짜 개체 틀 4">
+            <a:extLst>
+              <a:ext uri="{FF2B5EF4-FFF2-40B4-BE49-F238E27FC236}">
+                <a16:creationId xmlns:a16="http://schemas.microsoft.com/office/drawing/2014/main" id="{C2C8EE23-F6D7-9277-F5AF-5F6856D9E3E9}"/>
+              </a:ext>
+            </a:extLst>
+          </p:cNvPr>
+          <p:cNvSpPr>
+            <a:spLocks noGrp="1"/>
+          </p:cNvSpPr>
+          <p:nvPr>
+            <p:ph type="dt" sz="half" idx="10"/>
+          </p:nvPr>
+        </p:nvSpPr>
+        <p:spPr/>
+        <p:txBody>
+          <a:bodyPr/>
+          <a:lstStyle/>
+          <a:p>
+            <a:fld id="{492E84DF-9BBC-4DFC-AB92-EB3DF1902948}" type="datetime1">
+              <a:rPr lang="en-US" altLang="ko-KR" smtClean="0"/>
+              <a:t>9/26/2026</a:t>
+            </a:fld>
+            <a:endParaRPr lang="ko-KR" altLang="en-US"/>
+          </a:p>
+        </p:txBody>
+      </p:sp>
+      <p:sp>
+        <p:nvSpPr>
+          <p:cNvPr id="6" name="슬라이드 번호 개체 틀 5">
+            <a:extLst>
+              <a:ext uri="{FF2B5EF4-FFF2-40B4-BE49-F238E27FC236}">
+                <a16:creationId xmlns:a16="http://schemas.microsoft.com/office/drawing/2014/main" id="{336E2C10-5960-BF61-30DE-D6C4AA75966E}"/>
+              </a:ext>
+            </a:extLst>
+          </p:cNvPr>
+          <p:cNvSpPr>
+            <a:spLocks noGrp="1"/>
+          </p:cNvSpPr>
+          <p:nvPr>
+            <p:ph type="sldNum" sz="quarter" idx="12"/>
+          </p:nvPr>
+        </p:nvSpPr>
+        <p:spPr/>
+        <p:txBody>
+          <a:bodyPr/>
+          <a:lstStyle/>
+          <a:p>
+            <a:fld id="{4419BE51-E1DC-4D7D-A982-2D579B035180}" type="slidenum">
+              <a:rPr lang="ko-KR" altLang="en-US" smtClean="0"/>
+              <a:t>25</a:t>
+            </a:fld>
+            <a:endParaRPr lang="ko-KR" altLang="en-US"/>
+          </a:p>
+        </p:txBody>
+      </p:sp>
+      <p:sp>
+        <p:nvSpPr>
+          <p:cNvPr id="10" name="내용 개체 틀 9">
+            <a:extLst>
+              <a:ext uri="{FF2B5EF4-FFF2-40B4-BE49-F238E27FC236}">
+                <a16:creationId xmlns:a16="http://schemas.microsoft.com/office/drawing/2014/main" id="{7D3AF6C5-2C25-B122-432E-F14FF0090F12}"/>
+              </a:ext>
+            </a:extLst>
+          </p:cNvPr>
+          <p:cNvSpPr>
+            <a:spLocks noGrp="1"/>
+          </p:cNvSpPr>
+          <p:nvPr>
+            <p:ph sz="quarter" idx="13"/>
+          </p:nvPr>
+        </p:nvSpPr>
+        <p:spPr/>
+        <p:txBody>
+          <a:bodyPr/>
+          <a:lstStyle/>
+          <a:p>
+            <a:endParaRPr lang="ko-KR" altLang="en-US"/>
+          </a:p>
+        </p:txBody>
+      </p:sp>
+    </p:spTree>
+    <p:extLst>
+      <p:ext uri="{BB962C8B-B14F-4D97-AF65-F5344CB8AC3E}">
+        <p14:creationId xmlns:p14="http://schemas.microsoft.com/office/powerpoint/2010/main" val="4205086514"/>
+      </p:ext>
+    </p:extLst>
+  </p:cSld>
+  <p:clrMapOvr>
+    <a:masterClrMapping/>
+  </p:clrMapOvr>
+</p:sld>
+</file>
+
+<file path=ppt/slides/slide26.xml><?xml version="1.0" encoding="utf-8"?>
+<p:sld xmlns:a="http://schemas.openxmlformats.org/drawingml/2006/main" xmlns:r="http://schemas.openxmlformats.org/officeDocument/2006/relationships" xmlns:p="http://schemas.openxmlformats.org/presentationml/2006/main">
+  <p:cSld>
+    <p:spTree>
+      <p:nvGrpSpPr>
+        <p:cNvPr id="1" name=""/>
+        <p:cNvGrpSpPr/>
+        <p:nvPr/>
+      </p:nvGrpSpPr>
+      <p:grpSpPr>
+        <a:xfrm>
+          <a:off x="0" y="0"/>
+          <a:ext cx="0" cy="0"/>
+          <a:chOff x="0" y="0"/>
+          <a:chExt cx="0" cy="0"/>
+        </a:xfrm>
+      </p:grpSpPr>
+      <p:sp>
+        <p:nvSpPr>
           <p:cNvPr id="2" name="제목 1">
             <a:extLst>
               <a:ext uri="{FF2B5EF4-FFF2-40B4-BE49-F238E27FC236}">
@@ -25030,7 +27651,7 @@
 </p:sld>
 </file>
 
-<file path=ppt/slides/slide26.xml><?xml version="1.0" encoding="utf-8"?>
+<file path=ppt/slides/slide27.xml><?xml version="1.0" encoding="utf-8"?>
 <p:sld xmlns:a="http://schemas.openxmlformats.org/drawingml/2006/main" xmlns:r="http://schemas.openxmlformats.org/officeDocument/2006/relationships" xmlns:p="http://schemas.openxmlformats.org/presentationml/2006/main">
   <p:cSld>
     <p:spTree>
@@ -26902,7 +29523,7 @@
 </p:sld>
 </file>
 
-<file path=ppt/slides/slide27.xml><?xml version="1.0" encoding="utf-8"?>
+<file path=ppt/slides/slide28.xml><?xml version="1.0" encoding="utf-8"?>
 <p:sld xmlns:a="http://schemas.openxmlformats.org/drawingml/2006/main" xmlns:r="http://schemas.openxmlformats.org/officeDocument/2006/relationships" xmlns:p="http://schemas.openxmlformats.org/presentationml/2006/main">
   <p:cSld>
     <p:spTree>
@@ -30486,7 +33107,7 @@
 </p:sld>
 </file>
 
-<file path=ppt/slides/slide28.xml><?xml version="1.0" encoding="utf-8"?>
+<file path=ppt/slides/slide29.xml><?xml version="1.0" encoding="utf-8"?>
 <p:sld xmlns:a="http://schemas.openxmlformats.org/drawingml/2006/main" xmlns:r="http://schemas.openxmlformats.org/officeDocument/2006/relationships" xmlns:p="http://schemas.openxmlformats.org/presentationml/2006/main">
   <p:cSld>
     <p:spTree>
@@ -30794,7 +33415,7 @@
           <a:p>
             <a:fld id="{4419BE51-E1DC-4D7D-A982-2D579B035180}" type="slidenum">
               <a:rPr lang="ko-KR" altLang="en-US" smtClean="0"/>
-              <a:t>28</a:t>
+              <a:t>29</a:t>
             </a:fld>
             <a:endParaRPr lang="ko-KR" altLang="en-US"/>
           </a:p>
@@ -35714,13 +38335,26 @@
           <a:p>
             <a:pPr algn="ctr"/>
             <a:r>
-              <a:rPr lang="ko-KR" altLang="en-US">
+              <a:rPr lang="ko-KR" altLang="en-US" dirty="0">
                 <a:solidFill>
                   <a:sysClr val="windowText" lastClr="000000"/>
                 </a:solidFill>
               </a:rPr>
               <a:t>숲</a:t>
             </a:r>
+            <a:r>
+              <a:rPr lang="en-US" altLang="ko-KR" dirty="0">
+                <a:solidFill>
+                  <a:sysClr val="windowText" lastClr="000000"/>
+                </a:solidFill>
+              </a:rPr>
+              <a:t>2</a:t>
+            </a:r>
+            <a:endParaRPr lang="ko-KR" altLang="en-US" dirty="0">
+              <a:solidFill>
+                <a:sysClr val="windowText" lastClr="000000"/>
+              </a:solidFill>
+            </a:endParaRPr>
           </a:p>
         </p:txBody>
       </p:sp>
@@ -36095,13 +38729,26 @@
           <a:p>
             <a:pPr algn="ctr"/>
             <a:r>
-              <a:rPr lang="ko-KR" altLang="en-US">
+              <a:rPr lang="ko-KR" altLang="en-US" dirty="0">
                 <a:solidFill>
                   <a:sysClr val="windowText" lastClr="000000"/>
                 </a:solidFill>
               </a:rPr>
               <a:t>숲</a:t>
             </a:r>
+            <a:r>
+              <a:rPr lang="en-US" altLang="ko-KR" dirty="0">
+                <a:solidFill>
+                  <a:sysClr val="windowText" lastClr="000000"/>
+                </a:solidFill>
+              </a:rPr>
+              <a:t>1</a:t>
+            </a:r>
+            <a:endParaRPr lang="ko-KR" altLang="en-US" dirty="0">
+              <a:solidFill>
+                <a:sysClr val="windowText" lastClr="000000"/>
+              </a:solidFill>
+            </a:endParaRPr>
           </a:p>
         </p:txBody>
       </p:sp>
@@ -36727,13 +39374,26 @@
           <a:p>
             <a:pPr algn="ctr"/>
             <a:r>
-              <a:rPr lang="ko-KR" altLang="en-US">
+              <a:rPr lang="ko-KR" altLang="en-US" dirty="0">
                 <a:solidFill>
                   <a:sysClr val="windowText" lastClr="000000"/>
                 </a:solidFill>
               </a:rPr>
               <a:t>숲</a:t>
             </a:r>
+            <a:r>
+              <a:rPr lang="en-US" altLang="ko-KR" dirty="0">
+                <a:solidFill>
+                  <a:sysClr val="windowText" lastClr="000000"/>
+                </a:solidFill>
+              </a:rPr>
+              <a:t>2</a:t>
+            </a:r>
+            <a:endParaRPr lang="ko-KR" altLang="en-US" dirty="0">
+              <a:solidFill>
+                <a:sysClr val="windowText" lastClr="000000"/>
+              </a:solidFill>
+            </a:endParaRPr>
           </a:p>
         </p:txBody>
       </p:sp>
@@ -37108,13 +39768,26 @@
           <a:p>
             <a:pPr algn="ctr"/>
             <a:r>
-              <a:rPr lang="ko-KR" altLang="en-US">
+              <a:rPr lang="ko-KR" altLang="en-US" dirty="0">
                 <a:solidFill>
                   <a:sysClr val="windowText" lastClr="000000"/>
                 </a:solidFill>
               </a:rPr>
               <a:t>숲</a:t>
             </a:r>
+            <a:r>
+              <a:rPr lang="en-US" altLang="ko-KR" dirty="0">
+                <a:solidFill>
+                  <a:sysClr val="windowText" lastClr="000000"/>
+                </a:solidFill>
+              </a:rPr>
+              <a:t>1</a:t>
+            </a:r>
+            <a:endParaRPr lang="ko-KR" altLang="en-US" dirty="0">
+              <a:solidFill>
+                <a:sysClr val="windowText" lastClr="000000"/>
+              </a:solidFill>
+            </a:endParaRPr>
           </a:p>
         </p:txBody>
       </p:sp>
@@ -40151,7 +42824,7 @@
         </p:nvSpPr>
         <p:spPr>
           <a:xfrm>
-            <a:off x="1480165" y="3612107"/>
+            <a:off x="1422655" y="3612107"/>
             <a:ext cx="380209" cy="389963"/>
           </a:xfrm>
           <a:custGeom>

--- a/documents/HyunahKwon/design/designing/for_teammates/프로토타입_기획.pptx
+++ b/documents/HyunahKwon/design/designing/for_teammates/프로토타입_기획.pptx
@@ -6,7 +6,7 @@
     <p:sldMasterId id="2147483666" r:id="rId2"/>
   </p:sldMasterIdLst>
   <p:notesMasterIdLst>
-    <p:notesMasterId r:id="rId32"/>
+    <p:notesMasterId r:id="rId33"/>
   </p:notesMasterIdLst>
   <p:sldIdLst>
     <p:sldId id="256" r:id="rId3"/>
@@ -14,30 +14,31 @@
     <p:sldId id="265" r:id="rId5"/>
     <p:sldId id="295" r:id="rId6"/>
     <p:sldId id="260" r:id="rId7"/>
-    <p:sldId id="286" r:id="rId8"/>
-    <p:sldId id="278" r:id="rId9"/>
-    <p:sldId id="280" r:id="rId10"/>
-    <p:sldId id="268" r:id="rId11"/>
-    <p:sldId id="273" r:id="rId12"/>
-    <p:sldId id="272" r:id="rId13"/>
-    <p:sldId id="279" r:id="rId14"/>
-    <p:sldId id="306" r:id="rId15"/>
-    <p:sldId id="304" r:id="rId16"/>
-    <p:sldId id="303" r:id="rId17"/>
-    <p:sldId id="262" r:id="rId18"/>
-    <p:sldId id="276" r:id="rId19"/>
-    <p:sldId id="269" r:id="rId20"/>
-    <p:sldId id="274" r:id="rId21"/>
-    <p:sldId id="289" r:id="rId22"/>
-    <p:sldId id="294" r:id="rId23"/>
-    <p:sldId id="291" r:id="rId24"/>
-    <p:sldId id="290" r:id="rId25"/>
-    <p:sldId id="307" r:id="rId26"/>
-    <p:sldId id="297" r:id="rId27"/>
-    <p:sldId id="263" r:id="rId28"/>
-    <p:sldId id="277" r:id="rId29"/>
-    <p:sldId id="305" r:id="rId30"/>
-    <p:sldId id="270" r:id="rId31"/>
+    <p:sldId id="309" r:id="rId8"/>
+    <p:sldId id="286" r:id="rId9"/>
+    <p:sldId id="278" r:id="rId10"/>
+    <p:sldId id="280" r:id="rId11"/>
+    <p:sldId id="268" r:id="rId12"/>
+    <p:sldId id="273" r:id="rId13"/>
+    <p:sldId id="272" r:id="rId14"/>
+    <p:sldId id="279" r:id="rId15"/>
+    <p:sldId id="306" r:id="rId16"/>
+    <p:sldId id="304" r:id="rId17"/>
+    <p:sldId id="303" r:id="rId18"/>
+    <p:sldId id="262" r:id="rId19"/>
+    <p:sldId id="276" r:id="rId20"/>
+    <p:sldId id="269" r:id="rId21"/>
+    <p:sldId id="274" r:id="rId22"/>
+    <p:sldId id="289" r:id="rId23"/>
+    <p:sldId id="294" r:id="rId24"/>
+    <p:sldId id="291" r:id="rId25"/>
+    <p:sldId id="290" r:id="rId26"/>
+    <p:sldId id="307" r:id="rId27"/>
+    <p:sldId id="297" r:id="rId28"/>
+    <p:sldId id="263" r:id="rId29"/>
+    <p:sldId id="277" r:id="rId30"/>
+    <p:sldId id="305" r:id="rId31"/>
+    <p:sldId id="270" r:id="rId32"/>
   </p:sldIdLst>
   <p:sldSz cx="12192000" cy="6858000"/>
   <p:notesSz cx="6858000" cy="9144000"/>
@@ -694,7 +695,7 @@
           <a:p>
             <a:fld id="{9C52CA9A-BF5F-43D5-A722-B8AEA70DD60D}" type="slidenum">
               <a:rPr lang="ko-KR" altLang="en-US" smtClean="0"/>
-              <a:t>15</a:t>
+              <a:t>16</a:t>
             </a:fld>
             <a:endParaRPr lang="ko-KR" altLang="en-US"/>
           </a:p>
@@ -4523,10 +4524,10 @@
       </p:grpSpPr>
       <p:sp>
         <p:nvSpPr>
-          <p:cNvPr id="2" name="제목 1">
-            <a:extLst>
-              <a:ext uri="{FF2B5EF4-FFF2-40B4-BE49-F238E27FC236}">
-                <a16:creationId xmlns:a16="http://schemas.microsoft.com/office/drawing/2014/main" id="{B694EEE1-7513-70FD-A7D8-685ADD62BFC3}"/>
+          <p:cNvPr id="4" name="제목 3">
+            <a:extLst>
+              <a:ext uri="{FF2B5EF4-FFF2-40B4-BE49-F238E27FC236}">
+                <a16:creationId xmlns:a16="http://schemas.microsoft.com/office/drawing/2014/main" id="{685C9215-8215-D4B2-FF11-B22CEE311F91}"/>
               </a:ext>
             </a:extLst>
           </p:cNvPr>
@@ -4543,47 +4544,22 @@
           <a:lstStyle/>
           <a:p>
             <a:r>
-              <a:rPr lang="en-US" altLang="ko-KR" dirty="0"/>
-              <a:t>NPC_</a:t>
+              <a:rPr lang="ko-KR" altLang="en-US" dirty="0" err="1"/>
+              <a:t>플레이어블</a:t>
             </a:r>
             <a:r>
               <a:rPr lang="ko-KR" altLang="en-US" dirty="0"/>
-              <a:t>주민</a:t>
+              <a:t> 캐릭터</a:t>
             </a:r>
           </a:p>
         </p:txBody>
       </p:sp>
       <p:sp>
         <p:nvSpPr>
-          <p:cNvPr id="3" name="내용 개체 틀 2">
-            <a:extLst>
-              <a:ext uri="{FF2B5EF4-FFF2-40B4-BE49-F238E27FC236}">
-                <a16:creationId xmlns:a16="http://schemas.microsoft.com/office/drawing/2014/main" id="{E844275D-3DDE-E1B9-C73E-BF0F2457C4FA}"/>
-              </a:ext>
-            </a:extLst>
-          </p:cNvPr>
-          <p:cNvSpPr>
-            <a:spLocks noGrp="1"/>
-          </p:cNvSpPr>
-          <p:nvPr>
-            <p:ph sz="half" idx="1"/>
-          </p:nvPr>
-        </p:nvSpPr>
-        <p:spPr/>
-        <p:txBody>
-          <a:bodyPr/>
-          <a:lstStyle/>
-          <a:p>
-            <a:endParaRPr lang="ko-KR" altLang="en-US" dirty="0"/>
-          </a:p>
-        </p:txBody>
-      </p:sp>
-      <p:sp>
-        <p:nvSpPr>
-          <p:cNvPr id="4" name="내용 개체 틀 3">
-            <a:extLst>
-              <a:ext uri="{FF2B5EF4-FFF2-40B4-BE49-F238E27FC236}">
-                <a16:creationId xmlns:a16="http://schemas.microsoft.com/office/drawing/2014/main" id="{1AD5E10D-98DC-8DAC-4F62-6C32F0F5A6CF}"/>
+          <p:cNvPr id="6" name="내용 개체 틀 5">
+            <a:extLst>
+              <a:ext uri="{FF2B5EF4-FFF2-40B4-BE49-F238E27FC236}">
+                <a16:creationId xmlns:a16="http://schemas.microsoft.com/office/drawing/2014/main" id="{5DD2AE0A-0A6D-FA31-4890-32CBA0C9D04A}"/>
               </a:ext>
             </a:extLst>
           </p:cNvPr>
@@ -4603,116 +4579,131 @@
           <a:p>
             <a:r>
               <a:rPr lang="ko-KR" altLang="en-US" sz="2400" dirty="0"/>
-              <a:t>설명 </a:t>
+              <a:t>가능한 동작 </a:t>
             </a:r>
             <a:r>
               <a:rPr lang="en-US" altLang="ko-KR" sz="2400" dirty="0"/>
-              <a:t>: </a:t>
-            </a:r>
-            <a:r>
-              <a:rPr lang="ko-KR" altLang="en-US" sz="2400" dirty="0"/>
-              <a:t>배달품을 주문해 전달받는 행성 주민</a:t>
+              <a:t>:</a:t>
             </a:r>
             <a:br>
               <a:rPr lang="en-US" altLang="ko-KR" sz="2400" dirty="0"/>
             </a:br>
-            <a:endParaRPr lang="en-US" altLang="ko-KR" sz="2400" dirty="0"/>
-          </a:p>
-          <a:p>
             <a:r>
               <a:rPr lang="ko-KR" altLang="en-US" sz="2400" dirty="0"/>
-              <a:t>특징 </a:t>
+              <a:t>걷기</a:t>
             </a:r>
             <a:r>
               <a:rPr lang="en-US" altLang="ko-KR" sz="2400" dirty="0"/>
-              <a:t>: </a:t>
+              <a:t>, </a:t>
             </a:r>
             <a:r>
               <a:rPr lang="ko-KR" altLang="en-US" sz="2400" dirty="0"/>
-              <a:t>반응 생물들과는 달리 직접 플레이어가 방문하지</a:t>
+              <a:t>달리기</a:t>
             </a:r>
             <a:r>
               <a:rPr lang="en-US" altLang="ko-KR" sz="2400" dirty="0"/>
-              <a:t> </a:t>
+              <a:t>, </a:t>
             </a:r>
             <a:r>
               <a:rPr lang="ko-KR" altLang="en-US" sz="2400" dirty="0"/>
-              <a:t>않는 이상 </a:t>
+              <a:t>상호작용</a:t>
+            </a:r>
+            <a:r>
+              <a:rPr lang="en-US" altLang="ko-KR" sz="2400" dirty="0"/>
+              <a:t>(</a:t>
+            </a:r>
+            <a:r>
+              <a:rPr lang="ko-KR" altLang="en-US" sz="2400" dirty="0"/>
+              <a:t>물품 들기</a:t>
+            </a:r>
+            <a:r>
+              <a:rPr lang="en-US" altLang="ko-KR" sz="2400" dirty="0"/>
+              <a:t>), </a:t>
+            </a:r>
+            <a:r>
+              <a:rPr lang="ko-KR" altLang="en-US" sz="2400" dirty="0"/>
+              <a:t>총 조준</a:t>
+            </a:r>
+            <a:r>
+              <a:rPr lang="en-US" altLang="ko-KR" sz="2400" dirty="0"/>
+              <a:t>, </a:t>
+            </a:r>
+            <a:r>
+              <a:rPr lang="ko-KR" altLang="en-US" sz="2400" dirty="0"/>
+              <a:t>총 발사</a:t>
+            </a:r>
+            <a:r>
+              <a:rPr lang="en-US" altLang="ko-KR" sz="2400" dirty="0"/>
+              <a:t>, </a:t>
+            </a:r>
+            <a:r>
+              <a:rPr lang="ko-KR" altLang="en-US" sz="2400" dirty="0"/>
+              <a:t>점프</a:t>
             </a:r>
             <a:br>
               <a:rPr lang="en-US" altLang="ko-KR" sz="2400" dirty="0"/>
             </a:br>
             <a:r>
+              <a:rPr lang="en-US" altLang="ko-KR" sz="2400" dirty="0"/>
+              <a:t>(+ </a:t>
+            </a:r>
+            <a:r>
               <a:rPr lang="ko-KR" altLang="en-US" sz="2400" dirty="0"/>
-              <a:t>주거지에서 나오지 않음 </a:t>
+              <a:t>경로 안내 켜기</a:t>
+            </a:r>
+            <a:r>
+              <a:rPr lang="en-US" altLang="ko-KR" sz="2400" dirty="0"/>
+              <a:t>)</a:t>
+            </a:r>
+          </a:p>
+          <a:p>
+            <a:endParaRPr lang="en-US" altLang="ko-KR" sz="2400" dirty="0"/>
+          </a:p>
+          <a:p>
+            <a:r>
+              <a:rPr lang="en-US" altLang="ko-KR" sz="2400" dirty="0"/>
+              <a:t>HP</a:t>
+            </a:r>
+            <a:r>
+              <a:rPr lang="ko-KR" altLang="en-US" sz="2400" dirty="0"/>
+              <a:t>가 </a:t>
+            </a:r>
+            <a:r>
+              <a:rPr lang="en-US" altLang="ko-KR" sz="2400" dirty="0"/>
+              <a:t>0</a:t>
+            </a:r>
+            <a:r>
+              <a:rPr lang="ko-KR" altLang="en-US" sz="2400" dirty="0"/>
+              <a:t>이 되어 사망 시 </a:t>
+            </a:r>
+            <a:r>
+              <a:rPr lang="en-US" altLang="ko-KR" sz="2400" dirty="0"/>
+              <a:t>: </a:t>
+            </a:r>
+            <a:br>
+              <a:rPr lang="en-US" altLang="ko-KR" sz="2400" dirty="0"/>
+            </a:br>
+            <a:r>
+              <a:rPr lang="ko-KR" altLang="en-US" sz="2400" dirty="0"/>
+              <a:t>사망한 장소에서 </a:t>
+            </a:r>
+            <a:r>
+              <a:rPr lang="en-US" altLang="ko-KR" sz="2400" dirty="0"/>
+              <a:t>10</a:t>
+            </a:r>
+            <a:r>
+              <a:rPr lang="ko-KR" altLang="en-US" sz="2400" dirty="0"/>
+              <a:t>초 후 부활</a:t>
             </a:r>
           </a:p>
         </p:txBody>
       </p:sp>
       <p:sp>
         <p:nvSpPr>
-          <p:cNvPr id="5" name="날짜 개체 틀 4">
-            <a:extLst>
-              <a:ext uri="{FF2B5EF4-FFF2-40B4-BE49-F238E27FC236}">
-                <a16:creationId xmlns:a16="http://schemas.microsoft.com/office/drawing/2014/main" id="{590A206D-048B-30A6-A29E-89FB4AC2C783}"/>
-              </a:ext>
-            </a:extLst>
-          </p:cNvPr>
-          <p:cNvSpPr>
-            <a:spLocks noGrp="1"/>
-          </p:cNvSpPr>
-          <p:nvPr>
-            <p:ph type="dt" sz="half" idx="10"/>
-          </p:nvPr>
-        </p:nvSpPr>
-        <p:spPr/>
-        <p:txBody>
-          <a:bodyPr/>
-          <a:lstStyle/>
-          <a:p>
-            <a:fld id="{492E84DF-9BBC-4DFC-AB92-EB3DF1902948}" type="datetime1">
-              <a:rPr lang="en-US" altLang="ko-KR" smtClean="0"/>
-              <a:t>9/26/2026</a:t>
-            </a:fld>
-            <a:endParaRPr lang="ko-KR" altLang="en-US"/>
-          </a:p>
-        </p:txBody>
-      </p:sp>
-      <p:sp>
-        <p:nvSpPr>
-          <p:cNvPr id="6" name="슬라이드 번호 개체 틀 5">
-            <a:extLst>
-              <a:ext uri="{FF2B5EF4-FFF2-40B4-BE49-F238E27FC236}">
-                <a16:creationId xmlns:a16="http://schemas.microsoft.com/office/drawing/2014/main" id="{DDECEE5D-A882-C018-91BC-370AA20C26E0}"/>
-              </a:ext>
-            </a:extLst>
-          </p:cNvPr>
-          <p:cNvSpPr>
-            <a:spLocks noGrp="1"/>
-          </p:cNvSpPr>
-          <p:nvPr>
-            <p:ph type="sldNum" sz="quarter" idx="12"/>
-          </p:nvPr>
-        </p:nvSpPr>
-        <p:spPr/>
-        <p:txBody>
-          <a:bodyPr/>
-          <a:lstStyle/>
-          <a:p>
-            <a:fld id="{4419BE51-E1DC-4D7D-A982-2D579B035180}" type="slidenum">
-              <a:rPr lang="ko-KR" altLang="en-US" smtClean="0"/>
-              <a:t>10</a:t>
-            </a:fld>
-            <a:endParaRPr lang="ko-KR" altLang="en-US"/>
-          </a:p>
-        </p:txBody>
-      </p:sp>
-      <p:sp>
-        <p:nvSpPr>
-          <p:cNvPr id="7" name="내용 개체 틀 6">
-            <a:extLst>
-              <a:ext uri="{FF2B5EF4-FFF2-40B4-BE49-F238E27FC236}">
-                <a16:creationId xmlns:a16="http://schemas.microsoft.com/office/drawing/2014/main" id="{17E42B92-E8FB-2528-B25F-EE8DC6E90A99}"/>
+          <p:cNvPr id="8" name="내용 개체 틀 7">
+            <a:extLst>
+              <a:ext uri="{FF2B5EF4-FFF2-40B4-BE49-F238E27FC236}">
+                <a16:creationId xmlns:a16="http://schemas.microsoft.com/office/drawing/2014/main" id="{0BB22C15-86A3-F2D5-9514-7E238DE9E2FC}"/>
               </a:ext>
             </a:extLst>
           </p:cNvPr>
@@ -4737,10 +4728,10 @@
       </p:sp>
       <p:pic>
         <p:nvPicPr>
-          <p:cNvPr id="9" name="그래픽 8" descr="댄스 단색으로 채워진">
-            <a:extLst>
-              <a:ext uri="{FF2B5EF4-FFF2-40B4-BE49-F238E27FC236}">
-                <a16:creationId xmlns:a16="http://schemas.microsoft.com/office/drawing/2014/main" id="{03B101AC-9E6F-ABED-3754-1AA372F36B6E}"/>
+          <p:cNvPr id="10" name="그림 9">
+            <a:extLst>
+              <a:ext uri="{FF2B5EF4-FFF2-40B4-BE49-F238E27FC236}">
+                <a16:creationId xmlns:a16="http://schemas.microsoft.com/office/drawing/2014/main" id="{B13F6286-6394-F0E6-3780-8AA2C10C9008}"/>
               </a:ext>
             </a:extLst>
           </p:cNvPr>
@@ -4750,31 +4741,181 @@
           <p:nvPr/>
         </p:nvPicPr>
         <p:blipFill>
-          <a:blip>
-            <a:extLst>
-              <a:ext uri="{96DAC541-7B7A-43D3-8B79-37D633B846F1}">
-                <asvg:svgBlip xmlns:asvg="http://schemas.microsoft.com/office/drawing/2016/SVG/main" r:embed="rId2"/>
-              </a:ext>
-            </a:extLst>
-          </a:blip>
+          <a:blip r:embed="rId2"/>
           <a:stretch>
             <a:fillRect/>
           </a:stretch>
         </p:blipFill>
         <p:spPr>
           <a:xfrm>
-            <a:off x="2378013" y="2713059"/>
-            <a:ext cx="2009957" cy="2009957"/>
+            <a:off x="848264" y="1825625"/>
+            <a:ext cx="1809575" cy="2575165"/>
           </a:xfrm>
           <a:prstGeom prst="rect">
             <a:avLst/>
           </a:prstGeom>
         </p:spPr>
       </p:pic>
+      <p:pic>
+        <p:nvPicPr>
+          <p:cNvPr id="12" name="그림 11">
+            <a:extLst>
+              <a:ext uri="{FF2B5EF4-FFF2-40B4-BE49-F238E27FC236}">
+                <a16:creationId xmlns:a16="http://schemas.microsoft.com/office/drawing/2014/main" id="{C2FF547D-36F8-6D92-DD89-2ABCCA505F45}"/>
+              </a:ext>
+            </a:extLst>
+          </p:cNvPr>
+          <p:cNvPicPr>
+            <a:picLocks noChangeAspect="1"/>
+          </p:cNvPicPr>
+          <p:nvPr/>
+        </p:nvPicPr>
+        <p:blipFill>
+          <a:blip r:embed="rId3"/>
+          <a:stretch>
+            <a:fillRect/>
+          </a:stretch>
+        </p:blipFill>
+        <p:spPr>
+          <a:xfrm>
+            <a:off x="3382629" y="1660362"/>
+            <a:ext cx="2324463" cy="2892828"/>
+          </a:xfrm>
+          <a:prstGeom prst="rect">
+            <a:avLst/>
+          </a:prstGeom>
+        </p:spPr>
+      </p:pic>
+      <p:sp>
+        <p:nvSpPr>
+          <p:cNvPr id="13" name="TextBox 12">
+            <a:extLst>
+              <a:ext uri="{FF2B5EF4-FFF2-40B4-BE49-F238E27FC236}">
+                <a16:creationId xmlns:a16="http://schemas.microsoft.com/office/drawing/2014/main" id="{BBA06497-C397-ADAA-3DA5-1A99263FA041}"/>
+              </a:ext>
+            </a:extLst>
+          </p:cNvPr>
+          <p:cNvSpPr txBox="1"/>
+          <p:nvPr/>
+        </p:nvSpPr>
+        <p:spPr>
+          <a:xfrm>
+            <a:off x="3365020" y="4584972"/>
+            <a:ext cx="2582174" cy="276999"/>
+          </a:xfrm>
+          <a:prstGeom prst="rect">
+            <a:avLst/>
+          </a:prstGeom>
+          <a:noFill/>
+        </p:spPr>
+        <p:txBody>
+          <a:bodyPr wrap="square" rtlCol="0">
+            <a:spAutoFit/>
+          </a:bodyPr>
+          <a:lstStyle/>
+          <a:p>
+            <a:r>
+              <a:rPr lang="en-US" altLang="ko-KR" sz="1200" dirty="0"/>
+              <a:t>[</a:t>
+            </a:r>
+            <a:r>
+              <a:rPr lang="ko-KR" altLang="en-US" sz="1200" dirty="0"/>
+              <a:t>자료</a:t>
+            </a:r>
+            <a:r>
+              <a:rPr lang="en-US" altLang="ko-KR" sz="1200" dirty="0"/>
+              <a:t>3] </a:t>
+            </a:r>
+            <a:r>
+              <a:rPr lang="ko-KR" altLang="en-US" sz="1200" dirty="0"/>
+              <a:t>게임</a:t>
+            </a:r>
+            <a:r>
+              <a:rPr lang="en-US" altLang="ko-KR" sz="1200" dirty="0"/>
+              <a:t>”</a:t>
+            </a:r>
+            <a:r>
+              <a:rPr lang="ko-KR" altLang="en-US" sz="1200" dirty="0" err="1"/>
+              <a:t>파티애니멀즈</a:t>
+            </a:r>
+            <a:r>
+              <a:rPr lang="en-US" altLang="ko-KR" sz="1200" dirty="0"/>
+              <a:t>”</a:t>
+            </a:r>
+            <a:r>
+              <a:rPr lang="ko-KR" altLang="en-US" sz="1200" dirty="0"/>
+              <a:t> 캐릭터</a:t>
+            </a:r>
+          </a:p>
+        </p:txBody>
+      </p:sp>
+      <p:sp>
+        <p:nvSpPr>
+          <p:cNvPr id="15" name="TextBox 14">
+            <a:extLst>
+              <a:ext uri="{FF2B5EF4-FFF2-40B4-BE49-F238E27FC236}">
+                <a16:creationId xmlns:a16="http://schemas.microsoft.com/office/drawing/2014/main" id="{9DDBF9A6-4880-3185-2CC3-6B9E831CD0CB}"/>
+              </a:ext>
+            </a:extLst>
+          </p:cNvPr>
+          <p:cNvSpPr txBox="1"/>
+          <p:nvPr/>
+        </p:nvSpPr>
+        <p:spPr>
+          <a:xfrm>
+            <a:off x="1000664" y="4553190"/>
+            <a:ext cx="2582174" cy="276999"/>
+          </a:xfrm>
+          <a:prstGeom prst="rect">
+            <a:avLst/>
+          </a:prstGeom>
+          <a:noFill/>
+        </p:spPr>
+        <p:txBody>
+          <a:bodyPr wrap="square" rtlCol="0">
+            <a:spAutoFit/>
+          </a:bodyPr>
+          <a:lstStyle/>
+          <a:p>
+            <a:r>
+              <a:rPr lang="en-US" altLang="ko-KR" sz="1200" dirty="0"/>
+              <a:t>[</a:t>
+            </a:r>
+            <a:r>
+              <a:rPr lang="ko-KR" altLang="en-US" sz="1200" dirty="0"/>
+              <a:t>자료</a:t>
+            </a:r>
+            <a:r>
+              <a:rPr lang="en-US" altLang="ko-KR" sz="1200" dirty="0"/>
+              <a:t>2] </a:t>
+            </a:r>
+            <a:r>
+              <a:rPr lang="ko-KR" altLang="en-US" sz="1200" dirty="0"/>
+              <a:t>게임</a:t>
+            </a:r>
+            <a:r>
+              <a:rPr lang="en-US" altLang="ko-KR" sz="1200" dirty="0"/>
+              <a:t>”</a:t>
+            </a:r>
+            <a:r>
+              <a:rPr lang="ko-KR" altLang="en-US" sz="1200" dirty="0"/>
+              <a:t>동물의 숲</a:t>
+            </a:r>
+            <a:r>
+              <a:rPr lang="en-US" altLang="ko-KR" sz="1200" dirty="0"/>
+              <a:t>”</a:t>
+            </a:r>
+            <a:r>
+              <a:rPr lang="ko-KR" altLang="en-US" sz="1200" dirty="0"/>
+              <a:t> 캐릭터</a:t>
+            </a:r>
+          </a:p>
+        </p:txBody>
+      </p:sp>
     </p:spTree>
     <p:extLst>
       <p:ext uri="{BB962C8B-B14F-4D97-AF65-F5344CB8AC3E}">
-        <p14:creationId xmlns:p14="http://schemas.microsoft.com/office/powerpoint/2010/main" val="3685600836"/>
+        <p14:creationId xmlns:p14="http://schemas.microsoft.com/office/powerpoint/2010/main" val="785226137"/>
       </p:ext>
     </p:extLst>
   </p:cSld>
@@ -4806,7 +4947,7 @@
           <p:cNvPr id="2" name="제목 1">
             <a:extLst>
               <a:ext uri="{FF2B5EF4-FFF2-40B4-BE49-F238E27FC236}">
-                <a16:creationId xmlns:a16="http://schemas.microsoft.com/office/drawing/2014/main" id="{7721B812-CDBB-9D5A-A6C7-F92F8C0FA239}"/>
+                <a16:creationId xmlns:a16="http://schemas.microsoft.com/office/drawing/2014/main" id="{B694EEE1-7513-70FD-A7D8-685ADD62BFC3}"/>
               </a:ext>
             </a:extLst>
           </p:cNvPr>
@@ -4828,15 +4969,7 @@
             </a:r>
             <a:r>
               <a:rPr lang="ko-KR" altLang="en-US" dirty="0"/>
-              <a:t>생물</a:t>
-            </a:r>
-            <a:r>
-              <a:rPr lang="en-US" altLang="ko-KR" dirty="0"/>
-              <a:t>_</a:t>
-            </a:r>
-            <a:r>
-              <a:rPr lang="ko-KR" altLang="en-US" dirty="0"/>
-              <a:t>벌</a:t>
+              <a:t>주민</a:t>
             </a:r>
           </a:p>
         </p:txBody>
@@ -4846,7 +4979,7 @@
           <p:cNvPr id="3" name="내용 개체 틀 2">
             <a:extLst>
               <a:ext uri="{FF2B5EF4-FFF2-40B4-BE49-F238E27FC236}">
-                <a16:creationId xmlns:a16="http://schemas.microsoft.com/office/drawing/2014/main" id="{2CF01151-47B6-C912-B338-FDB800779E67}"/>
+                <a16:creationId xmlns:a16="http://schemas.microsoft.com/office/drawing/2014/main" id="{E844275D-3DDE-E1B9-C73E-BF0F2457C4FA}"/>
               </a:ext>
             </a:extLst>
           </p:cNvPr>
@@ -4871,7 +5004,7 @@
           <p:cNvPr id="4" name="내용 개체 틀 3">
             <a:extLst>
               <a:ext uri="{FF2B5EF4-FFF2-40B4-BE49-F238E27FC236}">
-                <a16:creationId xmlns:a16="http://schemas.microsoft.com/office/drawing/2014/main" id="{A26A9D90-F02E-F595-E620-71D0297E2E85}"/>
+                <a16:creationId xmlns:a16="http://schemas.microsoft.com/office/drawing/2014/main" id="{1AD5E10D-98DC-8DAC-4F62-6C32F0F5A6CF}"/>
               </a:ext>
             </a:extLst>
           </p:cNvPr>
@@ -4885,15 +5018,10 @@
         <p:spPr/>
         <p:txBody>
           <a:bodyPr>
-            <a:normAutofit fontScale="92500" lnSpcReduction="20000"/>
+            <a:normAutofit/>
           </a:bodyPr>
           <a:lstStyle/>
           <a:p>
-            <a:pPr>
-              <a:lnSpc>
-                <a:spcPct val="110000"/>
-              </a:lnSpc>
-            </a:pPr>
             <a:r>
               <a:rPr lang="ko-KR" altLang="en-US" sz="2400" dirty="0"/>
               <a:t>설명 </a:t>
@@ -4904,142 +5032,40 @@
             </a:r>
             <a:r>
               <a:rPr lang="ko-KR" altLang="en-US" sz="2400" dirty="0"/>
-              <a:t>벌꿀에 반응해 배송품을 </a:t>
+              <a:t>배달품을 주문해 전달받는 행성 주민</a:t>
             </a:r>
             <a:br>
               <a:rPr lang="en-US" altLang="ko-KR" sz="2400" dirty="0"/>
             </a:br>
+            <a:endParaRPr lang="en-US" altLang="ko-KR" sz="2400" dirty="0"/>
+          </a:p>
+          <a:p>
             <a:r>
               <a:rPr lang="ko-KR" altLang="en-US" sz="2400" dirty="0"/>
-              <a:t>쫓아 플레이어의 주위를 둘러싸</a:t>
+              <a:t>특징 </a:t>
+            </a:r>
+            <a:r>
+              <a:rPr lang="en-US" altLang="ko-KR" sz="2400" dirty="0"/>
+              <a:t>: </a:t>
+            </a:r>
+            <a:r>
+              <a:rPr lang="ko-KR" altLang="en-US" sz="2400" dirty="0"/>
+              <a:t>반응 생물들과는 달리 직접 플레이어가 방문하지</a:t>
+            </a:r>
+            <a:r>
+              <a:rPr lang="en-US" altLang="ko-KR" sz="2400" dirty="0"/>
+              <a:t> </a:t>
+            </a:r>
+            <a:r>
+              <a:rPr lang="ko-KR" altLang="en-US" sz="2400" dirty="0"/>
+              <a:t>않는 이상 </a:t>
             </a:r>
             <a:br>
               <a:rPr lang="en-US" altLang="ko-KR" sz="2400" dirty="0"/>
             </a:br>
             <a:r>
               <a:rPr lang="ko-KR" altLang="en-US" sz="2400" dirty="0"/>
-              <a:t>방해함</a:t>
-            </a:r>
-            <a:endParaRPr lang="en-US" altLang="ko-KR" sz="2400" dirty="0"/>
-          </a:p>
-          <a:p>
-            <a:pPr>
-              <a:lnSpc>
-                <a:spcPct val="110000"/>
-              </a:lnSpc>
-            </a:pPr>
-            <a:endParaRPr lang="en-US" altLang="ko-KR" sz="2400" dirty="0"/>
-          </a:p>
-          <a:p>
-            <a:pPr>
-              <a:lnSpc>
-                <a:spcPct val="110000"/>
-              </a:lnSpc>
-            </a:pPr>
-            <a:r>
-              <a:rPr lang="ko-KR" altLang="en-US" sz="2400" dirty="0" err="1"/>
-              <a:t>파훼법</a:t>
-            </a:r>
-            <a:r>
-              <a:rPr lang="ko-KR" altLang="en-US" sz="2400" dirty="0"/>
-              <a:t> </a:t>
-            </a:r>
-            <a:r>
-              <a:rPr lang="en-US" altLang="ko-KR" sz="2400" dirty="0"/>
-              <a:t>: </a:t>
-            </a:r>
-            <a:r>
-              <a:rPr lang="ko-KR" altLang="en-US" sz="2400" dirty="0"/>
-              <a:t>벌의 행동반경에서 최대한 </a:t>
-            </a:r>
-            <a:br>
-              <a:rPr lang="en-US" altLang="ko-KR" sz="2400" dirty="0"/>
-            </a:br>
-            <a:r>
-              <a:rPr lang="ko-KR" altLang="en-US" sz="2400" dirty="0"/>
-              <a:t>빨리 벗어나기</a:t>
-            </a:r>
-            <a:endParaRPr lang="en-US" altLang="ko-KR" sz="2400" dirty="0"/>
-          </a:p>
-          <a:p>
-            <a:pPr>
-              <a:lnSpc>
-                <a:spcPct val="110000"/>
-              </a:lnSpc>
-            </a:pPr>
-            <a:r>
-              <a:rPr lang="ko-KR" altLang="en-US" sz="2400" dirty="0"/>
-              <a:t>잘못된 </a:t>
-            </a:r>
-            <a:r>
-              <a:rPr lang="ko-KR" altLang="en-US" sz="2400" dirty="0" err="1"/>
-              <a:t>파훼법</a:t>
-            </a:r>
-            <a:r>
-              <a:rPr lang="ko-KR" altLang="en-US" sz="2400" dirty="0"/>
-              <a:t> </a:t>
-            </a:r>
-            <a:r>
-              <a:rPr lang="en-US" altLang="ko-KR" sz="2400" dirty="0"/>
-              <a:t>: </a:t>
-            </a:r>
-            <a:r>
-              <a:rPr lang="ko-KR" altLang="en-US" sz="2400" dirty="0"/>
-              <a:t>벌집 사격</a:t>
-            </a:r>
-            <a:r>
-              <a:rPr lang="en-US" altLang="ko-KR" sz="2400" dirty="0"/>
-              <a:t>(</a:t>
-            </a:r>
-            <a:r>
-              <a:rPr lang="ko-KR" altLang="en-US" sz="2400" dirty="0"/>
-              <a:t>사격 시 </a:t>
-            </a:r>
-            <a:br>
-              <a:rPr lang="en-US" altLang="ko-KR" sz="2400" dirty="0"/>
-            </a:br>
-            <a:r>
-              <a:rPr lang="ko-KR" altLang="en-US" sz="2400" dirty="0"/>
-              <a:t>잠시간 방해 중지</a:t>
-            </a:r>
-            <a:r>
-              <a:rPr lang="en-US" altLang="ko-KR" sz="2400" dirty="0"/>
-              <a:t>, </a:t>
-            </a:r>
-            <a:r>
-              <a:rPr lang="ko-KR" altLang="en-US" sz="2400" dirty="0"/>
-              <a:t>이후 다시 방해</a:t>
-            </a:r>
-            <a:r>
-              <a:rPr lang="en-US" altLang="ko-KR" sz="2400" dirty="0"/>
-              <a:t>)</a:t>
-            </a:r>
-          </a:p>
-          <a:p>
-            <a:pPr>
-              <a:lnSpc>
-                <a:spcPct val="110000"/>
-              </a:lnSpc>
-            </a:pPr>
-            <a:endParaRPr lang="en-US" altLang="ko-KR" sz="2400" dirty="0"/>
-          </a:p>
-          <a:p>
-            <a:pPr>
-              <a:lnSpc>
-                <a:spcPct val="110000"/>
-              </a:lnSpc>
-            </a:pPr>
-            <a:r>
-              <a:rPr lang="ko-KR" altLang="en-US" sz="2400" dirty="0"/>
-              <a:t>고인물의 활용법 </a:t>
-            </a:r>
-            <a:r>
-              <a:rPr lang="en-US" altLang="ko-KR" sz="2400" dirty="0"/>
-              <a:t>: </a:t>
-            </a:r>
-            <a:r>
-              <a:rPr lang="ko-KR" altLang="en-US" sz="2400" dirty="0"/>
-              <a:t>벌집을 사격해 이동속도 증가를 활용하는 것이 가능함</a:t>
+              <a:t>주거지에서 나오지 않음 </a:t>
             </a:r>
           </a:p>
         </p:txBody>
@@ -5049,7 +5075,7 @@
           <p:cNvPr id="5" name="날짜 개체 틀 4">
             <a:extLst>
               <a:ext uri="{FF2B5EF4-FFF2-40B4-BE49-F238E27FC236}">
-                <a16:creationId xmlns:a16="http://schemas.microsoft.com/office/drawing/2014/main" id="{D45260F7-3325-2433-9A2E-9ADBDA865848}"/>
+                <a16:creationId xmlns:a16="http://schemas.microsoft.com/office/drawing/2014/main" id="{590A206D-048B-30A6-A29E-89FB4AC2C783}"/>
               </a:ext>
             </a:extLst>
           </p:cNvPr>
@@ -5078,7 +5104,7 @@
           <p:cNvPr id="6" name="슬라이드 번호 개체 틀 5">
             <a:extLst>
               <a:ext uri="{FF2B5EF4-FFF2-40B4-BE49-F238E27FC236}">
-                <a16:creationId xmlns:a16="http://schemas.microsoft.com/office/drawing/2014/main" id="{AF11B074-D4F3-9E87-21AC-400E1D7EA004}"/>
+                <a16:creationId xmlns:a16="http://schemas.microsoft.com/office/drawing/2014/main" id="{DDECEE5D-A882-C018-91BC-370AA20C26E0}"/>
               </a:ext>
             </a:extLst>
           </p:cNvPr>
@@ -5107,7 +5133,7 @@
           <p:cNvPr id="7" name="내용 개체 틀 6">
             <a:extLst>
               <a:ext uri="{FF2B5EF4-FFF2-40B4-BE49-F238E27FC236}">
-                <a16:creationId xmlns:a16="http://schemas.microsoft.com/office/drawing/2014/main" id="{3019D52D-25D6-D3FB-B5F8-0C1637DFE925}"/>
+                <a16:creationId xmlns:a16="http://schemas.microsoft.com/office/drawing/2014/main" id="{17E42B92-E8FB-2528-B25F-EE8DC6E90A99}"/>
               </a:ext>
             </a:extLst>
           </p:cNvPr>
@@ -5132,10 +5158,10 @@
       </p:sp>
       <p:pic>
         <p:nvPicPr>
-          <p:cNvPr id="9" name="그래픽 8" descr="벌 단색으로 채워진">
-            <a:extLst>
-              <a:ext uri="{FF2B5EF4-FFF2-40B4-BE49-F238E27FC236}">
-                <a16:creationId xmlns:a16="http://schemas.microsoft.com/office/drawing/2014/main" id="{CDE72430-0AEC-9BEF-6BA9-0D5F0CE962E5}"/>
+          <p:cNvPr id="9" name="그래픽 8" descr="댄스 단색으로 채워진">
+            <a:extLst>
+              <a:ext uri="{FF2B5EF4-FFF2-40B4-BE49-F238E27FC236}">
+                <a16:creationId xmlns:a16="http://schemas.microsoft.com/office/drawing/2014/main" id="{03B101AC-9E6F-ABED-3754-1AA372F36B6E}"/>
               </a:ext>
             </a:extLst>
           </p:cNvPr>
@@ -5158,44 +5184,8 @@
         </p:blipFill>
         <p:spPr>
           <a:xfrm>
-            <a:off x="1874666" y="2540479"/>
-            <a:ext cx="1595412" cy="1595412"/>
-          </a:xfrm>
-          <a:prstGeom prst="rect">
-            <a:avLst/>
-          </a:prstGeom>
-        </p:spPr>
-      </p:pic>
-      <p:pic>
-        <p:nvPicPr>
-          <p:cNvPr id="11" name="그래픽 10" descr="벌집 단색으로 채워진">
-            <a:extLst>
-              <a:ext uri="{FF2B5EF4-FFF2-40B4-BE49-F238E27FC236}">
-                <a16:creationId xmlns:a16="http://schemas.microsoft.com/office/drawing/2014/main" id="{57C6287E-1562-636E-E7CE-4DC8C281B290}"/>
-              </a:ext>
-            </a:extLst>
-          </p:cNvPr>
-          <p:cNvPicPr>
-            <a:picLocks noChangeAspect="1"/>
-          </p:cNvPicPr>
-          <p:nvPr/>
-        </p:nvPicPr>
-        <p:blipFill>
-          <a:blip>
-            <a:extLst>
-              <a:ext uri="{96DAC541-7B7A-43D3-8B79-37D633B846F1}">
-                <asvg:svgBlip xmlns:asvg="http://schemas.microsoft.com/office/drawing/2016/SVG/main" r:embed="rId3"/>
-              </a:ext>
-            </a:extLst>
-          </a:blip>
-          <a:stretch>
-            <a:fillRect/>
-          </a:stretch>
-        </p:blipFill>
-        <p:spPr>
-          <a:xfrm>
-            <a:off x="3520874" y="2540479"/>
-            <a:ext cx="1595412" cy="1595412"/>
+            <a:off x="2378013" y="2713059"/>
+            <a:ext cx="2009957" cy="2009957"/>
           </a:xfrm>
           <a:prstGeom prst="rect">
             <a:avLst/>
@@ -5205,7 +5195,7 @@
     </p:spTree>
     <p:extLst>
       <p:ext uri="{BB962C8B-B14F-4D97-AF65-F5344CB8AC3E}">
-        <p14:creationId xmlns:p14="http://schemas.microsoft.com/office/powerpoint/2010/main" val="3964365605"/>
+        <p14:creationId xmlns:p14="http://schemas.microsoft.com/office/powerpoint/2010/main" val="3685600836"/>
       </p:ext>
     </p:extLst>
   </p:cSld>
@@ -5237,7 +5227,7 @@
           <p:cNvPr id="2" name="제목 1">
             <a:extLst>
               <a:ext uri="{FF2B5EF4-FFF2-40B4-BE49-F238E27FC236}">
-                <a16:creationId xmlns:a16="http://schemas.microsoft.com/office/drawing/2014/main" id="{55E00DDE-0906-FC8D-58B6-95985F608CEC}"/>
+                <a16:creationId xmlns:a16="http://schemas.microsoft.com/office/drawing/2014/main" id="{7721B812-CDBB-9D5A-A6C7-F92F8C0FA239}"/>
               </a:ext>
             </a:extLst>
           </p:cNvPr>
@@ -5254,8 +5244,12 @@
           <a:lstStyle/>
           <a:p>
             <a:r>
+              <a:rPr lang="en-US" altLang="ko-KR" dirty="0"/>
+              <a:t>NPC_</a:t>
+            </a:r>
+            <a:r>
               <a:rPr lang="ko-KR" altLang="en-US" dirty="0"/>
-              <a:t>상호작용</a:t>
+              <a:t>생물</a:t>
             </a:r>
             <a:r>
               <a:rPr lang="en-US" altLang="ko-KR" dirty="0"/>
@@ -5263,15 +5257,210 @@
             </a:r>
             <a:r>
               <a:rPr lang="ko-KR" altLang="en-US" dirty="0"/>
-              <a:t>생물</a:t>
-            </a:r>
-            <a:r>
-              <a:rPr lang="en-US" altLang="ko-KR" dirty="0"/>
-              <a:t>_</a:t>
-            </a:r>
-            <a:r>
-              <a:rPr lang="ko-KR" altLang="en-US" dirty="0"/>
               <a:t>벌</a:t>
+            </a:r>
+          </a:p>
+        </p:txBody>
+      </p:sp>
+      <p:sp>
+        <p:nvSpPr>
+          <p:cNvPr id="3" name="내용 개체 틀 2">
+            <a:extLst>
+              <a:ext uri="{FF2B5EF4-FFF2-40B4-BE49-F238E27FC236}">
+                <a16:creationId xmlns:a16="http://schemas.microsoft.com/office/drawing/2014/main" id="{2CF01151-47B6-C912-B338-FDB800779E67}"/>
+              </a:ext>
+            </a:extLst>
+          </p:cNvPr>
+          <p:cNvSpPr>
+            <a:spLocks noGrp="1"/>
+          </p:cNvSpPr>
+          <p:nvPr>
+            <p:ph sz="half" idx="1"/>
+          </p:nvPr>
+        </p:nvSpPr>
+        <p:spPr/>
+        <p:txBody>
+          <a:bodyPr/>
+          <a:lstStyle/>
+          <a:p>
+            <a:endParaRPr lang="ko-KR" altLang="en-US" dirty="0"/>
+          </a:p>
+        </p:txBody>
+      </p:sp>
+      <p:sp>
+        <p:nvSpPr>
+          <p:cNvPr id="4" name="내용 개체 틀 3">
+            <a:extLst>
+              <a:ext uri="{FF2B5EF4-FFF2-40B4-BE49-F238E27FC236}">
+                <a16:creationId xmlns:a16="http://schemas.microsoft.com/office/drawing/2014/main" id="{A26A9D90-F02E-F595-E620-71D0297E2E85}"/>
+              </a:ext>
+            </a:extLst>
+          </p:cNvPr>
+          <p:cNvSpPr>
+            <a:spLocks noGrp="1"/>
+          </p:cNvSpPr>
+          <p:nvPr>
+            <p:ph sz="half" idx="2"/>
+          </p:nvPr>
+        </p:nvSpPr>
+        <p:spPr/>
+        <p:txBody>
+          <a:bodyPr>
+            <a:normAutofit fontScale="92500" lnSpcReduction="20000"/>
+          </a:bodyPr>
+          <a:lstStyle/>
+          <a:p>
+            <a:pPr>
+              <a:lnSpc>
+                <a:spcPct val="110000"/>
+              </a:lnSpc>
+            </a:pPr>
+            <a:r>
+              <a:rPr lang="ko-KR" altLang="en-US" sz="2400" dirty="0"/>
+              <a:t>설명 </a:t>
+            </a:r>
+            <a:r>
+              <a:rPr lang="en-US" altLang="ko-KR" sz="2400" dirty="0"/>
+              <a:t>: </a:t>
+            </a:r>
+            <a:r>
+              <a:rPr lang="ko-KR" altLang="en-US" sz="2400" dirty="0"/>
+              <a:t>벌꿀에 반응해 배송품을 </a:t>
+            </a:r>
+            <a:br>
+              <a:rPr lang="en-US" altLang="ko-KR" sz="2400" dirty="0"/>
+            </a:br>
+            <a:r>
+              <a:rPr lang="ko-KR" altLang="en-US" sz="2400" dirty="0"/>
+              <a:t>쫓아 플레이어의 주위를 둘러싸</a:t>
+            </a:r>
+            <a:br>
+              <a:rPr lang="en-US" altLang="ko-KR" sz="2400" dirty="0"/>
+            </a:br>
+            <a:r>
+              <a:rPr lang="ko-KR" altLang="en-US" sz="2400" dirty="0"/>
+              <a:t>방해함</a:t>
+            </a:r>
+            <a:endParaRPr lang="en-US" altLang="ko-KR" sz="2400" dirty="0"/>
+          </a:p>
+          <a:p>
+            <a:pPr>
+              <a:lnSpc>
+                <a:spcPct val="110000"/>
+              </a:lnSpc>
+            </a:pPr>
+            <a:endParaRPr lang="en-US" altLang="ko-KR" sz="2400" dirty="0"/>
+          </a:p>
+          <a:p>
+            <a:pPr>
+              <a:lnSpc>
+                <a:spcPct val="110000"/>
+              </a:lnSpc>
+            </a:pPr>
+            <a:r>
+              <a:rPr lang="ko-KR" altLang="en-US" sz="2400" dirty="0" err="1"/>
+              <a:t>파훼법</a:t>
+            </a:r>
+            <a:r>
+              <a:rPr lang="ko-KR" altLang="en-US" sz="2400" dirty="0"/>
+              <a:t> </a:t>
+            </a:r>
+            <a:r>
+              <a:rPr lang="en-US" altLang="ko-KR" sz="2400" dirty="0"/>
+              <a:t>: </a:t>
+            </a:r>
+            <a:r>
+              <a:rPr lang="ko-KR" altLang="en-US" sz="2400" dirty="0"/>
+              <a:t>벌의 행동반경에서 최대한 </a:t>
+            </a:r>
+            <a:br>
+              <a:rPr lang="en-US" altLang="ko-KR" sz="2400" dirty="0"/>
+            </a:br>
+            <a:r>
+              <a:rPr lang="ko-KR" altLang="en-US" sz="2400" dirty="0"/>
+              <a:t>빨리 벗어나기</a:t>
+            </a:r>
+            <a:endParaRPr lang="en-US" altLang="ko-KR" sz="2400" dirty="0"/>
+          </a:p>
+          <a:p>
+            <a:pPr>
+              <a:lnSpc>
+                <a:spcPct val="110000"/>
+              </a:lnSpc>
+            </a:pPr>
+            <a:r>
+              <a:rPr lang="ko-KR" altLang="en-US" sz="2400" dirty="0"/>
+              <a:t>잘못된 </a:t>
+            </a:r>
+            <a:r>
+              <a:rPr lang="ko-KR" altLang="en-US" sz="2400" dirty="0" err="1"/>
+              <a:t>파훼법</a:t>
+            </a:r>
+            <a:r>
+              <a:rPr lang="ko-KR" altLang="en-US" sz="2400" dirty="0"/>
+              <a:t> </a:t>
+            </a:r>
+            <a:r>
+              <a:rPr lang="en-US" altLang="ko-KR" sz="2400" dirty="0"/>
+              <a:t>: </a:t>
+            </a:r>
+            <a:r>
+              <a:rPr lang="ko-KR" altLang="en-US" sz="2400" dirty="0"/>
+              <a:t>벌집 사격</a:t>
+            </a:r>
+            <a:r>
+              <a:rPr lang="en-US" altLang="ko-KR" sz="2400" dirty="0"/>
+              <a:t>(</a:t>
+            </a:r>
+            <a:r>
+              <a:rPr lang="ko-KR" altLang="en-US" sz="2400" dirty="0"/>
+              <a:t>사격 시 </a:t>
+            </a:r>
+            <a:br>
+              <a:rPr lang="en-US" altLang="ko-KR" sz="2400" dirty="0"/>
+            </a:br>
+            <a:r>
+              <a:rPr lang="ko-KR" altLang="en-US" sz="2400" dirty="0"/>
+              <a:t>잠시간 방해 중지</a:t>
+            </a:r>
+            <a:r>
+              <a:rPr lang="en-US" altLang="ko-KR" sz="2400" dirty="0"/>
+              <a:t>, </a:t>
+            </a:r>
+            <a:r>
+              <a:rPr lang="ko-KR" altLang="en-US" sz="2400" dirty="0"/>
+              <a:t>이후 다시 방해</a:t>
+            </a:r>
+            <a:r>
+              <a:rPr lang="en-US" altLang="ko-KR" sz="2400" dirty="0"/>
+              <a:t>)</a:t>
+            </a:r>
+          </a:p>
+          <a:p>
+            <a:pPr>
+              <a:lnSpc>
+                <a:spcPct val="110000"/>
+              </a:lnSpc>
+            </a:pPr>
+            <a:endParaRPr lang="en-US" altLang="ko-KR" sz="2400" dirty="0"/>
+          </a:p>
+          <a:p>
+            <a:pPr>
+              <a:lnSpc>
+                <a:spcPct val="110000"/>
+              </a:lnSpc>
+            </a:pPr>
+            <a:r>
+              <a:rPr lang="ko-KR" altLang="en-US" sz="2400" dirty="0"/>
+              <a:t>고인물의 활용법 </a:t>
+            </a:r>
+            <a:r>
+              <a:rPr lang="en-US" altLang="ko-KR" sz="2400" dirty="0"/>
+              <a:t>: </a:t>
+            </a:r>
+            <a:r>
+              <a:rPr lang="ko-KR" altLang="en-US" sz="2400" dirty="0"/>
+              <a:t>벌집을 사격해 이동속도 증가를 활용하는 것이 가능함</a:t>
             </a:r>
           </a:p>
         </p:txBody>
@@ -5281,7 +5470,7 @@
           <p:cNvPr id="5" name="날짜 개체 틀 4">
             <a:extLst>
               <a:ext uri="{FF2B5EF4-FFF2-40B4-BE49-F238E27FC236}">
-                <a16:creationId xmlns:a16="http://schemas.microsoft.com/office/drawing/2014/main" id="{63D0F576-7438-39F6-8BE1-E8373982DCE7}"/>
+                <a16:creationId xmlns:a16="http://schemas.microsoft.com/office/drawing/2014/main" id="{D45260F7-3325-2433-9A2E-9ADBDA865848}"/>
               </a:ext>
             </a:extLst>
           </p:cNvPr>
@@ -5310,7 +5499,7 @@
           <p:cNvPr id="6" name="슬라이드 번호 개체 틀 5">
             <a:extLst>
               <a:ext uri="{FF2B5EF4-FFF2-40B4-BE49-F238E27FC236}">
-                <a16:creationId xmlns:a16="http://schemas.microsoft.com/office/drawing/2014/main" id="{1C0DF2F7-73D5-1737-BFAE-4E9778FE85E9}"/>
+                <a16:creationId xmlns:a16="http://schemas.microsoft.com/office/drawing/2014/main" id="{AF11B074-D4F3-9E87-21AC-400E1D7EA004}"/>
               </a:ext>
             </a:extLst>
           </p:cNvPr>
@@ -5329,6 +5518,238 @@
             <a:fld id="{4419BE51-E1DC-4D7D-A982-2D579B035180}" type="slidenum">
               <a:rPr lang="ko-KR" altLang="en-US" smtClean="0"/>
               <a:t>12</a:t>
+            </a:fld>
+            <a:endParaRPr lang="ko-KR" altLang="en-US"/>
+          </a:p>
+        </p:txBody>
+      </p:sp>
+      <p:sp>
+        <p:nvSpPr>
+          <p:cNvPr id="7" name="내용 개체 틀 6">
+            <a:extLst>
+              <a:ext uri="{FF2B5EF4-FFF2-40B4-BE49-F238E27FC236}">
+                <a16:creationId xmlns:a16="http://schemas.microsoft.com/office/drawing/2014/main" id="{3019D52D-25D6-D3FB-B5F8-0C1637DFE925}"/>
+              </a:ext>
+            </a:extLst>
+          </p:cNvPr>
+          <p:cNvSpPr>
+            <a:spLocks noGrp="1"/>
+          </p:cNvSpPr>
+          <p:nvPr>
+            <p:ph sz="quarter" idx="13"/>
+          </p:nvPr>
+        </p:nvSpPr>
+        <p:spPr/>
+        <p:txBody>
+          <a:bodyPr/>
+          <a:lstStyle/>
+          <a:p>
+            <a:r>
+              <a:rPr lang="ko-KR" altLang="en-US" dirty="0"/>
+              <a:t>컨텐츠</a:t>
+            </a:r>
+          </a:p>
+        </p:txBody>
+      </p:sp>
+      <p:pic>
+        <p:nvPicPr>
+          <p:cNvPr id="9" name="그래픽 8" descr="벌 단색으로 채워진">
+            <a:extLst>
+              <a:ext uri="{FF2B5EF4-FFF2-40B4-BE49-F238E27FC236}">
+                <a16:creationId xmlns:a16="http://schemas.microsoft.com/office/drawing/2014/main" id="{CDE72430-0AEC-9BEF-6BA9-0D5F0CE962E5}"/>
+              </a:ext>
+            </a:extLst>
+          </p:cNvPr>
+          <p:cNvPicPr>
+            <a:picLocks noChangeAspect="1"/>
+          </p:cNvPicPr>
+          <p:nvPr/>
+        </p:nvPicPr>
+        <p:blipFill>
+          <a:blip>
+            <a:extLst>
+              <a:ext uri="{96DAC541-7B7A-43D3-8B79-37D633B846F1}">
+                <asvg:svgBlip xmlns:asvg="http://schemas.microsoft.com/office/drawing/2016/SVG/main" r:embed="rId2"/>
+              </a:ext>
+            </a:extLst>
+          </a:blip>
+          <a:stretch>
+            <a:fillRect/>
+          </a:stretch>
+        </p:blipFill>
+        <p:spPr>
+          <a:xfrm>
+            <a:off x="1874666" y="2540479"/>
+            <a:ext cx="1595412" cy="1595412"/>
+          </a:xfrm>
+          <a:prstGeom prst="rect">
+            <a:avLst/>
+          </a:prstGeom>
+        </p:spPr>
+      </p:pic>
+      <p:pic>
+        <p:nvPicPr>
+          <p:cNvPr id="11" name="그래픽 10" descr="벌집 단색으로 채워진">
+            <a:extLst>
+              <a:ext uri="{FF2B5EF4-FFF2-40B4-BE49-F238E27FC236}">
+                <a16:creationId xmlns:a16="http://schemas.microsoft.com/office/drawing/2014/main" id="{57C6287E-1562-636E-E7CE-4DC8C281B290}"/>
+              </a:ext>
+            </a:extLst>
+          </p:cNvPr>
+          <p:cNvPicPr>
+            <a:picLocks noChangeAspect="1"/>
+          </p:cNvPicPr>
+          <p:nvPr/>
+        </p:nvPicPr>
+        <p:blipFill>
+          <a:blip>
+            <a:extLst>
+              <a:ext uri="{96DAC541-7B7A-43D3-8B79-37D633B846F1}">
+                <asvg:svgBlip xmlns:asvg="http://schemas.microsoft.com/office/drawing/2016/SVG/main" r:embed="rId3"/>
+              </a:ext>
+            </a:extLst>
+          </a:blip>
+          <a:stretch>
+            <a:fillRect/>
+          </a:stretch>
+        </p:blipFill>
+        <p:spPr>
+          <a:xfrm>
+            <a:off x="3520874" y="2540479"/>
+            <a:ext cx="1595412" cy="1595412"/>
+          </a:xfrm>
+          <a:prstGeom prst="rect">
+            <a:avLst/>
+          </a:prstGeom>
+        </p:spPr>
+      </p:pic>
+    </p:spTree>
+    <p:extLst>
+      <p:ext uri="{BB962C8B-B14F-4D97-AF65-F5344CB8AC3E}">
+        <p14:creationId xmlns:p14="http://schemas.microsoft.com/office/powerpoint/2010/main" val="3964365605"/>
+      </p:ext>
+    </p:extLst>
+  </p:cSld>
+  <p:clrMapOvr>
+    <a:masterClrMapping/>
+  </p:clrMapOvr>
+</p:sld>
+</file>
+
+<file path=ppt/slides/slide13.xml><?xml version="1.0" encoding="utf-8"?>
+<p:sld xmlns:a="http://schemas.openxmlformats.org/drawingml/2006/main" xmlns:r="http://schemas.openxmlformats.org/officeDocument/2006/relationships" xmlns:p="http://schemas.openxmlformats.org/presentationml/2006/main">
+  <p:cSld>
+    <p:spTree>
+      <p:nvGrpSpPr>
+        <p:cNvPr id="1" name=""/>
+        <p:cNvGrpSpPr/>
+        <p:nvPr/>
+      </p:nvGrpSpPr>
+      <p:grpSpPr>
+        <a:xfrm>
+          <a:off x="0" y="0"/>
+          <a:ext cx="0" cy="0"/>
+          <a:chOff x="0" y="0"/>
+          <a:chExt cx="0" cy="0"/>
+        </a:xfrm>
+      </p:grpSpPr>
+      <p:sp>
+        <p:nvSpPr>
+          <p:cNvPr id="2" name="제목 1">
+            <a:extLst>
+              <a:ext uri="{FF2B5EF4-FFF2-40B4-BE49-F238E27FC236}">
+                <a16:creationId xmlns:a16="http://schemas.microsoft.com/office/drawing/2014/main" id="{55E00DDE-0906-FC8D-58B6-95985F608CEC}"/>
+              </a:ext>
+            </a:extLst>
+          </p:cNvPr>
+          <p:cNvSpPr>
+            <a:spLocks noGrp="1"/>
+          </p:cNvSpPr>
+          <p:nvPr>
+            <p:ph type="title"/>
+          </p:nvPr>
+        </p:nvSpPr>
+        <p:spPr/>
+        <p:txBody>
+          <a:bodyPr/>
+          <a:lstStyle/>
+          <a:p>
+            <a:r>
+              <a:rPr lang="ko-KR" altLang="en-US" dirty="0"/>
+              <a:t>상호작용</a:t>
+            </a:r>
+            <a:r>
+              <a:rPr lang="en-US" altLang="ko-KR" dirty="0"/>
+              <a:t>_</a:t>
+            </a:r>
+            <a:r>
+              <a:rPr lang="ko-KR" altLang="en-US" dirty="0"/>
+              <a:t>생물</a:t>
+            </a:r>
+            <a:r>
+              <a:rPr lang="en-US" altLang="ko-KR" dirty="0"/>
+              <a:t>_</a:t>
+            </a:r>
+            <a:r>
+              <a:rPr lang="ko-KR" altLang="en-US" dirty="0"/>
+              <a:t>벌</a:t>
+            </a:r>
+          </a:p>
+        </p:txBody>
+      </p:sp>
+      <p:sp>
+        <p:nvSpPr>
+          <p:cNvPr id="5" name="날짜 개체 틀 4">
+            <a:extLst>
+              <a:ext uri="{FF2B5EF4-FFF2-40B4-BE49-F238E27FC236}">
+                <a16:creationId xmlns:a16="http://schemas.microsoft.com/office/drawing/2014/main" id="{63D0F576-7438-39F6-8BE1-E8373982DCE7}"/>
+              </a:ext>
+            </a:extLst>
+          </p:cNvPr>
+          <p:cNvSpPr>
+            <a:spLocks noGrp="1"/>
+          </p:cNvSpPr>
+          <p:nvPr>
+            <p:ph type="dt" sz="half" idx="10"/>
+          </p:nvPr>
+        </p:nvSpPr>
+        <p:spPr/>
+        <p:txBody>
+          <a:bodyPr/>
+          <a:lstStyle/>
+          <a:p>
+            <a:fld id="{492E84DF-9BBC-4DFC-AB92-EB3DF1902948}" type="datetime1">
+              <a:rPr lang="en-US" altLang="ko-KR" smtClean="0"/>
+              <a:t>9/26/2026</a:t>
+            </a:fld>
+            <a:endParaRPr lang="ko-KR" altLang="en-US"/>
+          </a:p>
+        </p:txBody>
+      </p:sp>
+      <p:sp>
+        <p:nvSpPr>
+          <p:cNvPr id="6" name="슬라이드 번호 개체 틀 5">
+            <a:extLst>
+              <a:ext uri="{FF2B5EF4-FFF2-40B4-BE49-F238E27FC236}">
+                <a16:creationId xmlns:a16="http://schemas.microsoft.com/office/drawing/2014/main" id="{1C0DF2F7-73D5-1737-BFAE-4E9778FE85E9}"/>
+              </a:ext>
+            </a:extLst>
+          </p:cNvPr>
+          <p:cNvSpPr>
+            <a:spLocks noGrp="1"/>
+          </p:cNvSpPr>
+          <p:nvPr>
+            <p:ph type="sldNum" sz="quarter" idx="12"/>
+          </p:nvPr>
+        </p:nvSpPr>
+        <p:spPr/>
+        <p:txBody>
+          <a:bodyPr/>
+          <a:lstStyle/>
+          <a:p>
+            <a:fld id="{4419BE51-E1DC-4D7D-A982-2D579B035180}" type="slidenum">
+              <a:rPr lang="ko-KR" altLang="en-US" smtClean="0"/>
+              <a:t>13</a:t>
             </a:fld>
             <a:endParaRPr lang="ko-KR" altLang="en-US"/>
           </a:p>
@@ -6688,7 +7109,7 @@
 </p:sld>
 </file>
 
-<file path=ppt/slides/slide13.xml><?xml version="1.0" encoding="utf-8"?>
+<file path=ppt/slides/slide14.xml><?xml version="1.0" encoding="utf-8"?>
 <p:sld xmlns:a="http://schemas.openxmlformats.org/drawingml/2006/main" xmlns:r="http://schemas.openxmlformats.org/officeDocument/2006/relationships" xmlns:p="http://schemas.openxmlformats.org/presentationml/2006/main">
   <p:cSld>
     <p:spTree>
@@ -6867,7 +7288,7 @@
           <a:p>
             <a:fld id="{4419BE51-E1DC-4D7D-A982-2D579B035180}" type="slidenum">
               <a:rPr lang="ko-KR" altLang="en-US" smtClean="0"/>
-              <a:t>13</a:t>
+              <a:t>14</a:t>
             </a:fld>
             <a:endParaRPr lang="ko-KR" altLang="en-US"/>
           </a:p>
@@ -8357,7 +8778,7 @@
 </p:sld>
 </file>
 
-<file path=ppt/slides/slide14.xml><?xml version="1.0" encoding="utf-8"?>
+<file path=ppt/slides/slide15.xml><?xml version="1.0" encoding="utf-8"?>
 <p:sld xmlns:a="http://schemas.openxmlformats.org/drawingml/2006/main" xmlns:r="http://schemas.openxmlformats.org/officeDocument/2006/relationships" xmlns:p="http://schemas.openxmlformats.org/presentationml/2006/main">
   <p:cSld>
     <p:spTree>
@@ -10195,7 +10616,7 @@
 </p:sld>
 </file>
 
-<file path=ppt/slides/slide15.xml><?xml version="1.0" encoding="utf-8"?>
+<file path=ppt/slides/slide16.xml><?xml version="1.0" encoding="utf-8"?>
 <p:sld xmlns:a="http://schemas.openxmlformats.org/drawingml/2006/main" xmlns:r="http://schemas.openxmlformats.org/officeDocument/2006/relationships" xmlns:p="http://schemas.openxmlformats.org/presentationml/2006/main">
   <p:cSld>
     <p:spTree>
@@ -10300,7 +10721,7 @@
           <a:p>
             <a:fld id="{4419BE51-E1DC-4D7D-A982-2D579B035180}" type="slidenum">
               <a:rPr lang="ko-KR" altLang="en-US" smtClean="0"/>
-              <a:t>15</a:t>
+              <a:t>16</a:t>
             </a:fld>
             <a:endParaRPr lang="ko-KR" altLang="en-US"/>
           </a:p>
@@ -11703,7 +12124,7 @@
 </p:sld>
 </file>
 
-<file path=ppt/slides/slide16.xml><?xml version="1.0" encoding="utf-8"?>
+<file path=ppt/slides/slide17.xml><?xml version="1.0" encoding="utf-8"?>
 <p:sld xmlns:a="http://schemas.openxmlformats.org/drawingml/2006/main" xmlns:r="http://schemas.openxmlformats.org/officeDocument/2006/relationships" xmlns:p="http://schemas.openxmlformats.org/presentationml/2006/main">
   <p:cSld>
     <p:spTree>
@@ -11786,7 +12207,7 @@
 </p:sld>
 </file>
 
-<file path=ppt/slides/slide17.xml><?xml version="1.0" encoding="utf-8"?>
+<file path=ppt/slides/slide18.xml><?xml version="1.0" encoding="utf-8"?>
 <p:sld xmlns:a="http://schemas.openxmlformats.org/drawingml/2006/main" xmlns:r="http://schemas.openxmlformats.org/officeDocument/2006/relationships" xmlns:p="http://schemas.openxmlformats.org/presentationml/2006/main">
   <p:cSld>
     <p:spTree>
@@ -11913,7 +12334,7 @@
           <a:p>
             <a:fld id="{4419BE51-E1DC-4D7D-A982-2D579B035180}" type="slidenum">
               <a:rPr lang="ko-KR" altLang="en-US" smtClean="0"/>
-              <a:t>17</a:t>
+              <a:t>18</a:t>
             </a:fld>
             <a:endParaRPr lang="ko-KR" altLang="en-US"/>
           </a:p>
@@ -13021,7 +13442,7 @@
 </p:sld>
 </file>
 
-<file path=ppt/slides/slide18.xml><?xml version="1.0" encoding="utf-8"?>
+<file path=ppt/slides/slide19.xml><?xml version="1.0" encoding="utf-8"?>
 <p:sld xmlns:a="http://schemas.openxmlformats.org/drawingml/2006/main" xmlns:r="http://schemas.openxmlformats.org/officeDocument/2006/relationships" xmlns:p="http://schemas.openxmlformats.org/presentationml/2006/main">
   <p:cSld>
     <p:spTree>
@@ -14218,580 +14639,6 @@
     <p:extLst>
       <p:ext uri="{BB962C8B-B14F-4D97-AF65-F5344CB8AC3E}">
         <p14:creationId xmlns:p14="http://schemas.microsoft.com/office/powerpoint/2010/main" val="2195402232"/>
-      </p:ext>
-    </p:extLst>
-  </p:cSld>
-  <p:clrMapOvr>
-    <a:masterClrMapping/>
-  </p:clrMapOvr>
-</p:sld>
-</file>
-
-<file path=ppt/slides/slide19.xml><?xml version="1.0" encoding="utf-8"?>
-<p:sld xmlns:a="http://schemas.openxmlformats.org/drawingml/2006/main" xmlns:r="http://schemas.openxmlformats.org/officeDocument/2006/relationships" xmlns:p="http://schemas.openxmlformats.org/presentationml/2006/main">
-  <p:cSld>
-    <p:spTree>
-      <p:nvGrpSpPr>
-        <p:cNvPr id="1" name=""/>
-        <p:cNvGrpSpPr/>
-        <p:nvPr/>
-      </p:nvGrpSpPr>
-      <p:grpSpPr>
-        <a:xfrm>
-          <a:off x="0" y="0"/>
-          <a:ext cx="0" cy="0"/>
-          <a:chOff x="0" y="0"/>
-          <a:chExt cx="0" cy="0"/>
-        </a:xfrm>
-      </p:grpSpPr>
-      <p:sp>
-        <p:nvSpPr>
-          <p:cNvPr id="2" name="제목 1">
-            <a:extLst>
-              <a:ext uri="{FF2B5EF4-FFF2-40B4-BE49-F238E27FC236}">
-                <a16:creationId xmlns:a16="http://schemas.microsoft.com/office/drawing/2014/main" id="{6533757E-1FD6-215F-E156-3C3139CE355C}"/>
-              </a:ext>
-            </a:extLst>
-          </p:cNvPr>
-          <p:cNvSpPr>
-            <a:spLocks noGrp="1"/>
-          </p:cNvSpPr>
-          <p:nvPr>
-            <p:ph type="title"/>
-          </p:nvPr>
-        </p:nvSpPr>
-        <p:spPr/>
-        <p:txBody>
-          <a:bodyPr>
-            <a:normAutofit/>
-          </a:bodyPr>
-          <a:lstStyle/>
-          <a:p>
-            <a:r>
-              <a:rPr lang="en-US" altLang="ko-KR" dirty="0"/>
-              <a:t>UI_</a:t>
-            </a:r>
-            <a:r>
-              <a:rPr lang="ko-KR" altLang="en-US" dirty="0"/>
-              <a:t>세부</a:t>
-            </a:r>
-            <a:r>
-              <a:rPr lang="en-US" altLang="ko-KR" dirty="0"/>
-              <a:t>_</a:t>
-            </a:r>
-            <a:r>
-              <a:rPr lang="ko-KR" altLang="en-US" dirty="0"/>
-              <a:t>플레이화면 참고</a:t>
-            </a:r>
-          </a:p>
-        </p:txBody>
-      </p:sp>
-      <p:pic>
-        <p:nvPicPr>
-          <p:cNvPr id="9" name="내용 개체 틀 8">
-            <a:extLst>
-              <a:ext uri="{FF2B5EF4-FFF2-40B4-BE49-F238E27FC236}">
-                <a16:creationId xmlns:a16="http://schemas.microsoft.com/office/drawing/2014/main" id="{81E79F0F-FDFC-E817-C0AE-BB5090B8657E}"/>
-              </a:ext>
-            </a:extLst>
-          </p:cNvPr>
-          <p:cNvPicPr>
-            <a:picLocks noGrp="1" noChangeAspect="1"/>
-          </p:cNvPicPr>
-          <p:nvPr>
-            <p:ph sz="half" idx="1"/>
-          </p:nvPr>
-        </p:nvPicPr>
-        <p:blipFill>
-          <a:blip r:embed="rId2">
-            <a:extLst>
-              <a:ext uri="{28A0092B-C50C-407E-A947-70E740481C1C}">
-                <a14:useLocalDpi xmlns:a14="http://schemas.microsoft.com/office/drawing/2010/main" val="0"/>
-              </a:ext>
-            </a:extLst>
-          </a:blip>
-          <a:srcRect l="8986" r="8893"/>
-          <a:stretch>
-            <a:fillRect/>
-          </a:stretch>
-        </p:blipFill>
-        <p:spPr>
-          <a:xfrm>
-            <a:off x="838200" y="3056121"/>
-            <a:ext cx="5746630" cy="3229714"/>
-          </a:xfrm>
-          <a:prstGeom prst="rect">
-            <a:avLst/>
-          </a:prstGeom>
-        </p:spPr>
-      </p:pic>
-      <p:sp>
-        <p:nvSpPr>
-          <p:cNvPr id="4" name="내용 개체 틀 3">
-            <a:extLst>
-              <a:ext uri="{FF2B5EF4-FFF2-40B4-BE49-F238E27FC236}">
-                <a16:creationId xmlns:a16="http://schemas.microsoft.com/office/drawing/2014/main" id="{42C8D78D-3ED4-2311-EA63-537F5F77C1CA}"/>
-              </a:ext>
-            </a:extLst>
-          </p:cNvPr>
-          <p:cNvSpPr>
-            <a:spLocks noGrp="1"/>
-          </p:cNvSpPr>
-          <p:nvPr>
-            <p:ph sz="half" idx="2"/>
-          </p:nvPr>
-        </p:nvSpPr>
-        <p:spPr>
-          <a:xfrm>
-            <a:off x="6848034" y="1825625"/>
-            <a:ext cx="4505766" cy="4351338"/>
-          </a:xfrm>
-        </p:spPr>
-        <p:txBody>
-          <a:bodyPr>
-            <a:normAutofit/>
-          </a:bodyPr>
-          <a:lstStyle/>
-          <a:p>
-            <a:endParaRPr lang="en-US" altLang="ko-KR" sz="2400" dirty="0"/>
-          </a:p>
-          <a:p>
-            <a:endParaRPr lang="en-US" altLang="ko-KR" sz="2400" dirty="0"/>
-          </a:p>
-          <a:p>
-            <a:r>
-              <a:rPr lang="ko-KR" altLang="en-US" sz="2400" dirty="0"/>
-              <a:t>레퍼런스 게임의 이미지 </a:t>
-            </a:r>
-            <a:br>
-              <a:rPr lang="en-US" altLang="ko-KR" sz="2400" dirty="0"/>
-            </a:br>
-            <a:r>
-              <a:rPr lang="ko-KR" altLang="en-US" sz="2400" dirty="0"/>
-              <a:t>플레이 화면 참고</a:t>
-            </a:r>
-            <a:endParaRPr lang="en-US" altLang="ko-KR" sz="2400" dirty="0"/>
-          </a:p>
-          <a:p>
-            <a:endParaRPr lang="en-US" altLang="ko-KR" sz="2400" dirty="0"/>
-          </a:p>
-          <a:p>
-            <a:endParaRPr lang="en-US" altLang="ko-KR" sz="2400" dirty="0"/>
-          </a:p>
-          <a:p>
-            <a:endParaRPr lang="en-US" altLang="ko-KR" sz="2400" dirty="0"/>
-          </a:p>
-        </p:txBody>
-      </p:sp>
-      <p:sp>
-        <p:nvSpPr>
-          <p:cNvPr id="5" name="날짜 개체 틀 4">
-            <a:extLst>
-              <a:ext uri="{FF2B5EF4-FFF2-40B4-BE49-F238E27FC236}">
-                <a16:creationId xmlns:a16="http://schemas.microsoft.com/office/drawing/2014/main" id="{7F95CE34-8468-8FBD-5332-DFDBCB879C08}"/>
-              </a:ext>
-            </a:extLst>
-          </p:cNvPr>
-          <p:cNvSpPr>
-            <a:spLocks noGrp="1"/>
-          </p:cNvSpPr>
-          <p:nvPr>
-            <p:ph type="dt" sz="half" idx="10"/>
-          </p:nvPr>
-        </p:nvSpPr>
-        <p:spPr/>
-        <p:txBody>
-          <a:bodyPr/>
-          <a:lstStyle/>
-          <a:p>
-            <a:fld id="{492E84DF-9BBC-4DFC-AB92-EB3DF1902948}" type="datetime1">
-              <a:rPr lang="en-US" altLang="ko-KR" smtClean="0"/>
-              <a:t>9/26/2026</a:t>
-            </a:fld>
-            <a:endParaRPr lang="ko-KR" altLang="en-US"/>
-          </a:p>
-        </p:txBody>
-      </p:sp>
-      <p:sp>
-        <p:nvSpPr>
-          <p:cNvPr id="6" name="슬라이드 번호 개체 틀 5">
-            <a:extLst>
-              <a:ext uri="{FF2B5EF4-FFF2-40B4-BE49-F238E27FC236}">
-                <a16:creationId xmlns:a16="http://schemas.microsoft.com/office/drawing/2014/main" id="{5099FD26-AF90-A1CC-A66F-C817032E6756}"/>
-              </a:ext>
-            </a:extLst>
-          </p:cNvPr>
-          <p:cNvSpPr>
-            <a:spLocks noGrp="1"/>
-          </p:cNvSpPr>
-          <p:nvPr>
-            <p:ph type="sldNum" sz="quarter" idx="12"/>
-          </p:nvPr>
-        </p:nvSpPr>
-        <p:spPr/>
-        <p:txBody>
-          <a:bodyPr/>
-          <a:lstStyle/>
-          <a:p>
-            <a:fld id="{4419BE51-E1DC-4D7D-A982-2D579B035180}" type="slidenum">
-              <a:rPr lang="ko-KR" altLang="en-US" smtClean="0"/>
-              <a:t>19</a:t>
-            </a:fld>
-            <a:endParaRPr lang="ko-KR" altLang="en-US"/>
-          </a:p>
-        </p:txBody>
-      </p:sp>
-      <p:sp>
-        <p:nvSpPr>
-          <p:cNvPr id="7" name="내용 개체 틀 6">
-            <a:extLst>
-              <a:ext uri="{FF2B5EF4-FFF2-40B4-BE49-F238E27FC236}">
-                <a16:creationId xmlns:a16="http://schemas.microsoft.com/office/drawing/2014/main" id="{DB089F7A-7CA1-E010-5F87-17E27A802940}"/>
-              </a:ext>
-            </a:extLst>
-          </p:cNvPr>
-          <p:cNvSpPr>
-            <a:spLocks noGrp="1"/>
-          </p:cNvSpPr>
-          <p:nvPr>
-            <p:ph sz="quarter" idx="13"/>
-          </p:nvPr>
-        </p:nvSpPr>
-        <p:spPr/>
-        <p:txBody>
-          <a:bodyPr/>
-          <a:lstStyle/>
-          <a:p>
-            <a:r>
-              <a:rPr lang="ko-KR" altLang="en-US" dirty="0"/>
-              <a:t>시스템</a:t>
-            </a:r>
-          </a:p>
-        </p:txBody>
-      </p:sp>
-      <p:pic>
-        <p:nvPicPr>
-          <p:cNvPr id="11" name="그림 10">
-            <a:extLst>
-              <a:ext uri="{FF2B5EF4-FFF2-40B4-BE49-F238E27FC236}">
-                <a16:creationId xmlns:a16="http://schemas.microsoft.com/office/drawing/2014/main" id="{0EA101FB-C5F7-D7BA-BAFB-2BFC8BEA7163}"/>
-              </a:ext>
-            </a:extLst>
-          </p:cNvPr>
-          <p:cNvPicPr>
-            <a:picLocks noChangeAspect="1"/>
-          </p:cNvPicPr>
-          <p:nvPr/>
-        </p:nvPicPr>
-        <p:blipFill>
-          <a:blip r:embed="rId3"/>
-          <a:stretch>
-            <a:fillRect/>
-          </a:stretch>
-        </p:blipFill>
-        <p:spPr>
-          <a:xfrm>
-            <a:off x="838200" y="930227"/>
-            <a:ext cx="3781977" cy="2125894"/>
-          </a:xfrm>
-          <a:prstGeom prst="rect">
-            <a:avLst/>
-          </a:prstGeom>
-        </p:spPr>
-      </p:pic>
-      <p:sp>
-        <p:nvSpPr>
-          <p:cNvPr id="13" name="직사각형 12">
-            <a:extLst>
-              <a:ext uri="{FF2B5EF4-FFF2-40B4-BE49-F238E27FC236}">
-                <a16:creationId xmlns:a16="http://schemas.microsoft.com/office/drawing/2014/main" id="{6C69ABD2-5C85-6EFE-9E9C-6A167D27F917}"/>
-              </a:ext>
-            </a:extLst>
-          </p:cNvPr>
-          <p:cNvSpPr/>
-          <p:nvPr/>
-        </p:nvSpPr>
-        <p:spPr>
-          <a:xfrm>
-            <a:off x="801999" y="930227"/>
-            <a:ext cx="857926" cy="382894"/>
-          </a:xfrm>
-          <a:prstGeom prst="rect">
-            <a:avLst/>
-          </a:prstGeom>
-          <a:solidFill>
-            <a:srgbClr val="FF0000">
-              <a:alpha val="13000"/>
-            </a:srgbClr>
-          </a:solidFill>
-          <a:ln w="38100">
-            <a:solidFill>
-              <a:srgbClr val="FF0000"/>
-            </a:solidFill>
-          </a:ln>
-        </p:spPr>
-        <p:style>
-          <a:lnRef idx="2">
-            <a:schemeClr val="accent1">
-              <a:shade val="15000"/>
-            </a:schemeClr>
-          </a:lnRef>
-          <a:fillRef idx="1">
-            <a:schemeClr val="accent1"/>
-          </a:fillRef>
-          <a:effectRef idx="0">
-            <a:schemeClr val="accent1"/>
-          </a:effectRef>
-          <a:fontRef idx="minor">
-            <a:schemeClr val="lt1"/>
-          </a:fontRef>
-        </p:style>
-        <p:txBody>
-          <a:bodyPr rtlCol="0" anchor="ctr"/>
-          <a:lstStyle/>
-          <a:p>
-            <a:pPr algn="ctr"/>
-            <a:endParaRPr lang="ko-KR" altLang="en-US"/>
-          </a:p>
-        </p:txBody>
-      </p:sp>
-      <p:sp>
-        <p:nvSpPr>
-          <p:cNvPr id="15" name="직사각형 14">
-            <a:extLst>
-              <a:ext uri="{FF2B5EF4-FFF2-40B4-BE49-F238E27FC236}">
-                <a16:creationId xmlns:a16="http://schemas.microsoft.com/office/drawing/2014/main" id="{567288D5-F1CD-1A04-BDA2-2AD330634E91}"/>
-              </a:ext>
-            </a:extLst>
-          </p:cNvPr>
-          <p:cNvSpPr/>
-          <p:nvPr/>
-        </p:nvSpPr>
-        <p:spPr>
-          <a:xfrm>
-            <a:off x="878492" y="3056121"/>
-            <a:ext cx="3119350" cy="382894"/>
-          </a:xfrm>
-          <a:prstGeom prst="rect">
-            <a:avLst/>
-          </a:prstGeom>
-          <a:solidFill>
-            <a:srgbClr val="FF0000">
-              <a:alpha val="13000"/>
-            </a:srgbClr>
-          </a:solidFill>
-          <a:ln w="38100">
-            <a:solidFill>
-              <a:srgbClr val="FF0000"/>
-            </a:solidFill>
-          </a:ln>
-        </p:spPr>
-        <p:style>
-          <a:lnRef idx="2">
-            <a:schemeClr val="accent1">
-              <a:shade val="15000"/>
-            </a:schemeClr>
-          </a:lnRef>
-          <a:fillRef idx="1">
-            <a:schemeClr val="accent1"/>
-          </a:fillRef>
-          <a:effectRef idx="0">
-            <a:schemeClr val="accent1"/>
-          </a:effectRef>
-          <a:fontRef idx="minor">
-            <a:schemeClr val="lt1"/>
-          </a:fontRef>
-        </p:style>
-        <p:txBody>
-          <a:bodyPr rtlCol="0" anchor="ctr"/>
-          <a:lstStyle/>
-          <a:p>
-            <a:pPr algn="ctr"/>
-            <a:endParaRPr lang="ko-KR" altLang="en-US"/>
-          </a:p>
-        </p:txBody>
-      </p:sp>
-      <p:sp>
-        <p:nvSpPr>
-          <p:cNvPr id="17" name="직사각형 16">
-            <a:extLst>
-              <a:ext uri="{FF2B5EF4-FFF2-40B4-BE49-F238E27FC236}">
-                <a16:creationId xmlns:a16="http://schemas.microsoft.com/office/drawing/2014/main" id="{C588704E-B783-8AA9-FEC9-3C32AF5BFA10}"/>
-              </a:ext>
-            </a:extLst>
-          </p:cNvPr>
-          <p:cNvSpPr/>
-          <p:nvPr/>
-        </p:nvSpPr>
-        <p:spPr>
-          <a:xfrm>
-            <a:off x="3147145" y="4635521"/>
-            <a:ext cx="868510" cy="1292252"/>
-          </a:xfrm>
-          <a:prstGeom prst="rect">
-            <a:avLst/>
-          </a:prstGeom>
-          <a:solidFill>
-            <a:srgbClr val="FF0000">
-              <a:alpha val="13000"/>
-            </a:srgbClr>
-          </a:solidFill>
-          <a:ln w="38100">
-            <a:solidFill>
-              <a:srgbClr val="FF0000"/>
-            </a:solidFill>
-          </a:ln>
-        </p:spPr>
-        <p:style>
-          <a:lnRef idx="2">
-            <a:schemeClr val="accent1">
-              <a:shade val="15000"/>
-            </a:schemeClr>
-          </a:lnRef>
-          <a:fillRef idx="1">
-            <a:schemeClr val="accent1"/>
-          </a:fillRef>
-          <a:effectRef idx="0">
-            <a:schemeClr val="accent1"/>
-          </a:effectRef>
-          <a:fontRef idx="minor">
-            <a:schemeClr val="lt1"/>
-          </a:fontRef>
-        </p:style>
-        <p:txBody>
-          <a:bodyPr rtlCol="0" anchor="ctr"/>
-          <a:lstStyle/>
-          <a:p>
-            <a:pPr algn="ctr"/>
-            <a:endParaRPr lang="ko-KR" altLang="en-US"/>
-          </a:p>
-        </p:txBody>
-      </p:sp>
-      <p:sp>
-        <p:nvSpPr>
-          <p:cNvPr id="8" name="TextBox 7">
-            <a:extLst>
-              <a:ext uri="{FF2B5EF4-FFF2-40B4-BE49-F238E27FC236}">
-                <a16:creationId xmlns:a16="http://schemas.microsoft.com/office/drawing/2014/main" id="{622A4487-800F-DF37-A70B-371D2746D349}"/>
-              </a:ext>
-            </a:extLst>
-          </p:cNvPr>
-          <p:cNvSpPr txBox="1"/>
-          <p:nvPr/>
-        </p:nvSpPr>
-        <p:spPr>
-          <a:xfrm>
-            <a:off x="4564154" y="1477070"/>
-            <a:ext cx="2068170" cy="523220"/>
-          </a:xfrm>
-          <a:prstGeom prst="rect">
-            <a:avLst/>
-          </a:prstGeom>
-          <a:noFill/>
-        </p:spPr>
-        <p:txBody>
-          <a:bodyPr wrap="square" rtlCol="0">
-            <a:spAutoFit/>
-          </a:bodyPr>
-          <a:lstStyle/>
-          <a:p>
-            <a:r>
-              <a:rPr lang="en-US" altLang="ko-KR" sz="1400" dirty="0"/>
-              <a:t>[</a:t>
-            </a:r>
-            <a:r>
-              <a:rPr lang="ko-KR" altLang="en-US" sz="1400" dirty="0"/>
-              <a:t>자료</a:t>
-            </a:r>
-            <a:r>
-              <a:rPr lang="en-US" altLang="ko-KR" sz="1400" dirty="0"/>
-              <a:t>4] </a:t>
-            </a:r>
-            <a:r>
-              <a:rPr lang="ko-KR" altLang="en-US" sz="1400" dirty="0"/>
-              <a:t>게임</a:t>
-            </a:r>
-            <a:br>
-              <a:rPr lang="en-US" altLang="ko-KR" sz="1400" dirty="0"/>
-            </a:br>
-            <a:r>
-              <a:rPr lang="en-US" altLang="ko-KR" sz="1400" dirty="0"/>
-              <a:t>“</a:t>
-            </a:r>
-            <a:r>
-              <a:rPr lang="ko-KR" altLang="en-US" sz="1400" dirty="0" err="1"/>
-              <a:t>이프선셋</a:t>
-            </a:r>
-            <a:r>
-              <a:rPr lang="en-US" altLang="ko-KR" sz="1400" dirty="0"/>
-              <a:t>” </a:t>
-            </a:r>
-            <a:r>
-              <a:rPr lang="ko-KR" altLang="en-US" sz="1400" dirty="0"/>
-              <a:t>플레이 화면</a:t>
-            </a:r>
-          </a:p>
-        </p:txBody>
-      </p:sp>
-      <p:sp>
-        <p:nvSpPr>
-          <p:cNvPr id="12" name="TextBox 11">
-            <a:extLst>
-              <a:ext uri="{FF2B5EF4-FFF2-40B4-BE49-F238E27FC236}">
-                <a16:creationId xmlns:a16="http://schemas.microsoft.com/office/drawing/2014/main" id="{86B836F7-4B29-DFB0-923C-2D74D5FD2332}"/>
-              </a:ext>
-            </a:extLst>
-          </p:cNvPr>
-          <p:cNvSpPr txBox="1"/>
-          <p:nvPr/>
-        </p:nvSpPr>
-        <p:spPr>
-          <a:xfrm>
-            <a:off x="4564155" y="2345203"/>
-            <a:ext cx="2020675" cy="738664"/>
-          </a:xfrm>
-          <a:prstGeom prst="rect">
-            <a:avLst/>
-          </a:prstGeom>
-          <a:noFill/>
-        </p:spPr>
-        <p:txBody>
-          <a:bodyPr wrap="square" rtlCol="0">
-            <a:spAutoFit/>
-          </a:bodyPr>
-          <a:lstStyle/>
-          <a:p>
-            <a:r>
-              <a:rPr lang="en-US" altLang="ko-KR" sz="1400" dirty="0"/>
-              <a:t>[</a:t>
-            </a:r>
-            <a:r>
-              <a:rPr lang="ko-KR" altLang="en-US" sz="1400" dirty="0"/>
-              <a:t>자료</a:t>
-            </a:r>
-            <a:r>
-              <a:rPr lang="en-US" altLang="ko-KR" sz="1400" dirty="0"/>
-              <a:t>5] </a:t>
-            </a:r>
-            <a:r>
-              <a:rPr lang="ko-KR" altLang="en-US" sz="1400" dirty="0"/>
-              <a:t>게임 </a:t>
-            </a:r>
-            <a:r>
-              <a:rPr lang="en-US" altLang="ko-KR" sz="1400" dirty="0"/>
-              <a:t>“Totally Reliable Delivery Service” </a:t>
-            </a:r>
-            <a:r>
-              <a:rPr lang="ko-KR" altLang="en-US" sz="1400" dirty="0"/>
-              <a:t>플레이 화면</a:t>
-            </a:r>
-          </a:p>
-        </p:txBody>
-      </p:sp>
-    </p:spTree>
-    <p:extLst>
-      <p:ext uri="{BB962C8B-B14F-4D97-AF65-F5344CB8AC3E}">
-        <p14:creationId xmlns:p14="http://schemas.microsoft.com/office/powerpoint/2010/main" val="2600675860"/>
       </p:ext>
     </p:extLst>
   </p:cSld>
@@ -14906,6 +14753,580 @@
           <p:cNvPr id="2" name="제목 1">
             <a:extLst>
               <a:ext uri="{FF2B5EF4-FFF2-40B4-BE49-F238E27FC236}">
+                <a16:creationId xmlns:a16="http://schemas.microsoft.com/office/drawing/2014/main" id="{6533757E-1FD6-215F-E156-3C3139CE355C}"/>
+              </a:ext>
+            </a:extLst>
+          </p:cNvPr>
+          <p:cNvSpPr>
+            <a:spLocks noGrp="1"/>
+          </p:cNvSpPr>
+          <p:nvPr>
+            <p:ph type="title"/>
+          </p:nvPr>
+        </p:nvSpPr>
+        <p:spPr/>
+        <p:txBody>
+          <a:bodyPr>
+            <a:normAutofit/>
+          </a:bodyPr>
+          <a:lstStyle/>
+          <a:p>
+            <a:r>
+              <a:rPr lang="en-US" altLang="ko-KR" dirty="0"/>
+              <a:t>UI_</a:t>
+            </a:r>
+            <a:r>
+              <a:rPr lang="ko-KR" altLang="en-US" dirty="0"/>
+              <a:t>세부</a:t>
+            </a:r>
+            <a:r>
+              <a:rPr lang="en-US" altLang="ko-KR" dirty="0"/>
+              <a:t>_</a:t>
+            </a:r>
+            <a:r>
+              <a:rPr lang="ko-KR" altLang="en-US" dirty="0"/>
+              <a:t>플레이화면 참고</a:t>
+            </a:r>
+          </a:p>
+        </p:txBody>
+      </p:sp>
+      <p:pic>
+        <p:nvPicPr>
+          <p:cNvPr id="9" name="내용 개체 틀 8">
+            <a:extLst>
+              <a:ext uri="{FF2B5EF4-FFF2-40B4-BE49-F238E27FC236}">
+                <a16:creationId xmlns:a16="http://schemas.microsoft.com/office/drawing/2014/main" id="{81E79F0F-FDFC-E817-C0AE-BB5090B8657E}"/>
+              </a:ext>
+            </a:extLst>
+          </p:cNvPr>
+          <p:cNvPicPr>
+            <a:picLocks noGrp="1" noChangeAspect="1"/>
+          </p:cNvPicPr>
+          <p:nvPr>
+            <p:ph sz="half" idx="1"/>
+          </p:nvPr>
+        </p:nvPicPr>
+        <p:blipFill>
+          <a:blip r:embed="rId2">
+            <a:extLst>
+              <a:ext uri="{28A0092B-C50C-407E-A947-70E740481C1C}">
+                <a14:useLocalDpi xmlns:a14="http://schemas.microsoft.com/office/drawing/2010/main" val="0"/>
+              </a:ext>
+            </a:extLst>
+          </a:blip>
+          <a:srcRect l="8986" r="8893"/>
+          <a:stretch>
+            <a:fillRect/>
+          </a:stretch>
+        </p:blipFill>
+        <p:spPr>
+          <a:xfrm>
+            <a:off x="838200" y="3056121"/>
+            <a:ext cx="5746630" cy="3229714"/>
+          </a:xfrm>
+          <a:prstGeom prst="rect">
+            <a:avLst/>
+          </a:prstGeom>
+        </p:spPr>
+      </p:pic>
+      <p:sp>
+        <p:nvSpPr>
+          <p:cNvPr id="4" name="내용 개체 틀 3">
+            <a:extLst>
+              <a:ext uri="{FF2B5EF4-FFF2-40B4-BE49-F238E27FC236}">
+                <a16:creationId xmlns:a16="http://schemas.microsoft.com/office/drawing/2014/main" id="{42C8D78D-3ED4-2311-EA63-537F5F77C1CA}"/>
+              </a:ext>
+            </a:extLst>
+          </p:cNvPr>
+          <p:cNvSpPr>
+            <a:spLocks noGrp="1"/>
+          </p:cNvSpPr>
+          <p:nvPr>
+            <p:ph sz="half" idx="2"/>
+          </p:nvPr>
+        </p:nvSpPr>
+        <p:spPr>
+          <a:xfrm>
+            <a:off x="6848034" y="1825625"/>
+            <a:ext cx="4505766" cy="4351338"/>
+          </a:xfrm>
+        </p:spPr>
+        <p:txBody>
+          <a:bodyPr>
+            <a:normAutofit/>
+          </a:bodyPr>
+          <a:lstStyle/>
+          <a:p>
+            <a:endParaRPr lang="en-US" altLang="ko-KR" sz="2400" dirty="0"/>
+          </a:p>
+          <a:p>
+            <a:endParaRPr lang="en-US" altLang="ko-KR" sz="2400" dirty="0"/>
+          </a:p>
+          <a:p>
+            <a:r>
+              <a:rPr lang="ko-KR" altLang="en-US" sz="2400" dirty="0"/>
+              <a:t>레퍼런스 게임의 이미지 </a:t>
+            </a:r>
+            <a:br>
+              <a:rPr lang="en-US" altLang="ko-KR" sz="2400" dirty="0"/>
+            </a:br>
+            <a:r>
+              <a:rPr lang="ko-KR" altLang="en-US" sz="2400" dirty="0"/>
+              <a:t>플레이 화면 참고</a:t>
+            </a:r>
+            <a:endParaRPr lang="en-US" altLang="ko-KR" sz="2400" dirty="0"/>
+          </a:p>
+          <a:p>
+            <a:endParaRPr lang="en-US" altLang="ko-KR" sz="2400" dirty="0"/>
+          </a:p>
+          <a:p>
+            <a:endParaRPr lang="en-US" altLang="ko-KR" sz="2400" dirty="0"/>
+          </a:p>
+          <a:p>
+            <a:endParaRPr lang="en-US" altLang="ko-KR" sz="2400" dirty="0"/>
+          </a:p>
+        </p:txBody>
+      </p:sp>
+      <p:sp>
+        <p:nvSpPr>
+          <p:cNvPr id="5" name="날짜 개체 틀 4">
+            <a:extLst>
+              <a:ext uri="{FF2B5EF4-FFF2-40B4-BE49-F238E27FC236}">
+                <a16:creationId xmlns:a16="http://schemas.microsoft.com/office/drawing/2014/main" id="{7F95CE34-8468-8FBD-5332-DFDBCB879C08}"/>
+              </a:ext>
+            </a:extLst>
+          </p:cNvPr>
+          <p:cNvSpPr>
+            <a:spLocks noGrp="1"/>
+          </p:cNvSpPr>
+          <p:nvPr>
+            <p:ph type="dt" sz="half" idx="10"/>
+          </p:nvPr>
+        </p:nvSpPr>
+        <p:spPr/>
+        <p:txBody>
+          <a:bodyPr/>
+          <a:lstStyle/>
+          <a:p>
+            <a:fld id="{492E84DF-9BBC-4DFC-AB92-EB3DF1902948}" type="datetime1">
+              <a:rPr lang="en-US" altLang="ko-KR" smtClean="0"/>
+              <a:t>9/26/2026</a:t>
+            </a:fld>
+            <a:endParaRPr lang="ko-KR" altLang="en-US"/>
+          </a:p>
+        </p:txBody>
+      </p:sp>
+      <p:sp>
+        <p:nvSpPr>
+          <p:cNvPr id="6" name="슬라이드 번호 개체 틀 5">
+            <a:extLst>
+              <a:ext uri="{FF2B5EF4-FFF2-40B4-BE49-F238E27FC236}">
+                <a16:creationId xmlns:a16="http://schemas.microsoft.com/office/drawing/2014/main" id="{5099FD26-AF90-A1CC-A66F-C817032E6756}"/>
+              </a:ext>
+            </a:extLst>
+          </p:cNvPr>
+          <p:cNvSpPr>
+            <a:spLocks noGrp="1"/>
+          </p:cNvSpPr>
+          <p:nvPr>
+            <p:ph type="sldNum" sz="quarter" idx="12"/>
+          </p:nvPr>
+        </p:nvSpPr>
+        <p:spPr/>
+        <p:txBody>
+          <a:bodyPr/>
+          <a:lstStyle/>
+          <a:p>
+            <a:fld id="{4419BE51-E1DC-4D7D-A982-2D579B035180}" type="slidenum">
+              <a:rPr lang="ko-KR" altLang="en-US" smtClean="0"/>
+              <a:t>20</a:t>
+            </a:fld>
+            <a:endParaRPr lang="ko-KR" altLang="en-US"/>
+          </a:p>
+        </p:txBody>
+      </p:sp>
+      <p:sp>
+        <p:nvSpPr>
+          <p:cNvPr id="7" name="내용 개체 틀 6">
+            <a:extLst>
+              <a:ext uri="{FF2B5EF4-FFF2-40B4-BE49-F238E27FC236}">
+                <a16:creationId xmlns:a16="http://schemas.microsoft.com/office/drawing/2014/main" id="{DB089F7A-7CA1-E010-5F87-17E27A802940}"/>
+              </a:ext>
+            </a:extLst>
+          </p:cNvPr>
+          <p:cNvSpPr>
+            <a:spLocks noGrp="1"/>
+          </p:cNvSpPr>
+          <p:nvPr>
+            <p:ph sz="quarter" idx="13"/>
+          </p:nvPr>
+        </p:nvSpPr>
+        <p:spPr/>
+        <p:txBody>
+          <a:bodyPr/>
+          <a:lstStyle/>
+          <a:p>
+            <a:r>
+              <a:rPr lang="ko-KR" altLang="en-US" dirty="0"/>
+              <a:t>시스템</a:t>
+            </a:r>
+          </a:p>
+        </p:txBody>
+      </p:sp>
+      <p:pic>
+        <p:nvPicPr>
+          <p:cNvPr id="11" name="그림 10">
+            <a:extLst>
+              <a:ext uri="{FF2B5EF4-FFF2-40B4-BE49-F238E27FC236}">
+                <a16:creationId xmlns:a16="http://schemas.microsoft.com/office/drawing/2014/main" id="{0EA101FB-C5F7-D7BA-BAFB-2BFC8BEA7163}"/>
+              </a:ext>
+            </a:extLst>
+          </p:cNvPr>
+          <p:cNvPicPr>
+            <a:picLocks noChangeAspect="1"/>
+          </p:cNvPicPr>
+          <p:nvPr/>
+        </p:nvPicPr>
+        <p:blipFill>
+          <a:blip r:embed="rId3"/>
+          <a:stretch>
+            <a:fillRect/>
+          </a:stretch>
+        </p:blipFill>
+        <p:spPr>
+          <a:xfrm>
+            <a:off x="838200" y="930227"/>
+            <a:ext cx="3781977" cy="2125894"/>
+          </a:xfrm>
+          <a:prstGeom prst="rect">
+            <a:avLst/>
+          </a:prstGeom>
+        </p:spPr>
+      </p:pic>
+      <p:sp>
+        <p:nvSpPr>
+          <p:cNvPr id="13" name="직사각형 12">
+            <a:extLst>
+              <a:ext uri="{FF2B5EF4-FFF2-40B4-BE49-F238E27FC236}">
+                <a16:creationId xmlns:a16="http://schemas.microsoft.com/office/drawing/2014/main" id="{6C69ABD2-5C85-6EFE-9E9C-6A167D27F917}"/>
+              </a:ext>
+            </a:extLst>
+          </p:cNvPr>
+          <p:cNvSpPr/>
+          <p:nvPr/>
+        </p:nvSpPr>
+        <p:spPr>
+          <a:xfrm>
+            <a:off x="801999" y="930227"/>
+            <a:ext cx="857926" cy="382894"/>
+          </a:xfrm>
+          <a:prstGeom prst="rect">
+            <a:avLst/>
+          </a:prstGeom>
+          <a:solidFill>
+            <a:srgbClr val="FF0000">
+              <a:alpha val="13000"/>
+            </a:srgbClr>
+          </a:solidFill>
+          <a:ln w="38100">
+            <a:solidFill>
+              <a:srgbClr val="FF0000"/>
+            </a:solidFill>
+          </a:ln>
+        </p:spPr>
+        <p:style>
+          <a:lnRef idx="2">
+            <a:schemeClr val="accent1">
+              <a:shade val="15000"/>
+            </a:schemeClr>
+          </a:lnRef>
+          <a:fillRef idx="1">
+            <a:schemeClr val="accent1"/>
+          </a:fillRef>
+          <a:effectRef idx="0">
+            <a:schemeClr val="accent1"/>
+          </a:effectRef>
+          <a:fontRef idx="minor">
+            <a:schemeClr val="lt1"/>
+          </a:fontRef>
+        </p:style>
+        <p:txBody>
+          <a:bodyPr rtlCol="0" anchor="ctr"/>
+          <a:lstStyle/>
+          <a:p>
+            <a:pPr algn="ctr"/>
+            <a:endParaRPr lang="ko-KR" altLang="en-US"/>
+          </a:p>
+        </p:txBody>
+      </p:sp>
+      <p:sp>
+        <p:nvSpPr>
+          <p:cNvPr id="15" name="직사각형 14">
+            <a:extLst>
+              <a:ext uri="{FF2B5EF4-FFF2-40B4-BE49-F238E27FC236}">
+                <a16:creationId xmlns:a16="http://schemas.microsoft.com/office/drawing/2014/main" id="{567288D5-F1CD-1A04-BDA2-2AD330634E91}"/>
+              </a:ext>
+            </a:extLst>
+          </p:cNvPr>
+          <p:cNvSpPr/>
+          <p:nvPr/>
+        </p:nvSpPr>
+        <p:spPr>
+          <a:xfrm>
+            <a:off x="878492" y="3056121"/>
+            <a:ext cx="3119350" cy="382894"/>
+          </a:xfrm>
+          <a:prstGeom prst="rect">
+            <a:avLst/>
+          </a:prstGeom>
+          <a:solidFill>
+            <a:srgbClr val="FF0000">
+              <a:alpha val="13000"/>
+            </a:srgbClr>
+          </a:solidFill>
+          <a:ln w="38100">
+            <a:solidFill>
+              <a:srgbClr val="FF0000"/>
+            </a:solidFill>
+          </a:ln>
+        </p:spPr>
+        <p:style>
+          <a:lnRef idx="2">
+            <a:schemeClr val="accent1">
+              <a:shade val="15000"/>
+            </a:schemeClr>
+          </a:lnRef>
+          <a:fillRef idx="1">
+            <a:schemeClr val="accent1"/>
+          </a:fillRef>
+          <a:effectRef idx="0">
+            <a:schemeClr val="accent1"/>
+          </a:effectRef>
+          <a:fontRef idx="minor">
+            <a:schemeClr val="lt1"/>
+          </a:fontRef>
+        </p:style>
+        <p:txBody>
+          <a:bodyPr rtlCol="0" anchor="ctr"/>
+          <a:lstStyle/>
+          <a:p>
+            <a:pPr algn="ctr"/>
+            <a:endParaRPr lang="ko-KR" altLang="en-US"/>
+          </a:p>
+        </p:txBody>
+      </p:sp>
+      <p:sp>
+        <p:nvSpPr>
+          <p:cNvPr id="17" name="직사각형 16">
+            <a:extLst>
+              <a:ext uri="{FF2B5EF4-FFF2-40B4-BE49-F238E27FC236}">
+                <a16:creationId xmlns:a16="http://schemas.microsoft.com/office/drawing/2014/main" id="{C588704E-B783-8AA9-FEC9-3C32AF5BFA10}"/>
+              </a:ext>
+            </a:extLst>
+          </p:cNvPr>
+          <p:cNvSpPr/>
+          <p:nvPr/>
+        </p:nvSpPr>
+        <p:spPr>
+          <a:xfrm>
+            <a:off x="3147145" y="4635521"/>
+            <a:ext cx="868510" cy="1292252"/>
+          </a:xfrm>
+          <a:prstGeom prst="rect">
+            <a:avLst/>
+          </a:prstGeom>
+          <a:solidFill>
+            <a:srgbClr val="FF0000">
+              <a:alpha val="13000"/>
+            </a:srgbClr>
+          </a:solidFill>
+          <a:ln w="38100">
+            <a:solidFill>
+              <a:srgbClr val="FF0000"/>
+            </a:solidFill>
+          </a:ln>
+        </p:spPr>
+        <p:style>
+          <a:lnRef idx="2">
+            <a:schemeClr val="accent1">
+              <a:shade val="15000"/>
+            </a:schemeClr>
+          </a:lnRef>
+          <a:fillRef idx="1">
+            <a:schemeClr val="accent1"/>
+          </a:fillRef>
+          <a:effectRef idx="0">
+            <a:schemeClr val="accent1"/>
+          </a:effectRef>
+          <a:fontRef idx="minor">
+            <a:schemeClr val="lt1"/>
+          </a:fontRef>
+        </p:style>
+        <p:txBody>
+          <a:bodyPr rtlCol="0" anchor="ctr"/>
+          <a:lstStyle/>
+          <a:p>
+            <a:pPr algn="ctr"/>
+            <a:endParaRPr lang="ko-KR" altLang="en-US"/>
+          </a:p>
+        </p:txBody>
+      </p:sp>
+      <p:sp>
+        <p:nvSpPr>
+          <p:cNvPr id="8" name="TextBox 7">
+            <a:extLst>
+              <a:ext uri="{FF2B5EF4-FFF2-40B4-BE49-F238E27FC236}">
+                <a16:creationId xmlns:a16="http://schemas.microsoft.com/office/drawing/2014/main" id="{622A4487-800F-DF37-A70B-371D2746D349}"/>
+              </a:ext>
+            </a:extLst>
+          </p:cNvPr>
+          <p:cNvSpPr txBox="1"/>
+          <p:nvPr/>
+        </p:nvSpPr>
+        <p:spPr>
+          <a:xfrm>
+            <a:off x="4564154" y="1477070"/>
+            <a:ext cx="2068170" cy="523220"/>
+          </a:xfrm>
+          <a:prstGeom prst="rect">
+            <a:avLst/>
+          </a:prstGeom>
+          <a:noFill/>
+        </p:spPr>
+        <p:txBody>
+          <a:bodyPr wrap="square" rtlCol="0">
+            <a:spAutoFit/>
+          </a:bodyPr>
+          <a:lstStyle/>
+          <a:p>
+            <a:r>
+              <a:rPr lang="en-US" altLang="ko-KR" sz="1400" dirty="0"/>
+              <a:t>[</a:t>
+            </a:r>
+            <a:r>
+              <a:rPr lang="ko-KR" altLang="en-US" sz="1400" dirty="0"/>
+              <a:t>자료</a:t>
+            </a:r>
+            <a:r>
+              <a:rPr lang="en-US" altLang="ko-KR" sz="1400" dirty="0"/>
+              <a:t>4] </a:t>
+            </a:r>
+            <a:r>
+              <a:rPr lang="ko-KR" altLang="en-US" sz="1400" dirty="0"/>
+              <a:t>게임</a:t>
+            </a:r>
+            <a:br>
+              <a:rPr lang="en-US" altLang="ko-KR" sz="1400" dirty="0"/>
+            </a:br>
+            <a:r>
+              <a:rPr lang="en-US" altLang="ko-KR" sz="1400" dirty="0"/>
+              <a:t>“</a:t>
+            </a:r>
+            <a:r>
+              <a:rPr lang="ko-KR" altLang="en-US" sz="1400" dirty="0" err="1"/>
+              <a:t>이프선셋</a:t>
+            </a:r>
+            <a:r>
+              <a:rPr lang="en-US" altLang="ko-KR" sz="1400" dirty="0"/>
+              <a:t>” </a:t>
+            </a:r>
+            <a:r>
+              <a:rPr lang="ko-KR" altLang="en-US" sz="1400" dirty="0"/>
+              <a:t>플레이 화면</a:t>
+            </a:r>
+          </a:p>
+        </p:txBody>
+      </p:sp>
+      <p:sp>
+        <p:nvSpPr>
+          <p:cNvPr id="12" name="TextBox 11">
+            <a:extLst>
+              <a:ext uri="{FF2B5EF4-FFF2-40B4-BE49-F238E27FC236}">
+                <a16:creationId xmlns:a16="http://schemas.microsoft.com/office/drawing/2014/main" id="{86B836F7-4B29-DFB0-923C-2D74D5FD2332}"/>
+              </a:ext>
+            </a:extLst>
+          </p:cNvPr>
+          <p:cNvSpPr txBox="1"/>
+          <p:nvPr/>
+        </p:nvSpPr>
+        <p:spPr>
+          <a:xfrm>
+            <a:off x="4564155" y="2345203"/>
+            <a:ext cx="2020675" cy="738664"/>
+          </a:xfrm>
+          <a:prstGeom prst="rect">
+            <a:avLst/>
+          </a:prstGeom>
+          <a:noFill/>
+        </p:spPr>
+        <p:txBody>
+          <a:bodyPr wrap="square" rtlCol="0">
+            <a:spAutoFit/>
+          </a:bodyPr>
+          <a:lstStyle/>
+          <a:p>
+            <a:r>
+              <a:rPr lang="en-US" altLang="ko-KR" sz="1400" dirty="0"/>
+              <a:t>[</a:t>
+            </a:r>
+            <a:r>
+              <a:rPr lang="ko-KR" altLang="en-US" sz="1400" dirty="0"/>
+              <a:t>자료</a:t>
+            </a:r>
+            <a:r>
+              <a:rPr lang="en-US" altLang="ko-KR" sz="1400" dirty="0"/>
+              <a:t>5] </a:t>
+            </a:r>
+            <a:r>
+              <a:rPr lang="ko-KR" altLang="en-US" sz="1400" dirty="0"/>
+              <a:t>게임 </a:t>
+            </a:r>
+            <a:r>
+              <a:rPr lang="en-US" altLang="ko-KR" sz="1400" dirty="0"/>
+              <a:t>“Totally Reliable Delivery Service” </a:t>
+            </a:r>
+            <a:r>
+              <a:rPr lang="ko-KR" altLang="en-US" sz="1400" dirty="0"/>
+              <a:t>플레이 화면</a:t>
+            </a:r>
+          </a:p>
+        </p:txBody>
+      </p:sp>
+    </p:spTree>
+    <p:extLst>
+      <p:ext uri="{BB962C8B-B14F-4D97-AF65-F5344CB8AC3E}">
+        <p14:creationId xmlns:p14="http://schemas.microsoft.com/office/powerpoint/2010/main" val="2600675860"/>
+      </p:ext>
+    </p:extLst>
+  </p:cSld>
+  <p:clrMapOvr>
+    <a:masterClrMapping/>
+  </p:clrMapOvr>
+</p:sld>
+</file>
+
+<file path=ppt/slides/slide21.xml><?xml version="1.0" encoding="utf-8"?>
+<p:sld xmlns:a="http://schemas.openxmlformats.org/drawingml/2006/main" xmlns:r="http://schemas.openxmlformats.org/officeDocument/2006/relationships" xmlns:p="http://schemas.openxmlformats.org/presentationml/2006/main">
+  <p:cSld>
+    <p:spTree>
+      <p:nvGrpSpPr>
+        <p:cNvPr id="1" name=""/>
+        <p:cNvGrpSpPr/>
+        <p:nvPr/>
+      </p:nvGrpSpPr>
+      <p:grpSpPr>
+        <a:xfrm>
+          <a:off x="0" y="0"/>
+          <a:ext cx="0" cy="0"/>
+          <a:chOff x="0" y="0"/>
+          <a:chExt cx="0" cy="0"/>
+        </a:xfrm>
+      </p:grpSpPr>
+      <p:sp>
+        <p:nvSpPr>
+          <p:cNvPr id="2" name="제목 1">
+            <a:extLst>
+              <a:ext uri="{FF2B5EF4-FFF2-40B4-BE49-F238E27FC236}">
                 <a16:creationId xmlns:a16="http://schemas.microsoft.com/office/drawing/2014/main" id="{C01E3C15-BBEC-4ECE-CB07-41C6908F1571}"/>
               </a:ext>
             </a:extLst>
@@ -14993,7 +15414,7 @@
           <a:p>
             <a:fld id="{4419BE51-E1DC-4D7D-A982-2D579B035180}" type="slidenum">
               <a:rPr lang="ko-KR" altLang="en-US" smtClean="0"/>
-              <a:t>20</a:t>
+              <a:t>21</a:t>
             </a:fld>
             <a:endParaRPr lang="ko-KR" altLang="en-US"/>
           </a:p>
@@ -16883,7 +17304,7 @@
 </p:sld>
 </file>
 
-<file path=ppt/slides/slide21.xml><?xml version="1.0" encoding="utf-8"?>
+<file path=ppt/slides/slide22.xml><?xml version="1.0" encoding="utf-8"?>
 <p:sld xmlns:a="http://schemas.openxmlformats.org/drawingml/2006/main" xmlns:r="http://schemas.openxmlformats.org/officeDocument/2006/relationships" xmlns:p="http://schemas.openxmlformats.org/presentationml/2006/main">
   <p:cSld>
     <p:spTree>
@@ -16992,7 +17413,7 @@
           <a:p>
             <a:fld id="{4419BE51-E1DC-4D7D-A982-2D579B035180}" type="slidenum">
               <a:rPr lang="ko-KR" altLang="en-US" smtClean="0"/>
-              <a:t>21</a:t>
+              <a:t>22</a:t>
             </a:fld>
             <a:endParaRPr lang="ko-KR" altLang="en-US"/>
           </a:p>
@@ -18214,7 +18635,7 @@
 </p:sld>
 </file>
 
-<file path=ppt/slides/slide22.xml><?xml version="1.0" encoding="utf-8"?>
+<file path=ppt/slides/slide23.xml><?xml version="1.0" encoding="utf-8"?>
 <p:sld xmlns:a="http://schemas.openxmlformats.org/drawingml/2006/main" xmlns:r="http://schemas.openxmlformats.org/officeDocument/2006/relationships" xmlns:p="http://schemas.openxmlformats.org/presentationml/2006/main">
   <p:cSld>
     <p:spTree>
@@ -18561,7 +18982,7 @@
           <a:p>
             <a:fld id="{4419BE51-E1DC-4D7D-A982-2D579B035180}" type="slidenum">
               <a:rPr lang="ko-KR" altLang="en-US" smtClean="0"/>
-              <a:t>22</a:t>
+              <a:t>23</a:t>
             </a:fld>
             <a:endParaRPr lang="ko-KR" altLang="en-US"/>
           </a:p>
@@ -21410,7 +21831,7 @@
 </p:sld>
 </file>
 
-<file path=ppt/slides/slide23.xml><?xml version="1.0" encoding="utf-8"?>
+<file path=ppt/slides/slide24.xml><?xml version="1.0" encoding="utf-8"?>
 <p:sld xmlns:a="http://schemas.openxmlformats.org/drawingml/2006/main" xmlns:r="http://schemas.openxmlformats.org/officeDocument/2006/relationships" xmlns:p="http://schemas.openxmlformats.org/presentationml/2006/main">
   <p:cSld>
     <p:spTree>
@@ -21941,7 +22362,7 @@
           <a:p>
             <a:fld id="{4419BE51-E1DC-4D7D-A982-2D579B035180}" type="slidenum">
               <a:rPr lang="ko-KR" altLang="en-US" smtClean="0"/>
-              <a:t>23</a:t>
+              <a:t>24</a:t>
             </a:fld>
             <a:endParaRPr lang="ko-KR" altLang="en-US"/>
           </a:p>
@@ -24833,7 +25254,7 @@
 </p:sld>
 </file>
 
-<file path=ppt/slides/slide24.xml><?xml version="1.0" encoding="utf-8"?>
+<file path=ppt/slides/slide25.xml><?xml version="1.0" encoding="utf-8"?>
 <p:sld xmlns:a="http://schemas.openxmlformats.org/drawingml/2006/main" xmlns:r="http://schemas.openxmlformats.org/officeDocument/2006/relationships" xmlns:p="http://schemas.openxmlformats.org/presentationml/2006/main">
   <p:cSld>
     <p:spTree>
@@ -24880,6 +25301,14 @@
             <a:r>
               <a:rPr lang="ko-KR" altLang="en-US" dirty="0"/>
               <a:t>데이터 테이블</a:t>
+            </a:r>
+            <a:r>
+              <a:rPr lang="en-US" altLang="ko-KR" dirty="0"/>
+              <a:t>_</a:t>
+            </a:r>
+            <a:r>
+              <a:rPr lang="ko-KR" altLang="en-US" dirty="0"/>
+              <a:t>맵</a:t>
             </a:r>
           </a:p>
         </p:txBody>
@@ -25209,7 +25638,7 @@
           <a:p>
             <a:fld id="{4419BE51-E1DC-4D7D-A982-2D579B035180}" type="slidenum">
               <a:rPr lang="ko-KR" altLang="en-US" smtClean="0"/>
-              <a:t>24</a:t>
+              <a:t>25</a:t>
             </a:fld>
             <a:endParaRPr lang="ko-KR" altLang="en-US"/>
           </a:p>
@@ -25236,7 +25665,7 @@
           <a:bodyPr/>
           <a:lstStyle/>
           <a:p>
-            <a:endParaRPr lang="ko-KR" altLang="en-US"/>
+            <a:endParaRPr lang="ko-KR" altLang="en-US" dirty="0"/>
           </a:p>
         </p:txBody>
       </p:sp>
@@ -26619,7 +27048,7 @@
 </p:sld>
 </file>
 
-<file path=ppt/slides/slide25.xml><?xml version="1.0" encoding="utf-8"?>
+<file path=ppt/slides/slide26.xml><?xml version="1.0" encoding="utf-8"?>
 <p:sld xmlns:a="http://schemas.openxmlformats.org/drawingml/2006/main" xmlns:r="http://schemas.openxmlformats.org/officeDocument/2006/relationships" xmlns:p="http://schemas.openxmlformats.org/presentationml/2006/main">
   <p:cSld>
     <p:spTree>
@@ -26652,14 +27081,29 @@
             <p:ph type="title"/>
           </p:nvPr>
         </p:nvSpPr>
-        <p:spPr/>
+        <p:spPr>
+          <a:xfrm>
+            <a:off x="0" y="0"/>
+            <a:ext cx="5670430" cy="662782"/>
+          </a:xfrm>
+        </p:spPr>
         <p:txBody>
-          <a:bodyPr/>
+          <a:bodyPr>
+            <a:normAutofit fontScale="90000"/>
+          </a:bodyPr>
           <a:lstStyle/>
           <a:p>
             <a:r>
               <a:rPr lang="ko-KR" altLang="en-US" dirty="0"/>
               <a:t>데이터 테이블</a:t>
+            </a:r>
+            <a:r>
+              <a:rPr lang="en-US" altLang="ko-KR" dirty="0"/>
+              <a:t>_NPC,</a:t>
+            </a:r>
+            <a:r>
+              <a:rPr lang="ko-KR" altLang="en-US" dirty="0"/>
+              <a:t>플레이어</a:t>
             </a:r>
           </a:p>
         </p:txBody>
@@ -26680,14 +27124,14 @@
             <p:ph idx="1"/>
             <p:extLst>
               <p:ext uri="{D42A27DB-BD31-4B8C-83A1-F6EECF244321}">
-                <p14:modId xmlns:p14="http://schemas.microsoft.com/office/powerpoint/2010/main" val="2121374885"/>
+                <p14:modId xmlns:p14="http://schemas.microsoft.com/office/powerpoint/2010/main" val="1855978471"/>
               </p:ext>
             </p:extLst>
           </p:nvPr>
         </p:nvGraphicFramePr>
         <p:xfrm>
-          <a:off x="838200" y="1017918"/>
-          <a:ext cx="10515600" cy="5183244"/>
+          <a:off x="838199" y="1063926"/>
+          <a:ext cx="10381896" cy="2337348"/>
         </p:xfrm>
         <a:graphic>
           <a:graphicData uri="http://schemas.openxmlformats.org/drawingml/2006/table">
@@ -26696,59 +27140,66 @@
                 <a:tableStyleId>{5940675A-B579-460E-94D1-54222C63F5DA}</a:tableStyleId>
               </a:tblPr>
               <a:tblGrid>
-                <a:gridCol w="1314450">
+                <a:gridCol w="1153544">
                   <a:extLst>
                     <a:ext uri="{9D8B030D-6E8A-4147-A177-3AD203B41FA5}">
                       <a16:colId xmlns:a16="http://schemas.microsoft.com/office/drawing/2014/main" val="4245382652"/>
                     </a:ext>
                   </a:extLst>
                 </a:gridCol>
-                <a:gridCol w="1314450">
+                <a:gridCol w="1153544">
                   <a:extLst>
                     <a:ext uri="{9D8B030D-6E8A-4147-A177-3AD203B41FA5}">
                       <a16:colId xmlns:a16="http://schemas.microsoft.com/office/drawing/2014/main" val="1933533662"/>
                     </a:ext>
                   </a:extLst>
                 </a:gridCol>
-                <a:gridCol w="1314450">
+                <a:gridCol w="1153544">
                   <a:extLst>
                     <a:ext uri="{9D8B030D-6E8A-4147-A177-3AD203B41FA5}">
                       <a16:colId xmlns:a16="http://schemas.microsoft.com/office/drawing/2014/main" val="33392647"/>
                     </a:ext>
                   </a:extLst>
                 </a:gridCol>
-                <a:gridCol w="1314450">
+                <a:gridCol w="1153544">
                   <a:extLst>
                     <a:ext uri="{9D8B030D-6E8A-4147-A177-3AD203B41FA5}">
                       <a16:colId xmlns:a16="http://schemas.microsoft.com/office/drawing/2014/main" val="3082165443"/>
                     </a:ext>
                   </a:extLst>
                 </a:gridCol>
-                <a:gridCol w="1314450">
-                  <a:extLst>
-                    <a:ext uri="{9D8B030D-6E8A-4147-A177-3AD203B41FA5}">
-                      <a16:colId xmlns:a16="http://schemas.microsoft.com/office/drawing/2014/main" val="312063788"/>
-                    </a:ext>
-                  </a:extLst>
-                </a:gridCol>
-                <a:gridCol w="1314450">
+                <a:gridCol w="1153544">
                   <a:extLst>
                     <a:ext uri="{9D8B030D-6E8A-4147-A177-3AD203B41FA5}">
                       <a16:colId xmlns:a16="http://schemas.microsoft.com/office/drawing/2014/main" val="1142584066"/>
                     </a:ext>
                   </a:extLst>
                 </a:gridCol>
-                <a:gridCol w="1314450">
+                <a:gridCol w="1153544">
                   <a:extLst>
                     <a:ext uri="{9D8B030D-6E8A-4147-A177-3AD203B41FA5}">
                       <a16:colId xmlns:a16="http://schemas.microsoft.com/office/drawing/2014/main" val="4113416892"/>
                     </a:ext>
                   </a:extLst>
                 </a:gridCol>
-                <a:gridCol w="1314450">
+                <a:gridCol w="1153544">
                   <a:extLst>
                     <a:ext uri="{9D8B030D-6E8A-4147-A177-3AD203B41FA5}">
                       <a16:colId xmlns:a16="http://schemas.microsoft.com/office/drawing/2014/main" val="1586902170"/>
+                    </a:ext>
+                  </a:extLst>
+                </a:gridCol>
+                <a:gridCol w="1153544">
+                  <a:extLst>
+                    <a:ext uri="{9D8B030D-6E8A-4147-A177-3AD203B41FA5}">
+                      <a16:colId xmlns:a16="http://schemas.microsoft.com/office/drawing/2014/main" val="3365782907"/>
+                    </a:ext>
+                  </a:extLst>
+                </a:gridCol>
+                <a:gridCol w="1153544">
+                  <a:extLst>
+                    <a:ext uri="{9D8B030D-6E8A-4147-A177-3AD203B41FA5}">
+                      <a16:colId xmlns:a16="http://schemas.microsoft.com/office/drawing/2014/main" val="2323312840"/>
                     </a:ext>
                   </a:extLst>
                 </a:gridCol>
@@ -26780,7 +27231,14 @@
                       </a:br>
                       <a:r>
                         <a:rPr lang="ko-KR" altLang="en-US" dirty="0"/>
-                        <a:t>이동 속도</a:t>
+                        <a:t>이동</a:t>
+                      </a:r>
+                      <a:br>
+                        <a:rPr lang="en-US" altLang="ko-KR" dirty="0"/>
+                      </a:br>
+                      <a:r>
+                        <a:rPr lang="ko-KR" altLang="en-US" dirty="0"/>
+                        <a:t>속도</a:t>
                       </a:r>
                     </a:p>
                   </a:txBody>
@@ -26836,7 +27294,65 @@
                       <a:pPr algn="ctr" latinLnBrk="1"/>
                       <a:r>
                         <a:rPr lang="ko-KR" altLang="en-US" dirty="0"/>
-                        <a:t>사격 속도</a:t>
+                        <a:t>조준</a:t>
+                      </a:r>
+                      <a:br>
+                        <a:rPr lang="en-US" altLang="ko-KR" dirty="0"/>
+                      </a:br>
+                      <a:r>
+                        <a:rPr lang="ko-KR" altLang="en-US" dirty="0"/>
+                        <a:t>범위</a:t>
+                      </a:r>
+                    </a:p>
+                  </a:txBody>
+                  <a:tcPr anchor="ctr"/>
+                </a:tc>
+                <a:tc>
+                  <a:txBody>
+                    <a:bodyPr/>
+                    <a:lstStyle/>
+                    <a:p>
+                      <a:pPr algn="ctr" latinLnBrk="1"/>
+                      <a:r>
+                        <a:rPr lang="ko-KR" altLang="en-US" dirty="0" err="1"/>
+                        <a:t>스테미너</a:t>
+                      </a:r>
+                      <a:endParaRPr lang="ko-KR" altLang="en-US" dirty="0"/>
+                    </a:p>
+                  </a:txBody>
+                  <a:tcPr anchor="ctr"/>
+                </a:tc>
+                <a:tc>
+                  <a:txBody>
+                    <a:bodyPr/>
+                    <a:lstStyle/>
+                    <a:p>
+                      <a:pPr algn="ctr" latinLnBrk="1"/>
+                      <a:r>
+                        <a:rPr lang="en-US" altLang="ko-KR" dirty="0"/>
+                        <a:t>HP</a:t>
+                      </a:r>
+                      <a:endParaRPr lang="ko-KR" altLang="en-US" dirty="0"/>
+                    </a:p>
+                  </a:txBody>
+                  <a:tcPr anchor="ctr"/>
+                </a:tc>
+                <a:tc>
+                  <a:txBody>
+                    <a:bodyPr/>
+                    <a:lstStyle/>
+                    <a:p>
+                      <a:pPr algn="ctr" latinLnBrk="1"/>
+                      <a:r>
+                        <a:rPr lang="ko-KR" altLang="en-US" dirty="0"/>
+                        <a:t>공격</a:t>
+                      </a:r>
+                      <a:br>
+                        <a:rPr lang="en-US" altLang="ko-KR" dirty="0"/>
+                      </a:br>
+                      <a:r>
+                        <a:rPr lang="ko-KR" altLang="en-US" dirty="0"/>
+                        <a:t>데미지</a:t>
                       </a:r>
                     </a:p>
                   </a:txBody>
@@ -26850,30 +27366,22 @@
                       <a:pPr algn="ctr" latinLnBrk="1"/>
                       <a:r>
                         <a:rPr lang="ko-KR" altLang="en-US" dirty="0"/>
-                        <a:t>조준 범위</a:t>
+                        <a:t>기본</a:t>
                       </a:r>
-                    </a:p>
-                  </a:txBody>
-                  <a:tcPr anchor="ctr"/>
-                </a:tc>
-                <a:tc>
-                  <a:txBody>
-                    <a:bodyPr/>
-                    <a:lstStyle/>
-                    <a:p>
-                      <a:pPr algn="ctr" latinLnBrk="1"/>
-                      <a:endParaRPr lang="ko-KR" altLang="en-US" dirty="0"/>
-                    </a:p>
-                  </a:txBody>
-                  <a:tcPr anchor="ctr"/>
-                </a:tc>
-                <a:tc>
-                  <a:txBody>
-                    <a:bodyPr/>
-                    <a:lstStyle/>
-                    <a:p>
-                      <a:pPr algn="ctr" latinLnBrk="1"/>
-                      <a:endParaRPr lang="ko-KR" altLang="en-US"/>
+                      <a:br>
+                        <a:rPr lang="en-US" altLang="ko-KR" dirty="0"/>
+                      </a:br>
+                      <a:r>
+                        <a:rPr lang="ko-KR" altLang="en-US" dirty="0"/>
+                        <a:t>감지</a:t>
+                      </a:r>
+                      <a:br>
+                        <a:rPr lang="en-US" altLang="ko-KR" dirty="0"/>
+                      </a:br>
+                      <a:r>
+                        <a:rPr lang="ko-KR" altLang="en-US" dirty="0"/>
+                        <a:t>범위</a:t>
+                      </a:r>
                     </a:p>
                   </a:txBody>
                   <a:tcPr anchor="ctr"/>
@@ -26912,6 +27420,10 @@
                     <a:lstStyle/>
                     <a:p>
                       <a:pPr algn="ctr" latinLnBrk="1"/>
+                      <a:r>
+                        <a:rPr lang="en-US" altLang="ko-KR" dirty="0"/>
+                        <a:t>3d</a:t>
+                      </a:r>
                       <a:endParaRPr lang="ko-KR" altLang="en-US" dirty="0"/>
                     </a:p>
                   </a:txBody>
@@ -26923,7 +27435,11 @@
                     <a:lstStyle/>
                     <a:p>
                       <a:pPr algn="ctr" latinLnBrk="1"/>
-                      <a:endParaRPr lang="ko-KR" altLang="en-US"/>
+                      <a:r>
+                        <a:rPr lang="en-US" altLang="ko-KR" dirty="0"/>
+                        <a:t>5d</a:t>
+                      </a:r>
+                      <a:endParaRPr lang="ko-KR" altLang="en-US" dirty="0"/>
                     </a:p>
                   </a:txBody>
                   <a:tcPr anchor="ctr"/>
@@ -26934,7 +27450,11 @@
                     <a:lstStyle/>
                     <a:p>
                       <a:pPr algn="ctr" latinLnBrk="1"/>
-                      <a:endParaRPr lang="ko-KR" altLang="en-US"/>
+                      <a:r>
+                        <a:rPr lang="en-US" altLang="ko-KR" dirty="0"/>
+                        <a:t>3d</a:t>
+                      </a:r>
+                      <a:endParaRPr lang="ko-KR" altLang="en-US" dirty="0"/>
                     </a:p>
                   </a:txBody>
                   <a:tcPr anchor="ctr"/>
@@ -26945,7 +27465,11 @@
                     <a:lstStyle/>
                     <a:p>
                       <a:pPr algn="ctr" latinLnBrk="1"/>
-                      <a:endParaRPr lang="ko-KR" altLang="en-US"/>
+                      <a:r>
+                        <a:rPr lang="en-US" altLang="ko-KR" dirty="0"/>
+                        <a:t>10d</a:t>
+                      </a:r>
+                      <a:endParaRPr lang="ko-KR" altLang="en-US" dirty="0"/>
                     </a:p>
                   </a:txBody>
                   <a:tcPr anchor="ctr"/>
@@ -26956,7 +27480,11 @@
                     <a:lstStyle/>
                     <a:p>
                       <a:pPr algn="ctr" latinLnBrk="1"/>
-                      <a:endParaRPr lang="ko-KR" altLang="en-US"/>
+                      <a:r>
+                        <a:rPr lang="en-US" altLang="ko-KR" dirty="0"/>
+                        <a:t>15n</a:t>
+                      </a:r>
+                      <a:endParaRPr lang="ko-KR" altLang="en-US" dirty="0"/>
                     </a:p>
                   </a:txBody>
                   <a:tcPr anchor="ctr"/>
@@ -26967,7 +27495,11 @@
                     <a:lstStyle/>
                     <a:p>
                       <a:pPr algn="ctr" latinLnBrk="1"/>
-                      <a:endParaRPr lang="ko-KR" altLang="en-US"/>
+                      <a:r>
+                        <a:rPr lang="en-US" altLang="ko-KR" dirty="0"/>
+                        <a:t>100n</a:t>
+                      </a:r>
+                      <a:endParaRPr lang="ko-KR" altLang="en-US" dirty="0"/>
                     </a:p>
                   </a:txBody>
                   <a:tcPr anchor="ctr"/>
@@ -26978,7 +27510,22 @@
                     <a:lstStyle/>
                     <a:p>
                       <a:pPr algn="ctr" latinLnBrk="1"/>
-                      <a:endParaRPr lang="ko-KR" altLang="en-US"/>
+                      <a:r>
+                        <a:rPr lang="en-US" altLang="ko-KR" dirty="0"/>
+                        <a:t>10n</a:t>
+                      </a:r>
+                      <a:endParaRPr lang="ko-KR" altLang="en-US" dirty="0"/>
+                    </a:p>
+                  </a:txBody>
+                  <a:tcPr anchor="ctr"/>
+                </a:tc>
+                <a:tc>
+                  <a:txBody>
+                    <a:bodyPr/>
+                    <a:lstStyle/>
+                    <a:p>
+                      <a:pPr algn="ctr" latinLnBrk="1"/>
+                      <a:endParaRPr lang="ko-KR" altLang="en-US" dirty="0"/>
                     </a:p>
                   </a:txBody>
                   <a:tcPr anchor="ctr"/>
@@ -27021,431 +27568,11 @@
                     <a:lstStyle/>
                     <a:p>
                       <a:pPr algn="ctr" latinLnBrk="1"/>
-                      <a:endParaRPr lang="ko-KR" altLang="en-US"/>
-                    </a:p>
-                  </a:txBody>
-                  <a:tcPr anchor="ctr"/>
-                </a:tc>
-                <a:tc>
-                  <a:txBody>
-                    <a:bodyPr/>
-                    <a:lstStyle/>
-                    <a:p>
-                      <a:pPr algn="ctr" latinLnBrk="1"/>
-                      <a:endParaRPr lang="ko-KR" altLang="en-US"/>
-                    </a:p>
-                  </a:txBody>
-                  <a:tcPr anchor="ctr"/>
-                </a:tc>
-                <a:tc>
-                  <a:txBody>
-                    <a:bodyPr/>
-                    <a:lstStyle/>
-                    <a:p>
-                      <a:pPr algn="ctr" latinLnBrk="1"/>
-                      <a:endParaRPr lang="ko-KR" altLang="en-US"/>
-                    </a:p>
-                  </a:txBody>
-                  <a:tcPr anchor="ctr"/>
-                </a:tc>
-                <a:tc>
-                  <a:txBody>
-                    <a:bodyPr/>
-                    <a:lstStyle/>
-                    <a:p>
-                      <a:pPr algn="ctr" latinLnBrk="1"/>
-                      <a:endParaRPr lang="ko-KR" altLang="en-US"/>
-                    </a:p>
-                  </a:txBody>
-                  <a:tcPr anchor="ctr"/>
-                </a:tc>
-                <a:tc>
-                  <a:txBody>
-                    <a:bodyPr/>
-                    <a:lstStyle/>
-                    <a:p>
-                      <a:pPr algn="ctr" latinLnBrk="1"/>
-                      <a:endParaRPr lang="ko-KR" altLang="en-US"/>
-                    </a:p>
-                  </a:txBody>
-                  <a:tcPr anchor="ctr"/>
-                </a:tc>
-                <a:tc>
-                  <a:txBody>
-                    <a:bodyPr/>
-                    <a:lstStyle/>
-                    <a:p>
-                      <a:pPr algn="ctr" latinLnBrk="1"/>
-                      <a:endParaRPr lang="ko-KR" altLang="en-US"/>
-                    </a:p>
-                  </a:txBody>
-                  <a:tcPr anchor="ctr"/>
-                </a:tc>
-                <a:extLst>
-                  <a:ext uri="{0D108BD9-81ED-4DB2-BD59-A6C34878D82A}">
-                    <a16:rowId xmlns:a16="http://schemas.microsoft.com/office/drawing/2014/main" val="3861416552"/>
-                  </a:ext>
-                </a:extLst>
-              </a:tr>
-              <a:tr h="711474">
-                <a:tc>
-                  <a:txBody>
-                    <a:bodyPr/>
-                    <a:lstStyle/>
-                    <a:p>
-                      <a:pPr algn="ctr" latinLnBrk="1"/>
-                      <a:endParaRPr lang="ko-KR" altLang="en-US"/>
-                    </a:p>
-                  </a:txBody>
-                  <a:tcPr anchor="ctr"/>
-                </a:tc>
-                <a:tc>
-                  <a:txBody>
-                    <a:bodyPr/>
-                    <a:lstStyle/>
-                    <a:p>
-                      <a:pPr algn="ctr" latinLnBrk="1"/>
-                      <a:endParaRPr lang="ko-KR" altLang="en-US"/>
-                    </a:p>
-                  </a:txBody>
-                  <a:tcPr anchor="ctr"/>
-                </a:tc>
-                <a:tc>
-                  <a:txBody>
-                    <a:bodyPr/>
-                    <a:lstStyle/>
-                    <a:p>
-                      <a:pPr algn="ctr" latinLnBrk="1"/>
-                      <a:endParaRPr lang="ko-KR" altLang="en-US"/>
-                    </a:p>
-                  </a:txBody>
-                  <a:tcPr anchor="ctr"/>
-                </a:tc>
-                <a:tc>
-                  <a:txBody>
-                    <a:bodyPr/>
-                    <a:lstStyle/>
-                    <a:p>
-                      <a:pPr algn="ctr" latinLnBrk="1"/>
-                      <a:endParaRPr lang="ko-KR" altLang="en-US"/>
-                    </a:p>
-                  </a:txBody>
-                  <a:tcPr anchor="ctr"/>
-                </a:tc>
-                <a:tc>
-                  <a:txBody>
-                    <a:bodyPr/>
-                    <a:lstStyle/>
-                    <a:p>
-                      <a:pPr algn="ctr" latinLnBrk="1"/>
-                      <a:endParaRPr lang="ko-KR" altLang="en-US"/>
-                    </a:p>
-                  </a:txBody>
-                  <a:tcPr anchor="ctr"/>
-                </a:tc>
-                <a:tc>
-                  <a:txBody>
-                    <a:bodyPr/>
-                    <a:lstStyle/>
-                    <a:p>
-                      <a:pPr algn="ctr" latinLnBrk="1"/>
-                      <a:endParaRPr lang="ko-KR" altLang="en-US"/>
-                    </a:p>
-                  </a:txBody>
-                  <a:tcPr anchor="ctr"/>
-                </a:tc>
-                <a:tc>
-                  <a:txBody>
-                    <a:bodyPr/>
-                    <a:lstStyle/>
-                    <a:p>
-                      <a:pPr algn="ctr" latinLnBrk="1"/>
-                      <a:endParaRPr lang="ko-KR" altLang="en-US"/>
-                    </a:p>
-                  </a:txBody>
-                  <a:tcPr anchor="ctr"/>
-                </a:tc>
-                <a:tc>
-                  <a:txBody>
-                    <a:bodyPr/>
-                    <a:lstStyle/>
-                    <a:p>
-                      <a:pPr algn="ctr" latinLnBrk="1"/>
-                      <a:endParaRPr lang="ko-KR" altLang="en-US"/>
-                    </a:p>
-                  </a:txBody>
-                  <a:tcPr anchor="ctr"/>
-                </a:tc>
-                <a:extLst>
-                  <a:ext uri="{0D108BD9-81ED-4DB2-BD59-A6C34878D82A}">
-                    <a16:rowId xmlns:a16="http://schemas.microsoft.com/office/drawing/2014/main" val="1381366608"/>
-                  </a:ext>
-                </a:extLst>
-              </a:tr>
-              <a:tr h="711474">
-                <a:tc>
-                  <a:txBody>
-                    <a:bodyPr/>
-                    <a:lstStyle/>
-                    <a:p>
-                      <a:pPr algn="ctr" latinLnBrk="1"/>
-                      <a:endParaRPr lang="ko-KR" altLang="en-US"/>
-                    </a:p>
-                  </a:txBody>
-                  <a:tcPr anchor="ctr"/>
-                </a:tc>
-                <a:tc>
-                  <a:txBody>
-                    <a:bodyPr/>
-                    <a:lstStyle/>
-                    <a:p>
-                      <a:pPr algn="ctr" latinLnBrk="1"/>
-                      <a:endParaRPr lang="ko-KR" altLang="en-US"/>
-                    </a:p>
-                  </a:txBody>
-                  <a:tcPr anchor="ctr"/>
-                </a:tc>
-                <a:tc>
-                  <a:txBody>
-                    <a:bodyPr/>
-                    <a:lstStyle/>
-                    <a:p>
-                      <a:pPr algn="ctr" latinLnBrk="1"/>
-                      <a:endParaRPr lang="ko-KR" altLang="en-US"/>
-                    </a:p>
-                  </a:txBody>
-                  <a:tcPr anchor="ctr"/>
-                </a:tc>
-                <a:tc>
-                  <a:txBody>
-                    <a:bodyPr/>
-                    <a:lstStyle/>
-                    <a:p>
-                      <a:pPr algn="ctr" latinLnBrk="1"/>
-                      <a:endParaRPr lang="ko-KR" altLang="en-US"/>
-                    </a:p>
-                  </a:txBody>
-                  <a:tcPr anchor="ctr"/>
-                </a:tc>
-                <a:tc>
-                  <a:txBody>
-                    <a:bodyPr/>
-                    <a:lstStyle/>
-                    <a:p>
-                      <a:pPr algn="ctr" latinLnBrk="1"/>
-                      <a:endParaRPr lang="ko-KR" altLang="en-US"/>
-                    </a:p>
-                  </a:txBody>
-                  <a:tcPr anchor="ctr"/>
-                </a:tc>
-                <a:tc>
-                  <a:txBody>
-                    <a:bodyPr/>
-                    <a:lstStyle/>
-                    <a:p>
-                      <a:pPr algn="ctr" latinLnBrk="1"/>
-                      <a:endParaRPr lang="ko-KR" altLang="en-US"/>
-                    </a:p>
-                  </a:txBody>
-                  <a:tcPr anchor="ctr"/>
-                </a:tc>
-                <a:tc>
-                  <a:txBody>
-                    <a:bodyPr/>
-                    <a:lstStyle/>
-                    <a:p>
-                      <a:pPr algn="ctr" latinLnBrk="1"/>
-                      <a:endParaRPr lang="ko-KR" altLang="en-US"/>
-                    </a:p>
-                  </a:txBody>
-                  <a:tcPr anchor="ctr"/>
-                </a:tc>
-                <a:tc>
-                  <a:txBody>
-                    <a:bodyPr/>
-                    <a:lstStyle/>
-                    <a:p>
-                      <a:pPr algn="ctr" latinLnBrk="1"/>
-                      <a:endParaRPr lang="ko-KR" altLang="en-US"/>
-                    </a:p>
-                  </a:txBody>
-                  <a:tcPr anchor="ctr"/>
-                </a:tc>
-                <a:extLst>
-                  <a:ext uri="{0D108BD9-81ED-4DB2-BD59-A6C34878D82A}">
-                    <a16:rowId xmlns:a16="http://schemas.microsoft.com/office/drawing/2014/main" val="2471084017"/>
-                  </a:ext>
-                </a:extLst>
-              </a:tr>
-              <a:tr h="711474">
-                <a:tc>
-                  <a:txBody>
-                    <a:bodyPr/>
-                    <a:lstStyle/>
-                    <a:p>
-                      <a:pPr algn="ctr" latinLnBrk="1"/>
-                      <a:endParaRPr lang="ko-KR" altLang="en-US"/>
-                    </a:p>
-                  </a:txBody>
-                  <a:tcPr anchor="ctr"/>
-                </a:tc>
-                <a:tc>
-                  <a:txBody>
-                    <a:bodyPr/>
-                    <a:lstStyle/>
-                    <a:p>
-                      <a:pPr algn="ctr" latinLnBrk="1"/>
-                      <a:endParaRPr lang="ko-KR" altLang="en-US"/>
-                    </a:p>
-                  </a:txBody>
-                  <a:tcPr anchor="ctr"/>
-                </a:tc>
-                <a:tc>
-                  <a:txBody>
-                    <a:bodyPr/>
-                    <a:lstStyle/>
-                    <a:p>
-                      <a:pPr algn="ctr" latinLnBrk="1"/>
-                      <a:endParaRPr lang="ko-KR" altLang="en-US"/>
-                    </a:p>
-                  </a:txBody>
-                  <a:tcPr anchor="ctr"/>
-                </a:tc>
-                <a:tc>
-                  <a:txBody>
-                    <a:bodyPr/>
-                    <a:lstStyle/>
-                    <a:p>
-                      <a:pPr algn="ctr" latinLnBrk="1"/>
-                      <a:endParaRPr lang="ko-KR" altLang="en-US"/>
-                    </a:p>
-                  </a:txBody>
-                  <a:tcPr anchor="ctr"/>
-                </a:tc>
-                <a:tc>
-                  <a:txBody>
-                    <a:bodyPr/>
-                    <a:lstStyle/>
-                    <a:p>
-                      <a:pPr algn="ctr" latinLnBrk="1"/>
-                      <a:endParaRPr lang="ko-KR" altLang="en-US"/>
-                    </a:p>
-                  </a:txBody>
-                  <a:tcPr anchor="ctr"/>
-                </a:tc>
-                <a:tc>
-                  <a:txBody>
-                    <a:bodyPr/>
-                    <a:lstStyle/>
-                    <a:p>
-                      <a:pPr algn="ctr" latinLnBrk="1"/>
-                      <a:endParaRPr lang="ko-KR" altLang="en-US"/>
-                    </a:p>
-                  </a:txBody>
-                  <a:tcPr anchor="ctr"/>
-                </a:tc>
-                <a:tc>
-                  <a:txBody>
-                    <a:bodyPr/>
-                    <a:lstStyle/>
-                    <a:p>
-                      <a:pPr algn="ctr" latinLnBrk="1"/>
-                      <a:endParaRPr lang="ko-KR" altLang="en-US"/>
-                    </a:p>
-                  </a:txBody>
-                  <a:tcPr anchor="ctr"/>
-                </a:tc>
-                <a:tc>
-                  <a:txBody>
-                    <a:bodyPr/>
-                    <a:lstStyle/>
-                    <a:p>
-                      <a:pPr algn="ctr" latinLnBrk="1"/>
-                      <a:endParaRPr lang="ko-KR" altLang="en-US"/>
-                    </a:p>
-                  </a:txBody>
-                  <a:tcPr anchor="ctr"/>
-                </a:tc>
-                <a:extLst>
-                  <a:ext uri="{0D108BD9-81ED-4DB2-BD59-A6C34878D82A}">
-                    <a16:rowId xmlns:a16="http://schemas.microsoft.com/office/drawing/2014/main" val="316522120"/>
-                  </a:ext>
-                </a:extLst>
-              </a:tr>
-              <a:tr h="711474">
-                <a:tc>
-                  <a:txBody>
-                    <a:bodyPr/>
-                    <a:lstStyle/>
-                    <a:p>
-                      <a:pPr algn="ctr" latinLnBrk="1"/>
-                      <a:endParaRPr lang="ko-KR" altLang="en-US"/>
-                    </a:p>
-                  </a:txBody>
-                  <a:tcPr anchor="ctr"/>
-                </a:tc>
-                <a:tc>
-                  <a:txBody>
-                    <a:bodyPr/>
-                    <a:lstStyle/>
-                    <a:p>
-                      <a:pPr algn="ctr" latinLnBrk="1"/>
-                      <a:endParaRPr lang="ko-KR" altLang="en-US"/>
-                    </a:p>
-                  </a:txBody>
-                  <a:tcPr anchor="ctr"/>
-                </a:tc>
-                <a:tc>
-                  <a:txBody>
-                    <a:bodyPr/>
-                    <a:lstStyle/>
-                    <a:p>
-                      <a:pPr algn="ctr" latinLnBrk="1"/>
-                      <a:endParaRPr lang="ko-KR" altLang="en-US"/>
-                    </a:p>
-                  </a:txBody>
-                  <a:tcPr anchor="ctr"/>
-                </a:tc>
-                <a:tc>
-                  <a:txBody>
-                    <a:bodyPr/>
-                    <a:lstStyle/>
-                    <a:p>
-                      <a:pPr algn="ctr" latinLnBrk="1"/>
-                      <a:endParaRPr lang="ko-KR" altLang="en-US"/>
-                    </a:p>
-                  </a:txBody>
-                  <a:tcPr anchor="ctr"/>
-                </a:tc>
-                <a:tc>
-                  <a:txBody>
-                    <a:bodyPr/>
-                    <a:lstStyle/>
-                    <a:p>
-                      <a:pPr algn="ctr" latinLnBrk="1"/>
-                      <a:endParaRPr lang="ko-KR" altLang="en-US"/>
-                    </a:p>
-                  </a:txBody>
-                  <a:tcPr anchor="ctr"/>
-                </a:tc>
-                <a:tc>
-                  <a:txBody>
-                    <a:bodyPr/>
-                    <a:lstStyle/>
-                    <a:p>
-                      <a:pPr algn="ctr" latinLnBrk="1"/>
-                      <a:endParaRPr lang="ko-KR" altLang="en-US"/>
-                    </a:p>
-                  </a:txBody>
-                  <a:tcPr anchor="ctr"/>
-                </a:tc>
-                <a:tc>
-                  <a:txBody>
-                    <a:bodyPr/>
-                    <a:lstStyle/>
-                    <a:p>
-                      <a:pPr algn="ctr" latinLnBrk="1"/>
-                      <a:endParaRPr lang="ko-KR" altLang="en-US"/>
+                      <a:r>
+                        <a:rPr lang="en-US" altLang="ko-KR" dirty="0"/>
+                        <a:t>8d</a:t>
+                      </a:r>
+                      <a:endParaRPr lang="ko-KR" altLang="en-US" dirty="0"/>
                     </a:p>
                   </a:txBody>
                   <a:tcPr anchor="ctr"/>
@@ -27461,9 +27588,80 @@
                   </a:txBody>
                   <a:tcPr anchor="ctr"/>
                 </a:tc>
+                <a:tc>
+                  <a:txBody>
+                    <a:bodyPr/>
+                    <a:lstStyle/>
+                    <a:p>
+                      <a:pPr algn="ctr" latinLnBrk="1"/>
+                      <a:endParaRPr lang="ko-KR" altLang="en-US" dirty="0"/>
+                    </a:p>
+                  </a:txBody>
+                  <a:tcPr anchor="ctr"/>
+                </a:tc>
+                <a:tc>
+                  <a:txBody>
+                    <a:bodyPr/>
+                    <a:lstStyle/>
+                    <a:p>
+                      <a:pPr algn="ctr" latinLnBrk="1"/>
+                      <a:endParaRPr lang="ko-KR" altLang="en-US" dirty="0"/>
+                    </a:p>
+                  </a:txBody>
+                  <a:tcPr anchor="ctr"/>
+                </a:tc>
+                <a:tc>
+                  <a:txBody>
+                    <a:bodyPr/>
+                    <a:lstStyle/>
+                    <a:p>
+                      <a:pPr algn="ctr" latinLnBrk="1"/>
+                      <a:r>
+                        <a:rPr lang="en-US" altLang="ko-KR" dirty="0"/>
+                        <a:t>5n</a:t>
+                      </a:r>
+                      <a:endParaRPr lang="ko-KR" altLang="en-US" dirty="0"/>
+                    </a:p>
+                  </a:txBody>
+                  <a:tcPr anchor="ctr"/>
+                </a:tc>
+                <a:tc>
+                  <a:txBody>
+                    <a:bodyPr/>
+                    <a:lstStyle/>
+                    <a:p>
+                      <a:pPr algn="ctr" latinLnBrk="1"/>
+                      <a:r>
+                        <a:rPr lang="en-US" altLang="ko-KR" dirty="0"/>
+                        <a:t>0</a:t>
+                      </a:r>
+                      <a:endParaRPr lang="ko-KR" altLang="en-US" dirty="0"/>
+                    </a:p>
+                  </a:txBody>
+                  <a:tcPr anchor="ctr"/>
+                </a:tc>
+                <a:tc>
+                  <a:txBody>
+                    <a:bodyPr/>
+                    <a:lstStyle/>
+                    <a:p>
+                      <a:pPr algn="ctr" latinLnBrk="1"/>
+                      <a:r>
+                        <a:rPr lang="ko-KR" altLang="en-US" dirty="0"/>
+                        <a:t>반경 </a:t>
+                      </a:r>
+                      <a:r>
+                        <a:rPr lang="en-US" altLang="ko-KR" dirty="0"/>
+                        <a:t>10d</a:t>
+                      </a:r>
+                      <a:endParaRPr lang="ko-KR" altLang="en-US" dirty="0"/>
+                    </a:p>
+                  </a:txBody>
+                  <a:tcPr anchor="ctr"/>
+                </a:tc>
                 <a:extLst>
                   <a:ext uri="{0D108BD9-81ED-4DB2-BD59-A6C34878D82A}">
-                    <a16:rowId xmlns:a16="http://schemas.microsoft.com/office/drawing/2014/main" val="1238568261"/>
+                    <a16:rowId xmlns:a16="http://schemas.microsoft.com/office/drawing/2014/main" val="3861416552"/>
                   </a:ext>
                 </a:extLst>
               </a:tr>
@@ -27494,7 +27692,7 @@
           <a:p>
             <a:fld id="{492E84DF-9BBC-4DFC-AB92-EB3DF1902948}" type="datetime1">
               <a:rPr lang="en-US" altLang="ko-KR" smtClean="0"/>
-              <a:t>9/26/2026</a:t>
+              <a:t>9/27/2026</a:t>
             </a:fld>
             <a:endParaRPr lang="ko-KR" altLang="en-US"/>
           </a:p>
@@ -27523,7 +27721,7 @@
           <a:p>
             <a:fld id="{4419BE51-E1DC-4D7D-A982-2D579B035180}" type="slidenum">
               <a:rPr lang="ko-KR" altLang="en-US" smtClean="0"/>
-              <a:t>25</a:t>
+              <a:t>26</a:t>
             </a:fld>
             <a:endParaRPr lang="ko-KR" altLang="en-US"/>
           </a:p>
@@ -27554,6 +27752,472 @@
           </a:p>
         </p:txBody>
       </p:sp>
+      <p:cxnSp>
+        <p:nvCxnSpPr>
+          <p:cNvPr id="4" name="직선 연결선 3">
+            <a:extLst>
+              <a:ext uri="{FF2B5EF4-FFF2-40B4-BE49-F238E27FC236}">
+                <a16:creationId xmlns:a16="http://schemas.microsoft.com/office/drawing/2014/main" id="{5C7EA355-89BE-1583-EC30-7F9EE2A3933C}"/>
+              </a:ext>
+            </a:extLst>
+          </p:cNvPr>
+          <p:cNvCxnSpPr>
+            <a:cxnSpLocks/>
+          </p:cNvCxnSpPr>
+          <p:nvPr/>
+        </p:nvCxnSpPr>
+        <p:spPr>
+          <a:xfrm>
+            <a:off x="1986359" y="2689196"/>
+            <a:ext cx="1169988" cy="711200"/>
+          </a:xfrm>
+          <a:prstGeom prst="line">
+            <a:avLst/>
+          </a:prstGeom>
+          <a:ln>
+            <a:solidFill>
+              <a:schemeClr val="tx1"/>
+            </a:solidFill>
+          </a:ln>
+        </p:spPr>
+        <p:style>
+          <a:lnRef idx="1">
+            <a:schemeClr val="accent1"/>
+          </a:lnRef>
+          <a:fillRef idx="0">
+            <a:schemeClr val="accent1"/>
+          </a:fillRef>
+          <a:effectRef idx="0">
+            <a:schemeClr val="accent1"/>
+          </a:effectRef>
+          <a:fontRef idx="minor">
+            <a:schemeClr val="tx1"/>
+          </a:fontRef>
+        </p:style>
+      </p:cxnSp>
+      <p:cxnSp>
+        <p:nvCxnSpPr>
+          <p:cNvPr id="13" name="직선 연결선 12">
+            <a:extLst>
+              <a:ext uri="{FF2B5EF4-FFF2-40B4-BE49-F238E27FC236}">
+                <a16:creationId xmlns:a16="http://schemas.microsoft.com/office/drawing/2014/main" id="{65FC984A-5A55-996D-9B41-49BA08E8AD89}"/>
+              </a:ext>
+            </a:extLst>
+          </p:cNvPr>
+          <p:cNvCxnSpPr>
+            <a:cxnSpLocks/>
+          </p:cNvCxnSpPr>
+          <p:nvPr/>
+        </p:nvCxnSpPr>
+        <p:spPr>
+          <a:xfrm>
+            <a:off x="4289336" y="2689196"/>
+            <a:ext cx="1169988" cy="711200"/>
+          </a:xfrm>
+          <a:prstGeom prst="line">
+            <a:avLst/>
+          </a:prstGeom>
+          <a:ln>
+            <a:solidFill>
+              <a:schemeClr val="tx1"/>
+            </a:solidFill>
+          </a:ln>
+        </p:spPr>
+        <p:style>
+          <a:lnRef idx="1">
+            <a:schemeClr val="accent1"/>
+          </a:lnRef>
+          <a:fillRef idx="0">
+            <a:schemeClr val="accent1"/>
+          </a:fillRef>
+          <a:effectRef idx="0">
+            <a:schemeClr val="accent1"/>
+          </a:effectRef>
+          <a:fontRef idx="minor">
+            <a:schemeClr val="tx1"/>
+          </a:fontRef>
+        </p:style>
+      </p:cxnSp>
+      <p:cxnSp>
+        <p:nvCxnSpPr>
+          <p:cNvPr id="14" name="직선 연결선 13">
+            <a:extLst>
+              <a:ext uri="{FF2B5EF4-FFF2-40B4-BE49-F238E27FC236}">
+                <a16:creationId xmlns:a16="http://schemas.microsoft.com/office/drawing/2014/main" id="{1110FD23-CDD4-BBA8-2831-2623D3B5413B}"/>
+              </a:ext>
+            </a:extLst>
+          </p:cNvPr>
+          <p:cNvCxnSpPr>
+            <a:cxnSpLocks/>
+          </p:cNvCxnSpPr>
+          <p:nvPr/>
+        </p:nvCxnSpPr>
+        <p:spPr>
+          <a:xfrm>
+            <a:off x="5444153" y="2689196"/>
+            <a:ext cx="1169988" cy="711200"/>
+          </a:xfrm>
+          <a:prstGeom prst="line">
+            <a:avLst/>
+          </a:prstGeom>
+          <a:ln>
+            <a:solidFill>
+              <a:schemeClr val="tx1"/>
+            </a:solidFill>
+          </a:ln>
+        </p:spPr>
+        <p:style>
+          <a:lnRef idx="1">
+            <a:schemeClr val="accent1"/>
+          </a:lnRef>
+          <a:fillRef idx="0">
+            <a:schemeClr val="accent1"/>
+          </a:fillRef>
+          <a:effectRef idx="0">
+            <a:schemeClr val="accent1"/>
+          </a:effectRef>
+          <a:fontRef idx="minor">
+            <a:schemeClr val="tx1"/>
+          </a:fontRef>
+        </p:style>
+      </p:cxnSp>
+      <p:cxnSp>
+        <p:nvCxnSpPr>
+          <p:cNvPr id="15" name="직선 연결선 14">
+            <a:extLst>
+              <a:ext uri="{FF2B5EF4-FFF2-40B4-BE49-F238E27FC236}">
+                <a16:creationId xmlns:a16="http://schemas.microsoft.com/office/drawing/2014/main" id="{5F28E94C-307E-9FA9-9149-C715614331E2}"/>
+              </a:ext>
+            </a:extLst>
+          </p:cNvPr>
+          <p:cNvCxnSpPr>
+            <a:cxnSpLocks/>
+          </p:cNvCxnSpPr>
+          <p:nvPr/>
+        </p:nvCxnSpPr>
+        <p:spPr>
+          <a:xfrm>
+            <a:off x="6598970" y="2689196"/>
+            <a:ext cx="1169988" cy="711200"/>
+          </a:xfrm>
+          <a:prstGeom prst="line">
+            <a:avLst/>
+          </a:prstGeom>
+          <a:ln>
+            <a:solidFill>
+              <a:schemeClr val="tx1"/>
+            </a:solidFill>
+          </a:ln>
+        </p:spPr>
+        <p:style>
+          <a:lnRef idx="1">
+            <a:schemeClr val="accent1"/>
+          </a:lnRef>
+          <a:fillRef idx="0">
+            <a:schemeClr val="accent1"/>
+          </a:fillRef>
+          <a:effectRef idx="0">
+            <a:schemeClr val="accent1"/>
+          </a:effectRef>
+          <a:fontRef idx="minor">
+            <a:schemeClr val="tx1"/>
+          </a:fontRef>
+        </p:style>
+      </p:cxnSp>
+      <p:cxnSp>
+        <p:nvCxnSpPr>
+          <p:cNvPr id="16" name="직선 연결선 15">
+            <a:extLst>
+              <a:ext uri="{FF2B5EF4-FFF2-40B4-BE49-F238E27FC236}">
+                <a16:creationId xmlns:a16="http://schemas.microsoft.com/office/drawing/2014/main" id="{C3B9C742-06A7-5272-31E7-17824AE017D3}"/>
+              </a:ext>
+            </a:extLst>
+          </p:cNvPr>
+          <p:cNvCxnSpPr>
+            <a:cxnSpLocks/>
+          </p:cNvCxnSpPr>
+          <p:nvPr/>
+        </p:nvCxnSpPr>
+        <p:spPr>
+          <a:xfrm>
+            <a:off x="10050107" y="1977996"/>
+            <a:ext cx="1169988" cy="711200"/>
+          </a:xfrm>
+          <a:prstGeom prst="line">
+            <a:avLst/>
+          </a:prstGeom>
+          <a:ln>
+            <a:solidFill>
+              <a:schemeClr val="tx1"/>
+            </a:solidFill>
+          </a:ln>
+        </p:spPr>
+        <p:style>
+          <a:lnRef idx="1">
+            <a:schemeClr val="accent1"/>
+          </a:lnRef>
+          <a:fillRef idx="0">
+            <a:schemeClr val="accent1"/>
+          </a:fillRef>
+          <a:effectRef idx="0">
+            <a:schemeClr val="accent1"/>
+          </a:effectRef>
+          <a:fontRef idx="minor">
+            <a:schemeClr val="tx1"/>
+          </a:fontRef>
+        </p:style>
+      </p:cxnSp>
+      <p:graphicFrame>
+        <p:nvGraphicFramePr>
+          <p:cNvPr id="17" name="내용 개체 틀 1">
+            <a:extLst>
+              <a:ext uri="{FF2B5EF4-FFF2-40B4-BE49-F238E27FC236}">
+                <a16:creationId xmlns:a16="http://schemas.microsoft.com/office/drawing/2014/main" id="{72BD6EC9-1064-D057-14C5-E0E40C8946A9}"/>
+              </a:ext>
+            </a:extLst>
+          </p:cNvPr>
+          <p:cNvGraphicFramePr>
+            <a:graphicFrameLocks/>
+          </p:cNvGraphicFramePr>
+          <p:nvPr>
+            <p:extLst>
+              <p:ext uri="{D42A27DB-BD31-4B8C-83A1-F6EECF244321}">
+                <p14:modId xmlns:p14="http://schemas.microsoft.com/office/powerpoint/2010/main" val="1280000920"/>
+              </p:ext>
+            </p:extLst>
+          </p:nvPr>
+        </p:nvGraphicFramePr>
+        <p:xfrm>
+          <a:off x="841037" y="3400396"/>
+          <a:ext cx="3460632" cy="2337348"/>
+        </p:xfrm>
+        <a:graphic>
+          <a:graphicData uri="http://schemas.openxmlformats.org/drawingml/2006/table">
+            <a:tbl>
+              <a:tblPr firstRow="1" bandRow="1">
+                <a:tableStyleId>{5940675A-B579-460E-94D1-54222C63F5DA}</a:tableStyleId>
+              </a:tblPr>
+              <a:tblGrid>
+                <a:gridCol w="1153544">
+                  <a:extLst>
+                    <a:ext uri="{9D8B030D-6E8A-4147-A177-3AD203B41FA5}">
+                      <a16:colId xmlns:a16="http://schemas.microsoft.com/office/drawing/2014/main" val="4245382652"/>
+                    </a:ext>
+                  </a:extLst>
+                </a:gridCol>
+                <a:gridCol w="1153544">
+                  <a:extLst>
+                    <a:ext uri="{9D8B030D-6E8A-4147-A177-3AD203B41FA5}">
+                      <a16:colId xmlns:a16="http://schemas.microsoft.com/office/drawing/2014/main" val="1933533662"/>
+                    </a:ext>
+                  </a:extLst>
+                </a:gridCol>
+                <a:gridCol w="1153544">
+                  <a:extLst>
+                    <a:ext uri="{9D8B030D-6E8A-4147-A177-3AD203B41FA5}">
+                      <a16:colId xmlns:a16="http://schemas.microsoft.com/office/drawing/2014/main" val="33392647"/>
+                    </a:ext>
+                  </a:extLst>
+                </a:gridCol>
+              </a:tblGrid>
+              <a:tr h="711474">
+                <a:tc>
+                  <a:txBody>
+                    <a:bodyPr/>
+                    <a:lstStyle/>
+                    <a:p>
+                      <a:pPr algn="ctr" latinLnBrk="1"/>
+                      <a:endParaRPr lang="ko-KR" altLang="en-US" dirty="0"/>
+                    </a:p>
+                  </a:txBody>
+                  <a:tcPr anchor="ctr"/>
+                </a:tc>
+                <a:tc>
+                  <a:txBody>
+                    <a:bodyPr/>
+                    <a:lstStyle/>
+                    <a:p>
+                      <a:pPr algn="ctr" latinLnBrk="1"/>
+                      <a:r>
+                        <a:rPr lang="ko-KR" altLang="en-US" dirty="0"/>
+                        <a:t>크기</a:t>
+                      </a:r>
+                      <a:br>
+                        <a:rPr lang="en-US" altLang="ko-KR" dirty="0"/>
+                      </a:br>
+                      <a:r>
+                        <a:rPr lang="en-US" altLang="ko-KR" dirty="0"/>
+                        <a:t>(</a:t>
+                      </a:r>
+                      <a:r>
+                        <a:rPr lang="ko-KR" altLang="en-US" dirty="0"/>
+                        <a:t>높이</a:t>
+                      </a:r>
+                      <a:r>
+                        <a:rPr lang="en-US" altLang="ko-KR" dirty="0"/>
+                        <a:t>)</a:t>
+                      </a:r>
+                      <a:endParaRPr lang="ko-KR" altLang="en-US" dirty="0"/>
+                    </a:p>
+                  </a:txBody>
+                  <a:tcPr anchor="ctr"/>
+                </a:tc>
+                <a:tc>
+                  <a:txBody>
+                    <a:bodyPr/>
+                    <a:lstStyle/>
+                    <a:p>
+                      <a:pPr algn="ctr" latinLnBrk="1"/>
+                      <a:r>
+                        <a:rPr lang="ko-KR" altLang="en-US" dirty="0"/>
+                        <a:t>크기</a:t>
+                      </a:r>
+                      <a:br>
+                        <a:rPr lang="en-US" altLang="ko-KR" dirty="0"/>
+                      </a:br>
+                      <a:r>
+                        <a:rPr lang="en-US" altLang="ko-KR" dirty="0"/>
+                        <a:t>(</a:t>
+                      </a:r>
+                      <a:r>
+                        <a:rPr lang="ko-KR" altLang="en-US" dirty="0"/>
+                        <a:t>가로</a:t>
+                      </a:r>
+                      <a:br>
+                        <a:rPr lang="en-US" altLang="ko-KR" dirty="0"/>
+                      </a:br>
+                      <a:r>
+                        <a:rPr lang="ko-KR" altLang="en-US" dirty="0"/>
+                        <a:t>세로</a:t>
+                      </a:r>
+                      <a:r>
+                        <a:rPr lang="en-US" altLang="ko-KR" dirty="0"/>
+                        <a:t>)</a:t>
+                      </a:r>
+                      <a:endParaRPr lang="ko-KR" altLang="en-US" dirty="0"/>
+                    </a:p>
+                  </a:txBody>
+                  <a:tcPr anchor="ctr"/>
+                </a:tc>
+                <a:extLst>
+                  <a:ext uri="{0D108BD9-81ED-4DB2-BD59-A6C34878D82A}">
+                    <a16:rowId xmlns:a16="http://schemas.microsoft.com/office/drawing/2014/main" val="3362337053"/>
+                  </a:ext>
+                </a:extLst>
+              </a:tr>
+              <a:tr h="711474">
+                <a:tc>
+                  <a:txBody>
+                    <a:bodyPr/>
+                    <a:lstStyle/>
+                    <a:p>
+                      <a:pPr algn="ctr" latinLnBrk="1"/>
+                      <a:r>
+                        <a:rPr lang="ko-KR" altLang="en-US" dirty="0"/>
+                        <a:t>플레이어</a:t>
+                      </a:r>
+                      <a:br>
+                        <a:rPr lang="en-US" altLang="ko-KR" dirty="0"/>
+                      </a:br>
+                      <a:r>
+                        <a:rPr lang="ko-KR" altLang="en-US" dirty="0"/>
+                        <a:t>캐릭터</a:t>
+                      </a:r>
+                    </a:p>
+                  </a:txBody>
+                  <a:tcPr anchor="ctr"/>
+                </a:tc>
+                <a:tc>
+                  <a:txBody>
+                    <a:bodyPr/>
+                    <a:lstStyle/>
+                    <a:p>
+                      <a:pPr algn="ctr" latinLnBrk="1"/>
+                      <a:r>
+                        <a:rPr lang="en-US" altLang="ko-KR" dirty="0"/>
+                        <a:t>2.5d</a:t>
+                      </a:r>
+                      <a:endParaRPr lang="ko-KR" altLang="en-US" dirty="0"/>
+                    </a:p>
+                  </a:txBody>
+                  <a:tcPr anchor="ctr"/>
+                </a:tc>
+                <a:tc>
+                  <a:txBody>
+                    <a:bodyPr/>
+                    <a:lstStyle/>
+                    <a:p>
+                      <a:pPr algn="ctr" latinLnBrk="1"/>
+                      <a:r>
+                        <a:rPr lang="en-US" altLang="ko-KR" dirty="0"/>
+                        <a:t>1d</a:t>
+                      </a:r>
+                      <a:endParaRPr lang="ko-KR" altLang="en-US" dirty="0"/>
+                    </a:p>
+                  </a:txBody>
+                  <a:tcPr anchor="ctr"/>
+                </a:tc>
+                <a:extLst>
+                  <a:ext uri="{0D108BD9-81ED-4DB2-BD59-A6C34878D82A}">
+                    <a16:rowId xmlns:a16="http://schemas.microsoft.com/office/drawing/2014/main" val="2546568347"/>
+                  </a:ext>
+                </a:extLst>
+              </a:tr>
+              <a:tr h="711474">
+                <a:tc>
+                  <a:txBody>
+                    <a:bodyPr/>
+                    <a:lstStyle/>
+                    <a:p>
+                      <a:pPr algn="ctr" latinLnBrk="1"/>
+                      <a:r>
+                        <a:rPr lang="ko-KR" altLang="en-US" dirty="0"/>
+                        <a:t>벌</a:t>
+                      </a:r>
+                    </a:p>
+                  </a:txBody>
+                  <a:tcPr anchor="ctr"/>
+                </a:tc>
+                <a:tc>
+                  <a:txBody>
+                    <a:bodyPr/>
+                    <a:lstStyle/>
+                    <a:p>
+                      <a:pPr algn="ctr" latinLnBrk="1"/>
+                      <a:r>
+                        <a:rPr lang="en-US" altLang="ko-KR" dirty="0"/>
+                        <a:t>.25d</a:t>
+                      </a:r>
+                      <a:endParaRPr lang="ko-KR" altLang="en-US" dirty="0"/>
+                    </a:p>
+                  </a:txBody>
+                  <a:tcPr anchor="ctr"/>
+                </a:tc>
+                <a:tc>
+                  <a:txBody>
+                    <a:bodyPr/>
+                    <a:lstStyle/>
+                    <a:p>
+                      <a:pPr algn="ctr" latinLnBrk="1"/>
+                      <a:r>
+                        <a:rPr lang="en-US" altLang="ko-KR" dirty="0"/>
+                        <a:t>.25d</a:t>
+                      </a:r>
+                      <a:endParaRPr lang="ko-KR" altLang="en-US" dirty="0"/>
+                    </a:p>
+                  </a:txBody>
+                  <a:tcPr anchor="ctr"/>
+                </a:tc>
+                <a:extLst>
+                  <a:ext uri="{0D108BD9-81ED-4DB2-BD59-A6C34878D82A}">
+                    <a16:rowId xmlns:a16="http://schemas.microsoft.com/office/drawing/2014/main" val="3861416552"/>
+                  </a:ext>
+                </a:extLst>
+              </a:tr>
+            </a:tbl>
+          </a:graphicData>
+        </a:graphic>
+      </p:graphicFrame>
     </p:spTree>
     <p:extLst>
       <p:ext uri="{BB962C8B-B14F-4D97-AF65-F5344CB8AC3E}">
@@ -27567,7 +28231,7 @@
 </p:sld>
 </file>
 
-<file path=ppt/slides/slide26.xml><?xml version="1.0" encoding="utf-8"?>
+<file path=ppt/slides/slide27.xml><?xml version="1.0" encoding="utf-8"?>
 <p:sld xmlns:a="http://schemas.openxmlformats.org/drawingml/2006/main" xmlns:r="http://schemas.openxmlformats.org/officeDocument/2006/relationships" xmlns:p="http://schemas.openxmlformats.org/presentationml/2006/main">
   <p:cSld>
     <p:spTree>
@@ -27651,7 +28315,7 @@
 </p:sld>
 </file>
 
-<file path=ppt/slides/slide27.xml><?xml version="1.0" encoding="utf-8"?>
+<file path=ppt/slides/slide28.xml><?xml version="1.0" encoding="utf-8"?>
 <p:sld xmlns:a="http://schemas.openxmlformats.org/drawingml/2006/main" xmlns:r="http://schemas.openxmlformats.org/officeDocument/2006/relationships" xmlns:p="http://schemas.openxmlformats.org/presentationml/2006/main">
   <p:cSld>
     <p:spTree>
@@ -29523,7 +30187,7 @@
 </p:sld>
 </file>
 
-<file path=ppt/slides/slide28.xml><?xml version="1.0" encoding="utf-8"?>
+<file path=ppt/slides/slide29.xml><?xml version="1.0" encoding="utf-8"?>
 <p:sld xmlns:a="http://schemas.openxmlformats.org/drawingml/2006/main" xmlns:r="http://schemas.openxmlformats.org/officeDocument/2006/relationships" xmlns:p="http://schemas.openxmlformats.org/presentationml/2006/main">
   <p:cSld>
     <p:spTree>
@@ -33107,358 +33771,6 @@
 </p:sld>
 </file>
 
-<file path=ppt/slides/slide29.xml><?xml version="1.0" encoding="utf-8"?>
-<p:sld xmlns:a="http://schemas.openxmlformats.org/drawingml/2006/main" xmlns:r="http://schemas.openxmlformats.org/officeDocument/2006/relationships" xmlns:p="http://schemas.openxmlformats.org/presentationml/2006/main">
-  <p:cSld>
-    <p:spTree>
-      <p:nvGrpSpPr>
-        <p:cNvPr id="1" name=""/>
-        <p:cNvGrpSpPr/>
-        <p:nvPr/>
-      </p:nvGrpSpPr>
-      <p:grpSpPr>
-        <a:xfrm>
-          <a:off x="0" y="0"/>
-          <a:ext cx="0" cy="0"/>
-          <a:chOff x="0" y="0"/>
-          <a:chExt cx="0" cy="0"/>
-        </a:xfrm>
-      </p:grpSpPr>
-      <p:sp>
-        <p:nvSpPr>
-          <p:cNvPr id="8" name="제목 7">
-            <a:extLst>
-              <a:ext uri="{FF2B5EF4-FFF2-40B4-BE49-F238E27FC236}">
-                <a16:creationId xmlns:a16="http://schemas.microsoft.com/office/drawing/2014/main" id="{53B8EAFD-03FA-8944-B1DF-F230D2C49F57}"/>
-              </a:ext>
-            </a:extLst>
-          </p:cNvPr>
-          <p:cNvSpPr>
-            <a:spLocks noGrp="1"/>
-          </p:cNvSpPr>
-          <p:nvPr>
-            <p:ph type="title"/>
-          </p:nvPr>
-        </p:nvSpPr>
-        <p:spPr/>
-        <p:txBody>
-          <a:bodyPr/>
-          <a:lstStyle/>
-          <a:p>
-            <a:r>
-              <a:rPr lang="ko-KR" altLang="en-US" dirty="0"/>
-              <a:t>이미지 자료 출처</a:t>
-            </a:r>
-          </a:p>
-        </p:txBody>
-      </p:sp>
-      <p:sp>
-        <p:nvSpPr>
-          <p:cNvPr id="9" name="내용 개체 틀 8">
-            <a:extLst>
-              <a:ext uri="{FF2B5EF4-FFF2-40B4-BE49-F238E27FC236}">
-                <a16:creationId xmlns:a16="http://schemas.microsoft.com/office/drawing/2014/main" id="{D8BD448A-07B9-B4A3-5EB1-9258F8A869C7}"/>
-              </a:ext>
-            </a:extLst>
-          </p:cNvPr>
-          <p:cNvSpPr>
-            <a:spLocks noGrp="1"/>
-          </p:cNvSpPr>
-          <p:nvPr>
-            <p:ph idx="1"/>
-          </p:nvPr>
-        </p:nvSpPr>
-        <p:spPr>
-          <a:xfrm>
-            <a:off x="838200" y="891396"/>
-            <a:ext cx="10515600" cy="5285567"/>
-          </a:xfrm>
-        </p:spPr>
-        <p:txBody>
-          <a:bodyPr>
-            <a:normAutofit/>
-          </a:bodyPr>
-          <a:lstStyle/>
-          <a:p>
-            <a:r>
-              <a:rPr lang="ko-KR" altLang="en-US" sz="1600" dirty="0"/>
-              <a:t>자료</a:t>
-            </a:r>
-            <a:r>
-              <a:rPr lang="en-US" altLang="ko-KR" sz="1600" dirty="0"/>
-              <a:t>1 </a:t>
-            </a:r>
-            <a:r>
-              <a:rPr lang="ko-KR" altLang="en-US" sz="1600" dirty="0" err="1"/>
-              <a:t>플레임</a:t>
-            </a:r>
-            <a:r>
-              <a:rPr lang="en-US" altLang="ko-KR" sz="1600" dirty="0"/>
-              <a:t>&lt;</a:t>
-            </a:r>
-            <a:r>
-              <a:rPr lang="ko-KR" altLang="en-US" sz="1600" dirty="0"/>
-              <a:t>나 배달 </a:t>
-            </a:r>
-            <a:r>
-              <a:rPr lang="ko-KR" altLang="en-US" sz="1600" dirty="0" err="1"/>
-              <a:t>안해</a:t>
-            </a:r>
-            <a:r>
-              <a:rPr lang="en-US" altLang="ko-KR" sz="1600" dirty="0"/>
-              <a:t>&gt;</a:t>
-            </a:r>
-            <a:r>
-              <a:rPr lang="ko-KR" altLang="en-US" sz="1600" dirty="0"/>
-              <a:t>영상</a:t>
-            </a:r>
-            <a:endParaRPr lang="en-US" altLang="ko-KR" sz="1600" dirty="0"/>
-          </a:p>
-          <a:p>
-            <a:r>
-              <a:rPr lang="ko-KR" altLang="en-US" sz="1600" dirty="0"/>
-              <a:t>자료</a:t>
-            </a:r>
-            <a:r>
-              <a:rPr lang="en-US" altLang="ko-KR" sz="1600" dirty="0"/>
-              <a:t>2  </a:t>
-            </a:r>
-            <a:r>
-              <a:rPr lang="en-US" altLang="ko-KR" sz="1600" dirty="0">
-                <a:hlinkClick r:id="rId2"/>
-              </a:rPr>
-              <a:t>https://namu.wiki/w/%EB%8F%99%EB%AC%BC%EC%9D%98%20%EC%88%B2%20%EC%8B%9C%EB%A6%AC%EC%A6%88/%EC%9D%BC%EB%B0%98%20%EC%A3%BC%EB%AF%BC/%EA%B3%B0</a:t>
-            </a:r>
-            <a:endParaRPr lang="en-US" altLang="ko-KR" sz="1600" dirty="0"/>
-          </a:p>
-          <a:p>
-            <a:r>
-              <a:rPr lang="ko-KR" altLang="en-US" sz="1600" dirty="0"/>
-              <a:t>자료</a:t>
-            </a:r>
-            <a:r>
-              <a:rPr lang="en-US" altLang="ko-KR" sz="1600" dirty="0"/>
-              <a:t>3 </a:t>
-            </a:r>
-            <a:r>
-              <a:rPr lang="en-US" altLang="ko-KR" sz="1600" dirty="0">
-                <a:hlinkClick r:id="rId3"/>
-              </a:rPr>
-              <a:t>https://www.reddit.com/r/PartyAnimalsGame/comments/1b0dmqw/how_to_get_a_new_exclusive_tiagra_skin/</a:t>
-            </a:r>
-            <a:endParaRPr lang="en-US" altLang="ko-KR" sz="1600" dirty="0"/>
-          </a:p>
-          <a:p>
-            <a:r>
-              <a:rPr lang="ko-KR" altLang="en-US" sz="1600" dirty="0"/>
-              <a:t>자료</a:t>
-            </a:r>
-            <a:r>
-              <a:rPr lang="en-US" altLang="ko-KR" sz="1600" dirty="0"/>
-              <a:t>4 </a:t>
-            </a:r>
-            <a:r>
-              <a:rPr lang="en-US" altLang="ko-KR" sz="1600" dirty="0">
-                <a:hlinkClick r:id="rId4"/>
-              </a:rPr>
-              <a:t>https://page.onstove.com/indie/global/view/9597749</a:t>
-            </a:r>
-            <a:r>
-              <a:rPr lang="en-US" altLang="ko-KR" sz="1600" dirty="0"/>
-              <a:t> </a:t>
-            </a:r>
-          </a:p>
-          <a:p>
-            <a:r>
-              <a:rPr lang="ko-KR" altLang="en-US" sz="1600" dirty="0"/>
-              <a:t>자료</a:t>
-            </a:r>
-            <a:r>
-              <a:rPr lang="en-US" altLang="ko-KR" sz="1600" dirty="0"/>
-              <a:t>5 </a:t>
-            </a:r>
-            <a:r>
-              <a:rPr lang="en-US" altLang="ko-KR" sz="1600" dirty="0">
-                <a:hlinkClick r:id="rId5"/>
-              </a:rPr>
-              <a:t>https://www.youtube.com/watch?v=eNRvtvpl1Io&amp;t=872s</a:t>
-            </a:r>
-            <a:endParaRPr lang="en-US" altLang="ko-KR" sz="1600" dirty="0"/>
-          </a:p>
-          <a:p>
-            <a:endParaRPr lang="en-US" altLang="ko-KR" sz="1600" dirty="0"/>
-          </a:p>
-          <a:p>
-            <a:endParaRPr lang="en-US" altLang="ko-KR" sz="1600" dirty="0"/>
-          </a:p>
-          <a:p>
-            <a:r>
-              <a:rPr lang="en-US" altLang="ko-KR" sz="1600" dirty="0"/>
-              <a:t>*</a:t>
-            </a:r>
-            <a:r>
-              <a:rPr lang="ko-KR" altLang="en-US" sz="1600" dirty="0" err="1"/>
-              <a:t>어떤느낌</a:t>
-            </a:r>
-            <a:r>
-              <a:rPr lang="ko-KR" altLang="en-US" sz="1600" dirty="0"/>
-              <a:t> 이미지</a:t>
-            </a:r>
-            <a:r>
-              <a:rPr lang="en-US" altLang="ko-KR" sz="1600" dirty="0"/>
-              <a:t> </a:t>
-            </a:r>
-            <a:r>
-              <a:rPr lang="ko-KR" altLang="en-US" sz="1600" dirty="0"/>
-              <a:t>베틀그라운드 </a:t>
-            </a:r>
-            <a:r>
-              <a:rPr lang="en-US" altLang="ko-KR" sz="1600" dirty="0">
-                <a:hlinkClick r:id="rId6"/>
-              </a:rPr>
-              <a:t>%EC%9D%B8%EC%B9%AD-Back-view-%EC%8A%88%ED%8C%85%EA%B2%8C%EC%9E%84TPS-%ED%94%84%EB%A1%9C%EC%A0%9D%ED%8A%B8-%EC%8B%9C%EC%9E%91</a:t>
-            </a:r>
-            <a:endParaRPr lang="en-US" altLang="ko-KR" sz="1600" dirty="0"/>
-          </a:p>
-          <a:p>
-            <a:endParaRPr lang="en-US" altLang="ko-KR" sz="1600" dirty="0"/>
-          </a:p>
-          <a:p>
-            <a:r>
-              <a:rPr lang="ko-KR" altLang="en-US" sz="1600" dirty="0"/>
-              <a:t>키보드 이미지 </a:t>
-            </a:r>
-            <a:r>
-              <a:rPr lang="en-US" altLang="ko-KR" sz="1600" dirty="0">
-                <a:hlinkClick r:id="rId7"/>
-              </a:rPr>
-              <a:t>https://creatorjoseph.com/268#google_vignette</a:t>
-            </a:r>
-            <a:endParaRPr lang="en-US" altLang="ko-KR" sz="1600" dirty="0"/>
-          </a:p>
-          <a:p>
-            <a:r>
-              <a:rPr lang="ko-KR" altLang="en-US" sz="1600" dirty="0"/>
-              <a:t>마우스 이미지 </a:t>
-            </a:r>
-            <a:r>
-              <a:rPr lang="en-US" altLang="ko-KR" sz="1600" dirty="0">
-                <a:hlinkClick r:id="rId8"/>
-              </a:rPr>
-              <a:t>https://kor.pngtree.com/so/%EB%A7%88%EC%9A%B0%EC%8A%A4</a:t>
-            </a:r>
-            <a:endParaRPr lang="en-US" altLang="ko-KR" sz="1600" dirty="0"/>
-          </a:p>
-          <a:p>
-            <a:endParaRPr lang="en-US" altLang="ko-KR" sz="1600" dirty="0"/>
-          </a:p>
-          <a:p>
-            <a:endParaRPr lang="en-US" altLang="ko-KR" sz="1600" dirty="0"/>
-          </a:p>
-          <a:p>
-            <a:endParaRPr lang="en-US" altLang="ko-KR" sz="1600" dirty="0"/>
-          </a:p>
-          <a:p>
-            <a:endParaRPr lang="ko-KR" altLang="en-US" sz="1600" dirty="0"/>
-          </a:p>
-        </p:txBody>
-      </p:sp>
-      <p:sp>
-        <p:nvSpPr>
-          <p:cNvPr id="5" name="날짜 개체 틀 4">
-            <a:extLst>
-              <a:ext uri="{FF2B5EF4-FFF2-40B4-BE49-F238E27FC236}">
-                <a16:creationId xmlns:a16="http://schemas.microsoft.com/office/drawing/2014/main" id="{04226ECB-2B1C-B2A7-4CB5-00358793D93E}"/>
-              </a:ext>
-            </a:extLst>
-          </p:cNvPr>
-          <p:cNvSpPr>
-            <a:spLocks noGrp="1"/>
-          </p:cNvSpPr>
-          <p:nvPr>
-            <p:ph type="dt" sz="half" idx="10"/>
-          </p:nvPr>
-        </p:nvSpPr>
-        <p:spPr/>
-        <p:txBody>
-          <a:bodyPr/>
-          <a:lstStyle/>
-          <a:p>
-            <a:fld id="{492E84DF-9BBC-4DFC-AB92-EB3DF1902948}" type="datetime1">
-              <a:rPr lang="en-US" altLang="ko-KR" smtClean="0"/>
-              <a:t>9/26/2026</a:t>
-            </a:fld>
-            <a:endParaRPr lang="ko-KR" altLang="en-US"/>
-          </a:p>
-        </p:txBody>
-      </p:sp>
-      <p:sp>
-        <p:nvSpPr>
-          <p:cNvPr id="6" name="슬라이드 번호 개체 틀 5">
-            <a:extLst>
-              <a:ext uri="{FF2B5EF4-FFF2-40B4-BE49-F238E27FC236}">
-                <a16:creationId xmlns:a16="http://schemas.microsoft.com/office/drawing/2014/main" id="{B9C2F74C-0F26-5025-9369-77AED66278B6}"/>
-              </a:ext>
-            </a:extLst>
-          </p:cNvPr>
-          <p:cNvSpPr>
-            <a:spLocks noGrp="1"/>
-          </p:cNvSpPr>
-          <p:nvPr>
-            <p:ph type="sldNum" sz="quarter" idx="12"/>
-          </p:nvPr>
-        </p:nvSpPr>
-        <p:spPr/>
-        <p:txBody>
-          <a:bodyPr/>
-          <a:lstStyle/>
-          <a:p>
-            <a:fld id="{4419BE51-E1DC-4D7D-A982-2D579B035180}" type="slidenum">
-              <a:rPr lang="ko-KR" altLang="en-US" smtClean="0"/>
-              <a:t>29</a:t>
-            </a:fld>
-            <a:endParaRPr lang="ko-KR" altLang="en-US"/>
-          </a:p>
-        </p:txBody>
-      </p:sp>
-      <p:sp>
-        <p:nvSpPr>
-          <p:cNvPr id="10" name="내용 개체 틀 9">
-            <a:extLst>
-              <a:ext uri="{FF2B5EF4-FFF2-40B4-BE49-F238E27FC236}">
-                <a16:creationId xmlns:a16="http://schemas.microsoft.com/office/drawing/2014/main" id="{8907003B-E921-5E38-C139-5AE6158C7401}"/>
-              </a:ext>
-            </a:extLst>
-          </p:cNvPr>
-          <p:cNvSpPr>
-            <a:spLocks noGrp="1"/>
-          </p:cNvSpPr>
-          <p:nvPr>
-            <p:ph sz="quarter" idx="13"/>
-          </p:nvPr>
-        </p:nvSpPr>
-        <p:spPr/>
-        <p:txBody>
-          <a:bodyPr/>
-          <a:lstStyle/>
-          <a:p>
-            <a:endParaRPr lang="ko-KR" altLang="en-US"/>
-          </a:p>
-        </p:txBody>
-      </p:sp>
-    </p:spTree>
-    <p:extLst>
-      <p:ext uri="{BB962C8B-B14F-4D97-AF65-F5344CB8AC3E}">
-        <p14:creationId xmlns:p14="http://schemas.microsoft.com/office/powerpoint/2010/main" val="1774975270"/>
-      </p:ext>
-    </p:extLst>
-  </p:cSld>
-  <p:clrMapOvr>
-    <a:masterClrMapping/>
-  </p:clrMapOvr>
-</p:sld>
-</file>
-
 <file path=ppt/slides/slide3.xml><?xml version="1.0" encoding="utf-8"?>
 <p:sld xmlns:a="http://schemas.openxmlformats.org/drawingml/2006/main" xmlns:r="http://schemas.openxmlformats.org/officeDocument/2006/relationships" xmlns:p="http://schemas.openxmlformats.org/presentationml/2006/main">
   <p:cSld>
@@ -35400,6 +35712,358 @@
     <p:extLst>
       <p:ext uri="{BB962C8B-B14F-4D97-AF65-F5344CB8AC3E}">
         <p14:creationId xmlns:p14="http://schemas.microsoft.com/office/powerpoint/2010/main" val="4223449320"/>
+      </p:ext>
+    </p:extLst>
+  </p:cSld>
+  <p:clrMapOvr>
+    <a:masterClrMapping/>
+  </p:clrMapOvr>
+</p:sld>
+</file>
+
+<file path=ppt/slides/slide30.xml><?xml version="1.0" encoding="utf-8"?>
+<p:sld xmlns:a="http://schemas.openxmlformats.org/drawingml/2006/main" xmlns:r="http://schemas.openxmlformats.org/officeDocument/2006/relationships" xmlns:p="http://schemas.openxmlformats.org/presentationml/2006/main">
+  <p:cSld>
+    <p:spTree>
+      <p:nvGrpSpPr>
+        <p:cNvPr id="1" name=""/>
+        <p:cNvGrpSpPr/>
+        <p:nvPr/>
+      </p:nvGrpSpPr>
+      <p:grpSpPr>
+        <a:xfrm>
+          <a:off x="0" y="0"/>
+          <a:ext cx="0" cy="0"/>
+          <a:chOff x="0" y="0"/>
+          <a:chExt cx="0" cy="0"/>
+        </a:xfrm>
+      </p:grpSpPr>
+      <p:sp>
+        <p:nvSpPr>
+          <p:cNvPr id="8" name="제목 7">
+            <a:extLst>
+              <a:ext uri="{FF2B5EF4-FFF2-40B4-BE49-F238E27FC236}">
+                <a16:creationId xmlns:a16="http://schemas.microsoft.com/office/drawing/2014/main" id="{53B8EAFD-03FA-8944-B1DF-F230D2C49F57}"/>
+              </a:ext>
+            </a:extLst>
+          </p:cNvPr>
+          <p:cNvSpPr>
+            <a:spLocks noGrp="1"/>
+          </p:cNvSpPr>
+          <p:nvPr>
+            <p:ph type="title"/>
+          </p:nvPr>
+        </p:nvSpPr>
+        <p:spPr/>
+        <p:txBody>
+          <a:bodyPr/>
+          <a:lstStyle/>
+          <a:p>
+            <a:r>
+              <a:rPr lang="ko-KR" altLang="en-US" dirty="0"/>
+              <a:t>이미지 자료 출처</a:t>
+            </a:r>
+          </a:p>
+        </p:txBody>
+      </p:sp>
+      <p:sp>
+        <p:nvSpPr>
+          <p:cNvPr id="9" name="내용 개체 틀 8">
+            <a:extLst>
+              <a:ext uri="{FF2B5EF4-FFF2-40B4-BE49-F238E27FC236}">
+                <a16:creationId xmlns:a16="http://schemas.microsoft.com/office/drawing/2014/main" id="{D8BD448A-07B9-B4A3-5EB1-9258F8A869C7}"/>
+              </a:ext>
+            </a:extLst>
+          </p:cNvPr>
+          <p:cNvSpPr>
+            <a:spLocks noGrp="1"/>
+          </p:cNvSpPr>
+          <p:nvPr>
+            <p:ph idx="1"/>
+          </p:nvPr>
+        </p:nvSpPr>
+        <p:spPr>
+          <a:xfrm>
+            <a:off x="838200" y="891396"/>
+            <a:ext cx="10515600" cy="5285567"/>
+          </a:xfrm>
+        </p:spPr>
+        <p:txBody>
+          <a:bodyPr>
+            <a:normAutofit/>
+          </a:bodyPr>
+          <a:lstStyle/>
+          <a:p>
+            <a:r>
+              <a:rPr lang="ko-KR" altLang="en-US" sz="1600" dirty="0"/>
+              <a:t>자료</a:t>
+            </a:r>
+            <a:r>
+              <a:rPr lang="en-US" altLang="ko-KR" sz="1600" dirty="0"/>
+              <a:t>1 </a:t>
+            </a:r>
+            <a:r>
+              <a:rPr lang="ko-KR" altLang="en-US" sz="1600" dirty="0" err="1"/>
+              <a:t>플레임</a:t>
+            </a:r>
+            <a:r>
+              <a:rPr lang="en-US" altLang="ko-KR" sz="1600" dirty="0"/>
+              <a:t>&lt;</a:t>
+            </a:r>
+            <a:r>
+              <a:rPr lang="ko-KR" altLang="en-US" sz="1600" dirty="0"/>
+              <a:t>나 배달 </a:t>
+            </a:r>
+            <a:r>
+              <a:rPr lang="ko-KR" altLang="en-US" sz="1600" dirty="0" err="1"/>
+              <a:t>안해</a:t>
+            </a:r>
+            <a:r>
+              <a:rPr lang="en-US" altLang="ko-KR" sz="1600" dirty="0"/>
+              <a:t>&gt;</a:t>
+            </a:r>
+            <a:r>
+              <a:rPr lang="ko-KR" altLang="en-US" sz="1600" dirty="0"/>
+              <a:t>영상</a:t>
+            </a:r>
+            <a:endParaRPr lang="en-US" altLang="ko-KR" sz="1600" dirty="0"/>
+          </a:p>
+          <a:p>
+            <a:r>
+              <a:rPr lang="ko-KR" altLang="en-US" sz="1600" dirty="0"/>
+              <a:t>자료</a:t>
+            </a:r>
+            <a:r>
+              <a:rPr lang="en-US" altLang="ko-KR" sz="1600" dirty="0"/>
+              <a:t>2  </a:t>
+            </a:r>
+            <a:r>
+              <a:rPr lang="en-US" altLang="ko-KR" sz="1600" dirty="0">
+                <a:hlinkClick r:id="rId2"/>
+              </a:rPr>
+              <a:t>https://namu.wiki/w/%EB%8F%99%EB%AC%BC%EC%9D%98%20%EC%88%B2%20%EC%8B%9C%EB%A6%AC%EC%A6%88/%EC%9D%BC%EB%B0%98%20%EC%A3%BC%EB%AF%BC/%EA%B3%B0</a:t>
+            </a:r>
+            <a:endParaRPr lang="en-US" altLang="ko-KR" sz="1600" dirty="0"/>
+          </a:p>
+          <a:p>
+            <a:r>
+              <a:rPr lang="ko-KR" altLang="en-US" sz="1600" dirty="0"/>
+              <a:t>자료</a:t>
+            </a:r>
+            <a:r>
+              <a:rPr lang="en-US" altLang="ko-KR" sz="1600" dirty="0"/>
+              <a:t>3 </a:t>
+            </a:r>
+            <a:r>
+              <a:rPr lang="en-US" altLang="ko-KR" sz="1600" dirty="0">
+                <a:hlinkClick r:id="rId3"/>
+              </a:rPr>
+              <a:t>https://www.reddit.com/r/PartyAnimalsGame/comments/1b0dmqw/how_to_get_a_new_exclusive_tiagra_skin/</a:t>
+            </a:r>
+            <a:endParaRPr lang="en-US" altLang="ko-KR" sz="1600" dirty="0"/>
+          </a:p>
+          <a:p>
+            <a:r>
+              <a:rPr lang="ko-KR" altLang="en-US" sz="1600" dirty="0"/>
+              <a:t>자료</a:t>
+            </a:r>
+            <a:r>
+              <a:rPr lang="en-US" altLang="ko-KR" sz="1600" dirty="0"/>
+              <a:t>4 </a:t>
+            </a:r>
+            <a:r>
+              <a:rPr lang="en-US" altLang="ko-KR" sz="1600" dirty="0">
+                <a:hlinkClick r:id="rId4"/>
+              </a:rPr>
+              <a:t>https://page.onstove.com/indie/global/view/9597749</a:t>
+            </a:r>
+            <a:r>
+              <a:rPr lang="en-US" altLang="ko-KR" sz="1600" dirty="0"/>
+              <a:t> </a:t>
+            </a:r>
+          </a:p>
+          <a:p>
+            <a:r>
+              <a:rPr lang="ko-KR" altLang="en-US" sz="1600" dirty="0"/>
+              <a:t>자료</a:t>
+            </a:r>
+            <a:r>
+              <a:rPr lang="en-US" altLang="ko-KR" sz="1600" dirty="0"/>
+              <a:t>5 </a:t>
+            </a:r>
+            <a:r>
+              <a:rPr lang="en-US" altLang="ko-KR" sz="1600" dirty="0">
+                <a:hlinkClick r:id="rId5"/>
+              </a:rPr>
+              <a:t>https://www.youtube.com/watch?v=eNRvtvpl1Io&amp;t=872s</a:t>
+            </a:r>
+            <a:endParaRPr lang="en-US" altLang="ko-KR" sz="1600" dirty="0"/>
+          </a:p>
+          <a:p>
+            <a:endParaRPr lang="en-US" altLang="ko-KR" sz="1600" dirty="0"/>
+          </a:p>
+          <a:p>
+            <a:endParaRPr lang="en-US" altLang="ko-KR" sz="1600" dirty="0"/>
+          </a:p>
+          <a:p>
+            <a:r>
+              <a:rPr lang="en-US" altLang="ko-KR" sz="1600" dirty="0"/>
+              <a:t>*</a:t>
+            </a:r>
+            <a:r>
+              <a:rPr lang="ko-KR" altLang="en-US" sz="1600" dirty="0" err="1"/>
+              <a:t>어떤느낌</a:t>
+            </a:r>
+            <a:r>
+              <a:rPr lang="ko-KR" altLang="en-US" sz="1600" dirty="0"/>
+              <a:t> 이미지</a:t>
+            </a:r>
+            <a:r>
+              <a:rPr lang="en-US" altLang="ko-KR" sz="1600" dirty="0"/>
+              <a:t> </a:t>
+            </a:r>
+            <a:r>
+              <a:rPr lang="ko-KR" altLang="en-US" sz="1600" dirty="0"/>
+              <a:t>베틀그라운드 </a:t>
+            </a:r>
+            <a:r>
+              <a:rPr lang="en-US" altLang="ko-KR" sz="1600" dirty="0">
+                <a:hlinkClick r:id="rId6"/>
+              </a:rPr>
+              <a:t>%EC%9D%B8%EC%B9%AD-Back-view-%EC%8A%88%ED%8C%85%EA%B2%8C%EC%9E%84TPS-%ED%94%84%EB%A1%9C%EC%A0%9D%ED%8A%B8-%EC%8B%9C%EC%9E%91</a:t>
+            </a:r>
+            <a:endParaRPr lang="en-US" altLang="ko-KR" sz="1600" dirty="0"/>
+          </a:p>
+          <a:p>
+            <a:endParaRPr lang="en-US" altLang="ko-KR" sz="1600" dirty="0"/>
+          </a:p>
+          <a:p>
+            <a:r>
+              <a:rPr lang="ko-KR" altLang="en-US" sz="1600" dirty="0"/>
+              <a:t>키보드 이미지 </a:t>
+            </a:r>
+            <a:r>
+              <a:rPr lang="en-US" altLang="ko-KR" sz="1600" dirty="0">
+                <a:hlinkClick r:id="rId7"/>
+              </a:rPr>
+              <a:t>https://creatorjoseph.com/268#google_vignette</a:t>
+            </a:r>
+            <a:endParaRPr lang="en-US" altLang="ko-KR" sz="1600" dirty="0"/>
+          </a:p>
+          <a:p>
+            <a:r>
+              <a:rPr lang="ko-KR" altLang="en-US" sz="1600" dirty="0"/>
+              <a:t>마우스 이미지 </a:t>
+            </a:r>
+            <a:r>
+              <a:rPr lang="en-US" altLang="ko-KR" sz="1600" dirty="0">
+                <a:hlinkClick r:id="rId8"/>
+              </a:rPr>
+              <a:t>https://kor.pngtree.com/so/%EB%A7%88%EC%9A%B0%EC%8A%A4</a:t>
+            </a:r>
+            <a:endParaRPr lang="en-US" altLang="ko-KR" sz="1600" dirty="0"/>
+          </a:p>
+          <a:p>
+            <a:endParaRPr lang="en-US" altLang="ko-KR" sz="1600" dirty="0"/>
+          </a:p>
+          <a:p>
+            <a:endParaRPr lang="en-US" altLang="ko-KR" sz="1600" dirty="0"/>
+          </a:p>
+          <a:p>
+            <a:endParaRPr lang="en-US" altLang="ko-KR" sz="1600" dirty="0"/>
+          </a:p>
+          <a:p>
+            <a:endParaRPr lang="ko-KR" altLang="en-US" sz="1600" dirty="0"/>
+          </a:p>
+        </p:txBody>
+      </p:sp>
+      <p:sp>
+        <p:nvSpPr>
+          <p:cNvPr id="5" name="날짜 개체 틀 4">
+            <a:extLst>
+              <a:ext uri="{FF2B5EF4-FFF2-40B4-BE49-F238E27FC236}">
+                <a16:creationId xmlns:a16="http://schemas.microsoft.com/office/drawing/2014/main" id="{04226ECB-2B1C-B2A7-4CB5-00358793D93E}"/>
+              </a:ext>
+            </a:extLst>
+          </p:cNvPr>
+          <p:cNvSpPr>
+            <a:spLocks noGrp="1"/>
+          </p:cNvSpPr>
+          <p:nvPr>
+            <p:ph type="dt" sz="half" idx="10"/>
+          </p:nvPr>
+        </p:nvSpPr>
+        <p:spPr/>
+        <p:txBody>
+          <a:bodyPr/>
+          <a:lstStyle/>
+          <a:p>
+            <a:fld id="{492E84DF-9BBC-4DFC-AB92-EB3DF1902948}" type="datetime1">
+              <a:rPr lang="en-US" altLang="ko-KR" smtClean="0"/>
+              <a:t>9/26/2026</a:t>
+            </a:fld>
+            <a:endParaRPr lang="ko-KR" altLang="en-US"/>
+          </a:p>
+        </p:txBody>
+      </p:sp>
+      <p:sp>
+        <p:nvSpPr>
+          <p:cNvPr id="6" name="슬라이드 번호 개체 틀 5">
+            <a:extLst>
+              <a:ext uri="{FF2B5EF4-FFF2-40B4-BE49-F238E27FC236}">
+                <a16:creationId xmlns:a16="http://schemas.microsoft.com/office/drawing/2014/main" id="{B9C2F74C-0F26-5025-9369-77AED66278B6}"/>
+              </a:ext>
+            </a:extLst>
+          </p:cNvPr>
+          <p:cNvSpPr>
+            <a:spLocks noGrp="1"/>
+          </p:cNvSpPr>
+          <p:nvPr>
+            <p:ph type="sldNum" sz="quarter" idx="12"/>
+          </p:nvPr>
+        </p:nvSpPr>
+        <p:spPr/>
+        <p:txBody>
+          <a:bodyPr/>
+          <a:lstStyle/>
+          <a:p>
+            <a:fld id="{4419BE51-E1DC-4D7D-A982-2D579B035180}" type="slidenum">
+              <a:rPr lang="ko-KR" altLang="en-US" smtClean="0"/>
+              <a:t>30</a:t>
+            </a:fld>
+            <a:endParaRPr lang="ko-KR" altLang="en-US"/>
+          </a:p>
+        </p:txBody>
+      </p:sp>
+      <p:sp>
+        <p:nvSpPr>
+          <p:cNvPr id="10" name="내용 개체 틀 9">
+            <a:extLst>
+              <a:ext uri="{FF2B5EF4-FFF2-40B4-BE49-F238E27FC236}">
+                <a16:creationId xmlns:a16="http://schemas.microsoft.com/office/drawing/2014/main" id="{8907003B-E921-5E38-C139-5AE6158C7401}"/>
+              </a:ext>
+            </a:extLst>
+          </p:cNvPr>
+          <p:cNvSpPr>
+            <a:spLocks noGrp="1"/>
+          </p:cNvSpPr>
+          <p:nvPr>
+            <p:ph sz="quarter" idx="13"/>
+          </p:nvPr>
+        </p:nvSpPr>
+        <p:spPr/>
+        <p:txBody>
+          <a:bodyPr/>
+          <a:lstStyle/>
+          <a:p>
+            <a:endParaRPr lang="ko-KR" altLang="en-US"/>
+          </a:p>
+        </p:txBody>
+      </p:sp>
+    </p:spTree>
+    <p:extLst>
+      <p:ext uri="{BB962C8B-B14F-4D97-AF65-F5344CB8AC3E}">
+        <p14:creationId xmlns:p14="http://schemas.microsoft.com/office/powerpoint/2010/main" val="1774975270"/>
       </p:ext>
     </p:extLst>
   </p:cSld>
@@ -37444,6 +38108,136 @@
       </p:grpSpPr>
       <p:sp>
         <p:nvSpPr>
+          <p:cNvPr id="4" name="제목 3">
+            <a:extLst>
+              <a:ext uri="{FF2B5EF4-FFF2-40B4-BE49-F238E27FC236}">
+                <a16:creationId xmlns:a16="http://schemas.microsoft.com/office/drawing/2014/main" id="{776FB2C5-D248-0BF9-B285-06CE335A2EA6}"/>
+              </a:ext>
+            </a:extLst>
+          </p:cNvPr>
+          <p:cNvSpPr>
+            <a:spLocks noGrp="1"/>
+          </p:cNvSpPr>
+          <p:nvPr>
+            <p:ph type="title"/>
+          </p:nvPr>
+        </p:nvSpPr>
+        <p:spPr/>
+        <p:txBody>
+          <a:bodyPr/>
+          <a:lstStyle/>
+          <a:p>
+            <a:endParaRPr lang="ko-KR" altLang="en-US"/>
+          </a:p>
+        </p:txBody>
+      </p:sp>
+      <p:sp>
+        <p:nvSpPr>
+          <p:cNvPr id="5" name="내용 개체 틀 4">
+            <a:extLst>
+              <a:ext uri="{FF2B5EF4-FFF2-40B4-BE49-F238E27FC236}">
+                <a16:creationId xmlns:a16="http://schemas.microsoft.com/office/drawing/2014/main" id="{5F16492D-8E6C-7C78-CA51-12853483F888}"/>
+              </a:ext>
+            </a:extLst>
+          </p:cNvPr>
+          <p:cNvSpPr>
+            <a:spLocks noGrp="1"/>
+          </p:cNvSpPr>
+          <p:nvPr>
+            <p:ph sz="half" idx="1"/>
+          </p:nvPr>
+        </p:nvSpPr>
+        <p:spPr/>
+        <p:txBody>
+          <a:bodyPr/>
+          <a:lstStyle/>
+          <a:p>
+            <a:endParaRPr lang="ko-KR" altLang="en-US"/>
+          </a:p>
+        </p:txBody>
+      </p:sp>
+      <p:sp>
+        <p:nvSpPr>
+          <p:cNvPr id="6" name="내용 개체 틀 5">
+            <a:extLst>
+              <a:ext uri="{FF2B5EF4-FFF2-40B4-BE49-F238E27FC236}">
+                <a16:creationId xmlns:a16="http://schemas.microsoft.com/office/drawing/2014/main" id="{C6E29514-6D4D-4038-C32A-B990A91B8456}"/>
+              </a:ext>
+            </a:extLst>
+          </p:cNvPr>
+          <p:cNvSpPr>
+            <a:spLocks noGrp="1"/>
+          </p:cNvSpPr>
+          <p:nvPr>
+            <p:ph sz="half" idx="2"/>
+          </p:nvPr>
+        </p:nvSpPr>
+        <p:spPr/>
+        <p:txBody>
+          <a:bodyPr/>
+          <a:lstStyle/>
+          <a:p>
+            <a:endParaRPr lang="ko-KR" altLang="en-US"/>
+          </a:p>
+        </p:txBody>
+      </p:sp>
+      <p:sp>
+        <p:nvSpPr>
+          <p:cNvPr id="7" name="내용 개체 틀 6">
+            <a:extLst>
+              <a:ext uri="{FF2B5EF4-FFF2-40B4-BE49-F238E27FC236}">
+                <a16:creationId xmlns:a16="http://schemas.microsoft.com/office/drawing/2014/main" id="{30B0553E-9C54-03A8-BE6D-EDCBF824B51C}"/>
+              </a:ext>
+            </a:extLst>
+          </p:cNvPr>
+          <p:cNvSpPr>
+            <a:spLocks noGrp="1"/>
+          </p:cNvSpPr>
+          <p:nvPr>
+            <p:ph sz="quarter" idx="13"/>
+          </p:nvPr>
+        </p:nvSpPr>
+        <p:spPr/>
+        <p:txBody>
+          <a:bodyPr/>
+          <a:lstStyle/>
+          <a:p>
+            <a:endParaRPr lang="ko-KR" altLang="en-US"/>
+          </a:p>
+        </p:txBody>
+      </p:sp>
+    </p:spTree>
+    <p:extLst>
+      <p:ext uri="{BB962C8B-B14F-4D97-AF65-F5344CB8AC3E}">
+        <p14:creationId xmlns:p14="http://schemas.microsoft.com/office/powerpoint/2010/main" val="233513682"/>
+      </p:ext>
+    </p:extLst>
+  </p:cSld>
+  <p:clrMapOvr>
+    <a:masterClrMapping/>
+  </p:clrMapOvr>
+</p:sld>
+</file>
+
+<file path=ppt/slides/slide7.xml><?xml version="1.0" encoding="utf-8"?>
+<p:sld xmlns:a="http://schemas.openxmlformats.org/drawingml/2006/main" xmlns:r="http://schemas.openxmlformats.org/officeDocument/2006/relationships" xmlns:p="http://schemas.openxmlformats.org/presentationml/2006/main">
+  <p:cSld>
+    <p:spTree>
+      <p:nvGrpSpPr>
+        <p:cNvPr id="1" name=""/>
+        <p:cNvGrpSpPr/>
+        <p:nvPr/>
+      </p:nvGrpSpPr>
+      <p:grpSpPr>
+        <a:xfrm>
+          <a:off x="0" y="0"/>
+          <a:ext cx="0" cy="0"/>
+          <a:chOff x="0" y="0"/>
+          <a:chExt cx="0" cy="0"/>
+        </a:xfrm>
+      </p:grpSpPr>
+      <p:sp>
+        <p:nvSpPr>
           <p:cNvPr id="2" name="제목 1">
             <a:extLst>
               <a:ext uri="{FF2B5EF4-FFF2-40B4-BE49-F238E27FC236}">
@@ -37683,7 +38477,7 @@
           <a:p>
             <a:fld id="{4419BE51-E1DC-4D7D-A982-2D579B035180}" type="slidenum">
               <a:rPr lang="ko-KR" altLang="en-US" smtClean="0"/>
-              <a:t>6</a:t>
+              <a:t>7</a:t>
             </a:fld>
             <a:endParaRPr lang="ko-KR" altLang="en-US"/>
           </a:p>
@@ -37802,7 +38596,7 @@
 </p:sld>
 </file>
 
-<file path=ppt/slides/slide7.xml><?xml version="1.0" encoding="utf-8"?>
+<file path=ppt/slides/slide8.xml><?xml version="1.0" encoding="utf-8"?>
 <p:sld xmlns:a="http://schemas.openxmlformats.org/drawingml/2006/main" xmlns:r="http://schemas.openxmlformats.org/officeDocument/2006/relationships" xmlns:p="http://schemas.openxmlformats.org/presentationml/2006/main">
   <p:cSld>
     <p:spTree>
@@ -38019,7 +38813,7 @@
           <a:p>
             <a:fld id="{4419BE51-E1DC-4D7D-A982-2D579B035180}" type="slidenum">
               <a:rPr lang="ko-KR" altLang="en-US" smtClean="0"/>
-              <a:t>7</a:t>
+              <a:t>8</a:t>
             </a:fld>
             <a:endParaRPr lang="ko-KR" altLang="en-US"/>
           </a:p>
@@ -38911,7 +39705,7 @@
 </p:sld>
 </file>
 
-<file path=ppt/slides/slide8.xml><?xml version="1.0" encoding="utf-8"?>
+<file path=ppt/slides/slide9.xml><?xml version="1.0" encoding="utf-8"?>
 <p:sld xmlns:a="http://schemas.openxmlformats.org/drawingml/2006/main" xmlns:r="http://schemas.openxmlformats.org/officeDocument/2006/relationships" xmlns:p="http://schemas.openxmlformats.org/presentationml/2006/main">
   <p:cSld>
     <p:spTree>
@@ -39199,7 +39993,7 @@
           <a:p>
             <a:fld id="{4419BE51-E1DC-4D7D-A982-2D579B035180}" type="slidenum">
               <a:rPr lang="ko-KR" altLang="en-US" smtClean="0"/>
-              <a:t>8</a:t>
+              <a:t>9</a:t>
             </a:fld>
             <a:endParaRPr lang="ko-KR" altLang="en-US"/>
           </a:p>
@@ -43225,426 +44019,6 @@
     <p:extLst>
       <p:ext uri="{BB962C8B-B14F-4D97-AF65-F5344CB8AC3E}">
         <p14:creationId xmlns:p14="http://schemas.microsoft.com/office/powerpoint/2010/main" val="1276419142"/>
-      </p:ext>
-    </p:extLst>
-  </p:cSld>
-  <p:clrMapOvr>
-    <a:masterClrMapping/>
-  </p:clrMapOvr>
-</p:sld>
-</file>
-
-<file path=ppt/slides/slide9.xml><?xml version="1.0" encoding="utf-8"?>
-<p:sld xmlns:a="http://schemas.openxmlformats.org/drawingml/2006/main" xmlns:r="http://schemas.openxmlformats.org/officeDocument/2006/relationships" xmlns:p="http://schemas.openxmlformats.org/presentationml/2006/main">
-  <p:cSld>
-    <p:spTree>
-      <p:nvGrpSpPr>
-        <p:cNvPr id="1" name=""/>
-        <p:cNvGrpSpPr/>
-        <p:nvPr/>
-      </p:nvGrpSpPr>
-      <p:grpSpPr>
-        <a:xfrm>
-          <a:off x="0" y="0"/>
-          <a:ext cx="0" cy="0"/>
-          <a:chOff x="0" y="0"/>
-          <a:chExt cx="0" cy="0"/>
-        </a:xfrm>
-      </p:grpSpPr>
-      <p:sp>
-        <p:nvSpPr>
-          <p:cNvPr id="4" name="제목 3">
-            <a:extLst>
-              <a:ext uri="{FF2B5EF4-FFF2-40B4-BE49-F238E27FC236}">
-                <a16:creationId xmlns:a16="http://schemas.microsoft.com/office/drawing/2014/main" id="{685C9215-8215-D4B2-FF11-B22CEE311F91}"/>
-              </a:ext>
-            </a:extLst>
-          </p:cNvPr>
-          <p:cNvSpPr>
-            <a:spLocks noGrp="1"/>
-          </p:cNvSpPr>
-          <p:nvPr>
-            <p:ph type="title"/>
-          </p:nvPr>
-        </p:nvSpPr>
-        <p:spPr/>
-        <p:txBody>
-          <a:bodyPr/>
-          <a:lstStyle/>
-          <a:p>
-            <a:r>
-              <a:rPr lang="ko-KR" altLang="en-US" dirty="0" err="1"/>
-              <a:t>플레이어블</a:t>
-            </a:r>
-            <a:r>
-              <a:rPr lang="ko-KR" altLang="en-US" dirty="0"/>
-              <a:t> 캐릭터</a:t>
-            </a:r>
-          </a:p>
-        </p:txBody>
-      </p:sp>
-      <p:sp>
-        <p:nvSpPr>
-          <p:cNvPr id="6" name="내용 개체 틀 5">
-            <a:extLst>
-              <a:ext uri="{FF2B5EF4-FFF2-40B4-BE49-F238E27FC236}">
-                <a16:creationId xmlns:a16="http://schemas.microsoft.com/office/drawing/2014/main" id="{5DD2AE0A-0A6D-FA31-4890-32CBA0C9D04A}"/>
-              </a:ext>
-            </a:extLst>
-          </p:cNvPr>
-          <p:cNvSpPr>
-            <a:spLocks noGrp="1"/>
-          </p:cNvSpPr>
-          <p:nvPr>
-            <p:ph sz="half" idx="2"/>
-          </p:nvPr>
-        </p:nvSpPr>
-        <p:spPr/>
-        <p:txBody>
-          <a:bodyPr>
-            <a:normAutofit/>
-          </a:bodyPr>
-          <a:lstStyle/>
-          <a:p>
-            <a:r>
-              <a:rPr lang="ko-KR" altLang="en-US" sz="2400" dirty="0"/>
-              <a:t>가능한 동작 </a:t>
-            </a:r>
-            <a:r>
-              <a:rPr lang="en-US" altLang="ko-KR" sz="2400" dirty="0"/>
-              <a:t>:</a:t>
-            </a:r>
-            <a:br>
-              <a:rPr lang="en-US" altLang="ko-KR" sz="2400" dirty="0"/>
-            </a:br>
-            <a:r>
-              <a:rPr lang="ko-KR" altLang="en-US" sz="2400" dirty="0"/>
-              <a:t>걷기</a:t>
-            </a:r>
-            <a:r>
-              <a:rPr lang="en-US" altLang="ko-KR" sz="2400" dirty="0"/>
-              <a:t>, </a:t>
-            </a:r>
-            <a:r>
-              <a:rPr lang="ko-KR" altLang="en-US" sz="2400" dirty="0"/>
-              <a:t>달리기</a:t>
-            </a:r>
-            <a:r>
-              <a:rPr lang="en-US" altLang="ko-KR" sz="2400" dirty="0"/>
-              <a:t>, </a:t>
-            </a:r>
-            <a:r>
-              <a:rPr lang="ko-KR" altLang="en-US" sz="2400" dirty="0"/>
-              <a:t>상호작용</a:t>
-            </a:r>
-            <a:r>
-              <a:rPr lang="en-US" altLang="ko-KR" sz="2400" dirty="0"/>
-              <a:t>(</a:t>
-            </a:r>
-            <a:r>
-              <a:rPr lang="ko-KR" altLang="en-US" sz="2400" dirty="0"/>
-              <a:t>물품 들기</a:t>
-            </a:r>
-            <a:r>
-              <a:rPr lang="en-US" altLang="ko-KR" sz="2400" dirty="0"/>
-              <a:t>), </a:t>
-            </a:r>
-            <a:r>
-              <a:rPr lang="ko-KR" altLang="en-US" sz="2400" dirty="0"/>
-              <a:t>총 조준</a:t>
-            </a:r>
-            <a:r>
-              <a:rPr lang="en-US" altLang="ko-KR" sz="2400" dirty="0"/>
-              <a:t>, </a:t>
-            </a:r>
-            <a:r>
-              <a:rPr lang="ko-KR" altLang="en-US" sz="2400" dirty="0"/>
-              <a:t>총 발사</a:t>
-            </a:r>
-            <a:r>
-              <a:rPr lang="en-US" altLang="ko-KR" sz="2400" dirty="0"/>
-              <a:t>, </a:t>
-            </a:r>
-            <a:r>
-              <a:rPr lang="ko-KR" altLang="en-US" sz="2400" dirty="0"/>
-              <a:t>점프</a:t>
-            </a:r>
-            <a:br>
-              <a:rPr lang="en-US" altLang="ko-KR" sz="2400" dirty="0"/>
-            </a:br>
-            <a:r>
-              <a:rPr lang="en-US" altLang="ko-KR" sz="2400" dirty="0"/>
-              <a:t>(+ </a:t>
-            </a:r>
-            <a:r>
-              <a:rPr lang="ko-KR" altLang="en-US" sz="2400" dirty="0"/>
-              <a:t>경로 안내 켜기</a:t>
-            </a:r>
-            <a:r>
-              <a:rPr lang="en-US" altLang="ko-KR" sz="2400" dirty="0"/>
-              <a:t>)</a:t>
-            </a:r>
-          </a:p>
-          <a:p>
-            <a:endParaRPr lang="en-US" altLang="ko-KR" sz="2400" dirty="0"/>
-          </a:p>
-          <a:p>
-            <a:r>
-              <a:rPr lang="en-US" altLang="ko-KR" sz="2400" dirty="0"/>
-              <a:t>HP</a:t>
-            </a:r>
-            <a:r>
-              <a:rPr lang="ko-KR" altLang="en-US" sz="2400" dirty="0"/>
-              <a:t>가 </a:t>
-            </a:r>
-            <a:r>
-              <a:rPr lang="en-US" altLang="ko-KR" sz="2400" dirty="0"/>
-              <a:t>0</a:t>
-            </a:r>
-            <a:r>
-              <a:rPr lang="ko-KR" altLang="en-US" sz="2400" dirty="0"/>
-              <a:t>이 되어 사망 시 </a:t>
-            </a:r>
-            <a:r>
-              <a:rPr lang="en-US" altLang="ko-KR" sz="2400" dirty="0"/>
-              <a:t>: </a:t>
-            </a:r>
-            <a:br>
-              <a:rPr lang="en-US" altLang="ko-KR" sz="2400" dirty="0"/>
-            </a:br>
-            <a:r>
-              <a:rPr lang="ko-KR" altLang="en-US" sz="2400" dirty="0"/>
-              <a:t>사망한 장소에서 </a:t>
-            </a:r>
-            <a:r>
-              <a:rPr lang="en-US" altLang="ko-KR" sz="2400" dirty="0"/>
-              <a:t>10</a:t>
-            </a:r>
-            <a:r>
-              <a:rPr lang="ko-KR" altLang="en-US" sz="2400" dirty="0"/>
-              <a:t>초 후 부활</a:t>
-            </a:r>
-          </a:p>
-        </p:txBody>
-      </p:sp>
-      <p:sp>
-        <p:nvSpPr>
-          <p:cNvPr id="8" name="내용 개체 틀 7">
-            <a:extLst>
-              <a:ext uri="{FF2B5EF4-FFF2-40B4-BE49-F238E27FC236}">
-                <a16:creationId xmlns:a16="http://schemas.microsoft.com/office/drawing/2014/main" id="{0BB22C15-86A3-F2D5-9514-7E238DE9E2FC}"/>
-              </a:ext>
-            </a:extLst>
-          </p:cNvPr>
-          <p:cNvSpPr>
-            <a:spLocks noGrp="1"/>
-          </p:cNvSpPr>
-          <p:nvPr>
-            <p:ph sz="quarter" idx="13"/>
-          </p:nvPr>
-        </p:nvSpPr>
-        <p:spPr/>
-        <p:txBody>
-          <a:bodyPr/>
-          <a:lstStyle/>
-          <a:p>
-            <a:r>
-              <a:rPr lang="ko-KR" altLang="en-US" dirty="0"/>
-              <a:t>컨텐츠</a:t>
-            </a:r>
-          </a:p>
-        </p:txBody>
-      </p:sp>
-      <p:pic>
-        <p:nvPicPr>
-          <p:cNvPr id="10" name="그림 9">
-            <a:extLst>
-              <a:ext uri="{FF2B5EF4-FFF2-40B4-BE49-F238E27FC236}">
-                <a16:creationId xmlns:a16="http://schemas.microsoft.com/office/drawing/2014/main" id="{B13F6286-6394-F0E6-3780-8AA2C10C9008}"/>
-              </a:ext>
-            </a:extLst>
-          </p:cNvPr>
-          <p:cNvPicPr>
-            <a:picLocks noChangeAspect="1"/>
-          </p:cNvPicPr>
-          <p:nvPr/>
-        </p:nvPicPr>
-        <p:blipFill>
-          <a:blip r:embed="rId2"/>
-          <a:stretch>
-            <a:fillRect/>
-          </a:stretch>
-        </p:blipFill>
-        <p:spPr>
-          <a:xfrm>
-            <a:off x="848264" y="1825625"/>
-            <a:ext cx="1809575" cy="2575165"/>
-          </a:xfrm>
-          <a:prstGeom prst="rect">
-            <a:avLst/>
-          </a:prstGeom>
-        </p:spPr>
-      </p:pic>
-      <p:pic>
-        <p:nvPicPr>
-          <p:cNvPr id="12" name="그림 11">
-            <a:extLst>
-              <a:ext uri="{FF2B5EF4-FFF2-40B4-BE49-F238E27FC236}">
-                <a16:creationId xmlns:a16="http://schemas.microsoft.com/office/drawing/2014/main" id="{C2FF547D-36F8-6D92-DD89-2ABCCA505F45}"/>
-              </a:ext>
-            </a:extLst>
-          </p:cNvPr>
-          <p:cNvPicPr>
-            <a:picLocks noChangeAspect="1"/>
-          </p:cNvPicPr>
-          <p:nvPr/>
-        </p:nvPicPr>
-        <p:blipFill>
-          <a:blip r:embed="rId3"/>
-          <a:stretch>
-            <a:fillRect/>
-          </a:stretch>
-        </p:blipFill>
-        <p:spPr>
-          <a:xfrm>
-            <a:off x="3382629" y="1660362"/>
-            <a:ext cx="2324463" cy="2892828"/>
-          </a:xfrm>
-          <a:prstGeom prst="rect">
-            <a:avLst/>
-          </a:prstGeom>
-        </p:spPr>
-      </p:pic>
-      <p:sp>
-        <p:nvSpPr>
-          <p:cNvPr id="13" name="TextBox 12">
-            <a:extLst>
-              <a:ext uri="{FF2B5EF4-FFF2-40B4-BE49-F238E27FC236}">
-                <a16:creationId xmlns:a16="http://schemas.microsoft.com/office/drawing/2014/main" id="{BBA06497-C397-ADAA-3DA5-1A99263FA041}"/>
-              </a:ext>
-            </a:extLst>
-          </p:cNvPr>
-          <p:cNvSpPr txBox="1"/>
-          <p:nvPr/>
-        </p:nvSpPr>
-        <p:spPr>
-          <a:xfrm>
-            <a:off x="3365020" y="4584972"/>
-            <a:ext cx="2582174" cy="276999"/>
-          </a:xfrm>
-          <a:prstGeom prst="rect">
-            <a:avLst/>
-          </a:prstGeom>
-          <a:noFill/>
-        </p:spPr>
-        <p:txBody>
-          <a:bodyPr wrap="square" rtlCol="0">
-            <a:spAutoFit/>
-          </a:bodyPr>
-          <a:lstStyle/>
-          <a:p>
-            <a:r>
-              <a:rPr lang="en-US" altLang="ko-KR" sz="1200" dirty="0"/>
-              <a:t>[</a:t>
-            </a:r>
-            <a:r>
-              <a:rPr lang="ko-KR" altLang="en-US" sz="1200" dirty="0"/>
-              <a:t>자료</a:t>
-            </a:r>
-            <a:r>
-              <a:rPr lang="en-US" altLang="ko-KR" sz="1200" dirty="0"/>
-              <a:t>3] </a:t>
-            </a:r>
-            <a:r>
-              <a:rPr lang="ko-KR" altLang="en-US" sz="1200" dirty="0"/>
-              <a:t>게임</a:t>
-            </a:r>
-            <a:r>
-              <a:rPr lang="en-US" altLang="ko-KR" sz="1200" dirty="0"/>
-              <a:t>”</a:t>
-            </a:r>
-            <a:r>
-              <a:rPr lang="ko-KR" altLang="en-US" sz="1200" dirty="0" err="1"/>
-              <a:t>파티애니멀즈</a:t>
-            </a:r>
-            <a:r>
-              <a:rPr lang="en-US" altLang="ko-KR" sz="1200" dirty="0"/>
-              <a:t>”</a:t>
-            </a:r>
-            <a:r>
-              <a:rPr lang="ko-KR" altLang="en-US" sz="1200" dirty="0"/>
-              <a:t> 캐릭터</a:t>
-            </a:r>
-          </a:p>
-        </p:txBody>
-      </p:sp>
-      <p:sp>
-        <p:nvSpPr>
-          <p:cNvPr id="15" name="TextBox 14">
-            <a:extLst>
-              <a:ext uri="{FF2B5EF4-FFF2-40B4-BE49-F238E27FC236}">
-                <a16:creationId xmlns:a16="http://schemas.microsoft.com/office/drawing/2014/main" id="{9DDBF9A6-4880-3185-2CC3-6B9E831CD0CB}"/>
-              </a:ext>
-            </a:extLst>
-          </p:cNvPr>
-          <p:cNvSpPr txBox="1"/>
-          <p:nvPr/>
-        </p:nvSpPr>
-        <p:spPr>
-          <a:xfrm>
-            <a:off x="1000664" y="4553190"/>
-            <a:ext cx="2582174" cy="276999"/>
-          </a:xfrm>
-          <a:prstGeom prst="rect">
-            <a:avLst/>
-          </a:prstGeom>
-          <a:noFill/>
-        </p:spPr>
-        <p:txBody>
-          <a:bodyPr wrap="square" rtlCol="0">
-            <a:spAutoFit/>
-          </a:bodyPr>
-          <a:lstStyle/>
-          <a:p>
-            <a:r>
-              <a:rPr lang="en-US" altLang="ko-KR" sz="1200" dirty="0"/>
-              <a:t>[</a:t>
-            </a:r>
-            <a:r>
-              <a:rPr lang="ko-KR" altLang="en-US" sz="1200" dirty="0"/>
-              <a:t>자료</a:t>
-            </a:r>
-            <a:r>
-              <a:rPr lang="en-US" altLang="ko-KR" sz="1200" dirty="0"/>
-              <a:t>2] </a:t>
-            </a:r>
-            <a:r>
-              <a:rPr lang="ko-KR" altLang="en-US" sz="1200" dirty="0"/>
-              <a:t>게임</a:t>
-            </a:r>
-            <a:r>
-              <a:rPr lang="en-US" altLang="ko-KR" sz="1200" dirty="0"/>
-              <a:t>”</a:t>
-            </a:r>
-            <a:r>
-              <a:rPr lang="ko-KR" altLang="en-US" sz="1200" dirty="0"/>
-              <a:t>동물의 숲</a:t>
-            </a:r>
-            <a:r>
-              <a:rPr lang="en-US" altLang="ko-KR" sz="1200" dirty="0"/>
-              <a:t>”</a:t>
-            </a:r>
-            <a:r>
-              <a:rPr lang="ko-KR" altLang="en-US" sz="1200" dirty="0"/>
-              <a:t> 캐릭터</a:t>
-            </a:r>
-          </a:p>
-        </p:txBody>
-      </p:sp>
-    </p:spTree>
-    <p:extLst>
-      <p:ext uri="{BB962C8B-B14F-4D97-AF65-F5344CB8AC3E}">
-        <p14:creationId xmlns:p14="http://schemas.microsoft.com/office/powerpoint/2010/main" val="785226137"/>
       </p:ext>
     </p:extLst>
   </p:cSld>

--- a/documents/HyunahKwon/design/designing/for_teammates/프로토타입_기획.pptx
+++ b/documents/HyunahKwon/design/designing/for_teammates/프로토타입_기획.pptx
@@ -38127,32 +38127,10 @@
           <a:bodyPr/>
           <a:lstStyle/>
           <a:p>
-            <a:endParaRPr lang="ko-KR" altLang="en-US"/>
-          </a:p>
-        </p:txBody>
-      </p:sp>
-      <p:sp>
-        <p:nvSpPr>
-          <p:cNvPr id="5" name="내용 개체 틀 4">
-            <a:extLst>
-              <a:ext uri="{FF2B5EF4-FFF2-40B4-BE49-F238E27FC236}">
-                <a16:creationId xmlns:a16="http://schemas.microsoft.com/office/drawing/2014/main" id="{5F16492D-8E6C-7C78-CA51-12853483F888}"/>
-              </a:ext>
-            </a:extLst>
-          </p:cNvPr>
-          <p:cNvSpPr>
-            <a:spLocks noGrp="1"/>
-          </p:cNvSpPr>
-          <p:nvPr>
-            <p:ph sz="half" idx="1"/>
-          </p:nvPr>
-        </p:nvSpPr>
-        <p:spPr/>
-        <p:txBody>
-          <a:bodyPr/>
-          <a:lstStyle/>
-          <a:p>
-            <a:endParaRPr lang="ko-KR" altLang="en-US"/>
+            <a:r>
+              <a:rPr lang="ko-KR" altLang="en-US" dirty="0"/>
+              <a:t>게임 내 모든 객체</a:t>
+            </a:r>
           </a:p>
         </p:txBody>
       </p:sp>
@@ -38172,12 +38150,125 @@
             <p:ph sz="half" idx="2"/>
           </p:nvPr>
         </p:nvSpPr>
-        <p:spPr/>
+        <p:spPr>
+          <a:xfrm>
+            <a:off x="6172200" y="1207698"/>
+            <a:ext cx="5181600" cy="4969265"/>
+          </a:xfrm>
+        </p:spPr>
         <p:txBody>
-          <a:bodyPr/>
+          <a:bodyPr>
+            <a:normAutofit/>
+          </a:bodyPr>
           <a:lstStyle/>
           <a:p>
-            <a:endParaRPr lang="ko-KR" altLang="en-US"/>
+            <a:r>
+              <a:rPr lang="ko-KR" altLang="en-US" dirty="0" err="1"/>
+              <a:t>배달품</a:t>
+            </a:r>
+            <a:r>
+              <a:rPr lang="ko-KR" altLang="en-US" dirty="0"/>
+              <a:t> </a:t>
+            </a:r>
+            <a:r>
+              <a:rPr lang="en-US" altLang="ko-KR" dirty="0"/>
+              <a:t>:  1</a:t>
+            </a:r>
+            <a:r>
+              <a:rPr lang="ko-KR" altLang="en-US" dirty="0"/>
+              <a:t>종</a:t>
+            </a:r>
+            <a:endParaRPr lang="en-US" altLang="ko-KR" dirty="0"/>
+          </a:p>
+          <a:p>
+            <a:endParaRPr lang="en-US" altLang="ko-KR" dirty="0"/>
+          </a:p>
+          <a:p>
+            <a:r>
+              <a:rPr lang="ko-KR" altLang="en-US" dirty="0" err="1"/>
+              <a:t>플레이어블</a:t>
+            </a:r>
+            <a:r>
+              <a:rPr lang="ko-KR" altLang="en-US" dirty="0"/>
+              <a:t> 캐릭터 </a:t>
+            </a:r>
+            <a:r>
+              <a:rPr lang="en-US" altLang="ko-KR" dirty="0"/>
+              <a:t>: 2 </a:t>
+            </a:r>
+            <a:r>
+              <a:rPr lang="ko-KR" altLang="en-US" dirty="0"/>
+              <a:t>객체</a:t>
+            </a:r>
+            <a:endParaRPr lang="en-US" altLang="ko-KR" dirty="0"/>
+          </a:p>
+          <a:p>
+            <a:endParaRPr lang="en-US" altLang="ko-KR" dirty="0"/>
+          </a:p>
+          <a:p>
+            <a:r>
+              <a:rPr lang="en-US" altLang="ko-KR" dirty="0"/>
+              <a:t>NPC_</a:t>
+            </a:r>
+            <a:r>
+              <a:rPr lang="ko-KR" altLang="en-US" dirty="0"/>
+              <a:t>생물 </a:t>
+            </a:r>
+            <a:r>
+              <a:rPr lang="en-US" altLang="ko-KR" dirty="0"/>
+              <a:t>: </a:t>
+            </a:r>
+            <a:r>
+              <a:rPr lang="ko-KR" altLang="en-US" dirty="0"/>
+              <a:t>벌</a:t>
+            </a:r>
+            <a:r>
+              <a:rPr lang="en-US" altLang="ko-KR" dirty="0"/>
+              <a:t>, 20</a:t>
+            </a:r>
+            <a:r>
+              <a:rPr lang="ko-KR" altLang="en-US" dirty="0"/>
+              <a:t>객체</a:t>
+            </a:r>
+            <a:endParaRPr lang="en-US" altLang="ko-KR" dirty="0"/>
+          </a:p>
+          <a:p>
+            <a:endParaRPr lang="en-US" altLang="ko-KR" dirty="0"/>
+          </a:p>
+          <a:p>
+            <a:r>
+              <a:rPr lang="en-US" altLang="ko-KR" dirty="0"/>
+              <a:t>NPC_</a:t>
+            </a:r>
+            <a:r>
+              <a:rPr lang="ko-KR" altLang="en-US" dirty="0"/>
+              <a:t>주민</a:t>
+            </a:r>
+          </a:p>
+          <a:p>
+            <a:endParaRPr lang="en-US" altLang="ko-KR" dirty="0"/>
+          </a:p>
+          <a:p>
+            <a:r>
+              <a:rPr lang="ko-KR" altLang="en-US" dirty="0"/>
+              <a:t>오브젝트 </a:t>
+            </a:r>
+            <a:r>
+              <a:rPr lang="en-US" altLang="ko-KR" dirty="0"/>
+              <a:t>: </a:t>
+            </a:r>
+            <a:r>
+              <a:rPr lang="ko-KR" altLang="en-US" dirty="0"/>
+              <a:t>벌집</a:t>
+            </a:r>
+            <a:r>
+              <a:rPr lang="en-US" altLang="ko-KR" dirty="0"/>
+              <a:t>, 1</a:t>
+            </a:r>
+            <a:r>
+              <a:rPr lang="ko-KR" altLang="en-US" dirty="0"/>
+              <a:t>객체</a:t>
+            </a:r>
           </a:p>
         </p:txBody>
       </p:sp>
@@ -38202,10 +38293,187 @@
           <a:bodyPr/>
           <a:lstStyle/>
           <a:p>
-            <a:endParaRPr lang="ko-KR" altLang="en-US"/>
+            <a:r>
+              <a:rPr lang="ko-KR" altLang="en-US" dirty="0"/>
+              <a:t>컨텐츠</a:t>
+            </a:r>
           </a:p>
         </p:txBody>
       </p:sp>
+      <p:pic>
+        <p:nvPicPr>
+          <p:cNvPr id="9" name="내용 개체 틀 12" descr="열린 포장 상자 윤곽선">
+            <a:extLst>
+              <a:ext uri="{FF2B5EF4-FFF2-40B4-BE49-F238E27FC236}">
+                <a16:creationId xmlns:a16="http://schemas.microsoft.com/office/drawing/2014/main" id="{FFD5AB11-36C0-BA93-8D5A-DBF7F97304A6}"/>
+              </a:ext>
+            </a:extLst>
+          </p:cNvPr>
+          <p:cNvPicPr>
+            <a:picLocks noChangeAspect="1"/>
+          </p:cNvPicPr>
+          <p:nvPr/>
+        </p:nvPicPr>
+        <p:blipFill>
+          <a:blip>
+            <a:extLst>
+              <a:ext uri="{96DAC541-7B7A-43D3-8B79-37D633B846F1}">
+                <asvg:svgBlip xmlns:asvg="http://schemas.microsoft.com/office/drawing/2016/SVG/main" r:embed="rId2"/>
+              </a:ext>
+            </a:extLst>
+          </a:blip>
+          <a:stretch>
+            <a:fillRect/>
+          </a:stretch>
+        </p:blipFill>
+        <p:spPr>
+          <a:xfrm>
+            <a:off x="3010686" y="981639"/>
+            <a:ext cx="1094050" cy="1094050"/>
+          </a:xfrm>
+          <a:prstGeom prst="rect">
+            <a:avLst/>
+          </a:prstGeom>
+        </p:spPr>
+      </p:pic>
+      <p:pic>
+        <p:nvPicPr>
+          <p:cNvPr id="11" name="그림 10">
+            <a:extLst>
+              <a:ext uri="{FF2B5EF4-FFF2-40B4-BE49-F238E27FC236}">
+                <a16:creationId xmlns:a16="http://schemas.microsoft.com/office/drawing/2014/main" id="{C8825277-94BF-0D71-8A8A-E6E4ECCB70C0}"/>
+              </a:ext>
+            </a:extLst>
+          </p:cNvPr>
+          <p:cNvPicPr>
+            <a:picLocks noChangeAspect="1"/>
+          </p:cNvPicPr>
+          <p:nvPr/>
+        </p:nvPicPr>
+        <p:blipFill>
+          <a:blip r:embed="rId3"/>
+          <a:stretch>
+            <a:fillRect/>
+          </a:stretch>
+        </p:blipFill>
+        <p:spPr>
+          <a:xfrm>
+            <a:off x="3087571" y="2019091"/>
+            <a:ext cx="940279" cy="1338090"/>
+          </a:xfrm>
+          <a:prstGeom prst="rect">
+            <a:avLst/>
+          </a:prstGeom>
+        </p:spPr>
+      </p:pic>
+      <p:pic>
+        <p:nvPicPr>
+          <p:cNvPr id="13" name="그래픽 12" descr="벌 단색으로 채워진">
+            <a:extLst>
+              <a:ext uri="{FF2B5EF4-FFF2-40B4-BE49-F238E27FC236}">
+                <a16:creationId xmlns:a16="http://schemas.microsoft.com/office/drawing/2014/main" id="{7742402A-885A-F663-8EB6-D77C1773F1AB}"/>
+              </a:ext>
+            </a:extLst>
+          </p:cNvPr>
+          <p:cNvPicPr>
+            <a:picLocks noChangeAspect="1"/>
+          </p:cNvPicPr>
+          <p:nvPr/>
+        </p:nvPicPr>
+        <p:blipFill>
+          <a:blip>
+            <a:extLst>
+              <a:ext uri="{96DAC541-7B7A-43D3-8B79-37D633B846F1}">
+                <asvg:svgBlip xmlns:asvg="http://schemas.microsoft.com/office/drawing/2016/SVG/main" r:embed="rId4"/>
+              </a:ext>
+            </a:extLst>
+          </a:blip>
+          <a:stretch>
+            <a:fillRect/>
+          </a:stretch>
+        </p:blipFill>
+        <p:spPr>
+          <a:xfrm>
+            <a:off x="3153981" y="3357181"/>
+            <a:ext cx="841897" cy="841897"/>
+          </a:xfrm>
+          <a:prstGeom prst="rect">
+            <a:avLst/>
+          </a:prstGeom>
+        </p:spPr>
+      </p:pic>
+      <p:pic>
+        <p:nvPicPr>
+          <p:cNvPr id="15" name="그래픽 14" descr="댄스 단색으로 채워진">
+            <a:extLst>
+              <a:ext uri="{FF2B5EF4-FFF2-40B4-BE49-F238E27FC236}">
+                <a16:creationId xmlns:a16="http://schemas.microsoft.com/office/drawing/2014/main" id="{B6A640B9-0394-C65D-8633-44604350805A}"/>
+              </a:ext>
+            </a:extLst>
+          </p:cNvPr>
+          <p:cNvPicPr>
+            <a:picLocks noChangeAspect="1"/>
+          </p:cNvPicPr>
+          <p:nvPr/>
+        </p:nvPicPr>
+        <p:blipFill>
+          <a:blip>
+            <a:extLst>
+              <a:ext uri="{96DAC541-7B7A-43D3-8B79-37D633B846F1}">
+                <asvg:svgBlip xmlns:asvg="http://schemas.microsoft.com/office/drawing/2016/SVG/main" r:embed="rId5"/>
+              </a:ext>
+            </a:extLst>
+          </a:blip>
+          <a:stretch>
+            <a:fillRect/>
+          </a:stretch>
+        </p:blipFill>
+        <p:spPr>
+          <a:xfrm>
+            <a:off x="2949514" y="4021102"/>
+            <a:ext cx="1250832" cy="1250832"/>
+          </a:xfrm>
+          <a:prstGeom prst="rect">
+            <a:avLst/>
+          </a:prstGeom>
+        </p:spPr>
+      </p:pic>
+      <p:pic>
+        <p:nvPicPr>
+          <p:cNvPr id="17" name="그래픽 16" descr="벌집 단색으로 채워진">
+            <a:extLst>
+              <a:ext uri="{FF2B5EF4-FFF2-40B4-BE49-F238E27FC236}">
+                <a16:creationId xmlns:a16="http://schemas.microsoft.com/office/drawing/2014/main" id="{05E7D406-C574-6F6D-7ACD-181BB58EC903}"/>
+              </a:ext>
+            </a:extLst>
+          </p:cNvPr>
+          <p:cNvPicPr>
+            <a:picLocks noChangeAspect="1"/>
+          </p:cNvPicPr>
+          <p:nvPr/>
+        </p:nvPicPr>
+        <p:blipFill>
+          <a:blip>
+            <a:extLst>
+              <a:ext uri="{96DAC541-7B7A-43D3-8B79-37D633B846F1}">
+                <asvg:svgBlip xmlns:asvg="http://schemas.microsoft.com/office/drawing/2016/SVG/main" r:embed="rId6"/>
+              </a:ext>
+            </a:extLst>
+          </a:blip>
+          <a:stretch>
+            <a:fillRect/>
+          </a:stretch>
+        </p:blipFill>
+        <p:spPr>
+          <a:xfrm>
+            <a:off x="3010686" y="5279123"/>
+            <a:ext cx="1094050" cy="1094050"/>
+          </a:xfrm>
+          <a:prstGeom prst="rect">
+            <a:avLst/>
+          </a:prstGeom>
+        </p:spPr>
+      </p:pic>
     </p:spTree>
     <p:extLst>
       <p:ext uri="{BB962C8B-B14F-4D97-AF65-F5344CB8AC3E}">

--- a/documents/HyunahKwon/design/designing/for_teammates/프로토타입_기획.pptx
+++ b/documents/HyunahKwon/design/designing/for_teammates/프로토타입_기획.pptx
@@ -6,7 +6,7 @@
     <p:sldMasterId id="2147483666" r:id="rId2"/>
   </p:sldMasterIdLst>
   <p:notesMasterIdLst>
-    <p:notesMasterId r:id="rId33"/>
+    <p:notesMasterId r:id="rId35"/>
   </p:notesMasterIdLst>
   <p:sldIdLst>
     <p:sldId id="256" r:id="rId3"/>
@@ -37,8 +37,10 @@
     <p:sldId id="290" r:id="rId28"/>
     <p:sldId id="297" r:id="rId29"/>
     <p:sldId id="263" r:id="rId30"/>
-    <p:sldId id="277" r:id="rId31"/>
-    <p:sldId id="305" r:id="rId32"/>
+    <p:sldId id="312" r:id="rId31"/>
+    <p:sldId id="277" r:id="rId32"/>
+    <p:sldId id="305" r:id="rId33"/>
+    <p:sldId id="311" r:id="rId34"/>
   </p:sldIdLst>
   <p:sldSz cx="12192000" cy="6858000"/>
   <p:notesSz cx="6858000" cy="9144000"/>
@@ -227,7 +229,7 @@
           <a:p>
             <a:fld id="{E86C1683-0A8E-4C89-8718-DB0F1CCCEAC4}" type="datetimeFigureOut">
               <a:rPr lang="ko-KR" altLang="en-US" smtClean="0"/>
-              <a:t>2026-09-26</a:t>
+              <a:t>2026-09-29</a:t>
             </a:fld>
             <a:endParaRPr lang="ko-KR" altLang="en-US"/>
           </a:p>
@@ -861,7 +863,7 @@
           <a:p>
             <a:fld id="{63FD5073-3D75-4506-8C91-5119827B979E}" type="datetimeFigureOut">
               <a:rPr lang="ko-KR" altLang="en-US" smtClean="0"/>
-              <a:t>2026-09-26</a:t>
+              <a:t>2026-09-29</a:t>
             </a:fld>
             <a:endParaRPr lang="ko-KR" altLang="en-US"/>
           </a:p>
@@ -1136,7 +1138,7 @@
           <a:p>
             <a:fld id="{63FD5073-3D75-4506-8C91-5119827B979E}" type="datetimeFigureOut">
               <a:rPr lang="ko-KR" altLang="en-US" smtClean="0"/>
-              <a:t>2026-09-26</a:t>
+              <a:t>2026-09-29</a:t>
             </a:fld>
             <a:endParaRPr lang="ko-KR" altLang="en-US"/>
           </a:p>
@@ -1548,7 +1550,7 @@
           <a:p>
             <a:fld id="{63FD5073-3D75-4506-8C91-5119827B979E}" type="datetimeFigureOut">
               <a:rPr lang="ko-KR" altLang="en-US" smtClean="0"/>
-              <a:t>2026-09-26</a:t>
+              <a:t>2026-09-29</a:t>
             </a:fld>
             <a:endParaRPr lang="ko-KR" altLang="en-US"/>
           </a:p>
@@ -1859,7 +1861,7 @@
           <a:p>
             <a:fld id="{63FD5073-3D75-4506-8C91-5119827B979E}" type="datetimeFigureOut">
               <a:rPr lang="ko-KR" altLang="en-US" smtClean="0"/>
-              <a:t>2026-09-26</a:t>
+              <a:t>2026-09-29</a:t>
             </a:fld>
             <a:endParaRPr lang="ko-KR" altLang="en-US"/>
           </a:p>
@@ -2150,7 +2152,7 @@
           <a:p>
             <a:fld id="{63FD5073-3D75-4506-8C91-5119827B979E}" type="datetimeFigureOut">
               <a:rPr lang="ko-KR" altLang="en-US" smtClean="0"/>
-              <a:t>2026-09-26</a:t>
+              <a:t>2026-09-29</a:t>
             </a:fld>
             <a:endParaRPr lang="ko-KR" altLang="en-US"/>
           </a:p>
@@ -2348,7 +2350,7 @@
           <a:p>
             <a:fld id="{16C850D4-9086-4998-AA40-EC3A5E96598E}" type="datetime1">
               <a:rPr lang="en-US" altLang="ko-KR" smtClean="0"/>
-              <a:t>9/26/2026</a:t>
+              <a:t>9/29/2026</a:t>
             </a:fld>
             <a:endParaRPr lang="ko-KR" altLang="en-US"/>
           </a:p>
@@ -2655,7 +2657,7 @@
           <a:p>
             <a:fld id="{492E84DF-9BBC-4DFC-AB92-EB3DF1902948}" type="datetime1">
               <a:rPr lang="en-US" altLang="ko-KR" smtClean="0"/>
-              <a:t>9/26/2026</a:t>
+              <a:t>9/29/2026</a:t>
             </a:fld>
             <a:endParaRPr lang="ko-KR" altLang="en-US"/>
           </a:p>
@@ -2838,7 +2840,7 @@
           <a:p>
             <a:fld id="{4F7680CB-DB40-47CE-A8D2-A12CB1478785}" type="datetime1">
               <a:rPr lang="en-US" altLang="ko-KR" smtClean="0"/>
-              <a:t>9/26/2026</a:t>
+              <a:t>9/29/2026</a:t>
             </a:fld>
             <a:endParaRPr lang="ko-KR" altLang="en-US"/>
           </a:p>
@@ -3155,7 +3157,7 @@
           <a:p>
             <a:fld id="{63FD5073-3D75-4506-8C91-5119827B979E}" type="datetimeFigureOut">
               <a:rPr lang="ko-KR" altLang="en-US" smtClean="0"/>
-              <a:t>2026-09-26</a:t>
+              <a:t>2026-09-29</a:t>
             </a:fld>
             <a:endParaRPr lang="ko-KR" altLang="en-US"/>
           </a:p>
@@ -3396,7 +3398,7 @@
           <a:p>
             <a:fld id="{63FD5073-3D75-4506-8C91-5119827B979E}" type="datetimeFigureOut">
               <a:rPr lang="ko-KR" altLang="en-US" smtClean="0"/>
-              <a:t>2026-09-26</a:t>
+              <a:t>2026-09-29</a:t>
             </a:fld>
             <a:endParaRPr lang="ko-KR" altLang="en-US"/>
           </a:p>
@@ -3958,7 +3960,7 @@
           <a:p>
             <a:fld id="{46CA07D7-17C4-4932-A5CB-22BA65F5FC8D}" type="datetime1">
               <a:rPr lang="en-US" altLang="ko-KR" smtClean="0"/>
-              <a:t>9/26/2026</a:t>
+              <a:t>9/29/2026</a:t>
             </a:fld>
             <a:endParaRPr lang="ko-KR" altLang="en-US"/>
           </a:p>
@@ -4860,7 +4862,7 @@
           <a:p>
             <a:fld id="{492E84DF-9BBC-4DFC-AB92-EB3DF1902948}" type="datetime1">
               <a:rPr lang="en-US" altLang="ko-KR" smtClean="0"/>
-              <a:t>9/27/2026</a:t>
+              <a:t>9/29/2026</a:t>
             </a:fld>
             <a:endParaRPr lang="ko-KR" altLang="en-US"/>
           </a:p>
@@ -6887,7 +6889,7 @@
           <a:p>
             <a:fld id="{492E84DF-9BBC-4DFC-AB92-EB3DF1902948}" type="datetime1">
               <a:rPr lang="en-US" altLang="ko-KR" smtClean="0"/>
-              <a:t>9/26/2026</a:t>
+              <a:t>9/29/2026</a:t>
             </a:fld>
             <a:endParaRPr lang="ko-KR" altLang="en-US"/>
           </a:p>
@@ -7282,7 +7284,7 @@
           <a:p>
             <a:fld id="{492E84DF-9BBC-4DFC-AB92-EB3DF1902948}" type="datetime1">
               <a:rPr lang="en-US" altLang="ko-KR" smtClean="0"/>
-              <a:t>9/26/2026</a:t>
+              <a:t>9/29/2026</a:t>
             </a:fld>
             <a:endParaRPr lang="ko-KR" altLang="en-US"/>
           </a:p>
@@ -7514,7 +7516,7 @@
           <a:p>
             <a:fld id="{492E84DF-9BBC-4DFC-AB92-EB3DF1902948}" type="datetime1">
               <a:rPr lang="en-US" altLang="ko-KR" smtClean="0"/>
-              <a:t>9/26/2026</a:t>
+              <a:t>9/29/2026</a:t>
             </a:fld>
             <a:endParaRPr lang="ko-KR" altLang="en-US"/>
           </a:p>
@@ -8988,7 +8990,7 @@
           <a:p>
             <a:fld id="{492E84DF-9BBC-4DFC-AB92-EB3DF1902948}" type="datetime1">
               <a:rPr lang="en-US" altLang="ko-KR" smtClean="0"/>
-              <a:t>9/27/2026</a:t>
+              <a:t>9/29/2026</a:t>
             </a:fld>
             <a:endParaRPr lang="ko-KR" altLang="en-US"/>
           </a:p>
@@ -10614,7 +10616,7 @@
           <a:p>
             <a:fld id="{492E84DF-9BBC-4DFC-AB92-EB3DF1902948}" type="datetime1">
               <a:rPr lang="en-US" altLang="ko-KR" smtClean="0"/>
-              <a:t>9/26/2026</a:t>
+              <a:t>9/29/2026</a:t>
             </a:fld>
             <a:endParaRPr lang="ko-KR" altLang="en-US"/>
           </a:p>
@@ -14047,7 +14049,7 @@
           <a:p>
             <a:fld id="{AE0895E6-717A-4F75-ADB4-B202670E9437}" type="datetime1">
               <a:rPr lang="ko-KR" altLang="en-US" smtClean="0"/>
-              <a:t>2026-09-26</a:t>
+              <a:t>2026-09-29</a:t>
             </a:fld>
             <a:endParaRPr lang="ko-KR" altLang="en-US"/>
           </a:p>
@@ -15743,7 +15745,7 @@
           <a:p>
             <a:fld id="{492E84DF-9BBC-4DFC-AB92-EB3DF1902948}" type="datetime1">
               <a:rPr lang="en-US" altLang="ko-KR" smtClean="0"/>
-              <a:t>9/26/2026</a:t>
+              <a:t>9/29/2026</a:t>
             </a:fld>
             <a:endParaRPr lang="ko-KR" altLang="en-US"/>
           </a:p>
@@ -18265,7 +18267,7 @@
           <a:p>
             <a:fld id="{492E84DF-9BBC-4DFC-AB92-EB3DF1902948}" type="datetime1">
               <a:rPr lang="en-US" altLang="ko-KR" smtClean="0"/>
-              <a:t>9/26/2026</a:t>
+              <a:t>9/29/2026</a:t>
             </a:fld>
             <a:endParaRPr lang="ko-KR" altLang="en-US"/>
           </a:p>
@@ -18740,7 +18742,7 @@
           <a:p>
             <a:fld id="{492E84DF-9BBC-4DFC-AB92-EB3DF1902948}" type="datetime1">
               <a:rPr lang="en-US" altLang="ko-KR" smtClean="0"/>
-              <a:t>9/26/2026</a:t>
+              <a:t>9/29/2026</a:t>
             </a:fld>
             <a:endParaRPr lang="ko-KR" altLang="en-US"/>
           </a:p>
@@ -20739,7 +20741,7 @@
           <a:p>
             <a:fld id="{492E84DF-9BBC-4DFC-AB92-EB3DF1902948}" type="datetime1">
               <a:rPr lang="en-US" altLang="ko-KR" smtClean="0"/>
-              <a:t>9/26/2026</a:t>
+              <a:t>9/29/2026</a:t>
             </a:fld>
             <a:endParaRPr lang="ko-KR" altLang="en-US"/>
           </a:p>
@@ -22308,7 +22310,7 @@
           <a:p>
             <a:fld id="{492E84DF-9BBC-4DFC-AB92-EB3DF1902948}" type="datetime1">
               <a:rPr lang="en-US" altLang="ko-KR" smtClean="0"/>
-              <a:t>9/26/2026</a:t>
+              <a:t>9/29/2026</a:t>
             </a:fld>
             <a:endParaRPr lang="ko-KR" altLang="en-US"/>
           </a:p>
@@ -25688,7 +25690,7 @@
           <a:p>
             <a:fld id="{492E84DF-9BBC-4DFC-AB92-EB3DF1902948}" type="datetime1">
               <a:rPr lang="en-US" altLang="ko-KR" smtClean="0"/>
-              <a:t>9/26/2026</a:t>
+              <a:t>9/29/2026</a:t>
             </a:fld>
             <a:endParaRPr lang="ko-KR" altLang="en-US"/>
           </a:p>
@@ -29253,7 +29255,7 @@
           <a:p>
             <a:fld id="{492E84DF-9BBC-4DFC-AB92-EB3DF1902948}" type="datetime1">
               <a:rPr lang="en-US" altLang="ko-KR" smtClean="0"/>
-              <a:t>9/27/2026</a:t>
+              <a:t>9/29/2026</a:t>
             </a:fld>
             <a:endParaRPr lang="ko-KR" altLang="en-US"/>
           </a:p>
@@ -30075,6 +30077,3073 @@
   <p:cSld>
     <p:spTree>
       <p:nvGrpSpPr>
+        <p:cNvPr id="1" name="">
+          <a:extLst>
+            <a:ext uri="{FF2B5EF4-FFF2-40B4-BE49-F238E27FC236}">
+              <a16:creationId xmlns:a16="http://schemas.microsoft.com/office/drawing/2014/main" id="{4E6E9131-CA6A-73EF-8786-50169C02D7A6}"/>
+            </a:ext>
+          </a:extLst>
+        </p:cNvPr>
+        <p:cNvGrpSpPr/>
+        <p:nvPr/>
+      </p:nvGrpSpPr>
+      <p:grpSpPr>
+        <a:xfrm>
+          <a:off x="0" y="0"/>
+          <a:ext cx="0" cy="0"/>
+          <a:chOff x="0" y="0"/>
+          <a:chExt cx="0" cy="0"/>
+        </a:xfrm>
+      </p:grpSpPr>
+      <p:sp>
+        <p:nvSpPr>
+          <p:cNvPr id="8" name="제목 7">
+            <a:extLst>
+              <a:ext uri="{FF2B5EF4-FFF2-40B4-BE49-F238E27FC236}">
+                <a16:creationId xmlns:a16="http://schemas.microsoft.com/office/drawing/2014/main" id="{26FB4582-482D-F94F-9CBE-3759C4EC19AC}"/>
+              </a:ext>
+            </a:extLst>
+          </p:cNvPr>
+          <p:cNvSpPr>
+            <a:spLocks noGrp="1"/>
+          </p:cNvSpPr>
+          <p:nvPr>
+            <p:ph type="title"/>
+          </p:nvPr>
+        </p:nvSpPr>
+        <p:spPr>
+          <a:xfrm>
+            <a:off x="0" y="0"/>
+            <a:ext cx="5670430" cy="662782"/>
+          </a:xfrm>
+        </p:spPr>
+        <p:txBody>
+          <a:bodyPr>
+            <a:normAutofit/>
+          </a:bodyPr>
+          <a:lstStyle/>
+          <a:p>
+            <a:r>
+              <a:rPr lang="ko-KR" altLang="en-US" dirty="0"/>
+              <a:t>데이터 테이블</a:t>
+            </a:r>
+            <a:r>
+              <a:rPr lang="en-US" altLang="ko-KR" dirty="0"/>
+              <a:t>_</a:t>
+            </a:r>
+            <a:endParaRPr lang="ko-KR" altLang="en-US" dirty="0"/>
+          </a:p>
+        </p:txBody>
+      </p:sp>
+      <p:graphicFrame>
+        <p:nvGraphicFramePr>
+          <p:cNvPr id="2" name="내용 개체 틀 1">
+            <a:extLst>
+              <a:ext uri="{FF2B5EF4-FFF2-40B4-BE49-F238E27FC236}">
+                <a16:creationId xmlns:a16="http://schemas.microsoft.com/office/drawing/2014/main" id="{353D2E58-196B-F7C9-3A8B-B55E207FBBB6}"/>
+              </a:ext>
+            </a:extLst>
+          </p:cNvPr>
+          <p:cNvGraphicFramePr>
+            <a:graphicFrameLocks noGrp="1"/>
+          </p:cNvGraphicFramePr>
+          <p:nvPr>
+            <p:ph idx="1"/>
+            <p:extLst>
+              <p:ext uri="{D42A27DB-BD31-4B8C-83A1-F6EECF244321}">
+                <p14:modId xmlns:p14="http://schemas.microsoft.com/office/powerpoint/2010/main" val="2696473664"/>
+              </p:ext>
+            </p:extLst>
+          </p:nvPr>
+        </p:nvGraphicFramePr>
+        <p:xfrm>
+          <a:off x="838198" y="1121076"/>
+          <a:ext cx="10715445" cy="2134422"/>
+        </p:xfrm>
+        <a:graphic>
+          <a:graphicData uri="http://schemas.openxmlformats.org/drawingml/2006/table">
+            <a:tbl>
+              <a:tblPr firstRow="1" bandRow="1">
+                <a:tableStyleId>{5940675A-B579-460E-94D1-54222C63F5DA}</a:tableStyleId>
+              </a:tblPr>
+              <a:tblGrid>
+                <a:gridCol w="1190605">
+                  <a:extLst>
+                    <a:ext uri="{9D8B030D-6E8A-4147-A177-3AD203B41FA5}">
+                      <a16:colId xmlns:a16="http://schemas.microsoft.com/office/drawing/2014/main" val="4245382652"/>
+                    </a:ext>
+                  </a:extLst>
+                </a:gridCol>
+                <a:gridCol w="1190605">
+                  <a:extLst>
+                    <a:ext uri="{9D8B030D-6E8A-4147-A177-3AD203B41FA5}">
+                      <a16:colId xmlns:a16="http://schemas.microsoft.com/office/drawing/2014/main" val="1933533662"/>
+                    </a:ext>
+                  </a:extLst>
+                </a:gridCol>
+                <a:gridCol w="1190605">
+                  <a:extLst>
+                    <a:ext uri="{9D8B030D-6E8A-4147-A177-3AD203B41FA5}">
+                      <a16:colId xmlns:a16="http://schemas.microsoft.com/office/drawing/2014/main" val="33392647"/>
+                    </a:ext>
+                  </a:extLst>
+                </a:gridCol>
+                <a:gridCol w="1190605">
+                  <a:extLst>
+                    <a:ext uri="{9D8B030D-6E8A-4147-A177-3AD203B41FA5}">
+                      <a16:colId xmlns:a16="http://schemas.microsoft.com/office/drawing/2014/main" val="3082165443"/>
+                    </a:ext>
+                  </a:extLst>
+                </a:gridCol>
+                <a:gridCol w="1190605">
+                  <a:extLst>
+                    <a:ext uri="{9D8B030D-6E8A-4147-A177-3AD203B41FA5}">
+                      <a16:colId xmlns:a16="http://schemas.microsoft.com/office/drawing/2014/main" val="1142584066"/>
+                    </a:ext>
+                  </a:extLst>
+                </a:gridCol>
+                <a:gridCol w="1190605">
+                  <a:extLst>
+                    <a:ext uri="{9D8B030D-6E8A-4147-A177-3AD203B41FA5}">
+                      <a16:colId xmlns:a16="http://schemas.microsoft.com/office/drawing/2014/main" val="4113416892"/>
+                    </a:ext>
+                  </a:extLst>
+                </a:gridCol>
+                <a:gridCol w="1190605">
+                  <a:extLst>
+                    <a:ext uri="{9D8B030D-6E8A-4147-A177-3AD203B41FA5}">
+                      <a16:colId xmlns:a16="http://schemas.microsoft.com/office/drawing/2014/main" val="1586902170"/>
+                    </a:ext>
+                  </a:extLst>
+                </a:gridCol>
+                <a:gridCol w="1190605">
+                  <a:extLst>
+                    <a:ext uri="{9D8B030D-6E8A-4147-A177-3AD203B41FA5}">
+                      <a16:colId xmlns:a16="http://schemas.microsoft.com/office/drawing/2014/main" val="3365782907"/>
+                    </a:ext>
+                  </a:extLst>
+                </a:gridCol>
+                <a:gridCol w="1190605">
+                  <a:extLst>
+                    <a:ext uri="{9D8B030D-6E8A-4147-A177-3AD203B41FA5}">
+                      <a16:colId xmlns:a16="http://schemas.microsoft.com/office/drawing/2014/main" val="2323312840"/>
+                    </a:ext>
+                  </a:extLst>
+                </a:gridCol>
+              </a:tblGrid>
+              <a:tr h="711474">
+                <a:tc>
+                  <a:txBody>
+                    <a:bodyPr/>
+                    <a:lstStyle/>
+                    <a:p>
+                      <a:pPr algn="ctr" latinLnBrk="1"/>
+                      <a:endParaRPr lang="ko-KR" altLang="en-US" dirty="0"/>
+                    </a:p>
+                  </a:txBody>
+                  <a:tcPr anchor="ctr"/>
+                </a:tc>
+                <a:tc>
+                  <a:txBody>
+                    <a:bodyPr/>
+                    <a:lstStyle/>
+                    <a:p>
+                      <a:pPr algn="ctr" latinLnBrk="1"/>
+                      <a:r>
+                        <a:rPr lang="ko-KR" altLang="en-US" dirty="0"/>
+                        <a:t>주거지</a:t>
+                      </a:r>
+                      <a:r>
+                        <a:rPr lang="en-US" altLang="ko-KR" dirty="0"/>
+                        <a:t>1</a:t>
+                      </a:r>
+                      <a:endParaRPr lang="ko-KR" altLang="en-US" dirty="0"/>
+                    </a:p>
+                  </a:txBody>
+                  <a:tcPr anchor="ctr"/>
+                </a:tc>
+                <a:tc>
+                  <a:txBody>
+                    <a:bodyPr/>
+                    <a:lstStyle/>
+                    <a:p>
+                      <a:pPr algn="ctr" latinLnBrk="1"/>
+                      <a:r>
+                        <a:rPr lang="ko-KR" altLang="en-US" dirty="0"/>
+                        <a:t>주거지</a:t>
+                      </a:r>
+                      <a:r>
+                        <a:rPr lang="en-US" altLang="ko-KR" dirty="0"/>
+                        <a:t>2</a:t>
+                      </a:r>
+                      <a:endParaRPr lang="ko-KR" altLang="en-US" dirty="0"/>
+                    </a:p>
+                  </a:txBody>
+                  <a:tcPr anchor="ctr"/>
+                </a:tc>
+                <a:tc>
+                  <a:txBody>
+                    <a:bodyPr/>
+                    <a:lstStyle/>
+                    <a:p>
+                      <a:pPr algn="ctr" latinLnBrk="1"/>
+                      <a:r>
+                        <a:rPr lang="ko-KR" altLang="en-US" dirty="0"/>
+                        <a:t>주거지</a:t>
+                      </a:r>
+                      <a:r>
+                        <a:rPr lang="en-US" altLang="ko-KR" dirty="0"/>
+                        <a:t>3</a:t>
+                      </a:r>
+                      <a:br>
+                        <a:rPr lang="en-US" altLang="ko-KR" dirty="0"/>
+                      </a:br>
+                      <a:r>
+                        <a:rPr lang="en-US" altLang="ko-KR" dirty="0"/>
+                        <a:t>(</a:t>
+                      </a:r>
+                      <a:r>
+                        <a:rPr lang="ko-KR" altLang="en-US" dirty="0"/>
+                        <a:t>집</a:t>
+                      </a:r>
+                      <a:r>
+                        <a:rPr lang="en-US" altLang="ko-KR" dirty="0"/>
+                        <a:t>)</a:t>
+                      </a:r>
+                      <a:endParaRPr lang="ko-KR" altLang="en-US" dirty="0"/>
+                    </a:p>
+                  </a:txBody>
+                  <a:tcPr anchor="ctr"/>
+                </a:tc>
+                <a:tc>
+                  <a:txBody>
+                    <a:bodyPr/>
+                    <a:lstStyle/>
+                    <a:p>
+                      <a:pPr algn="ctr" latinLnBrk="1"/>
+                      <a:endParaRPr lang="ko-KR" altLang="en-US" dirty="0"/>
+                    </a:p>
+                  </a:txBody>
+                  <a:tcPr anchor="ctr"/>
+                </a:tc>
+                <a:tc>
+                  <a:txBody>
+                    <a:bodyPr/>
+                    <a:lstStyle/>
+                    <a:p>
+                      <a:pPr algn="ctr" latinLnBrk="1"/>
+                      <a:endParaRPr lang="ko-KR" altLang="en-US" dirty="0"/>
+                    </a:p>
+                  </a:txBody>
+                  <a:tcPr anchor="ctr"/>
+                </a:tc>
+                <a:tc>
+                  <a:txBody>
+                    <a:bodyPr/>
+                    <a:lstStyle/>
+                    <a:p>
+                      <a:pPr algn="ctr" latinLnBrk="1"/>
+                      <a:endParaRPr lang="ko-KR" altLang="en-US" dirty="0"/>
+                    </a:p>
+                  </a:txBody>
+                  <a:tcPr anchor="ctr"/>
+                </a:tc>
+                <a:tc>
+                  <a:txBody>
+                    <a:bodyPr/>
+                    <a:lstStyle/>
+                    <a:p>
+                      <a:pPr algn="ctr" latinLnBrk="1"/>
+                      <a:endParaRPr lang="ko-KR" altLang="en-US" dirty="0"/>
+                    </a:p>
+                  </a:txBody>
+                  <a:tcPr anchor="ctr"/>
+                </a:tc>
+                <a:tc>
+                  <a:txBody>
+                    <a:bodyPr/>
+                    <a:lstStyle/>
+                    <a:p>
+                      <a:pPr algn="ctr" latinLnBrk="1"/>
+                      <a:endParaRPr lang="ko-KR" altLang="en-US" dirty="0"/>
+                    </a:p>
+                  </a:txBody>
+                  <a:tcPr anchor="ctr"/>
+                </a:tc>
+                <a:extLst>
+                  <a:ext uri="{0D108BD9-81ED-4DB2-BD59-A6C34878D82A}">
+                    <a16:rowId xmlns:a16="http://schemas.microsoft.com/office/drawing/2014/main" val="3362337053"/>
+                  </a:ext>
+                </a:extLst>
+              </a:tr>
+              <a:tr h="711474">
+                <a:tc>
+                  <a:txBody>
+                    <a:bodyPr/>
+                    <a:lstStyle/>
+                    <a:p>
+                      <a:pPr algn="ctr" latinLnBrk="1"/>
+                      <a:r>
+                        <a:rPr lang="ko-KR" altLang="en-US" dirty="0"/>
+                        <a:t>크기</a:t>
+                      </a:r>
+                      <a:br>
+                        <a:rPr lang="en-US" altLang="ko-KR" dirty="0"/>
+                      </a:br>
+                      <a:r>
+                        <a:rPr lang="en-US" altLang="ko-KR" dirty="0"/>
+                        <a:t>(</a:t>
+                      </a:r>
+                      <a:r>
+                        <a:rPr lang="ko-KR" altLang="en-US" dirty="0"/>
+                        <a:t>가로세로</a:t>
+                      </a:r>
+                      <a:r>
+                        <a:rPr lang="en-US" altLang="ko-KR" dirty="0"/>
+                        <a:t>)</a:t>
+                      </a:r>
+                      <a:endParaRPr lang="ko-KR" altLang="en-US" dirty="0"/>
+                    </a:p>
+                  </a:txBody>
+                  <a:tcPr anchor="ctr"/>
+                </a:tc>
+                <a:tc>
+                  <a:txBody>
+                    <a:bodyPr/>
+                    <a:lstStyle/>
+                    <a:p>
+                      <a:pPr algn="ctr" latinLnBrk="1"/>
+                      <a:endParaRPr lang="ko-KR" altLang="en-US" dirty="0"/>
+                    </a:p>
+                  </a:txBody>
+                  <a:tcPr anchor="ctr"/>
+                </a:tc>
+                <a:tc>
+                  <a:txBody>
+                    <a:bodyPr/>
+                    <a:lstStyle/>
+                    <a:p>
+                      <a:pPr algn="ctr" latinLnBrk="1"/>
+                      <a:endParaRPr lang="ko-KR" altLang="en-US" dirty="0"/>
+                    </a:p>
+                  </a:txBody>
+                  <a:tcPr anchor="ctr"/>
+                </a:tc>
+                <a:tc>
+                  <a:txBody>
+                    <a:bodyPr/>
+                    <a:lstStyle/>
+                    <a:p>
+                      <a:pPr algn="ctr" latinLnBrk="1"/>
+                      <a:endParaRPr lang="ko-KR" altLang="en-US" dirty="0"/>
+                    </a:p>
+                  </a:txBody>
+                  <a:tcPr anchor="ctr"/>
+                </a:tc>
+                <a:tc>
+                  <a:txBody>
+                    <a:bodyPr/>
+                    <a:lstStyle/>
+                    <a:p>
+                      <a:pPr algn="ctr" latinLnBrk="1"/>
+                      <a:endParaRPr lang="ko-KR" altLang="en-US" dirty="0"/>
+                    </a:p>
+                  </a:txBody>
+                  <a:tcPr anchor="ctr"/>
+                </a:tc>
+                <a:tc>
+                  <a:txBody>
+                    <a:bodyPr/>
+                    <a:lstStyle/>
+                    <a:p>
+                      <a:pPr algn="ctr" latinLnBrk="1"/>
+                      <a:endParaRPr lang="ko-KR" altLang="en-US" dirty="0"/>
+                    </a:p>
+                  </a:txBody>
+                  <a:tcPr anchor="ctr"/>
+                </a:tc>
+                <a:tc>
+                  <a:txBody>
+                    <a:bodyPr/>
+                    <a:lstStyle/>
+                    <a:p>
+                      <a:pPr algn="ctr" latinLnBrk="1"/>
+                      <a:endParaRPr lang="ko-KR" altLang="en-US" dirty="0"/>
+                    </a:p>
+                  </a:txBody>
+                  <a:tcPr anchor="ctr"/>
+                </a:tc>
+                <a:tc>
+                  <a:txBody>
+                    <a:bodyPr/>
+                    <a:lstStyle/>
+                    <a:p>
+                      <a:pPr algn="ctr" latinLnBrk="1"/>
+                      <a:endParaRPr lang="ko-KR" altLang="en-US" dirty="0"/>
+                    </a:p>
+                  </a:txBody>
+                  <a:tcPr anchor="ctr"/>
+                </a:tc>
+                <a:tc>
+                  <a:txBody>
+                    <a:bodyPr/>
+                    <a:lstStyle/>
+                    <a:p>
+                      <a:pPr algn="ctr" latinLnBrk="1"/>
+                      <a:endParaRPr lang="ko-KR" altLang="en-US" dirty="0"/>
+                    </a:p>
+                  </a:txBody>
+                  <a:tcPr anchor="ctr"/>
+                </a:tc>
+                <a:extLst>
+                  <a:ext uri="{0D108BD9-81ED-4DB2-BD59-A6C34878D82A}">
+                    <a16:rowId xmlns:a16="http://schemas.microsoft.com/office/drawing/2014/main" val="2546568347"/>
+                  </a:ext>
+                </a:extLst>
+              </a:tr>
+              <a:tr h="711474">
+                <a:tc>
+                  <a:txBody>
+                    <a:bodyPr/>
+                    <a:lstStyle/>
+                    <a:p>
+                      <a:pPr algn="ctr" latinLnBrk="1"/>
+                      <a:r>
+                        <a:rPr lang="ko-KR" altLang="en-US" dirty="0"/>
+                        <a:t>높이</a:t>
+                      </a:r>
+                    </a:p>
+                  </a:txBody>
+                  <a:tcPr anchor="ctr"/>
+                </a:tc>
+                <a:tc>
+                  <a:txBody>
+                    <a:bodyPr/>
+                    <a:lstStyle/>
+                    <a:p>
+                      <a:pPr algn="ctr" latinLnBrk="1"/>
+                      <a:endParaRPr lang="ko-KR" altLang="en-US" dirty="0"/>
+                    </a:p>
+                  </a:txBody>
+                  <a:tcPr anchor="ctr"/>
+                </a:tc>
+                <a:tc>
+                  <a:txBody>
+                    <a:bodyPr/>
+                    <a:lstStyle/>
+                    <a:p>
+                      <a:pPr algn="ctr" latinLnBrk="1"/>
+                      <a:endParaRPr lang="ko-KR" altLang="en-US" dirty="0"/>
+                    </a:p>
+                  </a:txBody>
+                  <a:tcPr anchor="ctr"/>
+                </a:tc>
+                <a:tc>
+                  <a:txBody>
+                    <a:bodyPr/>
+                    <a:lstStyle/>
+                    <a:p>
+                      <a:pPr algn="ctr" latinLnBrk="1"/>
+                      <a:endParaRPr lang="ko-KR" altLang="en-US" dirty="0"/>
+                    </a:p>
+                  </a:txBody>
+                  <a:tcPr anchor="ctr"/>
+                </a:tc>
+                <a:tc>
+                  <a:txBody>
+                    <a:bodyPr/>
+                    <a:lstStyle/>
+                    <a:p>
+                      <a:pPr algn="ctr" latinLnBrk="1"/>
+                      <a:endParaRPr lang="ko-KR" altLang="en-US" dirty="0"/>
+                    </a:p>
+                  </a:txBody>
+                  <a:tcPr anchor="ctr"/>
+                </a:tc>
+                <a:tc>
+                  <a:txBody>
+                    <a:bodyPr/>
+                    <a:lstStyle/>
+                    <a:p>
+                      <a:pPr algn="ctr" latinLnBrk="1"/>
+                      <a:endParaRPr lang="ko-KR" altLang="en-US" dirty="0"/>
+                    </a:p>
+                  </a:txBody>
+                  <a:tcPr anchor="ctr"/>
+                </a:tc>
+                <a:tc>
+                  <a:txBody>
+                    <a:bodyPr/>
+                    <a:lstStyle/>
+                    <a:p>
+                      <a:pPr algn="ctr" latinLnBrk="1"/>
+                      <a:endParaRPr lang="ko-KR" altLang="en-US" dirty="0"/>
+                    </a:p>
+                  </a:txBody>
+                  <a:tcPr anchor="ctr"/>
+                </a:tc>
+                <a:tc>
+                  <a:txBody>
+                    <a:bodyPr/>
+                    <a:lstStyle/>
+                    <a:p>
+                      <a:pPr algn="ctr" latinLnBrk="1"/>
+                      <a:endParaRPr lang="ko-KR" altLang="en-US" dirty="0"/>
+                    </a:p>
+                  </a:txBody>
+                  <a:tcPr anchor="ctr"/>
+                </a:tc>
+                <a:tc>
+                  <a:txBody>
+                    <a:bodyPr/>
+                    <a:lstStyle/>
+                    <a:p>
+                      <a:pPr algn="ctr" latinLnBrk="1"/>
+                      <a:endParaRPr lang="ko-KR" altLang="en-US" dirty="0"/>
+                    </a:p>
+                  </a:txBody>
+                  <a:tcPr anchor="ctr"/>
+                </a:tc>
+                <a:extLst>
+                  <a:ext uri="{0D108BD9-81ED-4DB2-BD59-A6C34878D82A}">
+                    <a16:rowId xmlns:a16="http://schemas.microsoft.com/office/drawing/2014/main" val="3861416552"/>
+                  </a:ext>
+                </a:extLst>
+              </a:tr>
+            </a:tbl>
+          </a:graphicData>
+        </a:graphic>
+      </p:graphicFrame>
+      <p:sp>
+        <p:nvSpPr>
+          <p:cNvPr id="5" name="날짜 개체 틀 4">
+            <a:extLst>
+              <a:ext uri="{FF2B5EF4-FFF2-40B4-BE49-F238E27FC236}">
+                <a16:creationId xmlns:a16="http://schemas.microsoft.com/office/drawing/2014/main" id="{5775E976-EB64-DB06-491D-7C5882E5EB2F}"/>
+              </a:ext>
+            </a:extLst>
+          </p:cNvPr>
+          <p:cNvSpPr>
+            <a:spLocks noGrp="1"/>
+          </p:cNvSpPr>
+          <p:nvPr>
+            <p:ph type="dt" sz="half" idx="10"/>
+          </p:nvPr>
+        </p:nvSpPr>
+        <p:spPr/>
+        <p:txBody>
+          <a:bodyPr/>
+          <a:lstStyle/>
+          <a:p>
+            <a:fld id="{492E84DF-9BBC-4DFC-AB92-EB3DF1902948}" type="datetime1">
+              <a:rPr lang="en-US" altLang="ko-KR" smtClean="0"/>
+              <a:t>9/29/2026</a:t>
+            </a:fld>
+            <a:endParaRPr lang="ko-KR" altLang="en-US"/>
+          </a:p>
+        </p:txBody>
+      </p:sp>
+      <p:sp>
+        <p:nvSpPr>
+          <p:cNvPr id="6" name="슬라이드 번호 개체 틀 5">
+            <a:extLst>
+              <a:ext uri="{FF2B5EF4-FFF2-40B4-BE49-F238E27FC236}">
+                <a16:creationId xmlns:a16="http://schemas.microsoft.com/office/drawing/2014/main" id="{DBF6A861-B6CD-2296-EC28-2276850908E8}"/>
+              </a:ext>
+            </a:extLst>
+          </p:cNvPr>
+          <p:cNvSpPr>
+            <a:spLocks noGrp="1"/>
+          </p:cNvSpPr>
+          <p:nvPr>
+            <p:ph type="sldNum" sz="quarter" idx="12"/>
+          </p:nvPr>
+        </p:nvSpPr>
+        <p:spPr/>
+        <p:txBody>
+          <a:bodyPr/>
+          <a:lstStyle/>
+          <a:p>
+            <a:fld id="{4419BE51-E1DC-4D7D-A982-2D579B035180}" type="slidenum">
+              <a:rPr lang="ko-KR" altLang="en-US" smtClean="0"/>
+              <a:t>29</a:t>
+            </a:fld>
+            <a:endParaRPr lang="ko-KR" altLang="en-US"/>
+          </a:p>
+        </p:txBody>
+      </p:sp>
+      <p:sp>
+        <p:nvSpPr>
+          <p:cNvPr id="10" name="내용 개체 틀 9">
+            <a:extLst>
+              <a:ext uri="{FF2B5EF4-FFF2-40B4-BE49-F238E27FC236}">
+                <a16:creationId xmlns:a16="http://schemas.microsoft.com/office/drawing/2014/main" id="{3FEC3E9A-A97C-A4ED-D4DF-7BDBCDDFABB9}"/>
+              </a:ext>
+            </a:extLst>
+          </p:cNvPr>
+          <p:cNvSpPr>
+            <a:spLocks noGrp="1"/>
+          </p:cNvSpPr>
+          <p:nvPr>
+            <p:ph sz="quarter" idx="13"/>
+          </p:nvPr>
+        </p:nvSpPr>
+        <p:spPr/>
+        <p:txBody>
+          <a:bodyPr/>
+          <a:lstStyle/>
+          <a:p>
+            <a:endParaRPr lang="ko-KR" altLang="en-US"/>
+          </a:p>
+        </p:txBody>
+      </p:sp>
+      <p:cxnSp>
+        <p:nvCxnSpPr>
+          <p:cNvPr id="4" name="직선 연결선 3">
+            <a:extLst>
+              <a:ext uri="{FF2B5EF4-FFF2-40B4-BE49-F238E27FC236}">
+                <a16:creationId xmlns:a16="http://schemas.microsoft.com/office/drawing/2014/main" id="{0CA774AC-46E6-0BB1-188D-8B7BBAA88D45}"/>
+              </a:ext>
+            </a:extLst>
+          </p:cNvPr>
+          <p:cNvCxnSpPr>
+            <a:cxnSpLocks/>
+          </p:cNvCxnSpPr>
+          <p:nvPr/>
+        </p:nvCxnSpPr>
+        <p:spPr>
+          <a:xfrm>
+            <a:off x="2036755" y="1857608"/>
+            <a:ext cx="2368172" cy="1397890"/>
+          </a:xfrm>
+          <a:prstGeom prst="line">
+            <a:avLst/>
+          </a:prstGeom>
+          <a:ln>
+            <a:solidFill>
+              <a:schemeClr val="tx1"/>
+            </a:solidFill>
+          </a:ln>
+        </p:spPr>
+        <p:style>
+          <a:lnRef idx="1">
+            <a:schemeClr val="accent1"/>
+          </a:lnRef>
+          <a:fillRef idx="0">
+            <a:schemeClr val="accent1"/>
+          </a:fillRef>
+          <a:effectRef idx="0">
+            <a:schemeClr val="accent1"/>
+          </a:effectRef>
+          <a:fontRef idx="minor">
+            <a:schemeClr val="tx1"/>
+          </a:fontRef>
+        </p:style>
+      </p:cxnSp>
+      <p:cxnSp>
+        <p:nvCxnSpPr>
+          <p:cNvPr id="13" name="직선 연결선 12">
+            <a:extLst>
+              <a:ext uri="{FF2B5EF4-FFF2-40B4-BE49-F238E27FC236}">
+                <a16:creationId xmlns:a16="http://schemas.microsoft.com/office/drawing/2014/main" id="{73282333-3E19-221B-490A-A52A3A39611E}"/>
+              </a:ext>
+            </a:extLst>
+          </p:cNvPr>
+          <p:cNvCxnSpPr>
+            <a:cxnSpLocks/>
+          </p:cNvCxnSpPr>
+          <p:nvPr/>
+        </p:nvCxnSpPr>
+        <p:spPr>
+          <a:xfrm>
+            <a:off x="3204391" y="1857608"/>
+            <a:ext cx="1200536" cy="711200"/>
+          </a:xfrm>
+          <a:prstGeom prst="line">
+            <a:avLst/>
+          </a:prstGeom>
+          <a:ln>
+            <a:solidFill>
+              <a:schemeClr val="tx1"/>
+            </a:solidFill>
+          </a:ln>
+        </p:spPr>
+        <p:style>
+          <a:lnRef idx="1">
+            <a:schemeClr val="accent1"/>
+          </a:lnRef>
+          <a:fillRef idx="0">
+            <a:schemeClr val="accent1"/>
+          </a:fillRef>
+          <a:effectRef idx="0">
+            <a:schemeClr val="accent1"/>
+          </a:effectRef>
+          <a:fontRef idx="minor">
+            <a:schemeClr val="tx1"/>
+          </a:fontRef>
+        </p:style>
+      </p:cxnSp>
+      <p:graphicFrame>
+        <p:nvGraphicFramePr>
+          <p:cNvPr id="17" name="내용 개체 틀 1">
+            <a:extLst>
+              <a:ext uri="{FF2B5EF4-FFF2-40B4-BE49-F238E27FC236}">
+                <a16:creationId xmlns:a16="http://schemas.microsoft.com/office/drawing/2014/main" id="{3DC11C70-6540-54D7-14D7-6FFBEEC70379}"/>
+              </a:ext>
+            </a:extLst>
+          </p:cNvPr>
+          <p:cNvGraphicFramePr>
+            <a:graphicFrameLocks/>
+          </p:cNvGraphicFramePr>
+          <p:nvPr>
+            <p:extLst>
+              <p:ext uri="{D42A27DB-BD31-4B8C-83A1-F6EECF244321}">
+                <p14:modId xmlns:p14="http://schemas.microsoft.com/office/powerpoint/2010/main" val="4143709336"/>
+              </p:ext>
+            </p:extLst>
+          </p:nvPr>
+        </p:nvGraphicFramePr>
+        <p:xfrm>
+          <a:off x="841037" y="3457546"/>
+          <a:ext cx="5948385" cy="2134422"/>
+        </p:xfrm>
+        <a:graphic>
+          <a:graphicData uri="http://schemas.openxmlformats.org/drawingml/2006/table">
+            <a:tbl>
+              <a:tblPr firstRow="1" bandRow="1">
+                <a:tableStyleId>{5940675A-B579-460E-94D1-54222C63F5DA}</a:tableStyleId>
+              </a:tblPr>
+              <a:tblGrid>
+                <a:gridCol w="1189677">
+                  <a:extLst>
+                    <a:ext uri="{9D8B030D-6E8A-4147-A177-3AD203B41FA5}">
+                      <a16:colId xmlns:a16="http://schemas.microsoft.com/office/drawing/2014/main" val="4245382652"/>
+                    </a:ext>
+                  </a:extLst>
+                </a:gridCol>
+                <a:gridCol w="1189677">
+                  <a:extLst>
+                    <a:ext uri="{9D8B030D-6E8A-4147-A177-3AD203B41FA5}">
+                      <a16:colId xmlns:a16="http://schemas.microsoft.com/office/drawing/2014/main" val="1933533662"/>
+                    </a:ext>
+                  </a:extLst>
+                </a:gridCol>
+                <a:gridCol w="1189677">
+                  <a:extLst>
+                    <a:ext uri="{9D8B030D-6E8A-4147-A177-3AD203B41FA5}">
+                      <a16:colId xmlns:a16="http://schemas.microsoft.com/office/drawing/2014/main" val="33392647"/>
+                    </a:ext>
+                  </a:extLst>
+                </a:gridCol>
+                <a:gridCol w="1189677">
+                  <a:extLst>
+                    <a:ext uri="{9D8B030D-6E8A-4147-A177-3AD203B41FA5}">
+                      <a16:colId xmlns:a16="http://schemas.microsoft.com/office/drawing/2014/main" val="2144455748"/>
+                    </a:ext>
+                  </a:extLst>
+                </a:gridCol>
+                <a:gridCol w="1189677">
+                  <a:extLst>
+                    <a:ext uri="{9D8B030D-6E8A-4147-A177-3AD203B41FA5}">
+                      <a16:colId xmlns:a16="http://schemas.microsoft.com/office/drawing/2014/main" val="1559243483"/>
+                    </a:ext>
+                  </a:extLst>
+                </a:gridCol>
+              </a:tblGrid>
+              <a:tr h="711474">
+                <a:tc>
+                  <a:txBody>
+                    <a:bodyPr/>
+                    <a:lstStyle/>
+                    <a:p>
+                      <a:pPr algn="ctr" latinLnBrk="1"/>
+                      <a:endParaRPr lang="ko-KR" altLang="en-US" dirty="0"/>
+                    </a:p>
+                  </a:txBody>
+                  <a:tcPr anchor="ctr"/>
+                </a:tc>
+                <a:tc>
+                  <a:txBody>
+                    <a:bodyPr/>
+                    <a:lstStyle/>
+                    <a:p>
+                      <a:pPr marL="0" marR="0" lvl="0" indent="0" algn="ctr" defTabSz="914400" rtl="0" eaLnBrk="1" fontAlgn="auto" latinLnBrk="1" hangingPunct="1">
+                        <a:lnSpc>
+                          <a:spcPct val="100000"/>
+                        </a:lnSpc>
+                        <a:spcBef>
+                          <a:spcPts val="0"/>
+                        </a:spcBef>
+                        <a:spcAft>
+                          <a:spcPts val="0"/>
+                        </a:spcAft>
+                        <a:buClrTx/>
+                        <a:buSzTx/>
+                        <a:buFontTx/>
+                        <a:buNone/>
+                        <a:tabLst/>
+                        <a:defRPr/>
+                      </a:pPr>
+                      <a:r>
+                        <a:rPr lang="ko-KR" altLang="en-US" dirty="0"/>
+                        <a:t>주거지</a:t>
+                      </a:r>
+                      <a:r>
+                        <a:rPr lang="en-US" altLang="ko-KR" dirty="0"/>
+                        <a:t>3</a:t>
+                      </a:r>
+                      <a:br>
+                        <a:rPr lang="en-US" altLang="ko-KR" dirty="0"/>
+                      </a:br>
+                      <a:r>
+                        <a:rPr lang="en-US" altLang="ko-KR" dirty="0"/>
+                        <a:t>(</a:t>
+                      </a:r>
+                      <a:r>
+                        <a:rPr lang="ko-KR" altLang="en-US" dirty="0"/>
+                        <a:t>집</a:t>
+                      </a:r>
+                      <a:r>
+                        <a:rPr lang="en-US" altLang="ko-KR" dirty="0"/>
+                        <a:t>)</a:t>
+                      </a:r>
+                      <a:endParaRPr lang="ko-KR" altLang="en-US" dirty="0"/>
+                    </a:p>
+                  </a:txBody>
+                  <a:tcPr anchor="ctr"/>
+                </a:tc>
+                <a:tc>
+                  <a:txBody>
+                    <a:bodyPr/>
+                    <a:lstStyle/>
+                    <a:p>
+                      <a:pPr algn="ctr" latinLnBrk="1"/>
+                      <a:endParaRPr lang="ko-KR" altLang="en-US" dirty="0"/>
+                    </a:p>
+                  </a:txBody>
+                  <a:tcPr anchor="ctr"/>
+                </a:tc>
+                <a:tc>
+                  <a:txBody>
+                    <a:bodyPr/>
+                    <a:lstStyle/>
+                    <a:p>
+                      <a:pPr algn="ctr" latinLnBrk="1"/>
+                      <a:endParaRPr lang="ko-KR" altLang="en-US" dirty="0"/>
+                    </a:p>
+                  </a:txBody>
+                  <a:tcPr anchor="ctr"/>
+                </a:tc>
+                <a:tc>
+                  <a:txBody>
+                    <a:bodyPr/>
+                    <a:lstStyle/>
+                    <a:p>
+                      <a:pPr algn="ctr" latinLnBrk="1"/>
+                      <a:endParaRPr lang="ko-KR" altLang="en-US" dirty="0"/>
+                    </a:p>
+                  </a:txBody>
+                  <a:tcPr anchor="ctr"/>
+                </a:tc>
+                <a:extLst>
+                  <a:ext uri="{0D108BD9-81ED-4DB2-BD59-A6C34878D82A}">
+                    <a16:rowId xmlns:a16="http://schemas.microsoft.com/office/drawing/2014/main" val="3362337053"/>
+                  </a:ext>
+                </a:extLst>
+              </a:tr>
+              <a:tr h="711474">
+                <a:tc>
+                  <a:txBody>
+                    <a:bodyPr/>
+                    <a:lstStyle/>
+                    <a:p>
+                      <a:pPr marL="0" marR="0" lvl="0" indent="0" algn="ctr" defTabSz="914400" rtl="0" eaLnBrk="1" fontAlgn="auto" latinLnBrk="1" hangingPunct="1">
+                        <a:lnSpc>
+                          <a:spcPct val="100000"/>
+                        </a:lnSpc>
+                        <a:spcBef>
+                          <a:spcPts val="0"/>
+                        </a:spcBef>
+                        <a:spcAft>
+                          <a:spcPts val="0"/>
+                        </a:spcAft>
+                        <a:buClrTx/>
+                        <a:buSzTx/>
+                        <a:buFontTx/>
+                        <a:buNone/>
+                        <a:tabLst/>
+                        <a:defRPr/>
+                      </a:pPr>
+                      <a:r>
+                        <a:rPr lang="ko-KR" altLang="en-US" dirty="0"/>
+                        <a:t>크기</a:t>
+                      </a:r>
+                      <a:br>
+                        <a:rPr lang="en-US" altLang="ko-KR" dirty="0"/>
+                      </a:br>
+                      <a:r>
+                        <a:rPr lang="en-US" altLang="ko-KR" dirty="0"/>
+                        <a:t>(</a:t>
+                      </a:r>
+                      <a:r>
+                        <a:rPr lang="ko-KR" altLang="en-US" dirty="0"/>
+                        <a:t>가로세로</a:t>
+                      </a:r>
+                      <a:r>
+                        <a:rPr lang="en-US" altLang="ko-KR" dirty="0"/>
+                        <a:t>)</a:t>
+                      </a:r>
+                      <a:endParaRPr lang="ko-KR" altLang="en-US" dirty="0"/>
+                    </a:p>
+                  </a:txBody>
+                  <a:tcPr anchor="ctr"/>
+                </a:tc>
+                <a:tc>
+                  <a:txBody>
+                    <a:bodyPr/>
+                    <a:lstStyle/>
+                    <a:p>
+                      <a:pPr algn="ctr" latinLnBrk="1"/>
+                      <a:endParaRPr lang="ko-KR" altLang="en-US" dirty="0"/>
+                    </a:p>
+                  </a:txBody>
+                  <a:tcPr anchor="ctr"/>
+                </a:tc>
+                <a:tc>
+                  <a:txBody>
+                    <a:bodyPr/>
+                    <a:lstStyle/>
+                    <a:p>
+                      <a:pPr algn="ctr" latinLnBrk="1"/>
+                      <a:endParaRPr lang="ko-KR" altLang="en-US" dirty="0"/>
+                    </a:p>
+                  </a:txBody>
+                  <a:tcPr anchor="ctr"/>
+                </a:tc>
+                <a:tc>
+                  <a:txBody>
+                    <a:bodyPr/>
+                    <a:lstStyle/>
+                    <a:p>
+                      <a:pPr algn="ctr" latinLnBrk="1"/>
+                      <a:endParaRPr lang="ko-KR" altLang="en-US" dirty="0"/>
+                    </a:p>
+                  </a:txBody>
+                  <a:tcPr anchor="ctr"/>
+                </a:tc>
+                <a:tc>
+                  <a:txBody>
+                    <a:bodyPr/>
+                    <a:lstStyle/>
+                    <a:p>
+                      <a:pPr algn="ctr" latinLnBrk="1"/>
+                      <a:endParaRPr lang="ko-KR" altLang="en-US" dirty="0"/>
+                    </a:p>
+                  </a:txBody>
+                  <a:tcPr anchor="ctr"/>
+                </a:tc>
+                <a:extLst>
+                  <a:ext uri="{0D108BD9-81ED-4DB2-BD59-A6C34878D82A}">
+                    <a16:rowId xmlns:a16="http://schemas.microsoft.com/office/drawing/2014/main" val="2546568347"/>
+                  </a:ext>
+                </a:extLst>
+              </a:tr>
+              <a:tr h="711474">
+                <a:tc>
+                  <a:txBody>
+                    <a:bodyPr/>
+                    <a:lstStyle/>
+                    <a:p>
+                      <a:pPr marL="0" marR="0" lvl="0" indent="0" algn="ctr" defTabSz="914400" rtl="0" eaLnBrk="1" fontAlgn="auto" latinLnBrk="1" hangingPunct="1">
+                        <a:lnSpc>
+                          <a:spcPct val="100000"/>
+                        </a:lnSpc>
+                        <a:spcBef>
+                          <a:spcPts val="0"/>
+                        </a:spcBef>
+                        <a:spcAft>
+                          <a:spcPts val="0"/>
+                        </a:spcAft>
+                        <a:buClrTx/>
+                        <a:buSzTx/>
+                        <a:buFontTx/>
+                        <a:buNone/>
+                        <a:tabLst/>
+                        <a:defRPr/>
+                      </a:pPr>
+                      <a:r>
+                        <a:rPr lang="ko-KR" altLang="en-US" dirty="0"/>
+                        <a:t>높이</a:t>
+                      </a:r>
+                    </a:p>
+                  </a:txBody>
+                  <a:tcPr anchor="ctr"/>
+                </a:tc>
+                <a:tc>
+                  <a:txBody>
+                    <a:bodyPr/>
+                    <a:lstStyle/>
+                    <a:p>
+                      <a:pPr algn="ctr" latinLnBrk="1"/>
+                      <a:endParaRPr lang="ko-KR" altLang="en-US" dirty="0"/>
+                    </a:p>
+                  </a:txBody>
+                  <a:tcPr anchor="ctr"/>
+                </a:tc>
+                <a:tc>
+                  <a:txBody>
+                    <a:bodyPr/>
+                    <a:lstStyle/>
+                    <a:p>
+                      <a:pPr algn="ctr" latinLnBrk="1"/>
+                      <a:endParaRPr lang="ko-KR" altLang="en-US" dirty="0"/>
+                    </a:p>
+                  </a:txBody>
+                  <a:tcPr anchor="ctr"/>
+                </a:tc>
+                <a:tc>
+                  <a:txBody>
+                    <a:bodyPr/>
+                    <a:lstStyle/>
+                    <a:p>
+                      <a:pPr algn="ctr" latinLnBrk="1"/>
+                      <a:endParaRPr lang="ko-KR" altLang="en-US" dirty="0"/>
+                    </a:p>
+                  </a:txBody>
+                  <a:tcPr anchor="ctr"/>
+                </a:tc>
+                <a:tc>
+                  <a:txBody>
+                    <a:bodyPr/>
+                    <a:lstStyle/>
+                    <a:p>
+                      <a:pPr algn="ctr" latinLnBrk="1"/>
+                      <a:endParaRPr lang="ko-KR" altLang="en-US" dirty="0"/>
+                    </a:p>
+                  </a:txBody>
+                  <a:tcPr anchor="ctr"/>
+                </a:tc>
+                <a:extLst>
+                  <a:ext uri="{0D108BD9-81ED-4DB2-BD59-A6C34878D82A}">
+                    <a16:rowId xmlns:a16="http://schemas.microsoft.com/office/drawing/2014/main" val="3861416552"/>
+                  </a:ext>
+                </a:extLst>
+              </a:tr>
+            </a:tbl>
+          </a:graphicData>
+        </a:graphic>
+      </p:graphicFrame>
+      <p:cxnSp>
+        <p:nvCxnSpPr>
+          <p:cNvPr id="25" name="직선 연결선 24">
+            <a:extLst>
+              <a:ext uri="{FF2B5EF4-FFF2-40B4-BE49-F238E27FC236}">
+                <a16:creationId xmlns:a16="http://schemas.microsoft.com/office/drawing/2014/main" id="{18D4E3C5-2CF0-4BAC-84E8-5A72D288969A}"/>
+              </a:ext>
+            </a:extLst>
+          </p:cNvPr>
+          <p:cNvCxnSpPr>
+            <a:cxnSpLocks/>
+          </p:cNvCxnSpPr>
+          <p:nvPr/>
+        </p:nvCxnSpPr>
+        <p:spPr>
+          <a:xfrm>
+            <a:off x="2003855" y="2570889"/>
+            <a:ext cx="1200536" cy="711200"/>
+          </a:xfrm>
+          <a:prstGeom prst="line">
+            <a:avLst/>
+          </a:prstGeom>
+          <a:ln>
+            <a:solidFill>
+              <a:schemeClr val="tx1"/>
+            </a:solidFill>
+          </a:ln>
+        </p:spPr>
+        <p:style>
+          <a:lnRef idx="1">
+            <a:schemeClr val="accent1"/>
+          </a:lnRef>
+          <a:fillRef idx="0">
+            <a:schemeClr val="accent1"/>
+          </a:fillRef>
+          <a:effectRef idx="0">
+            <a:schemeClr val="accent1"/>
+          </a:effectRef>
+          <a:fontRef idx="minor">
+            <a:schemeClr val="tx1"/>
+          </a:fontRef>
+        </p:style>
+      </p:cxnSp>
+    </p:spTree>
+    <p:extLst>
+      <p:ext uri="{BB962C8B-B14F-4D97-AF65-F5344CB8AC3E}">
+        <p14:creationId xmlns:p14="http://schemas.microsoft.com/office/powerpoint/2010/main" val="2178788324"/>
+      </p:ext>
+    </p:extLst>
+  </p:cSld>
+  <p:clrMapOvr>
+    <a:masterClrMapping/>
+  </p:clrMapOvr>
+</p:sld>
+</file>
+
+<file path=ppt/slides/slide3.xml><?xml version="1.0" encoding="utf-8"?>
+<p:sld xmlns:a="http://schemas.openxmlformats.org/drawingml/2006/main" xmlns:r="http://schemas.openxmlformats.org/officeDocument/2006/relationships" xmlns:p="http://schemas.openxmlformats.org/presentationml/2006/main">
+  <p:cSld>
+    <p:spTree>
+      <p:nvGrpSpPr>
+        <p:cNvPr id="1" name=""/>
+        <p:cNvGrpSpPr/>
+        <p:nvPr/>
+      </p:nvGrpSpPr>
+      <p:grpSpPr>
+        <a:xfrm>
+          <a:off x="0" y="0"/>
+          <a:ext cx="0" cy="0"/>
+          <a:chOff x="0" y="0"/>
+          <a:chExt cx="0" cy="0"/>
+        </a:xfrm>
+      </p:grpSpPr>
+      <p:sp>
+        <p:nvSpPr>
+          <p:cNvPr id="2" name="제목 1">
+            <a:extLst>
+              <a:ext uri="{FF2B5EF4-FFF2-40B4-BE49-F238E27FC236}">
+                <a16:creationId xmlns:a16="http://schemas.microsoft.com/office/drawing/2014/main" id="{19DDED9C-A03C-CDA7-4415-B1144A65CC25}"/>
+              </a:ext>
+            </a:extLst>
+          </p:cNvPr>
+          <p:cNvSpPr>
+            <a:spLocks noGrp="1"/>
+          </p:cNvSpPr>
+          <p:nvPr>
+            <p:ph type="title"/>
+          </p:nvPr>
+        </p:nvSpPr>
+        <p:spPr/>
+        <p:txBody>
+          <a:bodyPr/>
+          <a:lstStyle/>
+          <a:p>
+            <a:r>
+              <a:rPr lang="ko-KR" altLang="en-US" dirty="0"/>
+              <a:t>게임 전체 플로우</a:t>
+            </a:r>
+          </a:p>
+        </p:txBody>
+      </p:sp>
+      <p:sp>
+        <p:nvSpPr>
+          <p:cNvPr id="7" name="내용 개체 틀 6">
+            <a:extLst>
+              <a:ext uri="{FF2B5EF4-FFF2-40B4-BE49-F238E27FC236}">
+                <a16:creationId xmlns:a16="http://schemas.microsoft.com/office/drawing/2014/main" id="{1C997EA9-4378-21C7-ADBE-D0A611CC26F1}"/>
+              </a:ext>
+            </a:extLst>
+          </p:cNvPr>
+          <p:cNvSpPr>
+            <a:spLocks noGrp="1"/>
+          </p:cNvSpPr>
+          <p:nvPr>
+            <p:ph sz="quarter" idx="13"/>
+          </p:nvPr>
+        </p:nvSpPr>
+        <p:spPr/>
+        <p:txBody>
+          <a:bodyPr/>
+          <a:lstStyle/>
+          <a:p>
+            <a:endParaRPr lang="ko-KR" altLang="en-US" dirty="0"/>
+          </a:p>
+        </p:txBody>
+      </p:sp>
+      <p:sp>
+        <p:nvSpPr>
+          <p:cNvPr id="9" name="직사각형 8">
+            <a:extLst>
+              <a:ext uri="{FF2B5EF4-FFF2-40B4-BE49-F238E27FC236}">
+                <a16:creationId xmlns:a16="http://schemas.microsoft.com/office/drawing/2014/main" id="{37C45B6D-63B9-873F-DBE3-6DC7DABF0988}"/>
+              </a:ext>
+            </a:extLst>
+          </p:cNvPr>
+          <p:cNvSpPr/>
+          <p:nvPr/>
+        </p:nvSpPr>
+        <p:spPr>
+          <a:xfrm>
+            <a:off x="2373422" y="1150976"/>
+            <a:ext cx="1404937" cy="738187"/>
+          </a:xfrm>
+          <a:prstGeom prst="rect">
+            <a:avLst/>
+          </a:prstGeom>
+          <a:solidFill>
+            <a:schemeClr val="lt1"/>
+          </a:solidFill>
+          <a:ln>
+            <a:solidFill>
+              <a:schemeClr val="tx1"/>
+            </a:solidFill>
+          </a:ln>
+        </p:spPr>
+        <p:style>
+          <a:lnRef idx="2">
+            <a:schemeClr val="accent1">
+              <a:shade val="20000"/>
+            </a:schemeClr>
+          </a:lnRef>
+          <a:fillRef idx="1">
+            <a:schemeClr val="accent1"/>
+          </a:fillRef>
+          <a:effectRef idx="0">
+            <a:schemeClr val="accent1"/>
+          </a:effectRef>
+          <a:fontRef idx="minor">
+            <a:schemeClr val="lt1"/>
+          </a:fontRef>
+        </p:style>
+        <p:txBody>
+          <a:bodyPr anchor="ctr"/>
+          <a:lstStyle/>
+          <a:p>
+            <a:pPr lvl="0" algn="ctr">
+              <a:defRPr/>
+            </a:pPr>
+            <a:r>
+              <a:rPr lang="ko-KR" altLang="en-US" dirty="0">
+                <a:solidFill>
+                  <a:srgbClr val="000000"/>
+                </a:solidFill>
+              </a:rPr>
+              <a:t>배달 물품 결정됨</a:t>
+            </a:r>
+          </a:p>
+        </p:txBody>
+      </p:sp>
+      <p:sp>
+        <p:nvSpPr>
+          <p:cNvPr id="10" name="직사각형 9">
+            <a:extLst>
+              <a:ext uri="{FF2B5EF4-FFF2-40B4-BE49-F238E27FC236}">
+                <a16:creationId xmlns:a16="http://schemas.microsoft.com/office/drawing/2014/main" id="{9DCC1CAF-576E-1488-11D4-30F676842111}"/>
+              </a:ext>
+            </a:extLst>
+          </p:cNvPr>
+          <p:cNvSpPr/>
+          <p:nvPr/>
+        </p:nvSpPr>
+        <p:spPr>
+          <a:xfrm>
+            <a:off x="4431785" y="1022125"/>
+            <a:ext cx="1818245" cy="1009422"/>
+          </a:xfrm>
+          <a:prstGeom prst="rect">
+            <a:avLst/>
+          </a:prstGeom>
+          <a:solidFill>
+            <a:schemeClr val="lt1"/>
+          </a:solidFill>
+          <a:ln>
+            <a:solidFill>
+              <a:schemeClr val="tx1"/>
+            </a:solidFill>
+          </a:ln>
+        </p:spPr>
+        <p:style>
+          <a:lnRef idx="2">
+            <a:schemeClr val="accent1">
+              <a:shade val="20000"/>
+            </a:schemeClr>
+          </a:lnRef>
+          <a:fillRef idx="1">
+            <a:schemeClr val="accent1"/>
+          </a:fillRef>
+          <a:effectRef idx="0">
+            <a:schemeClr val="accent1"/>
+          </a:effectRef>
+          <a:fontRef idx="minor">
+            <a:schemeClr val="lt1"/>
+          </a:fontRef>
+        </p:style>
+        <p:txBody>
+          <a:bodyPr anchor="ctr"/>
+          <a:lstStyle/>
+          <a:p>
+            <a:pPr lvl="0" algn="ctr">
+              <a:defRPr/>
+            </a:pPr>
+            <a:r>
+              <a:rPr lang="ko-KR" altLang="en-US">
+                <a:solidFill>
+                  <a:srgbClr val="000000"/>
+                </a:solidFill>
+              </a:rPr>
+              <a:t>두 플레이어 중 누가 </a:t>
+            </a:r>
+            <a:r>
+              <a:rPr lang="ko-KR" altLang="en-US" dirty="0">
+                <a:solidFill>
+                  <a:srgbClr val="000000"/>
+                </a:solidFill>
+              </a:rPr>
+              <a:t>배달품을 </a:t>
+            </a:r>
+            <a:r>
+              <a:rPr lang="ko-KR" altLang="en-US">
+                <a:solidFill>
+                  <a:srgbClr val="000000"/>
+                </a:solidFill>
+              </a:rPr>
+              <a:t>운반할지 결정</a:t>
+            </a:r>
+            <a:endParaRPr lang="ko-KR" altLang="en-US" dirty="0">
+              <a:solidFill>
+                <a:srgbClr val="000000"/>
+              </a:solidFill>
+            </a:endParaRPr>
+          </a:p>
+        </p:txBody>
+      </p:sp>
+      <p:sp>
+        <p:nvSpPr>
+          <p:cNvPr id="11" name="직사각형 10">
+            <a:extLst>
+              <a:ext uri="{FF2B5EF4-FFF2-40B4-BE49-F238E27FC236}">
+                <a16:creationId xmlns:a16="http://schemas.microsoft.com/office/drawing/2014/main" id="{0A9FF80D-A8A7-69B1-1782-63B801C66AC9}"/>
+              </a:ext>
+            </a:extLst>
+          </p:cNvPr>
+          <p:cNvSpPr/>
+          <p:nvPr/>
+        </p:nvSpPr>
+        <p:spPr>
+          <a:xfrm>
+            <a:off x="6768033" y="1066651"/>
+            <a:ext cx="1495527" cy="920369"/>
+          </a:xfrm>
+          <a:prstGeom prst="rect">
+            <a:avLst/>
+          </a:prstGeom>
+          <a:solidFill>
+            <a:schemeClr val="lt1"/>
+          </a:solidFill>
+          <a:ln>
+            <a:solidFill>
+              <a:schemeClr val="tx1"/>
+            </a:solidFill>
+          </a:ln>
+        </p:spPr>
+        <p:style>
+          <a:lnRef idx="2">
+            <a:schemeClr val="accent1">
+              <a:shade val="20000"/>
+            </a:schemeClr>
+          </a:lnRef>
+          <a:fillRef idx="1">
+            <a:schemeClr val="accent1"/>
+          </a:fillRef>
+          <a:effectRef idx="0">
+            <a:schemeClr val="accent1"/>
+          </a:effectRef>
+          <a:fontRef idx="minor">
+            <a:schemeClr val="lt1"/>
+          </a:fontRef>
+        </p:style>
+        <p:txBody>
+          <a:bodyPr anchor="ctr"/>
+          <a:lstStyle/>
+          <a:p>
+            <a:pPr lvl="0" algn="ctr">
+              <a:defRPr/>
+            </a:pPr>
+            <a:r>
+              <a:rPr lang="ko-KR" altLang="en-US" dirty="0">
+                <a:solidFill>
+                  <a:srgbClr val="000000"/>
+                </a:solidFill>
+              </a:rPr>
+              <a:t>배달품의</a:t>
+            </a:r>
+            <a:br>
+              <a:rPr lang="en-US" altLang="ko-KR" dirty="0">
+                <a:solidFill>
+                  <a:srgbClr val="000000"/>
+                </a:solidFill>
+              </a:rPr>
+            </a:br>
+            <a:r>
+              <a:rPr lang="ko-KR" altLang="en-US" dirty="0">
+                <a:solidFill>
+                  <a:srgbClr val="000000"/>
+                </a:solidFill>
+              </a:rPr>
+              <a:t>배송지 파악</a:t>
+            </a:r>
+          </a:p>
+        </p:txBody>
+      </p:sp>
+      <p:sp>
+        <p:nvSpPr>
+          <p:cNvPr id="12" name="직사각형 11">
+            <a:extLst>
+              <a:ext uri="{FF2B5EF4-FFF2-40B4-BE49-F238E27FC236}">
+                <a16:creationId xmlns:a16="http://schemas.microsoft.com/office/drawing/2014/main" id="{DBE7DC57-BC47-6584-EE22-F10C5A51640D}"/>
+              </a:ext>
+            </a:extLst>
+          </p:cNvPr>
+          <p:cNvSpPr/>
+          <p:nvPr/>
+        </p:nvSpPr>
+        <p:spPr>
+          <a:xfrm>
+            <a:off x="1400683" y="2535546"/>
+            <a:ext cx="1687574" cy="875190"/>
+          </a:xfrm>
+          <a:prstGeom prst="rect">
+            <a:avLst/>
+          </a:prstGeom>
+          <a:solidFill>
+            <a:schemeClr val="lt1"/>
+          </a:solidFill>
+          <a:ln>
+            <a:solidFill>
+              <a:schemeClr val="tx1"/>
+            </a:solidFill>
+          </a:ln>
+        </p:spPr>
+        <p:style>
+          <a:lnRef idx="2">
+            <a:schemeClr val="accent1">
+              <a:shade val="20000"/>
+            </a:schemeClr>
+          </a:lnRef>
+          <a:fillRef idx="1">
+            <a:schemeClr val="accent1"/>
+          </a:fillRef>
+          <a:effectRef idx="0">
+            <a:schemeClr val="accent1"/>
+          </a:effectRef>
+          <a:fontRef idx="minor">
+            <a:schemeClr val="lt1"/>
+          </a:fontRef>
+        </p:style>
+        <p:txBody>
+          <a:bodyPr anchor="ctr"/>
+          <a:lstStyle/>
+          <a:p>
+            <a:pPr lvl="0" algn="ctr">
+              <a:defRPr/>
+            </a:pPr>
+            <a:r>
+              <a:rPr lang="ko-KR" altLang="en-US" dirty="0">
+                <a:solidFill>
+                  <a:srgbClr val="000000"/>
+                </a:solidFill>
+              </a:rPr>
+              <a:t>협동하며</a:t>
+            </a:r>
+            <a:br>
+              <a:rPr lang="en-US" altLang="ko-KR" dirty="0">
+                <a:solidFill>
+                  <a:srgbClr val="000000"/>
+                </a:solidFill>
+              </a:rPr>
+            </a:br>
+            <a:r>
+              <a:rPr lang="ko-KR" altLang="en-US" dirty="0">
+                <a:solidFill>
+                  <a:srgbClr val="000000"/>
+                </a:solidFill>
+              </a:rPr>
+              <a:t>경로와 안내를 따라 진행</a:t>
+            </a:r>
+          </a:p>
+        </p:txBody>
+      </p:sp>
+      <p:sp>
+        <p:nvSpPr>
+          <p:cNvPr id="13" name="직사각형 12">
+            <a:extLst>
+              <a:ext uri="{FF2B5EF4-FFF2-40B4-BE49-F238E27FC236}">
+                <a16:creationId xmlns:a16="http://schemas.microsoft.com/office/drawing/2014/main" id="{38CB9408-71A5-5E20-7103-632695B94B6B}"/>
+              </a:ext>
+            </a:extLst>
+          </p:cNvPr>
+          <p:cNvSpPr/>
+          <p:nvPr/>
+        </p:nvSpPr>
+        <p:spPr>
+          <a:xfrm>
+            <a:off x="3753168" y="2326045"/>
+            <a:ext cx="2074261" cy="857522"/>
+          </a:xfrm>
+          <a:prstGeom prst="rect">
+            <a:avLst/>
+          </a:prstGeom>
+          <a:solidFill>
+            <a:schemeClr val="lt1"/>
+          </a:solidFill>
+          <a:ln>
+            <a:solidFill>
+              <a:schemeClr val="tx1"/>
+            </a:solidFill>
+          </a:ln>
+        </p:spPr>
+        <p:style>
+          <a:lnRef idx="2">
+            <a:schemeClr val="accent1">
+              <a:shade val="20000"/>
+            </a:schemeClr>
+          </a:lnRef>
+          <a:fillRef idx="1">
+            <a:schemeClr val="accent1"/>
+          </a:fillRef>
+          <a:effectRef idx="0">
+            <a:schemeClr val="accent1"/>
+          </a:effectRef>
+          <a:fontRef idx="minor">
+            <a:schemeClr val="lt1"/>
+          </a:fontRef>
+        </p:style>
+        <p:txBody>
+          <a:bodyPr anchor="ctr"/>
+          <a:lstStyle/>
+          <a:p>
+            <a:pPr lvl="0" algn="ctr">
+              <a:defRPr/>
+            </a:pPr>
+            <a:r>
+              <a:rPr lang="ko-KR" altLang="en-US" dirty="0">
+                <a:solidFill>
+                  <a:srgbClr val="000000"/>
+                </a:solidFill>
+              </a:rPr>
+              <a:t>시간 안에 배달</a:t>
+            </a:r>
+            <a:br>
+              <a:rPr lang="en-US" altLang="ko-KR" dirty="0">
+                <a:solidFill>
+                  <a:srgbClr val="000000"/>
+                </a:solidFill>
+              </a:rPr>
+            </a:br>
+            <a:r>
+              <a:rPr lang="ko-KR" altLang="en-US" dirty="0">
+                <a:solidFill>
+                  <a:srgbClr val="000000"/>
+                </a:solidFill>
+              </a:rPr>
+              <a:t>성공 시 보수 지급</a:t>
+            </a:r>
+          </a:p>
+        </p:txBody>
+      </p:sp>
+      <p:sp>
+        <p:nvSpPr>
+          <p:cNvPr id="14" name="직사각형 13">
+            <a:extLst>
+              <a:ext uri="{FF2B5EF4-FFF2-40B4-BE49-F238E27FC236}">
+                <a16:creationId xmlns:a16="http://schemas.microsoft.com/office/drawing/2014/main" id="{FF46F548-1FCF-F79F-7E48-1C06AE818767}"/>
+              </a:ext>
+            </a:extLst>
+          </p:cNvPr>
+          <p:cNvSpPr/>
+          <p:nvPr/>
+        </p:nvSpPr>
+        <p:spPr>
+          <a:xfrm>
+            <a:off x="3753168" y="3428667"/>
+            <a:ext cx="2074261" cy="738187"/>
+          </a:xfrm>
+          <a:prstGeom prst="rect">
+            <a:avLst/>
+          </a:prstGeom>
+          <a:solidFill>
+            <a:schemeClr val="lt1"/>
+          </a:solidFill>
+          <a:ln>
+            <a:solidFill>
+              <a:schemeClr val="tx1"/>
+            </a:solidFill>
+          </a:ln>
+        </p:spPr>
+        <p:style>
+          <a:lnRef idx="2">
+            <a:schemeClr val="accent1">
+              <a:shade val="20000"/>
+            </a:schemeClr>
+          </a:lnRef>
+          <a:fillRef idx="1">
+            <a:schemeClr val="accent1"/>
+          </a:fillRef>
+          <a:effectRef idx="0">
+            <a:schemeClr val="accent1"/>
+          </a:effectRef>
+          <a:fontRef idx="minor">
+            <a:schemeClr val="lt1"/>
+          </a:fontRef>
+        </p:style>
+        <p:txBody>
+          <a:bodyPr anchor="ctr"/>
+          <a:lstStyle/>
+          <a:p>
+            <a:pPr lvl="0" algn="ctr">
+              <a:defRPr/>
+            </a:pPr>
+            <a:r>
+              <a:rPr lang="ko-KR" altLang="en-US" dirty="0">
+                <a:solidFill>
+                  <a:srgbClr val="000000"/>
+                </a:solidFill>
+              </a:rPr>
+              <a:t>배달 시간 초과 시 </a:t>
+            </a:r>
+            <a:r>
+              <a:rPr lang="ko-KR" altLang="en-US">
+                <a:solidFill>
+                  <a:srgbClr val="000000"/>
+                </a:solidFill>
+              </a:rPr>
+              <a:t>보수 미지급</a:t>
+            </a:r>
+            <a:endParaRPr lang="en-US" altLang="ko-KR" dirty="0">
+              <a:solidFill>
+                <a:srgbClr val="000000"/>
+              </a:solidFill>
+            </a:endParaRPr>
+          </a:p>
+        </p:txBody>
+      </p:sp>
+      <p:sp>
+        <p:nvSpPr>
+          <p:cNvPr id="16" name="직사각형 15">
+            <a:extLst>
+              <a:ext uri="{FF2B5EF4-FFF2-40B4-BE49-F238E27FC236}">
+                <a16:creationId xmlns:a16="http://schemas.microsoft.com/office/drawing/2014/main" id="{4BD95DDE-1CB1-AA6F-72CB-36E1348A8E42}"/>
+              </a:ext>
+            </a:extLst>
+          </p:cNvPr>
+          <p:cNvSpPr/>
+          <p:nvPr/>
+        </p:nvSpPr>
+        <p:spPr>
+          <a:xfrm>
+            <a:off x="5503543" y="5571286"/>
+            <a:ext cx="1460848" cy="1017739"/>
+          </a:xfrm>
+          <a:prstGeom prst="rect">
+            <a:avLst/>
+          </a:prstGeom>
+          <a:solidFill>
+            <a:schemeClr val="lt1"/>
+          </a:solidFill>
+          <a:ln>
+            <a:solidFill>
+              <a:schemeClr val="tx1"/>
+            </a:solidFill>
+          </a:ln>
+        </p:spPr>
+        <p:style>
+          <a:lnRef idx="2">
+            <a:schemeClr val="accent1">
+              <a:shade val="20000"/>
+            </a:schemeClr>
+          </a:lnRef>
+          <a:fillRef idx="1">
+            <a:schemeClr val="accent1"/>
+          </a:fillRef>
+          <a:effectRef idx="0">
+            <a:schemeClr val="accent1"/>
+          </a:effectRef>
+          <a:fontRef idx="minor">
+            <a:schemeClr val="lt1"/>
+          </a:fontRef>
+        </p:style>
+        <p:txBody>
+          <a:bodyPr anchor="ctr"/>
+          <a:lstStyle/>
+          <a:p>
+            <a:pPr lvl="0" algn="ctr">
+              <a:defRPr/>
+            </a:pPr>
+            <a:r>
+              <a:rPr lang="ko-KR" altLang="en-US" dirty="0">
+                <a:solidFill>
+                  <a:srgbClr val="000000"/>
+                </a:solidFill>
+              </a:rPr>
+              <a:t>충분한 보수 보유</a:t>
+            </a:r>
+          </a:p>
+        </p:txBody>
+      </p:sp>
+      <p:cxnSp>
+        <p:nvCxnSpPr>
+          <p:cNvPr id="17" name="화살표 12">
+            <a:extLst>
+              <a:ext uri="{FF2B5EF4-FFF2-40B4-BE49-F238E27FC236}">
+                <a16:creationId xmlns:a16="http://schemas.microsoft.com/office/drawing/2014/main" id="{946DD478-AFD6-6E16-7F4B-2B9634DE5BFA}"/>
+              </a:ext>
+            </a:extLst>
+          </p:cNvPr>
+          <p:cNvCxnSpPr>
+            <a:cxnSpLocks/>
+            <a:stCxn id="9" idx="3"/>
+            <a:endCxn id="10" idx="1"/>
+          </p:cNvCxnSpPr>
+          <p:nvPr/>
+        </p:nvCxnSpPr>
+        <p:spPr>
+          <a:xfrm>
+            <a:off x="3778359" y="1520070"/>
+            <a:ext cx="653426" cy="6766"/>
+          </a:xfrm>
+          <a:prstGeom prst="straightConnector1">
+            <a:avLst/>
+          </a:prstGeom>
+          <a:ln>
+            <a:solidFill>
+              <a:schemeClr val="tx1"/>
+            </a:solidFill>
+            <a:tailEnd type="arrow"/>
+          </a:ln>
+        </p:spPr>
+        <p:style>
+          <a:lnRef idx="1">
+            <a:schemeClr val="accent1"/>
+          </a:lnRef>
+          <a:fillRef idx="0">
+            <a:schemeClr val="accent1"/>
+          </a:fillRef>
+          <a:effectRef idx="0">
+            <a:schemeClr val="accent1"/>
+          </a:effectRef>
+          <a:fontRef idx="minor">
+            <a:schemeClr val="tx1"/>
+          </a:fontRef>
+        </p:style>
+      </p:cxnSp>
+      <p:cxnSp>
+        <p:nvCxnSpPr>
+          <p:cNvPr id="18" name="화살표 13">
+            <a:extLst>
+              <a:ext uri="{FF2B5EF4-FFF2-40B4-BE49-F238E27FC236}">
+                <a16:creationId xmlns:a16="http://schemas.microsoft.com/office/drawing/2014/main" id="{7565030A-3172-2EDE-FAF6-A040EA22A7D4}"/>
+              </a:ext>
+            </a:extLst>
+          </p:cNvPr>
+          <p:cNvCxnSpPr>
+            <a:cxnSpLocks/>
+            <a:stCxn id="11" idx="3"/>
+            <a:endCxn id="49" idx="1"/>
+          </p:cNvCxnSpPr>
+          <p:nvPr/>
+        </p:nvCxnSpPr>
+        <p:spPr>
+          <a:xfrm>
+            <a:off x="8263560" y="1526836"/>
+            <a:ext cx="809864" cy="4115"/>
+          </a:xfrm>
+          <a:prstGeom prst="straightConnector1">
+            <a:avLst/>
+          </a:prstGeom>
+          <a:ln>
+            <a:solidFill>
+              <a:schemeClr val="tx1"/>
+            </a:solidFill>
+            <a:tailEnd type="arrow"/>
+          </a:ln>
+        </p:spPr>
+        <p:style>
+          <a:lnRef idx="1">
+            <a:schemeClr val="accent1"/>
+          </a:lnRef>
+          <a:fillRef idx="0">
+            <a:schemeClr val="accent1"/>
+          </a:fillRef>
+          <a:effectRef idx="0">
+            <a:schemeClr val="accent1"/>
+          </a:effectRef>
+          <a:fontRef idx="minor">
+            <a:schemeClr val="tx1"/>
+          </a:fontRef>
+        </p:style>
+      </p:cxnSp>
+      <p:cxnSp>
+        <p:nvCxnSpPr>
+          <p:cNvPr id="19" name="화살표 14">
+            <a:extLst>
+              <a:ext uri="{FF2B5EF4-FFF2-40B4-BE49-F238E27FC236}">
+                <a16:creationId xmlns:a16="http://schemas.microsoft.com/office/drawing/2014/main" id="{D96781D8-0E33-6D94-0150-DFDF34A99B49}"/>
+              </a:ext>
+            </a:extLst>
+          </p:cNvPr>
+          <p:cNvCxnSpPr>
+            <a:cxnSpLocks/>
+            <a:stCxn id="10" idx="3"/>
+            <a:endCxn id="11" idx="1"/>
+          </p:cNvCxnSpPr>
+          <p:nvPr/>
+        </p:nvCxnSpPr>
+        <p:spPr>
+          <a:xfrm>
+            <a:off x="6250030" y="1526836"/>
+            <a:ext cx="518003" cy="0"/>
+          </a:xfrm>
+          <a:prstGeom prst="straightConnector1">
+            <a:avLst/>
+          </a:prstGeom>
+          <a:ln>
+            <a:solidFill>
+              <a:schemeClr val="tx1"/>
+            </a:solidFill>
+            <a:tailEnd type="arrow"/>
+          </a:ln>
+        </p:spPr>
+        <p:style>
+          <a:lnRef idx="1">
+            <a:schemeClr val="accent1"/>
+          </a:lnRef>
+          <a:fillRef idx="0">
+            <a:schemeClr val="accent1"/>
+          </a:fillRef>
+          <a:effectRef idx="0">
+            <a:schemeClr val="accent1"/>
+          </a:effectRef>
+          <a:fontRef idx="minor">
+            <a:schemeClr val="tx1"/>
+          </a:fontRef>
+        </p:style>
+      </p:cxnSp>
+      <p:cxnSp>
+        <p:nvCxnSpPr>
+          <p:cNvPr id="22" name="꺾인 양쪽 화살표 연결선 18">
+            <a:extLst>
+              <a:ext uri="{FF2B5EF4-FFF2-40B4-BE49-F238E27FC236}">
+                <a16:creationId xmlns:a16="http://schemas.microsoft.com/office/drawing/2014/main" id="{E2B73A7F-A7CE-2433-6311-93E4F09C1B61}"/>
+              </a:ext>
+            </a:extLst>
+          </p:cNvPr>
+          <p:cNvCxnSpPr>
+            <a:cxnSpLocks/>
+            <a:stCxn id="13" idx="3"/>
+            <a:endCxn id="231" idx="1"/>
+          </p:cNvCxnSpPr>
+          <p:nvPr/>
+        </p:nvCxnSpPr>
+        <p:spPr>
+          <a:xfrm>
+            <a:off x="5827429" y="2754806"/>
+            <a:ext cx="777462" cy="322428"/>
+          </a:xfrm>
+          <a:prstGeom prst="bentConnector3">
+            <a:avLst>
+              <a:gd name="adj1" fmla="val 50000"/>
+            </a:avLst>
+          </a:prstGeom>
+          <a:ln>
+            <a:solidFill>
+              <a:schemeClr val="tx1"/>
+            </a:solidFill>
+            <a:tailEnd type="arrow"/>
+          </a:ln>
+        </p:spPr>
+        <p:style>
+          <a:lnRef idx="1">
+            <a:schemeClr val="accent1"/>
+          </a:lnRef>
+          <a:fillRef idx="0">
+            <a:schemeClr val="accent1"/>
+          </a:fillRef>
+          <a:effectRef idx="0">
+            <a:schemeClr val="accent1"/>
+          </a:effectRef>
+          <a:fontRef idx="minor">
+            <a:schemeClr val="tx1"/>
+          </a:fontRef>
+        </p:style>
+      </p:cxnSp>
+      <p:cxnSp>
+        <p:nvCxnSpPr>
+          <p:cNvPr id="24" name="꺾인 양쪽 화살표 연결선 20">
+            <a:extLst>
+              <a:ext uri="{FF2B5EF4-FFF2-40B4-BE49-F238E27FC236}">
+                <a16:creationId xmlns:a16="http://schemas.microsoft.com/office/drawing/2014/main" id="{3A2FF051-9A15-87BC-BE39-D8338AC29156}"/>
+              </a:ext>
+            </a:extLst>
+          </p:cNvPr>
+          <p:cNvCxnSpPr>
+            <a:cxnSpLocks/>
+            <a:stCxn id="14" idx="3"/>
+            <a:endCxn id="231" idx="1"/>
+          </p:cNvCxnSpPr>
+          <p:nvPr/>
+        </p:nvCxnSpPr>
+        <p:spPr>
+          <a:xfrm flipV="1">
+            <a:off x="5827429" y="3077234"/>
+            <a:ext cx="777462" cy="720527"/>
+          </a:xfrm>
+          <a:prstGeom prst="bentConnector3">
+            <a:avLst>
+              <a:gd name="adj1" fmla="val 50000"/>
+            </a:avLst>
+          </a:prstGeom>
+          <a:ln>
+            <a:solidFill>
+              <a:schemeClr val="tx1"/>
+            </a:solidFill>
+            <a:tailEnd type="arrow"/>
+          </a:ln>
+        </p:spPr>
+        <p:style>
+          <a:lnRef idx="1">
+            <a:schemeClr val="accent1"/>
+          </a:lnRef>
+          <a:fillRef idx="0">
+            <a:schemeClr val="accent1"/>
+          </a:fillRef>
+          <a:effectRef idx="0">
+            <a:schemeClr val="accent1"/>
+          </a:effectRef>
+          <a:fontRef idx="minor">
+            <a:schemeClr val="tx1"/>
+          </a:fontRef>
+        </p:style>
+      </p:cxnSp>
+      <p:sp>
+        <p:nvSpPr>
+          <p:cNvPr id="25" name="직사각형 24">
+            <a:extLst>
+              <a:ext uri="{FF2B5EF4-FFF2-40B4-BE49-F238E27FC236}">
+                <a16:creationId xmlns:a16="http://schemas.microsoft.com/office/drawing/2014/main" id="{83696255-9AC7-7098-E14E-B059CC6EB4FD}"/>
+              </a:ext>
+            </a:extLst>
+          </p:cNvPr>
+          <p:cNvSpPr/>
+          <p:nvPr/>
+        </p:nvSpPr>
+        <p:spPr>
+          <a:xfrm>
+            <a:off x="5503543" y="4498615"/>
+            <a:ext cx="1460849" cy="1017739"/>
+          </a:xfrm>
+          <a:prstGeom prst="rect">
+            <a:avLst/>
+          </a:prstGeom>
+          <a:solidFill>
+            <a:schemeClr val="lt1"/>
+          </a:solidFill>
+          <a:ln>
+            <a:solidFill>
+              <a:schemeClr val="tx1"/>
+            </a:solidFill>
+          </a:ln>
+        </p:spPr>
+        <p:style>
+          <a:lnRef idx="2">
+            <a:schemeClr val="accent1">
+              <a:shade val="20000"/>
+            </a:schemeClr>
+          </a:lnRef>
+          <a:fillRef idx="1">
+            <a:schemeClr val="accent1"/>
+          </a:fillRef>
+          <a:effectRef idx="0">
+            <a:schemeClr val="accent1"/>
+          </a:effectRef>
+          <a:fontRef idx="minor">
+            <a:schemeClr val="lt1"/>
+          </a:fontRef>
+        </p:style>
+        <p:txBody>
+          <a:bodyPr anchor="ctr"/>
+          <a:lstStyle/>
+          <a:p>
+            <a:pPr lvl="0" algn="ctr">
+              <a:defRPr/>
+            </a:pPr>
+            <a:r>
+              <a:rPr lang="ko-KR" altLang="en-US" dirty="0">
+                <a:solidFill>
+                  <a:srgbClr val="000000"/>
+                </a:solidFill>
+              </a:rPr>
+              <a:t>충분한 보수 </a:t>
+            </a:r>
+            <a:r>
+              <a:rPr lang="ko-KR" altLang="en-US" dirty="0" err="1">
+                <a:solidFill>
+                  <a:srgbClr val="000000"/>
+                </a:solidFill>
+              </a:rPr>
+              <a:t>미보유</a:t>
+            </a:r>
+            <a:endParaRPr lang="ko-KR" altLang="en-US" dirty="0">
+              <a:solidFill>
+                <a:srgbClr val="000000"/>
+              </a:solidFill>
+            </a:endParaRPr>
+          </a:p>
+        </p:txBody>
+      </p:sp>
+      <p:sp>
+        <p:nvSpPr>
+          <p:cNvPr id="49" name="직사각형 48">
+            <a:extLst>
+              <a:ext uri="{FF2B5EF4-FFF2-40B4-BE49-F238E27FC236}">
+                <a16:creationId xmlns:a16="http://schemas.microsoft.com/office/drawing/2014/main" id="{AAC0BD66-F6A8-D200-8A64-573B6FF1E851}"/>
+              </a:ext>
+            </a:extLst>
+          </p:cNvPr>
+          <p:cNvSpPr/>
+          <p:nvPr/>
+        </p:nvSpPr>
+        <p:spPr>
+          <a:xfrm>
+            <a:off x="9073424" y="1070766"/>
+            <a:ext cx="2091248" cy="920369"/>
+          </a:xfrm>
+          <a:prstGeom prst="rect">
+            <a:avLst/>
+          </a:prstGeom>
+          <a:solidFill>
+            <a:schemeClr val="lt1"/>
+          </a:solidFill>
+          <a:ln>
+            <a:solidFill>
+              <a:schemeClr val="tx1"/>
+            </a:solidFill>
+          </a:ln>
+        </p:spPr>
+        <p:style>
+          <a:lnRef idx="2">
+            <a:schemeClr val="accent1">
+              <a:shade val="20000"/>
+            </a:schemeClr>
+          </a:lnRef>
+          <a:fillRef idx="1">
+            <a:schemeClr val="accent1"/>
+          </a:fillRef>
+          <a:effectRef idx="0">
+            <a:schemeClr val="accent1"/>
+          </a:effectRef>
+          <a:fontRef idx="minor">
+            <a:schemeClr val="lt1"/>
+          </a:fontRef>
+        </p:style>
+        <p:txBody>
+          <a:bodyPr anchor="ctr"/>
+          <a:lstStyle/>
+          <a:p>
+            <a:pPr lvl="0" algn="ctr">
+              <a:defRPr/>
+            </a:pPr>
+            <a:r>
+              <a:rPr lang="en-US" altLang="ko-KR" dirty="0">
+                <a:solidFill>
+                  <a:srgbClr val="000000"/>
+                </a:solidFill>
+              </a:rPr>
+              <a:t>AI</a:t>
+            </a:r>
+            <a:r>
+              <a:rPr lang="ko-KR" altLang="en-US" dirty="0">
+                <a:solidFill>
+                  <a:srgbClr val="000000"/>
+                </a:solidFill>
+              </a:rPr>
+              <a:t>가 배송지까지의 경로별 예측 시간 계산</a:t>
+            </a:r>
+          </a:p>
+        </p:txBody>
+      </p:sp>
+      <p:cxnSp>
+        <p:nvCxnSpPr>
+          <p:cNvPr id="52" name="화살표 12">
+            <a:extLst>
+              <a:ext uri="{FF2B5EF4-FFF2-40B4-BE49-F238E27FC236}">
+                <a16:creationId xmlns:a16="http://schemas.microsoft.com/office/drawing/2014/main" id="{0C443044-ADF4-1AD6-57BB-DB3D06E23E23}"/>
+              </a:ext>
+            </a:extLst>
+          </p:cNvPr>
+          <p:cNvCxnSpPr>
+            <a:cxnSpLocks/>
+            <a:stCxn id="185" idx="3"/>
+            <a:endCxn id="9" idx="1"/>
+          </p:cNvCxnSpPr>
+          <p:nvPr/>
+        </p:nvCxnSpPr>
+        <p:spPr>
+          <a:xfrm flipV="1">
+            <a:off x="1855419" y="1520070"/>
+            <a:ext cx="518003" cy="7203"/>
+          </a:xfrm>
+          <a:prstGeom prst="straightConnector1">
+            <a:avLst/>
+          </a:prstGeom>
+          <a:ln>
+            <a:solidFill>
+              <a:schemeClr val="tx1"/>
+            </a:solidFill>
+            <a:tailEnd type="arrow"/>
+          </a:ln>
+        </p:spPr>
+        <p:style>
+          <a:lnRef idx="1">
+            <a:schemeClr val="accent1"/>
+          </a:lnRef>
+          <a:fillRef idx="0">
+            <a:schemeClr val="accent1"/>
+          </a:fillRef>
+          <a:effectRef idx="0">
+            <a:schemeClr val="accent1"/>
+          </a:effectRef>
+          <a:fontRef idx="minor">
+            <a:schemeClr val="tx1"/>
+          </a:fontRef>
+        </p:style>
+      </p:cxnSp>
+      <p:cxnSp>
+        <p:nvCxnSpPr>
+          <p:cNvPr id="79" name="꺾인 양쪽 화살표 연결선 20">
+            <a:extLst>
+              <a:ext uri="{FF2B5EF4-FFF2-40B4-BE49-F238E27FC236}">
+                <a16:creationId xmlns:a16="http://schemas.microsoft.com/office/drawing/2014/main" id="{5050FD88-7B39-90B7-1FCA-E14B9FC079A0}"/>
+              </a:ext>
+            </a:extLst>
+          </p:cNvPr>
+          <p:cNvCxnSpPr>
+            <a:cxnSpLocks/>
+            <a:stCxn id="49" idx="3"/>
+            <a:endCxn id="12" idx="1"/>
+          </p:cNvCxnSpPr>
+          <p:nvPr/>
+        </p:nvCxnSpPr>
+        <p:spPr>
+          <a:xfrm flipH="1">
+            <a:off x="1400683" y="1530951"/>
+            <a:ext cx="9763989" cy="1442190"/>
+          </a:xfrm>
+          <a:prstGeom prst="bentConnector5">
+            <a:avLst>
+              <a:gd name="adj1" fmla="val -2341"/>
+              <a:gd name="adj2" fmla="val 50783"/>
+              <a:gd name="adj3" fmla="val 102341"/>
+            </a:avLst>
+          </a:prstGeom>
+          <a:ln>
+            <a:solidFill>
+              <a:schemeClr val="tx1"/>
+            </a:solidFill>
+            <a:tailEnd type="arrow"/>
+          </a:ln>
+        </p:spPr>
+        <p:style>
+          <a:lnRef idx="1">
+            <a:schemeClr val="accent1"/>
+          </a:lnRef>
+          <a:fillRef idx="0">
+            <a:schemeClr val="accent1"/>
+          </a:fillRef>
+          <a:effectRef idx="0">
+            <a:schemeClr val="accent1"/>
+          </a:effectRef>
+          <a:fontRef idx="minor">
+            <a:schemeClr val="tx1"/>
+          </a:fontRef>
+        </p:style>
+      </p:cxnSp>
+      <p:cxnSp>
+        <p:nvCxnSpPr>
+          <p:cNvPr id="103" name="꺾인 양쪽 화살표 연결선 18">
+            <a:extLst>
+              <a:ext uri="{FF2B5EF4-FFF2-40B4-BE49-F238E27FC236}">
+                <a16:creationId xmlns:a16="http://schemas.microsoft.com/office/drawing/2014/main" id="{E527CE0B-EFFE-FD35-729A-032C4A73E926}"/>
+              </a:ext>
+            </a:extLst>
+          </p:cNvPr>
+          <p:cNvCxnSpPr>
+            <a:cxnSpLocks/>
+            <a:stCxn id="12" idx="3"/>
+            <a:endCxn id="13" idx="1"/>
+          </p:cNvCxnSpPr>
+          <p:nvPr/>
+        </p:nvCxnSpPr>
+        <p:spPr>
+          <a:xfrm flipV="1">
+            <a:off x="3088257" y="2754806"/>
+            <a:ext cx="664911" cy="218335"/>
+          </a:xfrm>
+          <a:prstGeom prst="bentConnector3">
+            <a:avLst>
+              <a:gd name="adj1" fmla="val 50000"/>
+            </a:avLst>
+          </a:prstGeom>
+          <a:ln>
+            <a:solidFill>
+              <a:schemeClr val="tx1"/>
+            </a:solidFill>
+            <a:tailEnd type="arrow"/>
+          </a:ln>
+        </p:spPr>
+        <p:style>
+          <a:lnRef idx="1">
+            <a:schemeClr val="accent1"/>
+          </a:lnRef>
+          <a:fillRef idx="0">
+            <a:schemeClr val="accent1"/>
+          </a:fillRef>
+          <a:effectRef idx="0">
+            <a:schemeClr val="accent1"/>
+          </a:effectRef>
+          <a:fontRef idx="minor">
+            <a:schemeClr val="tx1"/>
+          </a:fontRef>
+        </p:style>
+      </p:cxnSp>
+      <p:cxnSp>
+        <p:nvCxnSpPr>
+          <p:cNvPr id="106" name="꺾인 양쪽 화살표 연결선 18">
+            <a:extLst>
+              <a:ext uri="{FF2B5EF4-FFF2-40B4-BE49-F238E27FC236}">
+                <a16:creationId xmlns:a16="http://schemas.microsoft.com/office/drawing/2014/main" id="{B6D72026-6FB4-1B73-F158-711B6BFF2CBC}"/>
+              </a:ext>
+            </a:extLst>
+          </p:cNvPr>
+          <p:cNvCxnSpPr>
+            <a:cxnSpLocks/>
+            <a:stCxn id="12" idx="3"/>
+            <a:endCxn id="14" idx="1"/>
+          </p:cNvCxnSpPr>
+          <p:nvPr/>
+        </p:nvCxnSpPr>
+        <p:spPr>
+          <a:xfrm>
+            <a:off x="3088257" y="2973141"/>
+            <a:ext cx="664911" cy="824620"/>
+          </a:xfrm>
+          <a:prstGeom prst="bentConnector3">
+            <a:avLst>
+              <a:gd name="adj1" fmla="val 50000"/>
+            </a:avLst>
+          </a:prstGeom>
+          <a:ln>
+            <a:solidFill>
+              <a:schemeClr val="tx1"/>
+            </a:solidFill>
+            <a:tailEnd type="arrow"/>
+          </a:ln>
+        </p:spPr>
+        <p:style>
+          <a:lnRef idx="1">
+            <a:schemeClr val="accent1"/>
+          </a:lnRef>
+          <a:fillRef idx="0">
+            <a:schemeClr val="accent1"/>
+          </a:fillRef>
+          <a:effectRef idx="0">
+            <a:schemeClr val="accent1"/>
+          </a:effectRef>
+          <a:fontRef idx="minor">
+            <a:schemeClr val="tx1"/>
+          </a:fontRef>
+        </p:style>
+      </p:cxnSp>
+      <p:cxnSp>
+        <p:nvCxnSpPr>
+          <p:cNvPr id="142" name="꺾인 양쪽 화살표 연결선 20">
+            <a:extLst>
+              <a:ext uri="{FF2B5EF4-FFF2-40B4-BE49-F238E27FC236}">
+                <a16:creationId xmlns:a16="http://schemas.microsoft.com/office/drawing/2014/main" id="{A8F461C8-7C7F-1922-87C5-FDE6AADA274B}"/>
+              </a:ext>
+            </a:extLst>
+          </p:cNvPr>
+          <p:cNvCxnSpPr>
+            <a:cxnSpLocks/>
+            <a:stCxn id="218" idx="3"/>
+            <a:endCxn id="25" idx="1"/>
+          </p:cNvCxnSpPr>
+          <p:nvPr/>
+        </p:nvCxnSpPr>
+        <p:spPr>
+          <a:xfrm flipV="1">
+            <a:off x="5258942" y="5007485"/>
+            <a:ext cx="244601" cy="479227"/>
+          </a:xfrm>
+          <a:prstGeom prst="bentConnector3">
+            <a:avLst>
+              <a:gd name="adj1" fmla="val 50000"/>
+            </a:avLst>
+          </a:prstGeom>
+          <a:ln>
+            <a:solidFill>
+              <a:schemeClr val="tx1"/>
+            </a:solidFill>
+            <a:tailEnd type="arrow"/>
+          </a:ln>
+        </p:spPr>
+        <p:style>
+          <a:lnRef idx="1">
+            <a:schemeClr val="accent1"/>
+          </a:lnRef>
+          <a:fillRef idx="0">
+            <a:schemeClr val="accent1"/>
+          </a:fillRef>
+          <a:effectRef idx="0">
+            <a:schemeClr val="accent1"/>
+          </a:effectRef>
+          <a:fontRef idx="minor">
+            <a:schemeClr val="tx1"/>
+          </a:fontRef>
+        </p:style>
+      </p:cxnSp>
+      <p:cxnSp>
+        <p:nvCxnSpPr>
+          <p:cNvPr id="145" name="꺾인 양쪽 화살표 연결선 20">
+            <a:extLst>
+              <a:ext uri="{FF2B5EF4-FFF2-40B4-BE49-F238E27FC236}">
+                <a16:creationId xmlns:a16="http://schemas.microsoft.com/office/drawing/2014/main" id="{717B3273-3A06-5D28-939E-C1E05316F045}"/>
+              </a:ext>
+            </a:extLst>
+          </p:cNvPr>
+          <p:cNvCxnSpPr>
+            <a:cxnSpLocks/>
+            <a:stCxn id="218" idx="3"/>
+            <a:endCxn id="16" idx="1"/>
+          </p:cNvCxnSpPr>
+          <p:nvPr/>
+        </p:nvCxnSpPr>
+        <p:spPr>
+          <a:xfrm>
+            <a:off x="5258942" y="5486712"/>
+            <a:ext cx="244601" cy="593444"/>
+          </a:xfrm>
+          <a:prstGeom prst="bentConnector3">
+            <a:avLst>
+              <a:gd name="adj1" fmla="val 50000"/>
+            </a:avLst>
+          </a:prstGeom>
+          <a:ln>
+            <a:solidFill>
+              <a:schemeClr val="tx1"/>
+            </a:solidFill>
+            <a:tailEnd type="arrow"/>
+          </a:ln>
+        </p:spPr>
+        <p:style>
+          <a:lnRef idx="1">
+            <a:schemeClr val="accent1"/>
+          </a:lnRef>
+          <a:fillRef idx="0">
+            <a:schemeClr val="accent1"/>
+          </a:fillRef>
+          <a:effectRef idx="0">
+            <a:schemeClr val="accent1"/>
+          </a:effectRef>
+          <a:fontRef idx="minor">
+            <a:schemeClr val="tx1"/>
+          </a:fontRef>
+        </p:style>
+      </p:cxnSp>
+      <p:cxnSp>
+        <p:nvCxnSpPr>
+          <p:cNvPr id="156" name="꺾인 양쪽 화살표 연결선 20">
+            <a:extLst>
+              <a:ext uri="{FF2B5EF4-FFF2-40B4-BE49-F238E27FC236}">
+                <a16:creationId xmlns:a16="http://schemas.microsoft.com/office/drawing/2014/main" id="{1A4AA5AA-9DC4-0634-4FF2-F18D2DE18CD2}"/>
+              </a:ext>
+            </a:extLst>
+          </p:cNvPr>
+          <p:cNvCxnSpPr>
+            <a:cxnSpLocks/>
+            <a:stCxn id="231" idx="3"/>
+            <a:endCxn id="218" idx="1"/>
+          </p:cNvCxnSpPr>
+          <p:nvPr/>
+        </p:nvCxnSpPr>
+        <p:spPr>
+          <a:xfrm flipH="1">
+            <a:off x="3154788" y="3077234"/>
+            <a:ext cx="5399553" cy="2409478"/>
+          </a:xfrm>
+          <a:prstGeom prst="bentConnector5">
+            <a:avLst>
+              <a:gd name="adj1" fmla="val -4234"/>
+              <a:gd name="adj2" fmla="val 52266"/>
+              <a:gd name="adj3" fmla="val 104234"/>
+            </a:avLst>
+          </a:prstGeom>
+          <a:ln>
+            <a:solidFill>
+              <a:schemeClr val="tx1"/>
+            </a:solidFill>
+            <a:tailEnd type="arrow"/>
+          </a:ln>
+        </p:spPr>
+        <p:style>
+          <a:lnRef idx="1">
+            <a:schemeClr val="accent1"/>
+          </a:lnRef>
+          <a:fillRef idx="0">
+            <a:schemeClr val="accent1"/>
+          </a:fillRef>
+          <a:effectRef idx="0">
+            <a:schemeClr val="accent1"/>
+          </a:effectRef>
+          <a:fontRef idx="minor">
+            <a:schemeClr val="tx1"/>
+          </a:fontRef>
+        </p:style>
+      </p:cxnSp>
+      <p:cxnSp>
+        <p:nvCxnSpPr>
+          <p:cNvPr id="167" name="화살표 14">
+            <a:extLst>
+              <a:ext uri="{FF2B5EF4-FFF2-40B4-BE49-F238E27FC236}">
+                <a16:creationId xmlns:a16="http://schemas.microsoft.com/office/drawing/2014/main" id="{EA7D0152-A2F7-948A-192D-6E87224D83E0}"/>
+              </a:ext>
+            </a:extLst>
+          </p:cNvPr>
+          <p:cNvCxnSpPr>
+            <a:cxnSpLocks/>
+            <a:stCxn id="25" idx="3"/>
+            <a:endCxn id="207" idx="1"/>
+          </p:cNvCxnSpPr>
+          <p:nvPr/>
+        </p:nvCxnSpPr>
+        <p:spPr>
+          <a:xfrm flipV="1">
+            <a:off x="6964392" y="5007484"/>
+            <a:ext cx="547805" cy="1"/>
+          </a:xfrm>
+          <a:prstGeom prst="straightConnector1">
+            <a:avLst/>
+          </a:prstGeom>
+          <a:ln>
+            <a:solidFill>
+              <a:schemeClr val="tx1"/>
+            </a:solidFill>
+            <a:tailEnd type="arrow"/>
+          </a:ln>
+        </p:spPr>
+        <p:style>
+          <a:lnRef idx="1">
+            <a:schemeClr val="accent1"/>
+          </a:lnRef>
+          <a:fillRef idx="0">
+            <a:schemeClr val="accent1"/>
+          </a:fillRef>
+          <a:effectRef idx="0">
+            <a:schemeClr val="accent1"/>
+          </a:effectRef>
+          <a:fontRef idx="minor">
+            <a:schemeClr val="tx1"/>
+          </a:fontRef>
+        </p:style>
+      </p:cxnSp>
+      <p:cxnSp>
+        <p:nvCxnSpPr>
+          <p:cNvPr id="170" name="화살표 14">
+            <a:extLst>
+              <a:ext uri="{FF2B5EF4-FFF2-40B4-BE49-F238E27FC236}">
+                <a16:creationId xmlns:a16="http://schemas.microsoft.com/office/drawing/2014/main" id="{608F9B70-EB20-B4DA-62CF-55A033638183}"/>
+              </a:ext>
+            </a:extLst>
+          </p:cNvPr>
+          <p:cNvCxnSpPr>
+            <a:cxnSpLocks/>
+            <a:stCxn id="16" idx="3"/>
+            <a:endCxn id="212" idx="1"/>
+          </p:cNvCxnSpPr>
+          <p:nvPr/>
+        </p:nvCxnSpPr>
+        <p:spPr>
+          <a:xfrm flipV="1">
+            <a:off x="6964391" y="6080155"/>
+            <a:ext cx="547806" cy="1"/>
+          </a:xfrm>
+          <a:prstGeom prst="straightConnector1">
+            <a:avLst/>
+          </a:prstGeom>
+          <a:ln>
+            <a:solidFill>
+              <a:schemeClr val="tx1"/>
+            </a:solidFill>
+            <a:tailEnd type="arrow"/>
+          </a:ln>
+        </p:spPr>
+        <p:style>
+          <a:lnRef idx="1">
+            <a:schemeClr val="accent1"/>
+          </a:lnRef>
+          <a:fillRef idx="0">
+            <a:schemeClr val="accent1"/>
+          </a:fillRef>
+          <a:effectRef idx="0">
+            <a:schemeClr val="accent1"/>
+          </a:effectRef>
+          <a:fontRef idx="minor">
+            <a:schemeClr val="tx1"/>
+          </a:fontRef>
+        </p:style>
+      </p:cxnSp>
+      <p:sp>
+        <p:nvSpPr>
+          <p:cNvPr id="185" name="사각형: 둥근 모서리 184">
+            <a:extLst>
+              <a:ext uri="{FF2B5EF4-FFF2-40B4-BE49-F238E27FC236}">
+                <a16:creationId xmlns:a16="http://schemas.microsoft.com/office/drawing/2014/main" id="{8C36E804-7C2C-F33A-08DD-E2370734D9B0}"/>
+              </a:ext>
+            </a:extLst>
+          </p:cNvPr>
+          <p:cNvSpPr/>
+          <p:nvPr/>
+        </p:nvSpPr>
+        <p:spPr>
+          <a:xfrm>
+            <a:off x="429839" y="1148366"/>
+            <a:ext cx="1425580" cy="757813"/>
+          </a:xfrm>
+          <a:prstGeom prst="roundRect">
+            <a:avLst/>
+          </a:prstGeom>
+          <a:solidFill>
+            <a:schemeClr val="bg1"/>
+          </a:solidFill>
+          <a:ln>
+            <a:solidFill>
+              <a:schemeClr val="tx1"/>
+            </a:solidFill>
+          </a:ln>
+        </p:spPr>
+        <p:style>
+          <a:lnRef idx="2">
+            <a:schemeClr val="accent1">
+              <a:shade val="15000"/>
+            </a:schemeClr>
+          </a:lnRef>
+          <a:fillRef idx="1">
+            <a:schemeClr val="accent1"/>
+          </a:fillRef>
+          <a:effectRef idx="0">
+            <a:schemeClr val="accent1"/>
+          </a:effectRef>
+          <a:fontRef idx="minor">
+            <a:schemeClr val="lt1"/>
+          </a:fontRef>
+        </p:style>
+        <p:txBody>
+          <a:bodyPr rtlCol="0" anchor="ctr"/>
+          <a:lstStyle/>
+          <a:p>
+            <a:pPr lvl="0" algn="ctr">
+              <a:defRPr/>
+            </a:pPr>
+            <a:r>
+              <a:rPr lang="ko-KR" altLang="en-US">
+                <a:solidFill>
+                  <a:srgbClr val="000000"/>
+                </a:solidFill>
+              </a:rPr>
+              <a:t>플레이어</a:t>
+            </a:r>
+            <a:br>
+              <a:rPr lang="en-US" altLang="ko-KR">
+                <a:solidFill>
+                  <a:srgbClr val="000000"/>
+                </a:solidFill>
+              </a:rPr>
+            </a:br>
+            <a:r>
+              <a:rPr lang="en-US" altLang="ko-KR">
+                <a:solidFill>
+                  <a:srgbClr val="000000"/>
+                </a:solidFill>
+              </a:rPr>
+              <a:t>2</a:t>
+            </a:r>
+            <a:r>
+              <a:rPr lang="ko-KR" altLang="en-US">
+                <a:solidFill>
+                  <a:srgbClr val="000000"/>
+                </a:solidFill>
+              </a:rPr>
+              <a:t>인 접속</a:t>
+            </a:r>
+            <a:endParaRPr lang="ko-KR" altLang="en-US" dirty="0">
+              <a:solidFill>
+                <a:srgbClr val="000000"/>
+              </a:solidFill>
+            </a:endParaRPr>
+          </a:p>
+        </p:txBody>
+      </p:sp>
+      <p:sp>
+        <p:nvSpPr>
+          <p:cNvPr id="207" name="사각형: 둥근 모서리 206">
+            <a:extLst>
+              <a:ext uri="{FF2B5EF4-FFF2-40B4-BE49-F238E27FC236}">
+                <a16:creationId xmlns:a16="http://schemas.microsoft.com/office/drawing/2014/main" id="{4A94AE49-04F1-8AA2-6634-923DED43A1EE}"/>
+              </a:ext>
+            </a:extLst>
+          </p:cNvPr>
+          <p:cNvSpPr/>
+          <p:nvPr/>
+        </p:nvSpPr>
+        <p:spPr>
+          <a:xfrm>
+            <a:off x="7512197" y="4624518"/>
+            <a:ext cx="1501630" cy="765932"/>
+          </a:xfrm>
+          <a:prstGeom prst="roundRect">
+            <a:avLst/>
+          </a:prstGeom>
+          <a:solidFill>
+            <a:schemeClr val="bg1"/>
+          </a:solidFill>
+          <a:ln>
+            <a:solidFill>
+              <a:schemeClr val="tx1"/>
+            </a:solidFill>
+          </a:ln>
+        </p:spPr>
+        <p:style>
+          <a:lnRef idx="2">
+            <a:schemeClr val="accent1">
+              <a:shade val="15000"/>
+            </a:schemeClr>
+          </a:lnRef>
+          <a:fillRef idx="1">
+            <a:schemeClr val="accent1"/>
+          </a:fillRef>
+          <a:effectRef idx="0">
+            <a:schemeClr val="accent1"/>
+          </a:effectRef>
+          <a:fontRef idx="minor">
+            <a:schemeClr val="lt1"/>
+          </a:fontRef>
+        </p:style>
+        <p:txBody>
+          <a:bodyPr rtlCol="0" anchor="ctr"/>
+          <a:lstStyle/>
+          <a:p>
+            <a:pPr lvl="0" algn="ctr">
+              <a:defRPr/>
+            </a:pPr>
+            <a:r>
+              <a:rPr lang="ko-KR" altLang="en-US" dirty="0">
+                <a:solidFill>
+                  <a:srgbClr val="000000"/>
+                </a:solidFill>
+              </a:rPr>
+              <a:t>생태계 파괴 엔딩</a:t>
+            </a:r>
+          </a:p>
+        </p:txBody>
+      </p:sp>
+      <p:sp>
+        <p:nvSpPr>
+          <p:cNvPr id="212" name="사각형: 둥근 모서리 211">
+            <a:extLst>
+              <a:ext uri="{FF2B5EF4-FFF2-40B4-BE49-F238E27FC236}">
+                <a16:creationId xmlns:a16="http://schemas.microsoft.com/office/drawing/2014/main" id="{67890A33-FA56-B7B1-F425-056DB749BC06}"/>
+              </a:ext>
+            </a:extLst>
+          </p:cNvPr>
+          <p:cNvSpPr/>
+          <p:nvPr/>
+        </p:nvSpPr>
+        <p:spPr>
+          <a:xfrm>
+            <a:off x="7512197" y="5697189"/>
+            <a:ext cx="1501630" cy="765932"/>
+          </a:xfrm>
+          <a:prstGeom prst="roundRect">
+            <a:avLst/>
+          </a:prstGeom>
+          <a:solidFill>
+            <a:schemeClr val="bg1"/>
+          </a:solidFill>
+          <a:ln>
+            <a:solidFill>
+              <a:schemeClr val="tx1"/>
+            </a:solidFill>
+          </a:ln>
+        </p:spPr>
+        <p:style>
+          <a:lnRef idx="2">
+            <a:schemeClr val="accent1">
+              <a:shade val="15000"/>
+            </a:schemeClr>
+          </a:lnRef>
+          <a:fillRef idx="1">
+            <a:schemeClr val="accent1"/>
+          </a:fillRef>
+          <a:effectRef idx="0">
+            <a:schemeClr val="accent1"/>
+          </a:effectRef>
+          <a:fontRef idx="minor">
+            <a:schemeClr val="lt1"/>
+          </a:fontRef>
+        </p:style>
+        <p:txBody>
+          <a:bodyPr rtlCol="0" anchor="ctr"/>
+          <a:lstStyle/>
+          <a:p>
+            <a:pPr lvl="0" algn="ctr">
+              <a:defRPr/>
+            </a:pPr>
+            <a:r>
+              <a:rPr lang="ko-KR" altLang="en-US" dirty="0">
+                <a:solidFill>
+                  <a:srgbClr val="000000"/>
+                </a:solidFill>
+              </a:rPr>
+              <a:t>생태계 복구 엔딩</a:t>
+            </a:r>
+          </a:p>
+        </p:txBody>
+      </p:sp>
+      <p:sp>
+        <p:nvSpPr>
+          <p:cNvPr id="218" name="사각형: 둥근 모서리 217">
+            <a:extLst>
+              <a:ext uri="{FF2B5EF4-FFF2-40B4-BE49-F238E27FC236}">
+                <a16:creationId xmlns:a16="http://schemas.microsoft.com/office/drawing/2014/main" id="{34B48A11-9583-38BC-9FC2-C3562B4A0A4D}"/>
+              </a:ext>
+            </a:extLst>
+          </p:cNvPr>
+          <p:cNvSpPr/>
+          <p:nvPr/>
+        </p:nvSpPr>
+        <p:spPr>
+          <a:xfrm>
+            <a:off x="3154788" y="5103746"/>
+            <a:ext cx="2104154" cy="765932"/>
+          </a:xfrm>
+          <a:prstGeom prst="roundRect">
+            <a:avLst/>
+          </a:prstGeom>
+          <a:solidFill>
+            <a:schemeClr val="bg1"/>
+          </a:solidFill>
+          <a:ln>
+            <a:solidFill>
+              <a:schemeClr val="tx1"/>
+            </a:solidFill>
+          </a:ln>
+        </p:spPr>
+        <p:style>
+          <a:lnRef idx="2">
+            <a:schemeClr val="accent1">
+              <a:shade val="15000"/>
+            </a:schemeClr>
+          </a:lnRef>
+          <a:fillRef idx="1">
+            <a:schemeClr val="accent1"/>
+          </a:fillRef>
+          <a:effectRef idx="0">
+            <a:schemeClr val="accent1"/>
+          </a:effectRef>
+          <a:fontRef idx="minor">
+            <a:schemeClr val="lt1"/>
+          </a:fontRef>
+        </p:style>
+        <p:txBody>
+          <a:bodyPr rtlCol="0" anchor="ctr"/>
+          <a:lstStyle/>
+          <a:p>
+            <a:pPr lvl="0" algn="ctr">
+              <a:defRPr/>
+            </a:pPr>
+            <a:r>
+              <a:rPr lang="ko-KR" altLang="en-US" dirty="0">
+                <a:solidFill>
+                  <a:srgbClr val="000000"/>
+                </a:solidFill>
+              </a:rPr>
+              <a:t>지정된 모든</a:t>
+            </a:r>
+            <a:br>
+              <a:rPr lang="en-US" altLang="ko-KR" dirty="0">
+                <a:solidFill>
+                  <a:srgbClr val="000000"/>
+                </a:solidFill>
+              </a:rPr>
+            </a:br>
+            <a:r>
+              <a:rPr lang="ko-KR" altLang="en-US" dirty="0" err="1">
+                <a:solidFill>
+                  <a:srgbClr val="000000"/>
+                </a:solidFill>
+              </a:rPr>
+              <a:t>배달품</a:t>
+            </a:r>
+            <a:r>
+              <a:rPr lang="ko-KR" altLang="en-US" dirty="0">
+                <a:solidFill>
+                  <a:srgbClr val="000000"/>
+                </a:solidFill>
+              </a:rPr>
+              <a:t> 배달 완료</a:t>
+            </a:r>
+          </a:p>
+        </p:txBody>
+      </p:sp>
+      <p:sp>
+        <p:nvSpPr>
+          <p:cNvPr id="231" name="순서도: 천공 테이프 230">
+            <a:extLst>
+              <a:ext uri="{FF2B5EF4-FFF2-40B4-BE49-F238E27FC236}">
+                <a16:creationId xmlns:a16="http://schemas.microsoft.com/office/drawing/2014/main" id="{EC25D784-F19A-1ED0-EC94-F1376817D020}"/>
+              </a:ext>
+            </a:extLst>
+          </p:cNvPr>
+          <p:cNvSpPr/>
+          <p:nvPr/>
+        </p:nvSpPr>
+        <p:spPr>
+          <a:xfrm>
+            <a:off x="6604891" y="2585083"/>
+            <a:ext cx="1949450" cy="984302"/>
+          </a:xfrm>
+          <a:prstGeom prst="flowChartPunchedTape">
+            <a:avLst/>
+          </a:prstGeom>
+          <a:solidFill>
+            <a:schemeClr val="bg1"/>
+          </a:solidFill>
+          <a:ln>
+            <a:solidFill>
+              <a:schemeClr val="tx1"/>
+            </a:solidFill>
+          </a:ln>
+        </p:spPr>
+        <p:style>
+          <a:lnRef idx="2">
+            <a:schemeClr val="accent1">
+              <a:shade val="15000"/>
+            </a:schemeClr>
+          </a:lnRef>
+          <a:fillRef idx="1">
+            <a:schemeClr val="accent1"/>
+          </a:fillRef>
+          <a:effectRef idx="0">
+            <a:schemeClr val="accent1"/>
+          </a:effectRef>
+          <a:fontRef idx="minor">
+            <a:schemeClr val="lt1"/>
+          </a:fontRef>
+        </p:style>
+        <p:txBody>
+          <a:bodyPr rtlCol="0" anchor="ctr"/>
+          <a:lstStyle/>
+          <a:p>
+            <a:pPr lvl="0" algn="ctr">
+              <a:defRPr/>
+            </a:pPr>
+            <a:r>
+              <a:rPr lang="ko-KR" altLang="en-US" dirty="0">
+                <a:solidFill>
+                  <a:srgbClr val="000000"/>
+                </a:solidFill>
+              </a:rPr>
+              <a:t>다른 배달품들도</a:t>
+            </a:r>
+            <a:br>
+              <a:rPr lang="en-US" altLang="ko-KR" dirty="0">
+                <a:solidFill>
+                  <a:srgbClr val="000000"/>
+                </a:solidFill>
+              </a:rPr>
+            </a:br>
+            <a:r>
+              <a:rPr lang="ko-KR" altLang="en-US" dirty="0">
+                <a:solidFill>
+                  <a:srgbClr val="000000"/>
+                </a:solidFill>
+              </a:rPr>
+              <a:t>동일하게 진행</a:t>
+            </a:r>
+          </a:p>
+        </p:txBody>
+      </p:sp>
+      <p:sp>
+        <p:nvSpPr>
+          <p:cNvPr id="239" name="사각형: 둥근 모서리 238">
+            <a:extLst>
+              <a:ext uri="{FF2B5EF4-FFF2-40B4-BE49-F238E27FC236}">
+                <a16:creationId xmlns:a16="http://schemas.microsoft.com/office/drawing/2014/main" id="{FFD3E3DD-10B3-9E30-A0FC-53457BA7D122}"/>
+              </a:ext>
+            </a:extLst>
+          </p:cNvPr>
+          <p:cNvSpPr/>
+          <p:nvPr/>
+        </p:nvSpPr>
+        <p:spPr>
+          <a:xfrm>
+            <a:off x="10119048" y="4311423"/>
+            <a:ext cx="1714353" cy="765932"/>
+          </a:xfrm>
+          <a:prstGeom prst="roundRect">
+            <a:avLst/>
+          </a:prstGeom>
+          <a:solidFill>
+            <a:schemeClr val="bg1"/>
+          </a:solidFill>
+          <a:ln>
+            <a:solidFill>
+              <a:schemeClr val="accent1"/>
+            </a:solidFill>
+          </a:ln>
+        </p:spPr>
+        <p:style>
+          <a:lnRef idx="2">
+            <a:schemeClr val="accent1">
+              <a:shade val="15000"/>
+            </a:schemeClr>
+          </a:lnRef>
+          <a:fillRef idx="1">
+            <a:schemeClr val="accent1"/>
+          </a:fillRef>
+          <a:effectRef idx="0">
+            <a:schemeClr val="accent1"/>
+          </a:effectRef>
+          <a:fontRef idx="minor">
+            <a:schemeClr val="lt1"/>
+          </a:fontRef>
+        </p:style>
+        <p:txBody>
+          <a:bodyPr rtlCol="0" anchor="ctr"/>
+          <a:lstStyle/>
+          <a:p>
+            <a:pPr lvl="0" algn="ctr">
+              <a:defRPr/>
+            </a:pPr>
+            <a:r>
+              <a:rPr lang="ko-KR" altLang="en-US" dirty="0">
+                <a:solidFill>
+                  <a:srgbClr val="000000"/>
+                </a:solidFill>
+              </a:rPr>
+              <a:t>특정 플로우의 </a:t>
+            </a:r>
+            <a:r>
+              <a:rPr lang="ko-KR" altLang="en-US">
+                <a:solidFill>
+                  <a:srgbClr val="000000"/>
+                </a:solidFill>
+              </a:rPr>
+              <a:t>시작</a:t>
+            </a:r>
+            <a:r>
+              <a:rPr lang="en-US" altLang="ko-KR" dirty="0">
+                <a:solidFill>
+                  <a:srgbClr val="000000"/>
+                </a:solidFill>
+              </a:rPr>
+              <a:t>/</a:t>
+            </a:r>
+            <a:r>
+              <a:rPr lang="ko-KR" altLang="en-US" dirty="0">
+                <a:solidFill>
+                  <a:srgbClr val="000000"/>
+                </a:solidFill>
+              </a:rPr>
+              <a:t>끝</a:t>
+            </a:r>
+          </a:p>
+        </p:txBody>
+      </p:sp>
+      <p:sp>
+        <p:nvSpPr>
+          <p:cNvPr id="241" name="순서도: 천공 테이프 240">
+            <a:extLst>
+              <a:ext uri="{FF2B5EF4-FFF2-40B4-BE49-F238E27FC236}">
+                <a16:creationId xmlns:a16="http://schemas.microsoft.com/office/drawing/2014/main" id="{5DF6D138-F63A-80A7-A5E5-C3F4B88289F5}"/>
+              </a:ext>
+            </a:extLst>
+          </p:cNvPr>
+          <p:cNvSpPr/>
+          <p:nvPr/>
+        </p:nvSpPr>
+        <p:spPr>
+          <a:xfrm>
+            <a:off x="10119048" y="5145718"/>
+            <a:ext cx="1764061" cy="868959"/>
+          </a:xfrm>
+          <a:prstGeom prst="flowChartPunchedTape">
+            <a:avLst/>
+          </a:prstGeom>
+          <a:solidFill>
+            <a:schemeClr val="bg1"/>
+          </a:solidFill>
+          <a:ln>
+            <a:solidFill>
+              <a:schemeClr val="accent1"/>
+            </a:solidFill>
+          </a:ln>
+        </p:spPr>
+        <p:style>
+          <a:lnRef idx="2">
+            <a:schemeClr val="accent1">
+              <a:shade val="15000"/>
+            </a:schemeClr>
+          </a:lnRef>
+          <a:fillRef idx="1">
+            <a:schemeClr val="accent1"/>
+          </a:fillRef>
+          <a:effectRef idx="0">
+            <a:schemeClr val="accent1"/>
+          </a:effectRef>
+          <a:fontRef idx="minor">
+            <a:schemeClr val="lt1"/>
+          </a:fontRef>
+        </p:style>
+        <p:txBody>
+          <a:bodyPr rtlCol="0" anchor="ctr"/>
+          <a:lstStyle/>
+          <a:p>
+            <a:pPr lvl="0" algn="ctr">
+              <a:defRPr/>
+            </a:pPr>
+            <a:r>
+              <a:rPr lang="ko-KR" altLang="en-US">
+                <a:solidFill>
+                  <a:srgbClr val="000000"/>
+                </a:solidFill>
+              </a:rPr>
+              <a:t>플로우 진행 중</a:t>
+            </a:r>
+            <a:endParaRPr lang="ko-KR" altLang="en-US" dirty="0">
+              <a:solidFill>
+                <a:srgbClr val="000000"/>
+              </a:solidFill>
+            </a:endParaRPr>
+          </a:p>
+        </p:txBody>
+      </p:sp>
+    </p:spTree>
+    <p:extLst>
+      <p:ext uri="{BB962C8B-B14F-4D97-AF65-F5344CB8AC3E}">
+        <p14:creationId xmlns:p14="http://schemas.microsoft.com/office/powerpoint/2010/main" val="4223449320"/>
+      </p:ext>
+    </p:extLst>
+  </p:cSld>
+  <p:clrMapOvr>
+    <a:masterClrMapping/>
+  </p:clrMapOvr>
+</p:sld>
+</file>
+
+<file path=ppt/slides/slide30.xml><?xml version="1.0" encoding="utf-8"?>
+<p:sld xmlns:a="http://schemas.openxmlformats.org/drawingml/2006/main" xmlns:r="http://schemas.openxmlformats.org/officeDocument/2006/relationships" xmlns:p="http://schemas.openxmlformats.org/presentationml/2006/main">
+  <p:cSld>
+    <p:spTree>
+      <p:nvGrpSpPr>
         <p:cNvPr id="1" name=""/>
         <p:cNvGrpSpPr/>
         <p:nvPr/>
@@ -31942,1957 +35011,7 @@
 </p:sld>
 </file>
 
-<file path=ppt/slides/slide3.xml><?xml version="1.0" encoding="utf-8"?>
-<p:sld xmlns:a="http://schemas.openxmlformats.org/drawingml/2006/main" xmlns:r="http://schemas.openxmlformats.org/officeDocument/2006/relationships" xmlns:p="http://schemas.openxmlformats.org/presentationml/2006/main">
-  <p:cSld>
-    <p:spTree>
-      <p:nvGrpSpPr>
-        <p:cNvPr id="1" name=""/>
-        <p:cNvGrpSpPr/>
-        <p:nvPr/>
-      </p:nvGrpSpPr>
-      <p:grpSpPr>
-        <a:xfrm>
-          <a:off x="0" y="0"/>
-          <a:ext cx="0" cy="0"/>
-          <a:chOff x="0" y="0"/>
-          <a:chExt cx="0" cy="0"/>
-        </a:xfrm>
-      </p:grpSpPr>
-      <p:sp>
-        <p:nvSpPr>
-          <p:cNvPr id="2" name="제목 1">
-            <a:extLst>
-              <a:ext uri="{FF2B5EF4-FFF2-40B4-BE49-F238E27FC236}">
-                <a16:creationId xmlns:a16="http://schemas.microsoft.com/office/drawing/2014/main" id="{19DDED9C-A03C-CDA7-4415-B1144A65CC25}"/>
-              </a:ext>
-            </a:extLst>
-          </p:cNvPr>
-          <p:cNvSpPr>
-            <a:spLocks noGrp="1"/>
-          </p:cNvSpPr>
-          <p:nvPr>
-            <p:ph type="title"/>
-          </p:nvPr>
-        </p:nvSpPr>
-        <p:spPr/>
-        <p:txBody>
-          <a:bodyPr/>
-          <a:lstStyle/>
-          <a:p>
-            <a:r>
-              <a:rPr lang="ko-KR" altLang="en-US" dirty="0"/>
-              <a:t>게임 전체 플로우</a:t>
-            </a:r>
-          </a:p>
-        </p:txBody>
-      </p:sp>
-      <p:sp>
-        <p:nvSpPr>
-          <p:cNvPr id="7" name="내용 개체 틀 6">
-            <a:extLst>
-              <a:ext uri="{FF2B5EF4-FFF2-40B4-BE49-F238E27FC236}">
-                <a16:creationId xmlns:a16="http://schemas.microsoft.com/office/drawing/2014/main" id="{1C997EA9-4378-21C7-ADBE-D0A611CC26F1}"/>
-              </a:ext>
-            </a:extLst>
-          </p:cNvPr>
-          <p:cNvSpPr>
-            <a:spLocks noGrp="1"/>
-          </p:cNvSpPr>
-          <p:nvPr>
-            <p:ph sz="quarter" idx="13"/>
-          </p:nvPr>
-        </p:nvSpPr>
-        <p:spPr/>
-        <p:txBody>
-          <a:bodyPr/>
-          <a:lstStyle/>
-          <a:p>
-            <a:endParaRPr lang="ko-KR" altLang="en-US" dirty="0"/>
-          </a:p>
-        </p:txBody>
-      </p:sp>
-      <p:sp>
-        <p:nvSpPr>
-          <p:cNvPr id="9" name="직사각형 8">
-            <a:extLst>
-              <a:ext uri="{FF2B5EF4-FFF2-40B4-BE49-F238E27FC236}">
-                <a16:creationId xmlns:a16="http://schemas.microsoft.com/office/drawing/2014/main" id="{37C45B6D-63B9-873F-DBE3-6DC7DABF0988}"/>
-              </a:ext>
-            </a:extLst>
-          </p:cNvPr>
-          <p:cNvSpPr/>
-          <p:nvPr/>
-        </p:nvSpPr>
-        <p:spPr>
-          <a:xfrm>
-            <a:off x="2373422" y="1150976"/>
-            <a:ext cx="1404937" cy="738187"/>
-          </a:xfrm>
-          <a:prstGeom prst="rect">
-            <a:avLst/>
-          </a:prstGeom>
-          <a:solidFill>
-            <a:schemeClr val="lt1"/>
-          </a:solidFill>
-          <a:ln>
-            <a:solidFill>
-              <a:schemeClr val="tx1"/>
-            </a:solidFill>
-          </a:ln>
-        </p:spPr>
-        <p:style>
-          <a:lnRef idx="2">
-            <a:schemeClr val="accent1">
-              <a:shade val="20000"/>
-            </a:schemeClr>
-          </a:lnRef>
-          <a:fillRef idx="1">
-            <a:schemeClr val="accent1"/>
-          </a:fillRef>
-          <a:effectRef idx="0">
-            <a:schemeClr val="accent1"/>
-          </a:effectRef>
-          <a:fontRef idx="minor">
-            <a:schemeClr val="lt1"/>
-          </a:fontRef>
-        </p:style>
-        <p:txBody>
-          <a:bodyPr anchor="ctr"/>
-          <a:lstStyle/>
-          <a:p>
-            <a:pPr lvl="0" algn="ctr">
-              <a:defRPr/>
-            </a:pPr>
-            <a:r>
-              <a:rPr lang="ko-KR" altLang="en-US" dirty="0">
-                <a:solidFill>
-                  <a:srgbClr val="000000"/>
-                </a:solidFill>
-              </a:rPr>
-              <a:t>배달 물품 결정됨</a:t>
-            </a:r>
-          </a:p>
-        </p:txBody>
-      </p:sp>
-      <p:sp>
-        <p:nvSpPr>
-          <p:cNvPr id="10" name="직사각형 9">
-            <a:extLst>
-              <a:ext uri="{FF2B5EF4-FFF2-40B4-BE49-F238E27FC236}">
-                <a16:creationId xmlns:a16="http://schemas.microsoft.com/office/drawing/2014/main" id="{9DCC1CAF-576E-1488-11D4-30F676842111}"/>
-              </a:ext>
-            </a:extLst>
-          </p:cNvPr>
-          <p:cNvSpPr/>
-          <p:nvPr/>
-        </p:nvSpPr>
-        <p:spPr>
-          <a:xfrm>
-            <a:off x="4431785" y="1022125"/>
-            <a:ext cx="1818245" cy="1009422"/>
-          </a:xfrm>
-          <a:prstGeom prst="rect">
-            <a:avLst/>
-          </a:prstGeom>
-          <a:solidFill>
-            <a:schemeClr val="lt1"/>
-          </a:solidFill>
-          <a:ln>
-            <a:solidFill>
-              <a:schemeClr val="tx1"/>
-            </a:solidFill>
-          </a:ln>
-        </p:spPr>
-        <p:style>
-          <a:lnRef idx="2">
-            <a:schemeClr val="accent1">
-              <a:shade val="20000"/>
-            </a:schemeClr>
-          </a:lnRef>
-          <a:fillRef idx="1">
-            <a:schemeClr val="accent1"/>
-          </a:fillRef>
-          <a:effectRef idx="0">
-            <a:schemeClr val="accent1"/>
-          </a:effectRef>
-          <a:fontRef idx="minor">
-            <a:schemeClr val="lt1"/>
-          </a:fontRef>
-        </p:style>
-        <p:txBody>
-          <a:bodyPr anchor="ctr"/>
-          <a:lstStyle/>
-          <a:p>
-            <a:pPr lvl="0" algn="ctr">
-              <a:defRPr/>
-            </a:pPr>
-            <a:r>
-              <a:rPr lang="ko-KR" altLang="en-US">
-                <a:solidFill>
-                  <a:srgbClr val="000000"/>
-                </a:solidFill>
-              </a:rPr>
-              <a:t>두 플레이어 중 누가 </a:t>
-            </a:r>
-            <a:r>
-              <a:rPr lang="ko-KR" altLang="en-US" dirty="0">
-                <a:solidFill>
-                  <a:srgbClr val="000000"/>
-                </a:solidFill>
-              </a:rPr>
-              <a:t>배달품을 </a:t>
-            </a:r>
-            <a:r>
-              <a:rPr lang="ko-KR" altLang="en-US">
-                <a:solidFill>
-                  <a:srgbClr val="000000"/>
-                </a:solidFill>
-              </a:rPr>
-              <a:t>운반할지 결정</a:t>
-            </a:r>
-            <a:endParaRPr lang="ko-KR" altLang="en-US" dirty="0">
-              <a:solidFill>
-                <a:srgbClr val="000000"/>
-              </a:solidFill>
-            </a:endParaRPr>
-          </a:p>
-        </p:txBody>
-      </p:sp>
-      <p:sp>
-        <p:nvSpPr>
-          <p:cNvPr id="11" name="직사각형 10">
-            <a:extLst>
-              <a:ext uri="{FF2B5EF4-FFF2-40B4-BE49-F238E27FC236}">
-                <a16:creationId xmlns:a16="http://schemas.microsoft.com/office/drawing/2014/main" id="{0A9FF80D-A8A7-69B1-1782-63B801C66AC9}"/>
-              </a:ext>
-            </a:extLst>
-          </p:cNvPr>
-          <p:cNvSpPr/>
-          <p:nvPr/>
-        </p:nvSpPr>
-        <p:spPr>
-          <a:xfrm>
-            <a:off x="6768033" y="1066651"/>
-            <a:ext cx="1495527" cy="920369"/>
-          </a:xfrm>
-          <a:prstGeom prst="rect">
-            <a:avLst/>
-          </a:prstGeom>
-          <a:solidFill>
-            <a:schemeClr val="lt1"/>
-          </a:solidFill>
-          <a:ln>
-            <a:solidFill>
-              <a:schemeClr val="tx1"/>
-            </a:solidFill>
-          </a:ln>
-        </p:spPr>
-        <p:style>
-          <a:lnRef idx="2">
-            <a:schemeClr val="accent1">
-              <a:shade val="20000"/>
-            </a:schemeClr>
-          </a:lnRef>
-          <a:fillRef idx="1">
-            <a:schemeClr val="accent1"/>
-          </a:fillRef>
-          <a:effectRef idx="0">
-            <a:schemeClr val="accent1"/>
-          </a:effectRef>
-          <a:fontRef idx="minor">
-            <a:schemeClr val="lt1"/>
-          </a:fontRef>
-        </p:style>
-        <p:txBody>
-          <a:bodyPr anchor="ctr"/>
-          <a:lstStyle/>
-          <a:p>
-            <a:pPr lvl="0" algn="ctr">
-              <a:defRPr/>
-            </a:pPr>
-            <a:r>
-              <a:rPr lang="ko-KR" altLang="en-US" dirty="0">
-                <a:solidFill>
-                  <a:srgbClr val="000000"/>
-                </a:solidFill>
-              </a:rPr>
-              <a:t>배달품의</a:t>
-            </a:r>
-            <a:br>
-              <a:rPr lang="en-US" altLang="ko-KR" dirty="0">
-                <a:solidFill>
-                  <a:srgbClr val="000000"/>
-                </a:solidFill>
-              </a:rPr>
-            </a:br>
-            <a:r>
-              <a:rPr lang="ko-KR" altLang="en-US" dirty="0">
-                <a:solidFill>
-                  <a:srgbClr val="000000"/>
-                </a:solidFill>
-              </a:rPr>
-              <a:t>배송지 파악</a:t>
-            </a:r>
-          </a:p>
-        </p:txBody>
-      </p:sp>
-      <p:sp>
-        <p:nvSpPr>
-          <p:cNvPr id="12" name="직사각형 11">
-            <a:extLst>
-              <a:ext uri="{FF2B5EF4-FFF2-40B4-BE49-F238E27FC236}">
-                <a16:creationId xmlns:a16="http://schemas.microsoft.com/office/drawing/2014/main" id="{DBE7DC57-BC47-6584-EE22-F10C5A51640D}"/>
-              </a:ext>
-            </a:extLst>
-          </p:cNvPr>
-          <p:cNvSpPr/>
-          <p:nvPr/>
-        </p:nvSpPr>
-        <p:spPr>
-          <a:xfrm>
-            <a:off x="1400683" y="2535546"/>
-            <a:ext cx="1687574" cy="875190"/>
-          </a:xfrm>
-          <a:prstGeom prst="rect">
-            <a:avLst/>
-          </a:prstGeom>
-          <a:solidFill>
-            <a:schemeClr val="lt1"/>
-          </a:solidFill>
-          <a:ln>
-            <a:solidFill>
-              <a:schemeClr val="tx1"/>
-            </a:solidFill>
-          </a:ln>
-        </p:spPr>
-        <p:style>
-          <a:lnRef idx="2">
-            <a:schemeClr val="accent1">
-              <a:shade val="20000"/>
-            </a:schemeClr>
-          </a:lnRef>
-          <a:fillRef idx="1">
-            <a:schemeClr val="accent1"/>
-          </a:fillRef>
-          <a:effectRef idx="0">
-            <a:schemeClr val="accent1"/>
-          </a:effectRef>
-          <a:fontRef idx="minor">
-            <a:schemeClr val="lt1"/>
-          </a:fontRef>
-        </p:style>
-        <p:txBody>
-          <a:bodyPr anchor="ctr"/>
-          <a:lstStyle/>
-          <a:p>
-            <a:pPr lvl="0" algn="ctr">
-              <a:defRPr/>
-            </a:pPr>
-            <a:r>
-              <a:rPr lang="ko-KR" altLang="en-US" dirty="0">
-                <a:solidFill>
-                  <a:srgbClr val="000000"/>
-                </a:solidFill>
-              </a:rPr>
-              <a:t>협동하며</a:t>
-            </a:r>
-            <a:br>
-              <a:rPr lang="en-US" altLang="ko-KR" dirty="0">
-                <a:solidFill>
-                  <a:srgbClr val="000000"/>
-                </a:solidFill>
-              </a:rPr>
-            </a:br>
-            <a:r>
-              <a:rPr lang="ko-KR" altLang="en-US" dirty="0">
-                <a:solidFill>
-                  <a:srgbClr val="000000"/>
-                </a:solidFill>
-              </a:rPr>
-              <a:t>경로와 안내를 따라 진행</a:t>
-            </a:r>
-          </a:p>
-        </p:txBody>
-      </p:sp>
-      <p:sp>
-        <p:nvSpPr>
-          <p:cNvPr id="13" name="직사각형 12">
-            <a:extLst>
-              <a:ext uri="{FF2B5EF4-FFF2-40B4-BE49-F238E27FC236}">
-                <a16:creationId xmlns:a16="http://schemas.microsoft.com/office/drawing/2014/main" id="{38CB9408-71A5-5E20-7103-632695B94B6B}"/>
-              </a:ext>
-            </a:extLst>
-          </p:cNvPr>
-          <p:cNvSpPr/>
-          <p:nvPr/>
-        </p:nvSpPr>
-        <p:spPr>
-          <a:xfrm>
-            <a:off x="3753168" y="2326045"/>
-            <a:ext cx="2074261" cy="857522"/>
-          </a:xfrm>
-          <a:prstGeom prst="rect">
-            <a:avLst/>
-          </a:prstGeom>
-          <a:solidFill>
-            <a:schemeClr val="lt1"/>
-          </a:solidFill>
-          <a:ln>
-            <a:solidFill>
-              <a:schemeClr val="tx1"/>
-            </a:solidFill>
-          </a:ln>
-        </p:spPr>
-        <p:style>
-          <a:lnRef idx="2">
-            <a:schemeClr val="accent1">
-              <a:shade val="20000"/>
-            </a:schemeClr>
-          </a:lnRef>
-          <a:fillRef idx="1">
-            <a:schemeClr val="accent1"/>
-          </a:fillRef>
-          <a:effectRef idx="0">
-            <a:schemeClr val="accent1"/>
-          </a:effectRef>
-          <a:fontRef idx="minor">
-            <a:schemeClr val="lt1"/>
-          </a:fontRef>
-        </p:style>
-        <p:txBody>
-          <a:bodyPr anchor="ctr"/>
-          <a:lstStyle/>
-          <a:p>
-            <a:pPr lvl="0" algn="ctr">
-              <a:defRPr/>
-            </a:pPr>
-            <a:r>
-              <a:rPr lang="ko-KR" altLang="en-US" dirty="0">
-                <a:solidFill>
-                  <a:srgbClr val="000000"/>
-                </a:solidFill>
-              </a:rPr>
-              <a:t>시간 안에 배달</a:t>
-            </a:r>
-            <a:br>
-              <a:rPr lang="en-US" altLang="ko-KR" dirty="0">
-                <a:solidFill>
-                  <a:srgbClr val="000000"/>
-                </a:solidFill>
-              </a:rPr>
-            </a:br>
-            <a:r>
-              <a:rPr lang="ko-KR" altLang="en-US" dirty="0">
-                <a:solidFill>
-                  <a:srgbClr val="000000"/>
-                </a:solidFill>
-              </a:rPr>
-              <a:t>성공 시 보수 지급</a:t>
-            </a:r>
-          </a:p>
-        </p:txBody>
-      </p:sp>
-      <p:sp>
-        <p:nvSpPr>
-          <p:cNvPr id="14" name="직사각형 13">
-            <a:extLst>
-              <a:ext uri="{FF2B5EF4-FFF2-40B4-BE49-F238E27FC236}">
-                <a16:creationId xmlns:a16="http://schemas.microsoft.com/office/drawing/2014/main" id="{FF46F548-1FCF-F79F-7E48-1C06AE818767}"/>
-              </a:ext>
-            </a:extLst>
-          </p:cNvPr>
-          <p:cNvSpPr/>
-          <p:nvPr/>
-        </p:nvSpPr>
-        <p:spPr>
-          <a:xfrm>
-            <a:off x="3753168" y="3428667"/>
-            <a:ext cx="2074261" cy="738187"/>
-          </a:xfrm>
-          <a:prstGeom prst="rect">
-            <a:avLst/>
-          </a:prstGeom>
-          <a:solidFill>
-            <a:schemeClr val="lt1"/>
-          </a:solidFill>
-          <a:ln>
-            <a:solidFill>
-              <a:schemeClr val="tx1"/>
-            </a:solidFill>
-          </a:ln>
-        </p:spPr>
-        <p:style>
-          <a:lnRef idx="2">
-            <a:schemeClr val="accent1">
-              <a:shade val="20000"/>
-            </a:schemeClr>
-          </a:lnRef>
-          <a:fillRef idx="1">
-            <a:schemeClr val="accent1"/>
-          </a:fillRef>
-          <a:effectRef idx="0">
-            <a:schemeClr val="accent1"/>
-          </a:effectRef>
-          <a:fontRef idx="minor">
-            <a:schemeClr val="lt1"/>
-          </a:fontRef>
-        </p:style>
-        <p:txBody>
-          <a:bodyPr anchor="ctr"/>
-          <a:lstStyle/>
-          <a:p>
-            <a:pPr lvl="0" algn="ctr">
-              <a:defRPr/>
-            </a:pPr>
-            <a:r>
-              <a:rPr lang="ko-KR" altLang="en-US" dirty="0">
-                <a:solidFill>
-                  <a:srgbClr val="000000"/>
-                </a:solidFill>
-              </a:rPr>
-              <a:t>배달 시간 초과 시 </a:t>
-            </a:r>
-            <a:r>
-              <a:rPr lang="ko-KR" altLang="en-US">
-                <a:solidFill>
-                  <a:srgbClr val="000000"/>
-                </a:solidFill>
-              </a:rPr>
-              <a:t>보수 미지급</a:t>
-            </a:r>
-            <a:endParaRPr lang="en-US" altLang="ko-KR" dirty="0">
-              <a:solidFill>
-                <a:srgbClr val="000000"/>
-              </a:solidFill>
-            </a:endParaRPr>
-          </a:p>
-        </p:txBody>
-      </p:sp>
-      <p:sp>
-        <p:nvSpPr>
-          <p:cNvPr id="16" name="직사각형 15">
-            <a:extLst>
-              <a:ext uri="{FF2B5EF4-FFF2-40B4-BE49-F238E27FC236}">
-                <a16:creationId xmlns:a16="http://schemas.microsoft.com/office/drawing/2014/main" id="{4BD95DDE-1CB1-AA6F-72CB-36E1348A8E42}"/>
-              </a:ext>
-            </a:extLst>
-          </p:cNvPr>
-          <p:cNvSpPr/>
-          <p:nvPr/>
-        </p:nvSpPr>
-        <p:spPr>
-          <a:xfrm>
-            <a:off x="5503543" y="5571286"/>
-            <a:ext cx="1460848" cy="1017739"/>
-          </a:xfrm>
-          <a:prstGeom prst="rect">
-            <a:avLst/>
-          </a:prstGeom>
-          <a:solidFill>
-            <a:schemeClr val="lt1"/>
-          </a:solidFill>
-          <a:ln>
-            <a:solidFill>
-              <a:schemeClr val="tx1"/>
-            </a:solidFill>
-          </a:ln>
-        </p:spPr>
-        <p:style>
-          <a:lnRef idx="2">
-            <a:schemeClr val="accent1">
-              <a:shade val="20000"/>
-            </a:schemeClr>
-          </a:lnRef>
-          <a:fillRef idx="1">
-            <a:schemeClr val="accent1"/>
-          </a:fillRef>
-          <a:effectRef idx="0">
-            <a:schemeClr val="accent1"/>
-          </a:effectRef>
-          <a:fontRef idx="minor">
-            <a:schemeClr val="lt1"/>
-          </a:fontRef>
-        </p:style>
-        <p:txBody>
-          <a:bodyPr anchor="ctr"/>
-          <a:lstStyle/>
-          <a:p>
-            <a:pPr lvl="0" algn="ctr">
-              <a:defRPr/>
-            </a:pPr>
-            <a:r>
-              <a:rPr lang="ko-KR" altLang="en-US" dirty="0">
-                <a:solidFill>
-                  <a:srgbClr val="000000"/>
-                </a:solidFill>
-              </a:rPr>
-              <a:t>충분한 보수 보유</a:t>
-            </a:r>
-          </a:p>
-        </p:txBody>
-      </p:sp>
-      <p:cxnSp>
-        <p:nvCxnSpPr>
-          <p:cNvPr id="17" name="화살표 12">
-            <a:extLst>
-              <a:ext uri="{FF2B5EF4-FFF2-40B4-BE49-F238E27FC236}">
-                <a16:creationId xmlns:a16="http://schemas.microsoft.com/office/drawing/2014/main" id="{946DD478-AFD6-6E16-7F4B-2B9634DE5BFA}"/>
-              </a:ext>
-            </a:extLst>
-          </p:cNvPr>
-          <p:cNvCxnSpPr>
-            <a:cxnSpLocks/>
-            <a:stCxn id="9" idx="3"/>
-            <a:endCxn id="10" idx="1"/>
-          </p:cNvCxnSpPr>
-          <p:nvPr/>
-        </p:nvCxnSpPr>
-        <p:spPr>
-          <a:xfrm>
-            <a:off x="3778359" y="1520070"/>
-            <a:ext cx="653426" cy="6766"/>
-          </a:xfrm>
-          <a:prstGeom prst="straightConnector1">
-            <a:avLst/>
-          </a:prstGeom>
-          <a:ln>
-            <a:solidFill>
-              <a:schemeClr val="tx1"/>
-            </a:solidFill>
-            <a:tailEnd type="arrow"/>
-          </a:ln>
-        </p:spPr>
-        <p:style>
-          <a:lnRef idx="1">
-            <a:schemeClr val="accent1"/>
-          </a:lnRef>
-          <a:fillRef idx="0">
-            <a:schemeClr val="accent1"/>
-          </a:fillRef>
-          <a:effectRef idx="0">
-            <a:schemeClr val="accent1"/>
-          </a:effectRef>
-          <a:fontRef idx="minor">
-            <a:schemeClr val="tx1"/>
-          </a:fontRef>
-        </p:style>
-      </p:cxnSp>
-      <p:cxnSp>
-        <p:nvCxnSpPr>
-          <p:cNvPr id="18" name="화살표 13">
-            <a:extLst>
-              <a:ext uri="{FF2B5EF4-FFF2-40B4-BE49-F238E27FC236}">
-                <a16:creationId xmlns:a16="http://schemas.microsoft.com/office/drawing/2014/main" id="{7565030A-3172-2EDE-FAF6-A040EA22A7D4}"/>
-              </a:ext>
-            </a:extLst>
-          </p:cNvPr>
-          <p:cNvCxnSpPr>
-            <a:cxnSpLocks/>
-            <a:stCxn id="11" idx="3"/>
-            <a:endCxn id="49" idx="1"/>
-          </p:cNvCxnSpPr>
-          <p:nvPr/>
-        </p:nvCxnSpPr>
-        <p:spPr>
-          <a:xfrm>
-            <a:off x="8263560" y="1526836"/>
-            <a:ext cx="809864" cy="4115"/>
-          </a:xfrm>
-          <a:prstGeom prst="straightConnector1">
-            <a:avLst/>
-          </a:prstGeom>
-          <a:ln>
-            <a:solidFill>
-              <a:schemeClr val="tx1"/>
-            </a:solidFill>
-            <a:tailEnd type="arrow"/>
-          </a:ln>
-        </p:spPr>
-        <p:style>
-          <a:lnRef idx="1">
-            <a:schemeClr val="accent1"/>
-          </a:lnRef>
-          <a:fillRef idx="0">
-            <a:schemeClr val="accent1"/>
-          </a:fillRef>
-          <a:effectRef idx="0">
-            <a:schemeClr val="accent1"/>
-          </a:effectRef>
-          <a:fontRef idx="minor">
-            <a:schemeClr val="tx1"/>
-          </a:fontRef>
-        </p:style>
-      </p:cxnSp>
-      <p:cxnSp>
-        <p:nvCxnSpPr>
-          <p:cNvPr id="19" name="화살표 14">
-            <a:extLst>
-              <a:ext uri="{FF2B5EF4-FFF2-40B4-BE49-F238E27FC236}">
-                <a16:creationId xmlns:a16="http://schemas.microsoft.com/office/drawing/2014/main" id="{D96781D8-0E33-6D94-0150-DFDF34A99B49}"/>
-              </a:ext>
-            </a:extLst>
-          </p:cNvPr>
-          <p:cNvCxnSpPr>
-            <a:cxnSpLocks/>
-            <a:stCxn id="10" idx="3"/>
-            <a:endCxn id="11" idx="1"/>
-          </p:cNvCxnSpPr>
-          <p:nvPr/>
-        </p:nvCxnSpPr>
-        <p:spPr>
-          <a:xfrm>
-            <a:off x="6250030" y="1526836"/>
-            <a:ext cx="518003" cy="0"/>
-          </a:xfrm>
-          <a:prstGeom prst="straightConnector1">
-            <a:avLst/>
-          </a:prstGeom>
-          <a:ln>
-            <a:solidFill>
-              <a:schemeClr val="tx1"/>
-            </a:solidFill>
-            <a:tailEnd type="arrow"/>
-          </a:ln>
-        </p:spPr>
-        <p:style>
-          <a:lnRef idx="1">
-            <a:schemeClr val="accent1"/>
-          </a:lnRef>
-          <a:fillRef idx="0">
-            <a:schemeClr val="accent1"/>
-          </a:fillRef>
-          <a:effectRef idx="0">
-            <a:schemeClr val="accent1"/>
-          </a:effectRef>
-          <a:fontRef idx="minor">
-            <a:schemeClr val="tx1"/>
-          </a:fontRef>
-        </p:style>
-      </p:cxnSp>
-      <p:cxnSp>
-        <p:nvCxnSpPr>
-          <p:cNvPr id="22" name="꺾인 양쪽 화살표 연결선 18">
-            <a:extLst>
-              <a:ext uri="{FF2B5EF4-FFF2-40B4-BE49-F238E27FC236}">
-                <a16:creationId xmlns:a16="http://schemas.microsoft.com/office/drawing/2014/main" id="{E2B73A7F-A7CE-2433-6311-93E4F09C1B61}"/>
-              </a:ext>
-            </a:extLst>
-          </p:cNvPr>
-          <p:cNvCxnSpPr>
-            <a:cxnSpLocks/>
-            <a:stCxn id="13" idx="3"/>
-            <a:endCxn id="231" idx="1"/>
-          </p:cNvCxnSpPr>
-          <p:nvPr/>
-        </p:nvCxnSpPr>
-        <p:spPr>
-          <a:xfrm>
-            <a:off x="5827429" y="2754806"/>
-            <a:ext cx="777462" cy="322428"/>
-          </a:xfrm>
-          <a:prstGeom prst="bentConnector3">
-            <a:avLst>
-              <a:gd name="adj1" fmla="val 50000"/>
-            </a:avLst>
-          </a:prstGeom>
-          <a:ln>
-            <a:solidFill>
-              <a:schemeClr val="tx1"/>
-            </a:solidFill>
-            <a:tailEnd type="arrow"/>
-          </a:ln>
-        </p:spPr>
-        <p:style>
-          <a:lnRef idx="1">
-            <a:schemeClr val="accent1"/>
-          </a:lnRef>
-          <a:fillRef idx="0">
-            <a:schemeClr val="accent1"/>
-          </a:fillRef>
-          <a:effectRef idx="0">
-            <a:schemeClr val="accent1"/>
-          </a:effectRef>
-          <a:fontRef idx="minor">
-            <a:schemeClr val="tx1"/>
-          </a:fontRef>
-        </p:style>
-      </p:cxnSp>
-      <p:cxnSp>
-        <p:nvCxnSpPr>
-          <p:cNvPr id="24" name="꺾인 양쪽 화살표 연결선 20">
-            <a:extLst>
-              <a:ext uri="{FF2B5EF4-FFF2-40B4-BE49-F238E27FC236}">
-                <a16:creationId xmlns:a16="http://schemas.microsoft.com/office/drawing/2014/main" id="{3A2FF051-9A15-87BC-BE39-D8338AC29156}"/>
-              </a:ext>
-            </a:extLst>
-          </p:cNvPr>
-          <p:cNvCxnSpPr>
-            <a:cxnSpLocks/>
-            <a:stCxn id="14" idx="3"/>
-            <a:endCxn id="231" idx="1"/>
-          </p:cNvCxnSpPr>
-          <p:nvPr/>
-        </p:nvCxnSpPr>
-        <p:spPr>
-          <a:xfrm flipV="1">
-            <a:off x="5827429" y="3077234"/>
-            <a:ext cx="777462" cy="720527"/>
-          </a:xfrm>
-          <a:prstGeom prst="bentConnector3">
-            <a:avLst>
-              <a:gd name="adj1" fmla="val 50000"/>
-            </a:avLst>
-          </a:prstGeom>
-          <a:ln>
-            <a:solidFill>
-              <a:schemeClr val="tx1"/>
-            </a:solidFill>
-            <a:tailEnd type="arrow"/>
-          </a:ln>
-        </p:spPr>
-        <p:style>
-          <a:lnRef idx="1">
-            <a:schemeClr val="accent1"/>
-          </a:lnRef>
-          <a:fillRef idx="0">
-            <a:schemeClr val="accent1"/>
-          </a:fillRef>
-          <a:effectRef idx="0">
-            <a:schemeClr val="accent1"/>
-          </a:effectRef>
-          <a:fontRef idx="minor">
-            <a:schemeClr val="tx1"/>
-          </a:fontRef>
-        </p:style>
-      </p:cxnSp>
-      <p:sp>
-        <p:nvSpPr>
-          <p:cNvPr id="25" name="직사각형 24">
-            <a:extLst>
-              <a:ext uri="{FF2B5EF4-FFF2-40B4-BE49-F238E27FC236}">
-                <a16:creationId xmlns:a16="http://schemas.microsoft.com/office/drawing/2014/main" id="{83696255-9AC7-7098-E14E-B059CC6EB4FD}"/>
-              </a:ext>
-            </a:extLst>
-          </p:cNvPr>
-          <p:cNvSpPr/>
-          <p:nvPr/>
-        </p:nvSpPr>
-        <p:spPr>
-          <a:xfrm>
-            <a:off x="5503543" y="4498615"/>
-            <a:ext cx="1460849" cy="1017739"/>
-          </a:xfrm>
-          <a:prstGeom prst="rect">
-            <a:avLst/>
-          </a:prstGeom>
-          <a:solidFill>
-            <a:schemeClr val="lt1"/>
-          </a:solidFill>
-          <a:ln>
-            <a:solidFill>
-              <a:schemeClr val="tx1"/>
-            </a:solidFill>
-          </a:ln>
-        </p:spPr>
-        <p:style>
-          <a:lnRef idx="2">
-            <a:schemeClr val="accent1">
-              <a:shade val="20000"/>
-            </a:schemeClr>
-          </a:lnRef>
-          <a:fillRef idx="1">
-            <a:schemeClr val="accent1"/>
-          </a:fillRef>
-          <a:effectRef idx="0">
-            <a:schemeClr val="accent1"/>
-          </a:effectRef>
-          <a:fontRef idx="minor">
-            <a:schemeClr val="lt1"/>
-          </a:fontRef>
-        </p:style>
-        <p:txBody>
-          <a:bodyPr anchor="ctr"/>
-          <a:lstStyle/>
-          <a:p>
-            <a:pPr lvl="0" algn="ctr">
-              <a:defRPr/>
-            </a:pPr>
-            <a:r>
-              <a:rPr lang="ko-KR" altLang="en-US" dirty="0">
-                <a:solidFill>
-                  <a:srgbClr val="000000"/>
-                </a:solidFill>
-              </a:rPr>
-              <a:t>충분한 보수 </a:t>
-            </a:r>
-            <a:r>
-              <a:rPr lang="ko-KR" altLang="en-US" dirty="0" err="1">
-                <a:solidFill>
-                  <a:srgbClr val="000000"/>
-                </a:solidFill>
-              </a:rPr>
-              <a:t>미보유</a:t>
-            </a:r>
-            <a:endParaRPr lang="ko-KR" altLang="en-US" dirty="0">
-              <a:solidFill>
-                <a:srgbClr val="000000"/>
-              </a:solidFill>
-            </a:endParaRPr>
-          </a:p>
-        </p:txBody>
-      </p:sp>
-      <p:sp>
-        <p:nvSpPr>
-          <p:cNvPr id="49" name="직사각형 48">
-            <a:extLst>
-              <a:ext uri="{FF2B5EF4-FFF2-40B4-BE49-F238E27FC236}">
-                <a16:creationId xmlns:a16="http://schemas.microsoft.com/office/drawing/2014/main" id="{AAC0BD66-F6A8-D200-8A64-573B6FF1E851}"/>
-              </a:ext>
-            </a:extLst>
-          </p:cNvPr>
-          <p:cNvSpPr/>
-          <p:nvPr/>
-        </p:nvSpPr>
-        <p:spPr>
-          <a:xfrm>
-            <a:off x="9073424" y="1070766"/>
-            <a:ext cx="2091248" cy="920369"/>
-          </a:xfrm>
-          <a:prstGeom prst="rect">
-            <a:avLst/>
-          </a:prstGeom>
-          <a:solidFill>
-            <a:schemeClr val="lt1"/>
-          </a:solidFill>
-          <a:ln>
-            <a:solidFill>
-              <a:schemeClr val="tx1"/>
-            </a:solidFill>
-          </a:ln>
-        </p:spPr>
-        <p:style>
-          <a:lnRef idx="2">
-            <a:schemeClr val="accent1">
-              <a:shade val="20000"/>
-            </a:schemeClr>
-          </a:lnRef>
-          <a:fillRef idx="1">
-            <a:schemeClr val="accent1"/>
-          </a:fillRef>
-          <a:effectRef idx="0">
-            <a:schemeClr val="accent1"/>
-          </a:effectRef>
-          <a:fontRef idx="minor">
-            <a:schemeClr val="lt1"/>
-          </a:fontRef>
-        </p:style>
-        <p:txBody>
-          <a:bodyPr anchor="ctr"/>
-          <a:lstStyle/>
-          <a:p>
-            <a:pPr lvl="0" algn="ctr">
-              <a:defRPr/>
-            </a:pPr>
-            <a:r>
-              <a:rPr lang="en-US" altLang="ko-KR" dirty="0">
-                <a:solidFill>
-                  <a:srgbClr val="000000"/>
-                </a:solidFill>
-              </a:rPr>
-              <a:t>AI</a:t>
-            </a:r>
-            <a:r>
-              <a:rPr lang="ko-KR" altLang="en-US" dirty="0">
-                <a:solidFill>
-                  <a:srgbClr val="000000"/>
-                </a:solidFill>
-              </a:rPr>
-              <a:t>가 배송지까지의 경로별 예측 시간 계산</a:t>
-            </a:r>
-          </a:p>
-        </p:txBody>
-      </p:sp>
-      <p:cxnSp>
-        <p:nvCxnSpPr>
-          <p:cNvPr id="52" name="화살표 12">
-            <a:extLst>
-              <a:ext uri="{FF2B5EF4-FFF2-40B4-BE49-F238E27FC236}">
-                <a16:creationId xmlns:a16="http://schemas.microsoft.com/office/drawing/2014/main" id="{0C443044-ADF4-1AD6-57BB-DB3D06E23E23}"/>
-              </a:ext>
-            </a:extLst>
-          </p:cNvPr>
-          <p:cNvCxnSpPr>
-            <a:cxnSpLocks/>
-            <a:stCxn id="185" idx="3"/>
-            <a:endCxn id="9" idx="1"/>
-          </p:cNvCxnSpPr>
-          <p:nvPr/>
-        </p:nvCxnSpPr>
-        <p:spPr>
-          <a:xfrm flipV="1">
-            <a:off x="1855419" y="1520070"/>
-            <a:ext cx="518003" cy="7203"/>
-          </a:xfrm>
-          <a:prstGeom prst="straightConnector1">
-            <a:avLst/>
-          </a:prstGeom>
-          <a:ln>
-            <a:solidFill>
-              <a:schemeClr val="tx1"/>
-            </a:solidFill>
-            <a:tailEnd type="arrow"/>
-          </a:ln>
-        </p:spPr>
-        <p:style>
-          <a:lnRef idx="1">
-            <a:schemeClr val="accent1"/>
-          </a:lnRef>
-          <a:fillRef idx="0">
-            <a:schemeClr val="accent1"/>
-          </a:fillRef>
-          <a:effectRef idx="0">
-            <a:schemeClr val="accent1"/>
-          </a:effectRef>
-          <a:fontRef idx="minor">
-            <a:schemeClr val="tx1"/>
-          </a:fontRef>
-        </p:style>
-      </p:cxnSp>
-      <p:cxnSp>
-        <p:nvCxnSpPr>
-          <p:cNvPr id="79" name="꺾인 양쪽 화살표 연결선 20">
-            <a:extLst>
-              <a:ext uri="{FF2B5EF4-FFF2-40B4-BE49-F238E27FC236}">
-                <a16:creationId xmlns:a16="http://schemas.microsoft.com/office/drawing/2014/main" id="{5050FD88-7B39-90B7-1FCA-E14B9FC079A0}"/>
-              </a:ext>
-            </a:extLst>
-          </p:cNvPr>
-          <p:cNvCxnSpPr>
-            <a:cxnSpLocks/>
-            <a:stCxn id="49" idx="3"/>
-            <a:endCxn id="12" idx="1"/>
-          </p:cNvCxnSpPr>
-          <p:nvPr/>
-        </p:nvCxnSpPr>
-        <p:spPr>
-          <a:xfrm flipH="1">
-            <a:off x="1400683" y="1530951"/>
-            <a:ext cx="9763989" cy="1442190"/>
-          </a:xfrm>
-          <a:prstGeom prst="bentConnector5">
-            <a:avLst>
-              <a:gd name="adj1" fmla="val -2341"/>
-              <a:gd name="adj2" fmla="val 50783"/>
-              <a:gd name="adj3" fmla="val 102341"/>
-            </a:avLst>
-          </a:prstGeom>
-          <a:ln>
-            <a:solidFill>
-              <a:schemeClr val="tx1"/>
-            </a:solidFill>
-            <a:tailEnd type="arrow"/>
-          </a:ln>
-        </p:spPr>
-        <p:style>
-          <a:lnRef idx="1">
-            <a:schemeClr val="accent1"/>
-          </a:lnRef>
-          <a:fillRef idx="0">
-            <a:schemeClr val="accent1"/>
-          </a:fillRef>
-          <a:effectRef idx="0">
-            <a:schemeClr val="accent1"/>
-          </a:effectRef>
-          <a:fontRef idx="minor">
-            <a:schemeClr val="tx1"/>
-          </a:fontRef>
-        </p:style>
-      </p:cxnSp>
-      <p:cxnSp>
-        <p:nvCxnSpPr>
-          <p:cNvPr id="103" name="꺾인 양쪽 화살표 연결선 18">
-            <a:extLst>
-              <a:ext uri="{FF2B5EF4-FFF2-40B4-BE49-F238E27FC236}">
-                <a16:creationId xmlns:a16="http://schemas.microsoft.com/office/drawing/2014/main" id="{E527CE0B-EFFE-FD35-729A-032C4A73E926}"/>
-              </a:ext>
-            </a:extLst>
-          </p:cNvPr>
-          <p:cNvCxnSpPr>
-            <a:cxnSpLocks/>
-            <a:stCxn id="12" idx="3"/>
-            <a:endCxn id="13" idx="1"/>
-          </p:cNvCxnSpPr>
-          <p:nvPr/>
-        </p:nvCxnSpPr>
-        <p:spPr>
-          <a:xfrm flipV="1">
-            <a:off x="3088257" y="2754806"/>
-            <a:ext cx="664911" cy="218335"/>
-          </a:xfrm>
-          <a:prstGeom prst="bentConnector3">
-            <a:avLst>
-              <a:gd name="adj1" fmla="val 50000"/>
-            </a:avLst>
-          </a:prstGeom>
-          <a:ln>
-            <a:solidFill>
-              <a:schemeClr val="tx1"/>
-            </a:solidFill>
-            <a:tailEnd type="arrow"/>
-          </a:ln>
-        </p:spPr>
-        <p:style>
-          <a:lnRef idx="1">
-            <a:schemeClr val="accent1"/>
-          </a:lnRef>
-          <a:fillRef idx="0">
-            <a:schemeClr val="accent1"/>
-          </a:fillRef>
-          <a:effectRef idx="0">
-            <a:schemeClr val="accent1"/>
-          </a:effectRef>
-          <a:fontRef idx="minor">
-            <a:schemeClr val="tx1"/>
-          </a:fontRef>
-        </p:style>
-      </p:cxnSp>
-      <p:cxnSp>
-        <p:nvCxnSpPr>
-          <p:cNvPr id="106" name="꺾인 양쪽 화살표 연결선 18">
-            <a:extLst>
-              <a:ext uri="{FF2B5EF4-FFF2-40B4-BE49-F238E27FC236}">
-                <a16:creationId xmlns:a16="http://schemas.microsoft.com/office/drawing/2014/main" id="{B6D72026-6FB4-1B73-F158-711B6BFF2CBC}"/>
-              </a:ext>
-            </a:extLst>
-          </p:cNvPr>
-          <p:cNvCxnSpPr>
-            <a:cxnSpLocks/>
-            <a:stCxn id="12" idx="3"/>
-            <a:endCxn id="14" idx="1"/>
-          </p:cNvCxnSpPr>
-          <p:nvPr/>
-        </p:nvCxnSpPr>
-        <p:spPr>
-          <a:xfrm>
-            <a:off x="3088257" y="2973141"/>
-            <a:ext cx="664911" cy="824620"/>
-          </a:xfrm>
-          <a:prstGeom prst="bentConnector3">
-            <a:avLst>
-              <a:gd name="adj1" fmla="val 50000"/>
-            </a:avLst>
-          </a:prstGeom>
-          <a:ln>
-            <a:solidFill>
-              <a:schemeClr val="tx1"/>
-            </a:solidFill>
-            <a:tailEnd type="arrow"/>
-          </a:ln>
-        </p:spPr>
-        <p:style>
-          <a:lnRef idx="1">
-            <a:schemeClr val="accent1"/>
-          </a:lnRef>
-          <a:fillRef idx="0">
-            <a:schemeClr val="accent1"/>
-          </a:fillRef>
-          <a:effectRef idx="0">
-            <a:schemeClr val="accent1"/>
-          </a:effectRef>
-          <a:fontRef idx="minor">
-            <a:schemeClr val="tx1"/>
-          </a:fontRef>
-        </p:style>
-      </p:cxnSp>
-      <p:cxnSp>
-        <p:nvCxnSpPr>
-          <p:cNvPr id="142" name="꺾인 양쪽 화살표 연결선 20">
-            <a:extLst>
-              <a:ext uri="{FF2B5EF4-FFF2-40B4-BE49-F238E27FC236}">
-                <a16:creationId xmlns:a16="http://schemas.microsoft.com/office/drawing/2014/main" id="{A8F461C8-7C7F-1922-87C5-FDE6AADA274B}"/>
-              </a:ext>
-            </a:extLst>
-          </p:cNvPr>
-          <p:cNvCxnSpPr>
-            <a:cxnSpLocks/>
-            <a:stCxn id="218" idx="3"/>
-            <a:endCxn id="25" idx="1"/>
-          </p:cNvCxnSpPr>
-          <p:nvPr/>
-        </p:nvCxnSpPr>
-        <p:spPr>
-          <a:xfrm flipV="1">
-            <a:off x="5258942" y="5007485"/>
-            <a:ext cx="244601" cy="479227"/>
-          </a:xfrm>
-          <a:prstGeom prst="bentConnector3">
-            <a:avLst>
-              <a:gd name="adj1" fmla="val 50000"/>
-            </a:avLst>
-          </a:prstGeom>
-          <a:ln>
-            <a:solidFill>
-              <a:schemeClr val="tx1"/>
-            </a:solidFill>
-            <a:tailEnd type="arrow"/>
-          </a:ln>
-        </p:spPr>
-        <p:style>
-          <a:lnRef idx="1">
-            <a:schemeClr val="accent1"/>
-          </a:lnRef>
-          <a:fillRef idx="0">
-            <a:schemeClr val="accent1"/>
-          </a:fillRef>
-          <a:effectRef idx="0">
-            <a:schemeClr val="accent1"/>
-          </a:effectRef>
-          <a:fontRef idx="minor">
-            <a:schemeClr val="tx1"/>
-          </a:fontRef>
-        </p:style>
-      </p:cxnSp>
-      <p:cxnSp>
-        <p:nvCxnSpPr>
-          <p:cNvPr id="145" name="꺾인 양쪽 화살표 연결선 20">
-            <a:extLst>
-              <a:ext uri="{FF2B5EF4-FFF2-40B4-BE49-F238E27FC236}">
-                <a16:creationId xmlns:a16="http://schemas.microsoft.com/office/drawing/2014/main" id="{717B3273-3A06-5D28-939E-C1E05316F045}"/>
-              </a:ext>
-            </a:extLst>
-          </p:cNvPr>
-          <p:cNvCxnSpPr>
-            <a:cxnSpLocks/>
-            <a:stCxn id="218" idx="3"/>
-            <a:endCxn id="16" idx="1"/>
-          </p:cNvCxnSpPr>
-          <p:nvPr/>
-        </p:nvCxnSpPr>
-        <p:spPr>
-          <a:xfrm>
-            <a:off x="5258942" y="5486712"/>
-            <a:ext cx="244601" cy="593444"/>
-          </a:xfrm>
-          <a:prstGeom prst="bentConnector3">
-            <a:avLst>
-              <a:gd name="adj1" fmla="val 50000"/>
-            </a:avLst>
-          </a:prstGeom>
-          <a:ln>
-            <a:solidFill>
-              <a:schemeClr val="tx1"/>
-            </a:solidFill>
-            <a:tailEnd type="arrow"/>
-          </a:ln>
-        </p:spPr>
-        <p:style>
-          <a:lnRef idx="1">
-            <a:schemeClr val="accent1"/>
-          </a:lnRef>
-          <a:fillRef idx="0">
-            <a:schemeClr val="accent1"/>
-          </a:fillRef>
-          <a:effectRef idx="0">
-            <a:schemeClr val="accent1"/>
-          </a:effectRef>
-          <a:fontRef idx="minor">
-            <a:schemeClr val="tx1"/>
-          </a:fontRef>
-        </p:style>
-      </p:cxnSp>
-      <p:cxnSp>
-        <p:nvCxnSpPr>
-          <p:cNvPr id="156" name="꺾인 양쪽 화살표 연결선 20">
-            <a:extLst>
-              <a:ext uri="{FF2B5EF4-FFF2-40B4-BE49-F238E27FC236}">
-                <a16:creationId xmlns:a16="http://schemas.microsoft.com/office/drawing/2014/main" id="{1A4AA5AA-9DC4-0634-4FF2-F18D2DE18CD2}"/>
-              </a:ext>
-            </a:extLst>
-          </p:cNvPr>
-          <p:cNvCxnSpPr>
-            <a:cxnSpLocks/>
-            <a:stCxn id="231" idx="3"/>
-            <a:endCxn id="218" idx="1"/>
-          </p:cNvCxnSpPr>
-          <p:nvPr/>
-        </p:nvCxnSpPr>
-        <p:spPr>
-          <a:xfrm flipH="1">
-            <a:off x="3154788" y="3077234"/>
-            <a:ext cx="5399553" cy="2409478"/>
-          </a:xfrm>
-          <a:prstGeom prst="bentConnector5">
-            <a:avLst>
-              <a:gd name="adj1" fmla="val -4234"/>
-              <a:gd name="adj2" fmla="val 52266"/>
-              <a:gd name="adj3" fmla="val 104234"/>
-            </a:avLst>
-          </a:prstGeom>
-          <a:ln>
-            <a:solidFill>
-              <a:schemeClr val="tx1"/>
-            </a:solidFill>
-            <a:tailEnd type="arrow"/>
-          </a:ln>
-        </p:spPr>
-        <p:style>
-          <a:lnRef idx="1">
-            <a:schemeClr val="accent1"/>
-          </a:lnRef>
-          <a:fillRef idx="0">
-            <a:schemeClr val="accent1"/>
-          </a:fillRef>
-          <a:effectRef idx="0">
-            <a:schemeClr val="accent1"/>
-          </a:effectRef>
-          <a:fontRef idx="minor">
-            <a:schemeClr val="tx1"/>
-          </a:fontRef>
-        </p:style>
-      </p:cxnSp>
-      <p:cxnSp>
-        <p:nvCxnSpPr>
-          <p:cNvPr id="167" name="화살표 14">
-            <a:extLst>
-              <a:ext uri="{FF2B5EF4-FFF2-40B4-BE49-F238E27FC236}">
-                <a16:creationId xmlns:a16="http://schemas.microsoft.com/office/drawing/2014/main" id="{EA7D0152-A2F7-948A-192D-6E87224D83E0}"/>
-              </a:ext>
-            </a:extLst>
-          </p:cNvPr>
-          <p:cNvCxnSpPr>
-            <a:cxnSpLocks/>
-            <a:stCxn id="25" idx="3"/>
-            <a:endCxn id="207" idx="1"/>
-          </p:cNvCxnSpPr>
-          <p:nvPr/>
-        </p:nvCxnSpPr>
-        <p:spPr>
-          <a:xfrm flipV="1">
-            <a:off x="6964392" y="5007484"/>
-            <a:ext cx="547805" cy="1"/>
-          </a:xfrm>
-          <a:prstGeom prst="straightConnector1">
-            <a:avLst/>
-          </a:prstGeom>
-          <a:ln>
-            <a:solidFill>
-              <a:schemeClr val="tx1"/>
-            </a:solidFill>
-            <a:tailEnd type="arrow"/>
-          </a:ln>
-        </p:spPr>
-        <p:style>
-          <a:lnRef idx="1">
-            <a:schemeClr val="accent1"/>
-          </a:lnRef>
-          <a:fillRef idx="0">
-            <a:schemeClr val="accent1"/>
-          </a:fillRef>
-          <a:effectRef idx="0">
-            <a:schemeClr val="accent1"/>
-          </a:effectRef>
-          <a:fontRef idx="minor">
-            <a:schemeClr val="tx1"/>
-          </a:fontRef>
-        </p:style>
-      </p:cxnSp>
-      <p:cxnSp>
-        <p:nvCxnSpPr>
-          <p:cNvPr id="170" name="화살표 14">
-            <a:extLst>
-              <a:ext uri="{FF2B5EF4-FFF2-40B4-BE49-F238E27FC236}">
-                <a16:creationId xmlns:a16="http://schemas.microsoft.com/office/drawing/2014/main" id="{608F9B70-EB20-B4DA-62CF-55A033638183}"/>
-              </a:ext>
-            </a:extLst>
-          </p:cNvPr>
-          <p:cNvCxnSpPr>
-            <a:cxnSpLocks/>
-            <a:stCxn id="16" idx="3"/>
-            <a:endCxn id="212" idx="1"/>
-          </p:cNvCxnSpPr>
-          <p:nvPr/>
-        </p:nvCxnSpPr>
-        <p:spPr>
-          <a:xfrm flipV="1">
-            <a:off x="6964391" y="6080155"/>
-            <a:ext cx="547806" cy="1"/>
-          </a:xfrm>
-          <a:prstGeom prst="straightConnector1">
-            <a:avLst/>
-          </a:prstGeom>
-          <a:ln>
-            <a:solidFill>
-              <a:schemeClr val="tx1"/>
-            </a:solidFill>
-            <a:tailEnd type="arrow"/>
-          </a:ln>
-        </p:spPr>
-        <p:style>
-          <a:lnRef idx="1">
-            <a:schemeClr val="accent1"/>
-          </a:lnRef>
-          <a:fillRef idx="0">
-            <a:schemeClr val="accent1"/>
-          </a:fillRef>
-          <a:effectRef idx="0">
-            <a:schemeClr val="accent1"/>
-          </a:effectRef>
-          <a:fontRef idx="minor">
-            <a:schemeClr val="tx1"/>
-          </a:fontRef>
-        </p:style>
-      </p:cxnSp>
-      <p:sp>
-        <p:nvSpPr>
-          <p:cNvPr id="185" name="사각형: 둥근 모서리 184">
-            <a:extLst>
-              <a:ext uri="{FF2B5EF4-FFF2-40B4-BE49-F238E27FC236}">
-                <a16:creationId xmlns:a16="http://schemas.microsoft.com/office/drawing/2014/main" id="{8C36E804-7C2C-F33A-08DD-E2370734D9B0}"/>
-              </a:ext>
-            </a:extLst>
-          </p:cNvPr>
-          <p:cNvSpPr/>
-          <p:nvPr/>
-        </p:nvSpPr>
-        <p:spPr>
-          <a:xfrm>
-            <a:off x="429839" y="1148366"/>
-            <a:ext cx="1425580" cy="757813"/>
-          </a:xfrm>
-          <a:prstGeom prst="roundRect">
-            <a:avLst/>
-          </a:prstGeom>
-          <a:solidFill>
-            <a:schemeClr val="bg1"/>
-          </a:solidFill>
-          <a:ln>
-            <a:solidFill>
-              <a:schemeClr val="tx1"/>
-            </a:solidFill>
-          </a:ln>
-        </p:spPr>
-        <p:style>
-          <a:lnRef idx="2">
-            <a:schemeClr val="accent1">
-              <a:shade val="15000"/>
-            </a:schemeClr>
-          </a:lnRef>
-          <a:fillRef idx="1">
-            <a:schemeClr val="accent1"/>
-          </a:fillRef>
-          <a:effectRef idx="0">
-            <a:schemeClr val="accent1"/>
-          </a:effectRef>
-          <a:fontRef idx="minor">
-            <a:schemeClr val="lt1"/>
-          </a:fontRef>
-        </p:style>
-        <p:txBody>
-          <a:bodyPr rtlCol="0" anchor="ctr"/>
-          <a:lstStyle/>
-          <a:p>
-            <a:pPr lvl="0" algn="ctr">
-              <a:defRPr/>
-            </a:pPr>
-            <a:r>
-              <a:rPr lang="ko-KR" altLang="en-US">
-                <a:solidFill>
-                  <a:srgbClr val="000000"/>
-                </a:solidFill>
-              </a:rPr>
-              <a:t>플레이어</a:t>
-            </a:r>
-            <a:br>
-              <a:rPr lang="en-US" altLang="ko-KR">
-                <a:solidFill>
-                  <a:srgbClr val="000000"/>
-                </a:solidFill>
-              </a:rPr>
-            </a:br>
-            <a:r>
-              <a:rPr lang="en-US" altLang="ko-KR">
-                <a:solidFill>
-                  <a:srgbClr val="000000"/>
-                </a:solidFill>
-              </a:rPr>
-              <a:t>2</a:t>
-            </a:r>
-            <a:r>
-              <a:rPr lang="ko-KR" altLang="en-US">
-                <a:solidFill>
-                  <a:srgbClr val="000000"/>
-                </a:solidFill>
-              </a:rPr>
-              <a:t>인 접속</a:t>
-            </a:r>
-            <a:endParaRPr lang="ko-KR" altLang="en-US" dirty="0">
-              <a:solidFill>
-                <a:srgbClr val="000000"/>
-              </a:solidFill>
-            </a:endParaRPr>
-          </a:p>
-        </p:txBody>
-      </p:sp>
-      <p:sp>
-        <p:nvSpPr>
-          <p:cNvPr id="207" name="사각형: 둥근 모서리 206">
-            <a:extLst>
-              <a:ext uri="{FF2B5EF4-FFF2-40B4-BE49-F238E27FC236}">
-                <a16:creationId xmlns:a16="http://schemas.microsoft.com/office/drawing/2014/main" id="{4A94AE49-04F1-8AA2-6634-923DED43A1EE}"/>
-              </a:ext>
-            </a:extLst>
-          </p:cNvPr>
-          <p:cNvSpPr/>
-          <p:nvPr/>
-        </p:nvSpPr>
-        <p:spPr>
-          <a:xfrm>
-            <a:off x="7512197" y="4624518"/>
-            <a:ext cx="1501630" cy="765932"/>
-          </a:xfrm>
-          <a:prstGeom prst="roundRect">
-            <a:avLst/>
-          </a:prstGeom>
-          <a:solidFill>
-            <a:schemeClr val="bg1"/>
-          </a:solidFill>
-          <a:ln>
-            <a:solidFill>
-              <a:schemeClr val="tx1"/>
-            </a:solidFill>
-          </a:ln>
-        </p:spPr>
-        <p:style>
-          <a:lnRef idx="2">
-            <a:schemeClr val="accent1">
-              <a:shade val="15000"/>
-            </a:schemeClr>
-          </a:lnRef>
-          <a:fillRef idx="1">
-            <a:schemeClr val="accent1"/>
-          </a:fillRef>
-          <a:effectRef idx="0">
-            <a:schemeClr val="accent1"/>
-          </a:effectRef>
-          <a:fontRef idx="minor">
-            <a:schemeClr val="lt1"/>
-          </a:fontRef>
-        </p:style>
-        <p:txBody>
-          <a:bodyPr rtlCol="0" anchor="ctr"/>
-          <a:lstStyle/>
-          <a:p>
-            <a:pPr lvl="0" algn="ctr">
-              <a:defRPr/>
-            </a:pPr>
-            <a:r>
-              <a:rPr lang="ko-KR" altLang="en-US" dirty="0">
-                <a:solidFill>
-                  <a:srgbClr val="000000"/>
-                </a:solidFill>
-              </a:rPr>
-              <a:t>생태계 파괴 엔딩</a:t>
-            </a:r>
-          </a:p>
-        </p:txBody>
-      </p:sp>
-      <p:sp>
-        <p:nvSpPr>
-          <p:cNvPr id="212" name="사각형: 둥근 모서리 211">
-            <a:extLst>
-              <a:ext uri="{FF2B5EF4-FFF2-40B4-BE49-F238E27FC236}">
-                <a16:creationId xmlns:a16="http://schemas.microsoft.com/office/drawing/2014/main" id="{67890A33-FA56-B7B1-F425-056DB749BC06}"/>
-              </a:ext>
-            </a:extLst>
-          </p:cNvPr>
-          <p:cNvSpPr/>
-          <p:nvPr/>
-        </p:nvSpPr>
-        <p:spPr>
-          <a:xfrm>
-            <a:off x="7512197" y="5697189"/>
-            <a:ext cx="1501630" cy="765932"/>
-          </a:xfrm>
-          <a:prstGeom prst="roundRect">
-            <a:avLst/>
-          </a:prstGeom>
-          <a:solidFill>
-            <a:schemeClr val="bg1"/>
-          </a:solidFill>
-          <a:ln>
-            <a:solidFill>
-              <a:schemeClr val="tx1"/>
-            </a:solidFill>
-          </a:ln>
-        </p:spPr>
-        <p:style>
-          <a:lnRef idx="2">
-            <a:schemeClr val="accent1">
-              <a:shade val="15000"/>
-            </a:schemeClr>
-          </a:lnRef>
-          <a:fillRef idx="1">
-            <a:schemeClr val="accent1"/>
-          </a:fillRef>
-          <a:effectRef idx="0">
-            <a:schemeClr val="accent1"/>
-          </a:effectRef>
-          <a:fontRef idx="minor">
-            <a:schemeClr val="lt1"/>
-          </a:fontRef>
-        </p:style>
-        <p:txBody>
-          <a:bodyPr rtlCol="0" anchor="ctr"/>
-          <a:lstStyle/>
-          <a:p>
-            <a:pPr lvl="0" algn="ctr">
-              <a:defRPr/>
-            </a:pPr>
-            <a:r>
-              <a:rPr lang="ko-KR" altLang="en-US" dirty="0">
-                <a:solidFill>
-                  <a:srgbClr val="000000"/>
-                </a:solidFill>
-              </a:rPr>
-              <a:t>생태계 복구 엔딩</a:t>
-            </a:r>
-          </a:p>
-        </p:txBody>
-      </p:sp>
-      <p:sp>
-        <p:nvSpPr>
-          <p:cNvPr id="218" name="사각형: 둥근 모서리 217">
-            <a:extLst>
-              <a:ext uri="{FF2B5EF4-FFF2-40B4-BE49-F238E27FC236}">
-                <a16:creationId xmlns:a16="http://schemas.microsoft.com/office/drawing/2014/main" id="{34B48A11-9583-38BC-9FC2-C3562B4A0A4D}"/>
-              </a:ext>
-            </a:extLst>
-          </p:cNvPr>
-          <p:cNvSpPr/>
-          <p:nvPr/>
-        </p:nvSpPr>
-        <p:spPr>
-          <a:xfrm>
-            <a:off x="3154788" y="5103746"/>
-            <a:ext cx="2104154" cy="765932"/>
-          </a:xfrm>
-          <a:prstGeom prst="roundRect">
-            <a:avLst/>
-          </a:prstGeom>
-          <a:solidFill>
-            <a:schemeClr val="bg1"/>
-          </a:solidFill>
-          <a:ln>
-            <a:solidFill>
-              <a:schemeClr val="tx1"/>
-            </a:solidFill>
-          </a:ln>
-        </p:spPr>
-        <p:style>
-          <a:lnRef idx="2">
-            <a:schemeClr val="accent1">
-              <a:shade val="15000"/>
-            </a:schemeClr>
-          </a:lnRef>
-          <a:fillRef idx="1">
-            <a:schemeClr val="accent1"/>
-          </a:fillRef>
-          <a:effectRef idx="0">
-            <a:schemeClr val="accent1"/>
-          </a:effectRef>
-          <a:fontRef idx="minor">
-            <a:schemeClr val="lt1"/>
-          </a:fontRef>
-        </p:style>
-        <p:txBody>
-          <a:bodyPr rtlCol="0" anchor="ctr"/>
-          <a:lstStyle/>
-          <a:p>
-            <a:pPr lvl="0" algn="ctr">
-              <a:defRPr/>
-            </a:pPr>
-            <a:r>
-              <a:rPr lang="ko-KR" altLang="en-US" dirty="0">
-                <a:solidFill>
-                  <a:srgbClr val="000000"/>
-                </a:solidFill>
-              </a:rPr>
-              <a:t>지정된 모든</a:t>
-            </a:r>
-            <a:br>
-              <a:rPr lang="en-US" altLang="ko-KR" dirty="0">
-                <a:solidFill>
-                  <a:srgbClr val="000000"/>
-                </a:solidFill>
-              </a:rPr>
-            </a:br>
-            <a:r>
-              <a:rPr lang="ko-KR" altLang="en-US" dirty="0" err="1">
-                <a:solidFill>
-                  <a:srgbClr val="000000"/>
-                </a:solidFill>
-              </a:rPr>
-              <a:t>배달품</a:t>
-            </a:r>
-            <a:r>
-              <a:rPr lang="ko-KR" altLang="en-US" dirty="0">
-                <a:solidFill>
-                  <a:srgbClr val="000000"/>
-                </a:solidFill>
-              </a:rPr>
-              <a:t> 배달 완료</a:t>
-            </a:r>
-          </a:p>
-        </p:txBody>
-      </p:sp>
-      <p:sp>
-        <p:nvSpPr>
-          <p:cNvPr id="231" name="순서도: 천공 테이프 230">
-            <a:extLst>
-              <a:ext uri="{FF2B5EF4-FFF2-40B4-BE49-F238E27FC236}">
-                <a16:creationId xmlns:a16="http://schemas.microsoft.com/office/drawing/2014/main" id="{EC25D784-F19A-1ED0-EC94-F1376817D020}"/>
-              </a:ext>
-            </a:extLst>
-          </p:cNvPr>
-          <p:cNvSpPr/>
-          <p:nvPr/>
-        </p:nvSpPr>
-        <p:spPr>
-          <a:xfrm>
-            <a:off x="6604891" y="2585083"/>
-            <a:ext cx="1949450" cy="984302"/>
-          </a:xfrm>
-          <a:prstGeom prst="flowChartPunchedTape">
-            <a:avLst/>
-          </a:prstGeom>
-          <a:solidFill>
-            <a:schemeClr val="bg1"/>
-          </a:solidFill>
-          <a:ln>
-            <a:solidFill>
-              <a:schemeClr val="tx1"/>
-            </a:solidFill>
-          </a:ln>
-        </p:spPr>
-        <p:style>
-          <a:lnRef idx="2">
-            <a:schemeClr val="accent1">
-              <a:shade val="15000"/>
-            </a:schemeClr>
-          </a:lnRef>
-          <a:fillRef idx="1">
-            <a:schemeClr val="accent1"/>
-          </a:fillRef>
-          <a:effectRef idx="0">
-            <a:schemeClr val="accent1"/>
-          </a:effectRef>
-          <a:fontRef idx="minor">
-            <a:schemeClr val="lt1"/>
-          </a:fontRef>
-        </p:style>
-        <p:txBody>
-          <a:bodyPr rtlCol="0" anchor="ctr"/>
-          <a:lstStyle/>
-          <a:p>
-            <a:pPr lvl="0" algn="ctr">
-              <a:defRPr/>
-            </a:pPr>
-            <a:r>
-              <a:rPr lang="ko-KR" altLang="en-US" dirty="0">
-                <a:solidFill>
-                  <a:srgbClr val="000000"/>
-                </a:solidFill>
-              </a:rPr>
-              <a:t>다른 배달품들도</a:t>
-            </a:r>
-            <a:br>
-              <a:rPr lang="en-US" altLang="ko-KR" dirty="0">
-                <a:solidFill>
-                  <a:srgbClr val="000000"/>
-                </a:solidFill>
-              </a:rPr>
-            </a:br>
-            <a:r>
-              <a:rPr lang="ko-KR" altLang="en-US" dirty="0">
-                <a:solidFill>
-                  <a:srgbClr val="000000"/>
-                </a:solidFill>
-              </a:rPr>
-              <a:t>동일하게 진행</a:t>
-            </a:r>
-          </a:p>
-        </p:txBody>
-      </p:sp>
-      <p:sp>
-        <p:nvSpPr>
-          <p:cNvPr id="239" name="사각형: 둥근 모서리 238">
-            <a:extLst>
-              <a:ext uri="{FF2B5EF4-FFF2-40B4-BE49-F238E27FC236}">
-                <a16:creationId xmlns:a16="http://schemas.microsoft.com/office/drawing/2014/main" id="{FFD3E3DD-10B3-9E30-A0FC-53457BA7D122}"/>
-              </a:ext>
-            </a:extLst>
-          </p:cNvPr>
-          <p:cNvSpPr/>
-          <p:nvPr/>
-        </p:nvSpPr>
-        <p:spPr>
-          <a:xfrm>
-            <a:off x="10119048" y="4311423"/>
-            <a:ext cx="1714353" cy="765932"/>
-          </a:xfrm>
-          <a:prstGeom prst="roundRect">
-            <a:avLst/>
-          </a:prstGeom>
-          <a:solidFill>
-            <a:schemeClr val="bg1"/>
-          </a:solidFill>
-          <a:ln>
-            <a:solidFill>
-              <a:schemeClr val="accent1"/>
-            </a:solidFill>
-          </a:ln>
-        </p:spPr>
-        <p:style>
-          <a:lnRef idx="2">
-            <a:schemeClr val="accent1">
-              <a:shade val="15000"/>
-            </a:schemeClr>
-          </a:lnRef>
-          <a:fillRef idx="1">
-            <a:schemeClr val="accent1"/>
-          </a:fillRef>
-          <a:effectRef idx="0">
-            <a:schemeClr val="accent1"/>
-          </a:effectRef>
-          <a:fontRef idx="minor">
-            <a:schemeClr val="lt1"/>
-          </a:fontRef>
-        </p:style>
-        <p:txBody>
-          <a:bodyPr rtlCol="0" anchor="ctr"/>
-          <a:lstStyle/>
-          <a:p>
-            <a:pPr lvl="0" algn="ctr">
-              <a:defRPr/>
-            </a:pPr>
-            <a:r>
-              <a:rPr lang="ko-KR" altLang="en-US" dirty="0">
-                <a:solidFill>
-                  <a:srgbClr val="000000"/>
-                </a:solidFill>
-              </a:rPr>
-              <a:t>특정 플로우의 </a:t>
-            </a:r>
-            <a:r>
-              <a:rPr lang="ko-KR" altLang="en-US">
-                <a:solidFill>
-                  <a:srgbClr val="000000"/>
-                </a:solidFill>
-              </a:rPr>
-              <a:t>시작</a:t>
-            </a:r>
-            <a:r>
-              <a:rPr lang="en-US" altLang="ko-KR" dirty="0">
-                <a:solidFill>
-                  <a:srgbClr val="000000"/>
-                </a:solidFill>
-              </a:rPr>
-              <a:t>/</a:t>
-            </a:r>
-            <a:r>
-              <a:rPr lang="ko-KR" altLang="en-US" dirty="0">
-                <a:solidFill>
-                  <a:srgbClr val="000000"/>
-                </a:solidFill>
-              </a:rPr>
-              <a:t>끝</a:t>
-            </a:r>
-          </a:p>
-        </p:txBody>
-      </p:sp>
-      <p:sp>
-        <p:nvSpPr>
-          <p:cNvPr id="241" name="순서도: 천공 테이프 240">
-            <a:extLst>
-              <a:ext uri="{FF2B5EF4-FFF2-40B4-BE49-F238E27FC236}">
-                <a16:creationId xmlns:a16="http://schemas.microsoft.com/office/drawing/2014/main" id="{5DF6D138-F63A-80A7-A5E5-C3F4B88289F5}"/>
-              </a:ext>
-            </a:extLst>
-          </p:cNvPr>
-          <p:cNvSpPr/>
-          <p:nvPr/>
-        </p:nvSpPr>
-        <p:spPr>
-          <a:xfrm>
-            <a:off x="10119048" y="5145718"/>
-            <a:ext cx="1764061" cy="868959"/>
-          </a:xfrm>
-          <a:prstGeom prst="flowChartPunchedTape">
-            <a:avLst/>
-          </a:prstGeom>
-          <a:solidFill>
-            <a:schemeClr val="bg1"/>
-          </a:solidFill>
-          <a:ln>
-            <a:solidFill>
-              <a:schemeClr val="accent1"/>
-            </a:solidFill>
-          </a:ln>
-        </p:spPr>
-        <p:style>
-          <a:lnRef idx="2">
-            <a:schemeClr val="accent1">
-              <a:shade val="15000"/>
-            </a:schemeClr>
-          </a:lnRef>
-          <a:fillRef idx="1">
-            <a:schemeClr val="accent1"/>
-          </a:fillRef>
-          <a:effectRef idx="0">
-            <a:schemeClr val="accent1"/>
-          </a:effectRef>
-          <a:fontRef idx="minor">
-            <a:schemeClr val="lt1"/>
-          </a:fontRef>
-        </p:style>
-        <p:txBody>
-          <a:bodyPr rtlCol="0" anchor="ctr"/>
-          <a:lstStyle/>
-          <a:p>
-            <a:pPr lvl="0" algn="ctr">
-              <a:defRPr/>
-            </a:pPr>
-            <a:r>
-              <a:rPr lang="ko-KR" altLang="en-US">
-                <a:solidFill>
-                  <a:srgbClr val="000000"/>
-                </a:solidFill>
-              </a:rPr>
-              <a:t>플로우 진행 중</a:t>
-            </a:r>
-            <a:endParaRPr lang="ko-KR" altLang="en-US" dirty="0">
-              <a:solidFill>
-                <a:srgbClr val="000000"/>
-              </a:solidFill>
-            </a:endParaRPr>
-          </a:p>
-        </p:txBody>
-      </p:sp>
-    </p:spTree>
-    <p:extLst>
-      <p:ext uri="{BB962C8B-B14F-4D97-AF65-F5344CB8AC3E}">
-        <p14:creationId xmlns:p14="http://schemas.microsoft.com/office/powerpoint/2010/main" val="4223449320"/>
-      </p:ext>
-    </p:extLst>
-  </p:cSld>
-  <p:clrMapOvr>
-    <a:masterClrMapping/>
-  </p:clrMapOvr>
-</p:sld>
-</file>
-
-<file path=ppt/slides/slide30.xml><?xml version="1.0" encoding="utf-8"?>
+<file path=ppt/slides/slide31.xml><?xml version="1.0" encoding="utf-8"?>
 <p:sld xmlns:a="http://schemas.openxmlformats.org/drawingml/2006/main" xmlns:r="http://schemas.openxmlformats.org/officeDocument/2006/relationships" xmlns:p="http://schemas.openxmlformats.org/presentationml/2006/main">
   <p:cSld>
     <p:spTree>
@@ -37476,6 +38595,328 @@
 </p:sld>
 </file>
 
+<file path=ppt/slides/slide32.xml><?xml version="1.0" encoding="utf-8"?>
+<p:sld xmlns:a="http://schemas.openxmlformats.org/drawingml/2006/main" xmlns:r="http://schemas.openxmlformats.org/officeDocument/2006/relationships" xmlns:p="http://schemas.openxmlformats.org/presentationml/2006/main">
+  <p:cSld>
+    <p:spTree>
+      <p:nvGrpSpPr>
+        <p:cNvPr id="1" name=""/>
+        <p:cNvGrpSpPr/>
+        <p:nvPr/>
+      </p:nvGrpSpPr>
+      <p:grpSpPr>
+        <a:xfrm>
+          <a:off x="0" y="0"/>
+          <a:ext cx="0" cy="0"/>
+          <a:chOff x="0" y="0"/>
+          <a:chExt cx="0" cy="0"/>
+        </a:xfrm>
+      </p:grpSpPr>
+      <p:sp>
+        <p:nvSpPr>
+          <p:cNvPr id="8" name="제목 7">
+            <a:extLst>
+              <a:ext uri="{FF2B5EF4-FFF2-40B4-BE49-F238E27FC236}">
+                <a16:creationId xmlns:a16="http://schemas.microsoft.com/office/drawing/2014/main" id="{1E988F8A-FE25-3C03-8392-4987A049C311}"/>
+              </a:ext>
+            </a:extLst>
+          </p:cNvPr>
+          <p:cNvSpPr>
+            <a:spLocks noGrp="1"/>
+          </p:cNvSpPr>
+          <p:nvPr>
+            <p:ph type="title"/>
+          </p:nvPr>
+        </p:nvSpPr>
+        <p:spPr/>
+        <p:txBody>
+          <a:bodyPr/>
+          <a:lstStyle/>
+          <a:p>
+            <a:endParaRPr lang="ko-KR" altLang="en-US"/>
+          </a:p>
+        </p:txBody>
+      </p:sp>
+      <p:sp>
+        <p:nvSpPr>
+          <p:cNvPr id="9" name="내용 개체 틀 8">
+            <a:extLst>
+              <a:ext uri="{FF2B5EF4-FFF2-40B4-BE49-F238E27FC236}">
+                <a16:creationId xmlns:a16="http://schemas.microsoft.com/office/drawing/2014/main" id="{B78FFE0F-21C3-0093-CCB8-BF2601786324}"/>
+              </a:ext>
+            </a:extLst>
+          </p:cNvPr>
+          <p:cNvSpPr>
+            <a:spLocks noGrp="1"/>
+          </p:cNvSpPr>
+          <p:nvPr>
+            <p:ph idx="1"/>
+          </p:nvPr>
+        </p:nvSpPr>
+        <p:spPr>
+          <a:xfrm>
+            <a:off x="838200" y="856891"/>
+            <a:ext cx="10515600" cy="5320072"/>
+          </a:xfrm>
+        </p:spPr>
+        <p:txBody>
+          <a:bodyPr numCol="2">
+            <a:normAutofit/>
+          </a:bodyPr>
+          <a:lstStyle/>
+          <a:p>
+            <a:pPr marL="0" indent="0">
+              <a:lnSpc>
+                <a:spcPct val="120000"/>
+              </a:lnSpc>
+              <a:buNone/>
+            </a:pPr>
+            <a:r>
+              <a:rPr lang="ko-KR" altLang="en-US" dirty="0"/>
+              <a:t>데이터 항목 </a:t>
+            </a:r>
+            <a:r>
+              <a:rPr lang="en-US" altLang="ko-KR" dirty="0"/>
+              <a:t>: </a:t>
+            </a:r>
+            <a:r>
+              <a:rPr lang="ko-KR" altLang="en-US" dirty="0"/>
+              <a:t>캐릭터크기 </a:t>
+            </a:r>
+            <a:r>
+              <a:rPr lang="en-US" altLang="ko-KR" dirty="0"/>
+              <a:t>: 1m(2:1</a:t>
+            </a:r>
+            <a:r>
+              <a:rPr lang="ko-KR" altLang="en-US" dirty="0"/>
+              <a:t>비율</a:t>
+            </a:r>
+            <a:r>
+              <a:rPr lang="en-US" altLang="ko-KR" dirty="0"/>
+              <a:t>) , </a:t>
+            </a:r>
+            <a:r>
+              <a:rPr lang="ko-KR" altLang="en-US" dirty="0"/>
+              <a:t>무기</a:t>
+            </a:r>
+            <a:r>
+              <a:rPr lang="en-US" altLang="ko-KR" dirty="0"/>
+              <a:t>, </a:t>
+            </a:r>
+            <a:r>
+              <a:rPr lang="ko-KR" altLang="en-US" dirty="0"/>
+              <a:t>총탄의 종류</a:t>
+            </a:r>
+            <a:r>
+              <a:rPr lang="en-US" altLang="ko-KR" dirty="0"/>
+              <a:t>, </a:t>
+            </a:r>
+            <a:r>
+              <a:rPr lang="ko-KR" altLang="en-US" dirty="0"/>
+              <a:t>이펙트</a:t>
+            </a:r>
+            <a:r>
+              <a:rPr lang="en-US" altLang="ko-KR" dirty="0"/>
+              <a:t>,</a:t>
+            </a:r>
+            <a:r>
+              <a:rPr lang="ko-KR" altLang="en-US" dirty="0"/>
+              <a:t> 조형물</a:t>
+            </a:r>
+            <a:r>
+              <a:rPr lang="en-US" altLang="ko-KR" dirty="0"/>
+              <a:t>_</a:t>
+            </a:r>
+            <a:r>
+              <a:rPr lang="ko-KR" altLang="en-US" dirty="0" err="1"/>
+              <a:t>나무랑</a:t>
+            </a:r>
+            <a:r>
+              <a:rPr lang="ko-KR" altLang="en-US" dirty="0"/>
+              <a:t> 돌 등등</a:t>
+            </a:r>
+            <a:r>
+              <a:rPr lang="en-US" altLang="ko-KR" dirty="0"/>
+              <a:t>, </a:t>
+            </a:r>
+            <a:r>
+              <a:rPr lang="ko-KR" altLang="en-US" dirty="0" err="1"/>
+              <a:t>맵크기</a:t>
+            </a:r>
+            <a:r>
+              <a:rPr lang="ko-KR" altLang="en-US" dirty="0"/>
+              <a:t> </a:t>
+            </a:r>
+            <a:r>
+              <a:rPr lang="en-US" altLang="ko-KR" dirty="0"/>
+              <a:t>(100,00</a:t>
+            </a:r>
+            <a:r>
+              <a:rPr lang="ko-KR" altLang="en-US" dirty="0"/>
+              <a:t>이상 고려</a:t>
+            </a:r>
+            <a:r>
+              <a:rPr lang="en-US" altLang="ko-KR" dirty="0"/>
+              <a:t>)</a:t>
+            </a:r>
+          </a:p>
+          <a:p>
+            <a:pPr marL="0" indent="0">
+              <a:lnSpc>
+                <a:spcPct val="120000"/>
+              </a:lnSpc>
+              <a:buNone/>
+            </a:pPr>
+            <a:endParaRPr lang="ko-KR" altLang="en-US" dirty="0"/>
+          </a:p>
+          <a:p>
+            <a:pPr>
+              <a:lnSpc>
+                <a:spcPct val="120000"/>
+              </a:lnSpc>
+            </a:pPr>
+            <a:r>
+              <a:rPr lang="ko-KR" altLang="en-US" dirty="0"/>
+              <a:t>세부 기획 고려사항 </a:t>
+            </a:r>
+            <a:r>
+              <a:rPr lang="en-US" altLang="ko-KR" dirty="0"/>
+              <a:t>: </a:t>
+            </a:r>
+            <a:br>
+              <a:rPr lang="en-US" altLang="ko-KR" dirty="0"/>
+            </a:br>
+            <a:r>
+              <a:rPr lang="ko-KR" altLang="en-US" dirty="0" err="1"/>
+              <a:t>타격감</a:t>
+            </a:r>
+            <a:r>
+              <a:rPr lang="en-US" altLang="ko-KR" dirty="0"/>
+              <a:t>, </a:t>
+            </a:r>
+            <a:r>
+              <a:rPr lang="ko-KR" altLang="en-US" dirty="0"/>
+              <a:t>행동 패턴 디자인</a:t>
+            </a:r>
+            <a:r>
+              <a:rPr lang="en-US" altLang="ko-KR" dirty="0"/>
+              <a:t>, </a:t>
+            </a:r>
+            <a:r>
+              <a:rPr lang="ko-KR" altLang="en-US" dirty="0"/>
+              <a:t>다양한 총 </a:t>
+            </a:r>
+            <a:r>
+              <a:rPr lang="ko-KR" altLang="en-US" dirty="0" err="1"/>
+              <a:t>파티클</a:t>
+            </a:r>
+            <a:r>
+              <a:rPr lang="en-US" altLang="ko-KR" dirty="0"/>
+              <a:t>,</a:t>
+            </a:r>
+            <a:r>
+              <a:rPr lang="ko-KR" altLang="en-US" dirty="0"/>
+              <a:t> 난이도</a:t>
+            </a:r>
+          </a:p>
+        </p:txBody>
+      </p:sp>
+      <p:sp>
+        <p:nvSpPr>
+          <p:cNvPr id="5" name="날짜 개체 틀 4">
+            <a:extLst>
+              <a:ext uri="{FF2B5EF4-FFF2-40B4-BE49-F238E27FC236}">
+                <a16:creationId xmlns:a16="http://schemas.microsoft.com/office/drawing/2014/main" id="{C0B240FF-057F-29EB-E826-B26CD6513B87}"/>
+              </a:ext>
+            </a:extLst>
+          </p:cNvPr>
+          <p:cNvSpPr>
+            <a:spLocks noGrp="1"/>
+          </p:cNvSpPr>
+          <p:nvPr>
+            <p:ph type="dt" sz="half" idx="10"/>
+          </p:nvPr>
+        </p:nvSpPr>
+        <p:spPr/>
+        <p:txBody>
+          <a:bodyPr/>
+          <a:lstStyle/>
+          <a:p>
+            <a:fld id="{492E84DF-9BBC-4DFC-AB92-EB3DF1902948}" type="datetime1">
+              <a:rPr lang="en-US" altLang="ko-KR" smtClean="0"/>
+              <a:t>9/29/2026</a:t>
+            </a:fld>
+            <a:endParaRPr lang="ko-KR" altLang="en-US"/>
+          </a:p>
+        </p:txBody>
+      </p:sp>
+      <p:sp>
+        <p:nvSpPr>
+          <p:cNvPr id="6" name="슬라이드 번호 개체 틀 5">
+            <a:extLst>
+              <a:ext uri="{FF2B5EF4-FFF2-40B4-BE49-F238E27FC236}">
+                <a16:creationId xmlns:a16="http://schemas.microsoft.com/office/drawing/2014/main" id="{9E5F7C50-00EF-30DA-610F-FA0DC56BAC86}"/>
+              </a:ext>
+            </a:extLst>
+          </p:cNvPr>
+          <p:cNvSpPr>
+            <a:spLocks noGrp="1"/>
+          </p:cNvSpPr>
+          <p:nvPr>
+            <p:ph type="sldNum" sz="quarter" idx="12"/>
+          </p:nvPr>
+        </p:nvSpPr>
+        <p:spPr/>
+        <p:txBody>
+          <a:bodyPr/>
+          <a:lstStyle/>
+          <a:p>
+            <a:fld id="{4419BE51-E1DC-4D7D-A982-2D579B035180}" type="slidenum">
+              <a:rPr lang="ko-KR" altLang="en-US" smtClean="0"/>
+              <a:t>32</a:t>
+            </a:fld>
+            <a:endParaRPr lang="ko-KR" altLang="en-US"/>
+          </a:p>
+        </p:txBody>
+      </p:sp>
+      <p:sp>
+        <p:nvSpPr>
+          <p:cNvPr id="10" name="내용 개체 틀 9">
+            <a:extLst>
+              <a:ext uri="{FF2B5EF4-FFF2-40B4-BE49-F238E27FC236}">
+                <a16:creationId xmlns:a16="http://schemas.microsoft.com/office/drawing/2014/main" id="{E74CC034-212F-BECC-4AEE-010BDB4F2941}"/>
+              </a:ext>
+            </a:extLst>
+          </p:cNvPr>
+          <p:cNvSpPr>
+            <a:spLocks noGrp="1"/>
+          </p:cNvSpPr>
+          <p:nvPr>
+            <p:ph sz="quarter" idx="13"/>
+          </p:nvPr>
+        </p:nvSpPr>
+        <p:spPr/>
+        <p:txBody>
+          <a:bodyPr/>
+          <a:lstStyle/>
+          <a:p>
+            <a:endParaRPr lang="ko-KR" altLang="en-US"/>
+          </a:p>
+        </p:txBody>
+      </p:sp>
+    </p:spTree>
+    <p:extLst>
+      <p:ext uri="{BB962C8B-B14F-4D97-AF65-F5344CB8AC3E}">
+        <p14:creationId xmlns:p14="http://schemas.microsoft.com/office/powerpoint/2010/main" val="2543360782"/>
+      </p:ext>
+    </p:extLst>
+  </p:cSld>
+  <p:clrMapOvr>
+    <a:masterClrMapping/>
+  </p:clrMapOvr>
+</p:sld>
+</file>
+
 <file path=ppt/slides/slide4.xml><?xml version="1.0" encoding="utf-8"?>
 <p:sld xmlns:a="http://schemas.openxmlformats.org/drawingml/2006/main" xmlns:r="http://schemas.openxmlformats.org/officeDocument/2006/relationships" xmlns:p="http://schemas.openxmlformats.org/presentationml/2006/main">
   <p:cSld>
@@ -40127,7 +41568,7 @@
           <a:p>
             <a:fld id="{492E84DF-9BBC-4DFC-AB92-EB3DF1902948}" type="datetime1">
               <a:rPr lang="en-US" altLang="ko-KR" smtClean="0"/>
-              <a:t>9/26/2026</a:t>
+              <a:t>9/29/2026</a:t>
             </a:fld>
             <a:endParaRPr lang="ko-KR" altLang="en-US"/>
           </a:p>
@@ -40463,7 +41904,7 @@
           <a:p>
             <a:fld id="{492E84DF-9BBC-4DFC-AB92-EB3DF1902948}" type="datetime1">
               <a:rPr lang="en-US" altLang="ko-KR" smtClean="0"/>
-              <a:t>9/26/2026</a:t>
+              <a:t>9/29/2026</a:t>
             </a:fld>
             <a:endParaRPr lang="ko-KR" altLang="en-US"/>
           </a:p>
@@ -41643,7 +43084,7 @@
           <a:p>
             <a:fld id="{492E84DF-9BBC-4DFC-AB92-EB3DF1902948}" type="datetime1">
               <a:rPr lang="en-US" altLang="ko-KR" smtClean="0"/>
-              <a:t>9/26/2026</a:t>
+              <a:t>9/29/2026</a:t>
             </a:fld>
             <a:endParaRPr lang="ko-KR" altLang="en-US"/>
           </a:p>
